--- a/downloads/presentations/modules/arc-300.pptx
+++ b/downloads/presentations/modules/arc-300.pptx
@@ -615,7 +615,8 @@
               <a:t>Technical Deep Dive
 A RAG system begins with content selection. Agencies should decide which documents are authoritative, current, approved for the use case, and appropriate for the intended users. Content inventories should include owner, version, effective date, review date, sensitivity level, and access rules. Without this foundation, retrieval can surface obsolete or unauthorized material.
 Document processing affects retrieval quality. Files may need to be converted, cleaned, segmented, and indexed. Chunking decisions matter because overly small chunks may omit context while overly large chunks may retrieve irrelevant material. Tables, figures, scanned PDFs, forms, and appendices may require special handling. Public health documents often contain complex context, such as exceptions, legal caveats, and jurisdiction-specific rules.
-Embeddings and vector search help identify semantically similar content, but retrieval should be tested. Staff should use realistic questions and evaluate whether the system retrieves the best sources. Testing should include synonyms, acronyms, misspellings, role-specific questions, edge cases, and questions that should produce “not found” or escalation responses.</a:t>
+Embeddings and vector search help identify semantically similar content, but retrieval should be tested. Staff should use realistic questions and evaluate whether the system retrieves the best sources. Testing should include synonyms, acronyms, misspellings, role-specific questions, edge cases, and questions that should produce “not found” or escalation responses.
+Application guidance: Use the assignment to test whether you can explain the concept, apply it to a realistic public health situation, and identify what would need review before the work moves forward.</a:t>
             </a:r>
             <a:endParaRPr lang="en-US" dirty="0"/>
           </a:p>
@@ -705,7 +706,8 @@
               <a:rPr lang="en-US" dirty="0"/>
               <a:t>Technical Deep Dive
 Generation should be constrained by retrieved material. The system should be instructed to answer from sources, cite them, identify uncertainty, and avoid unsupported claims. It should also explain when guidance conflicts or when source material is insufficient. Users should be able to open the cited source and verify key statements.
-Monitoring should include retrieval failures, unsupported answers, stale content, user feedback, access-control incidents, and frequently asked questions. Content governance should define how documents are added, removed, updated, archived, and re-indexed.</a:t>
+Monitoring should include retrieval failures, unsupported answers, stale content, user feedback, access-control incidents, and frequently asked questions. Content governance should define how documents are added, removed, updated, archived, and re-indexed.
+Application guidance: Use the assignment to test whether you can explain the concept, apply it to a realistic public health situation, and identify what would need review before the work moves forward.</a:t>
             </a:r>
             <a:endParaRPr lang="en-US" dirty="0"/>
           </a:p>
@@ -796,7 +798,8 @@
               <a:t>Risks, Failure Modes, and Guardrails
 Stale or conflicting content. Outdated or inconsistent documents can produce wrong answers. Guardrails include content ownership, version control, review dates, and archival rules.
 Permission leakage. RAG may retrieve content a user should not see. Guardrails include role-based access, document-level permissions, and audit logs.
-Poor retrieval. The system may retrieve irrelevant or incomplete chunks. Guardrails include test question sets, retrieval evaluation, chunking review, and user feedback.</a:t>
+Poor retrieval. The system may retrieve irrelevant or incomplete chunks. Guardrails include test question sets, retrieval evaluation, chunking review, and user feedback.
+Application guidance: Use the assignment to test whether you can explain the concept, apply it to a realistic public health situation, and identify what would need review before the work moves forward.</a:t>
             </a:r>
             <a:endParaRPr lang="en-US" dirty="0"/>
           </a:p>
@@ -885,7 +888,8 @@
             <a:r>
               <a:rPr lang="en-US" dirty="0"/>
               <a:t>Risks, Failure Modes, and Guardrails
-Unsupported generation. The model may add claims beyond retrieved sources. Guardrails include source-only instructions, citation requirements, and reviewer verification.</a:t>
+Unsupported generation. The model may add claims beyond retrieved sources. Guardrails include source-only instructions, citation requirements, and reviewer verification.
+Application guidance: Use the assignment to test whether you can explain the concept, apply it to a realistic public health situation, and identify what would need review before the work moves forward.</a:t>
             </a:r>
             <a:endParaRPr lang="en-US" dirty="0"/>
           </a:p>
@@ -975,7 +979,8 @@
               <a:rPr lang="en-US" dirty="0"/>
               <a:t>Application to AI-Supported Workflows
 RAG supports generative AI by grounding outputs in defined sources. It may be used in chat assistants, training tools, policy support, emergency operations, procurement review, and program knowledge bases. It can also support agentic workflows by giving agents access to approved guidance, but actions based on retrieved content require additional guardrails.
-Public health RAG systems should be built around trust. Users should know what content is included, what is excluded, how current it is, whether they have permission to use it, and when they must verify or escalate.</a:t>
+Public health RAG systems should be built around trust. Users should know what content is included, what is excluded, how current it is, whether they have permission to use it, and when they must verify or escalate.
+Application guidance: Use the assignment to test whether you can explain the concept, apply it to a realistic public health situation, and identify what would need review before the work moves forward.</a:t>
             </a:r>
             <a:endParaRPr lang="en-US" dirty="0"/>
           </a:p>
@@ -1066,7 +1071,8 @@
               <a:t>Reflection Questions
 What content collection would the RAG system use?
 Who owns and updates each source document?
-How will access permissions be enforced?</a:t>
+How will access permissions be enforced?
+Application guidance: Use the assignment to test whether you can explain the concept, apply it to a realistic public health situation, and identify what would need review before the work moves forward.</a:t>
             </a:r>
             <a:endParaRPr lang="en-US" dirty="0"/>
           </a:p>
@@ -1156,7 +1162,8 @@
               <a:rPr lang="en-US" dirty="0"/>
               <a:t>Reflection Questions
 How will retrieval quality and citation accuracy be tested?
-What should the system do when sources are missing, outdated, or conflicting?</a:t>
+What should the system do when sources are missing, outdated, or conflicting?
+Application guidance: Use the assignment to test whether you can explain the concept, apply it to a realistic public health situation, and identify what would need review before the work moves forward.</a:t>
             </a:r>
             <a:endParaRPr lang="en-US" dirty="0"/>
           </a:p>
@@ -1246,7 +1253,8 @@
               <a:rPr lang="en-US" dirty="0"/>
               <a:t>Practical Exercise
 Create a RAG readiness checklist for one public health knowledge workflow. Include content inventory, source authority, document owners, update schedule, sensitivity level, access controls, chunking concerns, retrieval test questions, citation requirements, user review expectations, and monitoring indicators.
-The checklist should identify at least three “do not answer” or escalation situations, such as missing guidance, conflicting sources, or questions outside approved scope.</a:t>
+The checklist should identify at least three “do not answer” or escalation situations, such as missing guidance, conflicting sources, or questions outside approved scope.
+Application guidance: Use the assignment to test whether you can explain the concept, apply it to a realistic public health situation, and identify what would need review before the work moves forward.</a:t>
             </a:r>
             <a:endParaRPr lang="en-US" dirty="0"/>
           </a:p>
@@ -1337,7 +1345,8 @@
               <a:t>Expected Artifact or Evidence
 RAG readiness checklist
 Content inventory and ownership table
-Retrieval test question set</a:t>
+Retrieval test question set
+Application guidance: Use the assignment to test whether you can explain the concept, apply it to a realistic public health situation, and identify what would need review before the work moves forward.</a:t>
             </a:r>
             <a:endParaRPr lang="en-US" dirty="0"/>
           </a:p>
@@ -1426,7 +1435,8 @@
             <a:r>
               <a:rPr lang="en-US" dirty="0"/>
               <a:t>Expected Artifact or Evidence
-Citation and source verification protocol</a:t>
+Citation and source verification protocol
+Application guidance: Use the assignment to test whether you can explain the concept, apply it to a realistic public health situation, and identify what would need review before the work moves forward.</a:t>
             </a:r>
             <a:endParaRPr lang="en-US" dirty="0"/>
           </a:p>
@@ -1610,7 +1620,8 @@
 RAG readiness checklist
 Content inventory and ownership table
 Retrieval test question set
-Citation and source verification protocol</a:t>
+Citation and source verification protocol
+Application guidance: Use the assignment to test whether you can explain the concept, apply it to a realistic public health situation, and identify what would need review before the work moves forward.</a:t>
             </a:r>
             <a:endParaRPr lang="en-US" dirty="0"/>
           </a:p>
@@ -1703,7 +1714,8 @@
 2. Why does chunking matter?
 3. What is a major RAG governance risk?
 4. What should a RAG system do when sources are insufficient?
-5. What is strong completion evidence for this module?</a:t>
+5. What is strong completion evidence for this module?
+Application guidance: Use the assignment to test whether you can explain the concept, apply it to a realistic public health situation, and identify what would need review before the work moves forward.</a:t>
             </a:r>
             <a:endParaRPr lang="en-US" dirty="0"/>
           </a:p>
@@ -1795,7 +1807,8 @@
 NIST AI RMF Generative AI Profile: https://www.nist.gov/publications/artificial-intelligence-risk-management-framework-generative-artificial-intelligence
 OWASP Top 10 for Large Language Model Applications: https://owasp.org/www-project-top-10-for-large-language-model-applications/
 NIST Artificial Intelligence Risk Management Framework: https://www.nist.gov/itl/ai-risk-management-framework
-ONC USCDI: https://isp.healthit.gov/united-states-core-data-interoperability-uscdi</a:t>
+ONC USCDI: https://isp.healthit.gov/united-states-core-data-interoperability-uscdi
+Application guidance: Use the assignment to test whether you can explain the concept, apply it to a realistic public health situation, and identify what would need review before the work moves forward.</a:t>
             </a:r>
             <a:endParaRPr lang="en-US" dirty="0"/>
           </a:p>
@@ -2074,7 +2087,8 @@
 Describe the major components of a RAG system, including document ingestion, chunking, embeddings, vector search, retrieval, generation, and citation.
 Identify public health use cases where RAG may improve knowledge work.
 Assess risks related to stale content, access control, retrieval quality, hallucination, and source misuse.
-Design governance and monitoring requirements for agency RAG systems.</a:t>
+Design governance and monitoring requirements for agency RAG systems.
+Application guidance: Use the assignment to test whether you can explain the concept, apply it to a realistic public health situation, and identify what would need review before the work moves forward.</a:t>
             </a:r>
             <a:endParaRPr lang="en-US" dirty="0"/>
           </a:p>
@@ -2163,7 +2177,8 @@
             <a:r>
               <a:rPr lang="en-US" dirty="0"/>
               <a:t>Learning Objectives
-Produce a RAG readiness checklist for a public health knowledge workflow.</a:t>
+Produce a RAG readiness checklist for a public health knowledge workflow.
+Application guidance: Use the assignment to test whether you can explain the concept, apply it to a realistic public health situation, and identify what would need review before the work moves forward.</a:t>
             </a:r>
             <a:endParaRPr lang="en-US" dirty="0"/>
           </a:p>
@@ -2254,7 +2269,8 @@
               <a:t>Module Overview
 Retrieval-augmented generation, often called RAG, combines generative AI with retrieval from a defined set of documents or data sources. Instead of relying only on a model’s general training, a RAG system searches approved content and uses retrieved material to generate an answer or summary. In public health, RAG may support policy lookup, protocol interpretation, internal help desks, training support, grant review, emergency response, or program knowledge management.
 RAG can make generative AI more useful and safer when it is designed well. It can ground responses in agency documents, cite sources, and reduce the risk of unsupported answers. However, RAG does not automatically solve hallucination, privacy, access control, outdated guidance, conflicting documents, or poor retrieval. The system is only as reliable as the content collection, search process, permissions, and review workflow.
-This module teaches learners the core components of RAG and how to evaluate whether a RAG tool is ready for public health use.</a:t>
+This module teaches learners the core components of RAG and how to evaluate whether a RAG tool is ready for public health use.
+Application guidance: Use the assignment to test whether you can explain the concept, apply it to a realistic public health situation, and identify what would need review before the work moves forward.</a:t>
             </a:r>
             <a:endParaRPr lang="en-US" dirty="0"/>
           </a:p>
@@ -2345,7 +2361,8 @@
               <a:t>Why This Topic Matters for Public Health AI
 RAG matters because public health agencies manage large collections of guidance, protocols, policies, contracts, plans, reports, forms, FAQs, and training materials. Staff may spend substantial time searching for answers across shared drives, websites, portals, and outdated files. A well-designed RAG system can help users find relevant guidance and produce concise, source-linked answers.
 The public health value of RAG depends on governance. If a RAG tool includes outdated guidance, draft policies, documents outside a user’s permission level, or conflicting versions, it may generate misleading answers. If it fails to retrieve the most relevant source, the generated answer may be incomplete or wrong. RAG improves the grounding problem only when the content collection and retrieval process are managed carefully.
-RAG is especially important for responsible AI because it offers a middle path between generic public AI tools and fully custom systems. Agencies can build assistants around approved content, but they must define content ownership, update schedules, access rules, citation requirements, testing, monitoring, and user responsibilities.</a:t>
+RAG is especially important for responsible AI because it offers a middle path between generic public AI tools and fully custom systems. Agencies can build assistants around approved content, but they must define content ownership, update schedules, access rules, citation requirements, testing, monitoring, and user responsibilities.
+Application guidance: Use the assignment to test whether you can explain the concept, apply it to a realistic public health situation, and identify what would need review before the work moves forward.</a:t>
             </a:r>
             <a:endParaRPr lang="en-US" dirty="0"/>
           </a:p>
@@ -2435,7 +2452,8 @@
               <a:rPr lang="en-US" dirty="0"/>
               <a:t>Public Health Example
 A state health department may create an internal RAG assistant to help staff find current infectious disease investigation protocols. The assistant could search approved protocols, case definitions, reporting rules, and escalation procedures. When a user asks what steps to take for a suspected condition, the system could summarize relevant guidance and cite the source documents.
-This workflow requires strong controls. The assistant must include only current approved guidance, respect role-based access, cite sources, and warn users when content is outdated or missing. Staff should verify the cited protocol before acting, especially when the situation is unusual or high risk.</a:t>
+This workflow requires strong controls. The assistant must include only current approved guidance, respect role-based access, cite sources, and warn users when content is outdated or missing. Staff should verify the cited protocol before acting, especially when the situation is unusual or high risk.
+Application guidance: Use the assignment to test whether you can explain the concept, apply it to a realistic public health situation, and identify what would need review before the work moves forward.</a:t>
             </a:r>
             <a:endParaRPr lang="en-US" dirty="0"/>
           </a:p>
@@ -3206,8 +3224,8 @@
         </p:nvSpPr>
         <p:spPr>
           <a:xfrm>
-            <a:off x="9966960" y="6537960"/>
-            <a:ext cx="1645920" cy="201168"/>
+            <a:off x="9646920" y="6537960"/>
+            <a:ext cx="1965960" cy="201168"/>
           </a:xfrm>
           <a:prstGeom prst="rect">
             <a:avLst/>
@@ -3231,7 +3249,7 @@
                 <a:ea typeface="Aptos" pitchFamily="34" charset="-122"/>
                 <a:cs typeface="Aptos" pitchFamily="34" charset="-120"/>
               </a:rPr>
-              <a:t>Â© Paula Soper</a:t>
+              <a:t>Copyright Paula Soper</a:t>
             </a:r>
             <a:endParaRPr lang="en-US" sz="800" dirty="0"/>
           </a:p>
@@ -3278,77 +3296,13 @@
       </p:sp>
       <p:sp>
         <p:nvSpPr>
-          <p:cNvPr id="8" name="Shape 6"/>
+          <p:cNvPr id="8" name="Text 6"/>
           <p:cNvSpPr/>
           <p:nvPr/>
         </p:nvSpPr>
         <p:spPr>
           <a:xfrm>
             <a:off x="640080" y="658368"/>
-            <a:ext cx="420624" cy="420624"/>
-          </a:xfrm>
-          <a:prstGeom prst="ellipse">
-            <a:avLst/>
-          </a:prstGeom>
-          <a:solidFill>
-            <a:srgbClr val="0068B7"/>
-          </a:solidFill>
-          <a:ln w="12700">
-            <a:solidFill>
-              <a:srgbClr val="0068B7"/>
-            </a:solidFill>
-            <a:prstDash val="solid"/>
-          </a:ln>
-        </p:spPr>
-      </p:sp>
-      <p:sp>
-        <p:nvSpPr>
-          <p:cNvPr id="9" name="Text 7"/>
-          <p:cNvSpPr/>
-          <p:nvPr/>
-        </p:nvSpPr>
-        <p:spPr>
-          <a:xfrm>
-            <a:off x="640080" y="731520"/>
-            <a:ext cx="420624" cy="164592"/>
-          </a:xfrm>
-          <a:prstGeom prst="rect">
-            <a:avLst/>
-          </a:prstGeom>
-          <a:noFill/>
-          <a:ln/>
-        </p:spPr>
-        <p:txBody>
-          <a:bodyPr wrap="square" lIns="0" tIns="0" rIns="0" bIns="0" rtlCol="0" anchor="ctr"/>
-          <a:lstStyle/>
-          <a:p>
-            <a:pPr algn="ctr" indent="0" marL="0">
-              <a:buNone/>
-            </a:pPr>
-            <a:r>
-              <a:rPr lang="en-US" sz="1100" b="1" dirty="0">
-                <a:solidFill>
-                  <a:srgbClr val="FFFFFF"/>
-                </a:solidFill>
-                <a:latin typeface="Aptos" pitchFamily="34" charset="0"/>
-                <a:ea typeface="Aptos" pitchFamily="34" charset="-122"/>
-                <a:cs typeface="Aptos" pitchFamily="34" charset="-120"/>
-              </a:rPr>
-              <a:t>5</a:t>
-            </a:r>
-            <a:endParaRPr lang="en-US" sz="1100" dirty="0"/>
-          </a:p>
-        </p:txBody>
-      </p:sp>
-      <p:sp>
-        <p:nvSpPr>
-          <p:cNvPr id="10" name="Text 8"/>
-          <p:cNvSpPr/>
-          <p:nvPr/>
-        </p:nvSpPr>
-        <p:spPr>
-          <a:xfrm>
-            <a:off x="640080" y="621792"/>
             <a:ext cx="10881360" cy="713232"/>
           </a:xfrm>
           <a:prstGeom prst="rect">
@@ -3383,14 +3337,14 @@
       </p:sp>
       <p:sp>
         <p:nvSpPr>
-          <p:cNvPr id="11" name="Text 9"/>
+          <p:cNvPr id="9" name="Text 7"/>
           <p:cNvSpPr/>
           <p:nvPr/>
         </p:nvSpPr>
         <p:spPr>
           <a:xfrm>
             <a:off x="868680" y="1508760"/>
-            <a:ext cx="6537960" cy="4160520"/>
+            <a:ext cx="6309360" cy="4160520"/>
           </a:xfrm>
           <a:prstGeom prst="rect">
             <a:avLst/>
@@ -3449,18 +3403,18 @@
       </p:sp>
       <p:sp>
         <p:nvSpPr>
-          <p:cNvPr id="12" name="Shape 10"/>
-          <p:cNvSpPr/>
-          <p:nvPr/>
-        </p:nvSpPr>
-        <p:spPr>
-          <a:xfrm>
-            <a:off x="7909560" y="1417320"/>
-            <a:ext cx="3154680" cy="1828800"/>
+          <p:cNvPr id="10" name="Shape 8"/>
+          <p:cNvSpPr/>
+          <p:nvPr/>
+        </p:nvSpPr>
+        <p:spPr>
+          <a:xfrm>
+            <a:off x="7635240" y="1325880"/>
+            <a:ext cx="3474720" cy="1325880"/>
           </a:xfrm>
           <a:prstGeom prst="roundRect">
             <a:avLst>
-              <a:gd name="adj" fmla="val 6000"/>
+              <a:gd name="adj" fmla="val 8276"/>
             </a:avLst>
           </a:prstGeom>
           <a:solidFill>
@@ -3476,14 +3430,14 @@
       </p:sp>
       <p:sp>
         <p:nvSpPr>
-          <p:cNvPr id="13" name="Text 11"/>
-          <p:cNvSpPr/>
-          <p:nvPr/>
-        </p:nvSpPr>
-        <p:spPr>
-          <a:xfrm>
-            <a:off x="8074152" y="1563624"/>
-            <a:ext cx="2825496" cy="256032"/>
+          <p:cNvPr id="11" name="Text 9"/>
+          <p:cNvSpPr/>
+          <p:nvPr/>
+        </p:nvSpPr>
+        <p:spPr>
+          <a:xfrm>
+            <a:off x="7799832" y="1472184"/>
+            <a:ext cx="3145536" cy="256032"/>
           </a:xfrm>
           <a:prstGeom prst="rect">
             <a:avLst/>
@@ -3507,7 +3461,7 @@
                 <a:ea typeface="Aptos" pitchFamily="34" charset="-122"/>
                 <a:cs typeface="Aptos" pitchFamily="34" charset="-120"/>
               </a:rPr>
-              <a:t>Key idea</a:t>
+              <a:t>Practice focus</a:t>
             </a:r>
             <a:endParaRPr lang="en-US" sz="1300" dirty="0"/>
           </a:p>
@@ -3515,14 +3469,14 @@
       </p:sp>
       <p:sp>
         <p:nvSpPr>
-          <p:cNvPr id="14" name="Text 12"/>
-          <p:cNvSpPr/>
-          <p:nvPr/>
-        </p:nvSpPr>
-        <p:spPr>
-          <a:xfrm>
-            <a:off x="8074152" y="1920240"/>
-            <a:ext cx="2825496" cy="1188720"/>
+          <p:cNvPr id="12" name="Text 10"/>
+          <p:cNvSpPr/>
+          <p:nvPr/>
+        </p:nvSpPr>
+        <p:spPr>
+          <a:xfrm>
+            <a:off x="7799832" y="1828800"/>
+            <a:ext cx="3145536" cy="685800"/>
           </a:xfrm>
           <a:prstGeom prst="rect">
             <a:avLst/>
@@ -3556,18 +3510,159 @@
       </p:sp>
       <p:sp>
         <p:nvSpPr>
-          <p:cNvPr id="15" name="Shape 13"/>
-          <p:cNvSpPr/>
-          <p:nvPr/>
-        </p:nvSpPr>
-        <p:spPr>
-          <a:xfrm>
-            <a:off x="7909560" y="3520440"/>
-            <a:ext cx="3154680" cy="1737360"/>
+          <p:cNvPr id="13" name="Shape 11"/>
+          <p:cNvSpPr/>
+          <p:nvPr/>
+        </p:nvSpPr>
+        <p:spPr>
+          <a:xfrm>
+            <a:off x="7635240" y="2788920"/>
+            <a:ext cx="3474720" cy="1536192"/>
           </a:xfrm>
           <a:prstGeom prst="roundRect">
             <a:avLst>
-              <a:gd name="adj" fmla="val 6316"/>
+              <a:gd name="adj" fmla="val 7143"/>
+            </a:avLst>
+          </a:prstGeom>
+          <a:solidFill>
+            <a:srgbClr val="FFFFFF">
+              <a:alpha val="88000"/>
+            </a:srgbClr>
+          </a:solidFill>
+          <a:ln w="12700">
+            <a:solidFill>
+              <a:srgbClr val="D6E8F2"/>
+            </a:solidFill>
+            <a:prstDash val="solid"/>
+          </a:ln>
+        </p:spPr>
+      </p:sp>
+      <p:sp>
+        <p:nvSpPr>
+          <p:cNvPr id="14" name="Shape 12"/>
+          <p:cNvSpPr/>
+          <p:nvPr/>
+        </p:nvSpPr>
+        <p:spPr>
+          <a:xfrm>
+            <a:off x="8074152" y="3291840"/>
+            <a:ext cx="2596896" cy="749808"/>
+          </a:xfrm>
+          <a:prstGeom prst="rect">
+            <a:avLst/>
+          </a:prstGeom>
+          <a:solidFill>
+            <a:srgbClr val="EAF6F8"/>
+          </a:solidFill>
+          <a:ln w="12700">
+            <a:solidFill>
+              <a:srgbClr val="8ABBD8"/>
+            </a:solidFill>
+            <a:prstDash val="solid"/>
+          </a:ln>
+        </p:spPr>
+      </p:sp>
+      <p:sp>
+        <p:nvSpPr>
+          <p:cNvPr id="15" name="Shape 13"/>
+          <p:cNvSpPr/>
+          <p:nvPr/>
+        </p:nvSpPr>
+        <p:spPr>
+          <a:xfrm>
+            <a:off x="8202168" y="3721608"/>
+            <a:ext cx="2340864" cy="0"/>
+          </a:xfrm>
+          <a:prstGeom prst="line">
+            <a:avLst/>
+          </a:prstGeom>
+          <a:noFill/>
+          <a:ln w="19050">
+            <a:solidFill>
+              <a:srgbClr val="0068B7"/>
+            </a:solidFill>
+            <a:prstDash val="solid"/>
+          </a:ln>
+        </p:spPr>
+      </p:sp>
+      <p:sp>
+        <p:nvSpPr>
+          <p:cNvPr id="16" name="Shape 14"/>
+          <p:cNvSpPr/>
+          <p:nvPr/>
+        </p:nvSpPr>
+        <p:spPr>
+          <a:xfrm>
+            <a:off x="9198864" y="4206240"/>
+            <a:ext cx="347472" cy="347472"/>
+          </a:xfrm>
+          <a:prstGeom prst="ellipse">
+            <a:avLst/>
+          </a:prstGeom>
+          <a:solidFill>
+            <a:srgbClr val="2F8A28"/>
+          </a:solidFill>
+          <a:ln w="12700">
+            <a:solidFill>
+              <a:srgbClr val="2F8A28"/>
+            </a:solidFill>
+            <a:prstDash val="solid"/>
+          </a:ln>
+        </p:spPr>
+      </p:sp>
+      <p:sp>
+        <p:nvSpPr>
+          <p:cNvPr id="17" name="Text 15"/>
+          <p:cNvSpPr/>
+          <p:nvPr/>
+        </p:nvSpPr>
+        <p:spPr>
+          <a:xfrm>
+            <a:off x="7909560" y="3977640"/>
+            <a:ext cx="2926080" cy="182880"/>
+          </a:xfrm>
+          <a:prstGeom prst="rect">
+            <a:avLst/>
+          </a:prstGeom>
+          <a:noFill/>
+          <a:ln/>
+        </p:spPr>
+        <p:txBody>
+          <a:bodyPr wrap="square" lIns="0" tIns="0" rIns="0" bIns="0" rtlCol="0" anchor="ctr"/>
+          <a:lstStyle/>
+          <a:p>
+            <a:pPr algn="ctr" indent="0" marL="0">
+              <a:buNone/>
+            </a:pPr>
+            <a:r>
+              <a:rPr lang="en-US" sz="1000" dirty="0">
+                <a:solidFill>
+                  <a:srgbClr val="003A63"/>
+                </a:solidFill>
+                <a:latin typeface="Aptos" pitchFamily="34" charset="0"/>
+                <a:ea typeface="Aptos" pitchFamily="34" charset="-122"/>
+                <a:cs typeface="Aptos" pitchFamily="34" charset="-120"/>
+              </a:rPr>
+              <a:t>Concept to action</a:t>
+            </a:r>
+            <a:endParaRPr lang="en-US" sz="1000" dirty="0"/>
+          </a:p>
+        </p:txBody>
+      </p:sp>
+      <p:sp>
+        <p:nvSpPr>
+          <p:cNvPr id="18" name="Shape 16"/>
+          <p:cNvSpPr/>
+          <p:nvPr/>
+        </p:nvSpPr>
+        <p:spPr>
+          <a:xfrm>
+            <a:off x="7635240" y="4498848"/>
+            <a:ext cx="3474720" cy="1143000"/>
+          </a:xfrm>
+          <a:prstGeom prst="roundRect">
+            <a:avLst>
+              <a:gd name="adj" fmla="val 9600"/>
             </a:avLst>
           </a:prstGeom>
           <a:solidFill>
@@ -3583,14 +3678,14 @@
       </p:sp>
       <p:sp>
         <p:nvSpPr>
-          <p:cNvPr id="16" name="Text 14"/>
-          <p:cNvSpPr/>
-          <p:nvPr/>
-        </p:nvSpPr>
-        <p:spPr>
-          <a:xfrm>
-            <a:off x="8074152" y="3666744"/>
-            <a:ext cx="2825496" cy="256032"/>
+          <p:cNvPr id="19" name="Text 17"/>
+          <p:cNvSpPr/>
+          <p:nvPr/>
+        </p:nvSpPr>
+        <p:spPr>
+          <a:xfrm>
+            <a:off x="7799832" y="4645152"/>
+            <a:ext cx="3145536" cy="256032"/>
           </a:xfrm>
           <a:prstGeom prst="rect">
             <a:avLst/>
@@ -3614,7 +3709,7 @@
                 <a:ea typeface="Aptos" pitchFamily="34" charset="-122"/>
                 <a:cs typeface="Aptos" pitchFamily="34" charset="-120"/>
               </a:rPr>
-              <a:t>Use this for</a:t>
+              <a:t>What to produce</a:t>
             </a:r>
             <a:endParaRPr lang="en-US" sz="1300" dirty="0"/>
           </a:p>
@@ -3622,14 +3717,14 @@
       </p:sp>
       <p:sp>
         <p:nvSpPr>
-          <p:cNvPr id="17" name="Text 15"/>
-          <p:cNvSpPr/>
-          <p:nvPr/>
-        </p:nvSpPr>
-        <p:spPr>
-          <a:xfrm>
-            <a:off x="8074152" y="4023360"/>
-            <a:ext cx="2825496" cy="1097280"/>
+          <p:cNvPr id="20" name="Text 18"/>
+          <p:cNvSpPr/>
+          <p:nvPr/>
+        </p:nvSpPr>
+        <p:spPr>
+          <a:xfrm>
+            <a:off x="7799832" y="5001768"/>
+            <a:ext cx="3145536" cy="502920"/>
           </a:xfrm>
           <a:prstGeom prst="rect">
             <a:avLst/>
@@ -3655,7 +3750,7 @@
                 <a:ea typeface="Aptos" pitchFamily="34" charset="-122"/>
                 <a:cs typeface="Aptos" pitchFamily="34" charset="-120"/>
               </a:rPr>
-              <a:t>Connect the concept to public health decisions, safeguards, documentation, or implementation work.</a:t>
+              <a:t>Use the assignment to test whether you can explain the concept, apply it to a realistic public health situation, and identify what would need review before the work moves forward.</a:t>
             </a:r>
             <a:endParaRPr lang="en-US" sz="1550" dirty="0"/>
           </a:p>
@@ -3829,8 +3924,8 @@
         </p:nvSpPr>
         <p:spPr>
           <a:xfrm>
-            <a:off x="9966960" y="6537960"/>
-            <a:ext cx="1645920" cy="201168"/>
+            <a:off x="9646920" y="6537960"/>
+            <a:ext cx="1965960" cy="201168"/>
           </a:xfrm>
           <a:prstGeom prst="rect">
             <a:avLst/>
@@ -3854,7 +3949,7 @@
                 <a:ea typeface="Aptos" pitchFamily="34" charset="-122"/>
                 <a:cs typeface="Aptos" pitchFamily="34" charset="-120"/>
               </a:rPr>
-              <a:t>Â© Paula Soper</a:t>
+              <a:t>Copyright Paula Soper</a:t>
             </a:r>
             <a:endParaRPr lang="en-US" sz="800" dirty="0"/>
           </a:p>
@@ -3949,7 +4044,7 @@
         <p:spPr>
           <a:xfrm>
             <a:off x="868680" y="1508760"/>
-            <a:ext cx="6537960" cy="4160520"/>
+            <a:ext cx="6309360" cy="4160520"/>
           </a:xfrm>
           <a:prstGeom prst="rect">
             <a:avLst/>
@@ -4014,12 +4109,12 @@
         </p:nvSpPr>
         <p:spPr>
           <a:xfrm>
-            <a:off x="7909560" y="1417320"/>
-            <a:ext cx="3154680" cy="1828800"/>
+            <a:off x="7635240" y="1325880"/>
+            <a:ext cx="3474720" cy="1325880"/>
           </a:xfrm>
           <a:prstGeom prst="roundRect">
             <a:avLst>
-              <a:gd name="adj" fmla="val 6000"/>
+              <a:gd name="adj" fmla="val 8276"/>
             </a:avLst>
           </a:prstGeom>
           <a:solidFill>
@@ -4041,8 +4136,8 @@
         </p:nvSpPr>
         <p:spPr>
           <a:xfrm>
-            <a:off x="8074152" y="1563624"/>
-            <a:ext cx="2825496" cy="256032"/>
+            <a:off x="7799832" y="1472184"/>
+            <a:ext cx="3145536" cy="256032"/>
           </a:xfrm>
           <a:prstGeom prst="rect">
             <a:avLst/>
@@ -4066,7 +4161,7 @@
                 <a:ea typeface="Aptos" pitchFamily="34" charset="-122"/>
                 <a:cs typeface="Aptos" pitchFamily="34" charset="-120"/>
               </a:rPr>
-              <a:t>Key idea</a:t>
+              <a:t>Practice focus</a:t>
             </a:r>
             <a:endParaRPr lang="en-US" sz="1300" dirty="0"/>
           </a:p>
@@ -4080,8 +4175,8 @@
         </p:nvSpPr>
         <p:spPr>
           <a:xfrm>
-            <a:off x="8074152" y="1920240"/>
-            <a:ext cx="2825496" cy="1188720"/>
+            <a:off x="7799832" y="1828800"/>
+            <a:ext cx="3145536" cy="685800"/>
           </a:xfrm>
           <a:prstGeom prst="rect">
             <a:avLst/>
@@ -4121,12 +4216,153 @@
         </p:nvSpPr>
         <p:spPr>
           <a:xfrm>
-            <a:off x="7909560" y="3520440"/>
-            <a:ext cx="3154680" cy="1737360"/>
+            <a:off x="7635240" y="2788920"/>
+            <a:ext cx="3474720" cy="1536192"/>
           </a:xfrm>
           <a:prstGeom prst="roundRect">
             <a:avLst>
-              <a:gd name="adj" fmla="val 6316"/>
+              <a:gd name="adj" fmla="val 7143"/>
+            </a:avLst>
+          </a:prstGeom>
+          <a:solidFill>
+            <a:srgbClr val="FFFFFF">
+              <a:alpha val="88000"/>
+            </a:srgbClr>
+          </a:solidFill>
+          <a:ln w="12700">
+            <a:solidFill>
+              <a:srgbClr val="D6E8F2"/>
+            </a:solidFill>
+            <a:prstDash val="solid"/>
+          </a:ln>
+        </p:spPr>
+      </p:sp>
+      <p:sp>
+        <p:nvSpPr>
+          <p:cNvPr id="14" name="Shape 12"/>
+          <p:cNvSpPr/>
+          <p:nvPr/>
+        </p:nvSpPr>
+        <p:spPr>
+          <a:xfrm>
+            <a:off x="8074152" y="3291840"/>
+            <a:ext cx="2596896" cy="749808"/>
+          </a:xfrm>
+          <a:prstGeom prst="rect">
+            <a:avLst/>
+          </a:prstGeom>
+          <a:solidFill>
+            <a:srgbClr val="EAF6F8"/>
+          </a:solidFill>
+          <a:ln w="12700">
+            <a:solidFill>
+              <a:srgbClr val="8ABBD8"/>
+            </a:solidFill>
+            <a:prstDash val="solid"/>
+          </a:ln>
+        </p:spPr>
+      </p:sp>
+      <p:sp>
+        <p:nvSpPr>
+          <p:cNvPr id="15" name="Shape 13"/>
+          <p:cNvSpPr/>
+          <p:nvPr/>
+        </p:nvSpPr>
+        <p:spPr>
+          <a:xfrm>
+            <a:off x="8202168" y="3721608"/>
+            <a:ext cx="2340864" cy="0"/>
+          </a:xfrm>
+          <a:prstGeom prst="line">
+            <a:avLst/>
+          </a:prstGeom>
+          <a:noFill/>
+          <a:ln w="19050">
+            <a:solidFill>
+              <a:srgbClr val="0068B7"/>
+            </a:solidFill>
+            <a:prstDash val="solid"/>
+          </a:ln>
+        </p:spPr>
+      </p:sp>
+      <p:sp>
+        <p:nvSpPr>
+          <p:cNvPr id="16" name="Shape 14"/>
+          <p:cNvSpPr/>
+          <p:nvPr/>
+        </p:nvSpPr>
+        <p:spPr>
+          <a:xfrm>
+            <a:off x="9198864" y="4206240"/>
+            <a:ext cx="347472" cy="347472"/>
+          </a:xfrm>
+          <a:prstGeom prst="ellipse">
+            <a:avLst/>
+          </a:prstGeom>
+          <a:solidFill>
+            <a:srgbClr val="2F8A28"/>
+          </a:solidFill>
+          <a:ln w="12700">
+            <a:solidFill>
+              <a:srgbClr val="2F8A28"/>
+            </a:solidFill>
+            <a:prstDash val="solid"/>
+          </a:ln>
+        </p:spPr>
+      </p:sp>
+      <p:sp>
+        <p:nvSpPr>
+          <p:cNvPr id="17" name="Text 15"/>
+          <p:cNvSpPr/>
+          <p:nvPr/>
+        </p:nvSpPr>
+        <p:spPr>
+          <a:xfrm>
+            <a:off x="7909560" y="3977640"/>
+            <a:ext cx="2926080" cy="182880"/>
+          </a:xfrm>
+          <a:prstGeom prst="rect">
+            <a:avLst/>
+          </a:prstGeom>
+          <a:noFill/>
+          <a:ln/>
+        </p:spPr>
+        <p:txBody>
+          <a:bodyPr wrap="square" lIns="0" tIns="0" rIns="0" bIns="0" rtlCol="0" anchor="ctr"/>
+          <a:lstStyle/>
+          <a:p>
+            <a:pPr algn="ctr" indent="0" marL="0">
+              <a:buNone/>
+            </a:pPr>
+            <a:r>
+              <a:rPr lang="en-US" sz="1000" dirty="0">
+                <a:solidFill>
+                  <a:srgbClr val="003A63"/>
+                </a:solidFill>
+                <a:latin typeface="Aptos" pitchFamily="34" charset="0"/>
+                <a:ea typeface="Aptos" pitchFamily="34" charset="-122"/>
+                <a:cs typeface="Aptos" pitchFamily="34" charset="-120"/>
+              </a:rPr>
+              <a:t>Concept to action</a:t>
+            </a:r>
+            <a:endParaRPr lang="en-US" sz="1000" dirty="0"/>
+          </a:p>
+        </p:txBody>
+      </p:sp>
+      <p:sp>
+        <p:nvSpPr>
+          <p:cNvPr id="18" name="Shape 16"/>
+          <p:cNvSpPr/>
+          <p:nvPr/>
+        </p:nvSpPr>
+        <p:spPr>
+          <a:xfrm>
+            <a:off x="7635240" y="4498848"/>
+            <a:ext cx="3474720" cy="1143000"/>
+          </a:xfrm>
+          <a:prstGeom prst="roundRect">
+            <a:avLst>
+              <a:gd name="adj" fmla="val 9600"/>
             </a:avLst>
           </a:prstGeom>
           <a:solidFill>
@@ -4142,14 +4378,14 @@
       </p:sp>
       <p:sp>
         <p:nvSpPr>
-          <p:cNvPr id="14" name="Text 12"/>
-          <p:cNvSpPr/>
-          <p:nvPr/>
-        </p:nvSpPr>
-        <p:spPr>
-          <a:xfrm>
-            <a:off x="8074152" y="3666744"/>
-            <a:ext cx="2825496" cy="256032"/>
+          <p:cNvPr id="19" name="Text 17"/>
+          <p:cNvSpPr/>
+          <p:nvPr/>
+        </p:nvSpPr>
+        <p:spPr>
+          <a:xfrm>
+            <a:off x="7799832" y="4645152"/>
+            <a:ext cx="3145536" cy="256032"/>
           </a:xfrm>
           <a:prstGeom prst="rect">
             <a:avLst/>
@@ -4173,7 +4409,7 @@
                 <a:ea typeface="Aptos" pitchFamily="34" charset="-122"/>
                 <a:cs typeface="Aptos" pitchFamily="34" charset="-120"/>
               </a:rPr>
-              <a:t>Use this for</a:t>
+              <a:t>What to produce</a:t>
             </a:r>
             <a:endParaRPr lang="en-US" sz="1300" dirty="0"/>
           </a:p>
@@ -4181,14 +4417,14 @@
       </p:sp>
       <p:sp>
         <p:nvSpPr>
-          <p:cNvPr id="15" name="Text 13"/>
-          <p:cNvSpPr/>
-          <p:nvPr/>
-        </p:nvSpPr>
-        <p:spPr>
-          <a:xfrm>
-            <a:off x="8074152" y="4023360"/>
-            <a:ext cx="2825496" cy="1097280"/>
+          <p:cNvPr id="20" name="Text 18"/>
+          <p:cNvSpPr/>
+          <p:nvPr/>
+        </p:nvSpPr>
+        <p:spPr>
+          <a:xfrm>
+            <a:off x="7799832" y="5001768"/>
+            <a:ext cx="3145536" cy="502920"/>
           </a:xfrm>
           <a:prstGeom prst="rect">
             <a:avLst/>
@@ -4214,7 +4450,7 @@
                 <a:ea typeface="Aptos" pitchFamily="34" charset="-122"/>
                 <a:cs typeface="Aptos" pitchFamily="34" charset="-120"/>
               </a:rPr>
-              <a:t>Connect the concept to public health decisions, safeguards, documentation, or implementation work.</a:t>
+              <a:t>Use the assignment to test whether you can explain the concept, apply it to a realistic public health situation, and identify what would need review before the work moves forward.</a:t>
             </a:r>
             <a:endParaRPr lang="en-US" sz="1550" dirty="0"/>
           </a:p>
@@ -4388,8 +4624,8 @@
         </p:nvSpPr>
         <p:spPr>
           <a:xfrm>
-            <a:off x="9966960" y="6537960"/>
-            <a:ext cx="1645920" cy="201168"/>
+            <a:off x="9646920" y="6537960"/>
+            <a:ext cx="1965960" cy="201168"/>
           </a:xfrm>
           <a:prstGeom prst="rect">
             <a:avLst/>
@@ -4413,7 +4649,7 @@
                 <a:ea typeface="Aptos" pitchFamily="34" charset="-122"/>
                 <a:cs typeface="Aptos" pitchFamily="34" charset="-120"/>
               </a:rPr>
-              <a:t>Â© Paula Soper</a:t>
+              <a:t>Copyright Paula Soper</a:t>
             </a:r>
             <a:endParaRPr lang="en-US" sz="800" dirty="0"/>
           </a:p>
@@ -4460,77 +4696,13 @@
       </p:sp>
       <p:sp>
         <p:nvSpPr>
-          <p:cNvPr id="8" name="Shape 6"/>
+          <p:cNvPr id="8" name="Text 6"/>
           <p:cNvSpPr/>
           <p:nvPr/>
         </p:nvSpPr>
         <p:spPr>
           <a:xfrm>
             <a:off x="640080" y="658368"/>
-            <a:ext cx="420624" cy="420624"/>
-          </a:xfrm>
-          <a:prstGeom prst="ellipse">
-            <a:avLst/>
-          </a:prstGeom>
-          <a:solidFill>
-            <a:srgbClr val="0068B7"/>
-          </a:solidFill>
-          <a:ln w="12700">
-            <a:solidFill>
-              <a:srgbClr val="0068B7"/>
-            </a:solidFill>
-            <a:prstDash val="solid"/>
-          </a:ln>
-        </p:spPr>
-      </p:sp>
-      <p:sp>
-        <p:nvSpPr>
-          <p:cNvPr id="9" name="Text 7"/>
-          <p:cNvSpPr/>
-          <p:nvPr/>
-        </p:nvSpPr>
-        <p:spPr>
-          <a:xfrm>
-            <a:off x="640080" y="731520"/>
-            <a:ext cx="420624" cy="164592"/>
-          </a:xfrm>
-          <a:prstGeom prst="rect">
-            <a:avLst/>
-          </a:prstGeom>
-          <a:noFill/>
-          <a:ln/>
-        </p:spPr>
-        <p:txBody>
-          <a:bodyPr wrap="square" lIns="0" tIns="0" rIns="0" bIns="0" rtlCol="0" anchor="ctr"/>
-          <a:lstStyle/>
-          <a:p>
-            <a:pPr algn="ctr" indent="0" marL="0">
-              <a:buNone/>
-            </a:pPr>
-            <a:r>
-              <a:rPr lang="en-US" sz="1100" b="1" dirty="0">
-                <a:solidFill>
-                  <a:srgbClr val="FFFFFF"/>
-                </a:solidFill>
-                <a:latin typeface="Aptos" pitchFamily="34" charset="0"/>
-                <a:ea typeface="Aptos" pitchFamily="34" charset="-122"/>
-                <a:cs typeface="Aptos" pitchFamily="34" charset="-120"/>
-              </a:rPr>
-              <a:t>6</a:t>
-            </a:r>
-            <a:endParaRPr lang="en-US" sz="1100" dirty="0"/>
-          </a:p>
-        </p:txBody>
-      </p:sp>
-      <p:sp>
-        <p:nvSpPr>
-          <p:cNvPr id="10" name="Text 8"/>
-          <p:cNvSpPr/>
-          <p:nvPr/>
-        </p:nvSpPr>
-        <p:spPr>
-          <a:xfrm>
-            <a:off x="640080" y="621792"/>
             <a:ext cx="10881360" cy="713232"/>
           </a:xfrm>
           <a:prstGeom prst="rect">
@@ -4565,14 +4737,14 @@
       </p:sp>
       <p:sp>
         <p:nvSpPr>
-          <p:cNvPr id="11" name="Text 9"/>
+          <p:cNvPr id="9" name="Text 7"/>
           <p:cNvSpPr/>
           <p:nvPr/>
         </p:nvSpPr>
         <p:spPr>
           <a:xfrm>
             <a:off x="868680" y="1508760"/>
-            <a:ext cx="6537960" cy="4160520"/>
+            <a:ext cx="6309360" cy="4160520"/>
           </a:xfrm>
           <a:prstGeom prst="rect">
             <a:avLst/>
@@ -4631,18 +4803,18 @@
       </p:sp>
       <p:sp>
         <p:nvSpPr>
-          <p:cNvPr id="12" name="Shape 10"/>
-          <p:cNvSpPr/>
-          <p:nvPr/>
-        </p:nvSpPr>
-        <p:spPr>
-          <a:xfrm>
-            <a:off x="7909560" y="1417320"/>
-            <a:ext cx="3154680" cy="1828800"/>
+          <p:cNvPr id="10" name="Shape 8"/>
+          <p:cNvSpPr/>
+          <p:nvPr/>
+        </p:nvSpPr>
+        <p:spPr>
+          <a:xfrm>
+            <a:off x="7635240" y="1325880"/>
+            <a:ext cx="3474720" cy="1325880"/>
           </a:xfrm>
           <a:prstGeom prst="roundRect">
             <a:avLst>
-              <a:gd name="adj" fmla="val 6000"/>
+              <a:gd name="adj" fmla="val 8276"/>
             </a:avLst>
           </a:prstGeom>
           <a:solidFill>
@@ -4658,14 +4830,14 @@
       </p:sp>
       <p:sp>
         <p:nvSpPr>
-          <p:cNvPr id="13" name="Text 11"/>
-          <p:cNvSpPr/>
-          <p:nvPr/>
-        </p:nvSpPr>
-        <p:spPr>
-          <a:xfrm>
-            <a:off x="8074152" y="1563624"/>
-            <a:ext cx="2825496" cy="256032"/>
+          <p:cNvPr id="11" name="Text 9"/>
+          <p:cNvSpPr/>
+          <p:nvPr/>
+        </p:nvSpPr>
+        <p:spPr>
+          <a:xfrm>
+            <a:off x="7799832" y="1472184"/>
+            <a:ext cx="3145536" cy="256032"/>
           </a:xfrm>
           <a:prstGeom prst="rect">
             <a:avLst/>
@@ -4689,7 +4861,7 @@
                 <a:ea typeface="Aptos" pitchFamily="34" charset="-122"/>
                 <a:cs typeface="Aptos" pitchFamily="34" charset="-120"/>
               </a:rPr>
-              <a:t>Key idea</a:t>
+              <a:t>Risk check</a:t>
             </a:r>
             <a:endParaRPr lang="en-US" sz="1300" dirty="0"/>
           </a:p>
@@ -4697,14 +4869,14 @@
       </p:sp>
       <p:sp>
         <p:nvSpPr>
-          <p:cNvPr id="14" name="Text 12"/>
-          <p:cNvSpPr/>
-          <p:nvPr/>
-        </p:nvSpPr>
-        <p:spPr>
-          <a:xfrm>
-            <a:off x="8074152" y="1920240"/>
-            <a:ext cx="2825496" cy="1188720"/>
+          <p:cNvPr id="12" name="Text 10"/>
+          <p:cNvSpPr/>
+          <p:nvPr/>
+        </p:nvSpPr>
+        <p:spPr>
+          <a:xfrm>
+            <a:off x="7799832" y="1828800"/>
+            <a:ext cx="3145536" cy="685800"/>
           </a:xfrm>
           <a:prstGeom prst="rect">
             <a:avLst/>
@@ -4738,18 +4910,171 @@
       </p:sp>
       <p:sp>
         <p:nvSpPr>
-          <p:cNvPr id="15" name="Shape 13"/>
-          <p:cNvSpPr/>
-          <p:nvPr/>
-        </p:nvSpPr>
-        <p:spPr>
-          <a:xfrm>
-            <a:off x="7909560" y="3520440"/>
-            <a:ext cx="3154680" cy="1737360"/>
+          <p:cNvPr id="13" name="Shape 11"/>
+          <p:cNvSpPr/>
+          <p:nvPr/>
+        </p:nvSpPr>
+        <p:spPr>
+          <a:xfrm>
+            <a:off x="7635240" y="2788920"/>
+            <a:ext cx="3474720" cy="1536192"/>
           </a:xfrm>
           <a:prstGeom prst="roundRect">
             <a:avLst>
-              <a:gd name="adj" fmla="val 6316"/>
+              <a:gd name="adj" fmla="val 7143"/>
+            </a:avLst>
+          </a:prstGeom>
+          <a:solidFill>
+            <a:srgbClr val="FFFFFF">
+              <a:alpha val="88000"/>
+            </a:srgbClr>
+          </a:solidFill>
+          <a:ln w="12700">
+            <a:solidFill>
+              <a:srgbClr val="D6E8F2"/>
+            </a:solidFill>
+            <a:prstDash val="solid"/>
+          </a:ln>
+        </p:spPr>
+      </p:sp>
+      <p:sp>
+        <p:nvSpPr>
+          <p:cNvPr id="14" name="Shape 12"/>
+          <p:cNvSpPr/>
+          <p:nvPr/>
+        </p:nvSpPr>
+        <p:spPr>
+          <a:xfrm>
+            <a:off x="8046720" y="3108960"/>
+            <a:ext cx="2651760" cy="896112"/>
+          </a:xfrm>
+          <a:prstGeom prst="arc">
+            <a:avLst/>
+          </a:prstGeom>
+          <a:noFill/>
+          <a:ln w="25400">
+            <a:solidFill>
+              <a:srgbClr val="0068B7"/>
+            </a:solidFill>
+            <a:prstDash val="solid"/>
+          </a:ln>
+        </p:spPr>
+      </p:sp>
+      <p:sp>
+        <p:nvSpPr>
+          <p:cNvPr id="15" name="Text 13"/>
+          <p:cNvSpPr/>
+          <p:nvPr/>
+        </p:nvSpPr>
+        <p:spPr>
+          <a:xfrm>
+            <a:off x="7909560" y="3099816"/>
+            <a:ext cx="2926080" cy="256032"/>
+          </a:xfrm>
+          <a:prstGeom prst="rect">
+            <a:avLst/>
+          </a:prstGeom>
+          <a:noFill/>
+          <a:ln/>
+        </p:spPr>
+        <p:txBody>
+          <a:bodyPr wrap="square" lIns="0" tIns="0" rIns="0" bIns="0" rtlCol="0" anchor="ctr"/>
+          <a:lstStyle/>
+          <a:p>
+            <a:pPr algn="ctr" indent="0" marL="0">
+              <a:buNone/>
+            </a:pPr>
+            <a:r>
+              <a:rPr lang="en-US" sz="1500" b="1" dirty="0">
+                <a:solidFill>
+                  <a:srgbClr val="003A63"/>
+                </a:solidFill>
+                <a:latin typeface="Aptos" pitchFamily="34" charset="0"/>
+                <a:ea typeface="Aptos" pitchFamily="34" charset="-122"/>
+                <a:cs typeface="Aptos" pitchFamily="34" charset="-120"/>
+              </a:rPr>
+              <a:t>Risk</a:t>
+            </a:r>
+            <a:endParaRPr lang="en-US" sz="1500" dirty="0"/>
+          </a:p>
+        </p:txBody>
+      </p:sp>
+      <p:sp>
+        <p:nvSpPr>
+          <p:cNvPr id="16" name="Shape 14"/>
+          <p:cNvSpPr/>
+          <p:nvPr/>
+        </p:nvSpPr>
+        <p:spPr>
+          <a:xfrm>
+            <a:off x="8366760" y="3639312"/>
+            <a:ext cx="2011680" cy="0"/>
+          </a:xfrm>
+          <a:prstGeom prst="line">
+            <a:avLst/>
+          </a:prstGeom>
+          <a:noFill/>
+          <a:ln w="63500">
+            <a:solidFill>
+              <a:srgbClr val="2F8A28"/>
+            </a:solidFill>
+            <a:prstDash val="solid"/>
+          </a:ln>
+        </p:spPr>
+      </p:sp>
+      <p:sp>
+        <p:nvSpPr>
+          <p:cNvPr id="17" name="Text 15"/>
+          <p:cNvSpPr/>
+          <p:nvPr/>
+        </p:nvSpPr>
+        <p:spPr>
+          <a:xfrm>
+            <a:off x="7909560" y="3849624"/>
+            <a:ext cx="2926080" cy="164592"/>
+          </a:xfrm>
+          <a:prstGeom prst="rect">
+            <a:avLst/>
+          </a:prstGeom>
+          <a:noFill/>
+          <a:ln/>
+        </p:spPr>
+        <p:txBody>
+          <a:bodyPr wrap="square" lIns="0" tIns="0" rIns="0" bIns="0" rtlCol="0" anchor="ctr"/>
+          <a:lstStyle/>
+          <a:p>
+            <a:pPr algn="ctr" indent="0" marL="0">
+              <a:buNone/>
+            </a:pPr>
+            <a:r>
+              <a:rPr lang="en-US" sz="900" dirty="0">
+                <a:solidFill>
+                  <a:srgbClr val="003A63"/>
+                </a:solidFill>
+                <a:latin typeface="Aptos" pitchFamily="34" charset="0"/>
+                <a:ea typeface="Aptos" pitchFamily="34" charset="-122"/>
+                <a:cs typeface="Aptos" pitchFamily="34" charset="-120"/>
+              </a:rPr>
+              <a:t>Human review</a:t>
+            </a:r>
+            <a:endParaRPr lang="en-US" sz="900" dirty="0"/>
+          </a:p>
+        </p:txBody>
+      </p:sp>
+      <p:sp>
+        <p:nvSpPr>
+          <p:cNvPr id="18" name="Shape 16"/>
+          <p:cNvSpPr/>
+          <p:nvPr/>
+        </p:nvSpPr>
+        <p:spPr>
+          <a:xfrm>
+            <a:off x="7635240" y="4498848"/>
+            <a:ext cx="3474720" cy="1143000"/>
+          </a:xfrm>
+          <a:prstGeom prst="roundRect">
+            <a:avLst>
+              <a:gd name="adj" fmla="val 9600"/>
             </a:avLst>
           </a:prstGeom>
           <a:solidFill>
@@ -4765,14 +5090,14 @@
       </p:sp>
       <p:sp>
         <p:nvSpPr>
-          <p:cNvPr id="16" name="Text 14"/>
-          <p:cNvSpPr/>
-          <p:nvPr/>
-        </p:nvSpPr>
-        <p:spPr>
-          <a:xfrm>
-            <a:off x="8074152" y="3666744"/>
-            <a:ext cx="2825496" cy="256032"/>
+          <p:cNvPr id="19" name="Text 17"/>
+          <p:cNvSpPr/>
+          <p:nvPr/>
+        </p:nvSpPr>
+        <p:spPr>
+          <a:xfrm>
+            <a:off x="7799832" y="4645152"/>
+            <a:ext cx="3145536" cy="256032"/>
           </a:xfrm>
           <a:prstGeom prst="rect">
             <a:avLst/>
@@ -4796,7 +5121,7 @@
                 <a:ea typeface="Aptos" pitchFamily="34" charset="-122"/>
                 <a:cs typeface="Aptos" pitchFamily="34" charset="-120"/>
               </a:rPr>
-              <a:t>Use this for</a:t>
+              <a:t>Safeguard to plan</a:t>
             </a:r>
             <a:endParaRPr lang="en-US" sz="1300" dirty="0"/>
           </a:p>
@@ -4804,14 +5129,14 @@
       </p:sp>
       <p:sp>
         <p:nvSpPr>
-          <p:cNvPr id="17" name="Text 15"/>
-          <p:cNvSpPr/>
-          <p:nvPr/>
-        </p:nvSpPr>
-        <p:spPr>
-          <a:xfrm>
-            <a:off x="8074152" y="4023360"/>
-            <a:ext cx="2825496" cy="1097280"/>
+          <p:cNvPr id="20" name="Text 18"/>
+          <p:cNvSpPr/>
+          <p:nvPr/>
+        </p:nvSpPr>
+        <p:spPr>
+          <a:xfrm>
+            <a:off x="7799832" y="5001768"/>
+            <a:ext cx="3145536" cy="502920"/>
           </a:xfrm>
           <a:prstGeom prst="rect">
             <a:avLst/>
@@ -4837,7 +5162,7 @@
                 <a:ea typeface="Aptos" pitchFamily="34" charset="-122"/>
                 <a:cs typeface="Aptos" pitchFamily="34" charset="-120"/>
               </a:rPr>
-              <a:t>Connect the concept to public health decisions, safeguards, documentation, or implementation work.</a:t>
+              <a:t>Use the assignment to test whether you can explain the concept, apply it to a realistic public health situation, and identify what would need review before the work moves forward.</a:t>
             </a:r>
             <a:endParaRPr lang="en-US" sz="1550" dirty="0"/>
           </a:p>
@@ -5011,8 +5336,8 @@
         </p:nvSpPr>
         <p:spPr>
           <a:xfrm>
-            <a:off x="9966960" y="6537960"/>
-            <a:ext cx="1645920" cy="201168"/>
+            <a:off x="9646920" y="6537960"/>
+            <a:ext cx="1965960" cy="201168"/>
           </a:xfrm>
           <a:prstGeom prst="rect">
             <a:avLst/>
@@ -5036,7 +5361,7 @@
                 <a:ea typeface="Aptos" pitchFamily="34" charset="-122"/>
                 <a:cs typeface="Aptos" pitchFamily="34" charset="-120"/>
               </a:rPr>
-              <a:t>Â© Paula Soper</a:t>
+              <a:t>Copyright Paula Soper</a:t>
             </a:r>
             <a:endParaRPr lang="en-US" sz="800" dirty="0"/>
           </a:p>
@@ -5131,7 +5456,7 @@
         <p:spPr>
           <a:xfrm>
             <a:off x="868680" y="1508760"/>
-            <a:ext cx="6537960" cy="4160520"/>
+            <a:ext cx="6309360" cy="4160520"/>
           </a:xfrm>
           <a:prstGeom prst="rect">
             <a:avLst/>
@@ -5196,12 +5521,12 @@
         </p:nvSpPr>
         <p:spPr>
           <a:xfrm>
-            <a:off x="7909560" y="1417320"/>
-            <a:ext cx="3154680" cy="1828800"/>
+            <a:off x="7635240" y="1325880"/>
+            <a:ext cx="3474720" cy="1325880"/>
           </a:xfrm>
           <a:prstGeom prst="roundRect">
             <a:avLst>
-              <a:gd name="adj" fmla="val 6000"/>
+              <a:gd name="adj" fmla="val 8276"/>
             </a:avLst>
           </a:prstGeom>
           <a:solidFill>
@@ -5223,8 +5548,8 @@
         </p:nvSpPr>
         <p:spPr>
           <a:xfrm>
-            <a:off x="8074152" y="1563624"/>
-            <a:ext cx="2825496" cy="256032"/>
+            <a:off x="7799832" y="1472184"/>
+            <a:ext cx="3145536" cy="256032"/>
           </a:xfrm>
           <a:prstGeom prst="rect">
             <a:avLst/>
@@ -5248,7 +5573,7 @@
                 <a:ea typeface="Aptos" pitchFamily="34" charset="-122"/>
                 <a:cs typeface="Aptos" pitchFamily="34" charset="-120"/>
               </a:rPr>
-              <a:t>Key idea</a:t>
+              <a:t>Risk check</a:t>
             </a:r>
             <a:endParaRPr lang="en-US" sz="1300" dirty="0"/>
           </a:p>
@@ -5262,8 +5587,8 @@
         </p:nvSpPr>
         <p:spPr>
           <a:xfrm>
-            <a:off x="8074152" y="1920240"/>
-            <a:ext cx="2825496" cy="1188720"/>
+            <a:off x="7799832" y="1828800"/>
+            <a:ext cx="3145536" cy="685800"/>
           </a:xfrm>
           <a:prstGeom prst="rect">
             <a:avLst/>
@@ -5303,12 +5628,165 @@
         </p:nvSpPr>
         <p:spPr>
           <a:xfrm>
-            <a:off x="7909560" y="3520440"/>
-            <a:ext cx="3154680" cy="1737360"/>
+            <a:off x="7635240" y="2788920"/>
+            <a:ext cx="3474720" cy="1536192"/>
           </a:xfrm>
           <a:prstGeom prst="roundRect">
             <a:avLst>
-              <a:gd name="adj" fmla="val 6316"/>
+              <a:gd name="adj" fmla="val 7143"/>
+            </a:avLst>
+          </a:prstGeom>
+          <a:solidFill>
+            <a:srgbClr val="FFFFFF">
+              <a:alpha val="88000"/>
+            </a:srgbClr>
+          </a:solidFill>
+          <a:ln w="12700">
+            <a:solidFill>
+              <a:srgbClr val="D6E8F2"/>
+            </a:solidFill>
+            <a:prstDash val="solid"/>
+          </a:ln>
+        </p:spPr>
+      </p:sp>
+      <p:sp>
+        <p:nvSpPr>
+          <p:cNvPr id="14" name="Shape 12"/>
+          <p:cNvSpPr/>
+          <p:nvPr/>
+        </p:nvSpPr>
+        <p:spPr>
+          <a:xfrm>
+            <a:off x="8046720" y="3108960"/>
+            <a:ext cx="2651760" cy="896112"/>
+          </a:xfrm>
+          <a:prstGeom prst="arc">
+            <a:avLst/>
+          </a:prstGeom>
+          <a:noFill/>
+          <a:ln w="25400">
+            <a:solidFill>
+              <a:srgbClr val="0068B7"/>
+            </a:solidFill>
+            <a:prstDash val="solid"/>
+          </a:ln>
+        </p:spPr>
+      </p:sp>
+      <p:sp>
+        <p:nvSpPr>
+          <p:cNvPr id="15" name="Text 13"/>
+          <p:cNvSpPr/>
+          <p:nvPr/>
+        </p:nvSpPr>
+        <p:spPr>
+          <a:xfrm>
+            <a:off x="7909560" y="3099816"/>
+            <a:ext cx="2926080" cy="256032"/>
+          </a:xfrm>
+          <a:prstGeom prst="rect">
+            <a:avLst/>
+          </a:prstGeom>
+          <a:noFill/>
+          <a:ln/>
+        </p:spPr>
+        <p:txBody>
+          <a:bodyPr wrap="square" lIns="0" tIns="0" rIns="0" bIns="0" rtlCol="0" anchor="ctr"/>
+          <a:lstStyle/>
+          <a:p>
+            <a:pPr algn="ctr" indent="0" marL="0">
+              <a:buNone/>
+            </a:pPr>
+            <a:r>
+              <a:rPr lang="en-US" sz="1500" b="1" dirty="0">
+                <a:solidFill>
+                  <a:srgbClr val="003A63"/>
+                </a:solidFill>
+                <a:latin typeface="Aptos" pitchFamily="34" charset="0"/>
+                <a:ea typeface="Aptos" pitchFamily="34" charset="-122"/>
+                <a:cs typeface="Aptos" pitchFamily="34" charset="-120"/>
+              </a:rPr>
+              <a:t>Risk</a:t>
+            </a:r>
+            <a:endParaRPr lang="en-US" sz="1500" dirty="0"/>
+          </a:p>
+        </p:txBody>
+      </p:sp>
+      <p:sp>
+        <p:nvSpPr>
+          <p:cNvPr id="16" name="Shape 14"/>
+          <p:cNvSpPr/>
+          <p:nvPr/>
+        </p:nvSpPr>
+        <p:spPr>
+          <a:xfrm>
+            <a:off x="8366760" y="3639312"/>
+            <a:ext cx="2011680" cy="0"/>
+          </a:xfrm>
+          <a:prstGeom prst="line">
+            <a:avLst/>
+          </a:prstGeom>
+          <a:noFill/>
+          <a:ln w="63500">
+            <a:solidFill>
+              <a:srgbClr val="2F8A28"/>
+            </a:solidFill>
+            <a:prstDash val="solid"/>
+          </a:ln>
+        </p:spPr>
+      </p:sp>
+      <p:sp>
+        <p:nvSpPr>
+          <p:cNvPr id="17" name="Text 15"/>
+          <p:cNvSpPr/>
+          <p:nvPr/>
+        </p:nvSpPr>
+        <p:spPr>
+          <a:xfrm>
+            <a:off x="7909560" y="3849624"/>
+            <a:ext cx="2926080" cy="164592"/>
+          </a:xfrm>
+          <a:prstGeom prst="rect">
+            <a:avLst/>
+          </a:prstGeom>
+          <a:noFill/>
+          <a:ln/>
+        </p:spPr>
+        <p:txBody>
+          <a:bodyPr wrap="square" lIns="0" tIns="0" rIns="0" bIns="0" rtlCol="0" anchor="ctr"/>
+          <a:lstStyle/>
+          <a:p>
+            <a:pPr algn="ctr" indent="0" marL="0">
+              <a:buNone/>
+            </a:pPr>
+            <a:r>
+              <a:rPr lang="en-US" sz="900" dirty="0">
+                <a:solidFill>
+                  <a:srgbClr val="003A63"/>
+                </a:solidFill>
+                <a:latin typeface="Aptos" pitchFamily="34" charset="0"/>
+                <a:ea typeface="Aptos" pitchFamily="34" charset="-122"/>
+                <a:cs typeface="Aptos" pitchFamily="34" charset="-120"/>
+              </a:rPr>
+              <a:t>Human review</a:t>
+            </a:r>
+            <a:endParaRPr lang="en-US" sz="900" dirty="0"/>
+          </a:p>
+        </p:txBody>
+      </p:sp>
+      <p:sp>
+        <p:nvSpPr>
+          <p:cNvPr id="18" name="Shape 16"/>
+          <p:cNvSpPr/>
+          <p:nvPr/>
+        </p:nvSpPr>
+        <p:spPr>
+          <a:xfrm>
+            <a:off x="7635240" y="4498848"/>
+            <a:ext cx="3474720" cy="1143000"/>
+          </a:xfrm>
+          <a:prstGeom prst="roundRect">
+            <a:avLst>
+              <a:gd name="adj" fmla="val 9600"/>
             </a:avLst>
           </a:prstGeom>
           <a:solidFill>
@@ -5324,14 +5802,14 @@
       </p:sp>
       <p:sp>
         <p:nvSpPr>
-          <p:cNvPr id="14" name="Text 12"/>
-          <p:cNvSpPr/>
-          <p:nvPr/>
-        </p:nvSpPr>
-        <p:spPr>
-          <a:xfrm>
-            <a:off x="8074152" y="3666744"/>
-            <a:ext cx="2825496" cy="256032"/>
+          <p:cNvPr id="19" name="Text 17"/>
+          <p:cNvSpPr/>
+          <p:nvPr/>
+        </p:nvSpPr>
+        <p:spPr>
+          <a:xfrm>
+            <a:off x="7799832" y="4645152"/>
+            <a:ext cx="3145536" cy="256032"/>
           </a:xfrm>
           <a:prstGeom prst="rect">
             <a:avLst/>
@@ -5355,7 +5833,7 @@
                 <a:ea typeface="Aptos" pitchFamily="34" charset="-122"/>
                 <a:cs typeface="Aptos" pitchFamily="34" charset="-120"/>
               </a:rPr>
-              <a:t>Use this for</a:t>
+              <a:t>Safeguard to plan</a:t>
             </a:r>
             <a:endParaRPr lang="en-US" sz="1300" dirty="0"/>
           </a:p>
@@ -5363,14 +5841,14 @@
       </p:sp>
       <p:sp>
         <p:nvSpPr>
-          <p:cNvPr id="15" name="Text 13"/>
-          <p:cNvSpPr/>
-          <p:nvPr/>
-        </p:nvSpPr>
-        <p:spPr>
-          <a:xfrm>
-            <a:off x="8074152" y="4023360"/>
-            <a:ext cx="2825496" cy="1097280"/>
+          <p:cNvPr id="20" name="Text 18"/>
+          <p:cNvSpPr/>
+          <p:nvPr/>
+        </p:nvSpPr>
+        <p:spPr>
+          <a:xfrm>
+            <a:off x="7799832" y="5001768"/>
+            <a:ext cx="3145536" cy="502920"/>
           </a:xfrm>
           <a:prstGeom prst="rect">
             <a:avLst/>
@@ -5396,7 +5874,7 @@
                 <a:ea typeface="Aptos" pitchFamily="34" charset="-122"/>
                 <a:cs typeface="Aptos" pitchFamily="34" charset="-120"/>
               </a:rPr>
-              <a:t>Connect the concept to public health decisions, safeguards, documentation, or implementation work.</a:t>
+              <a:t>Use the assignment to test whether you can explain the concept, apply it to a realistic public health situation, and identify what would need review before the work moves forward.</a:t>
             </a:r>
             <a:endParaRPr lang="en-US" sz="1550" dirty="0"/>
           </a:p>
@@ -5570,8 +6048,8 @@
         </p:nvSpPr>
         <p:spPr>
           <a:xfrm>
-            <a:off x="9966960" y="6537960"/>
-            <a:ext cx="1645920" cy="201168"/>
+            <a:off x="9646920" y="6537960"/>
+            <a:ext cx="1965960" cy="201168"/>
           </a:xfrm>
           <a:prstGeom prst="rect">
             <a:avLst/>
@@ -5595,7 +6073,7 @@
                 <a:ea typeface="Aptos" pitchFamily="34" charset="-122"/>
                 <a:cs typeface="Aptos" pitchFamily="34" charset="-120"/>
               </a:rPr>
-              <a:t>Â© Paula Soper</a:t>
+              <a:t>Copyright Paula Soper</a:t>
             </a:r>
             <a:endParaRPr lang="en-US" sz="800" dirty="0"/>
           </a:p>
@@ -5642,17 +6120,262 @@
       </p:sp>
       <p:sp>
         <p:nvSpPr>
-          <p:cNvPr id="8" name="Shape 6"/>
+          <p:cNvPr id="8" name="Text 6"/>
           <p:cNvSpPr/>
           <p:nvPr/>
         </p:nvSpPr>
         <p:spPr>
           <a:xfrm>
             <a:off x="640080" y="658368"/>
-            <a:ext cx="420624" cy="420624"/>
-          </a:xfrm>
-          <a:prstGeom prst="ellipse">
-            <a:avLst/>
+            <a:ext cx="10881360" cy="713232"/>
+          </a:xfrm>
+          <a:prstGeom prst="rect">
+            <a:avLst/>
+          </a:prstGeom>
+          <a:noFill/>
+          <a:ln/>
+        </p:spPr>
+        <p:txBody>
+          <a:bodyPr wrap="square" lIns="0" tIns="0" rIns="0" bIns="0" rtlCol="0" anchor="ctr">
+            <a:normAutofit/>
+          </a:bodyPr>
+          <a:lstStyle/>
+          <a:p>
+            <a:pPr indent="0" marL="0">
+              <a:buNone/>
+            </a:pPr>
+            <a:r>
+              <a:rPr lang="en-US" sz="3400" b="1" dirty="0">
+                <a:solidFill>
+                  <a:srgbClr val="003A63"/>
+                </a:solidFill>
+                <a:latin typeface="Aptos Display" pitchFamily="34" charset="0"/>
+                <a:ea typeface="Aptos Display" pitchFamily="34" charset="-122"/>
+                <a:cs typeface="Aptos Display" pitchFamily="34" charset="-120"/>
+              </a:rPr>
+              <a:t>Application to AI-Supported Workflows</a:t>
+            </a:r>
+            <a:endParaRPr lang="en-US" sz="3400" dirty="0"/>
+          </a:p>
+        </p:txBody>
+      </p:sp>
+      <p:sp>
+        <p:nvSpPr>
+          <p:cNvPr id="9" name="Text 7"/>
+          <p:cNvSpPr/>
+          <p:nvPr/>
+        </p:nvSpPr>
+        <p:spPr>
+          <a:xfrm>
+            <a:off x="868680" y="1508760"/>
+            <a:ext cx="6309360" cy="4160520"/>
+          </a:xfrm>
+          <a:prstGeom prst="rect">
+            <a:avLst/>
+          </a:prstGeom>
+          <a:noFill/>
+          <a:ln/>
+        </p:spPr>
+        <p:txBody>
+          <a:bodyPr wrap="square" lIns="635" tIns="635" rIns="635" bIns="635" rtlCol="0" anchor="t">
+            <a:normAutofit/>
+          </a:bodyPr>
+          <a:lstStyle/>
+          <a:p>
+            <a:r>
+              <a:rPr lang="en-US" sz="2100" dirty="0">
+                <a:solidFill>
+                  <a:srgbClr val="17364A"/>
+                </a:solidFill>
+                <a:latin typeface="Aptos" pitchFamily="34" charset="0"/>
+                <a:ea typeface="Aptos" pitchFamily="34" charset="-122"/>
+                <a:cs typeface="Aptos" pitchFamily="34" charset="-120"/>
+              </a:rPr>
+              <a:t>RAG supports generative AI by grounding outputs in defined sources.</a:t>
+            </a:r>
+            <a:endParaRPr lang="en-US" sz="2100" dirty="0"/>
+          </a:p>
+          <a:p>
+            <a:r>
+              <a:rPr lang="en-US" sz="2100" dirty="0">
+                <a:solidFill>
+                  <a:srgbClr val="17364A"/>
+                </a:solidFill>
+                <a:latin typeface="Aptos" pitchFamily="34" charset="0"/>
+                <a:ea typeface="Aptos" pitchFamily="34" charset="-122"/>
+                <a:cs typeface="Aptos" pitchFamily="34" charset="-120"/>
+              </a:rPr>
+              <a:t>It may be used in chat assistants, training tools, policy support, emergency operations, procurement.</a:t>
+            </a:r>
+            <a:endParaRPr lang="en-US" sz="2100" dirty="0"/>
+          </a:p>
+          <a:p>
+            <a:r>
+              <a:rPr lang="en-US" sz="2100" dirty="0">
+                <a:solidFill>
+                  <a:srgbClr val="17364A"/>
+                </a:solidFill>
+                <a:latin typeface="Aptos" pitchFamily="34" charset="0"/>
+                <a:ea typeface="Aptos" pitchFamily="34" charset="-122"/>
+                <a:cs typeface="Aptos" pitchFamily="34" charset="-120"/>
+              </a:rPr>
+              <a:t>It can also support agentic workflows by giving agents access to approved guidance, but actions based.</a:t>
+            </a:r>
+            <a:endParaRPr lang="en-US" sz="2100" dirty="0"/>
+          </a:p>
+        </p:txBody>
+      </p:sp>
+      <p:sp>
+        <p:nvSpPr>
+          <p:cNvPr id="10" name="Shape 8"/>
+          <p:cNvSpPr/>
+          <p:nvPr/>
+        </p:nvSpPr>
+        <p:spPr>
+          <a:xfrm>
+            <a:off x="7635240" y="1325880"/>
+            <a:ext cx="3474720" cy="1325880"/>
+          </a:xfrm>
+          <a:prstGeom prst="roundRect">
+            <a:avLst>
+              <a:gd name="adj" fmla="val 8276"/>
+            </a:avLst>
+          </a:prstGeom>
+          <a:solidFill>
+            <a:srgbClr val="EEF8ED"/>
+          </a:solidFill>
+          <a:ln w="12700">
+            <a:solidFill>
+              <a:srgbClr val="B9D7E6"/>
+            </a:solidFill>
+            <a:prstDash val="solid"/>
+          </a:ln>
+        </p:spPr>
+      </p:sp>
+      <p:sp>
+        <p:nvSpPr>
+          <p:cNvPr id="11" name="Text 9"/>
+          <p:cNvSpPr/>
+          <p:nvPr/>
+        </p:nvSpPr>
+        <p:spPr>
+          <a:xfrm>
+            <a:off x="7799832" y="1472184"/>
+            <a:ext cx="3145536" cy="256032"/>
+          </a:xfrm>
+          <a:prstGeom prst="rect">
+            <a:avLst/>
+          </a:prstGeom>
+          <a:noFill/>
+          <a:ln/>
+        </p:spPr>
+        <p:txBody>
+          <a:bodyPr wrap="square" lIns="0" tIns="0" rIns="0" bIns="0" rtlCol="0" anchor="ctr"/>
+          <a:lstStyle/>
+          <a:p>
+            <a:pPr indent="0" marL="0">
+              <a:buNone/>
+            </a:pPr>
+            <a:r>
+              <a:rPr lang="en-US" sz="1300" b="1" dirty="0">
+                <a:solidFill>
+                  <a:srgbClr val="0068B7"/>
+                </a:solidFill>
+                <a:latin typeface="Aptos" pitchFamily="34" charset="0"/>
+                <a:ea typeface="Aptos" pitchFamily="34" charset="-122"/>
+                <a:cs typeface="Aptos" pitchFamily="34" charset="-120"/>
+              </a:rPr>
+              <a:t>Implementation cue</a:t>
+            </a:r>
+            <a:endParaRPr lang="en-US" sz="1300" dirty="0"/>
+          </a:p>
+        </p:txBody>
+      </p:sp>
+      <p:sp>
+        <p:nvSpPr>
+          <p:cNvPr id="12" name="Text 10"/>
+          <p:cNvSpPr/>
+          <p:nvPr/>
+        </p:nvSpPr>
+        <p:spPr>
+          <a:xfrm>
+            <a:off x="7799832" y="1828800"/>
+            <a:ext cx="3145536" cy="685800"/>
+          </a:xfrm>
+          <a:prstGeom prst="rect">
+            <a:avLst/>
+          </a:prstGeom>
+          <a:noFill/>
+          <a:ln/>
+        </p:spPr>
+        <p:txBody>
+          <a:bodyPr wrap="square" lIns="0" tIns="0" rIns="0" bIns="0" rtlCol="0" anchor="t">
+            <a:normAutofit/>
+          </a:bodyPr>
+          <a:lstStyle/>
+          <a:p>
+            <a:pPr indent="0" marL="0">
+              <a:buNone/>
+            </a:pPr>
+            <a:r>
+              <a:rPr lang="en-US" sz="1550" dirty="0">
+                <a:solidFill>
+                  <a:srgbClr val="17364A"/>
+                </a:solidFill>
+                <a:latin typeface="Aptos" pitchFamily="34" charset="0"/>
+                <a:ea typeface="Aptos" pitchFamily="34" charset="-122"/>
+                <a:cs typeface="Aptos" pitchFamily="34" charset="-120"/>
+              </a:rPr>
+              <a:t>RAG supports generative AI by grounding outputs in defined sources.</a:t>
+            </a:r>
+            <a:endParaRPr lang="en-US" sz="1550" dirty="0"/>
+          </a:p>
+        </p:txBody>
+      </p:sp>
+      <p:sp>
+        <p:nvSpPr>
+          <p:cNvPr id="13" name="Shape 11"/>
+          <p:cNvSpPr/>
+          <p:nvPr/>
+        </p:nvSpPr>
+        <p:spPr>
+          <a:xfrm>
+            <a:off x="7635240" y="2788920"/>
+            <a:ext cx="3474720" cy="1536192"/>
+          </a:xfrm>
+          <a:prstGeom prst="roundRect">
+            <a:avLst>
+              <a:gd name="adj" fmla="val 7143"/>
+            </a:avLst>
+          </a:prstGeom>
+          <a:solidFill>
+            <a:srgbClr val="FFFFFF">
+              <a:alpha val="88000"/>
+            </a:srgbClr>
+          </a:solidFill>
+          <a:ln w="12700">
+            <a:solidFill>
+              <a:srgbClr val="D6E8F2"/>
+            </a:solidFill>
+            <a:prstDash val="solid"/>
+          </a:ln>
+        </p:spPr>
+      </p:sp>
+      <p:sp>
+        <p:nvSpPr>
+          <p:cNvPr id="14" name="Shape 12"/>
+          <p:cNvSpPr/>
+          <p:nvPr/>
+        </p:nvSpPr>
+        <p:spPr>
+          <a:xfrm>
+            <a:off x="7927848" y="3319272"/>
+            <a:ext cx="792480" cy="749808"/>
+          </a:xfrm>
+          <a:prstGeom prst="roundRect">
+            <a:avLst>
+              <a:gd name="adj" fmla="val 14634"/>
+            </a:avLst>
           </a:prstGeom>
           <a:solidFill>
             <a:srgbClr val="0068B7"/>
@@ -5667,53 +6390,14 @@
       </p:sp>
       <p:sp>
         <p:nvSpPr>
-          <p:cNvPr id="9" name="Text 7"/>
-          <p:cNvSpPr/>
-          <p:nvPr/>
-        </p:nvSpPr>
-        <p:spPr>
-          <a:xfrm>
-            <a:off x="640080" y="731520"/>
-            <a:ext cx="420624" cy="164592"/>
-          </a:xfrm>
-          <a:prstGeom prst="rect">
-            <a:avLst/>
-          </a:prstGeom>
-          <a:noFill/>
-          <a:ln/>
-        </p:spPr>
-        <p:txBody>
-          <a:bodyPr wrap="square" lIns="0" tIns="0" rIns="0" bIns="0" rtlCol="0" anchor="ctr"/>
-          <a:lstStyle/>
-          <a:p>
-            <a:pPr algn="ctr" indent="0" marL="0">
-              <a:buNone/>
-            </a:pPr>
-            <a:r>
-              <a:rPr lang="en-US" sz="1100" b="1" dirty="0">
-                <a:solidFill>
-                  <a:srgbClr val="FFFFFF"/>
-                </a:solidFill>
-                <a:latin typeface="Aptos" pitchFamily="34" charset="0"/>
-                <a:ea typeface="Aptos" pitchFamily="34" charset="-122"/>
-                <a:cs typeface="Aptos" pitchFamily="34" charset="-120"/>
-              </a:rPr>
-              <a:t>7</a:t>
-            </a:r>
-            <a:endParaRPr lang="en-US" sz="1100" dirty="0"/>
-          </a:p>
-        </p:txBody>
-      </p:sp>
-      <p:sp>
-        <p:nvSpPr>
-          <p:cNvPr id="10" name="Text 8"/>
-          <p:cNvSpPr/>
-          <p:nvPr/>
-        </p:nvSpPr>
-        <p:spPr>
-          <a:xfrm>
-            <a:off x="640080" y="621792"/>
-            <a:ext cx="10881360" cy="713232"/>
+          <p:cNvPr id="15" name="Text 13"/>
+          <p:cNvSpPr/>
+          <p:nvPr/>
+        </p:nvSpPr>
+        <p:spPr>
+          <a:xfrm>
+            <a:off x="8001000" y="3511296"/>
+            <a:ext cx="646176" cy="310896"/>
           </a:xfrm>
           <a:prstGeom prst="rect">
             <a:avLst/>
@@ -5727,112 +6411,46 @@
           </a:bodyPr>
           <a:lstStyle/>
           <a:p>
-            <a:pPr indent="0" marL="0">
-              <a:buNone/>
-            </a:pPr>
-            <a:r>
-              <a:rPr lang="en-US" sz="3400" b="1" dirty="0">
-                <a:solidFill>
-                  <a:srgbClr val="003A63"/>
-                </a:solidFill>
-                <a:latin typeface="Aptos Display" pitchFamily="34" charset="0"/>
-                <a:ea typeface="Aptos Display" pitchFamily="34" charset="-122"/>
-                <a:cs typeface="Aptos Display" pitchFamily="34" charset="-120"/>
-              </a:rPr>
-              <a:t>Application to AI-Supported Workflows</a:t>
-            </a:r>
-            <a:endParaRPr lang="en-US" sz="3400" dirty="0"/>
-          </a:p>
-        </p:txBody>
-      </p:sp>
-      <p:sp>
-        <p:nvSpPr>
-          <p:cNvPr id="11" name="Text 9"/>
-          <p:cNvSpPr/>
-          <p:nvPr/>
-        </p:nvSpPr>
-        <p:spPr>
-          <a:xfrm>
-            <a:off x="868680" y="1508760"/>
-            <a:ext cx="6537960" cy="4160520"/>
-          </a:xfrm>
-          <a:prstGeom prst="rect">
-            <a:avLst/>
-          </a:prstGeom>
-          <a:noFill/>
-          <a:ln/>
-        </p:spPr>
-        <p:txBody>
-          <a:bodyPr wrap="square" lIns="635" tIns="635" rIns="635" bIns="635" rtlCol="0" anchor="t">
-            <a:normAutofit/>
-          </a:bodyPr>
-          <a:lstStyle/>
-          <a:p>
-            <a:r>
-              <a:rPr lang="en-US" sz="2100" dirty="0">
-                <a:solidFill>
-                  <a:srgbClr val="17364A"/>
-                </a:solidFill>
-                <a:latin typeface="Aptos" pitchFamily="34" charset="0"/>
-                <a:ea typeface="Aptos" pitchFamily="34" charset="-122"/>
-                <a:cs typeface="Aptos" pitchFamily="34" charset="-120"/>
-              </a:rPr>
-              <a:t>RAG supports generative AI by grounding outputs in defined sources.</a:t>
-            </a:r>
-            <a:endParaRPr lang="en-US" sz="2100" dirty="0"/>
-          </a:p>
-          <a:p>
-            <a:r>
-              <a:rPr lang="en-US" sz="2100" dirty="0">
-                <a:solidFill>
-                  <a:srgbClr val="17364A"/>
-                </a:solidFill>
-                <a:latin typeface="Aptos" pitchFamily="34" charset="0"/>
-                <a:ea typeface="Aptos" pitchFamily="34" charset="-122"/>
-                <a:cs typeface="Aptos" pitchFamily="34" charset="-120"/>
-              </a:rPr>
-              <a:t>It may be used in chat assistants, training tools, policy support, emergency operations, procurement.</a:t>
-            </a:r>
-            <a:endParaRPr lang="en-US" sz="2100" dirty="0"/>
-          </a:p>
-          <a:p>
-            <a:r>
-              <a:rPr lang="en-US" sz="2100" dirty="0">
-                <a:solidFill>
-                  <a:srgbClr val="17364A"/>
-                </a:solidFill>
-                <a:latin typeface="Aptos" pitchFamily="34" charset="0"/>
-                <a:ea typeface="Aptos" pitchFamily="34" charset="-122"/>
-                <a:cs typeface="Aptos" pitchFamily="34" charset="-120"/>
-              </a:rPr>
-              <a:t>It can also support agentic workflows by giving agents access to approved guidance, but actions based.</a:t>
-            </a:r>
-            <a:endParaRPr lang="en-US" sz="2100" dirty="0"/>
-          </a:p>
-        </p:txBody>
-      </p:sp>
-      <p:sp>
-        <p:nvSpPr>
-          <p:cNvPr id="12" name="Shape 10"/>
-          <p:cNvSpPr/>
-          <p:nvPr/>
-        </p:nvSpPr>
-        <p:spPr>
-          <a:xfrm>
-            <a:off x="7909560" y="1417320"/>
-            <a:ext cx="3154680" cy="1828800"/>
+            <a:pPr algn="ctr" indent="0" marL="0">
+              <a:buNone/>
+            </a:pPr>
+            <a:r>
+              <a:rPr lang="en-US" sz="1500" b="1" dirty="0">
+                <a:solidFill>
+                  <a:srgbClr val="FFFFFF"/>
+                </a:solidFill>
+                <a:latin typeface="Aptos" pitchFamily="34" charset="0"/>
+                <a:ea typeface="Aptos" pitchFamily="34" charset="-122"/>
+                <a:cs typeface="Aptos" pitchFamily="34" charset="-120"/>
+              </a:rPr>
+              <a:t>Plan</a:t>
+            </a:r>
+            <a:endParaRPr lang="en-US" sz="1500" dirty="0"/>
+          </a:p>
+        </p:txBody>
+      </p:sp>
+      <p:sp>
+        <p:nvSpPr>
+          <p:cNvPr id="16" name="Shape 14"/>
+          <p:cNvSpPr/>
+          <p:nvPr/>
+        </p:nvSpPr>
+        <p:spPr>
+          <a:xfrm>
+            <a:off x="8976360" y="3319272"/>
+            <a:ext cx="792480" cy="749808"/>
           </a:xfrm>
           <a:prstGeom prst="roundRect">
             <a:avLst>
-              <a:gd name="adj" fmla="val 6000"/>
+              <a:gd name="adj" fmla="val 14634"/>
             </a:avLst>
           </a:prstGeom>
           <a:solidFill>
-            <a:srgbClr val="EEF8ED"/>
+            <a:srgbClr val="2F8A28"/>
           </a:solidFill>
           <a:ln w="12700">
             <a:solidFill>
-              <a:srgbClr val="B9D7E6"/>
+              <a:srgbClr val="2F8A28"/>
             </a:solidFill>
             <a:prstDash val="solid"/>
           </a:ln>
@@ -5840,98 +6458,189 @@
       </p:sp>
       <p:sp>
         <p:nvSpPr>
-          <p:cNvPr id="13" name="Text 11"/>
-          <p:cNvSpPr/>
-          <p:nvPr/>
-        </p:nvSpPr>
-        <p:spPr>
-          <a:xfrm>
-            <a:off x="8074152" y="1563624"/>
-            <a:ext cx="2825496" cy="256032"/>
-          </a:xfrm>
-          <a:prstGeom prst="rect">
-            <a:avLst/>
-          </a:prstGeom>
-          <a:noFill/>
-          <a:ln/>
-        </p:spPr>
-        <p:txBody>
-          <a:bodyPr wrap="square" lIns="0" tIns="0" rIns="0" bIns="0" rtlCol="0" anchor="ctr"/>
-          <a:lstStyle/>
-          <a:p>
-            <a:pPr indent="0" marL="0">
-              <a:buNone/>
-            </a:pPr>
-            <a:r>
-              <a:rPr lang="en-US" sz="1300" b="1" dirty="0">
-                <a:solidFill>
-                  <a:srgbClr val="0068B7"/>
-                </a:solidFill>
-                <a:latin typeface="Aptos" pitchFamily="34" charset="0"/>
-                <a:ea typeface="Aptos" pitchFamily="34" charset="-122"/>
-                <a:cs typeface="Aptos" pitchFamily="34" charset="-120"/>
-              </a:rPr>
-              <a:t>Key idea</a:t>
-            </a:r>
-            <a:endParaRPr lang="en-US" sz="1300" dirty="0"/>
-          </a:p>
-        </p:txBody>
-      </p:sp>
-      <p:sp>
-        <p:nvSpPr>
-          <p:cNvPr id="14" name="Text 12"/>
-          <p:cNvSpPr/>
-          <p:nvPr/>
-        </p:nvSpPr>
-        <p:spPr>
-          <a:xfrm>
-            <a:off x="8074152" y="1920240"/>
-            <a:ext cx="2825496" cy="1188720"/>
-          </a:xfrm>
-          <a:prstGeom prst="rect">
-            <a:avLst/>
-          </a:prstGeom>
-          <a:noFill/>
-          <a:ln/>
-        </p:spPr>
-        <p:txBody>
-          <a:bodyPr wrap="square" lIns="0" tIns="0" rIns="0" bIns="0" rtlCol="0" anchor="t">
+          <p:cNvPr id="17" name="Text 15"/>
+          <p:cNvSpPr/>
+          <p:nvPr/>
+        </p:nvSpPr>
+        <p:spPr>
+          <a:xfrm>
+            <a:off x="9049512" y="3511296"/>
+            <a:ext cx="646176" cy="310896"/>
+          </a:xfrm>
+          <a:prstGeom prst="rect">
+            <a:avLst/>
+          </a:prstGeom>
+          <a:noFill/>
+          <a:ln/>
+        </p:spPr>
+        <p:txBody>
+          <a:bodyPr wrap="square" lIns="0" tIns="0" rIns="0" bIns="0" rtlCol="0" anchor="ctr">
             <a:normAutofit/>
           </a:bodyPr>
           <a:lstStyle/>
           <a:p>
-            <a:pPr indent="0" marL="0">
-              <a:buNone/>
-            </a:pPr>
-            <a:r>
-              <a:rPr lang="en-US" sz="1550" dirty="0">
-                <a:solidFill>
-                  <a:srgbClr val="17364A"/>
-                </a:solidFill>
-                <a:latin typeface="Aptos" pitchFamily="34" charset="0"/>
-                <a:ea typeface="Aptos" pitchFamily="34" charset="-122"/>
-                <a:cs typeface="Aptos" pitchFamily="34" charset="-120"/>
-              </a:rPr>
-              <a:t>RAG supports generative AI by grounding outputs in defined sources.</a:t>
-            </a:r>
-            <a:endParaRPr lang="en-US" sz="1550" dirty="0"/>
-          </a:p>
-        </p:txBody>
-      </p:sp>
-      <p:sp>
-        <p:nvSpPr>
-          <p:cNvPr id="15" name="Shape 13"/>
-          <p:cNvSpPr/>
-          <p:nvPr/>
-        </p:nvSpPr>
-        <p:spPr>
-          <a:xfrm>
-            <a:off x="7909560" y="3520440"/>
-            <a:ext cx="3154680" cy="1737360"/>
+            <a:pPr algn="ctr" indent="0" marL="0">
+              <a:buNone/>
+            </a:pPr>
+            <a:r>
+              <a:rPr lang="en-US" sz="1500" b="1" dirty="0">
+                <a:solidFill>
+                  <a:srgbClr val="FFFFFF"/>
+                </a:solidFill>
+                <a:latin typeface="Aptos" pitchFamily="34" charset="0"/>
+                <a:ea typeface="Aptos" pitchFamily="34" charset="-122"/>
+                <a:cs typeface="Aptos" pitchFamily="34" charset="-120"/>
+              </a:rPr>
+              <a:t>Do</a:t>
+            </a:r>
+            <a:endParaRPr lang="en-US" sz="1500" dirty="0"/>
+          </a:p>
+        </p:txBody>
+      </p:sp>
+      <p:sp>
+        <p:nvSpPr>
+          <p:cNvPr id="18" name="Shape 16"/>
+          <p:cNvSpPr/>
+          <p:nvPr/>
+        </p:nvSpPr>
+        <p:spPr>
+          <a:xfrm>
+            <a:off x="10024872" y="3319272"/>
+            <a:ext cx="792480" cy="749808"/>
           </a:xfrm>
           <a:prstGeom prst="roundRect">
             <a:avLst>
-              <a:gd name="adj" fmla="val 6316"/>
+              <a:gd name="adj" fmla="val 14634"/>
+            </a:avLst>
+          </a:prstGeom>
+          <a:solidFill>
+            <a:srgbClr val="D69A2D"/>
+          </a:solidFill>
+          <a:ln w="12700">
+            <a:solidFill>
+              <a:srgbClr val="D69A2D"/>
+            </a:solidFill>
+            <a:prstDash val="solid"/>
+          </a:ln>
+        </p:spPr>
+      </p:sp>
+      <p:sp>
+        <p:nvSpPr>
+          <p:cNvPr id="19" name="Text 17"/>
+          <p:cNvSpPr/>
+          <p:nvPr/>
+        </p:nvSpPr>
+        <p:spPr>
+          <a:xfrm>
+            <a:off x="10098024" y="3511296"/>
+            <a:ext cx="646176" cy="310896"/>
+          </a:xfrm>
+          <a:prstGeom prst="rect">
+            <a:avLst/>
+          </a:prstGeom>
+          <a:noFill/>
+          <a:ln/>
+        </p:spPr>
+        <p:txBody>
+          <a:bodyPr wrap="square" lIns="0" tIns="0" rIns="0" bIns="0" rtlCol="0" anchor="ctr">
+            <a:normAutofit/>
+          </a:bodyPr>
+          <a:lstStyle/>
+          <a:p>
+            <a:pPr algn="ctr" indent="0" marL="0">
+              <a:buNone/>
+            </a:pPr>
+            <a:r>
+              <a:rPr lang="en-US" sz="1500" b="1" dirty="0">
+                <a:solidFill>
+                  <a:srgbClr val="FFFFFF"/>
+                </a:solidFill>
+                <a:latin typeface="Aptos" pitchFamily="34" charset="0"/>
+                <a:ea typeface="Aptos" pitchFamily="34" charset="-122"/>
+                <a:cs typeface="Aptos" pitchFamily="34" charset="-120"/>
+              </a:rPr>
+              <a:t>Review</a:t>
+            </a:r>
+            <a:endParaRPr lang="en-US" sz="1500" dirty="0"/>
+          </a:p>
+        </p:txBody>
+      </p:sp>
+      <p:sp>
+        <p:nvSpPr>
+          <p:cNvPr id="20" name="Shape 18"/>
+          <p:cNvSpPr/>
+          <p:nvPr/>
+        </p:nvSpPr>
+        <p:spPr>
+          <a:xfrm>
+            <a:off x="8293608" y="4389120"/>
+            <a:ext cx="2157984" cy="0"/>
+          </a:xfrm>
+          <a:prstGeom prst="line">
+            <a:avLst/>
+          </a:prstGeom>
+          <a:noFill/>
+          <a:ln w="25400">
+            <a:solidFill>
+              <a:srgbClr val="8ABBD8"/>
+            </a:solidFill>
+            <a:prstDash val="solid"/>
+          </a:ln>
+        </p:spPr>
+      </p:sp>
+      <p:sp>
+        <p:nvSpPr>
+          <p:cNvPr id="21" name="Text 19"/>
+          <p:cNvSpPr/>
+          <p:nvPr/>
+        </p:nvSpPr>
+        <p:spPr>
+          <a:xfrm>
+            <a:off x="7909560" y="3977640"/>
+            <a:ext cx="2926080" cy="182880"/>
+          </a:xfrm>
+          <a:prstGeom prst="rect">
+            <a:avLst/>
+          </a:prstGeom>
+          <a:noFill/>
+          <a:ln/>
+        </p:spPr>
+        <p:txBody>
+          <a:bodyPr wrap="square" lIns="0" tIns="0" rIns="0" bIns="0" rtlCol="0" anchor="ctr"/>
+          <a:lstStyle/>
+          <a:p>
+            <a:pPr algn="ctr" indent="0" marL="0">
+              <a:buNone/>
+            </a:pPr>
+            <a:r>
+              <a:rPr lang="en-US" sz="1000" dirty="0">
+                <a:solidFill>
+                  <a:srgbClr val="003A63"/>
+                </a:solidFill>
+                <a:latin typeface="Aptos" pitchFamily="34" charset="0"/>
+                <a:ea typeface="Aptos" pitchFamily="34" charset="-122"/>
+                <a:cs typeface="Aptos" pitchFamily="34" charset="-120"/>
+              </a:rPr>
+              <a:t>Dependencies visible</a:t>
+            </a:r>
+            <a:endParaRPr lang="en-US" sz="1000" dirty="0"/>
+          </a:p>
+        </p:txBody>
+      </p:sp>
+      <p:sp>
+        <p:nvSpPr>
+          <p:cNvPr id="22" name="Shape 20"/>
+          <p:cNvSpPr/>
+          <p:nvPr/>
+        </p:nvSpPr>
+        <p:spPr>
+          <a:xfrm>
+            <a:off x="7635240" y="4498848"/>
+            <a:ext cx="3474720" cy="1143000"/>
+          </a:xfrm>
+          <a:prstGeom prst="roundRect">
+            <a:avLst>
+              <a:gd name="adj" fmla="val 9600"/>
             </a:avLst>
           </a:prstGeom>
           <a:solidFill>
@@ -5947,14 +6656,14 @@
       </p:sp>
       <p:sp>
         <p:nvSpPr>
-          <p:cNvPr id="16" name="Text 14"/>
-          <p:cNvSpPr/>
-          <p:nvPr/>
-        </p:nvSpPr>
-        <p:spPr>
-          <a:xfrm>
-            <a:off x="8074152" y="3666744"/>
-            <a:ext cx="2825496" cy="256032"/>
+          <p:cNvPr id="23" name="Text 21"/>
+          <p:cNvSpPr/>
+          <p:nvPr/>
+        </p:nvSpPr>
+        <p:spPr>
+          <a:xfrm>
+            <a:off x="7799832" y="4645152"/>
+            <a:ext cx="3145536" cy="256032"/>
           </a:xfrm>
           <a:prstGeom prst="rect">
             <a:avLst/>
@@ -5978,7 +6687,7 @@
                 <a:ea typeface="Aptos" pitchFamily="34" charset="-122"/>
                 <a:cs typeface="Aptos" pitchFamily="34" charset="-120"/>
               </a:rPr>
-              <a:t>Use this for</a:t>
+              <a:t>Next action</a:t>
             </a:r>
             <a:endParaRPr lang="en-US" sz="1300" dirty="0"/>
           </a:p>
@@ -5986,14 +6695,14 @@
       </p:sp>
       <p:sp>
         <p:nvSpPr>
-          <p:cNvPr id="17" name="Text 15"/>
-          <p:cNvSpPr/>
-          <p:nvPr/>
-        </p:nvSpPr>
-        <p:spPr>
-          <a:xfrm>
-            <a:off x="8074152" y="4023360"/>
-            <a:ext cx="2825496" cy="1097280"/>
+          <p:cNvPr id="24" name="Text 22"/>
+          <p:cNvSpPr/>
+          <p:nvPr/>
+        </p:nvSpPr>
+        <p:spPr>
+          <a:xfrm>
+            <a:off x="7799832" y="5001768"/>
+            <a:ext cx="3145536" cy="502920"/>
           </a:xfrm>
           <a:prstGeom prst="rect">
             <a:avLst/>
@@ -6019,7 +6728,7 @@
                 <a:ea typeface="Aptos" pitchFamily="34" charset="-122"/>
                 <a:cs typeface="Aptos" pitchFamily="34" charset="-120"/>
               </a:rPr>
-              <a:t>Connect the concept to public health decisions, safeguards, documentation, or implementation work.</a:t>
+              <a:t>Use the assignment to test whether you can explain the concept, apply it to a realistic public health situation, and identify what would need review before the work moves forward.</a:t>
             </a:r>
             <a:endParaRPr lang="en-US" sz="1550" dirty="0"/>
           </a:p>
@@ -6193,8 +6902,8 @@
         </p:nvSpPr>
         <p:spPr>
           <a:xfrm>
-            <a:off x="9966960" y="6537960"/>
-            <a:ext cx="1645920" cy="201168"/>
+            <a:off x="9646920" y="6537960"/>
+            <a:ext cx="1965960" cy="201168"/>
           </a:xfrm>
           <a:prstGeom prst="rect">
             <a:avLst/>
@@ -6218,7 +6927,7 @@
                 <a:ea typeface="Aptos" pitchFamily="34" charset="-122"/>
                 <a:cs typeface="Aptos" pitchFamily="34" charset="-120"/>
               </a:rPr>
-              <a:t>Â© Paula Soper</a:t>
+              <a:t>Copyright Paula Soper</a:t>
             </a:r>
             <a:endParaRPr lang="en-US" sz="800" dirty="0"/>
           </a:p>
@@ -6265,77 +6974,13 @@
       </p:sp>
       <p:sp>
         <p:nvSpPr>
-          <p:cNvPr id="8" name="Shape 6"/>
+          <p:cNvPr id="8" name="Text 6"/>
           <p:cNvSpPr/>
           <p:nvPr/>
         </p:nvSpPr>
         <p:spPr>
           <a:xfrm>
             <a:off x="640080" y="658368"/>
-            <a:ext cx="420624" cy="420624"/>
-          </a:xfrm>
-          <a:prstGeom prst="ellipse">
-            <a:avLst/>
-          </a:prstGeom>
-          <a:solidFill>
-            <a:srgbClr val="0068B7"/>
-          </a:solidFill>
-          <a:ln w="12700">
-            <a:solidFill>
-              <a:srgbClr val="0068B7"/>
-            </a:solidFill>
-            <a:prstDash val="solid"/>
-          </a:ln>
-        </p:spPr>
-      </p:sp>
-      <p:sp>
-        <p:nvSpPr>
-          <p:cNvPr id="9" name="Text 7"/>
-          <p:cNvSpPr/>
-          <p:nvPr/>
-        </p:nvSpPr>
-        <p:spPr>
-          <a:xfrm>
-            <a:off x="640080" y="731520"/>
-            <a:ext cx="420624" cy="164592"/>
-          </a:xfrm>
-          <a:prstGeom prst="rect">
-            <a:avLst/>
-          </a:prstGeom>
-          <a:noFill/>
-          <a:ln/>
-        </p:spPr>
-        <p:txBody>
-          <a:bodyPr wrap="square" lIns="0" tIns="0" rIns="0" bIns="0" rtlCol="0" anchor="ctr"/>
-          <a:lstStyle/>
-          <a:p>
-            <a:pPr algn="ctr" indent="0" marL="0">
-              <a:buNone/>
-            </a:pPr>
-            <a:r>
-              <a:rPr lang="en-US" sz="1100" b="1" dirty="0">
-                <a:solidFill>
-                  <a:srgbClr val="FFFFFF"/>
-                </a:solidFill>
-                <a:latin typeface="Aptos" pitchFamily="34" charset="0"/>
-                <a:ea typeface="Aptos" pitchFamily="34" charset="-122"/>
-                <a:cs typeface="Aptos" pitchFamily="34" charset="-120"/>
-              </a:rPr>
-              <a:t>8</a:t>
-            </a:r>
-            <a:endParaRPr lang="en-US" sz="1100" dirty="0"/>
-          </a:p>
-        </p:txBody>
-      </p:sp>
-      <p:sp>
-        <p:nvSpPr>
-          <p:cNvPr id="10" name="Text 8"/>
-          <p:cNvSpPr/>
-          <p:nvPr/>
-        </p:nvSpPr>
-        <p:spPr>
-          <a:xfrm>
-            <a:off x="640080" y="621792"/>
             <a:ext cx="10881360" cy="713232"/>
           </a:xfrm>
           <a:prstGeom prst="rect">
@@ -6370,14 +7015,14 @@
       </p:sp>
       <p:sp>
         <p:nvSpPr>
-          <p:cNvPr id="11" name="Text 9"/>
+          <p:cNvPr id="9" name="Text 7"/>
           <p:cNvSpPr/>
           <p:nvPr/>
         </p:nvSpPr>
         <p:spPr>
           <a:xfrm>
             <a:off x="868680" y="1508760"/>
-            <a:ext cx="6537960" cy="4160520"/>
+            <a:ext cx="6309360" cy="4160520"/>
           </a:xfrm>
           <a:prstGeom prst="rect">
             <a:avLst/>
@@ -6436,18 +7081,18 @@
       </p:sp>
       <p:sp>
         <p:nvSpPr>
-          <p:cNvPr id="12" name="Shape 10"/>
-          <p:cNvSpPr/>
-          <p:nvPr/>
-        </p:nvSpPr>
-        <p:spPr>
-          <a:xfrm>
-            <a:off x="7909560" y="1417320"/>
-            <a:ext cx="3154680" cy="1828800"/>
+          <p:cNvPr id="10" name="Shape 8"/>
+          <p:cNvSpPr/>
+          <p:nvPr/>
+        </p:nvSpPr>
+        <p:spPr>
+          <a:xfrm>
+            <a:off x="7635240" y="1325880"/>
+            <a:ext cx="3474720" cy="1325880"/>
           </a:xfrm>
           <a:prstGeom prst="roundRect">
             <a:avLst>
-              <a:gd name="adj" fmla="val 6000"/>
+              <a:gd name="adj" fmla="val 8276"/>
             </a:avLst>
           </a:prstGeom>
           <a:solidFill>
@@ -6463,14 +7108,14 @@
       </p:sp>
       <p:sp>
         <p:nvSpPr>
-          <p:cNvPr id="13" name="Text 11"/>
-          <p:cNvSpPr/>
-          <p:nvPr/>
-        </p:nvSpPr>
-        <p:spPr>
-          <a:xfrm>
-            <a:off x="8074152" y="1563624"/>
-            <a:ext cx="2825496" cy="256032"/>
+          <p:cNvPr id="11" name="Text 9"/>
+          <p:cNvSpPr/>
+          <p:nvPr/>
+        </p:nvSpPr>
+        <p:spPr>
+          <a:xfrm>
+            <a:off x="7799832" y="1472184"/>
+            <a:ext cx="3145536" cy="256032"/>
           </a:xfrm>
           <a:prstGeom prst="rect">
             <a:avLst/>
@@ -6494,7 +7139,7 @@
                 <a:ea typeface="Aptos" pitchFamily="34" charset="-122"/>
                 <a:cs typeface="Aptos" pitchFamily="34" charset="-120"/>
               </a:rPr>
-              <a:t>Key idea</a:t>
+              <a:t>Practice focus</a:t>
             </a:r>
             <a:endParaRPr lang="en-US" sz="1300" dirty="0"/>
           </a:p>
@@ -6502,14 +7147,14 @@
       </p:sp>
       <p:sp>
         <p:nvSpPr>
-          <p:cNvPr id="14" name="Text 12"/>
-          <p:cNvSpPr/>
-          <p:nvPr/>
-        </p:nvSpPr>
-        <p:spPr>
-          <a:xfrm>
-            <a:off x="8074152" y="1920240"/>
-            <a:ext cx="2825496" cy="1188720"/>
+          <p:cNvPr id="12" name="Text 10"/>
+          <p:cNvSpPr/>
+          <p:nvPr/>
+        </p:nvSpPr>
+        <p:spPr>
+          <a:xfrm>
+            <a:off x="7799832" y="1828800"/>
+            <a:ext cx="3145536" cy="685800"/>
           </a:xfrm>
           <a:prstGeom prst="rect">
             <a:avLst/>
@@ -6543,18 +7188,159 @@
       </p:sp>
       <p:sp>
         <p:nvSpPr>
-          <p:cNvPr id="15" name="Shape 13"/>
-          <p:cNvSpPr/>
-          <p:nvPr/>
-        </p:nvSpPr>
-        <p:spPr>
-          <a:xfrm>
-            <a:off x="7909560" y="3520440"/>
-            <a:ext cx="3154680" cy="1737360"/>
+          <p:cNvPr id="13" name="Shape 11"/>
+          <p:cNvSpPr/>
+          <p:nvPr/>
+        </p:nvSpPr>
+        <p:spPr>
+          <a:xfrm>
+            <a:off x="7635240" y="2788920"/>
+            <a:ext cx="3474720" cy="1536192"/>
           </a:xfrm>
           <a:prstGeom prst="roundRect">
             <a:avLst>
-              <a:gd name="adj" fmla="val 6316"/>
+              <a:gd name="adj" fmla="val 7143"/>
+            </a:avLst>
+          </a:prstGeom>
+          <a:solidFill>
+            <a:srgbClr val="FFFFFF">
+              <a:alpha val="88000"/>
+            </a:srgbClr>
+          </a:solidFill>
+          <a:ln w="12700">
+            <a:solidFill>
+              <a:srgbClr val="D6E8F2"/>
+            </a:solidFill>
+            <a:prstDash val="solid"/>
+          </a:ln>
+        </p:spPr>
+      </p:sp>
+      <p:sp>
+        <p:nvSpPr>
+          <p:cNvPr id="14" name="Shape 12"/>
+          <p:cNvSpPr/>
+          <p:nvPr/>
+        </p:nvSpPr>
+        <p:spPr>
+          <a:xfrm>
+            <a:off x="8074152" y="3291840"/>
+            <a:ext cx="2596896" cy="749808"/>
+          </a:xfrm>
+          <a:prstGeom prst="rect">
+            <a:avLst/>
+          </a:prstGeom>
+          <a:solidFill>
+            <a:srgbClr val="EAF6F8"/>
+          </a:solidFill>
+          <a:ln w="12700">
+            <a:solidFill>
+              <a:srgbClr val="8ABBD8"/>
+            </a:solidFill>
+            <a:prstDash val="solid"/>
+          </a:ln>
+        </p:spPr>
+      </p:sp>
+      <p:sp>
+        <p:nvSpPr>
+          <p:cNvPr id="15" name="Shape 13"/>
+          <p:cNvSpPr/>
+          <p:nvPr/>
+        </p:nvSpPr>
+        <p:spPr>
+          <a:xfrm>
+            <a:off x="8202168" y="3721608"/>
+            <a:ext cx="2340864" cy="0"/>
+          </a:xfrm>
+          <a:prstGeom prst="line">
+            <a:avLst/>
+          </a:prstGeom>
+          <a:noFill/>
+          <a:ln w="19050">
+            <a:solidFill>
+              <a:srgbClr val="0068B7"/>
+            </a:solidFill>
+            <a:prstDash val="solid"/>
+          </a:ln>
+        </p:spPr>
+      </p:sp>
+      <p:sp>
+        <p:nvSpPr>
+          <p:cNvPr id="16" name="Shape 14"/>
+          <p:cNvSpPr/>
+          <p:nvPr/>
+        </p:nvSpPr>
+        <p:spPr>
+          <a:xfrm>
+            <a:off x="9198864" y="4206240"/>
+            <a:ext cx="347472" cy="347472"/>
+          </a:xfrm>
+          <a:prstGeom prst="ellipse">
+            <a:avLst/>
+          </a:prstGeom>
+          <a:solidFill>
+            <a:srgbClr val="2F8A28"/>
+          </a:solidFill>
+          <a:ln w="12700">
+            <a:solidFill>
+              <a:srgbClr val="2F8A28"/>
+            </a:solidFill>
+            <a:prstDash val="solid"/>
+          </a:ln>
+        </p:spPr>
+      </p:sp>
+      <p:sp>
+        <p:nvSpPr>
+          <p:cNvPr id="17" name="Text 15"/>
+          <p:cNvSpPr/>
+          <p:nvPr/>
+        </p:nvSpPr>
+        <p:spPr>
+          <a:xfrm>
+            <a:off x="7909560" y="3977640"/>
+            <a:ext cx="2926080" cy="182880"/>
+          </a:xfrm>
+          <a:prstGeom prst="rect">
+            <a:avLst/>
+          </a:prstGeom>
+          <a:noFill/>
+          <a:ln/>
+        </p:spPr>
+        <p:txBody>
+          <a:bodyPr wrap="square" lIns="0" tIns="0" rIns="0" bIns="0" rtlCol="0" anchor="ctr"/>
+          <a:lstStyle/>
+          <a:p>
+            <a:pPr algn="ctr" indent="0" marL="0">
+              <a:buNone/>
+            </a:pPr>
+            <a:r>
+              <a:rPr lang="en-US" sz="1000" dirty="0">
+                <a:solidFill>
+                  <a:srgbClr val="003A63"/>
+                </a:solidFill>
+                <a:latin typeface="Aptos" pitchFamily="34" charset="0"/>
+                <a:ea typeface="Aptos" pitchFamily="34" charset="-122"/>
+                <a:cs typeface="Aptos" pitchFamily="34" charset="-120"/>
+              </a:rPr>
+              <a:t>Concept to action</a:t>
+            </a:r>
+            <a:endParaRPr lang="en-US" sz="1000" dirty="0"/>
+          </a:p>
+        </p:txBody>
+      </p:sp>
+      <p:sp>
+        <p:nvSpPr>
+          <p:cNvPr id="18" name="Shape 16"/>
+          <p:cNvSpPr/>
+          <p:nvPr/>
+        </p:nvSpPr>
+        <p:spPr>
+          <a:xfrm>
+            <a:off x="7635240" y="4498848"/>
+            <a:ext cx="3474720" cy="1143000"/>
+          </a:xfrm>
+          <a:prstGeom prst="roundRect">
+            <a:avLst>
+              <a:gd name="adj" fmla="val 9600"/>
             </a:avLst>
           </a:prstGeom>
           <a:solidFill>
@@ -6570,14 +7356,14 @@
       </p:sp>
       <p:sp>
         <p:nvSpPr>
-          <p:cNvPr id="16" name="Text 14"/>
-          <p:cNvSpPr/>
-          <p:nvPr/>
-        </p:nvSpPr>
-        <p:spPr>
-          <a:xfrm>
-            <a:off x="8074152" y="3666744"/>
-            <a:ext cx="2825496" cy="256032"/>
+          <p:cNvPr id="19" name="Text 17"/>
+          <p:cNvSpPr/>
+          <p:nvPr/>
+        </p:nvSpPr>
+        <p:spPr>
+          <a:xfrm>
+            <a:off x="7799832" y="4645152"/>
+            <a:ext cx="3145536" cy="256032"/>
           </a:xfrm>
           <a:prstGeom prst="rect">
             <a:avLst/>
@@ -6601,7 +7387,7 @@
                 <a:ea typeface="Aptos" pitchFamily="34" charset="-122"/>
                 <a:cs typeface="Aptos" pitchFamily="34" charset="-120"/>
               </a:rPr>
-              <a:t>Use this for</a:t>
+              <a:t>What to produce</a:t>
             </a:r>
             <a:endParaRPr lang="en-US" sz="1300" dirty="0"/>
           </a:p>
@@ -6609,14 +7395,14 @@
       </p:sp>
       <p:sp>
         <p:nvSpPr>
-          <p:cNvPr id="17" name="Text 15"/>
-          <p:cNvSpPr/>
-          <p:nvPr/>
-        </p:nvSpPr>
-        <p:spPr>
-          <a:xfrm>
-            <a:off x="8074152" y="4023360"/>
-            <a:ext cx="2825496" cy="1097280"/>
+          <p:cNvPr id="20" name="Text 18"/>
+          <p:cNvSpPr/>
+          <p:nvPr/>
+        </p:nvSpPr>
+        <p:spPr>
+          <a:xfrm>
+            <a:off x="7799832" y="5001768"/>
+            <a:ext cx="3145536" cy="502920"/>
           </a:xfrm>
           <a:prstGeom prst="rect">
             <a:avLst/>
@@ -6642,7 +7428,7 @@
                 <a:ea typeface="Aptos" pitchFamily="34" charset="-122"/>
                 <a:cs typeface="Aptos" pitchFamily="34" charset="-120"/>
               </a:rPr>
-              <a:t>Connect the concept to public health decisions, safeguards, documentation, or implementation work.</a:t>
+              <a:t>Use the assignment to test whether you can explain the concept, apply it to a realistic public health situation, and identify what would need review before the work moves forward.</a:t>
             </a:r>
             <a:endParaRPr lang="en-US" sz="1550" dirty="0"/>
           </a:p>
@@ -6816,8 +7602,8 @@
         </p:nvSpPr>
         <p:spPr>
           <a:xfrm>
-            <a:off x="9966960" y="6537960"/>
-            <a:ext cx="1645920" cy="201168"/>
+            <a:off x="9646920" y="6537960"/>
+            <a:ext cx="1965960" cy="201168"/>
           </a:xfrm>
           <a:prstGeom prst="rect">
             <a:avLst/>
@@ -6841,7 +7627,7 @@
                 <a:ea typeface="Aptos" pitchFamily="34" charset="-122"/>
                 <a:cs typeface="Aptos" pitchFamily="34" charset="-120"/>
               </a:rPr>
-              <a:t>Â© Paula Soper</a:t>
+              <a:t>Copyright Paula Soper</a:t>
             </a:r>
             <a:endParaRPr lang="en-US" sz="800" dirty="0"/>
           </a:p>
@@ -6936,7 +7722,7 @@
         <p:spPr>
           <a:xfrm>
             <a:off x="868680" y="1508760"/>
-            <a:ext cx="6537960" cy="4160520"/>
+            <a:ext cx="6309360" cy="4160520"/>
           </a:xfrm>
           <a:prstGeom prst="rect">
             <a:avLst/>
@@ -6987,12 +7773,12 @@
         </p:nvSpPr>
         <p:spPr>
           <a:xfrm>
-            <a:off x="7909560" y="1417320"/>
-            <a:ext cx="3154680" cy="1828800"/>
+            <a:off x="7635240" y="1325880"/>
+            <a:ext cx="3474720" cy="1325880"/>
           </a:xfrm>
           <a:prstGeom prst="roundRect">
             <a:avLst>
-              <a:gd name="adj" fmla="val 6000"/>
+              <a:gd name="adj" fmla="val 8276"/>
             </a:avLst>
           </a:prstGeom>
           <a:solidFill>
@@ -7014,8 +7800,8 @@
         </p:nvSpPr>
         <p:spPr>
           <a:xfrm>
-            <a:off x="8074152" y="1563624"/>
-            <a:ext cx="2825496" cy="256032"/>
+            <a:off x="7799832" y="1472184"/>
+            <a:ext cx="3145536" cy="256032"/>
           </a:xfrm>
           <a:prstGeom prst="rect">
             <a:avLst/>
@@ -7039,7 +7825,7 @@
                 <a:ea typeface="Aptos" pitchFamily="34" charset="-122"/>
                 <a:cs typeface="Aptos" pitchFamily="34" charset="-120"/>
               </a:rPr>
-              <a:t>Key idea</a:t>
+              <a:t>Practice focus</a:t>
             </a:r>
             <a:endParaRPr lang="en-US" sz="1300" dirty="0"/>
           </a:p>
@@ -7053,8 +7839,8 @@
         </p:nvSpPr>
         <p:spPr>
           <a:xfrm>
-            <a:off x="8074152" y="1920240"/>
-            <a:ext cx="2825496" cy="1188720"/>
+            <a:off x="7799832" y="1828800"/>
+            <a:ext cx="3145536" cy="685800"/>
           </a:xfrm>
           <a:prstGeom prst="rect">
             <a:avLst/>
@@ -7094,12 +7880,153 @@
         </p:nvSpPr>
         <p:spPr>
           <a:xfrm>
-            <a:off x="7909560" y="3520440"/>
-            <a:ext cx="3154680" cy="1737360"/>
+            <a:off x="7635240" y="2788920"/>
+            <a:ext cx="3474720" cy="1536192"/>
           </a:xfrm>
           <a:prstGeom prst="roundRect">
             <a:avLst>
-              <a:gd name="adj" fmla="val 6316"/>
+              <a:gd name="adj" fmla="val 7143"/>
+            </a:avLst>
+          </a:prstGeom>
+          <a:solidFill>
+            <a:srgbClr val="FFFFFF">
+              <a:alpha val="88000"/>
+            </a:srgbClr>
+          </a:solidFill>
+          <a:ln w="12700">
+            <a:solidFill>
+              <a:srgbClr val="D6E8F2"/>
+            </a:solidFill>
+            <a:prstDash val="solid"/>
+          </a:ln>
+        </p:spPr>
+      </p:sp>
+      <p:sp>
+        <p:nvSpPr>
+          <p:cNvPr id="14" name="Shape 12"/>
+          <p:cNvSpPr/>
+          <p:nvPr/>
+        </p:nvSpPr>
+        <p:spPr>
+          <a:xfrm>
+            <a:off x="8074152" y="3291840"/>
+            <a:ext cx="2596896" cy="749808"/>
+          </a:xfrm>
+          <a:prstGeom prst="rect">
+            <a:avLst/>
+          </a:prstGeom>
+          <a:solidFill>
+            <a:srgbClr val="EAF6F8"/>
+          </a:solidFill>
+          <a:ln w="12700">
+            <a:solidFill>
+              <a:srgbClr val="8ABBD8"/>
+            </a:solidFill>
+            <a:prstDash val="solid"/>
+          </a:ln>
+        </p:spPr>
+      </p:sp>
+      <p:sp>
+        <p:nvSpPr>
+          <p:cNvPr id="15" name="Shape 13"/>
+          <p:cNvSpPr/>
+          <p:nvPr/>
+        </p:nvSpPr>
+        <p:spPr>
+          <a:xfrm>
+            <a:off x="8202168" y="3721608"/>
+            <a:ext cx="2340864" cy="0"/>
+          </a:xfrm>
+          <a:prstGeom prst="line">
+            <a:avLst/>
+          </a:prstGeom>
+          <a:noFill/>
+          <a:ln w="19050">
+            <a:solidFill>
+              <a:srgbClr val="0068B7"/>
+            </a:solidFill>
+            <a:prstDash val="solid"/>
+          </a:ln>
+        </p:spPr>
+      </p:sp>
+      <p:sp>
+        <p:nvSpPr>
+          <p:cNvPr id="16" name="Shape 14"/>
+          <p:cNvSpPr/>
+          <p:nvPr/>
+        </p:nvSpPr>
+        <p:spPr>
+          <a:xfrm>
+            <a:off x="9198864" y="4206240"/>
+            <a:ext cx="347472" cy="347472"/>
+          </a:xfrm>
+          <a:prstGeom prst="ellipse">
+            <a:avLst/>
+          </a:prstGeom>
+          <a:solidFill>
+            <a:srgbClr val="2F8A28"/>
+          </a:solidFill>
+          <a:ln w="12700">
+            <a:solidFill>
+              <a:srgbClr val="2F8A28"/>
+            </a:solidFill>
+            <a:prstDash val="solid"/>
+          </a:ln>
+        </p:spPr>
+      </p:sp>
+      <p:sp>
+        <p:nvSpPr>
+          <p:cNvPr id="17" name="Text 15"/>
+          <p:cNvSpPr/>
+          <p:nvPr/>
+        </p:nvSpPr>
+        <p:spPr>
+          <a:xfrm>
+            <a:off x="7909560" y="3977640"/>
+            <a:ext cx="2926080" cy="182880"/>
+          </a:xfrm>
+          <a:prstGeom prst="rect">
+            <a:avLst/>
+          </a:prstGeom>
+          <a:noFill/>
+          <a:ln/>
+        </p:spPr>
+        <p:txBody>
+          <a:bodyPr wrap="square" lIns="0" tIns="0" rIns="0" bIns="0" rtlCol="0" anchor="ctr"/>
+          <a:lstStyle/>
+          <a:p>
+            <a:pPr algn="ctr" indent="0" marL="0">
+              <a:buNone/>
+            </a:pPr>
+            <a:r>
+              <a:rPr lang="en-US" sz="1000" dirty="0">
+                <a:solidFill>
+                  <a:srgbClr val="003A63"/>
+                </a:solidFill>
+                <a:latin typeface="Aptos" pitchFamily="34" charset="0"/>
+                <a:ea typeface="Aptos" pitchFamily="34" charset="-122"/>
+                <a:cs typeface="Aptos" pitchFamily="34" charset="-120"/>
+              </a:rPr>
+              <a:t>Concept to action</a:t>
+            </a:r>
+            <a:endParaRPr lang="en-US" sz="1000" dirty="0"/>
+          </a:p>
+        </p:txBody>
+      </p:sp>
+      <p:sp>
+        <p:nvSpPr>
+          <p:cNvPr id="18" name="Shape 16"/>
+          <p:cNvSpPr/>
+          <p:nvPr/>
+        </p:nvSpPr>
+        <p:spPr>
+          <a:xfrm>
+            <a:off x="7635240" y="4498848"/>
+            <a:ext cx="3474720" cy="1143000"/>
+          </a:xfrm>
+          <a:prstGeom prst="roundRect">
+            <a:avLst>
+              <a:gd name="adj" fmla="val 9600"/>
             </a:avLst>
           </a:prstGeom>
           <a:solidFill>
@@ -7115,14 +8042,14 @@
       </p:sp>
       <p:sp>
         <p:nvSpPr>
-          <p:cNvPr id="14" name="Text 12"/>
-          <p:cNvSpPr/>
-          <p:nvPr/>
-        </p:nvSpPr>
-        <p:spPr>
-          <a:xfrm>
-            <a:off x="8074152" y="3666744"/>
-            <a:ext cx="2825496" cy="256032"/>
+          <p:cNvPr id="19" name="Text 17"/>
+          <p:cNvSpPr/>
+          <p:nvPr/>
+        </p:nvSpPr>
+        <p:spPr>
+          <a:xfrm>
+            <a:off x="7799832" y="4645152"/>
+            <a:ext cx="3145536" cy="256032"/>
           </a:xfrm>
           <a:prstGeom prst="rect">
             <a:avLst/>
@@ -7146,7 +8073,7 @@
                 <a:ea typeface="Aptos" pitchFamily="34" charset="-122"/>
                 <a:cs typeface="Aptos" pitchFamily="34" charset="-120"/>
               </a:rPr>
-              <a:t>Use this for</a:t>
+              <a:t>What to produce</a:t>
             </a:r>
             <a:endParaRPr lang="en-US" sz="1300" dirty="0"/>
           </a:p>
@@ -7154,14 +8081,14 @@
       </p:sp>
       <p:sp>
         <p:nvSpPr>
-          <p:cNvPr id="15" name="Text 13"/>
-          <p:cNvSpPr/>
-          <p:nvPr/>
-        </p:nvSpPr>
-        <p:spPr>
-          <a:xfrm>
-            <a:off x="8074152" y="4023360"/>
-            <a:ext cx="2825496" cy="1097280"/>
+          <p:cNvPr id="20" name="Text 18"/>
+          <p:cNvSpPr/>
+          <p:nvPr/>
+        </p:nvSpPr>
+        <p:spPr>
+          <a:xfrm>
+            <a:off x="7799832" y="5001768"/>
+            <a:ext cx="3145536" cy="502920"/>
           </a:xfrm>
           <a:prstGeom prst="rect">
             <a:avLst/>
@@ -7187,7 +8114,7 @@
                 <a:ea typeface="Aptos" pitchFamily="34" charset="-122"/>
                 <a:cs typeface="Aptos" pitchFamily="34" charset="-120"/>
               </a:rPr>
-              <a:t>Connect the concept to public health decisions, safeguards, documentation, or implementation work.</a:t>
+              <a:t>Use the assignment to test whether you can explain the concept, apply it to a realistic public health situation, and identify what would need review before the work moves forward.</a:t>
             </a:r>
             <a:endParaRPr lang="en-US" sz="1550" dirty="0"/>
           </a:p>
@@ -7361,8 +8288,8 @@
         </p:nvSpPr>
         <p:spPr>
           <a:xfrm>
-            <a:off x="9966960" y="6537960"/>
-            <a:ext cx="1645920" cy="201168"/>
+            <a:off x="9646920" y="6537960"/>
+            <a:ext cx="1965960" cy="201168"/>
           </a:xfrm>
           <a:prstGeom prst="rect">
             <a:avLst/>
@@ -7386,7 +8313,7 @@
                 <a:ea typeface="Aptos" pitchFamily="34" charset="-122"/>
                 <a:cs typeface="Aptos" pitchFamily="34" charset="-120"/>
               </a:rPr>
-              <a:t>Â© Paula Soper</a:t>
+              <a:t>Copyright Paula Soper</a:t>
             </a:r>
             <a:endParaRPr lang="en-US" sz="800" dirty="0"/>
           </a:p>
@@ -7433,77 +8360,13 @@
       </p:sp>
       <p:sp>
         <p:nvSpPr>
-          <p:cNvPr id="8" name="Shape 6"/>
+          <p:cNvPr id="8" name="Text 6"/>
           <p:cNvSpPr/>
           <p:nvPr/>
         </p:nvSpPr>
         <p:spPr>
           <a:xfrm>
             <a:off x="640080" y="658368"/>
-            <a:ext cx="420624" cy="420624"/>
-          </a:xfrm>
-          <a:prstGeom prst="ellipse">
-            <a:avLst/>
-          </a:prstGeom>
-          <a:solidFill>
-            <a:srgbClr val="0068B7"/>
-          </a:solidFill>
-          <a:ln w="12700">
-            <a:solidFill>
-              <a:srgbClr val="0068B7"/>
-            </a:solidFill>
-            <a:prstDash val="solid"/>
-          </a:ln>
-        </p:spPr>
-      </p:sp>
-      <p:sp>
-        <p:nvSpPr>
-          <p:cNvPr id="9" name="Text 7"/>
-          <p:cNvSpPr/>
-          <p:nvPr/>
-        </p:nvSpPr>
-        <p:spPr>
-          <a:xfrm>
-            <a:off x="640080" y="731520"/>
-            <a:ext cx="420624" cy="164592"/>
-          </a:xfrm>
-          <a:prstGeom prst="rect">
-            <a:avLst/>
-          </a:prstGeom>
-          <a:noFill/>
-          <a:ln/>
-        </p:spPr>
-        <p:txBody>
-          <a:bodyPr wrap="square" lIns="0" tIns="0" rIns="0" bIns="0" rtlCol="0" anchor="ctr"/>
-          <a:lstStyle/>
-          <a:p>
-            <a:pPr algn="ctr" indent="0" marL="0">
-              <a:buNone/>
-            </a:pPr>
-            <a:r>
-              <a:rPr lang="en-US" sz="1100" b="1" dirty="0">
-                <a:solidFill>
-                  <a:srgbClr val="FFFFFF"/>
-                </a:solidFill>
-                <a:latin typeface="Aptos" pitchFamily="34" charset="0"/>
-                <a:ea typeface="Aptos" pitchFamily="34" charset="-122"/>
-                <a:cs typeface="Aptos" pitchFamily="34" charset="-120"/>
-              </a:rPr>
-              <a:t>9</a:t>
-            </a:r>
-            <a:endParaRPr lang="en-US" sz="1100" dirty="0"/>
-          </a:p>
-        </p:txBody>
-      </p:sp>
-      <p:sp>
-        <p:nvSpPr>
-          <p:cNvPr id="10" name="Text 8"/>
-          <p:cNvSpPr/>
-          <p:nvPr/>
-        </p:nvSpPr>
-        <p:spPr>
-          <a:xfrm>
-            <a:off x="640080" y="621792"/>
             <a:ext cx="10881360" cy="713232"/>
           </a:xfrm>
           <a:prstGeom prst="rect">
@@ -7538,14 +8401,14 @@
       </p:sp>
       <p:sp>
         <p:nvSpPr>
-          <p:cNvPr id="11" name="Text 9"/>
+          <p:cNvPr id="9" name="Text 7"/>
           <p:cNvSpPr/>
           <p:nvPr/>
         </p:nvSpPr>
         <p:spPr>
           <a:xfrm>
             <a:off x="868680" y="1508760"/>
-            <a:ext cx="6537960" cy="4160520"/>
+            <a:ext cx="6309360" cy="4160520"/>
           </a:xfrm>
           <a:prstGeom prst="rect">
             <a:avLst/>
@@ -7604,18 +8467,18 @@
       </p:sp>
       <p:sp>
         <p:nvSpPr>
-          <p:cNvPr id="12" name="Shape 10"/>
-          <p:cNvSpPr/>
-          <p:nvPr/>
-        </p:nvSpPr>
-        <p:spPr>
-          <a:xfrm>
-            <a:off x="7909560" y="1417320"/>
-            <a:ext cx="3154680" cy="1828800"/>
+          <p:cNvPr id="10" name="Shape 8"/>
+          <p:cNvSpPr/>
+          <p:nvPr/>
+        </p:nvSpPr>
+        <p:spPr>
+          <a:xfrm>
+            <a:off x="7635240" y="1325880"/>
+            <a:ext cx="3474720" cy="1325880"/>
           </a:xfrm>
           <a:prstGeom prst="roundRect">
             <a:avLst>
-              <a:gd name="adj" fmla="val 6000"/>
+              <a:gd name="adj" fmla="val 8276"/>
             </a:avLst>
           </a:prstGeom>
           <a:solidFill>
@@ -7631,14 +8494,14 @@
       </p:sp>
       <p:sp>
         <p:nvSpPr>
-          <p:cNvPr id="13" name="Text 11"/>
-          <p:cNvSpPr/>
-          <p:nvPr/>
-        </p:nvSpPr>
-        <p:spPr>
-          <a:xfrm>
-            <a:off x="8074152" y="1563624"/>
-            <a:ext cx="2825496" cy="256032"/>
+          <p:cNvPr id="11" name="Text 9"/>
+          <p:cNvSpPr/>
+          <p:nvPr/>
+        </p:nvSpPr>
+        <p:spPr>
+          <a:xfrm>
+            <a:off x="7799832" y="1472184"/>
+            <a:ext cx="3145536" cy="256032"/>
           </a:xfrm>
           <a:prstGeom prst="rect">
             <a:avLst/>
@@ -7662,7 +8525,7 @@
                 <a:ea typeface="Aptos" pitchFamily="34" charset="-122"/>
                 <a:cs typeface="Aptos" pitchFamily="34" charset="-120"/>
               </a:rPr>
-              <a:t>Key idea</a:t>
+              <a:t>Practice focus</a:t>
             </a:r>
             <a:endParaRPr lang="en-US" sz="1300" dirty="0"/>
           </a:p>
@@ -7670,14 +8533,14 @@
       </p:sp>
       <p:sp>
         <p:nvSpPr>
-          <p:cNvPr id="14" name="Text 12"/>
-          <p:cNvSpPr/>
-          <p:nvPr/>
-        </p:nvSpPr>
-        <p:spPr>
-          <a:xfrm>
-            <a:off x="8074152" y="1920240"/>
-            <a:ext cx="2825496" cy="1188720"/>
+          <p:cNvPr id="12" name="Text 10"/>
+          <p:cNvSpPr/>
+          <p:nvPr/>
+        </p:nvSpPr>
+        <p:spPr>
+          <a:xfrm>
+            <a:off x="7799832" y="1828800"/>
+            <a:ext cx="3145536" cy="685800"/>
           </a:xfrm>
           <a:prstGeom prst="rect">
             <a:avLst/>
@@ -7711,18 +8574,159 @@
       </p:sp>
       <p:sp>
         <p:nvSpPr>
-          <p:cNvPr id="15" name="Shape 13"/>
-          <p:cNvSpPr/>
-          <p:nvPr/>
-        </p:nvSpPr>
-        <p:spPr>
-          <a:xfrm>
-            <a:off x="7909560" y="3520440"/>
-            <a:ext cx="3154680" cy="1737360"/>
+          <p:cNvPr id="13" name="Shape 11"/>
+          <p:cNvSpPr/>
+          <p:nvPr/>
+        </p:nvSpPr>
+        <p:spPr>
+          <a:xfrm>
+            <a:off x="7635240" y="2788920"/>
+            <a:ext cx="3474720" cy="1536192"/>
           </a:xfrm>
           <a:prstGeom prst="roundRect">
             <a:avLst>
-              <a:gd name="adj" fmla="val 6316"/>
+              <a:gd name="adj" fmla="val 7143"/>
+            </a:avLst>
+          </a:prstGeom>
+          <a:solidFill>
+            <a:srgbClr val="FFFFFF">
+              <a:alpha val="88000"/>
+            </a:srgbClr>
+          </a:solidFill>
+          <a:ln w="12700">
+            <a:solidFill>
+              <a:srgbClr val="D6E8F2"/>
+            </a:solidFill>
+            <a:prstDash val="solid"/>
+          </a:ln>
+        </p:spPr>
+      </p:sp>
+      <p:sp>
+        <p:nvSpPr>
+          <p:cNvPr id="14" name="Shape 12"/>
+          <p:cNvSpPr/>
+          <p:nvPr/>
+        </p:nvSpPr>
+        <p:spPr>
+          <a:xfrm>
+            <a:off x="8074152" y="3291840"/>
+            <a:ext cx="2596896" cy="749808"/>
+          </a:xfrm>
+          <a:prstGeom prst="rect">
+            <a:avLst/>
+          </a:prstGeom>
+          <a:solidFill>
+            <a:srgbClr val="EAF6F8"/>
+          </a:solidFill>
+          <a:ln w="12700">
+            <a:solidFill>
+              <a:srgbClr val="8ABBD8"/>
+            </a:solidFill>
+            <a:prstDash val="solid"/>
+          </a:ln>
+        </p:spPr>
+      </p:sp>
+      <p:sp>
+        <p:nvSpPr>
+          <p:cNvPr id="15" name="Shape 13"/>
+          <p:cNvSpPr/>
+          <p:nvPr/>
+        </p:nvSpPr>
+        <p:spPr>
+          <a:xfrm>
+            <a:off x="8202168" y="3721608"/>
+            <a:ext cx="2340864" cy="0"/>
+          </a:xfrm>
+          <a:prstGeom prst="line">
+            <a:avLst/>
+          </a:prstGeom>
+          <a:noFill/>
+          <a:ln w="19050">
+            <a:solidFill>
+              <a:srgbClr val="0068B7"/>
+            </a:solidFill>
+            <a:prstDash val="solid"/>
+          </a:ln>
+        </p:spPr>
+      </p:sp>
+      <p:sp>
+        <p:nvSpPr>
+          <p:cNvPr id="16" name="Shape 14"/>
+          <p:cNvSpPr/>
+          <p:nvPr/>
+        </p:nvSpPr>
+        <p:spPr>
+          <a:xfrm>
+            <a:off x="9198864" y="4206240"/>
+            <a:ext cx="347472" cy="347472"/>
+          </a:xfrm>
+          <a:prstGeom prst="ellipse">
+            <a:avLst/>
+          </a:prstGeom>
+          <a:solidFill>
+            <a:srgbClr val="2F8A28"/>
+          </a:solidFill>
+          <a:ln w="12700">
+            <a:solidFill>
+              <a:srgbClr val="2F8A28"/>
+            </a:solidFill>
+            <a:prstDash val="solid"/>
+          </a:ln>
+        </p:spPr>
+      </p:sp>
+      <p:sp>
+        <p:nvSpPr>
+          <p:cNvPr id="17" name="Text 15"/>
+          <p:cNvSpPr/>
+          <p:nvPr/>
+        </p:nvSpPr>
+        <p:spPr>
+          <a:xfrm>
+            <a:off x="7909560" y="3977640"/>
+            <a:ext cx="2926080" cy="182880"/>
+          </a:xfrm>
+          <a:prstGeom prst="rect">
+            <a:avLst/>
+          </a:prstGeom>
+          <a:noFill/>
+          <a:ln/>
+        </p:spPr>
+        <p:txBody>
+          <a:bodyPr wrap="square" lIns="0" tIns="0" rIns="0" bIns="0" rtlCol="0" anchor="ctr"/>
+          <a:lstStyle/>
+          <a:p>
+            <a:pPr algn="ctr" indent="0" marL="0">
+              <a:buNone/>
+            </a:pPr>
+            <a:r>
+              <a:rPr lang="en-US" sz="1000" dirty="0">
+                <a:solidFill>
+                  <a:srgbClr val="003A63"/>
+                </a:solidFill>
+                <a:latin typeface="Aptos" pitchFamily="34" charset="0"/>
+                <a:ea typeface="Aptos" pitchFamily="34" charset="-122"/>
+                <a:cs typeface="Aptos" pitchFamily="34" charset="-120"/>
+              </a:rPr>
+              <a:t>Concept to action</a:t>
+            </a:r>
+            <a:endParaRPr lang="en-US" sz="1000" dirty="0"/>
+          </a:p>
+        </p:txBody>
+      </p:sp>
+      <p:sp>
+        <p:nvSpPr>
+          <p:cNvPr id="18" name="Shape 16"/>
+          <p:cNvSpPr/>
+          <p:nvPr/>
+        </p:nvSpPr>
+        <p:spPr>
+          <a:xfrm>
+            <a:off x="7635240" y="4498848"/>
+            <a:ext cx="3474720" cy="1143000"/>
+          </a:xfrm>
+          <a:prstGeom prst="roundRect">
+            <a:avLst>
+              <a:gd name="adj" fmla="val 9600"/>
             </a:avLst>
           </a:prstGeom>
           <a:solidFill>
@@ -7738,14 +8742,14 @@
       </p:sp>
       <p:sp>
         <p:nvSpPr>
-          <p:cNvPr id="16" name="Text 14"/>
-          <p:cNvSpPr/>
-          <p:nvPr/>
-        </p:nvSpPr>
-        <p:spPr>
-          <a:xfrm>
-            <a:off x="8074152" y="3666744"/>
-            <a:ext cx="2825496" cy="256032"/>
+          <p:cNvPr id="19" name="Text 17"/>
+          <p:cNvSpPr/>
+          <p:nvPr/>
+        </p:nvSpPr>
+        <p:spPr>
+          <a:xfrm>
+            <a:off x="7799832" y="4645152"/>
+            <a:ext cx="3145536" cy="256032"/>
           </a:xfrm>
           <a:prstGeom prst="rect">
             <a:avLst/>
@@ -7769,7 +8773,7 @@
                 <a:ea typeface="Aptos" pitchFamily="34" charset="-122"/>
                 <a:cs typeface="Aptos" pitchFamily="34" charset="-120"/>
               </a:rPr>
-              <a:t>Use this for</a:t>
+              <a:t>What to produce</a:t>
             </a:r>
             <a:endParaRPr lang="en-US" sz="1300" dirty="0"/>
           </a:p>
@@ -7777,14 +8781,14 @@
       </p:sp>
       <p:sp>
         <p:nvSpPr>
-          <p:cNvPr id="17" name="Text 15"/>
-          <p:cNvSpPr/>
-          <p:nvPr/>
-        </p:nvSpPr>
-        <p:spPr>
-          <a:xfrm>
-            <a:off x="8074152" y="4023360"/>
-            <a:ext cx="2825496" cy="1097280"/>
+          <p:cNvPr id="20" name="Text 18"/>
+          <p:cNvSpPr/>
+          <p:nvPr/>
+        </p:nvSpPr>
+        <p:spPr>
+          <a:xfrm>
+            <a:off x="7799832" y="5001768"/>
+            <a:ext cx="3145536" cy="502920"/>
           </a:xfrm>
           <a:prstGeom prst="rect">
             <a:avLst/>
@@ -7810,7 +8814,7 @@
                 <a:ea typeface="Aptos" pitchFamily="34" charset="-122"/>
                 <a:cs typeface="Aptos" pitchFamily="34" charset="-120"/>
               </a:rPr>
-              <a:t>Connect the concept to public health decisions, safeguards, documentation, or implementation work.</a:t>
+              <a:t>Use the assignment to test whether you can explain the concept, apply it to a realistic public health situation, and identify what would need review before the work moves forward.</a:t>
             </a:r>
             <a:endParaRPr lang="en-US" sz="1550" dirty="0"/>
           </a:p>
@@ -7984,8 +8988,8 @@
         </p:nvSpPr>
         <p:spPr>
           <a:xfrm>
-            <a:off x="9966960" y="6537960"/>
-            <a:ext cx="1645920" cy="201168"/>
+            <a:off x="9646920" y="6537960"/>
+            <a:ext cx="1965960" cy="201168"/>
           </a:xfrm>
           <a:prstGeom prst="rect">
             <a:avLst/>
@@ -8009,7 +9013,7 @@
                 <a:ea typeface="Aptos" pitchFamily="34" charset="-122"/>
                 <a:cs typeface="Aptos" pitchFamily="34" charset="-120"/>
               </a:rPr>
-              <a:t>Â© Paula Soper</a:t>
+              <a:t>Copyright Paula Soper</a:t>
             </a:r>
             <a:endParaRPr lang="en-US" sz="800" dirty="0"/>
           </a:p>
@@ -8056,77 +9060,13 @@
       </p:sp>
       <p:sp>
         <p:nvSpPr>
-          <p:cNvPr id="8" name="Shape 6"/>
+          <p:cNvPr id="8" name="Text 6"/>
           <p:cNvSpPr/>
           <p:nvPr/>
         </p:nvSpPr>
         <p:spPr>
           <a:xfrm>
             <a:off x="640080" y="658368"/>
-            <a:ext cx="420624" cy="420624"/>
-          </a:xfrm>
-          <a:prstGeom prst="ellipse">
-            <a:avLst/>
-          </a:prstGeom>
-          <a:solidFill>
-            <a:srgbClr val="0068B7"/>
-          </a:solidFill>
-          <a:ln w="12700">
-            <a:solidFill>
-              <a:srgbClr val="0068B7"/>
-            </a:solidFill>
-            <a:prstDash val="solid"/>
-          </a:ln>
-        </p:spPr>
-      </p:sp>
-      <p:sp>
-        <p:nvSpPr>
-          <p:cNvPr id="9" name="Text 7"/>
-          <p:cNvSpPr/>
-          <p:nvPr/>
-        </p:nvSpPr>
-        <p:spPr>
-          <a:xfrm>
-            <a:off x="640080" y="731520"/>
-            <a:ext cx="420624" cy="164592"/>
-          </a:xfrm>
-          <a:prstGeom prst="rect">
-            <a:avLst/>
-          </a:prstGeom>
-          <a:noFill/>
-          <a:ln/>
-        </p:spPr>
-        <p:txBody>
-          <a:bodyPr wrap="square" lIns="0" tIns="0" rIns="0" bIns="0" rtlCol="0" anchor="ctr"/>
-          <a:lstStyle/>
-          <a:p>
-            <a:pPr algn="ctr" indent="0" marL="0">
-              <a:buNone/>
-            </a:pPr>
-            <a:r>
-              <a:rPr lang="en-US" sz="1100" b="1" dirty="0">
-                <a:solidFill>
-                  <a:srgbClr val="FFFFFF"/>
-                </a:solidFill>
-                <a:latin typeface="Aptos" pitchFamily="34" charset="0"/>
-                <a:ea typeface="Aptos" pitchFamily="34" charset="-122"/>
-                <a:cs typeface="Aptos" pitchFamily="34" charset="-120"/>
-              </a:rPr>
-              <a:t>10</a:t>
-            </a:r>
-            <a:endParaRPr lang="en-US" sz="1100" dirty="0"/>
-          </a:p>
-        </p:txBody>
-      </p:sp>
-      <p:sp>
-        <p:nvSpPr>
-          <p:cNvPr id="10" name="Text 8"/>
-          <p:cNvSpPr/>
-          <p:nvPr/>
-        </p:nvSpPr>
-        <p:spPr>
-          <a:xfrm>
-            <a:off x="640080" y="621792"/>
             <a:ext cx="10881360" cy="713232"/>
           </a:xfrm>
           <a:prstGeom prst="rect">
@@ -8161,14 +9101,14 @@
       </p:sp>
       <p:sp>
         <p:nvSpPr>
-          <p:cNvPr id="11" name="Text 9"/>
+          <p:cNvPr id="9" name="Text 7"/>
           <p:cNvSpPr/>
           <p:nvPr/>
         </p:nvSpPr>
         <p:spPr>
           <a:xfrm>
             <a:off x="868680" y="1508760"/>
-            <a:ext cx="6537960" cy="4160520"/>
+            <a:ext cx="6309360" cy="4160520"/>
           </a:xfrm>
           <a:prstGeom prst="rect">
             <a:avLst/>
@@ -8227,18 +9167,18 @@
       </p:sp>
       <p:sp>
         <p:nvSpPr>
-          <p:cNvPr id="12" name="Shape 10"/>
-          <p:cNvSpPr/>
-          <p:nvPr/>
-        </p:nvSpPr>
-        <p:spPr>
-          <a:xfrm>
-            <a:off x="7909560" y="1417320"/>
-            <a:ext cx="3154680" cy="1828800"/>
+          <p:cNvPr id="10" name="Shape 8"/>
+          <p:cNvSpPr/>
+          <p:nvPr/>
+        </p:nvSpPr>
+        <p:spPr>
+          <a:xfrm>
+            <a:off x="7635240" y="1325880"/>
+            <a:ext cx="3474720" cy="1325880"/>
           </a:xfrm>
           <a:prstGeom prst="roundRect">
             <a:avLst>
-              <a:gd name="adj" fmla="val 6000"/>
+              <a:gd name="adj" fmla="val 8276"/>
             </a:avLst>
           </a:prstGeom>
           <a:solidFill>
@@ -8254,14 +9194,14 @@
       </p:sp>
       <p:sp>
         <p:nvSpPr>
-          <p:cNvPr id="13" name="Text 11"/>
-          <p:cNvSpPr/>
-          <p:nvPr/>
-        </p:nvSpPr>
-        <p:spPr>
-          <a:xfrm>
-            <a:off x="8074152" y="1563624"/>
-            <a:ext cx="2825496" cy="256032"/>
+          <p:cNvPr id="11" name="Text 9"/>
+          <p:cNvSpPr/>
+          <p:nvPr/>
+        </p:nvSpPr>
+        <p:spPr>
+          <a:xfrm>
+            <a:off x="7799832" y="1472184"/>
+            <a:ext cx="3145536" cy="256032"/>
           </a:xfrm>
           <a:prstGeom prst="rect">
             <a:avLst/>
@@ -8285,7 +9225,7 @@
                 <a:ea typeface="Aptos" pitchFamily="34" charset="-122"/>
                 <a:cs typeface="Aptos" pitchFamily="34" charset="-120"/>
               </a:rPr>
-              <a:t>Key idea</a:t>
+              <a:t>Practice focus</a:t>
             </a:r>
             <a:endParaRPr lang="en-US" sz="1300" dirty="0"/>
           </a:p>
@@ -8293,14 +9233,14 @@
       </p:sp>
       <p:sp>
         <p:nvSpPr>
-          <p:cNvPr id="14" name="Text 12"/>
-          <p:cNvSpPr/>
-          <p:nvPr/>
-        </p:nvSpPr>
-        <p:spPr>
-          <a:xfrm>
-            <a:off x="8074152" y="1920240"/>
-            <a:ext cx="2825496" cy="1188720"/>
+          <p:cNvPr id="12" name="Text 10"/>
+          <p:cNvSpPr/>
+          <p:nvPr/>
+        </p:nvSpPr>
+        <p:spPr>
+          <a:xfrm>
+            <a:off x="7799832" y="1828800"/>
+            <a:ext cx="3145536" cy="685800"/>
           </a:xfrm>
           <a:prstGeom prst="rect">
             <a:avLst/>
@@ -8334,18 +9274,159 @@
       </p:sp>
       <p:sp>
         <p:nvSpPr>
-          <p:cNvPr id="15" name="Shape 13"/>
-          <p:cNvSpPr/>
-          <p:nvPr/>
-        </p:nvSpPr>
-        <p:spPr>
-          <a:xfrm>
-            <a:off x="7909560" y="3520440"/>
-            <a:ext cx="3154680" cy="1737360"/>
+          <p:cNvPr id="13" name="Shape 11"/>
+          <p:cNvSpPr/>
+          <p:nvPr/>
+        </p:nvSpPr>
+        <p:spPr>
+          <a:xfrm>
+            <a:off x="7635240" y="2788920"/>
+            <a:ext cx="3474720" cy="1536192"/>
           </a:xfrm>
           <a:prstGeom prst="roundRect">
             <a:avLst>
-              <a:gd name="adj" fmla="val 6316"/>
+              <a:gd name="adj" fmla="val 7143"/>
+            </a:avLst>
+          </a:prstGeom>
+          <a:solidFill>
+            <a:srgbClr val="FFFFFF">
+              <a:alpha val="88000"/>
+            </a:srgbClr>
+          </a:solidFill>
+          <a:ln w="12700">
+            <a:solidFill>
+              <a:srgbClr val="D6E8F2"/>
+            </a:solidFill>
+            <a:prstDash val="solid"/>
+          </a:ln>
+        </p:spPr>
+      </p:sp>
+      <p:sp>
+        <p:nvSpPr>
+          <p:cNvPr id="14" name="Shape 12"/>
+          <p:cNvSpPr/>
+          <p:nvPr/>
+        </p:nvSpPr>
+        <p:spPr>
+          <a:xfrm>
+            <a:off x="8074152" y="3291840"/>
+            <a:ext cx="2596896" cy="749808"/>
+          </a:xfrm>
+          <a:prstGeom prst="rect">
+            <a:avLst/>
+          </a:prstGeom>
+          <a:solidFill>
+            <a:srgbClr val="EAF6F8"/>
+          </a:solidFill>
+          <a:ln w="12700">
+            <a:solidFill>
+              <a:srgbClr val="8ABBD8"/>
+            </a:solidFill>
+            <a:prstDash val="solid"/>
+          </a:ln>
+        </p:spPr>
+      </p:sp>
+      <p:sp>
+        <p:nvSpPr>
+          <p:cNvPr id="15" name="Shape 13"/>
+          <p:cNvSpPr/>
+          <p:nvPr/>
+        </p:nvSpPr>
+        <p:spPr>
+          <a:xfrm>
+            <a:off x="8202168" y="3721608"/>
+            <a:ext cx="2340864" cy="0"/>
+          </a:xfrm>
+          <a:prstGeom prst="line">
+            <a:avLst/>
+          </a:prstGeom>
+          <a:noFill/>
+          <a:ln w="19050">
+            <a:solidFill>
+              <a:srgbClr val="0068B7"/>
+            </a:solidFill>
+            <a:prstDash val="solid"/>
+          </a:ln>
+        </p:spPr>
+      </p:sp>
+      <p:sp>
+        <p:nvSpPr>
+          <p:cNvPr id="16" name="Shape 14"/>
+          <p:cNvSpPr/>
+          <p:nvPr/>
+        </p:nvSpPr>
+        <p:spPr>
+          <a:xfrm>
+            <a:off x="9198864" y="4206240"/>
+            <a:ext cx="347472" cy="347472"/>
+          </a:xfrm>
+          <a:prstGeom prst="ellipse">
+            <a:avLst/>
+          </a:prstGeom>
+          <a:solidFill>
+            <a:srgbClr val="2F8A28"/>
+          </a:solidFill>
+          <a:ln w="12700">
+            <a:solidFill>
+              <a:srgbClr val="2F8A28"/>
+            </a:solidFill>
+            <a:prstDash val="solid"/>
+          </a:ln>
+        </p:spPr>
+      </p:sp>
+      <p:sp>
+        <p:nvSpPr>
+          <p:cNvPr id="17" name="Text 15"/>
+          <p:cNvSpPr/>
+          <p:nvPr/>
+        </p:nvSpPr>
+        <p:spPr>
+          <a:xfrm>
+            <a:off x="7909560" y="3977640"/>
+            <a:ext cx="2926080" cy="182880"/>
+          </a:xfrm>
+          <a:prstGeom prst="rect">
+            <a:avLst/>
+          </a:prstGeom>
+          <a:noFill/>
+          <a:ln/>
+        </p:spPr>
+        <p:txBody>
+          <a:bodyPr wrap="square" lIns="0" tIns="0" rIns="0" bIns="0" rtlCol="0" anchor="ctr"/>
+          <a:lstStyle/>
+          <a:p>
+            <a:pPr algn="ctr" indent="0" marL="0">
+              <a:buNone/>
+            </a:pPr>
+            <a:r>
+              <a:rPr lang="en-US" sz="1000" dirty="0">
+                <a:solidFill>
+                  <a:srgbClr val="003A63"/>
+                </a:solidFill>
+                <a:latin typeface="Aptos" pitchFamily="34" charset="0"/>
+                <a:ea typeface="Aptos" pitchFamily="34" charset="-122"/>
+                <a:cs typeface="Aptos" pitchFamily="34" charset="-120"/>
+              </a:rPr>
+              <a:t>Concept to action</a:t>
+            </a:r>
+            <a:endParaRPr lang="en-US" sz="1000" dirty="0"/>
+          </a:p>
+        </p:txBody>
+      </p:sp>
+      <p:sp>
+        <p:nvSpPr>
+          <p:cNvPr id="18" name="Shape 16"/>
+          <p:cNvSpPr/>
+          <p:nvPr/>
+        </p:nvSpPr>
+        <p:spPr>
+          <a:xfrm>
+            <a:off x="7635240" y="4498848"/>
+            <a:ext cx="3474720" cy="1143000"/>
+          </a:xfrm>
+          <a:prstGeom prst="roundRect">
+            <a:avLst>
+              <a:gd name="adj" fmla="val 9600"/>
             </a:avLst>
           </a:prstGeom>
           <a:solidFill>
@@ -8361,14 +9442,14 @@
       </p:sp>
       <p:sp>
         <p:nvSpPr>
-          <p:cNvPr id="16" name="Text 14"/>
-          <p:cNvSpPr/>
-          <p:nvPr/>
-        </p:nvSpPr>
-        <p:spPr>
-          <a:xfrm>
-            <a:off x="8074152" y="3666744"/>
-            <a:ext cx="2825496" cy="256032"/>
+          <p:cNvPr id="19" name="Text 17"/>
+          <p:cNvSpPr/>
+          <p:nvPr/>
+        </p:nvSpPr>
+        <p:spPr>
+          <a:xfrm>
+            <a:off x="7799832" y="4645152"/>
+            <a:ext cx="3145536" cy="256032"/>
           </a:xfrm>
           <a:prstGeom prst="rect">
             <a:avLst/>
@@ -8392,7 +9473,7 @@
                 <a:ea typeface="Aptos" pitchFamily="34" charset="-122"/>
                 <a:cs typeface="Aptos" pitchFamily="34" charset="-120"/>
               </a:rPr>
-              <a:t>Use this for</a:t>
+              <a:t>What to produce</a:t>
             </a:r>
             <a:endParaRPr lang="en-US" sz="1300" dirty="0"/>
           </a:p>
@@ -8400,14 +9481,14 @@
       </p:sp>
       <p:sp>
         <p:nvSpPr>
-          <p:cNvPr id="17" name="Text 15"/>
-          <p:cNvSpPr/>
-          <p:nvPr/>
-        </p:nvSpPr>
-        <p:spPr>
-          <a:xfrm>
-            <a:off x="8074152" y="4023360"/>
-            <a:ext cx="2825496" cy="1097280"/>
+          <p:cNvPr id="20" name="Text 18"/>
+          <p:cNvSpPr/>
+          <p:nvPr/>
+        </p:nvSpPr>
+        <p:spPr>
+          <a:xfrm>
+            <a:off x="7799832" y="5001768"/>
+            <a:ext cx="3145536" cy="502920"/>
           </a:xfrm>
           <a:prstGeom prst="rect">
             <a:avLst/>
@@ -8433,7 +9514,7 @@
                 <a:ea typeface="Aptos" pitchFamily="34" charset="-122"/>
                 <a:cs typeface="Aptos" pitchFamily="34" charset="-120"/>
               </a:rPr>
-              <a:t>Connect the concept to public health decisions, safeguards, documentation, or implementation work.</a:t>
+              <a:t>Use the assignment to test whether you can explain the concept, apply it to a realistic public health situation, and identify what would need review before the work moves forward.</a:t>
             </a:r>
             <a:endParaRPr lang="en-US" sz="1550" dirty="0"/>
           </a:p>
@@ -8607,8 +9688,8 @@
         </p:nvSpPr>
         <p:spPr>
           <a:xfrm>
-            <a:off x="9966960" y="6537960"/>
-            <a:ext cx="1645920" cy="201168"/>
+            <a:off x="9646920" y="6537960"/>
+            <a:ext cx="1965960" cy="201168"/>
           </a:xfrm>
           <a:prstGeom prst="rect">
             <a:avLst/>
@@ -8632,7 +9713,7 @@
                 <a:ea typeface="Aptos" pitchFamily="34" charset="-122"/>
                 <a:cs typeface="Aptos" pitchFamily="34" charset="-120"/>
               </a:rPr>
-              <a:t>Â© Paula Soper</a:t>
+              <a:t>Copyright Paula Soper</a:t>
             </a:r>
             <a:endParaRPr lang="en-US" sz="800" dirty="0"/>
           </a:p>
@@ -8727,7 +9808,7 @@
         <p:spPr>
           <a:xfrm>
             <a:off x="868680" y="1508760"/>
-            <a:ext cx="6537960" cy="4160520"/>
+            <a:ext cx="6309360" cy="4160520"/>
           </a:xfrm>
           <a:prstGeom prst="rect">
             <a:avLst/>
@@ -8764,12 +9845,12 @@
         </p:nvSpPr>
         <p:spPr>
           <a:xfrm>
-            <a:off x="7909560" y="1417320"/>
-            <a:ext cx="3154680" cy="1828800"/>
+            <a:off x="7635240" y="1325880"/>
+            <a:ext cx="3474720" cy="1325880"/>
           </a:xfrm>
           <a:prstGeom prst="roundRect">
             <a:avLst>
-              <a:gd name="adj" fmla="val 6000"/>
+              <a:gd name="adj" fmla="val 8276"/>
             </a:avLst>
           </a:prstGeom>
           <a:solidFill>
@@ -8791,8 +9872,8 @@
         </p:nvSpPr>
         <p:spPr>
           <a:xfrm>
-            <a:off x="8074152" y="1563624"/>
-            <a:ext cx="2825496" cy="256032"/>
+            <a:off x="7799832" y="1472184"/>
+            <a:ext cx="3145536" cy="256032"/>
           </a:xfrm>
           <a:prstGeom prst="rect">
             <a:avLst/>
@@ -8816,7 +9897,7 @@
                 <a:ea typeface="Aptos" pitchFamily="34" charset="-122"/>
                 <a:cs typeface="Aptos" pitchFamily="34" charset="-120"/>
               </a:rPr>
-              <a:t>Key idea</a:t>
+              <a:t>Practice focus</a:t>
             </a:r>
             <a:endParaRPr lang="en-US" sz="1300" dirty="0"/>
           </a:p>
@@ -8830,8 +9911,8 @@
         </p:nvSpPr>
         <p:spPr>
           <a:xfrm>
-            <a:off x="8074152" y="1920240"/>
-            <a:ext cx="2825496" cy="1188720"/>
+            <a:off x="7799832" y="1828800"/>
+            <a:ext cx="3145536" cy="685800"/>
           </a:xfrm>
           <a:prstGeom prst="rect">
             <a:avLst/>
@@ -8871,12 +9952,153 @@
         </p:nvSpPr>
         <p:spPr>
           <a:xfrm>
-            <a:off x="7909560" y="3520440"/>
-            <a:ext cx="3154680" cy="1737360"/>
+            <a:off x="7635240" y="2788920"/>
+            <a:ext cx="3474720" cy="1536192"/>
           </a:xfrm>
           <a:prstGeom prst="roundRect">
             <a:avLst>
-              <a:gd name="adj" fmla="val 6316"/>
+              <a:gd name="adj" fmla="val 7143"/>
+            </a:avLst>
+          </a:prstGeom>
+          <a:solidFill>
+            <a:srgbClr val="FFFFFF">
+              <a:alpha val="88000"/>
+            </a:srgbClr>
+          </a:solidFill>
+          <a:ln w="12700">
+            <a:solidFill>
+              <a:srgbClr val="D6E8F2"/>
+            </a:solidFill>
+            <a:prstDash val="solid"/>
+          </a:ln>
+        </p:spPr>
+      </p:sp>
+      <p:sp>
+        <p:nvSpPr>
+          <p:cNvPr id="14" name="Shape 12"/>
+          <p:cNvSpPr/>
+          <p:nvPr/>
+        </p:nvSpPr>
+        <p:spPr>
+          <a:xfrm>
+            <a:off x="8074152" y="3291840"/>
+            <a:ext cx="2596896" cy="749808"/>
+          </a:xfrm>
+          <a:prstGeom prst="rect">
+            <a:avLst/>
+          </a:prstGeom>
+          <a:solidFill>
+            <a:srgbClr val="EAF6F8"/>
+          </a:solidFill>
+          <a:ln w="12700">
+            <a:solidFill>
+              <a:srgbClr val="8ABBD8"/>
+            </a:solidFill>
+            <a:prstDash val="solid"/>
+          </a:ln>
+        </p:spPr>
+      </p:sp>
+      <p:sp>
+        <p:nvSpPr>
+          <p:cNvPr id="15" name="Shape 13"/>
+          <p:cNvSpPr/>
+          <p:nvPr/>
+        </p:nvSpPr>
+        <p:spPr>
+          <a:xfrm>
+            <a:off x="8202168" y="3721608"/>
+            <a:ext cx="2340864" cy="0"/>
+          </a:xfrm>
+          <a:prstGeom prst="line">
+            <a:avLst/>
+          </a:prstGeom>
+          <a:noFill/>
+          <a:ln w="19050">
+            <a:solidFill>
+              <a:srgbClr val="0068B7"/>
+            </a:solidFill>
+            <a:prstDash val="solid"/>
+          </a:ln>
+        </p:spPr>
+      </p:sp>
+      <p:sp>
+        <p:nvSpPr>
+          <p:cNvPr id="16" name="Shape 14"/>
+          <p:cNvSpPr/>
+          <p:nvPr/>
+        </p:nvSpPr>
+        <p:spPr>
+          <a:xfrm>
+            <a:off x="9198864" y="4206240"/>
+            <a:ext cx="347472" cy="347472"/>
+          </a:xfrm>
+          <a:prstGeom prst="ellipse">
+            <a:avLst/>
+          </a:prstGeom>
+          <a:solidFill>
+            <a:srgbClr val="2F8A28"/>
+          </a:solidFill>
+          <a:ln w="12700">
+            <a:solidFill>
+              <a:srgbClr val="2F8A28"/>
+            </a:solidFill>
+            <a:prstDash val="solid"/>
+          </a:ln>
+        </p:spPr>
+      </p:sp>
+      <p:sp>
+        <p:nvSpPr>
+          <p:cNvPr id="17" name="Text 15"/>
+          <p:cNvSpPr/>
+          <p:nvPr/>
+        </p:nvSpPr>
+        <p:spPr>
+          <a:xfrm>
+            <a:off x="7909560" y="3977640"/>
+            <a:ext cx="2926080" cy="182880"/>
+          </a:xfrm>
+          <a:prstGeom prst="rect">
+            <a:avLst/>
+          </a:prstGeom>
+          <a:noFill/>
+          <a:ln/>
+        </p:spPr>
+        <p:txBody>
+          <a:bodyPr wrap="square" lIns="0" tIns="0" rIns="0" bIns="0" rtlCol="0" anchor="ctr"/>
+          <a:lstStyle/>
+          <a:p>
+            <a:pPr algn="ctr" indent="0" marL="0">
+              <a:buNone/>
+            </a:pPr>
+            <a:r>
+              <a:rPr lang="en-US" sz="1000" dirty="0">
+                <a:solidFill>
+                  <a:srgbClr val="003A63"/>
+                </a:solidFill>
+                <a:latin typeface="Aptos" pitchFamily="34" charset="0"/>
+                <a:ea typeface="Aptos" pitchFamily="34" charset="-122"/>
+                <a:cs typeface="Aptos" pitchFamily="34" charset="-120"/>
+              </a:rPr>
+              <a:t>Concept to action</a:t>
+            </a:r>
+            <a:endParaRPr lang="en-US" sz="1000" dirty="0"/>
+          </a:p>
+        </p:txBody>
+      </p:sp>
+      <p:sp>
+        <p:nvSpPr>
+          <p:cNvPr id="18" name="Shape 16"/>
+          <p:cNvSpPr/>
+          <p:nvPr/>
+        </p:nvSpPr>
+        <p:spPr>
+          <a:xfrm>
+            <a:off x="7635240" y="4498848"/>
+            <a:ext cx="3474720" cy="1143000"/>
+          </a:xfrm>
+          <a:prstGeom prst="roundRect">
+            <a:avLst>
+              <a:gd name="adj" fmla="val 9600"/>
             </a:avLst>
           </a:prstGeom>
           <a:solidFill>
@@ -8892,14 +10114,14 @@
       </p:sp>
       <p:sp>
         <p:nvSpPr>
-          <p:cNvPr id="14" name="Text 12"/>
-          <p:cNvSpPr/>
-          <p:nvPr/>
-        </p:nvSpPr>
-        <p:spPr>
-          <a:xfrm>
-            <a:off x="8074152" y="3666744"/>
-            <a:ext cx="2825496" cy="256032"/>
+          <p:cNvPr id="19" name="Text 17"/>
+          <p:cNvSpPr/>
+          <p:nvPr/>
+        </p:nvSpPr>
+        <p:spPr>
+          <a:xfrm>
+            <a:off x="7799832" y="4645152"/>
+            <a:ext cx="3145536" cy="256032"/>
           </a:xfrm>
           <a:prstGeom prst="rect">
             <a:avLst/>
@@ -8923,7 +10145,7 @@
                 <a:ea typeface="Aptos" pitchFamily="34" charset="-122"/>
                 <a:cs typeface="Aptos" pitchFamily="34" charset="-120"/>
               </a:rPr>
-              <a:t>Use this for</a:t>
+              <a:t>What to produce</a:t>
             </a:r>
             <a:endParaRPr lang="en-US" sz="1300" dirty="0"/>
           </a:p>
@@ -8931,14 +10153,14 @@
       </p:sp>
       <p:sp>
         <p:nvSpPr>
-          <p:cNvPr id="15" name="Text 13"/>
-          <p:cNvSpPr/>
-          <p:nvPr/>
-        </p:nvSpPr>
-        <p:spPr>
-          <a:xfrm>
-            <a:off x="8074152" y="4023360"/>
-            <a:ext cx="2825496" cy="1097280"/>
+          <p:cNvPr id="20" name="Text 18"/>
+          <p:cNvSpPr/>
+          <p:nvPr/>
+        </p:nvSpPr>
+        <p:spPr>
+          <a:xfrm>
+            <a:off x="7799832" y="5001768"/>
+            <a:ext cx="3145536" cy="502920"/>
           </a:xfrm>
           <a:prstGeom prst="rect">
             <a:avLst/>
@@ -8964,7 +10186,7 @@
                 <a:ea typeface="Aptos" pitchFamily="34" charset="-122"/>
                 <a:cs typeface="Aptos" pitchFamily="34" charset="-120"/>
               </a:rPr>
-              <a:t>Connect the concept to public health decisions, safeguards, documentation, or implementation work.</a:t>
+              <a:t>Use the assignment to test whether you can explain the concept, apply it to a realistic public health situation, and identify what would need review before the work moves forward.</a:t>
             </a:r>
             <a:endParaRPr lang="en-US" sz="1550" dirty="0"/>
           </a:p>
@@ -9138,8 +10360,8 @@
         </p:nvSpPr>
         <p:spPr>
           <a:xfrm>
-            <a:off x="9966960" y="6537960"/>
-            <a:ext cx="1645920" cy="201168"/>
+            <a:off x="9646920" y="6537960"/>
+            <a:ext cx="1965960" cy="201168"/>
           </a:xfrm>
           <a:prstGeom prst="rect">
             <a:avLst/>
@@ -9163,7 +10385,7 @@
                 <a:ea typeface="Aptos" pitchFamily="34" charset="-122"/>
                 <a:cs typeface="Aptos" pitchFamily="34" charset="-120"/>
               </a:rPr>
-              <a:t>Â© Paula Soper</a:t>
+              <a:t>Copyright Paula Soper</a:t>
             </a:r>
             <a:endParaRPr lang="en-US" sz="800" dirty="0"/>
           </a:p>
@@ -9526,46 +10748,7 @@
       </p:sp>
       <p:sp>
         <p:nvSpPr>
-          <p:cNvPr id="15" name="Text 13"/>
-          <p:cNvSpPr/>
-          <p:nvPr/>
-        </p:nvSpPr>
-        <p:spPr>
-          <a:xfrm>
-            <a:off x="8695944" y="3941064"/>
-            <a:ext cx="201168" cy="256032"/>
-          </a:xfrm>
-          <a:prstGeom prst="rect">
-            <a:avLst/>
-          </a:prstGeom>
-          <a:noFill/>
-          <a:ln/>
-        </p:spPr>
-        <p:txBody>
-          <a:bodyPr wrap="square" lIns="0" tIns="0" rIns="0" bIns="0" rtlCol="0" anchor="ctr"/>
-          <a:lstStyle/>
-          <a:p>
-            <a:pPr algn="ctr" indent="0" marL="0">
-              <a:buNone/>
-            </a:pPr>
-            <a:r>
-              <a:rPr lang="en-US" sz="1800" b="1" dirty="0">
-                <a:solidFill>
-                  <a:srgbClr val="0068B7"/>
-                </a:solidFill>
-                <a:latin typeface="Aptos" pitchFamily="34" charset="0"/>
-                <a:ea typeface="Aptos" pitchFamily="34" charset="-122"/>
-                <a:cs typeface="Aptos" pitchFamily="34" charset="-120"/>
-              </a:rPr>
-              <a:t>â†’</a:t>
-            </a:r>
-            <a:endParaRPr lang="en-US" sz="1800" dirty="0"/>
-          </a:p>
-        </p:txBody>
-      </p:sp>
-      <p:sp>
-        <p:nvSpPr>
-          <p:cNvPr id="16" name="Shape 14"/>
+          <p:cNvPr id="15" name="Shape 13"/>
           <p:cNvSpPr/>
           <p:nvPr/>
         </p:nvSpPr>
@@ -9592,7 +10775,7 @@
       </p:sp>
       <p:sp>
         <p:nvSpPr>
-          <p:cNvPr id="17" name="Text 15"/>
+          <p:cNvPr id="16" name="Text 14"/>
           <p:cNvSpPr/>
           <p:nvPr/>
         </p:nvSpPr>
@@ -9633,46 +10816,7 @@
       </p:sp>
       <p:sp>
         <p:nvSpPr>
-          <p:cNvPr id="18" name="Text 16"/>
-          <p:cNvSpPr/>
-          <p:nvPr/>
-        </p:nvSpPr>
-        <p:spPr>
-          <a:xfrm>
-            <a:off x="9985248" y="3941064"/>
-            <a:ext cx="201168" cy="256032"/>
-          </a:xfrm>
-          <a:prstGeom prst="rect">
-            <a:avLst/>
-          </a:prstGeom>
-          <a:noFill/>
-          <a:ln/>
-        </p:spPr>
-        <p:txBody>
-          <a:bodyPr wrap="square" lIns="0" tIns="0" rIns="0" bIns="0" rtlCol="0" anchor="ctr"/>
-          <a:lstStyle/>
-          <a:p>
-            <a:pPr algn="ctr" indent="0" marL="0">
-              <a:buNone/>
-            </a:pPr>
-            <a:r>
-              <a:rPr lang="en-US" sz="1800" b="1" dirty="0">
-                <a:solidFill>
-                  <a:srgbClr val="0068B7"/>
-                </a:solidFill>
-                <a:latin typeface="Aptos" pitchFamily="34" charset="0"/>
-                <a:ea typeface="Aptos" pitchFamily="34" charset="-122"/>
-                <a:cs typeface="Aptos" pitchFamily="34" charset="-120"/>
-              </a:rPr>
-              <a:t>â†’</a:t>
-            </a:r>
-            <a:endParaRPr lang="en-US" sz="1800" dirty="0"/>
-          </a:p>
-        </p:txBody>
-      </p:sp>
-      <p:sp>
-        <p:nvSpPr>
-          <p:cNvPr id="19" name="Shape 17"/>
+          <p:cNvPr id="17" name="Shape 15"/>
           <p:cNvSpPr/>
           <p:nvPr/>
         </p:nvSpPr>
@@ -9699,7 +10843,7 @@
       </p:sp>
       <p:sp>
         <p:nvSpPr>
-          <p:cNvPr id="20" name="Text 18"/>
+          <p:cNvPr id="18" name="Text 16"/>
           <p:cNvSpPr/>
           <p:nvPr/>
         </p:nvSpPr>
@@ -9906,8 +11050,8 @@
         </p:nvSpPr>
         <p:spPr>
           <a:xfrm>
-            <a:off x="9966960" y="6537960"/>
-            <a:ext cx="1645920" cy="201168"/>
+            <a:off x="9646920" y="6537960"/>
+            <a:ext cx="1965960" cy="201168"/>
           </a:xfrm>
           <a:prstGeom prst="rect">
             <a:avLst/>
@@ -9931,7 +11075,7 @@
                 <a:ea typeface="Aptos" pitchFamily="34" charset="-122"/>
                 <a:cs typeface="Aptos" pitchFamily="34" charset="-120"/>
               </a:rPr>
-              <a:t>Â© Paula Soper</a:t>
+              <a:t>Copyright Paula Soper</a:t>
             </a:r>
             <a:endParaRPr lang="en-US" sz="800" dirty="0"/>
           </a:p>
@@ -9978,77 +11122,13 @@
       </p:sp>
       <p:sp>
         <p:nvSpPr>
-          <p:cNvPr id="8" name="Shape 6"/>
+          <p:cNvPr id="8" name="Text 6"/>
           <p:cNvSpPr/>
           <p:nvPr/>
         </p:nvSpPr>
         <p:spPr>
           <a:xfrm>
             <a:off x="640080" y="658368"/>
-            <a:ext cx="420624" cy="420624"/>
-          </a:xfrm>
-          <a:prstGeom prst="ellipse">
-            <a:avLst/>
-          </a:prstGeom>
-          <a:solidFill>
-            <a:srgbClr val="0068B7"/>
-          </a:solidFill>
-          <a:ln w="12700">
-            <a:solidFill>
-              <a:srgbClr val="0068B7"/>
-            </a:solidFill>
-            <a:prstDash val="solid"/>
-          </a:ln>
-        </p:spPr>
-      </p:sp>
-      <p:sp>
-        <p:nvSpPr>
-          <p:cNvPr id="9" name="Text 7"/>
-          <p:cNvSpPr/>
-          <p:nvPr/>
-        </p:nvSpPr>
-        <p:spPr>
-          <a:xfrm>
-            <a:off x="640080" y="731520"/>
-            <a:ext cx="420624" cy="164592"/>
-          </a:xfrm>
-          <a:prstGeom prst="rect">
-            <a:avLst/>
-          </a:prstGeom>
-          <a:noFill/>
-          <a:ln/>
-        </p:spPr>
-        <p:txBody>
-          <a:bodyPr wrap="square" lIns="0" tIns="0" rIns="0" bIns="0" rtlCol="0" anchor="ctr"/>
-          <a:lstStyle/>
-          <a:p>
-            <a:pPr algn="ctr" indent="0" marL="0">
-              <a:buNone/>
-            </a:pPr>
-            <a:r>
-              <a:rPr lang="en-US" sz="1100" b="1" dirty="0">
-                <a:solidFill>
-                  <a:srgbClr val="FFFFFF"/>
-                </a:solidFill>
-                <a:latin typeface="Aptos" pitchFamily="34" charset="0"/>
-                <a:ea typeface="Aptos" pitchFamily="34" charset="-122"/>
-                <a:cs typeface="Aptos" pitchFamily="34" charset="-120"/>
-              </a:rPr>
-              <a:t>11</a:t>
-            </a:r>
-            <a:endParaRPr lang="en-US" sz="1100" dirty="0"/>
-          </a:p>
-        </p:txBody>
-      </p:sp>
-      <p:sp>
-        <p:nvSpPr>
-          <p:cNvPr id="10" name="Text 8"/>
-          <p:cNvSpPr/>
-          <p:nvPr/>
-        </p:nvSpPr>
-        <p:spPr>
-          <a:xfrm>
-            <a:off x="640080" y="621792"/>
             <a:ext cx="10881360" cy="713232"/>
           </a:xfrm>
           <a:prstGeom prst="rect">
@@ -10083,14 +11163,14 @@
       </p:sp>
       <p:sp>
         <p:nvSpPr>
-          <p:cNvPr id="11" name="Text 9"/>
+          <p:cNvPr id="9" name="Text 7"/>
           <p:cNvSpPr/>
           <p:nvPr/>
         </p:nvSpPr>
         <p:spPr>
           <a:xfrm>
             <a:off x="868680" y="1508760"/>
-            <a:ext cx="6537960" cy="4160520"/>
+            <a:ext cx="6309360" cy="4160520"/>
           </a:xfrm>
           <a:prstGeom prst="rect">
             <a:avLst/>
@@ -10149,18 +11229,18 @@
       </p:sp>
       <p:sp>
         <p:nvSpPr>
-          <p:cNvPr id="12" name="Shape 10"/>
-          <p:cNvSpPr/>
-          <p:nvPr/>
-        </p:nvSpPr>
-        <p:spPr>
-          <a:xfrm>
-            <a:off x="7909560" y="1417320"/>
-            <a:ext cx="3154680" cy="1828800"/>
+          <p:cNvPr id="10" name="Shape 8"/>
+          <p:cNvSpPr/>
+          <p:nvPr/>
+        </p:nvSpPr>
+        <p:spPr>
+          <a:xfrm>
+            <a:off x="7635240" y="1325880"/>
+            <a:ext cx="3474720" cy="1325880"/>
           </a:xfrm>
           <a:prstGeom prst="roundRect">
             <a:avLst>
-              <a:gd name="adj" fmla="val 6000"/>
+              <a:gd name="adj" fmla="val 8276"/>
             </a:avLst>
           </a:prstGeom>
           <a:solidFill>
@@ -10176,14 +11256,14 @@
       </p:sp>
       <p:sp>
         <p:nvSpPr>
-          <p:cNvPr id="13" name="Text 11"/>
-          <p:cNvSpPr/>
-          <p:nvPr/>
-        </p:nvSpPr>
-        <p:spPr>
-          <a:xfrm>
-            <a:off x="8074152" y="1563624"/>
-            <a:ext cx="2825496" cy="256032"/>
+          <p:cNvPr id="11" name="Text 9"/>
+          <p:cNvSpPr/>
+          <p:nvPr/>
+        </p:nvSpPr>
+        <p:spPr>
+          <a:xfrm>
+            <a:off x="7799832" y="1472184"/>
+            <a:ext cx="3145536" cy="256032"/>
           </a:xfrm>
           <a:prstGeom prst="rect">
             <a:avLst/>
@@ -10207,7 +11287,7 @@
                 <a:ea typeface="Aptos" pitchFamily="34" charset="-122"/>
                 <a:cs typeface="Aptos" pitchFamily="34" charset="-120"/>
               </a:rPr>
-              <a:t>Key idea</a:t>
+              <a:t>Practice focus</a:t>
             </a:r>
             <a:endParaRPr lang="en-US" sz="1300" dirty="0"/>
           </a:p>
@@ -10215,14 +11295,14 @@
       </p:sp>
       <p:sp>
         <p:nvSpPr>
-          <p:cNvPr id="14" name="Text 12"/>
-          <p:cNvSpPr/>
-          <p:nvPr/>
-        </p:nvSpPr>
-        <p:spPr>
-          <a:xfrm>
-            <a:off x="8074152" y="1920240"/>
-            <a:ext cx="2825496" cy="1188720"/>
+          <p:cNvPr id="12" name="Text 10"/>
+          <p:cNvSpPr/>
+          <p:nvPr/>
+        </p:nvSpPr>
+        <p:spPr>
+          <a:xfrm>
+            <a:off x="7799832" y="1828800"/>
+            <a:ext cx="3145536" cy="685800"/>
           </a:xfrm>
           <a:prstGeom prst="rect">
             <a:avLst/>
@@ -10256,18 +11336,159 @@
       </p:sp>
       <p:sp>
         <p:nvSpPr>
-          <p:cNvPr id="15" name="Shape 13"/>
-          <p:cNvSpPr/>
-          <p:nvPr/>
-        </p:nvSpPr>
-        <p:spPr>
-          <a:xfrm>
-            <a:off x="7909560" y="3520440"/>
-            <a:ext cx="3154680" cy="1737360"/>
+          <p:cNvPr id="13" name="Shape 11"/>
+          <p:cNvSpPr/>
+          <p:nvPr/>
+        </p:nvSpPr>
+        <p:spPr>
+          <a:xfrm>
+            <a:off x="7635240" y="2788920"/>
+            <a:ext cx="3474720" cy="1536192"/>
           </a:xfrm>
           <a:prstGeom prst="roundRect">
             <a:avLst>
-              <a:gd name="adj" fmla="val 6316"/>
+              <a:gd name="adj" fmla="val 7143"/>
+            </a:avLst>
+          </a:prstGeom>
+          <a:solidFill>
+            <a:srgbClr val="FFFFFF">
+              <a:alpha val="88000"/>
+            </a:srgbClr>
+          </a:solidFill>
+          <a:ln w="12700">
+            <a:solidFill>
+              <a:srgbClr val="D6E8F2"/>
+            </a:solidFill>
+            <a:prstDash val="solid"/>
+          </a:ln>
+        </p:spPr>
+      </p:sp>
+      <p:sp>
+        <p:nvSpPr>
+          <p:cNvPr id="14" name="Shape 12"/>
+          <p:cNvSpPr/>
+          <p:nvPr/>
+        </p:nvSpPr>
+        <p:spPr>
+          <a:xfrm>
+            <a:off x="8074152" y="3291840"/>
+            <a:ext cx="2596896" cy="749808"/>
+          </a:xfrm>
+          <a:prstGeom prst="rect">
+            <a:avLst/>
+          </a:prstGeom>
+          <a:solidFill>
+            <a:srgbClr val="EAF6F8"/>
+          </a:solidFill>
+          <a:ln w="12700">
+            <a:solidFill>
+              <a:srgbClr val="8ABBD8"/>
+            </a:solidFill>
+            <a:prstDash val="solid"/>
+          </a:ln>
+        </p:spPr>
+      </p:sp>
+      <p:sp>
+        <p:nvSpPr>
+          <p:cNvPr id="15" name="Shape 13"/>
+          <p:cNvSpPr/>
+          <p:nvPr/>
+        </p:nvSpPr>
+        <p:spPr>
+          <a:xfrm>
+            <a:off x="8202168" y="3721608"/>
+            <a:ext cx="2340864" cy="0"/>
+          </a:xfrm>
+          <a:prstGeom prst="line">
+            <a:avLst/>
+          </a:prstGeom>
+          <a:noFill/>
+          <a:ln w="19050">
+            <a:solidFill>
+              <a:srgbClr val="0068B7"/>
+            </a:solidFill>
+            <a:prstDash val="solid"/>
+          </a:ln>
+        </p:spPr>
+      </p:sp>
+      <p:sp>
+        <p:nvSpPr>
+          <p:cNvPr id="16" name="Shape 14"/>
+          <p:cNvSpPr/>
+          <p:nvPr/>
+        </p:nvSpPr>
+        <p:spPr>
+          <a:xfrm>
+            <a:off x="9198864" y="4206240"/>
+            <a:ext cx="347472" cy="347472"/>
+          </a:xfrm>
+          <a:prstGeom prst="ellipse">
+            <a:avLst/>
+          </a:prstGeom>
+          <a:solidFill>
+            <a:srgbClr val="2F8A28"/>
+          </a:solidFill>
+          <a:ln w="12700">
+            <a:solidFill>
+              <a:srgbClr val="2F8A28"/>
+            </a:solidFill>
+            <a:prstDash val="solid"/>
+          </a:ln>
+        </p:spPr>
+      </p:sp>
+      <p:sp>
+        <p:nvSpPr>
+          <p:cNvPr id="17" name="Text 15"/>
+          <p:cNvSpPr/>
+          <p:nvPr/>
+        </p:nvSpPr>
+        <p:spPr>
+          <a:xfrm>
+            <a:off x="7909560" y="3977640"/>
+            <a:ext cx="2926080" cy="182880"/>
+          </a:xfrm>
+          <a:prstGeom prst="rect">
+            <a:avLst/>
+          </a:prstGeom>
+          <a:noFill/>
+          <a:ln/>
+        </p:spPr>
+        <p:txBody>
+          <a:bodyPr wrap="square" lIns="0" tIns="0" rIns="0" bIns="0" rtlCol="0" anchor="ctr"/>
+          <a:lstStyle/>
+          <a:p>
+            <a:pPr algn="ctr" indent="0" marL="0">
+              <a:buNone/>
+            </a:pPr>
+            <a:r>
+              <a:rPr lang="en-US" sz="1000" dirty="0">
+                <a:solidFill>
+                  <a:srgbClr val="003A63"/>
+                </a:solidFill>
+                <a:latin typeface="Aptos" pitchFamily="34" charset="0"/>
+                <a:ea typeface="Aptos" pitchFamily="34" charset="-122"/>
+                <a:cs typeface="Aptos" pitchFamily="34" charset="-120"/>
+              </a:rPr>
+              <a:t>Concept to action</a:t>
+            </a:r>
+            <a:endParaRPr lang="en-US" sz="1000" dirty="0"/>
+          </a:p>
+        </p:txBody>
+      </p:sp>
+      <p:sp>
+        <p:nvSpPr>
+          <p:cNvPr id="18" name="Shape 16"/>
+          <p:cNvSpPr/>
+          <p:nvPr/>
+        </p:nvSpPr>
+        <p:spPr>
+          <a:xfrm>
+            <a:off x="7635240" y="4498848"/>
+            <a:ext cx="3474720" cy="1143000"/>
+          </a:xfrm>
+          <a:prstGeom prst="roundRect">
+            <a:avLst>
+              <a:gd name="adj" fmla="val 9600"/>
             </a:avLst>
           </a:prstGeom>
           <a:solidFill>
@@ -10283,14 +11504,14 @@
       </p:sp>
       <p:sp>
         <p:nvSpPr>
-          <p:cNvPr id="16" name="Text 14"/>
-          <p:cNvSpPr/>
-          <p:nvPr/>
-        </p:nvSpPr>
-        <p:spPr>
-          <a:xfrm>
-            <a:off x="8074152" y="3666744"/>
-            <a:ext cx="2825496" cy="256032"/>
+          <p:cNvPr id="19" name="Text 17"/>
+          <p:cNvSpPr/>
+          <p:nvPr/>
+        </p:nvSpPr>
+        <p:spPr>
+          <a:xfrm>
+            <a:off x="7799832" y="4645152"/>
+            <a:ext cx="3145536" cy="256032"/>
           </a:xfrm>
           <a:prstGeom prst="rect">
             <a:avLst/>
@@ -10314,7 +11535,7 @@
                 <a:ea typeface="Aptos" pitchFamily="34" charset="-122"/>
                 <a:cs typeface="Aptos" pitchFamily="34" charset="-120"/>
               </a:rPr>
-              <a:t>Use this for</a:t>
+              <a:t>What to produce</a:t>
             </a:r>
             <a:endParaRPr lang="en-US" sz="1300" dirty="0"/>
           </a:p>
@@ -10322,14 +11543,14 @@
       </p:sp>
       <p:sp>
         <p:nvSpPr>
-          <p:cNvPr id="17" name="Text 15"/>
-          <p:cNvSpPr/>
-          <p:nvPr/>
-        </p:nvSpPr>
-        <p:spPr>
-          <a:xfrm>
-            <a:off x="8074152" y="4023360"/>
-            <a:ext cx="2825496" cy="1097280"/>
+          <p:cNvPr id="20" name="Text 18"/>
+          <p:cNvSpPr/>
+          <p:nvPr/>
+        </p:nvSpPr>
+        <p:spPr>
+          <a:xfrm>
+            <a:off x="7799832" y="5001768"/>
+            <a:ext cx="3145536" cy="502920"/>
           </a:xfrm>
           <a:prstGeom prst="rect">
             <a:avLst/>
@@ -10355,7 +11576,7 @@
                 <a:ea typeface="Aptos" pitchFamily="34" charset="-122"/>
                 <a:cs typeface="Aptos" pitchFamily="34" charset="-120"/>
               </a:rPr>
-              <a:t>Connect the concept to public health decisions, safeguards, documentation, or implementation work.</a:t>
+              <a:t>Use the assignment to test whether you can explain the concept, apply it to a realistic public health situation, and identify what would need review before the work moves forward.</a:t>
             </a:r>
             <a:endParaRPr lang="en-US" sz="1550" dirty="0"/>
           </a:p>
@@ -10529,8 +11750,8 @@
         </p:nvSpPr>
         <p:spPr>
           <a:xfrm>
-            <a:off x="9966960" y="6537960"/>
-            <a:ext cx="1645920" cy="201168"/>
+            <a:off x="9646920" y="6537960"/>
+            <a:ext cx="1965960" cy="201168"/>
           </a:xfrm>
           <a:prstGeom prst="rect">
             <a:avLst/>
@@ -10554,7 +11775,7 @@
                 <a:ea typeface="Aptos" pitchFamily="34" charset="-122"/>
                 <a:cs typeface="Aptos" pitchFamily="34" charset="-120"/>
               </a:rPr>
-              <a:t>Â© Paula Soper</a:t>
+              <a:t>Copyright Paula Soper</a:t>
             </a:r>
             <a:endParaRPr lang="en-US" sz="800" dirty="0"/>
           </a:p>
@@ -10601,77 +11822,13 @@
       </p:sp>
       <p:sp>
         <p:nvSpPr>
-          <p:cNvPr id="8" name="Shape 6"/>
+          <p:cNvPr id="8" name="Text 6"/>
           <p:cNvSpPr/>
           <p:nvPr/>
         </p:nvSpPr>
         <p:spPr>
           <a:xfrm>
             <a:off x="640080" y="658368"/>
-            <a:ext cx="420624" cy="420624"/>
-          </a:xfrm>
-          <a:prstGeom prst="ellipse">
-            <a:avLst/>
-          </a:prstGeom>
-          <a:solidFill>
-            <a:srgbClr val="0068B7"/>
-          </a:solidFill>
-          <a:ln w="12700">
-            <a:solidFill>
-              <a:srgbClr val="0068B7"/>
-            </a:solidFill>
-            <a:prstDash val="solid"/>
-          </a:ln>
-        </p:spPr>
-      </p:sp>
-      <p:sp>
-        <p:nvSpPr>
-          <p:cNvPr id="9" name="Text 7"/>
-          <p:cNvSpPr/>
-          <p:nvPr/>
-        </p:nvSpPr>
-        <p:spPr>
-          <a:xfrm>
-            <a:off x="640080" y="731520"/>
-            <a:ext cx="420624" cy="164592"/>
-          </a:xfrm>
-          <a:prstGeom prst="rect">
-            <a:avLst/>
-          </a:prstGeom>
-          <a:noFill/>
-          <a:ln/>
-        </p:spPr>
-        <p:txBody>
-          <a:bodyPr wrap="square" lIns="0" tIns="0" rIns="0" bIns="0" rtlCol="0" anchor="ctr"/>
-          <a:lstStyle/>
-          <a:p>
-            <a:pPr algn="ctr" indent="0" marL="0">
-              <a:buNone/>
-            </a:pPr>
-            <a:r>
-              <a:rPr lang="en-US" sz="1100" b="1" dirty="0">
-                <a:solidFill>
-                  <a:srgbClr val="FFFFFF"/>
-                </a:solidFill>
-                <a:latin typeface="Aptos" pitchFamily="34" charset="0"/>
-                <a:ea typeface="Aptos" pitchFamily="34" charset="-122"/>
-                <a:cs typeface="Aptos" pitchFamily="34" charset="-120"/>
-              </a:rPr>
-              <a:t>12</a:t>
-            </a:r>
-            <a:endParaRPr lang="en-US" sz="1100" dirty="0"/>
-          </a:p>
-        </p:txBody>
-      </p:sp>
-      <p:sp>
-        <p:nvSpPr>
-          <p:cNvPr id="10" name="Text 8"/>
-          <p:cNvSpPr/>
-          <p:nvPr/>
-        </p:nvSpPr>
-        <p:spPr>
-          <a:xfrm>
-            <a:off x="640080" y="621792"/>
             <a:ext cx="10881360" cy="713232"/>
           </a:xfrm>
           <a:prstGeom prst="rect">
@@ -10706,14 +11863,14 @@
       </p:sp>
       <p:sp>
         <p:nvSpPr>
-          <p:cNvPr id="11" name="Text 9"/>
+          <p:cNvPr id="9" name="Text 7"/>
           <p:cNvSpPr/>
           <p:nvPr/>
         </p:nvSpPr>
         <p:spPr>
           <a:xfrm>
             <a:off x="868680" y="1508760"/>
-            <a:ext cx="6537960" cy="4160520"/>
+            <a:ext cx="6309360" cy="4160520"/>
           </a:xfrm>
           <a:prstGeom prst="rect">
             <a:avLst/>
@@ -10772,18 +11929,18 @@
       </p:sp>
       <p:sp>
         <p:nvSpPr>
-          <p:cNvPr id="12" name="Shape 10"/>
-          <p:cNvSpPr/>
-          <p:nvPr/>
-        </p:nvSpPr>
-        <p:spPr>
-          <a:xfrm>
-            <a:off x="7909560" y="1417320"/>
-            <a:ext cx="3154680" cy="1828800"/>
+          <p:cNvPr id="10" name="Shape 8"/>
+          <p:cNvSpPr/>
+          <p:nvPr/>
+        </p:nvSpPr>
+        <p:spPr>
+          <a:xfrm>
+            <a:off x="7635240" y="1325880"/>
+            <a:ext cx="3474720" cy="1325880"/>
           </a:xfrm>
           <a:prstGeom prst="roundRect">
             <a:avLst>
-              <a:gd name="adj" fmla="val 6000"/>
+              <a:gd name="adj" fmla="val 8276"/>
             </a:avLst>
           </a:prstGeom>
           <a:solidFill>
@@ -10799,14 +11956,14 @@
       </p:sp>
       <p:sp>
         <p:nvSpPr>
-          <p:cNvPr id="13" name="Text 11"/>
-          <p:cNvSpPr/>
-          <p:nvPr/>
-        </p:nvSpPr>
-        <p:spPr>
-          <a:xfrm>
-            <a:off x="8074152" y="1563624"/>
-            <a:ext cx="2825496" cy="256032"/>
+          <p:cNvPr id="11" name="Text 9"/>
+          <p:cNvSpPr/>
+          <p:nvPr/>
+        </p:nvSpPr>
+        <p:spPr>
+          <a:xfrm>
+            <a:off x="7799832" y="1472184"/>
+            <a:ext cx="3145536" cy="256032"/>
           </a:xfrm>
           <a:prstGeom prst="rect">
             <a:avLst/>
@@ -10830,7 +11987,7 @@
                 <a:ea typeface="Aptos" pitchFamily="34" charset="-122"/>
                 <a:cs typeface="Aptos" pitchFamily="34" charset="-120"/>
               </a:rPr>
-              <a:t>Key idea</a:t>
+              <a:t>Practice focus</a:t>
             </a:r>
             <a:endParaRPr lang="en-US" sz="1300" dirty="0"/>
           </a:p>
@@ -10838,14 +11995,14 @@
       </p:sp>
       <p:sp>
         <p:nvSpPr>
-          <p:cNvPr id="14" name="Text 12"/>
-          <p:cNvSpPr/>
-          <p:nvPr/>
-        </p:nvSpPr>
-        <p:spPr>
-          <a:xfrm>
-            <a:off x="8074152" y="1920240"/>
-            <a:ext cx="2825496" cy="1188720"/>
+          <p:cNvPr id="12" name="Text 10"/>
+          <p:cNvSpPr/>
+          <p:nvPr/>
+        </p:nvSpPr>
+        <p:spPr>
+          <a:xfrm>
+            <a:off x="7799832" y="1828800"/>
+            <a:ext cx="3145536" cy="685800"/>
           </a:xfrm>
           <a:prstGeom prst="rect">
             <a:avLst/>
@@ -10879,18 +12036,159 @@
       </p:sp>
       <p:sp>
         <p:nvSpPr>
-          <p:cNvPr id="15" name="Shape 13"/>
-          <p:cNvSpPr/>
-          <p:nvPr/>
-        </p:nvSpPr>
-        <p:spPr>
-          <a:xfrm>
-            <a:off x="7909560" y="3520440"/>
-            <a:ext cx="3154680" cy="1737360"/>
+          <p:cNvPr id="13" name="Shape 11"/>
+          <p:cNvSpPr/>
+          <p:nvPr/>
+        </p:nvSpPr>
+        <p:spPr>
+          <a:xfrm>
+            <a:off x="7635240" y="2788920"/>
+            <a:ext cx="3474720" cy="1536192"/>
           </a:xfrm>
           <a:prstGeom prst="roundRect">
             <a:avLst>
-              <a:gd name="adj" fmla="val 6316"/>
+              <a:gd name="adj" fmla="val 7143"/>
+            </a:avLst>
+          </a:prstGeom>
+          <a:solidFill>
+            <a:srgbClr val="FFFFFF">
+              <a:alpha val="88000"/>
+            </a:srgbClr>
+          </a:solidFill>
+          <a:ln w="12700">
+            <a:solidFill>
+              <a:srgbClr val="D6E8F2"/>
+            </a:solidFill>
+            <a:prstDash val="solid"/>
+          </a:ln>
+        </p:spPr>
+      </p:sp>
+      <p:sp>
+        <p:nvSpPr>
+          <p:cNvPr id="14" name="Shape 12"/>
+          <p:cNvSpPr/>
+          <p:nvPr/>
+        </p:nvSpPr>
+        <p:spPr>
+          <a:xfrm>
+            <a:off x="8074152" y="3291840"/>
+            <a:ext cx="2596896" cy="749808"/>
+          </a:xfrm>
+          <a:prstGeom prst="rect">
+            <a:avLst/>
+          </a:prstGeom>
+          <a:solidFill>
+            <a:srgbClr val="EAF6F8"/>
+          </a:solidFill>
+          <a:ln w="12700">
+            <a:solidFill>
+              <a:srgbClr val="8ABBD8"/>
+            </a:solidFill>
+            <a:prstDash val="solid"/>
+          </a:ln>
+        </p:spPr>
+      </p:sp>
+      <p:sp>
+        <p:nvSpPr>
+          <p:cNvPr id="15" name="Shape 13"/>
+          <p:cNvSpPr/>
+          <p:nvPr/>
+        </p:nvSpPr>
+        <p:spPr>
+          <a:xfrm>
+            <a:off x="8202168" y="3721608"/>
+            <a:ext cx="2340864" cy="0"/>
+          </a:xfrm>
+          <a:prstGeom prst="line">
+            <a:avLst/>
+          </a:prstGeom>
+          <a:noFill/>
+          <a:ln w="19050">
+            <a:solidFill>
+              <a:srgbClr val="0068B7"/>
+            </a:solidFill>
+            <a:prstDash val="solid"/>
+          </a:ln>
+        </p:spPr>
+      </p:sp>
+      <p:sp>
+        <p:nvSpPr>
+          <p:cNvPr id="16" name="Shape 14"/>
+          <p:cNvSpPr/>
+          <p:nvPr/>
+        </p:nvSpPr>
+        <p:spPr>
+          <a:xfrm>
+            <a:off x="9198864" y="4206240"/>
+            <a:ext cx="347472" cy="347472"/>
+          </a:xfrm>
+          <a:prstGeom prst="ellipse">
+            <a:avLst/>
+          </a:prstGeom>
+          <a:solidFill>
+            <a:srgbClr val="2F8A28"/>
+          </a:solidFill>
+          <a:ln w="12700">
+            <a:solidFill>
+              <a:srgbClr val="2F8A28"/>
+            </a:solidFill>
+            <a:prstDash val="solid"/>
+          </a:ln>
+        </p:spPr>
+      </p:sp>
+      <p:sp>
+        <p:nvSpPr>
+          <p:cNvPr id="17" name="Text 15"/>
+          <p:cNvSpPr/>
+          <p:nvPr/>
+        </p:nvSpPr>
+        <p:spPr>
+          <a:xfrm>
+            <a:off x="7909560" y="3977640"/>
+            <a:ext cx="2926080" cy="182880"/>
+          </a:xfrm>
+          <a:prstGeom prst="rect">
+            <a:avLst/>
+          </a:prstGeom>
+          <a:noFill/>
+          <a:ln/>
+        </p:spPr>
+        <p:txBody>
+          <a:bodyPr wrap="square" lIns="0" tIns="0" rIns="0" bIns="0" rtlCol="0" anchor="ctr"/>
+          <a:lstStyle/>
+          <a:p>
+            <a:pPr algn="ctr" indent="0" marL="0">
+              <a:buNone/>
+            </a:pPr>
+            <a:r>
+              <a:rPr lang="en-US" sz="1000" dirty="0">
+                <a:solidFill>
+                  <a:srgbClr val="003A63"/>
+                </a:solidFill>
+                <a:latin typeface="Aptos" pitchFamily="34" charset="0"/>
+                <a:ea typeface="Aptos" pitchFamily="34" charset="-122"/>
+                <a:cs typeface="Aptos" pitchFamily="34" charset="-120"/>
+              </a:rPr>
+              <a:t>Concept to action</a:t>
+            </a:r>
+            <a:endParaRPr lang="en-US" sz="1000" dirty="0"/>
+          </a:p>
+        </p:txBody>
+      </p:sp>
+      <p:sp>
+        <p:nvSpPr>
+          <p:cNvPr id="18" name="Shape 16"/>
+          <p:cNvSpPr/>
+          <p:nvPr/>
+        </p:nvSpPr>
+        <p:spPr>
+          <a:xfrm>
+            <a:off x="7635240" y="4498848"/>
+            <a:ext cx="3474720" cy="1143000"/>
+          </a:xfrm>
+          <a:prstGeom prst="roundRect">
+            <a:avLst>
+              <a:gd name="adj" fmla="val 9600"/>
             </a:avLst>
           </a:prstGeom>
           <a:solidFill>
@@ -10906,14 +12204,14 @@
       </p:sp>
       <p:sp>
         <p:nvSpPr>
-          <p:cNvPr id="16" name="Text 14"/>
-          <p:cNvSpPr/>
-          <p:nvPr/>
-        </p:nvSpPr>
-        <p:spPr>
-          <a:xfrm>
-            <a:off x="8074152" y="3666744"/>
-            <a:ext cx="2825496" cy="256032"/>
+          <p:cNvPr id="19" name="Text 17"/>
+          <p:cNvSpPr/>
+          <p:nvPr/>
+        </p:nvSpPr>
+        <p:spPr>
+          <a:xfrm>
+            <a:off x="7799832" y="4645152"/>
+            <a:ext cx="3145536" cy="256032"/>
           </a:xfrm>
           <a:prstGeom prst="rect">
             <a:avLst/>
@@ -10937,7 +12235,7 @@
                 <a:ea typeface="Aptos" pitchFamily="34" charset="-122"/>
                 <a:cs typeface="Aptos" pitchFamily="34" charset="-120"/>
               </a:rPr>
-              <a:t>Use this for</a:t>
+              <a:t>What to produce</a:t>
             </a:r>
             <a:endParaRPr lang="en-US" sz="1300" dirty="0"/>
           </a:p>
@@ -10945,14 +12243,14 @@
       </p:sp>
       <p:sp>
         <p:nvSpPr>
-          <p:cNvPr id="17" name="Text 15"/>
-          <p:cNvSpPr/>
-          <p:nvPr/>
-        </p:nvSpPr>
-        <p:spPr>
-          <a:xfrm>
-            <a:off x="8074152" y="4023360"/>
-            <a:ext cx="2825496" cy="1097280"/>
+          <p:cNvPr id="20" name="Text 18"/>
+          <p:cNvSpPr/>
+          <p:nvPr/>
+        </p:nvSpPr>
+        <p:spPr>
+          <a:xfrm>
+            <a:off x="7799832" y="5001768"/>
+            <a:ext cx="3145536" cy="502920"/>
           </a:xfrm>
           <a:prstGeom prst="rect">
             <a:avLst/>
@@ -10978,7 +12276,7 @@
                 <a:ea typeface="Aptos" pitchFamily="34" charset="-122"/>
                 <a:cs typeface="Aptos" pitchFamily="34" charset="-120"/>
               </a:rPr>
-              <a:t>Connect the concept to public health decisions, safeguards, documentation, or implementation work.</a:t>
+              <a:t>Use the assignment to test whether you can explain the concept, apply it to a realistic public health situation, and identify what would need review before the work moves forward.</a:t>
             </a:r>
             <a:endParaRPr lang="en-US" sz="1550" dirty="0"/>
           </a:p>
@@ -11152,8 +12450,8 @@
         </p:nvSpPr>
         <p:spPr>
           <a:xfrm>
-            <a:off x="9966960" y="6537960"/>
-            <a:ext cx="1645920" cy="201168"/>
+            <a:off x="9646920" y="6537960"/>
+            <a:ext cx="1965960" cy="201168"/>
           </a:xfrm>
           <a:prstGeom prst="rect">
             <a:avLst/>
@@ -11177,7 +12475,7 @@
                 <a:ea typeface="Aptos" pitchFamily="34" charset="-122"/>
                 <a:cs typeface="Aptos" pitchFamily="34" charset="-120"/>
               </a:rPr>
-              <a:t>Â© Paula Soper</a:t>
+              <a:t>Copyright Paula Soper</a:t>
             </a:r>
             <a:endParaRPr lang="en-US" sz="800" dirty="0"/>
           </a:p>
@@ -11224,77 +12522,13 @@
       </p:sp>
       <p:sp>
         <p:nvSpPr>
-          <p:cNvPr id="8" name="Shape 6"/>
+          <p:cNvPr id="8" name="Text 6"/>
           <p:cNvSpPr/>
           <p:nvPr/>
         </p:nvSpPr>
         <p:spPr>
           <a:xfrm>
             <a:off x="640080" y="658368"/>
-            <a:ext cx="420624" cy="420624"/>
-          </a:xfrm>
-          <a:prstGeom prst="ellipse">
-            <a:avLst/>
-          </a:prstGeom>
-          <a:solidFill>
-            <a:srgbClr val="0068B7"/>
-          </a:solidFill>
-          <a:ln w="12700">
-            <a:solidFill>
-              <a:srgbClr val="0068B7"/>
-            </a:solidFill>
-            <a:prstDash val="solid"/>
-          </a:ln>
-        </p:spPr>
-      </p:sp>
-      <p:sp>
-        <p:nvSpPr>
-          <p:cNvPr id="9" name="Text 7"/>
-          <p:cNvSpPr/>
-          <p:nvPr/>
-        </p:nvSpPr>
-        <p:spPr>
-          <a:xfrm>
-            <a:off x="640080" y="731520"/>
-            <a:ext cx="420624" cy="164592"/>
-          </a:xfrm>
-          <a:prstGeom prst="rect">
-            <a:avLst/>
-          </a:prstGeom>
-          <a:noFill/>
-          <a:ln/>
-        </p:spPr>
-        <p:txBody>
-          <a:bodyPr wrap="square" lIns="0" tIns="0" rIns="0" bIns="0" rtlCol="0" anchor="ctr"/>
-          <a:lstStyle/>
-          <a:p>
-            <a:pPr algn="ctr" indent="0" marL="0">
-              <a:buNone/>
-            </a:pPr>
-            <a:r>
-              <a:rPr lang="en-US" sz="1100" b="1" dirty="0">
-                <a:solidFill>
-                  <a:srgbClr val="FFFFFF"/>
-                </a:solidFill>
-                <a:latin typeface="Aptos" pitchFamily="34" charset="0"/>
-                <a:ea typeface="Aptos" pitchFamily="34" charset="-122"/>
-                <a:cs typeface="Aptos" pitchFamily="34" charset="-120"/>
-              </a:rPr>
-              <a:t>13</a:t>
-            </a:r>
-            <a:endParaRPr lang="en-US" sz="1100" dirty="0"/>
-          </a:p>
-        </p:txBody>
-      </p:sp>
-      <p:sp>
-        <p:nvSpPr>
-          <p:cNvPr id="10" name="Text 8"/>
-          <p:cNvSpPr/>
-          <p:nvPr/>
-        </p:nvSpPr>
-        <p:spPr>
-          <a:xfrm>
-            <a:off x="640080" y="621792"/>
             <a:ext cx="10881360" cy="713232"/>
           </a:xfrm>
           <a:prstGeom prst="rect">
@@ -11329,14 +12563,14 @@
       </p:sp>
       <p:sp>
         <p:nvSpPr>
-          <p:cNvPr id="11" name="Text 9"/>
+          <p:cNvPr id="9" name="Text 7"/>
           <p:cNvSpPr/>
           <p:nvPr/>
         </p:nvSpPr>
         <p:spPr>
           <a:xfrm>
             <a:off x="868680" y="1508760"/>
-            <a:ext cx="6537960" cy="4160520"/>
+            <a:ext cx="6309360" cy="4160520"/>
           </a:xfrm>
           <a:prstGeom prst="rect">
             <a:avLst/>
@@ -11395,18 +12629,18 @@
       </p:sp>
       <p:sp>
         <p:nvSpPr>
-          <p:cNvPr id="12" name="Shape 10"/>
-          <p:cNvSpPr/>
-          <p:nvPr/>
-        </p:nvSpPr>
-        <p:spPr>
-          <a:xfrm>
-            <a:off x="7909560" y="1417320"/>
-            <a:ext cx="3154680" cy="1828800"/>
+          <p:cNvPr id="10" name="Shape 8"/>
+          <p:cNvSpPr/>
+          <p:nvPr/>
+        </p:nvSpPr>
+        <p:spPr>
+          <a:xfrm>
+            <a:off x="7635240" y="1325880"/>
+            <a:ext cx="3474720" cy="1325880"/>
           </a:xfrm>
           <a:prstGeom prst="roundRect">
             <a:avLst>
-              <a:gd name="adj" fmla="val 6000"/>
+              <a:gd name="adj" fmla="val 8276"/>
             </a:avLst>
           </a:prstGeom>
           <a:solidFill>
@@ -11422,14 +12656,14 @@
       </p:sp>
       <p:sp>
         <p:nvSpPr>
-          <p:cNvPr id="13" name="Text 11"/>
-          <p:cNvSpPr/>
-          <p:nvPr/>
-        </p:nvSpPr>
-        <p:spPr>
-          <a:xfrm>
-            <a:off x="8074152" y="1563624"/>
-            <a:ext cx="2825496" cy="256032"/>
+          <p:cNvPr id="11" name="Text 9"/>
+          <p:cNvSpPr/>
+          <p:nvPr/>
+        </p:nvSpPr>
+        <p:spPr>
+          <a:xfrm>
+            <a:off x="7799832" y="1472184"/>
+            <a:ext cx="3145536" cy="256032"/>
           </a:xfrm>
           <a:prstGeom prst="rect">
             <a:avLst/>
@@ -11453,7 +12687,7 @@
                 <a:ea typeface="Aptos" pitchFamily="34" charset="-122"/>
                 <a:cs typeface="Aptos" pitchFamily="34" charset="-120"/>
               </a:rPr>
-              <a:t>Key idea</a:t>
+              <a:t>Practice focus</a:t>
             </a:r>
             <a:endParaRPr lang="en-US" sz="1300" dirty="0"/>
           </a:p>
@@ -11461,14 +12695,14 @@
       </p:sp>
       <p:sp>
         <p:nvSpPr>
-          <p:cNvPr id="14" name="Text 12"/>
-          <p:cNvSpPr/>
-          <p:nvPr/>
-        </p:nvSpPr>
-        <p:spPr>
-          <a:xfrm>
-            <a:off x="8074152" y="1920240"/>
-            <a:ext cx="2825496" cy="1188720"/>
+          <p:cNvPr id="12" name="Text 10"/>
+          <p:cNvSpPr/>
+          <p:nvPr/>
+        </p:nvSpPr>
+        <p:spPr>
+          <a:xfrm>
+            <a:off x="7799832" y="1828800"/>
+            <a:ext cx="3145536" cy="685800"/>
           </a:xfrm>
           <a:prstGeom prst="rect">
             <a:avLst/>
@@ -11502,18 +12736,159 @@
       </p:sp>
       <p:sp>
         <p:nvSpPr>
-          <p:cNvPr id="15" name="Shape 13"/>
-          <p:cNvSpPr/>
-          <p:nvPr/>
-        </p:nvSpPr>
-        <p:spPr>
-          <a:xfrm>
-            <a:off x="7909560" y="3520440"/>
-            <a:ext cx="3154680" cy="1737360"/>
+          <p:cNvPr id="13" name="Shape 11"/>
+          <p:cNvSpPr/>
+          <p:nvPr/>
+        </p:nvSpPr>
+        <p:spPr>
+          <a:xfrm>
+            <a:off x="7635240" y="2788920"/>
+            <a:ext cx="3474720" cy="1536192"/>
           </a:xfrm>
           <a:prstGeom prst="roundRect">
             <a:avLst>
-              <a:gd name="adj" fmla="val 6316"/>
+              <a:gd name="adj" fmla="val 7143"/>
+            </a:avLst>
+          </a:prstGeom>
+          <a:solidFill>
+            <a:srgbClr val="FFFFFF">
+              <a:alpha val="88000"/>
+            </a:srgbClr>
+          </a:solidFill>
+          <a:ln w="12700">
+            <a:solidFill>
+              <a:srgbClr val="D6E8F2"/>
+            </a:solidFill>
+            <a:prstDash val="solid"/>
+          </a:ln>
+        </p:spPr>
+      </p:sp>
+      <p:sp>
+        <p:nvSpPr>
+          <p:cNvPr id="14" name="Shape 12"/>
+          <p:cNvSpPr/>
+          <p:nvPr/>
+        </p:nvSpPr>
+        <p:spPr>
+          <a:xfrm>
+            <a:off x="8074152" y="3291840"/>
+            <a:ext cx="2596896" cy="749808"/>
+          </a:xfrm>
+          <a:prstGeom prst="rect">
+            <a:avLst/>
+          </a:prstGeom>
+          <a:solidFill>
+            <a:srgbClr val="EAF6F8"/>
+          </a:solidFill>
+          <a:ln w="12700">
+            <a:solidFill>
+              <a:srgbClr val="8ABBD8"/>
+            </a:solidFill>
+            <a:prstDash val="solid"/>
+          </a:ln>
+        </p:spPr>
+      </p:sp>
+      <p:sp>
+        <p:nvSpPr>
+          <p:cNvPr id="15" name="Shape 13"/>
+          <p:cNvSpPr/>
+          <p:nvPr/>
+        </p:nvSpPr>
+        <p:spPr>
+          <a:xfrm>
+            <a:off x="8202168" y="3721608"/>
+            <a:ext cx="2340864" cy="0"/>
+          </a:xfrm>
+          <a:prstGeom prst="line">
+            <a:avLst/>
+          </a:prstGeom>
+          <a:noFill/>
+          <a:ln w="19050">
+            <a:solidFill>
+              <a:srgbClr val="0068B7"/>
+            </a:solidFill>
+            <a:prstDash val="solid"/>
+          </a:ln>
+        </p:spPr>
+      </p:sp>
+      <p:sp>
+        <p:nvSpPr>
+          <p:cNvPr id="16" name="Shape 14"/>
+          <p:cNvSpPr/>
+          <p:nvPr/>
+        </p:nvSpPr>
+        <p:spPr>
+          <a:xfrm>
+            <a:off x="9198864" y="4206240"/>
+            <a:ext cx="347472" cy="347472"/>
+          </a:xfrm>
+          <a:prstGeom prst="ellipse">
+            <a:avLst/>
+          </a:prstGeom>
+          <a:solidFill>
+            <a:srgbClr val="2F8A28"/>
+          </a:solidFill>
+          <a:ln w="12700">
+            <a:solidFill>
+              <a:srgbClr val="2F8A28"/>
+            </a:solidFill>
+            <a:prstDash val="solid"/>
+          </a:ln>
+        </p:spPr>
+      </p:sp>
+      <p:sp>
+        <p:nvSpPr>
+          <p:cNvPr id="17" name="Text 15"/>
+          <p:cNvSpPr/>
+          <p:nvPr/>
+        </p:nvSpPr>
+        <p:spPr>
+          <a:xfrm>
+            <a:off x="7909560" y="3977640"/>
+            <a:ext cx="2926080" cy="182880"/>
+          </a:xfrm>
+          <a:prstGeom prst="rect">
+            <a:avLst/>
+          </a:prstGeom>
+          <a:noFill/>
+          <a:ln/>
+        </p:spPr>
+        <p:txBody>
+          <a:bodyPr wrap="square" lIns="0" tIns="0" rIns="0" bIns="0" rtlCol="0" anchor="ctr"/>
+          <a:lstStyle/>
+          <a:p>
+            <a:pPr algn="ctr" indent="0" marL="0">
+              <a:buNone/>
+            </a:pPr>
+            <a:r>
+              <a:rPr lang="en-US" sz="1000" dirty="0">
+                <a:solidFill>
+                  <a:srgbClr val="003A63"/>
+                </a:solidFill>
+                <a:latin typeface="Aptos" pitchFamily="34" charset="0"/>
+                <a:ea typeface="Aptos" pitchFamily="34" charset="-122"/>
+                <a:cs typeface="Aptos" pitchFamily="34" charset="-120"/>
+              </a:rPr>
+              <a:t>Concept to action</a:t>
+            </a:r>
+            <a:endParaRPr lang="en-US" sz="1000" dirty="0"/>
+          </a:p>
+        </p:txBody>
+      </p:sp>
+      <p:sp>
+        <p:nvSpPr>
+          <p:cNvPr id="18" name="Shape 16"/>
+          <p:cNvSpPr/>
+          <p:nvPr/>
+        </p:nvSpPr>
+        <p:spPr>
+          <a:xfrm>
+            <a:off x="7635240" y="4498848"/>
+            <a:ext cx="3474720" cy="1143000"/>
+          </a:xfrm>
+          <a:prstGeom prst="roundRect">
+            <a:avLst>
+              <a:gd name="adj" fmla="val 9600"/>
             </a:avLst>
           </a:prstGeom>
           <a:solidFill>
@@ -11529,14 +12904,14 @@
       </p:sp>
       <p:sp>
         <p:nvSpPr>
-          <p:cNvPr id="16" name="Text 14"/>
-          <p:cNvSpPr/>
-          <p:nvPr/>
-        </p:nvSpPr>
-        <p:spPr>
-          <a:xfrm>
-            <a:off x="8074152" y="3666744"/>
-            <a:ext cx="2825496" cy="256032"/>
+          <p:cNvPr id="19" name="Text 17"/>
+          <p:cNvSpPr/>
+          <p:nvPr/>
+        </p:nvSpPr>
+        <p:spPr>
+          <a:xfrm>
+            <a:off x="7799832" y="4645152"/>
+            <a:ext cx="3145536" cy="256032"/>
           </a:xfrm>
           <a:prstGeom prst="rect">
             <a:avLst/>
@@ -11560,7 +12935,7 @@
                 <a:ea typeface="Aptos" pitchFamily="34" charset="-122"/>
                 <a:cs typeface="Aptos" pitchFamily="34" charset="-120"/>
               </a:rPr>
-              <a:t>Use this for</a:t>
+              <a:t>What to produce</a:t>
             </a:r>
             <a:endParaRPr lang="en-US" sz="1300" dirty="0"/>
           </a:p>
@@ -11568,14 +12943,14 @@
       </p:sp>
       <p:sp>
         <p:nvSpPr>
-          <p:cNvPr id="17" name="Text 15"/>
-          <p:cNvSpPr/>
-          <p:nvPr/>
-        </p:nvSpPr>
-        <p:spPr>
-          <a:xfrm>
-            <a:off x="8074152" y="4023360"/>
-            <a:ext cx="2825496" cy="1097280"/>
+          <p:cNvPr id="20" name="Text 18"/>
+          <p:cNvSpPr/>
+          <p:nvPr/>
+        </p:nvSpPr>
+        <p:spPr>
+          <a:xfrm>
+            <a:off x="7799832" y="5001768"/>
+            <a:ext cx="3145536" cy="502920"/>
           </a:xfrm>
           <a:prstGeom prst="rect">
             <a:avLst/>
@@ -11601,7 +12976,7 @@
                 <a:ea typeface="Aptos" pitchFamily="34" charset="-122"/>
                 <a:cs typeface="Aptos" pitchFamily="34" charset="-120"/>
               </a:rPr>
-              <a:t>Connect the concept to public health decisions, safeguards, documentation, or implementation work.</a:t>
+              <a:t>Use the assignment to test whether you can explain the concept, apply it to a realistic public health situation, and identify what would need review before the work moves forward.</a:t>
             </a:r>
             <a:endParaRPr lang="en-US" sz="1550" dirty="0"/>
           </a:p>
@@ -11775,8 +13150,8 @@
         </p:nvSpPr>
         <p:spPr>
           <a:xfrm>
-            <a:off x="9966960" y="6537960"/>
-            <a:ext cx="1645920" cy="201168"/>
+            <a:off x="9646920" y="6537960"/>
+            <a:ext cx="1965960" cy="201168"/>
           </a:xfrm>
           <a:prstGeom prst="rect">
             <a:avLst/>
@@ -11800,7 +13175,7 @@
                 <a:ea typeface="Aptos" pitchFamily="34" charset="-122"/>
                 <a:cs typeface="Aptos" pitchFamily="34" charset="-120"/>
               </a:rPr>
-              <a:t>Â© Paula Soper</a:t>
+              <a:t>Copyright Paula Soper</a:t>
             </a:r>
             <a:endParaRPr lang="en-US" sz="800" dirty="0"/>
           </a:p>
@@ -12143,46 +13518,7 @@
       </p:sp>
       <p:sp>
         <p:nvSpPr>
-          <p:cNvPr id="15" name="Text 13"/>
-          <p:cNvSpPr/>
-          <p:nvPr/>
-        </p:nvSpPr>
-        <p:spPr>
-          <a:xfrm>
-            <a:off x="8817864" y="4187952"/>
-            <a:ext cx="201168" cy="256032"/>
-          </a:xfrm>
-          <a:prstGeom prst="rect">
-            <a:avLst/>
-          </a:prstGeom>
-          <a:noFill/>
-          <a:ln/>
-        </p:spPr>
-        <p:txBody>
-          <a:bodyPr wrap="square" lIns="0" tIns="0" rIns="0" bIns="0" rtlCol="0" anchor="ctr"/>
-          <a:lstStyle/>
-          <a:p>
-            <a:pPr algn="ctr" indent="0" marL="0">
-              <a:buNone/>
-            </a:pPr>
-            <a:r>
-              <a:rPr lang="en-US" sz="1800" b="1" dirty="0">
-                <a:solidFill>
-                  <a:srgbClr val="0068B7"/>
-                </a:solidFill>
-                <a:latin typeface="Aptos" pitchFamily="34" charset="0"/>
-                <a:ea typeface="Aptos" pitchFamily="34" charset="-122"/>
-                <a:cs typeface="Aptos" pitchFamily="34" charset="-120"/>
-              </a:rPr>
-              <a:t>â†’</a:t>
-            </a:r>
-            <a:endParaRPr lang="en-US" sz="1800" dirty="0"/>
-          </a:p>
-        </p:txBody>
-      </p:sp>
-      <p:sp>
-        <p:nvSpPr>
-          <p:cNvPr id="16" name="Shape 14"/>
+          <p:cNvPr id="15" name="Shape 13"/>
           <p:cNvSpPr/>
           <p:nvPr/>
         </p:nvSpPr>
@@ -12209,7 +13545,7 @@
       </p:sp>
       <p:sp>
         <p:nvSpPr>
-          <p:cNvPr id="17" name="Text 15"/>
+          <p:cNvPr id="16" name="Text 14"/>
           <p:cNvSpPr/>
           <p:nvPr/>
         </p:nvSpPr>
@@ -12250,46 +13586,7 @@
       </p:sp>
       <p:sp>
         <p:nvSpPr>
-          <p:cNvPr id="18" name="Text 16"/>
-          <p:cNvSpPr/>
-          <p:nvPr/>
-        </p:nvSpPr>
-        <p:spPr>
-          <a:xfrm>
-            <a:off x="10046208" y="4187952"/>
-            <a:ext cx="201168" cy="256032"/>
-          </a:xfrm>
-          <a:prstGeom prst="rect">
-            <a:avLst/>
-          </a:prstGeom>
-          <a:noFill/>
-          <a:ln/>
-        </p:spPr>
-        <p:txBody>
-          <a:bodyPr wrap="square" lIns="0" tIns="0" rIns="0" bIns="0" rtlCol="0" anchor="ctr"/>
-          <a:lstStyle/>
-          <a:p>
-            <a:pPr algn="ctr" indent="0" marL="0">
-              <a:buNone/>
-            </a:pPr>
-            <a:r>
-              <a:rPr lang="en-US" sz="1800" b="1" dirty="0">
-                <a:solidFill>
-                  <a:srgbClr val="0068B7"/>
-                </a:solidFill>
-                <a:latin typeface="Aptos" pitchFamily="34" charset="0"/>
-                <a:ea typeface="Aptos" pitchFamily="34" charset="-122"/>
-                <a:cs typeface="Aptos" pitchFamily="34" charset="-120"/>
-              </a:rPr>
-              <a:t>â†’</a:t>
-            </a:r>
-            <a:endParaRPr lang="en-US" sz="1800" dirty="0"/>
-          </a:p>
-        </p:txBody>
-      </p:sp>
-      <p:sp>
-        <p:nvSpPr>
-          <p:cNvPr id="19" name="Shape 17"/>
+          <p:cNvPr id="17" name="Shape 15"/>
           <p:cNvSpPr/>
           <p:nvPr/>
         </p:nvSpPr>
@@ -12316,7 +13613,7 @@
       </p:sp>
       <p:sp>
         <p:nvSpPr>
-          <p:cNvPr id="20" name="Text 18"/>
+          <p:cNvPr id="18" name="Text 16"/>
           <p:cNvSpPr/>
           <p:nvPr/>
         </p:nvSpPr>
@@ -12523,8 +13820,8 @@
         </p:nvSpPr>
         <p:spPr>
           <a:xfrm>
-            <a:off x="9966960" y="6537960"/>
-            <a:ext cx="1645920" cy="201168"/>
+            <a:off x="9646920" y="6537960"/>
+            <a:ext cx="1965960" cy="201168"/>
           </a:xfrm>
           <a:prstGeom prst="rect">
             <a:avLst/>
@@ -12548,7 +13845,7 @@
                 <a:ea typeface="Aptos" pitchFamily="34" charset="-122"/>
                 <a:cs typeface="Aptos" pitchFamily="34" charset="-120"/>
               </a:rPr>
-              <a:t>Â© Paula Soper</a:t>
+              <a:t>Copyright Paula Soper</a:t>
             </a:r>
             <a:endParaRPr lang="en-US" sz="800" dirty="0"/>
           </a:p>
@@ -12891,46 +14188,7 @@
       </p:sp>
       <p:sp>
         <p:nvSpPr>
-          <p:cNvPr id="15" name="Text 13"/>
-          <p:cNvSpPr/>
-          <p:nvPr/>
-        </p:nvSpPr>
-        <p:spPr>
-          <a:xfrm>
-            <a:off x="8817864" y="4187952"/>
-            <a:ext cx="201168" cy="256032"/>
-          </a:xfrm>
-          <a:prstGeom prst="rect">
-            <a:avLst/>
-          </a:prstGeom>
-          <a:noFill/>
-          <a:ln/>
-        </p:spPr>
-        <p:txBody>
-          <a:bodyPr wrap="square" lIns="0" tIns="0" rIns="0" bIns="0" rtlCol="0" anchor="ctr"/>
-          <a:lstStyle/>
-          <a:p>
-            <a:pPr algn="ctr" indent="0" marL="0">
-              <a:buNone/>
-            </a:pPr>
-            <a:r>
-              <a:rPr lang="en-US" sz="1800" b="1" dirty="0">
-                <a:solidFill>
-                  <a:srgbClr val="0068B7"/>
-                </a:solidFill>
-                <a:latin typeface="Aptos" pitchFamily="34" charset="0"/>
-                <a:ea typeface="Aptos" pitchFamily="34" charset="-122"/>
-                <a:cs typeface="Aptos" pitchFamily="34" charset="-120"/>
-              </a:rPr>
-              <a:t>â†’</a:t>
-            </a:r>
-            <a:endParaRPr lang="en-US" sz="1800" dirty="0"/>
-          </a:p>
-        </p:txBody>
-      </p:sp>
-      <p:sp>
-        <p:nvSpPr>
-          <p:cNvPr id="16" name="Shape 14"/>
+          <p:cNvPr id="15" name="Shape 13"/>
           <p:cNvSpPr/>
           <p:nvPr/>
         </p:nvSpPr>
@@ -12957,7 +14215,7 @@
       </p:sp>
       <p:sp>
         <p:nvSpPr>
-          <p:cNvPr id="17" name="Text 15"/>
+          <p:cNvPr id="16" name="Text 14"/>
           <p:cNvSpPr/>
           <p:nvPr/>
         </p:nvSpPr>
@@ -12998,46 +14256,7 @@
       </p:sp>
       <p:sp>
         <p:nvSpPr>
-          <p:cNvPr id="18" name="Text 16"/>
-          <p:cNvSpPr/>
-          <p:nvPr/>
-        </p:nvSpPr>
-        <p:spPr>
-          <a:xfrm>
-            <a:off x="10046208" y="4187952"/>
-            <a:ext cx="201168" cy="256032"/>
-          </a:xfrm>
-          <a:prstGeom prst="rect">
-            <a:avLst/>
-          </a:prstGeom>
-          <a:noFill/>
-          <a:ln/>
-        </p:spPr>
-        <p:txBody>
-          <a:bodyPr wrap="square" lIns="0" tIns="0" rIns="0" bIns="0" rtlCol="0" anchor="ctr"/>
-          <a:lstStyle/>
-          <a:p>
-            <a:pPr algn="ctr" indent="0" marL="0">
-              <a:buNone/>
-            </a:pPr>
-            <a:r>
-              <a:rPr lang="en-US" sz="1800" b="1" dirty="0">
-                <a:solidFill>
-                  <a:srgbClr val="0068B7"/>
-                </a:solidFill>
-                <a:latin typeface="Aptos" pitchFamily="34" charset="0"/>
-                <a:ea typeface="Aptos" pitchFamily="34" charset="-122"/>
-                <a:cs typeface="Aptos" pitchFamily="34" charset="-120"/>
-              </a:rPr>
-              <a:t>â†’</a:t>
-            </a:r>
-            <a:endParaRPr lang="en-US" sz="1800" dirty="0"/>
-          </a:p>
-        </p:txBody>
-      </p:sp>
-      <p:sp>
-        <p:nvSpPr>
-          <p:cNvPr id="19" name="Shape 17"/>
+          <p:cNvPr id="17" name="Shape 15"/>
           <p:cNvSpPr/>
           <p:nvPr/>
         </p:nvSpPr>
@@ -13064,7 +14283,7 @@
       </p:sp>
       <p:sp>
         <p:nvSpPr>
-          <p:cNvPr id="20" name="Text 18"/>
+          <p:cNvPr id="18" name="Text 16"/>
           <p:cNvSpPr/>
           <p:nvPr/>
         </p:nvSpPr>
@@ -13271,8 +14490,8 @@
         </p:nvSpPr>
         <p:spPr>
           <a:xfrm>
-            <a:off x="9966960" y="6537960"/>
-            <a:ext cx="1645920" cy="201168"/>
+            <a:off x="9646920" y="6537960"/>
+            <a:ext cx="1965960" cy="201168"/>
           </a:xfrm>
           <a:prstGeom prst="rect">
             <a:avLst/>
@@ -13296,7 +14515,7 @@
                 <a:ea typeface="Aptos" pitchFamily="34" charset="-122"/>
                 <a:cs typeface="Aptos" pitchFamily="34" charset="-120"/>
               </a:rPr>
-              <a:t>Â© Paula Soper</a:t>
+              <a:t>Copyright Paula Soper</a:t>
             </a:r>
             <a:endParaRPr lang="en-US" sz="800" dirty="0"/>
           </a:p>
@@ -13343,77 +14562,13 @@
       </p:sp>
       <p:sp>
         <p:nvSpPr>
-          <p:cNvPr id="8" name="Shape 6"/>
+          <p:cNvPr id="8" name="Text 6"/>
           <p:cNvSpPr/>
           <p:nvPr/>
         </p:nvSpPr>
         <p:spPr>
           <a:xfrm>
             <a:off x="640080" y="658368"/>
-            <a:ext cx="420624" cy="420624"/>
-          </a:xfrm>
-          <a:prstGeom prst="ellipse">
-            <a:avLst/>
-          </a:prstGeom>
-          <a:solidFill>
-            <a:srgbClr val="0068B7"/>
-          </a:solidFill>
-          <a:ln w="12700">
-            <a:solidFill>
-              <a:srgbClr val="0068B7"/>
-            </a:solidFill>
-            <a:prstDash val="solid"/>
-          </a:ln>
-        </p:spPr>
-      </p:sp>
-      <p:sp>
-        <p:nvSpPr>
-          <p:cNvPr id="9" name="Text 7"/>
-          <p:cNvSpPr/>
-          <p:nvPr/>
-        </p:nvSpPr>
-        <p:spPr>
-          <a:xfrm>
-            <a:off x="640080" y="731520"/>
-            <a:ext cx="420624" cy="164592"/>
-          </a:xfrm>
-          <a:prstGeom prst="rect">
-            <a:avLst/>
-          </a:prstGeom>
-          <a:noFill/>
-          <a:ln/>
-        </p:spPr>
-        <p:txBody>
-          <a:bodyPr wrap="square" lIns="0" tIns="0" rIns="0" bIns="0" rtlCol="0" anchor="ctr"/>
-          <a:lstStyle/>
-          <a:p>
-            <a:pPr algn="ctr" indent="0" marL="0">
-              <a:buNone/>
-            </a:pPr>
-            <a:r>
-              <a:rPr lang="en-US" sz="1100" b="1" dirty="0">
-                <a:solidFill>
-                  <a:srgbClr val="FFFFFF"/>
-                </a:solidFill>
-                <a:latin typeface="Aptos" pitchFamily="34" charset="0"/>
-                <a:ea typeface="Aptos" pitchFamily="34" charset="-122"/>
-                <a:cs typeface="Aptos" pitchFamily="34" charset="-120"/>
-              </a:rPr>
-              <a:t>1</a:t>
-            </a:r>
-            <a:endParaRPr lang="en-US" sz="1100" dirty="0"/>
-          </a:p>
-        </p:txBody>
-      </p:sp>
-      <p:sp>
-        <p:nvSpPr>
-          <p:cNvPr id="10" name="Text 8"/>
-          <p:cNvSpPr/>
-          <p:nvPr/>
-        </p:nvSpPr>
-        <p:spPr>
-          <a:xfrm>
-            <a:off x="640080" y="621792"/>
             <a:ext cx="10881360" cy="713232"/>
           </a:xfrm>
           <a:prstGeom prst="rect">
@@ -13448,14 +14603,14 @@
       </p:sp>
       <p:sp>
         <p:nvSpPr>
-          <p:cNvPr id="11" name="Text 9"/>
+          <p:cNvPr id="9" name="Text 7"/>
           <p:cNvSpPr/>
           <p:nvPr/>
         </p:nvSpPr>
         <p:spPr>
           <a:xfrm>
             <a:off x="868680" y="1508760"/>
-            <a:ext cx="6537960" cy="4160520"/>
+            <a:ext cx="6309360" cy="4160520"/>
           </a:xfrm>
           <a:prstGeom prst="rect">
             <a:avLst/>
@@ -13514,18 +14669,18 @@
       </p:sp>
       <p:sp>
         <p:nvSpPr>
-          <p:cNvPr id="12" name="Shape 10"/>
-          <p:cNvSpPr/>
-          <p:nvPr/>
-        </p:nvSpPr>
-        <p:spPr>
-          <a:xfrm>
-            <a:off x="7909560" y="1417320"/>
-            <a:ext cx="3154680" cy="1828800"/>
+          <p:cNvPr id="10" name="Shape 8"/>
+          <p:cNvSpPr/>
+          <p:nvPr/>
+        </p:nvSpPr>
+        <p:spPr>
+          <a:xfrm>
+            <a:off x="7635240" y="1325880"/>
+            <a:ext cx="3474720" cy="1325880"/>
           </a:xfrm>
           <a:prstGeom prst="roundRect">
             <a:avLst>
-              <a:gd name="adj" fmla="val 6000"/>
+              <a:gd name="adj" fmla="val 8276"/>
             </a:avLst>
           </a:prstGeom>
           <a:solidFill>
@@ -13541,14 +14696,14 @@
       </p:sp>
       <p:sp>
         <p:nvSpPr>
-          <p:cNvPr id="13" name="Text 11"/>
-          <p:cNvSpPr/>
-          <p:nvPr/>
-        </p:nvSpPr>
-        <p:spPr>
-          <a:xfrm>
-            <a:off x="8074152" y="1563624"/>
-            <a:ext cx="2825496" cy="256032"/>
+          <p:cNvPr id="11" name="Text 9"/>
+          <p:cNvSpPr/>
+          <p:nvPr/>
+        </p:nvSpPr>
+        <p:spPr>
+          <a:xfrm>
+            <a:off x="7799832" y="1472184"/>
+            <a:ext cx="3145536" cy="256032"/>
           </a:xfrm>
           <a:prstGeom prst="rect">
             <a:avLst/>
@@ -13572,7 +14727,7 @@
                 <a:ea typeface="Aptos" pitchFamily="34" charset="-122"/>
                 <a:cs typeface="Aptos" pitchFamily="34" charset="-120"/>
               </a:rPr>
-              <a:t>Key idea</a:t>
+              <a:t>Practice focus</a:t>
             </a:r>
             <a:endParaRPr lang="en-US" sz="1300" dirty="0"/>
           </a:p>
@@ -13580,14 +14735,14 @@
       </p:sp>
       <p:sp>
         <p:nvSpPr>
-          <p:cNvPr id="14" name="Text 12"/>
-          <p:cNvSpPr/>
-          <p:nvPr/>
-        </p:nvSpPr>
-        <p:spPr>
-          <a:xfrm>
-            <a:off x="8074152" y="1920240"/>
-            <a:ext cx="2825496" cy="1188720"/>
+          <p:cNvPr id="12" name="Text 10"/>
+          <p:cNvSpPr/>
+          <p:nvPr/>
+        </p:nvSpPr>
+        <p:spPr>
+          <a:xfrm>
+            <a:off x="7799832" y="1828800"/>
+            <a:ext cx="3145536" cy="685800"/>
           </a:xfrm>
           <a:prstGeom prst="rect">
             <a:avLst/>
@@ -13621,18 +14776,159 @@
       </p:sp>
       <p:sp>
         <p:nvSpPr>
-          <p:cNvPr id="15" name="Shape 13"/>
-          <p:cNvSpPr/>
-          <p:nvPr/>
-        </p:nvSpPr>
-        <p:spPr>
-          <a:xfrm>
-            <a:off x="7909560" y="3520440"/>
-            <a:ext cx="3154680" cy="1737360"/>
+          <p:cNvPr id="13" name="Shape 11"/>
+          <p:cNvSpPr/>
+          <p:nvPr/>
+        </p:nvSpPr>
+        <p:spPr>
+          <a:xfrm>
+            <a:off x="7635240" y="2788920"/>
+            <a:ext cx="3474720" cy="1536192"/>
           </a:xfrm>
           <a:prstGeom prst="roundRect">
             <a:avLst>
-              <a:gd name="adj" fmla="val 6316"/>
+              <a:gd name="adj" fmla="val 7143"/>
+            </a:avLst>
+          </a:prstGeom>
+          <a:solidFill>
+            <a:srgbClr val="FFFFFF">
+              <a:alpha val="88000"/>
+            </a:srgbClr>
+          </a:solidFill>
+          <a:ln w="12700">
+            <a:solidFill>
+              <a:srgbClr val="D6E8F2"/>
+            </a:solidFill>
+            <a:prstDash val="solid"/>
+          </a:ln>
+        </p:spPr>
+      </p:sp>
+      <p:sp>
+        <p:nvSpPr>
+          <p:cNvPr id="14" name="Shape 12"/>
+          <p:cNvSpPr/>
+          <p:nvPr/>
+        </p:nvSpPr>
+        <p:spPr>
+          <a:xfrm>
+            <a:off x="8074152" y="3291840"/>
+            <a:ext cx="2596896" cy="749808"/>
+          </a:xfrm>
+          <a:prstGeom prst="rect">
+            <a:avLst/>
+          </a:prstGeom>
+          <a:solidFill>
+            <a:srgbClr val="EAF6F8"/>
+          </a:solidFill>
+          <a:ln w="12700">
+            <a:solidFill>
+              <a:srgbClr val="8ABBD8"/>
+            </a:solidFill>
+            <a:prstDash val="solid"/>
+          </a:ln>
+        </p:spPr>
+      </p:sp>
+      <p:sp>
+        <p:nvSpPr>
+          <p:cNvPr id="15" name="Shape 13"/>
+          <p:cNvSpPr/>
+          <p:nvPr/>
+        </p:nvSpPr>
+        <p:spPr>
+          <a:xfrm>
+            <a:off x="8202168" y="3721608"/>
+            <a:ext cx="2340864" cy="0"/>
+          </a:xfrm>
+          <a:prstGeom prst="line">
+            <a:avLst/>
+          </a:prstGeom>
+          <a:noFill/>
+          <a:ln w="19050">
+            <a:solidFill>
+              <a:srgbClr val="0068B7"/>
+            </a:solidFill>
+            <a:prstDash val="solid"/>
+          </a:ln>
+        </p:spPr>
+      </p:sp>
+      <p:sp>
+        <p:nvSpPr>
+          <p:cNvPr id="16" name="Shape 14"/>
+          <p:cNvSpPr/>
+          <p:nvPr/>
+        </p:nvSpPr>
+        <p:spPr>
+          <a:xfrm>
+            <a:off x="9198864" y="4206240"/>
+            <a:ext cx="347472" cy="347472"/>
+          </a:xfrm>
+          <a:prstGeom prst="ellipse">
+            <a:avLst/>
+          </a:prstGeom>
+          <a:solidFill>
+            <a:srgbClr val="2F8A28"/>
+          </a:solidFill>
+          <a:ln w="12700">
+            <a:solidFill>
+              <a:srgbClr val="2F8A28"/>
+            </a:solidFill>
+            <a:prstDash val="solid"/>
+          </a:ln>
+        </p:spPr>
+      </p:sp>
+      <p:sp>
+        <p:nvSpPr>
+          <p:cNvPr id="17" name="Text 15"/>
+          <p:cNvSpPr/>
+          <p:nvPr/>
+        </p:nvSpPr>
+        <p:spPr>
+          <a:xfrm>
+            <a:off x="7909560" y="3977640"/>
+            <a:ext cx="2926080" cy="182880"/>
+          </a:xfrm>
+          <a:prstGeom prst="rect">
+            <a:avLst/>
+          </a:prstGeom>
+          <a:noFill/>
+          <a:ln/>
+        </p:spPr>
+        <p:txBody>
+          <a:bodyPr wrap="square" lIns="0" tIns="0" rIns="0" bIns="0" rtlCol="0" anchor="ctr"/>
+          <a:lstStyle/>
+          <a:p>
+            <a:pPr algn="ctr" indent="0" marL="0">
+              <a:buNone/>
+            </a:pPr>
+            <a:r>
+              <a:rPr lang="en-US" sz="1000" dirty="0">
+                <a:solidFill>
+                  <a:srgbClr val="003A63"/>
+                </a:solidFill>
+                <a:latin typeface="Aptos" pitchFamily="34" charset="0"/>
+                <a:ea typeface="Aptos" pitchFamily="34" charset="-122"/>
+                <a:cs typeface="Aptos" pitchFamily="34" charset="-120"/>
+              </a:rPr>
+              <a:t>Concept to action</a:t>
+            </a:r>
+            <a:endParaRPr lang="en-US" sz="1000" dirty="0"/>
+          </a:p>
+        </p:txBody>
+      </p:sp>
+      <p:sp>
+        <p:nvSpPr>
+          <p:cNvPr id="18" name="Shape 16"/>
+          <p:cNvSpPr/>
+          <p:nvPr/>
+        </p:nvSpPr>
+        <p:spPr>
+          <a:xfrm>
+            <a:off x="7635240" y="4498848"/>
+            <a:ext cx="3474720" cy="1143000"/>
+          </a:xfrm>
+          <a:prstGeom prst="roundRect">
+            <a:avLst>
+              <a:gd name="adj" fmla="val 9600"/>
             </a:avLst>
           </a:prstGeom>
           <a:solidFill>
@@ -13648,14 +14944,14 @@
       </p:sp>
       <p:sp>
         <p:nvSpPr>
-          <p:cNvPr id="16" name="Text 14"/>
-          <p:cNvSpPr/>
-          <p:nvPr/>
-        </p:nvSpPr>
-        <p:spPr>
-          <a:xfrm>
-            <a:off x="8074152" y="3666744"/>
-            <a:ext cx="2825496" cy="256032"/>
+          <p:cNvPr id="19" name="Text 17"/>
+          <p:cNvSpPr/>
+          <p:nvPr/>
+        </p:nvSpPr>
+        <p:spPr>
+          <a:xfrm>
+            <a:off x="7799832" y="4645152"/>
+            <a:ext cx="3145536" cy="256032"/>
           </a:xfrm>
           <a:prstGeom prst="rect">
             <a:avLst/>
@@ -13679,7 +14975,7 @@
                 <a:ea typeface="Aptos" pitchFamily="34" charset="-122"/>
                 <a:cs typeface="Aptos" pitchFamily="34" charset="-120"/>
               </a:rPr>
-              <a:t>Use this for</a:t>
+              <a:t>What to produce</a:t>
             </a:r>
             <a:endParaRPr lang="en-US" sz="1300" dirty="0"/>
           </a:p>
@@ -13687,14 +14983,14 @@
       </p:sp>
       <p:sp>
         <p:nvSpPr>
-          <p:cNvPr id="17" name="Text 15"/>
-          <p:cNvSpPr/>
-          <p:nvPr/>
-        </p:nvSpPr>
-        <p:spPr>
-          <a:xfrm>
-            <a:off x="8074152" y="4023360"/>
-            <a:ext cx="2825496" cy="1097280"/>
+          <p:cNvPr id="20" name="Text 18"/>
+          <p:cNvSpPr/>
+          <p:nvPr/>
+        </p:nvSpPr>
+        <p:spPr>
+          <a:xfrm>
+            <a:off x="7799832" y="5001768"/>
+            <a:ext cx="3145536" cy="502920"/>
           </a:xfrm>
           <a:prstGeom prst="rect">
             <a:avLst/>
@@ -13720,7 +15016,7 @@
                 <a:ea typeface="Aptos" pitchFamily="34" charset="-122"/>
                 <a:cs typeface="Aptos" pitchFamily="34" charset="-120"/>
               </a:rPr>
-              <a:t>Connect the concept to public health decisions, safeguards, documentation, or implementation work.</a:t>
+              <a:t>Use the assignment to test whether you can explain the concept, apply it to a realistic public health situation, and identify what would need review before the work moves forward.</a:t>
             </a:r>
             <a:endParaRPr lang="en-US" sz="1550" dirty="0"/>
           </a:p>
@@ -13894,8 +15190,8 @@
         </p:nvSpPr>
         <p:spPr>
           <a:xfrm>
-            <a:off x="9966960" y="6537960"/>
-            <a:ext cx="1645920" cy="201168"/>
+            <a:off x="9646920" y="6537960"/>
+            <a:ext cx="1965960" cy="201168"/>
           </a:xfrm>
           <a:prstGeom prst="rect">
             <a:avLst/>
@@ -13919,7 +15215,7 @@
                 <a:ea typeface="Aptos" pitchFamily="34" charset="-122"/>
                 <a:cs typeface="Aptos" pitchFamily="34" charset="-120"/>
               </a:rPr>
-              <a:t>Â© Paula Soper</a:t>
+              <a:t>Copyright Paula Soper</a:t>
             </a:r>
             <a:endParaRPr lang="en-US" sz="800" dirty="0"/>
           </a:p>
@@ -14014,7 +15310,7 @@
         <p:spPr>
           <a:xfrm>
             <a:off x="868680" y="1508760"/>
-            <a:ext cx="6537960" cy="4160520"/>
+            <a:ext cx="6309360" cy="4160520"/>
           </a:xfrm>
           <a:prstGeom prst="rect">
             <a:avLst/>
@@ -14051,12 +15347,12 @@
         </p:nvSpPr>
         <p:spPr>
           <a:xfrm>
-            <a:off x="7909560" y="1417320"/>
-            <a:ext cx="3154680" cy="1828800"/>
+            <a:off x="7635240" y="1325880"/>
+            <a:ext cx="3474720" cy="1325880"/>
           </a:xfrm>
           <a:prstGeom prst="roundRect">
             <a:avLst>
-              <a:gd name="adj" fmla="val 6000"/>
+              <a:gd name="adj" fmla="val 8276"/>
             </a:avLst>
           </a:prstGeom>
           <a:solidFill>
@@ -14078,8 +15374,8 @@
         </p:nvSpPr>
         <p:spPr>
           <a:xfrm>
-            <a:off x="8074152" y="1563624"/>
-            <a:ext cx="2825496" cy="256032"/>
+            <a:off x="7799832" y="1472184"/>
+            <a:ext cx="3145536" cy="256032"/>
           </a:xfrm>
           <a:prstGeom prst="rect">
             <a:avLst/>
@@ -14103,7 +15399,7 @@
                 <a:ea typeface="Aptos" pitchFamily="34" charset="-122"/>
                 <a:cs typeface="Aptos" pitchFamily="34" charset="-120"/>
               </a:rPr>
-              <a:t>Key idea</a:t>
+              <a:t>Practice focus</a:t>
             </a:r>
             <a:endParaRPr lang="en-US" sz="1300" dirty="0"/>
           </a:p>
@@ -14117,8 +15413,8 @@
         </p:nvSpPr>
         <p:spPr>
           <a:xfrm>
-            <a:off x="8074152" y="1920240"/>
-            <a:ext cx="2825496" cy="1188720"/>
+            <a:off x="7799832" y="1828800"/>
+            <a:ext cx="3145536" cy="685800"/>
           </a:xfrm>
           <a:prstGeom prst="rect">
             <a:avLst/>
@@ -14158,12 +15454,153 @@
         </p:nvSpPr>
         <p:spPr>
           <a:xfrm>
-            <a:off x="7909560" y="3520440"/>
-            <a:ext cx="3154680" cy="1737360"/>
+            <a:off x="7635240" y="2788920"/>
+            <a:ext cx="3474720" cy="1536192"/>
           </a:xfrm>
           <a:prstGeom prst="roundRect">
             <a:avLst>
-              <a:gd name="adj" fmla="val 6316"/>
+              <a:gd name="adj" fmla="val 7143"/>
+            </a:avLst>
+          </a:prstGeom>
+          <a:solidFill>
+            <a:srgbClr val="FFFFFF">
+              <a:alpha val="88000"/>
+            </a:srgbClr>
+          </a:solidFill>
+          <a:ln w="12700">
+            <a:solidFill>
+              <a:srgbClr val="D6E8F2"/>
+            </a:solidFill>
+            <a:prstDash val="solid"/>
+          </a:ln>
+        </p:spPr>
+      </p:sp>
+      <p:sp>
+        <p:nvSpPr>
+          <p:cNvPr id="14" name="Shape 12"/>
+          <p:cNvSpPr/>
+          <p:nvPr/>
+        </p:nvSpPr>
+        <p:spPr>
+          <a:xfrm>
+            <a:off x="8074152" y="3291840"/>
+            <a:ext cx="2596896" cy="749808"/>
+          </a:xfrm>
+          <a:prstGeom prst="rect">
+            <a:avLst/>
+          </a:prstGeom>
+          <a:solidFill>
+            <a:srgbClr val="EAF6F8"/>
+          </a:solidFill>
+          <a:ln w="12700">
+            <a:solidFill>
+              <a:srgbClr val="8ABBD8"/>
+            </a:solidFill>
+            <a:prstDash val="solid"/>
+          </a:ln>
+        </p:spPr>
+      </p:sp>
+      <p:sp>
+        <p:nvSpPr>
+          <p:cNvPr id="15" name="Shape 13"/>
+          <p:cNvSpPr/>
+          <p:nvPr/>
+        </p:nvSpPr>
+        <p:spPr>
+          <a:xfrm>
+            <a:off x="8202168" y="3721608"/>
+            <a:ext cx="2340864" cy="0"/>
+          </a:xfrm>
+          <a:prstGeom prst="line">
+            <a:avLst/>
+          </a:prstGeom>
+          <a:noFill/>
+          <a:ln w="19050">
+            <a:solidFill>
+              <a:srgbClr val="0068B7"/>
+            </a:solidFill>
+            <a:prstDash val="solid"/>
+          </a:ln>
+        </p:spPr>
+      </p:sp>
+      <p:sp>
+        <p:nvSpPr>
+          <p:cNvPr id="16" name="Shape 14"/>
+          <p:cNvSpPr/>
+          <p:nvPr/>
+        </p:nvSpPr>
+        <p:spPr>
+          <a:xfrm>
+            <a:off x="9198864" y="4206240"/>
+            <a:ext cx="347472" cy="347472"/>
+          </a:xfrm>
+          <a:prstGeom prst="ellipse">
+            <a:avLst/>
+          </a:prstGeom>
+          <a:solidFill>
+            <a:srgbClr val="2F8A28"/>
+          </a:solidFill>
+          <a:ln w="12700">
+            <a:solidFill>
+              <a:srgbClr val="2F8A28"/>
+            </a:solidFill>
+            <a:prstDash val="solid"/>
+          </a:ln>
+        </p:spPr>
+      </p:sp>
+      <p:sp>
+        <p:nvSpPr>
+          <p:cNvPr id="17" name="Text 15"/>
+          <p:cNvSpPr/>
+          <p:nvPr/>
+        </p:nvSpPr>
+        <p:spPr>
+          <a:xfrm>
+            <a:off x="7909560" y="3977640"/>
+            <a:ext cx="2926080" cy="182880"/>
+          </a:xfrm>
+          <a:prstGeom prst="rect">
+            <a:avLst/>
+          </a:prstGeom>
+          <a:noFill/>
+          <a:ln/>
+        </p:spPr>
+        <p:txBody>
+          <a:bodyPr wrap="square" lIns="0" tIns="0" rIns="0" bIns="0" rtlCol="0" anchor="ctr"/>
+          <a:lstStyle/>
+          <a:p>
+            <a:pPr algn="ctr" indent="0" marL="0">
+              <a:buNone/>
+            </a:pPr>
+            <a:r>
+              <a:rPr lang="en-US" sz="1000" dirty="0">
+                <a:solidFill>
+                  <a:srgbClr val="003A63"/>
+                </a:solidFill>
+                <a:latin typeface="Aptos" pitchFamily="34" charset="0"/>
+                <a:ea typeface="Aptos" pitchFamily="34" charset="-122"/>
+                <a:cs typeface="Aptos" pitchFamily="34" charset="-120"/>
+              </a:rPr>
+              <a:t>Concept to action</a:t>
+            </a:r>
+            <a:endParaRPr lang="en-US" sz="1000" dirty="0"/>
+          </a:p>
+        </p:txBody>
+      </p:sp>
+      <p:sp>
+        <p:nvSpPr>
+          <p:cNvPr id="18" name="Shape 16"/>
+          <p:cNvSpPr/>
+          <p:nvPr/>
+        </p:nvSpPr>
+        <p:spPr>
+          <a:xfrm>
+            <a:off x="7635240" y="4498848"/>
+            <a:ext cx="3474720" cy="1143000"/>
+          </a:xfrm>
+          <a:prstGeom prst="roundRect">
+            <a:avLst>
+              <a:gd name="adj" fmla="val 9600"/>
             </a:avLst>
           </a:prstGeom>
           <a:solidFill>
@@ -14179,14 +15616,14 @@
       </p:sp>
       <p:sp>
         <p:nvSpPr>
-          <p:cNvPr id="14" name="Text 12"/>
-          <p:cNvSpPr/>
-          <p:nvPr/>
-        </p:nvSpPr>
-        <p:spPr>
-          <a:xfrm>
-            <a:off x="8074152" y="3666744"/>
-            <a:ext cx="2825496" cy="256032"/>
+          <p:cNvPr id="19" name="Text 17"/>
+          <p:cNvSpPr/>
+          <p:nvPr/>
+        </p:nvSpPr>
+        <p:spPr>
+          <a:xfrm>
+            <a:off x="7799832" y="4645152"/>
+            <a:ext cx="3145536" cy="256032"/>
           </a:xfrm>
           <a:prstGeom prst="rect">
             <a:avLst/>
@@ -14210,7 +15647,7 @@
                 <a:ea typeface="Aptos" pitchFamily="34" charset="-122"/>
                 <a:cs typeface="Aptos" pitchFamily="34" charset="-120"/>
               </a:rPr>
-              <a:t>Use this for</a:t>
+              <a:t>What to produce</a:t>
             </a:r>
             <a:endParaRPr lang="en-US" sz="1300" dirty="0"/>
           </a:p>
@@ -14218,14 +15655,14 @@
       </p:sp>
       <p:sp>
         <p:nvSpPr>
-          <p:cNvPr id="15" name="Text 13"/>
-          <p:cNvSpPr/>
-          <p:nvPr/>
-        </p:nvSpPr>
-        <p:spPr>
-          <a:xfrm>
-            <a:off x="8074152" y="4023360"/>
-            <a:ext cx="2825496" cy="1097280"/>
+          <p:cNvPr id="20" name="Text 18"/>
+          <p:cNvSpPr/>
+          <p:nvPr/>
+        </p:nvSpPr>
+        <p:spPr>
+          <a:xfrm>
+            <a:off x="7799832" y="5001768"/>
+            <a:ext cx="3145536" cy="502920"/>
           </a:xfrm>
           <a:prstGeom prst="rect">
             <a:avLst/>
@@ -14251,7 +15688,7 @@
                 <a:ea typeface="Aptos" pitchFamily="34" charset="-122"/>
                 <a:cs typeface="Aptos" pitchFamily="34" charset="-120"/>
               </a:rPr>
-              <a:t>Connect the concept to public health decisions, safeguards, documentation, or implementation work.</a:t>
+              <a:t>Use the assignment to test whether you can explain the concept, apply it to a realistic public health situation, and identify what would need review before the work moves forward.</a:t>
             </a:r>
             <a:endParaRPr lang="en-US" sz="1550" dirty="0"/>
           </a:p>
@@ -14425,8 +15862,8 @@
         </p:nvSpPr>
         <p:spPr>
           <a:xfrm>
-            <a:off x="9966960" y="6537960"/>
-            <a:ext cx="1645920" cy="201168"/>
+            <a:off x="9646920" y="6537960"/>
+            <a:ext cx="1965960" cy="201168"/>
           </a:xfrm>
           <a:prstGeom prst="rect">
             <a:avLst/>
@@ -14450,7 +15887,7 @@
                 <a:ea typeface="Aptos" pitchFamily="34" charset="-122"/>
                 <a:cs typeface="Aptos" pitchFamily="34" charset="-120"/>
               </a:rPr>
-              <a:t>Â© Paula Soper</a:t>
+              <a:t>Copyright Paula Soper</a:t>
             </a:r>
             <a:endParaRPr lang="en-US" sz="800" dirty="0"/>
           </a:p>
@@ -14497,77 +15934,13 @@
       </p:sp>
       <p:sp>
         <p:nvSpPr>
-          <p:cNvPr id="8" name="Shape 6"/>
+          <p:cNvPr id="8" name="Text 6"/>
           <p:cNvSpPr/>
           <p:nvPr/>
         </p:nvSpPr>
         <p:spPr>
           <a:xfrm>
             <a:off x="640080" y="658368"/>
-            <a:ext cx="420624" cy="420624"/>
-          </a:xfrm>
-          <a:prstGeom prst="ellipse">
-            <a:avLst/>
-          </a:prstGeom>
-          <a:solidFill>
-            <a:srgbClr val="0068B7"/>
-          </a:solidFill>
-          <a:ln w="12700">
-            <a:solidFill>
-              <a:srgbClr val="0068B7"/>
-            </a:solidFill>
-            <a:prstDash val="solid"/>
-          </a:ln>
-        </p:spPr>
-      </p:sp>
-      <p:sp>
-        <p:nvSpPr>
-          <p:cNvPr id="9" name="Text 7"/>
-          <p:cNvSpPr/>
-          <p:nvPr/>
-        </p:nvSpPr>
-        <p:spPr>
-          <a:xfrm>
-            <a:off x="640080" y="731520"/>
-            <a:ext cx="420624" cy="164592"/>
-          </a:xfrm>
-          <a:prstGeom prst="rect">
-            <a:avLst/>
-          </a:prstGeom>
-          <a:noFill/>
-          <a:ln/>
-        </p:spPr>
-        <p:txBody>
-          <a:bodyPr wrap="square" lIns="0" tIns="0" rIns="0" bIns="0" rtlCol="0" anchor="ctr"/>
-          <a:lstStyle/>
-          <a:p>
-            <a:pPr algn="ctr" indent="0" marL="0">
-              <a:buNone/>
-            </a:pPr>
-            <a:r>
-              <a:rPr lang="en-US" sz="1100" b="1" dirty="0">
-                <a:solidFill>
-                  <a:srgbClr val="FFFFFF"/>
-                </a:solidFill>
-                <a:latin typeface="Aptos" pitchFamily="34" charset="0"/>
-                <a:ea typeface="Aptos" pitchFamily="34" charset="-122"/>
-                <a:cs typeface="Aptos" pitchFamily="34" charset="-120"/>
-              </a:rPr>
-              <a:t>2</a:t>
-            </a:r>
-            <a:endParaRPr lang="en-US" sz="1100" dirty="0"/>
-          </a:p>
-        </p:txBody>
-      </p:sp>
-      <p:sp>
-        <p:nvSpPr>
-          <p:cNvPr id="10" name="Text 8"/>
-          <p:cNvSpPr/>
-          <p:nvPr/>
-        </p:nvSpPr>
-        <p:spPr>
-          <a:xfrm>
-            <a:off x="640080" y="621792"/>
             <a:ext cx="10881360" cy="713232"/>
           </a:xfrm>
           <a:prstGeom prst="rect">
@@ -14602,14 +15975,14 @@
       </p:sp>
       <p:sp>
         <p:nvSpPr>
-          <p:cNvPr id="11" name="Text 9"/>
+          <p:cNvPr id="9" name="Text 7"/>
           <p:cNvSpPr/>
           <p:nvPr/>
         </p:nvSpPr>
         <p:spPr>
           <a:xfrm>
             <a:off x="868680" y="1508760"/>
-            <a:ext cx="6537960" cy="4160520"/>
+            <a:ext cx="6309360" cy="4160520"/>
           </a:xfrm>
           <a:prstGeom prst="rect">
             <a:avLst/>
@@ -14668,18 +16041,18 @@
       </p:sp>
       <p:sp>
         <p:nvSpPr>
-          <p:cNvPr id="12" name="Shape 10"/>
-          <p:cNvSpPr/>
-          <p:nvPr/>
-        </p:nvSpPr>
-        <p:spPr>
-          <a:xfrm>
-            <a:off x="7909560" y="1417320"/>
-            <a:ext cx="3154680" cy="1828800"/>
+          <p:cNvPr id="10" name="Shape 8"/>
+          <p:cNvSpPr/>
+          <p:nvPr/>
+        </p:nvSpPr>
+        <p:spPr>
+          <a:xfrm>
+            <a:off x="7635240" y="1325880"/>
+            <a:ext cx="3474720" cy="1325880"/>
           </a:xfrm>
           <a:prstGeom prst="roundRect">
             <a:avLst>
-              <a:gd name="adj" fmla="val 6000"/>
+              <a:gd name="adj" fmla="val 8276"/>
             </a:avLst>
           </a:prstGeom>
           <a:solidFill>
@@ -14695,14 +16068,14 @@
       </p:sp>
       <p:sp>
         <p:nvSpPr>
-          <p:cNvPr id="13" name="Text 11"/>
-          <p:cNvSpPr/>
-          <p:nvPr/>
-        </p:nvSpPr>
-        <p:spPr>
-          <a:xfrm>
-            <a:off x="8074152" y="1563624"/>
-            <a:ext cx="2825496" cy="256032"/>
+          <p:cNvPr id="11" name="Text 9"/>
+          <p:cNvSpPr/>
+          <p:nvPr/>
+        </p:nvSpPr>
+        <p:spPr>
+          <a:xfrm>
+            <a:off x="7799832" y="1472184"/>
+            <a:ext cx="3145536" cy="256032"/>
           </a:xfrm>
           <a:prstGeom prst="rect">
             <a:avLst/>
@@ -14726,7 +16099,7 @@
                 <a:ea typeface="Aptos" pitchFamily="34" charset="-122"/>
                 <a:cs typeface="Aptos" pitchFamily="34" charset="-120"/>
               </a:rPr>
-              <a:t>Key idea</a:t>
+              <a:t>Practice focus</a:t>
             </a:r>
             <a:endParaRPr lang="en-US" sz="1300" dirty="0"/>
           </a:p>
@@ -14734,14 +16107,14 @@
       </p:sp>
       <p:sp>
         <p:nvSpPr>
-          <p:cNvPr id="14" name="Text 12"/>
-          <p:cNvSpPr/>
-          <p:nvPr/>
-        </p:nvSpPr>
-        <p:spPr>
-          <a:xfrm>
-            <a:off x="8074152" y="1920240"/>
-            <a:ext cx="2825496" cy="1188720"/>
+          <p:cNvPr id="12" name="Text 10"/>
+          <p:cNvSpPr/>
+          <p:nvPr/>
+        </p:nvSpPr>
+        <p:spPr>
+          <a:xfrm>
+            <a:off x="7799832" y="1828800"/>
+            <a:ext cx="3145536" cy="685800"/>
           </a:xfrm>
           <a:prstGeom prst="rect">
             <a:avLst/>
@@ -14775,18 +16148,159 @@
       </p:sp>
       <p:sp>
         <p:nvSpPr>
-          <p:cNvPr id="15" name="Shape 13"/>
-          <p:cNvSpPr/>
-          <p:nvPr/>
-        </p:nvSpPr>
-        <p:spPr>
-          <a:xfrm>
-            <a:off x="7909560" y="3520440"/>
-            <a:ext cx="3154680" cy="1737360"/>
+          <p:cNvPr id="13" name="Shape 11"/>
+          <p:cNvSpPr/>
+          <p:nvPr/>
+        </p:nvSpPr>
+        <p:spPr>
+          <a:xfrm>
+            <a:off x="7635240" y="2788920"/>
+            <a:ext cx="3474720" cy="1536192"/>
           </a:xfrm>
           <a:prstGeom prst="roundRect">
             <a:avLst>
-              <a:gd name="adj" fmla="val 6316"/>
+              <a:gd name="adj" fmla="val 7143"/>
+            </a:avLst>
+          </a:prstGeom>
+          <a:solidFill>
+            <a:srgbClr val="FFFFFF">
+              <a:alpha val="88000"/>
+            </a:srgbClr>
+          </a:solidFill>
+          <a:ln w="12700">
+            <a:solidFill>
+              <a:srgbClr val="D6E8F2"/>
+            </a:solidFill>
+            <a:prstDash val="solid"/>
+          </a:ln>
+        </p:spPr>
+      </p:sp>
+      <p:sp>
+        <p:nvSpPr>
+          <p:cNvPr id="14" name="Shape 12"/>
+          <p:cNvSpPr/>
+          <p:nvPr/>
+        </p:nvSpPr>
+        <p:spPr>
+          <a:xfrm>
+            <a:off x="8074152" y="3291840"/>
+            <a:ext cx="2596896" cy="749808"/>
+          </a:xfrm>
+          <a:prstGeom prst="rect">
+            <a:avLst/>
+          </a:prstGeom>
+          <a:solidFill>
+            <a:srgbClr val="EAF6F8"/>
+          </a:solidFill>
+          <a:ln w="12700">
+            <a:solidFill>
+              <a:srgbClr val="8ABBD8"/>
+            </a:solidFill>
+            <a:prstDash val="solid"/>
+          </a:ln>
+        </p:spPr>
+      </p:sp>
+      <p:sp>
+        <p:nvSpPr>
+          <p:cNvPr id="15" name="Shape 13"/>
+          <p:cNvSpPr/>
+          <p:nvPr/>
+        </p:nvSpPr>
+        <p:spPr>
+          <a:xfrm>
+            <a:off x="8202168" y="3721608"/>
+            <a:ext cx="2340864" cy="0"/>
+          </a:xfrm>
+          <a:prstGeom prst="line">
+            <a:avLst/>
+          </a:prstGeom>
+          <a:noFill/>
+          <a:ln w="19050">
+            <a:solidFill>
+              <a:srgbClr val="0068B7"/>
+            </a:solidFill>
+            <a:prstDash val="solid"/>
+          </a:ln>
+        </p:spPr>
+      </p:sp>
+      <p:sp>
+        <p:nvSpPr>
+          <p:cNvPr id="16" name="Shape 14"/>
+          <p:cNvSpPr/>
+          <p:nvPr/>
+        </p:nvSpPr>
+        <p:spPr>
+          <a:xfrm>
+            <a:off x="9198864" y="4206240"/>
+            <a:ext cx="347472" cy="347472"/>
+          </a:xfrm>
+          <a:prstGeom prst="ellipse">
+            <a:avLst/>
+          </a:prstGeom>
+          <a:solidFill>
+            <a:srgbClr val="2F8A28"/>
+          </a:solidFill>
+          <a:ln w="12700">
+            <a:solidFill>
+              <a:srgbClr val="2F8A28"/>
+            </a:solidFill>
+            <a:prstDash val="solid"/>
+          </a:ln>
+        </p:spPr>
+      </p:sp>
+      <p:sp>
+        <p:nvSpPr>
+          <p:cNvPr id="17" name="Text 15"/>
+          <p:cNvSpPr/>
+          <p:nvPr/>
+        </p:nvSpPr>
+        <p:spPr>
+          <a:xfrm>
+            <a:off x="7909560" y="3977640"/>
+            <a:ext cx="2926080" cy="182880"/>
+          </a:xfrm>
+          <a:prstGeom prst="rect">
+            <a:avLst/>
+          </a:prstGeom>
+          <a:noFill/>
+          <a:ln/>
+        </p:spPr>
+        <p:txBody>
+          <a:bodyPr wrap="square" lIns="0" tIns="0" rIns="0" bIns="0" rtlCol="0" anchor="ctr"/>
+          <a:lstStyle/>
+          <a:p>
+            <a:pPr algn="ctr" indent="0" marL="0">
+              <a:buNone/>
+            </a:pPr>
+            <a:r>
+              <a:rPr lang="en-US" sz="1000" dirty="0">
+                <a:solidFill>
+                  <a:srgbClr val="003A63"/>
+                </a:solidFill>
+                <a:latin typeface="Aptos" pitchFamily="34" charset="0"/>
+                <a:ea typeface="Aptos" pitchFamily="34" charset="-122"/>
+                <a:cs typeface="Aptos" pitchFamily="34" charset="-120"/>
+              </a:rPr>
+              <a:t>Concept to action</a:t>
+            </a:r>
+            <a:endParaRPr lang="en-US" sz="1000" dirty="0"/>
+          </a:p>
+        </p:txBody>
+      </p:sp>
+      <p:sp>
+        <p:nvSpPr>
+          <p:cNvPr id="18" name="Shape 16"/>
+          <p:cNvSpPr/>
+          <p:nvPr/>
+        </p:nvSpPr>
+        <p:spPr>
+          <a:xfrm>
+            <a:off x="7635240" y="4498848"/>
+            <a:ext cx="3474720" cy="1143000"/>
+          </a:xfrm>
+          <a:prstGeom prst="roundRect">
+            <a:avLst>
+              <a:gd name="adj" fmla="val 9600"/>
             </a:avLst>
           </a:prstGeom>
           <a:solidFill>
@@ -14802,14 +16316,14 @@
       </p:sp>
       <p:sp>
         <p:nvSpPr>
-          <p:cNvPr id="16" name="Text 14"/>
-          <p:cNvSpPr/>
-          <p:nvPr/>
-        </p:nvSpPr>
-        <p:spPr>
-          <a:xfrm>
-            <a:off x="8074152" y="3666744"/>
-            <a:ext cx="2825496" cy="256032"/>
+          <p:cNvPr id="19" name="Text 17"/>
+          <p:cNvSpPr/>
+          <p:nvPr/>
+        </p:nvSpPr>
+        <p:spPr>
+          <a:xfrm>
+            <a:off x="7799832" y="4645152"/>
+            <a:ext cx="3145536" cy="256032"/>
           </a:xfrm>
           <a:prstGeom prst="rect">
             <a:avLst/>
@@ -14833,7 +16347,7 @@
                 <a:ea typeface="Aptos" pitchFamily="34" charset="-122"/>
                 <a:cs typeface="Aptos" pitchFamily="34" charset="-120"/>
               </a:rPr>
-              <a:t>Use this for</a:t>
+              <a:t>What to produce</a:t>
             </a:r>
             <a:endParaRPr lang="en-US" sz="1300" dirty="0"/>
           </a:p>
@@ -14841,14 +16355,14 @@
       </p:sp>
       <p:sp>
         <p:nvSpPr>
-          <p:cNvPr id="17" name="Text 15"/>
-          <p:cNvSpPr/>
-          <p:nvPr/>
-        </p:nvSpPr>
-        <p:spPr>
-          <a:xfrm>
-            <a:off x="8074152" y="4023360"/>
-            <a:ext cx="2825496" cy="1097280"/>
+          <p:cNvPr id="20" name="Text 18"/>
+          <p:cNvSpPr/>
+          <p:nvPr/>
+        </p:nvSpPr>
+        <p:spPr>
+          <a:xfrm>
+            <a:off x="7799832" y="5001768"/>
+            <a:ext cx="3145536" cy="502920"/>
           </a:xfrm>
           <a:prstGeom prst="rect">
             <a:avLst/>
@@ -14874,7 +16388,7 @@
                 <a:ea typeface="Aptos" pitchFamily="34" charset="-122"/>
                 <a:cs typeface="Aptos" pitchFamily="34" charset="-120"/>
               </a:rPr>
-              <a:t>Connect the concept to public health decisions, safeguards, documentation, or implementation work.</a:t>
+              <a:t>Use the assignment to test whether you can explain the concept, apply it to a realistic public health situation, and identify what would need review before the work moves forward.</a:t>
             </a:r>
             <a:endParaRPr lang="en-US" sz="1550" dirty="0"/>
           </a:p>
@@ -15048,8 +16562,8 @@
         </p:nvSpPr>
         <p:spPr>
           <a:xfrm>
-            <a:off x="9966960" y="6537960"/>
-            <a:ext cx="1645920" cy="201168"/>
+            <a:off x="9646920" y="6537960"/>
+            <a:ext cx="1965960" cy="201168"/>
           </a:xfrm>
           <a:prstGeom prst="rect">
             <a:avLst/>
@@ -15073,7 +16587,7 @@
                 <a:ea typeface="Aptos" pitchFamily="34" charset="-122"/>
                 <a:cs typeface="Aptos" pitchFamily="34" charset="-120"/>
               </a:rPr>
-              <a:t>Â© Paula Soper</a:t>
+              <a:t>Copyright Paula Soper</a:t>
             </a:r>
             <a:endParaRPr lang="en-US" sz="800" dirty="0"/>
           </a:p>
@@ -15120,77 +16634,13 @@
       </p:sp>
       <p:sp>
         <p:nvSpPr>
-          <p:cNvPr id="8" name="Shape 6"/>
+          <p:cNvPr id="8" name="Text 6"/>
           <p:cNvSpPr/>
           <p:nvPr/>
         </p:nvSpPr>
         <p:spPr>
           <a:xfrm>
             <a:off x="640080" y="658368"/>
-            <a:ext cx="420624" cy="420624"/>
-          </a:xfrm>
-          <a:prstGeom prst="ellipse">
-            <a:avLst/>
-          </a:prstGeom>
-          <a:solidFill>
-            <a:srgbClr val="0068B7"/>
-          </a:solidFill>
-          <a:ln w="12700">
-            <a:solidFill>
-              <a:srgbClr val="0068B7"/>
-            </a:solidFill>
-            <a:prstDash val="solid"/>
-          </a:ln>
-        </p:spPr>
-      </p:sp>
-      <p:sp>
-        <p:nvSpPr>
-          <p:cNvPr id="9" name="Text 7"/>
-          <p:cNvSpPr/>
-          <p:nvPr/>
-        </p:nvSpPr>
-        <p:spPr>
-          <a:xfrm>
-            <a:off x="640080" y="731520"/>
-            <a:ext cx="420624" cy="164592"/>
-          </a:xfrm>
-          <a:prstGeom prst="rect">
-            <a:avLst/>
-          </a:prstGeom>
-          <a:noFill/>
-          <a:ln/>
-        </p:spPr>
-        <p:txBody>
-          <a:bodyPr wrap="square" lIns="0" tIns="0" rIns="0" bIns="0" rtlCol="0" anchor="ctr"/>
-          <a:lstStyle/>
-          <a:p>
-            <a:pPr algn="ctr" indent="0" marL="0">
-              <a:buNone/>
-            </a:pPr>
-            <a:r>
-              <a:rPr lang="en-US" sz="1100" b="1" dirty="0">
-                <a:solidFill>
-                  <a:srgbClr val="FFFFFF"/>
-                </a:solidFill>
-                <a:latin typeface="Aptos" pitchFamily="34" charset="0"/>
-                <a:ea typeface="Aptos" pitchFamily="34" charset="-122"/>
-                <a:cs typeface="Aptos" pitchFamily="34" charset="-120"/>
-              </a:rPr>
-              <a:t>3</a:t>
-            </a:r>
-            <a:endParaRPr lang="en-US" sz="1100" dirty="0"/>
-          </a:p>
-        </p:txBody>
-      </p:sp>
-      <p:sp>
-        <p:nvSpPr>
-          <p:cNvPr id="10" name="Text 8"/>
-          <p:cNvSpPr/>
-          <p:nvPr/>
-        </p:nvSpPr>
-        <p:spPr>
-          <a:xfrm>
-            <a:off x="640080" y="621792"/>
             <a:ext cx="10881360" cy="713232"/>
           </a:xfrm>
           <a:prstGeom prst="rect">
@@ -15225,14 +16675,14 @@
       </p:sp>
       <p:sp>
         <p:nvSpPr>
-          <p:cNvPr id="11" name="Text 9"/>
+          <p:cNvPr id="9" name="Text 7"/>
           <p:cNvSpPr/>
           <p:nvPr/>
         </p:nvSpPr>
         <p:spPr>
           <a:xfrm>
             <a:off x="868680" y="1508760"/>
-            <a:ext cx="6537960" cy="4160520"/>
+            <a:ext cx="6309360" cy="4160520"/>
           </a:xfrm>
           <a:prstGeom prst="rect">
             <a:avLst/>
@@ -15291,18 +16741,18 @@
       </p:sp>
       <p:sp>
         <p:nvSpPr>
-          <p:cNvPr id="12" name="Shape 10"/>
-          <p:cNvSpPr/>
-          <p:nvPr/>
-        </p:nvSpPr>
-        <p:spPr>
-          <a:xfrm>
-            <a:off x="7909560" y="1417320"/>
-            <a:ext cx="3154680" cy="1828800"/>
+          <p:cNvPr id="10" name="Shape 8"/>
+          <p:cNvSpPr/>
+          <p:nvPr/>
+        </p:nvSpPr>
+        <p:spPr>
+          <a:xfrm>
+            <a:off x="7635240" y="1325880"/>
+            <a:ext cx="3474720" cy="1325880"/>
           </a:xfrm>
           <a:prstGeom prst="roundRect">
             <a:avLst>
-              <a:gd name="adj" fmla="val 6000"/>
+              <a:gd name="adj" fmla="val 8276"/>
             </a:avLst>
           </a:prstGeom>
           <a:solidFill>
@@ -15318,14 +16768,14 @@
       </p:sp>
       <p:sp>
         <p:nvSpPr>
-          <p:cNvPr id="13" name="Text 11"/>
-          <p:cNvSpPr/>
-          <p:nvPr/>
-        </p:nvSpPr>
-        <p:spPr>
-          <a:xfrm>
-            <a:off x="8074152" y="1563624"/>
-            <a:ext cx="2825496" cy="256032"/>
+          <p:cNvPr id="11" name="Text 9"/>
+          <p:cNvSpPr/>
+          <p:nvPr/>
+        </p:nvSpPr>
+        <p:spPr>
+          <a:xfrm>
+            <a:off x="7799832" y="1472184"/>
+            <a:ext cx="3145536" cy="256032"/>
           </a:xfrm>
           <a:prstGeom prst="rect">
             <a:avLst/>
@@ -15349,7 +16799,7 @@
                 <a:ea typeface="Aptos" pitchFamily="34" charset="-122"/>
                 <a:cs typeface="Aptos" pitchFamily="34" charset="-120"/>
               </a:rPr>
-              <a:t>Key idea</a:t>
+              <a:t>Practice focus</a:t>
             </a:r>
             <a:endParaRPr lang="en-US" sz="1300" dirty="0"/>
           </a:p>
@@ -15357,14 +16807,14 @@
       </p:sp>
       <p:sp>
         <p:nvSpPr>
-          <p:cNvPr id="14" name="Text 12"/>
-          <p:cNvSpPr/>
-          <p:nvPr/>
-        </p:nvSpPr>
-        <p:spPr>
-          <a:xfrm>
-            <a:off x="8074152" y="1920240"/>
-            <a:ext cx="2825496" cy="1188720"/>
+          <p:cNvPr id="12" name="Text 10"/>
+          <p:cNvSpPr/>
+          <p:nvPr/>
+        </p:nvSpPr>
+        <p:spPr>
+          <a:xfrm>
+            <a:off x="7799832" y="1828800"/>
+            <a:ext cx="3145536" cy="685800"/>
           </a:xfrm>
           <a:prstGeom prst="rect">
             <a:avLst/>
@@ -15398,18 +16848,159 @@
       </p:sp>
       <p:sp>
         <p:nvSpPr>
-          <p:cNvPr id="15" name="Shape 13"/>
-          <p:cNvSpPr/>
-          <p:nvPr/>
-        </p:nvSpPr>
-        <p:spPr>
-          <a:xfrm>
-            <a:off x="7909560" y="3520440"/>
-            <a:ext cx="3154680" cy="1737360"/>
+          <p:cNvPr id="13" name="Shape 11"/>
+          <p:cNvSpPr/>
+          <p:nvPr/>
+        </p:nvSpPr>
+        <p:spPr>
+          <a:xfrm>
+            <a:off x="7635240" y="2788920"/>
+            <a:ext cx="3474720" cy="1536192"/>
           </a:xfrm>
           <a:prstGeom prst="roundRect">
             <a:avLst>
-              <a:gd name="adj" fmla="val 6316"/>
+              <a:gd name="adj" fmla="val 7143"/>
+            </a:avLst>
+          </a:prstGeom>
+          <a:solidFill>
+            <a:srgbClr val="FFFFFF">
+              <a:alpha val="88000"/>
+            </a:srgbClr>
+          </a:solidFill>
+          <a:ln w="12700">
+            <a:solidFill>
+              <a:srgbClr val="D6E8F2"/>
+            </a:solidFill>
+            <a:prstDash val="solid"/>
+          </a:ln>
+        </p:spPr>
+      </p:sp>
+      <p:sp>
+        <p:nvSpPr>
+          <p:cNvPr id="14" name="Shape 12"/>
+          <p:cNvSpPr/>
+          <p:nvPr/>
+        </p:nvSpPr>
+        <p:spPr>
+          <a:xfrm>
+            <a:off x="8074152" y="3291840"/>
+            <a:ext cx="2596896" cy="749808"/>
+          </a:xfrm>
+          <a:prstGeom prst="rect">
+            <a:avLst/>
+          </a:prstGeom>
+          <a:solidFill>
+            <a:srgbClr val="EAF6F8"/>
+          </a:solidFill>
+          <a:ln w="12700">
+            <a:solidFill>
+              <a:srgbClr val="8ABBD8"/>
+            </a:solidFill>
+            <a:prstDash val="solid"/>
+          </a:ln>
+        </p:spPr>
+      </p:sp>
+      <p:sp>
+        <p:nvSpPr>
+          <p:cNvPr id="15" name="Shape 13"/>
+          <p:cNvSpPr/>
+          <p:nvPr/>
+        </p:nvSpPr>
+        <p:spPr>
+          <a:xfrm>
+            <a:off x="8202168" y="3721608"/>
+            <a:ext cx="2340864" cy="0"/>
+          </a:xfrm>
+          <a:prstGeom prst="line">
+            <a:avLst/>
+          </a:prstGeom>
+          <a:noFill/>
+          <a:ln w="19050">
+            <a:solidFill>
+              <a:srgbClr val="0068B7"/>
+            </a:solidFill>
+            <a:prstDash val="solid"/>
+          </a:ln>
+        </p:spPr>
+      </p:sp>
+      <p:sp>
+        <p:nvSpPr>
+          <p:cNvPr id="16" name="Shape 14"/>
+          <p:cNvSpPr/>
+          <p:nvPr/>
+        </p:nvSpPr>
+        <p:spPr>
+          <a:xfrm>
+            <a:off x="9198864" y="4206240"/>
+            <a:ext cx="347472" cy="347472"/>
+          </a:xfrm>
+          <a:prstGeom prst="ellipse">
+            <a:avLst/>
+          </a:prstGeom>
+          <a:solidFill>
+            <a:srgbClr val="2F8A28"/>
+          </a:solidFill>
+          <a:ln w="12700">
+            <a:solidFill>
+              <a:srgbClr val="2F8A28"/>
+            </a:solidFill>
+            <a:prstDash val="solid"/>
+          </a:ln>
+        </p:spPr>
+      </p:sp>
+      <p:sp>
+        <p:nvSpPr>
+          <p:cNvPr id="17" name="Text 15"/>
+          <p:cNvSpPr/>
+          <p:nvPr/>
+        </p:nvSpPr>
+        <p:spPr>
+          <a:xfrm>
+            <a:off x="7909560" y="3977640"/>
+            <a:ext cx="2926080" cy="182880"/>
+          </a:xfrm>
+          <a:prstGeom prst="rect">
+            <a:avLst/>
+          </a:prstGeom>
+          <a:noFill/>
+          <a:ln/>
+        </p:spPr>
+        <p:txBody>
+          <a:bodyPr wrap="square" lIns="0" tIns="0" rIns="0" bIns="0" rtlCol="0" anchor="ctr"/>
+          <a:lstStyle/>
+          <a:p>
+            <a:pPr algn="ctr" indent="0" marL="0">
+              <a:buNone/>
+            </a:pPr>
+            <a:r>
+              <a:rPr lang="en-US" sz="1000" dirty="0">
+                <a:solidFill>
+                  <a:srgbClr val="003A63"/>
+                </a:solidFill>
+                <a:latin typeface="Aptos" pitchFamily="34" charset="0"/>
+                <a:ea typeface="Aptos" pitchFamily="34" charset="-122"/>
+                <a:cs typeface="Aptos" pitchFamily="34" charset="-120"/>
+              </a:rPr>
+              <a:t>Concept to action</a:t>
+            </a:r>
+            <a:endParaRPr lang="en-US" sz="1000" dirty="0"/>
+          </a:p>
+        </p:txBody>
+      </p:sp>
+      <p:sp>
+        <p:nvSpPr>
+          <p:cNvPr id="18" name="Shape 16"/>
+          <p:cNvSpPr/>
+          <p:nvPr/>
+        </p:nvSpPr>
+        <p:spPr>
+          <a:xfrm>
+            <a:off x="7635240" y="4498848"/>
+            <a:ext cx="3474720" cy="1143000"/>
+          </a:xfrm>
+          <a:prstGeom prst="roundRect">
+            <a:avLst>
+              <a:gd name="adj" fmla="val 9600"/>
             </a:avLst>
           </a:prstGeom>
           <a:solidFill>
@@ -15425,14 +17016,14 @@
       </p:sp>
       <p:sp>
         <p:nvSpPr>
-          <p:cNvPr id="16" name="Text 14"/>
-          <p:cNvSpPr/>
-          <p:nvPr/>
-        </p:nvSpPr>
-        <p:spPr>
-          <a:xfrm>
-            <a:off x="8074152" y="3666744"/>
-            <a:ext cx="2825496" cy="256032"/>
+          <p:cNvPr id="19" name="Text 17"/>
+          <p:cNvSpPr/>
+          <p:nvPr/>
+        </p:nvSpPr>
+        <p:spPr>
+          <a:xfrm>
+            <a:off x="7799832" y="4645152"/>
+            <a:ext cx="3145536" cy="256032"/>
           </a:xfrm>
           <a:prstGeom prst="rect">
             <a:avLst/>
@@ -15456,7 +17047,7 @@
                 <a:ea typeface="Aptos" pitchFamily="34" charset="-122"/>
                 <a:cs typeface="Aptos" pitchFamily="34" charset="-120"/>
               </a:rPr>
-              <a:t>Use this for</a:t>
+              <a:t>What to produce</a:t>
             </a:r>
             <a:endParaRPr lang="en-US" sz="1300" dirty="0"/>
           </a:p>
@@ -15464,14 +17055,14 @@
       </p:sp>
       <p:sp>
         <p:nvSpPr>
-          <p:cNvPr id="17" name="Text 15"/>
-          <p:cNvSpPr/>
-          <p:nvPr/>
-        </p:nvSpPr>
-        <p:spPr>
-          <a:xfrm>
-            <a:off x="8074152" y="4023360"/>
-            <a:ext cx="2825496" cy="1097280"/>
+          <p:cNvPr id="20" name="Text 18"/>
+          <p:cNvSpPr/>
+          <p:nvPr/>
+        </p:nvSpPr>
+        <p:spPr>
+          <a:xfrm>
+            <a:off x="7799832" y="5001768"/>
+            <a:ext cx="3145536" cy="502920"/>
           </a:xfrm>
           <a:prstGeom prst="rect">
             <a:avLst/>
@@ -15497,7 +17088,7 @@
                 <a:ea typeface="Aptos" pitchFamily="34" charset="-122"/>
                 <a:cs typeface="Aptos" pitchFamily="34" charset="-120"/>
               </a:rPr>
-              <a:t>Connect the concept to public health decisions, safeguards, documentation, or implementation work.</a:t>
+              <a:t>Use the assignment to test whether you can explain the concept, apply it to a realistic public health situation, and identify what would need review before the work moves forward.</a:t>
             </a:r>
             <a:endParaRPr lang="en-US" sz="1550" dirty="0"/>
           </a:p>
@@ -15671,8 +17262,8 @@
         </p:nvSpPr>
         <p:spPr>
           <a:xfrm>
-            <a:off x="9966960" y="6537960"/>
-            <a:ext cx="1645920" cy="201168"/>
+            <a:off x="9646920" y="6537960"/>
+            <a:ext cx="1965960" cy="201168"/>
           </a:xfrm>
           <a:prstGeom prst="rect">
             <a:avLst/>
@@ -15696,7 +17287,7 @@
                 <a:ea typeface="Aptos" pitchFamily="34" charset="-122"/>
                 <a:cs typeface="Aptos" pitchFamily="34" charset="-120"/>
               </a:rPr>
-              <a:t>Â© Paula Soper</a:t>
+              <a:t>Copyright Paula Soper</a:t>
             </a:r>
             <a:endParaRPr lang="en-US" sz="800" dirty="0"/>
           </a:p>
@@ -15743,77 +17334,13 @@
       </p:sp>
       <p:sp>
         <p:nvSpPr>
-          <p:cNvPr id="8" name="Shape 6"/>
+          <p:cNvPr id="8" name="Text 6"/>
           <p:cNvSpPr/>
           <p:nvPr/>
         </p:nvSpPr>
         <p:spPr>
           <a:xfrm>
             <a:off x="640080" y="658368"/>
-            <a:ext cx="420624" cy="420624"/>
-          </a:xfrm>
-          <a:prstGeom prst="ellipse">
-            <a:avLst/>
-          </a:prstGeom>
-          <a:solidFill>
-            <a:srgbClr val="0068B7"/>
-          </a:solidFill>
-          <a:ln w="12700">
-            <a:solidFill>
-              <a:srgbClr val="0068B7"/>
-            </a:solidFill>
-            <a:prstDash val="solid"/>
-          </a:ln>
-        </p:spPr>
-      </p:sp>
-      <p:sp>
-        <p:nvSpPr>
-          <p:cNvPr id="9" name="Text 7"/>
-          <p:cNvSpPr/>
-          <p:nvPr/>
-        </p:nvSpPr>
-        <p:spPr>
-          <a:xfrm>
-            <a:off x="640080" y="731520"/>
-            <a:ext cx="420624" cy="164592"/>
-          </a:xfrm>
-          <a:prstGeom prst="rect">
-            <a:avLst/>
-          </a:prstGeom>
-          <a:noFill/>
-          <a:ln/>
-        </p:spPr>
-        <p:txBody>
-          <a:bodyPr wrap="square" lIns="0" tIns="0" rIns="0" bIns="0" rtlCol="0" anchor="ctr"/>
-          <a:lstStyle/>
-          <a:p>
-            <a:pPr algn="ctr" indent="0" marL="0">
-              <a:buNone/>
-            </a:pPr>
-            <a:r>
-              <a:rPr lang="en-US" sz="1100" b="1" dirty="0">
-                <a:solidFill>
-                  <a:srgbClr val="FFFFFF"/>
-                </a:solidFill>
-                <a:latin typeface="Aptos" pitchFamily="34" charset="0"/>
-                <a:ea typeface="Aptos" pitchFamily="34" charset="-122"/>
-                <a:cs typeface="Aptos" pitchFamily="34" charset="-120"/>
-              </a:rPr>
-              <a:t>4</a:t>
-            </a:r>
-            <a:endParaRPr lang="en-US" sz="1100" dirty="0"/>
-          </a:p>
-        </p:txBody>
-      </p:sp>
-      <p:sp>
-        <p:nvSpPr>
-          <p:cNvPr id="10" name="Text 8"/>
-          <p:cNvSpPr/>
-          <p:nvPr/>
-        </p:nvSpPr>
-        <p:spPr>
-          <a:xfrm>
-            <a:off x="640080" y="621792"/>
             <a:ext cx="10881360" cy="713232"/>
           </a:xfrm>
           <a:prstGeom prst="rect">
@@ -15848,14 +17375,14 @@
       </p:sp>
       <p:sp>
         <p:nvSpPr>
-          <p:cNvPr id="11" name="Text 9"/>
+          <p:cNvPr id="9" name="Text 7"/>
           <p:cNvSpPr/>
           <p:nvPr/>
         </p:nvSpPr>
         <p:spPr>
           <a:xfrm>
             <a:off x="868680" y="1508760"/>
-            <a:ext cx="6537960" cy="4160520"/>
+            <a:ext cx="6309360" cy="4160520"/>
           </a:xfrm>
           <a:prstGeom prst="rect">
             <a:avLst/>
@@ -15914,18 +17441,18 @@
       </p:sp>
       <p:sp>
         <p:nvSpPr>
-          <p:cNvPr id="12" name="Shape 10"/>
-          <p:cNvSpPr/>
-          <p:nvPr/>
-        </p:nvSpPr>
-        <p:spPr>
-          <a:xfrm>
-            <a:off x="7909560" y="1417320"/>
-            <a:ext cx="3154680" cy="1828800"/>
+          <p:cNvPr id="10" name="Shape 8"/>
+          <p:cNvSpPr/>
+          <p:nvPr/>
+        </p:nvSpPr>
+        <p:spPr>
+          <a:xfrm>
+            <a:off x="7635240" y="1325880"/>
+            <a:ext cx="3474720" cy="1325880"/>
           </a:xfrm>
           <a:prstGeom prst="roundRect">
             <a:avLst>
-              <a:gd name="adj" fmla="val 6000"/>
+              <a:gd name="adj" fmla="val 8276"/>
             </a:avLst>
           </a:prstGeom>
           <a:solidFill>
@@ -15941,14 +17468,14 @@
       </p:sp>
       <p:sp>
         <p:nvSpPr>
-          <p:cNvPr id="13" name="Text 11"/>
-          <p:cNvSpPr/>
-          <p:nvPr/>
-        </p:nvSpPr>
-        <p:spPr>
-          <a:xfrm>
-            <a:off x="8074152" y="1563624"/>
-            <a:ext cx="2825496" cy="256032"/>
+          <p:cNvPr id="11" name="Text 9"/>
+          <p:cNvSpPr/>
+          <p:nvPr/>
+        </p:nvSpPr>
+        <p:spPr>
+          <a:xfrm>
+            <a:off x="7799832" y="1472184"/>
+            <a:ext cx="3145536" cy="256032"/>
           </a:xfrm>
           <a:prstGeom prst="rect">
             <a:avLst/>
@@ -15972,7 +17499,7 @@
                 <a:ea typeface="Aptos" pitchFamily="34" charset="-122"/>
                 <a:cs typeface="Aptos" pitchFamily="34" charset="-120"/>
               </a:rPr>
-              <a:t>Key idea</a:t>
+              <a:t>Practice focus</a:t>
             </a:r>
             <a:endParaRPr lang="en-US" sz="1300" dirty="0"/>
           </a:p>
@@ -15980,14 +17507,14 @@
       </p:sp>
       <p:sp>
         <p:nvSpPr>
-          <p:cNvPr id="14" name="Text 12"/>
-          <p:cNvSpPr/>
-          <p:nvPr/>
-        </p:nvSpPr>
-        <p:spPr>
-          <a:xfrm>
-            <a:off x="8074152" y="1920240"/>
-            <a:ext cx="2825496" cy="1188720"/>
+          <p:cNvPr id="12" name="Text 10"/>
+          <p:cNvSpPr/>
+          <p:nvPr/>
+        </p:nvSpPr>
+        <p:spPr>
+          <a:xfrm>
+            <a:off x="7799832" y="1828800"/>
+            <a:ext cx="3145536" cy="685800"/>
           </a:xfrm>
           <a:prstGeom prst="rect">
             <a:avLst/>
@@ -16021,18 +17548,159 @@
       </p:sp>
       <p:sp>
         <p:nvSpPr>
-          <p:cNvPr id="15" name="Shape 13"/>
-          <p:cNvSpPr/>
-          <p:nvPr/>
-        </p:nvSpPr>
-        <p:spPr>
-          <a:xfrm>
-            <a:off x="7909560" y="3520440"/>
-            <a:ext cx="3154680" cy="1737360"/>
+          <p:cNvPr id="13" name="Shape 11"/>
+          <p:cNvSpPr/>
+          <p:nvPr/>
+        </p:nvSpPr>
+        <p:spPr>
+          <a:xfrm>
+            <a:off x="7635240" y="2788920"/>
+            <a:ext cx="3474720" cy="1536192"/>
           </a:xfrm>
           <a:prstGeom prst="roundRect">
             <a:avLst>
-              <a:gd name="adj" fmla="val 6316"/>
+              <a:gd name="adj" fmla="val 7143"/>
+            </a:avLst>
+          </a:prstGeom>
+          <a:solidFill>
+            <a:srgbClr val="FFFFFF">
+              <a:alpha val="88000"/>
+            </a:srgbClr>
+          </a:solidFill>
+          <a:ln w="12700">
+            <a:solidFill>
+              <a:srgbClr val="D6E8F2"/>
+            </a:solidFill>
+            <a:prstDash val="solid"/>
+          </a:ln>
+        </p:spPr>
+      </p:sp>
+      <p:sp>
+        <p:nvSpPr>
+          <p:cNvPr id="14" name="Shape 12"/>
+          <p:cNvSpPr/>
+          <p:nvPr/>
+        </p:nvSpPr>
+        <p:spPr>
+          <a:xfrm>
+            <a:off x="8074152" y="3291840"/>
+            <a:ext cx="2596896" cy="749808"/>
+          </a:xfrm>
+          <a:prstGeom prst="rect">
+            <a:avLst/>
+          </a:prstGeom>
+          <a:solidFill>
+            <a:srgbClr val="EAF6F8"/>
+          </a:solidFill>
+          <a:ln w="12700">
+            <a:solidFill>
+              <a:srgbClr val="8ABBD8"/>
+            </a:solidFill>
+            <a:prstDash val="solid"/>
+          </a:ln>
+        </p:spPr>
+      </p:sp>
+      <p:sp>
+        <p:nvSpPr>
+          <p:cNvPr id="15" name="Shape 13"/>
+          <p:cNvSpPr/>
+          <p:nvPr/>
+        </p:nvSpPr>
+        <p:spPr>
+          <a:xfrm>
+            <a:off x="8202168" y="3721608"/>
+            <a:ext cx="2340864" cy="0"/>
+          </a:xfrm>
+          <a:prstGeom prst="line">
+            <a:avLst/>
+          </a:prstGeom>
+          <a:noFill/>
+          <a:ln w="19050">
+            <a:solidFill>
+              <a:srgbClr val="0068B7"/>
+            </a:solidFill>
+            <a:prstDash val="solid"/>
+          </a:ln>
+        </p:spPr>
+      </p:sp>
+      <p:sp>
+        <p:nvSpPr>
+          <p:cNvPr id="16" name="Shape 14"/>
+          <p:cNvSpPr/>
+          <p:nvPr/>
+        </p:nvSpPr>
+        <p:spPr>
+          <a:xfrm>
+            <a:off x="9198864" y="4206240"/>
+            <a:ext cx="347472" cy="347472"/>
+          </a:xfrm>
+          <a:prstGeom prst="ellipse">
+            <a:avLst/>
+          </a:prstGeom>
+          <a:solidFill>
+            <a:srgbClr val="2F8A28"/>
+          </a:solidFill>
+          <a:ln w="12700">
+            <a:solidFill>
+              <a:srgbClr val="2F8A28"/>
+            </a:solidFill>
+            <a:prstDash val="solid"/>
+          </a:ln>
+        </p:spPr>
+      </p:sp>
+      <p:sp>
+        <p:nvSpPr>
+          <p:cNvPr id="17" name="Text 15"/>
+          <p:cNvSpPr/>
+          <p:nvPr/>
+        </p:nvSpPr>
+        <p:spPr>
+          <a:xfrm>
+            <a:off x="7909560" y="3977640"/>
+            <a:ext cx="2926080" cy="182880"/>
+          </a:xfrm>
+          <a:prstGeom prst="rect">
+            <a:avLst/>
+          </a:prstGeom>
+          <a:noFill/>
+          <a:ln/>
+        </p:spPr>
+        <p:txBody>
+          <a:bodyPr wrap="square" lIns="0" tIns="0" rIns="0" bIns="0" rtlCol="0" anchor="ctr"/>
+          <a:lstStyle/>
+          <a:p>
+            <a:pPr algn="ctr" indent="0" marL="0">
+              <a:buNone/>
+            </a:pPr>
+            <a:r>
+              <a:rPr lang="en-US" sz="1000" dirty="0">
+                <a:solidFill>
+                  <a:srgbClr val="003A63"/>
+                </a:solidFill>
+                <a:latin typeface="Aptos" pitchFamily="34" charset="0"/>
+                <a:ea typeface="Aptos" pitchFamily="34" charset="-122"/>
+                <a:cs typeface="Aptos" pitchFamily="34" charset="-120"/>
+              </a:rPr>
+              <a:t>Concept to action</a:t>
+            </a:r>
+            <a:endParaRPr lang="en-US" sz="1000" dirty="0"/>
+          </a:p>
+        </p:txBody>
+      </p:sp>
+      <p:sp>
+        <p:nvSpPr>
+          <p:cNvPr id="18" name="Shape 16"/>
+          <p:cNvSpPr/>
+          <p:nvPr/>
+        </p:nvSpPr>
+        <p:spPr>
+          <a:xfrm>
+            <a:off x="7635240" y="4498848"/>
+            <a:ext cx="3474720" cy="1143000"/>
+          </a:xfrm>
+          <a:prstGeom prst="roundRect">
+            <a:avLst>
+              <a:gd name="adj" fmla="val 9600"/>
             </a:avLst>
           </a:prstGeom>
           <a:solidFill>
@@ -16048,14 +17716,14 @@
       </p:sp>
       <p:sp>
         <p:nvSpPr>
-          <p:cNvPr id="16" name="Text 14"/>
-          <p:cNvSpPr/>
-          <p:nvPr/>
-        </p:nvSpPr>
-        <p:spPr>
-          <a:xfrm>
-            <a:off x="8074152" y="3666744"/>
-            <a:ext cx="2825496" cy="256032"/>
+          <p:cNvPr id="19" name="Text 17"/>
+          <p:cNvSpPr/>
+          <p:nvPr/>
+        </p:nvSpPr>
+        <p:spPr>
+          <a:xfrm>
+            <a:off x="7799832" y="4645152"/>
+            <a:ext cx="3145536" cy="256032"/>
           </a:xfrm>
           <a:prstGeom prst="rect">
             <a:avLst/>
@@ -16079,7 +17747,7 @@
                 <a:ea typeface="Aptos" pitchFamily="34" charset="-122"/>
                 <a:cs typeface="Aptos" pitchFamily="34" charset="-120"/>
               </a:rPr>
-              <a:t>Use this for</a:t>
+              <a:t>What to produce</a:t>
             </a:r>
             <a:endParaRPr lang="en-US" sz="1300" dirty="0"/>
           </a:p>
@@ -16087,14 +17755,14 @@
       </p:sp>
       <p:sp>
         <p:nvSpPr>
-          <p:cNvPr id="17" name="Text 15"/>
-          <p:cNvSpPr/>
-          <p:nvPr/>
-        </p:nvSpPr>
-        <p:spPr>
-          <a:xfrm>
-            <a:off x="8074152" y="4023360"/>
-            <a:ext cx="2825496" cy="1097280"/>
+          <p:cNvPr id="20" name="Text 18"/>
+          <p:cNvSpPr/>
+          <p:nvPr/>
+        </p:nvSpPr>
+        <p:spPr>
+          <a:xfrm>
+            <a:off x="7799832" y="5001768"/>
+            <a:ext cx="3145536" cy="502920"/>
           </a:xfrm>
           <a:prstGeom prst="rect">
             <a:avLst/>
@@ -16120,7 +17788,7 @@
                 <a:ea typeface="Aptos" pitchFamily="34" charset="-122"/>
                 <a:cs typeface="Aptos" pitchFamily="34" charset="-120"/>
               </a:rPr>
-              <a:t>Connect the concept to public health decisions, safeguards, documentation, or implementation work.</a:t>
+              <a:t>Use the assignment to test whether you can explain the concept, apply it to a realistic public health situation, and identify what would need review before the work moves forward.</a:t>
             </a:r>
             <a:endParaRPr lang="en-US" sz="1550" dirty="0"/>
           </a:p>

--- a/downloads/presentations/modules/arc-300.pptx
+++ b/downloads/presentations/modules/arc-300.pptx
@@ -3525,13 +3525,11 @@
             </a:avLst>
           </a:prstGeom>
           <a:solidFill>
-            <a:srgbClr val="FFFFFF">
-              <a:alpha val="88000"/>
-            </a:srgbClr>
+            <a:srgbClr val="FFFFFF"/>
           </a:solidFill>
           <a:ln w="12700">
             <a:solidFill>
-              <a:srgbClr val="D6E8F2"/>
+              <a:srgbClr val="B9D7E6"/>
             </a:solidFill>
             <a:prstDash val="solid"/>
           </a:ln>
@@ -3539,119 +3537,112 @@
       </p:sp>
       <p:sp>
         <p:nvSpPr>
-          <p:cNvPr id="14" name="Shape 12"/>
-          <p:cNvSpPr/>
-          <p:nvPr/>
-        </p:nvSpPr>
-        <p:spPr>
-          <a:xfrm>
-            <a:off x="8074152" y="3291840"/>
-            <a:ext cx="2596896" cy="749808"/>
-          </a:xfrm>
-          <a:prstGeom prst="rect">
-            <a:avLst/>
-          </a:prstGeom>
-          <a:solidFill>
-            <a:srgbClr val="EAF6F8"/>
-          </a:solidFill>
-          <a:ln w="12700">
-            <a:solidFill>
-              <a:srgbClr val="8ABBD8"/>
-            </a:solidFill>
-            <a:prstDash val="solid"/>
-          </a:ln>
-        </p:spPr>
-      </p:sp>
-      <p:sp>
-        <p:nvSpPr>
-          <p:cNvPr id="15" name="Shape 13"/>
-          <p:cNvSpPr/>
-          <p:nvPr/>
-        </p:nvSpPr>
-        <p:spPr>
-          <a:xfrm>
-            <a:off x="8202168" y="3721608"/>
-            <a:ext cx="2340864" cy="0"/>
-          </a:xfrm>
-          <a:prstGeom prst="line">
-            <a:avLst/>
-          </a:prstGeom>
-          <a:noFill/>
-          <a:ln w="19050">
-            <a:solidFill>
-              <a:srgbClr val="0068B7"/>
-            </a:solidFill>
-            <a:prstDash val="solid"/>
-          </a:ln>
-        </p:spPr>
+          <p:cNvPr id="14" name="Text 12"/>
+          <p:cNvSpPr/>
+          <p:nvPr/>
+        </p:nvSpPr>
+        <p:spPr>
+          <a:xfrm>
+            <a:off x="7799832" y="2935224"/>
+            <a:ext cx="3145536" cy="256032"/>
+          </a:xfrm>
+          <a:prstGeom prst="rect">
+            <a:avLst/>
+          </a:prstGeom>
+          <a:noFill/>
+          <a:ln/>
+        </p:spPr>
+        <p:txBody>
+          <a:bodyPr wrap="square" lIns="0" tIns="0" rIns="0" bIns="0" rtlCol="0" anchor="ctr"/>
+          <a:lstStyle/>
+          <a:p>
+            <a:pPr indent="0" marL="0">
+              <a:buNone/>
+            </a:pPr>
+            <a:r>
+              <a:rPr lang="en-US" sz="1300" b="1" dirty="0">
+                <a:solidFill>
+                  <a:srgbClr val="0068B7"/>
+                </a:solidFill>
+                <a:latin typeface="Aptos" pitchFamily="34" charset="0"/>
+                <a:ea typeface="Aptos" pitchFamily="34" charset="-122"/>
+                <a:cs typeface="Aptos" pitchFamily="34" charset="-120"/>
+              </a:rPr>
+              <a:t>Concept checkpoints</a:t>
+            </a:r>
+            <a:endParaRPr lang="en-US" sz="1300" dirty="0"/>
+          </a:p>
+        </p:txBody>
+      </p:sp>
+      <p:sp>
+        <p:nvSpPr>
+          <p:cNvPr id="15" name="Text 13"/>
+          <p:cNvSpPr/>
+          <p:nvPr/>
+        </p:nvSpPr>
+        <p:spPr>
+          <a:xfrm>
+            <a:off x="7818120" y="3300984"/>
+            <a:ext cx="3090672" cy="877824"/>
+          </a:xfrm>
+          <a:prstGeom prst="rect">
+            <a:avLst/>
+          </a:prstGeom>
+          <a:noFill/>
+          <a:ln/>
+        </p:spPr>
+        <p:txBody>
+          <a:bodyPr wrap="square" lIns="254" tIns="254" rIns="254" bIns="254" rtlCol="0" anchor="t">
+            <a:normAutofit/>
+          </a:bodyPr>
+          <a:lstStyle/>
+          <a:p>
+            <a:r>
+              <a:rPr lang="en-US" sz="1380" dirty="0">
+                <a:solidFill>
+                  <a:srgbClr val="17364A"/>
+                </a:solidFill>
+                <a:latin typeface="Aptos" pitchFamily="34" charset="0"/>
+                <a:ea typeface="Aptos" pitchFamily="34" charset="-122"/>
+                <a:cs typeface="Aptos" pitchFamily="34" charset="-120"/>
+              </a:rPr>
+              <a:t>Agencies should decide which documents are authoritative, current, approved for the use.</a:t>
+            </a:r>
+            <a:endParaRPr lang="en-US" sz="1380" dirty="0"/>
+          </a:p>
+          <a:p>
+            <a:r>
+              <a:rPr lang="en-US" sz="1380" dirty="0">
+                <a:solidFill>
+                  <a:srgbClr val="17364A"/>
+                </a:solidFill>
+                <a:latin typeface="Aptos" pitchFamily="34" charset="0"/>
+                <a:ea typeface="Aptos" pitchFamily="34" charset="-122"/>
+                <a:cs typeface="Aptos" pitchFamily="34" charset="-120"/>
+              </a:rPr>
+              <a:t>Content inventories should include owner, version, effective date, review date,.</a:t>
+            </a:r>
+            <a:endParaRPr lang="en-US" sz="1380" dirty="0"/>
+          </a:p>
+          <a:p>
+            <a:r>
+              <a:rPr lang="en-US" sz="1380" dirty="0">
+                <a:solidFill>
+                  <a:srgbClr val="17364A"/>
+                </a:solidFill>
+                <a:latin typeface="Aptos" pitchFamily="34" charset="0"/>
+                <a:ea typeface="Aptos" pitchFamily="34" charset="-122"/>
+                <a:cs typeface="Aptos" pitchFamily="34" charset="-120"/>
+              </a:rPr>
+              <a:t>Without this foundation, retrieval can surface obsolete or unauthorized material.</a:t>
+            </a:r>
+            <a:endParaRPr lang="en-US" sz="1380" dirty="0"/>
+          </a:p>
+        </p:txBody>
       </p:sp>
       <p:sp>
         <p:nvSpPr>
           <p:cNvPr id="16" name="Shape 14"/>
-          <p:cNvSpPr/>
-          <p:nvPr/>
-        </p:nvSpPr>
-        <p:spPr>
-          <a:xfrm>
-            <a:off x="9198864" y="4206240"/>
-            <a:ext cx="347472" cy="347472"/>
-          </a:xfrm>
-          <a:prstGeom prst="ellipse">
-            <a:avLst/>
-          </a:prstGeom>
-          <a:solidFill>
-            <a:srgbClr val="2F8A28"/>
-          </a:solidFill>
-          <a:ln w="12700">
-            <a:solidFill>
-              <a:srgbClr val="2F8A28"/>
-            </a:solidFill>
-            <a:prstDash val="solid"/>
-          </a:ln>
-        </p:spPr>
-      </p:sp>
-      <p:sp>
-        <p:nvSpPr>
-          <p:cNvPr id="17" name="Text 15"/>
-          <p:cNvSpPr/>
-          <p:nvPr/>
-        </p:nvSpPr>
-        <p:spPr>
-          <a:xfrm>
-            <a:off x="7909560" y="3977640"/>
-            <a:ext cx="2926080" cy="182880"/>
-          </a:xfrm>
-          <a:prstGeom prst="rect">
-            <a:avLst/>
-          </a:prstGeom>
-          <a:noFill/>
-          <a:ln/>
-        </p:spPr>
-        <p:txBody>
-          <a:bodyPr wrap="square" lIns="0" tIns="0" rIns="0" bIns="0" rtlCol="0" anchor="ctr"/>
-          <a:lstStyle/>
-          <a:p>
-            <a:pPr algn="ctr" indent="0" marL="0">
-              <a:buNone/>
-            </a:pPr>
-            <a:r>
-              <a:rPr lang="en-US" sz="1000" dirty="0">
-                <a:solidFill>
-                  <a:srgbClr val="003A63"/>
-                </a:solidFill>
-                <a:latin typeface="Aptos" pitchFamily="34" charset="0"/>
-                <a:ea typeface="Aptos" pitchFamily="34" charset="-122"/>
-                <a:cs typeface="Aptos" pitchFamily="34" charset="-120"/>
-              </a:rPr>
-              <a:t>Concept to action</a:t>
-            </a:r>
-            <a:endParaRPr lang="en-US" sz="1000" dirty="0"/>
-          </a:p>
-        </p:txBody>
-      </p:sp>
-      <p:sp>
-        <p:nvSpPr>
-          <p:cNvPr id="18" name="Shape 16"/>
           <p:cNvSpPr/>
           <p:nvPr/>
         </p:nvSpPr>
@@ -3678,7 +3669,7 @@
       </p:sp>
       <p:sp>
         <p:nvSpPr>
-          <p:cNvPr id="19" name="Text 17"/>
+          <p:cNvPr id="17" name="Text 15"/>
           <p:cNvSpPr/>
           <p:nvPr/>
         </p:nvSpPr>
@@ -3717,7 +3708,7 @@
       </p:sp>
       <p:sp>
         <p:nvSpPr>
-          <p:cNvPr id="20" name="Text 18"/>
+          <p:cNvPr id="18" name="Text 16"/>
           <p:cNvSpPr/>
           <p:nvPr/>
         </p:nvSpPr>
@@ -4225,13 +4216,11 @@
             </a:avLst>
           </a:prstGeom>
           <a:solidFill>
-            <a:srgbClr val="FFFFFF">
-              <a:alpha val="88000"/>
-            </a:srgbClr>
+            <a:srgbClr val="FFFFFF"/>
           </a:solidFill>
           <a:ln w="12700">
             <a:solidFill>
-              <a:srgbClr val="D6E8F2"/>
+              <a:srgbClr val="B9D7E6"/>
             </a:solidFill>
             <a:prstDash val="solid"/>
           </a:ln>
@@ -4239,119 +4228,112 @@
       </p:sp>
       <p:sp>
         <p:nvSpPr>
-          <p:cNvPr id="14" name="Shape 12"/>
-          <p:cNvSpPr/>
-          <p:nvPr/>
-        </p:nvSpPr>
-        <p:spPr>
-          <a:xfrm>
-            <a:off x="8074152" y="3291840"/>
-            <a:ext cx="2596896" cy="749808"/>
-          </a:xfrm>
-          <a:prstGeom prst="rect">
-            <a:avLst/>
-          </a:prstGeom>
-          <a:solidFill>
-            <a:srgbClr val="EAF6F8"/>
-          </a:solidFill>
-          <a:ln w="12700">
-            <a:solidFill>
-              <a:srgbClr val="8ABBD8"/>
-            </a:solidFill>
-            <a:prstDash val="solid"/>
-          </a:ln>
-        </p:spPr>
-      </p:sp>
-      <p:sp>
-        <p:nvSpPr>
-          <p:cNvPr id="15" name="Shape 13"/>
-          <p:cNvSpPr/>
-          <p:nvPr/>
-        </p:nvSpPr>
-        <p:spPr>
-          <a:xfrm>
-            <a:off x="8202168" y="3721608"/>
-            <a:ext cx="2340864" cy="0"/>
-          </a:xfrm>
-          <a:prstGeom prst="line">
-            <a:avLst/>
-          </a:prstGeom>
-          <a:noFill/>
-          <a:ln w="19050">
-            <a:solidFill>
-              <a:srgbClr val="0068B7"/>
-            </a:solidFill>
-            <a:prstDash val="solid"/>
-          </a:ln>
-        </p:spPr>
+          <p:cNvPr id="14" name="Text 12"/>
+          <p:cNvSpPr/>
+          <p:nvPr/>
+        </p:nvSpPr>
+        <p:spPr>
+          <a:xfrm>
+            <a:off x="7799832" y="2935224"/>
+            <a:ext cx="3145536" cy="256032"/>
+          </a:xfrm>
+          <a:prstGeom prst="rect">
+            <a:avLst/>
+          </a:prstGeom>
+          <a:noFill/>
+          <a:ln/>
+        </p:spPr>
+        <p:txBody>
+          <a:bodyPr wrap="square" lIns="0" tIns="0" rIns="0" bIns="0" rtlCol="0" anchor="ctr"/>
+          <a:lstStyle/>
+          <a:p>
+            <a:pPr indent="0" marL="0">
+              <a:buNone/>
+            </a:pPr>
+            <a:r>
+              <a:rPr lang="en-US" sz="1300" b="1" dirty="0">
+                <a:solidFill>
+                  <a:srgbClr val="0068B7"/>
+                </a:solidFill>
+                <a:latin typeface="Aptos" pitchFamily="34" charset="0"/>
+                <a:ea typeface="Aptos" pitchFamily="34" charset="-122"/>
+                <a:cs typeface="Aptos" pitchFamily="34" charset="-120"/>
+              </a:rPr>
+              <a:t>Concept checkpoints</a:t>
+            </a:r>
+            <a:endParaRPr lang="en-US" sz="1300" dirty="0"/>
+          </a:p>
+        </p:txBody>
+      </p:sp>
+      <p:sp>
+        <p:nvSpPr>
+          <p:cNvPr id="15" name="Text 13"/>
+          <p:cNvSpPr/>
+          <p:nvPr/>
+        </p:nvSpPr>
+        <p:spPr>
+          <a:xfrm>
+            <a:off x="7818120" y="3300984"/>
+            <a:ext cx="3090672" cy="877824"/>
+          </a:xfrm>
+          <a:prstGeom prst="rect">
+            <a:avLst/>
+          </a:prstGeom>
+          <a:noFill/>
+          <a:ln/>
+        </p:spPr>
+        <p:txBody>
+          <a:bodyPr wrap="square" lIns="254" tIns="254" rIns="254" bIns="254" rtlCol="0" anchor="t">
+            <a:normAutofit/>
+          </a:bodyPr>
+          <a:lstStyle/>
+          <a:p>
+            <a:r>
+              <a:rPr lang="en-US" sz="1380" dirty="0">
+                <a:solidFill>
+                  <a:srgbClr val="17364A"/>
+                </a:solidFill>
+                <a:latin typeface="Aptos" pitchFamily="34" charset="0"/>
+                <a:ea typeface="Aptos" pitchFamily="34" charset="-122"/>
+                <a:cs typeface="Aptos" pitchFamily="34" charset="-120"/>
+              </a:rPr>
+              <a:t>The system should be instructed to answer from sources, cite them, identify uncertainty,.</a:t>
+            </a:r>
+            <a:endParaRPr lang="en-US" sz="1380" dirty="0"/>
+          </a:p>
+          <a:p>
+            <a:r>
+              <a:rPr lang="en-US" sz="1380" dirty="0">
+                <a:solidFill>
+                  <a:srgbClr val="17364A"/>
+                </a:solidFill>
+                <a:latin typeface="Aptos" pitchFamily="34" charset="0"/>
+                <a:ea typeface="Aptos" pitchFamily="34" charset="-122"/>
+                <a:cs typeface="Aptos" pitchFamily="34" charset="-120"/>
+              </a:rPr>
+              <a:t>Users should be able to open the cited source and verify key statements.</a:t>
+            </a:r>
+            <a:endParaRPr lang="en-US" sz="1380" dirty="0"/>
+          </a:p>
+          <a:p>
+            <a:r>
+              <a:rPr lang="en-US" sz="1380" dirty="0">
+                <a:solidFill>
+                  <a:srgbClr val="17364A"/>
+                </a:solidFill>
+                <a:latin typeface="Aptos" pitchFamily="34" charset="0"/>
+                <a:ea typeface="Aptos" pitchFamily="34" charset="-122"/>
+                <a:cs typeface="Aptos" pitchFamily="34" charset="-120"/>
+              </a:rPr>
+              <a:t>Monitoring should include retrieval failures, unsupported answers, stale content, user.</a:t>
+            </a:r>
+            <a:endParaRPr lang="en-US" sz="1380" dirty="0"/>
+          </a:p>
+        </p:txBody>
       </p:sp>
       <p:sp>
         <p:nvSpPr>
           <p:cNvPr id="16" name="Shape 14"/>
-          <p:cNvSpPr/>
-          <p:nvPr/>
-        </p:nvSpPr>
-        <p:spPr>
-          <a:xfrm>
-            <a:off x="9198864" y="4206240"/>
-            <a:ext cx="347472" cy="347472"/>
-          </a:xfrm>
-          <a:prstGeom prst="ellipse">
-            <a:avLst/>
-          </a:prstGeom>
-          <a:solidFill>
-            <a:srgbClr val="2F8A28"/>
-          </a:solidFill>
-          <a:ln w="12700">
-            <a:solidFill>
-              <a:srgbClr val="2F8A28"/>
-            </a:solidFill>
-            <a:prstDash val="solid"/>
-          </a:ln>
-        </p:spPr>
-      </p:sp>
-      <p:sp>
-        <p:nvSpPr>
-          <p:cNvPr id="17" name="Text 15"/>
-          <p:cNvSpPr/>
-          <p:nvPr/>
-        </p:nvSpPr>
-        <p:spPr>
-          <a:xfrm>
-            <a:off x="7909560" y="3977640"/>
-            <a:ext cx="2926080" cy="182880"/>
-          </a:xfrm>
-          <a:prstGeom prst="rect">
-            <a:avLst/>
-          </a:prstGeom>
-          <a:noFill/>
-          <a:ln/>
-        </p:spPr>
-        <p:txBody>
-          <a:bodyPr wrap="square" lIns="0" tIns="0" rIns="0" bIns="0" rtlCol="0" anchor="ctr"/>
-          <a:lstStyle/>
-          <a:p>
-            <a:pPr algn="ctr" indent="0" marL="0">
-              <a:buNone/>
-            </a:pPr>
-            <a:r>
-              <a:rPr lang="en-US" sz="1000" dirty="0">
-                <a:solidFill>
-                  <a:srgbClr val="003A63"/>
-                </a:solidFill>
-                <a:latin typeface="Aptos" pitchFamily="34" charset="0"/>
-                <a:ea typeface="Aptos" pitchFamily="34" charset="-122"/>
-                <a:cs typeface="Aptos" pitchFamily="34" charset="-120"/>
-              </a:rPr>
-              <a:t>Concept to action</a:t>
-            </a:r>
-            <a:endParaRPr lang="en-US" sz="1000" dirty="0"/>
-          </a:p>
-        </p:txBody>
-      </p:sp>
-      <p:sp>
-        <p:nvSpPr>
-          <p:cNvPr id="18" name="Shape 16"/>
           <p:cNvSpPr/>
           <p:nvPr/>
         </p:nvSpPr>
@@ -4378,7 +4360,7 @@
       </p:sp>
       <p:sp>
         <p:nvSpPr>
-          <p:cNvPr id="19" name="Text 17"/>
+          <p:cNvPr id="17" name="Text 15"/>
           <p:cNvSpPr/>
           <p:nvPr/>
         </p:nvSpPr>
@@ -4417,7 +4399,7 @@
       </p:sp>
       <p:sp>
         <p:nvSpPr>
-          <p:cNvPr id="20" name="Text 18"/>
+          <p:cNvPr id="18" name="Text 16"/>
           <p:cNvSpPr/>
           <p:nvPr/>
         </p:nvSpPr>
@@ -4925,13 +4907,11 @@
             </a:avLst>
           </a:prstGeom>
           <a:solidFill>
-            <a:srgbClr val="FFFFFF">
-              <a:alpha val="88000"/>
-            </a:srgbClr>
+            <a:srgbClr val="FFFFFF"/>
           </a:solidFill>
           <a:ln w="12700">
             <a:solidFill>
-              <a:srgbClr val="D6E8F2"/>
+              <a:srgbClr val="B9D7E6"/>
             </a:solidFill>
             <a:prstDash val="solid"/>
           </a:ln>
@@ -4939,26 +4919,42 @@
       </p:sp>
       <p:sp>
         <p:nvSpPr>
-          <p:cNvPr id="14" name="Shape 12"/>
-          <p:cNvSpPr/>
-          <p:nvPr/>
-        </p:nvSpPr>
-        <p:spPr>
-          <a:xfrm>
-            <a:off x="8046720" y="3108960"/>
-            <a:ext cx="2651760" cy="896112"/>
-          </a:xfrm>
-          <a:prstGeom prst="arc">
-            <a:avLst/>
-          </a:prstGeom>
-          <a:noFill/>
-          <a:ln w="25400">
-            <a:solidFill>
-              <a:srgbClr val="0068B7"/>
-            </a:solidFill>
-            <a:prstDash val="solid"/>
-          </a:ln>
-        </p:spPr>
+          <p:cNvPr id="14" name="Text 12"/>
+          <p:cNvSpPr/>
+          <p:nvPr/>
+        </p:nvSpPr>
+        <p:spPr>
+          <a:xfrm>
+            <a:off x="7799832" y="2935224"/>
+            <a:ext cx="3145536" cy="256032"/>
+          </a:xfrm>
+          <a:prstGeom prst="rect">
+            <a:avLst/>
+          </a:prstGeom>
+          <a:noFill/>
+          <a:ln/>
+        </p:spPr>
+        <p:txBody>
+          <a:bodyPr wrap="square" lIns="0" tIns="0" rIns="0" bIns="0" rtlCol="0" anchor="ctr"/>
+          <a:lstStyle/>
+          <a:p>
+            <a:pPr indent="0" marL="0">
+              <a:buNone/>
+            </a:pPr>
+            <a:r>
+              <a:rPr lang="en-US" sz="1300" b="1" dirty="0">
+                <a:solidFill>
+                  <a:srgbClr val="0068B7"/>
+                </a:solidFill>
+                <a:latin typeface="Aptos" pitchFamily="34" charset="0"/>
+                <a:ea typeface="Aptos" pitchFamily="34" charset="-122"/>
+                <a:cs typeface="Aptos" pitchFamily="34" charset="-120"/>
+              </a:rPr>
+              <a:t>Concept checkpoints</a:t>
+            </a:r>
+            <a:endParaRPr lang="en-US" sz="1300" dirty="0"/>
+          </a:p>
+        </p:txBody>
       </p:sp>
       <p:sp>
         <p:nvSpPr>
@@ -4968,102 +4964,67 @@
         </p:nvSpPr>
         <p:spPr>
           <a:xfrm>
-            <a:off x="7909560" y="3099816"/>
-            <a:ext cx="2926080" cy="256032"/>
-          </a:xfrm>
-          <a:prstGeom prst="rect">
-            <a:avLst/>
-          </a:prstGeom>
-          <a:noFill/>
-          <a:ln/>
-        </p:spPr>
-        <p:txBody>
-          <a:bodyPr wrap="square" lIns="0" tIns="0" rIns="0" bIns="0" rtlCol="0" anchor="ctr"/>
-          <a:lstStyle/>
-          <a:p>
-            <a:pPr algn="ctr" indent="0" marL="0">
-              <a:buNone/>
-            </a:pPr>
-            <a:r>
-              <a:rPr lang="en-US" sz="1500" b="1" dirty="0">
-                <a:solidFill>
-                  <a:srgbClr val="003A63"/>
-                </a:solidFill>
-                <a:latin typeface="Aptos" pitchFamily="34" charset="0"/>
-                <a:ea typeface="Aptos" pitchFamily="34" charset="-122"/>
-                <a:cs typeface="Aptos" pitchFamily="34" charset="-120"/>
-              </a:rPr>
-              <a:t>Risk</a:t>
-            </a:r>
-            <a:endParaRPr lang="en-US" sz="1500" dirty="0"/>
+            <a:off x="7818120" y="3300984"/>
+            <a:ext cx="3090672" cy="877824"/>
+          </a:xfrm>
+          <a:prstGeom prst="rect">
+            <a:avLst/>
+          </a:prstGeom>
+          <a:noFill/>
+          <a:ln/>
+        </p:spPr>
+        <p:txBody>
+          <a:bodyPr wrap="square" lIns="254" tIns="254" rIns="254" bIns="254" rtlCol="0" anchor="t">
+            <a:normAutofit/>
+          </a:bodyPr>
+          <a:lstStyle/>
+          <a:p>
+            <a:r>
+              <a:rPr lang="en-US" sz="1380" dirty="0">
+                <a:solidFill>
+                  <a:srgbClr val="17364A"/>
+                </a:solidFill>
+                <a:latin typeface="Aptos" pitchFamily="34" charset="0"/>
+                <a:ea typeface="Aptos" pitchFamily="34" charset="-122"/>
+                <a:cs typeface="Aptos" pitchFamily="34" charset="-120"/>
+              </a:rPr>
+              <a:t>Permission leakage.</a:t>
+            </a:r>
+            <a:endParaRPr lang="en-US" sz="1380" dirty="0"/>
+          </a:p>
+          <a:p>
+            <a:r>
+              <a:rPr lang="en-US" sz="1380" dirty="0">
+                <a:solidFill>
+                  <a:srgbClr val="17364A"/>
+                </a:solidFill>
+                <a:latin typeface="Aptos" pitchFamily="34" charset="0"/>
+                <a:ea typeface="Aptos" pitchFamily="34" charset="-122"/>
+                <a:cs typeface="Aptos" pitchFamily="34" charset="-120"/>
+              </a:rPr>
+              <a:t>RAG may retrieve content a user should not see.</a:t>
+            </a:r>
+            <a:endParaRPr lang="en-US" sz="1380" dirty="0"/>
+          </a:p>
+          <a:p>
+            <a:r>
+              <a:rPr lang="en-US" sz="1380" dirty="0">
+                <a:solidFill>
+                  <a:srgbClr val="17364A"/>
+                </a:solidFill>
+                <a:latin typeface="Aptos" pitchFamily="34" charset="0"/>
+                <a:ea typeface="Aptos" pitchFamily="34" charset="-122"/>
+                <a:cs typeface="Aptos" pitchFamily="34" charset="-120"/>
+              </a:rPr>
+              <a:t>Guardrails include role-based access, document-level permissions, and audit logs.</a:t>
+            </a:r>
+            <a:endParaRPr lang="en-US" sz="1380" dirty="0"/>
           </a:p>
         </p:txBody>
       </p:sp>
       <p:sp>
         <p:nvSpPr>
           <p:cNvPr id="16" name="Shape 14"/>
-          <p:cNvSpPr/>
-          <p:nvPr/>
-        </p:nvSpPr>
-        <p:spPr>
-          <a:xfrm>
-            <a:off x="8366760" y="3639312"/>
-            <a:ext cx="2011680" cy="0"/>
-          </a:xfrm>
-          <a:prstGeom prst="line">
-            <a:avLst/>
-          </a:prstGeom>
-          <a:noFill/>
-          <a:ln w="63500">
-            <a:solidFill>
-              <a:srgbClr val="2F8A28"/>
-            </a:solidFill>
-            <a:prstDash val="solid"/>
-          </a:ln>
-        </p:spPr>
-      </p:sp>
-      <p:sp>
-        <p:nvSpPr>
-          <p:cNvPr id="17" name="Text 15"/>
-          <p:cNvSpPr/>
-          <p:nvPr/>
-        </p:nvSpPr>
-        <p:spPr>
-          <a:xfrm>
-            <a:off x="7909560" y="3849624"/>
-            <a:ext cx="2926080" cy="164592"/>
-          </a:xfrm>
-          <a:prstGeom prst="rect">
-            <a:avLst/>
-          </a:prstGeom>
-          <a:noFill/>
-          <a:ln/>
-        </p:spPr>
-        <p:txBody>
-          <a:bodyPr wrap="square" lIns="0" tIns="0" rIns="0" bIns="0" rtlCol="0" anchor="ctr"/>
-          <a:lstStyle/>
-          <a:p>
-            <a:pPr algn="ctr" indent="0" marL="0">
-              <a:buNone/>
-            </a:pPr>
-            <a:r>
-              <a:rPr lang="en-US" sz="900" dirty="0">
-                <a:solidFill>
-                  <a:srgbClr val="003A63"/>
-                </a:solidFill>
-                <a:latin typeface="Aptos" pitchFamily="34" charset="0"/>
-                <a:ea typeface="Aptos" pitchFamily="34" charset="-122"/>
-                <a:cs typeface="Aptos" pitchFamily="34" charset="-120"/>
-              </a:rPr>
-              <a:t>Human review</a:t>
-            </a:r>
-            <a:endParaRPr lang="en-US" sz="900" dirty="0"/>
-          </a:p>
-        </p:txBody>
-      </p:sp>
-      <p:sp>
-        <p:nvSpPr>
-          <p:cNvPr id="18" name="Shape 16"/>
           <p:cNvSpPr/>
           <p:nvPr/>
         </p:nvSpPr>
@@ -5090,7 +5051,7 @@
       </p:sp>
       <p:sp>
         <p:nvSpPr>
-          <p:cNvPr id="19" name="Text 17"/>
+          <p:cNvPr id="17" name="Text 15"/>
           <p:cNvSpPr/>
           <p:nvPr/>
         </p:nvSpPr>
@@ -5129,7 +5090,7 @@
       </p:sp>
       <p:sp>
         <p:nvSpPr>
-          <p:cNvPr id="20" name="Text 18"/>
+          <p:cNvPr id="18" name="Text 16"/>
           <p:cNvSpPr/>
           <p:nvPr/>
         </p:nvSpPr>
@@ -5637,13 +5598,11 @@
             </a:avLst>
           </a:prstGeom>
           <a:solidFill>
-            <a:srgbClr val="FFFFFF">
-              <a:alpha val="88000"/>
-            </a:srgbClr>
+            <a:srgbClr val="FFFFFF"/>
           </a:solidFill>
           <a:ln w="12700">
             <a:solidFill>
-              <a:srgbClr val="D6E8F2"/>
+              <a:srgbClr val="B9D7E6"/>
             </a:solidFill>
             <a:prstDash val="solid"/>
           </a:ln>
@@ -5651,26 +5610,42 @@
       </p:sp>
       <p:sp>
         <p:nvSpPr>
-          <p:cNvPr id="14" name="Shape 12"/>
-          <p:cNvSpPr/>
-          <p:nvPr/>
-        </p:nvSpPr>
-        <p:spPr>
-          <a:xfrm>
-            <a:off x="8046720" y="3108960"/>
-            <a:ext cx="2651760" cy="896112"/>
-          </a:xfrm>
-          <a:prstGeom prst="arc">
-            <a:avLst/>
-          </a:prstGeom>
-          <a:noFill/>
-          <a:ln w="25400">
-            <a:solidFill>
-              <a:srgbClr val="0068B7"/>
-            </a:solidFill>
-            <a:prstDash val="solid"/>
-          </a:ln>
-        </p:spPr>
+          <p:cNvPr id="14" name="Text 12"/>
+          <p:cNvSpPr/>
+          <p:nvPr/>
+        </p:nvSpPr>
+        <p:spPr>
+          <a:xfrm>
+            <a:off x="7799832" y="2935224"/>
+            <a:ext cx="3145536" cy="256032"/>
+          </a:xfrm>
+          <a:prstGeom prst="rect">
+            <a:avLst/>
+          </a:prstGeom>
+          <a:noFill/>
+          <a:ln/>
+        </p:spPr>
+        <p:txBody>
+          <a:bodyPr wrap="square" lIns="0" tIns="0" rIns="0" bIns="0" rtlCol="0" anchor="ctr"/>
+          <a:lstStyle/>
+          <a:p>
+            <a:pPr indent="0" marL="0">
+              <a:buNone/>
+            </a:pPr>
+            <a:r>
+              <a:rPr lang="en-US" sz="1300" b="1" dirty="0">
+                <a:solidFill>
+                  <a:srgbClr val="0068B7"/>
+                </a:solidFill>
+                <a:latin typeface="Aptos" pitchFamily="34" charset="0"/>
+                <a:ea typeface="Aptos" pitchFamily="34" charset="-122"/>
+                <a:cs typeface="Aptos" pitchFamily="34" charset="-120"/>
+              </a:rPr>
+              <a:t>Concept checkpoints</a:t>
+            </a:r>
+            <a:endParaRPr lang="en-US" sz="1300" dirty="0"/>
+          </a:p>
+        </p:txBody>
       </p:sp>
       <p:sp>
         <p:nvSpPr>
@@ -5680,102 +5655,67 @@
         </p:nvSpPr>
         <p:spPr>
           <a:xfrm>
-            <a:off x="7909560" y="3099816"/>
-            <a:ext cx="2926080" cy="256032"/>
-          </a:xfrm>
-          <a:prstGeom prst="rect">
-            <a:avLst/>
-          </a:prstGeom>
-          <a:noFill/>
-          <a:ln/>
-        </p:spPr>
-        <p:txBody>
-          <a:bodyPr wrap="square" lIns="0" tIns="0" rIns="0" bIns="0" rtlCol="0" anchor="ctr"/>
-          <a:lstStyle/>
-          <a:p>
-            <a:pPr algn="ctr" indent="0" marL="0">
-              <a:buNone/>
-            </a:pPr>
-            <a:r>
-              <a:rPr lang="en-US" sz="1500" b="1" dirty="0">
-                <a:solidFill>
-                  <a:srgbClr val="003A63"/>
-                </a:solidFill>
-                <a:latin typeface="Aptos" pitchFamily="34" charset="0"/>
-                <a:ea typeface="Aptos" pitchFamily="34" charset="-122"/>
-                <a:cs typeface="Aptos" pitchFamily="34" charset="-120"/>
-              </a:rPr>
-              <a:t>Risk</a:t>
-            </a:r>
-            <a:endParaRPr lang="en-US" sz="1500" dirty="0"/>
+            <a:off x="7818120" y="3300984"/>
+            <a:ext cx="3090672" cy="877824"/>
+          </a:xfrm>
+          <a:prstGeom prst="rect">
+            <a:avLst/>
+          </a:prstGeom>
+          <a:noFill/>
+          <a:ln/>
+        </p:spPr>
+        <p:txBody>
+          <a:bodyPr wrap="square" lIns="254" tIns="254" rIns="254" bIns="254" rtlCol="0" anchor="t">
+            <a:normAutofit/>
+          </a:bodyPr>
+          <a:lstStyle/>
+          <a:p>
+            <a:r>
+              <a:rPr lang="en-US" sz="1380" dirty="0">
+                <a:solidFill>
+                  <a:srgbClr val="17364A"/>
+                </a:solidFill>
+                <a:latin typeface="Aptos" pitchFamily="34" charset="0"/>
+                <a:ea typeface="Aptos" pitchFamily="34" charset="-122"/>
+                <a:cs typeface="Aptos" pitchFamily="34" charset="-120"/>
+              </a:rPr>
+              <a:t>Unsupported generation.</a:t>
+            </a:r>
+            <a:endParaRPr lang="en-US" sz="1380" dirty="0"/>
+          </a:p>
+          <a:p>
+            <a:r>
+              <a:rPr lang="en-US" sz="1380" dirty="0">
+                <a:solidFill>
+                  <a:srgbClr val="17364A"/>
+                </a:solidFill>
+                <a:latin typeface="Aptos" pitchFamily="34" charset="0"/>
+                <a:ea typeface="Aptos" pitchFamily="34" charset="-122"/>
+                <a:cs typeface="Aptos" pitchFamily="34" charset="-120"/>
+              </a:rPr>
+              <a:t>The model may add claims beyond retrieved sources.</a:t>
+            </a:r>
+            <a:endParaRPr lang="en-US" sz="1380" dirty="0"/>
+          </a:p>
+          <a:p>
+            <a:r>
+              <a:rPr lang="en-US" sz="1380" dirty="0">
+                <a:solidFill>
+                  <a:srgbClr val="17364A"/>
+                </a:solidFill>
+                <a:latin typeface="Aptos" pitchFamily="34" charset="0"/>
+                <a:ea typeface="Aptos" pitchFamily="34" charset="-122"/>
+                <a:cs typeface="Aptos" pitchFamily="34" charset="-120"/>
+              </a:rPr>
+              <a:t>Guardrails include source-only instructions, citation requirements, and reviewer.</a:t>
+            </a:r>
+            <a:endParaRPr lang="en-US" sz="1380" dirty="0"/>
           </a:p>
         </p:txBody>
       </p:sp>
       <p:sp>
         <p:nvSpPr>
           <p:cNvPr id="16" name="Shape 14"/>
-          <p:cNvSpPr/>
-          <p:nvPr/>
-        </p:nvSpPr>
-        <p:spPr>
-          <a:xfrm>
-            <a:off x="8366760" y="3639312"/>
-            <a:ext cx="2011680" cy="0"/>
-          </a:xfrm>
-          <a:prstGeom prst="line">
-            <a:avLst/>
-          </a:prstGeom>
-          <a:noFill/>
-          <a:ln w="63500">
-            <a:solidFill>
-              <a:srgbClr val="2F8A28"/>
-            </a:solidFill>
-            <a:prstDash val="solid"/>
-          </a:ln>
-        </p:spPr>
-      </p:sp>
-      <p:sp>
-        <p:nvSpPr>
-          <p:cNvPr id="17" name="Text 15"/>
-          <p:cNvSpPr/>
-          <p:nvPr/>
-        </p:nvSpPr>
-        <p:spPr>
-          <a:xfrm>
-            <a:off x="7909560" y="3849624"/>
-            <a:ext cx="2926080" cy="164592"/>
-          </a:xfrm>
-          <a:prstGeom prst="rect">
-            <a:avLst/>
-          </a:prstGeom>
-          <a:noFill/>
-          <a:ln/>
-        </p:spPr>
-        <p:txBody>
-          <a:bodyPr wrap="square" lIns="0" tIns="0" rIns="0" bIns="0" rtlCol="0" anchor="ctr"/>
-          <a:lstStyle/>
-          <a:p>
-            <a:pPr algn="ctr" indent="0" marL="0">
-              <a:buNone/>
-            </a:pPr>
-            <a:r>
-              <a:rPr lang="en-US" sz="900" dirty="0">
-                <a:solidFill>
-                  <a:srgbClr val="003A63"/>
-                </a:solidFill>
-                <a:latin typeface="Aptos" pitchFamily="34" charset="0"/>
-                <a:ea typeface="Aptos" pitchFamily="34" charset="-122"/>
-                <a:cs typeface="Aptos" pitchFamily="34" charset="-120"/>
-              </a:rPr>
-              <a:t>Human review</a:t>
-            </a:r>
-            <a:endParaRPr lang="en-US" sz="900" dirty="0"/>
-          </a:p>
-        </p:txBody>
-      </p:sp>
-      <p:sp>
-        <p:nvSpPr>
-          <p:cNvPr id="18" name="Shape 16"/>
           <p:cNvSpPr/>
           <p:nvPr/>
         </p:nvSpPr>
@@ -5802,7 +5742,7 @@
       </p:sp>
       <p:sp>
         <p:nvSpPr>
-          <p:cNvPr id="19" name="Text 17"/>
+          <p:cNvPr id="17" name="Text 15"/>
           <p:cNvSpPr/>
           <p:nvPr/>
         </p:nvSpPr>
@@ -5841,7 +5781,7 @@
       </p:sp>
       <p:sp>
         <p:nvSpPr>
-          <p:cNvPr id="20" name="Text 18"/>
+          <p:cNvPr id="18" name="Text 16"/>
           <p:cNvSpPr/>
           <p:nvPr/>
         </p:nvSpPr>
@@ -6349,13 +6289,11 @@
             </a:avLst>
           </a:prstGeom>
           <a:solidFill>
-            <a:srgbClr val="FFFFFF">
-              <a:alpha val="88000"/>
-            </a:srgbClr>
+            <a:srgbClr val="FFFFFF"/>
           </a:solidFill>
           <a:ln w="12700">
             <a:solidFill>
-              <a:srgbClr val="D6E8F2"/>
+              <a:srgbClr val="B9D7E6"/>
             </a:solidFill>
             <a:prstDash val="solid"/>
           </a:ln>
@@ -6363,30 +6301,42 @@
       </p:sp>
       <p:sp>
         <p:nvSpPr>
-          <p:cNvPr id="14" name="Shape 12"/>
-          <p:cNvSpPr/>
-          <p:nvPr/>
-        </p:nvSpPr>
-        <p:spPr>
-          <a:xfrm>
-            <a:off x="7927848" y="3319272"/>
-            <a:ext cx="792480" cy="749808"/>
-          </a:xfrm>
-          <a:prstGeom prst="roundRect">
-            <a:avLst>
-              <a:gd name="adj" fmla="val 14634"/>
-            </a:avLst>
-          </a:prstGeom>
-          <a:solidFill>
-            <a:srgbClr val="0068B7"/>
-          </a:solidFill>
-          <a:ln w="12700">
-            <a:solidFill>
-              <a:srgbClr val="0068B7"/>
-            </a:solidFill>
-            <a:prstDash val="solid"/>
-          </a:ln>
-        </p:spPr>
+          <p:cNvPr id="14" name="Text 12"/>
+          <p:cNvSpPr/>
+          <p:nvPr/>
+        </p:nvSpPr>
+        <p:spPr>
+          <a:xfrm>
+            <a:off x="7799832" y="2935224"/>
+            <a:ext cx="3145536" cy="256032"/>
+          </a:xfrm>
+          <a:prstGeom prst="rect">
+            <a:avLst/>
+          </a:prstGeom>
+          <a:noFill/>
+          <a:ln/>
+        </p:spPr>
+        <p:txBody>
+          <a:bodyPr wrap="square" lIns="0" tIns="0" rIns="0" bIns="0" rtlCol="0" anchor="ctr"/>
+          <a:lstStyle/>
+          <a:p>
+            <a:pPr indent="0" marL="0">
+              <a:buNone/>
+            </a:pPr>
+            <a:r>
+              <a:rPr lang="en-US" sz="1300" b="1" dirty="0">
+                <a:solidFill>
+                  <a:srgbClr val="0068B7"/>
+                </a:solidFill>
+                <a:latin typeface="Aptos" pitchFamily="34" charset="0"/>
+                <a:ea typeface="Aptos" pitchFamily="34" charset="-122"/>
+                <a:cs typeface="Aptos" pitchFamily="34" charset="-120"/>
+              </a:rPr>
+              <a:t>Concept checkpoints</a:t>
+            </a:r>
+            <a:endParaRPr lang="en-US" sz="1300" dirty="0"/>
+          </a:p>
+        </p:txBody>
       </p:sp>
       <p:sp>
         <p:nvSpPr>
@@ -6396,240 +6346,67 @@
         </p:nvSpPr>
         <p:spPr>
           <a:xfrm>
-            <a:off x="8001000" y="3511296"/>
-            <a:ext cx="646176" cy="310896"/>
-          </a:xfrm>
-          <a:prstGeom prst="rect">
-            <a:avLst/>
-          </a:prstGeom>
-          <a:noFill/>
-          <a:ln/>
-        </p:spPr>
-        <p:txBody>
-          <a:bodyPr wrap="square" lIns="0" tIns="0" rIns="0" bIns="0" rtlCol="0" anchor="ctr">
+            <a:off x="7818120" y="3300984"/>
+            <a:ext cx="3090672" cy="877824"/>
+          </a:xfrm>
+          <a:prstGeom prst="rect">
+            <a:avLst/>
+          </a:prstGeom>
+          <a:noFill/>
+          <a:ln/>
+        </p:spPr>
+        <p:txBody>
+          <a:bodyPr wrap="square" lIns="254" tIns="254" rIns="254" bIns="254" rtlCol="0" anchor="t">
             <a:normAutofit/>
           </a:bodyPr>
           <a:lstStyle/>
           <a:p>
-            <a:pPr algn="ctr" indent="0" marL="0">
-              <a:buNone/>
-            </a:pPr>
-            <a:r>
-              <a:rPr lang="en-US" sz="1500" b="1" dirty="0">
-                <a:solidFill>
-                  <a:srgbClr val="FFFFFF"/>
-                </a:solidFill>
-                <a:latin typeface="Aptos" pitchFamily="34" charset="0"/>
-                <a:ea typeface="Aptos" pitchFamily="34" charset="-122"/>
-                <a:cs typeface="Aptos" pitchFamily="34" charset="-120"/>
-              </a:rPr>
-              <a:t>Plan</a:t>
-            </a:r>
-            <a:endParaRPr lang="en-US" sz="1500" dirty="0"/>
+            <a:r>
+              <a:rPr lang="en-US" sz="1380" dirty="0">
+                <a:solidFill>
+                  <a:srgbClr val="17364A"/>
+                </a:solidFill>
+                <a:latin typeface="Aptos" pitchFamily="34" charset="0"/>
+                <a:ea typeface="Aptos" pitchFamily="34" charset="-122"/>
+                <a:cs typeface="Aptos" pitchFamily="34" charset="-120"/>
+              </a:rPr>
+              <a:t>It may be used in chat assistants, training tools, policy support, emergency operations,.</a:t>
+            </a:r>
+            <a:endParaRPr lang="en-US" sz="1380" dirty="0"/>
+          </a:p>
+          <a:p>
+            <a:r>
+              <a:rPr lang="en-US" sz="1380" dirty="0">
+                <a:solidFill>
+                  <a:srgbClr val="17364A"/>
+                </a:solidFill>
+                <a:latin typeface="Aptos" pitchFamily="34" charset="0"/>
+                <a:ea typeface="Aptos" pitchFamily="34" charset="-122"/>
+                <a:cs typeface="Aptos" pitchFamily="34" charset="-120"/>
+              </a:rPr>
+              <a:t>It can also support agentic workflows by giving agents access to approved guidance, but.</a:t>
+            </a:r>
+            <a:endParaRPr lang="en-US" sz="1380" dirty="0"/>
+          </a:p>
+          <a:p>
+            <a:r>
+              <a:rPr lang="en-US" sz="1380" dirty="0">
+                <a:solidFill>
+                  <a:srgbClr val="17364A"/>
+                </a:solidFill>
+                <a:latin typeface="Aptos" pitchFamily="34" charset="0"/>
+                <a:ea typeface="Aptos" pitchFamily="34" charset="-122"/>
+                <a:cs typeface="Aptos" pitchFamily="34" charset="-120"/>
+              </a:rPr>
+              <a:t>Public health RAG systems should be built around trust.</a:t>
+            </a:r>
+            <a:endParaRPr lang="en-US" sz="1380" dirty="0"/>
           </a:p>
         </p:txBody>
       </p:sp>
       <p:sp>
         <p:nvSpPr>
           <p:cNvPr id="16" name="Shape 14"/>
-          <p:cNvSpPr/>
-          <p:nvPr/>
-        </p:nvSpPr>
-        <p:spPr>
-          <a:xfrm>
-            <a:off x="8976360" y="3319272"/>
-            <a:ext cx="792480" cy="749808"/>
-          </a:xfrm>
-          <a:prstGeom prst="roundRect">
-            <a:avLst>
-              <a:gd name="adj" fmla="val 14634"/>
-            </a:avLst>
-          </a:prstGeom>
-          <a:solidFill>
-            <a:srgbClr val="2F8A28"/>
-          </a:solidFill>
-          <a:ln w="12700">
-            <a:solidFill>
-              <a:srgbClr val="2F8A28"/>
-            </a:solidFill>
-            <a:prstDash val="solid"/>
-          </a:ln>
-        </p:spPr>
-      </p:sp>
-      <p:sp>
-        <p:nvSpPr>
-          <p:cNvPr id="17" name="Text 15"/>
-          <p:cNvSpPr/>
-          <p:nvPr/>
-        </p:nvSpPr>
-        <p:spPr>
-          <a:xfrm>
-            <a:off x="9049512" y="3511296"/>
-            <a:ext cx="646176" cy="310896"/>
-          </a:xfrm>
-          <a:prstGeom prst="rect">
-            <a:avLst/>
-          </a:prstGeom>
-          <a:noFill/>
-          <a:ln/>
-        </p:spPr>
-        <p:txBody>
-          <a:bodyPr wrap="square" lIns="0" tIns="0" rIns="0" bIns="0" rtlCol="0" anchor="ctr">
-            <a:normAutofit/>
-          </a:bodyPr>
-          <a:lstStyle/>
-          <a:p>
-            <a:pPr algn="ctr" indent="0" marL="0">
-              <a:buNone/>
-            </a:pPr>
-            <a:r>
-              <a:rPr lang="en-US" sz="1500" b="1" dirty="0">
-                <a:solidFill>
-                  <a:srgbClr val="FFFFFF"/>
-                </a:solidFill>
-                <a:latin typeface="Aptos" pitchFamily="34" charset="0"/>
-                <a:ea typeface="Aptos" pitchFamily="34" charset="-122"/>
-                <a:cs typeface="Aptos" pitchFamily="34" charset="-120"/>
-              </a:rPr>
-              <a:t>Do</a:t>
-            </a:r>
-            <a:endParaRPr lang="en-US" sz="1500" dirty="0"/>
-          </a:p>
-        </p:txBody>
-      </p:sp>
-      <p:sp>
-        <p:nvSpPr>
-          <p:cNvPr id="18" name="Shape 16"/>
-          <p:cNvSpPr/>
-          <p:nvPr/>
-        </p:nvSpPr>
-        <p:spPr>
-          <a:xfrm>
-            <a:off x="10024872" y="3319272"/>
-            <a:ext cx="792480" cy="749808"/>
-          </a:xfrm>
-          <a:prstGeom prst="roundRect">
-            <a:avLst>
-              <a:gd name="adj" fmla="val 14634"/>
-            </a:avLst>
-          </a:prstGeom>
-          <a:solidFill>
-            <a:srgbClr val="D69A2D"/>
-          </a:solidFill>
-          <a:ln w="12700">
-            <a:solidFill>
-              <a:srgbClr val="D69A2D"/>
-            </a:solidFill>
-            <a:prstDash val="solid"/>
-          </a:ln>
-        </p:spPr>
-      </p:sp>
-      <p:sp>
-        <p:nvSpPr>
-          <p:cNvPr id="19" name="Text 17"/>
-          <p:cNvSpPr/>
-          <p:nvPr/>
-        </p:nvSpPr>
-        <p:spPr>
-          <a:xfrm>
-            <a:off x="10098024" y="3511296"/>
-            <a:ext cx="646176" cy="310896"/>
-          </a:xfrm>
-          <a:prstGeom prst="rect">
-            <a:avLst/>
-          </a:prstGeom>
-          <a:noFill/>
-          <a:ln/>
-        </p:spPr>
-        <p:txBody>
-          <a:bodyPr wrap="square" lIns="0" tIns="0" rIns="0" bIns="0" rtlCol="0" anchor="ctr">
-            <a:normAutofit/>
-          </a:bodyPr>
-          <a:lstStyle/>
-          <a:p>
-            <a:pPr algn="ctr" indent="0" marL="0">
-              <a:buNone/>
-            </a:pPr>
-            <a:r>
-              <a:rPr lang="en-US" sz="1500" b="1" dirty="0">
-                <a:solidFill>
-                  <a:srgbClr val="FFFFFF"/>
-                </a:solidFill>
-                <a:latin typeface="Aptos" pitchFamily="34" charset="0"/>
-                <a:ea typeface="Aptos" pitchFamily="34" charset="-122"/>
-                <a:cs typeface="Aptos" pitchFamily="34" charset="-120"/>
-              </a:rPr>
-              <a:t>Review</a:t>
-            </a:r>
-            <a:endParaRPr lang="en-US" sz="1500" dirty="0"/>
-          </a:p>
-        </p:txBody>
-      </p:sp>
-      <p:sp>
-        <p:nvSpPr>
-          <p:cNvPr id="20" name="Shape 18"/>
-          <p:cNvSpPr/>
-          <p:nvPr/>
-        </p:nvSpPr>
-        <p:spPr>
-          <a:xfrm>
-            <a:off x="8293608" y="4389120"/>
-            <a:ext cx="2157984" cy="0"/>
-          </a:xfrm>
-          <a:prstGeom prst="line">
-            <a:avLst/>
-          </a:prstGeom>
-          <a:noFill/>
-          <a:ln w="25400">
-            <a:solidFill>
-              <a:srgbClr val="8ABBD8"/>
-            </a:solidFill>
-            <a:prstDash val="solid"/>
-          </a:ln>
-        </p:spPr>
-      </p:sp>
-      <p:sp>
-        <p:nvSpPr>
-          <p:cNvPr id="21" name="Text 19"/>
-          <p:cNvSpPr/>
-          <p:nvPr/>
-        </p:nvSpPr>
-        <p:spPr>
-          <a:xfrm>
-            <a:off x="7909560" y="3977640"/>
-            <a:ext cx="2926080" cy="182880"/>
-          </a:xfrm>
-          <a:prstGeom prst="rect">
-            <a:avLst/>
-          </a:prstGeom>
-          <a:noFill/>
-          <a:ln/>
-        </p:spPr>
-        <p:txBody>
-          <a:bodyPr wrap="square" lIns="0" tIns="0" rIns="0" bIns="0" rtlCol="0" anchor="ctr"/>
-          <a:lstStyle/>
-          <a:p>
-            <a:pPr algn="ctr" indent="0" marL="0">
-              <a:buNone/>
-            </a:pPr>
-            <a:r>
-              <a:rPr lang="en-US" sz="1000" dirty="0">
-                <a:solidFill>
-                  <a:srgbClr val="003A63"/>
-                </a:solidFill>
-                <a:latin typeface="Aptos" pitchFamily="34" charset="0"/>
-                <a:ea typeface="Aptos" pitchFamily="34" charset="-122"/>
-                <a:cs typeface="Aptos" pitchFamily="34" charset="-120"/>
-              </a:rPr>
-              <a:t>Dependencies visible</a:t>
-            </a:r>
-            <a:endParaRPr lang="en-US" sz="1000" dirty="0"/>
-          </a:p>
-        </p:txBody>
-      </p:sp>
-      <p:sp>
-        <p:nvSpPr>
-          <p:cNvPr id="22" name="Shape 20"/>
           <p:cNvSpPr/>
           <p:nvPr/>
         </p:nvSpPr>
@@ -6656,7 +6433,7 @@
       </p:sp>
       <p:sp>
         <p:nvSpPr>
-          <p:cNvPr id="23" name="Text 21"/>
+          <p:cNvPr id="17" name="Text 15"/>
           <p:cNvSpPr/>
           <p:nvPr/>
         </p:nvSpPr>
@@ -6695,7 +6472,7 @@
       </p:sp>
       <p:sp>
         <p:nvSpPr>
-          <p:cNvPr id="24" name="Text 22"/>
+          <p:cNvPr id="18" name="Text 16"/>
           <p:cNvSpPr/>
           <p:nvPr/>
         </p:nvSpPr>
@@ -7203,13 +6980,11 @@
             </a:avLst>
           </a:prstGeom>
           <a:solidFill>
-            <a:srgbClr val="FFFFFF">
-              <a:alpha val="88000"/>
-            </a:srgbClr>
+            <a:srgbClr val="FFFFFF"/>
           </a:solidFill>
           <a:ln w="12700">
             <a:solidFill>
-              <a:srgbClr val="D6E8F2"/>
+              <a:srgbClr val="B9D7E6"/>
             </a:solidFill>
             <a:prstDash val="solid"/>
           </a:ln>
@@ -7217,119 +6992,112 @@
       </p:sp>
       <p:sp>
         <p:nvSpPr>
-          <p:cNvPr id="14" name="Shape 12"/>
-          <p:cNvSpPr/>
-          <p:nvPr/>
-        </p:nvSpPr>
-        <p:spPr>
-          <a:xfrm>
-            <a:off x="8074152" y="3291840"/>
-            <a:ext cx="2596896" cy="749808"/>
-          </a:xfrm>
-          <a:prstGeom prst="rect">
-            <a:avLst/>
-          </a:prstGeom>
-          <a:solidFill>
-            <a:srgbClr val="EAF6F8"/>
-          </a:solidFill>
-          <a:ln w="12700">
-            <a:solidFill>
-              <a:srgbClr val="8ABBD8"/>
-            </a:solidFill>
-            <a:prstDash val="solid"/>
-          </a:ln>
-        </p:spPr>
-      </p:sp>
-      <p:sp>
-        <p:nvSpPr>
-          <p:cNvPr id="15" name="Shape 13"/>
-          <p:cNvSpPr/>
-          <p:nvPr/>
-        </p:nvSpPr>
-        <p:spPr>
-          <a:xfrm>
-            <a:off x="8202168" y="3721608"/>
-            <a:ext cx="2340864" cy="0"/>
-          </a:xfrm>
-          <a:prstGeom prst="line">
-            <a:avLst/>
-          </a:prstGeom>
-          <a:noFill/>
-          <a:ln w="19050">
-            <a:solidFill>
-              <a:srgbClr val="0068B7"/>
-            </a:solidFill>
-            <a:prstDash val="solid"/>
-          </a:ln>
-        </p:spPr>
+          <p:cNvPr id="14" name="Text 12"/>
+          <p:cNvSpPr/>
+          <p:nvPr/>
+        </p:nvSpPr>
+        <p:spPr>
+          <a:xfrm>
+            <a:off x="7799832" y="2935224"/>
+            <a:ext cx="3145536" cy="256032"/>
+          </a:xfrm>
+          <a:prstGeom prst="rect">
+            <a:avLst/>
+          </a:prstGeom>
+          <a:noFill/>
+          <a:ln/>
+        </p:spPr>
+        <p:txBody>
+          <a:bodyPr wrap="square" lIns="0" tIns="0" rIns="0" bIns="0" rtlCol="0" anchor="ctr"/>
+          <a:lstStyle/>
+          <a:p>
+            <a:pPr indent="0" marL="0">
+              <a:buNone/>
+            </a:pPr>
+            <a:r>
+              <a:rPr lang="en-US" sz="1300" b="1" dirty="0">
+                <a:solidFill>
+                  <a:srgbClr val="0068B7"/>
+                </a:solidFill>
+                <a:latin typeface="Aptos" pitchFamily="34" charset="0"/>
+                <a:ea typeface="Aptos" pitchFamily="34" charset="-122"/>
+                <a:cs typeface="Aptos" pitchFamily="34" charset="-120"/>
+              </a:rPr>
+              <a:t>Concept checkpoints</a:t>
+            </a:r>
+            <a:endParaRPr lang="en-US" sz="1300" dirty="0"/>
+          </a:p>
+        </p:txBody>
+      </p:sp>
+      <p:sp>
+        <p:nvSpPr>
+          <p:cNvPr id="15" name="Text 13"/>
+          <p:cNvSpPr/>
+          <p:nvPr/>
+        </p:nvSpPr>
+        <p:spPr>
+          <a:xfrm>
+            <a:off x="7818120" y="3300984"/>
+            <a:ext cx="3090672" cy="877824"/>
+          </a:xfrm>
+          <a:prstGeom prst="rect">
+            <a:avLst/>
+          </a:prstGeom>
+          <a:noFill/>
+          <a:ln/>
+        </p:spPr>
+        <p:txBody>
+          <a:bodyPr wrap="square" lIns="254" tIns="254" rIns="254" bIns="254" rtlCol="0" anchor="t">
+            <a:normAutofit/>
+          </a:bodyPr>
+          <a:lstStyle/>
+          <a:p>
+            <a:r>
+              <a:rPr lang="en-US" sz="1380" dirty="0">
+                <a:solidFill>
+                  <a:srgbClr val="17364A"/>
+                </a:solidFill>
+                <a:latin typeface="Aptos" pitchFamily="34" charset="0"/>
+                <a:ea typeface="Aptos" pitchFamily="34" charset="-122"/>
+                <a:cs typeface="Aptos" pitchFamily="34" charset="-120"/>
+              </a:rPr>
+              <a:t>What content collection would the RAG system use?</a:t>
+            </a:r>
+            <a:endParaRPr lang="en-US" sz="1380" dirty="0"/>
+          </a:p>
+          <a:p>
+            <a:r>
+              <a:rPr lang="en-US" sz="1380" dirty="0">
+                <a:solidFill>
+                  <a:srgbClr val="17364A"/>
+                </a:solidFill>
+                <a:latin typeface="Aptos" pitchFamily="34" charset="0"/>
+                <a:ea typeface="Aptos" pitchFamily="34" charset="-122"/>
+                <a:cs typeface="Aptos" pitchFamily="34" charset="-120"/>
+              </a:rPr>
+              <a:t>Who owns and updates each source document?</a:t>
+            </a:r>
+            <a:endParaRPr lang="en-US" sz="1380" dirty="0"/>
+          </a:p>
+          <a:p>
+            <a:r>
+              <a:rPr lang="en-US" sz="1380" dirty="0">
+                <a:solidFill>
+                  <a:srgbClr val="17364A"/>
+                </a:solidFill>
+                <a:latin typeface="Aptos" pitchFamily="34" charset="0"/>
+                <a:ea typeface="Aptos" pitchFamily="34" charset="-122"/>
+                <a:cs typeface="Aptos" pitchFamily="34" charset="-120"/>
+              </a:rPr>
+              <a:t>How will access permissions be enforced?</a:t>
+            </a:r>
+            <a:endParaRPr lang="en-US" sz="1380" dirty="0"/>
+          </a:p>
+        </p:txBody>
       </p:sp>
       <p:sp>
         <p:nvSpPr>
           <p:cNvPr id="16" name="Shape 14"/>
-          <p:cNvSpPr/>
-          <p:nvPr/>
-        </p:nvSpPr>
-        <p:spPr>
-          <a:xfrm>
-            <a:off x="9198864" y="4206240"/>
-            <a:ext cx="347472" cy="347472"/>
-          </a:xfrm>
-          <a:prstGeom prst="ellipse">
-            <a:avLst/>
-          </a:prstGeom>
-          <a:solidFill>
-            <a:srgbClr val="2F8A28"/>
-          </a:solidFill>
-          <a:ln w="12700">
-            <a:solidFill>
-              <a:srgbClr val="2F8A28"/>
-            </a:solidFill>
-            <a:prstDash val="solid"/>
-          </a:ln>
-        </p:spPr>
-      </p:sp>
-      <p:sp>
-        <p:nvSpPr>
-          <p:cNvPr id="17" name="Text 15"/>
-          <p:cNvSpPr/>
-          <p:nvPr/>
-        </p:nvSpPr>
-        <p:spPr>
-          <a:xfrm>
-            <a:off x="7909560" y="3977640"/>
-            <a:ext cx="2926080" cy="182880"/>
-          </a:xfrm>
-          <a:prstGeom prst="rect">
-            <a:avLst/>
-          </a:prstGeom>
-          <a:noFill/>
-          <a:ln/>
-        </p:spPr>
-        <p:txBody>
-          <a:bodyPr wrap="square" lIns="0" tIns="0" rIns="0" bIns="0" rtlCol="0" anchor="ctr"/>
-          <a:lstStyle/>
-          <a:p>
-            <a:pPr algn="ctr" indent="0" marL="0">
-              <a:buNone/>
-            </a:pPr>
-            <a:r>
-              <a:rPr lang="en-US" sz="1000" dirty="0">
-                <a:solidFill>
-                  <a:srgbClr val="003A63"/>
-                </a:solidFill>
-                <a:latin typeface="Aptos" pitchFamily="34" charset="0"/>
-                <a:ea typeface="Aptos" pitchFamily="34" charset="-122"/>
-                <a:cs typeface="Aptos" pitchFamily="34" charset="-120"/>
-              </a:rPr>
-              <a:t>Concept to action</a:t>
-            </a:r>
-            <a:endParaRPr lang="en-US" sz="1000" dirty="0"/>
-          </a:p>
-        </p:txBody>
-      </p:sp>
-      <p:sp>
-        <p:nvSpPr>
-          <p:cNvPr id="18" name="Shape 16"/>
           <p:cNvSpPr/>
           <p:nvPr/>
         </p:nvSpPr>
@@ -7356,7 +7124,7 @@
       </p:sp>
       <p:sp>
         <p:nvSpPr>
-          <p:cNvPr id="19" name="Text 17"/>
+          <p:cNvPr id="17" name="Text 15"/>
           <p:cNvSpPr/>
           <p:nvPr/>
         </p:nvSpPr>
@@ -7395,7 +7163,7 @@
       </p:sp>
       <p:sp>
         <p:nvSpPr>
-          <p:cNvPr id="20" name="Text 18"/>
+          <p:cNvPr id="18" name="Text 16"/>
           <p:cNvSpPr/>
           <p:nvPr/>
         </p:nvSpPr>
@@ -7889,13 +7657,11 @@
             </a:avLst>
           </a:prstGeom>
           <a:solidFill>
-            <a:srgbClr val="FFFFFF">
-              <a:alpha val="88000"/>
-            </a:srgbClr>
+            <a:srgbClr val="FFFFFF"/>
           </a:solidFill>
           <a:ln w="12700">
             <a:solidFill>
-              <a:srgbClr val="D6E8F2"/>
+              <a:srgbClr val="B9D7E6"/>
             </a:solidFill>
             <a:prstDash val="solid"/>
           </a:ln>
@@ -7903,119 +7669,98 @@
       </p:sp>
       <p:sp>
         <p:nvSpPr>
-          <p:cNvPr id="14" name="Shape 12"/>
-          <p:cNvSpPr/>
-          <p:nvPr/>
-        </p:nvSpPr>
-        <p:spPr>
-          <a:xfrm>
-            <a:off x="8074152" y="3291840"/>
-            <a:ext cx="2596896" cy="749808"/>
-          </a:xfrm>
-          <a:prstGeom prst="rect">
-            <a:avLst/>
-          </a:prstGeom>
-          <a:solidFill>
-            <a:srgbClr val="EAF6F8"/>
-          </a:solidFill>
-          <a:ln w="12700">
-            <a:solidFill>
-              <a:srgbClr val="8ABBD8"/>
-            </a:solidFill>
-            <a:prstDash val="solid"/>
-          </a:ln>
-        </p:spPr>
-      </p:sp>
-      <p:sp>
-        <p:nvSpPr>
-          <p:cNvPr id="15" name="Shape 13"/>
-          <p:cNvSpPr/>
-          <p:nvPr/>
-        </p:nvSpPr>
-        <p:spPr>
-          <a:xfrm>
-            <a:off x="8202168" y="3721608"/>
-            <a:ext cx="2340864" cy="0"/>
-          </a:xfrm>
-          <a:prstGeom prst="line">
-            <a:avLst/>
-          </a:prstGeom>
-          <a:noFill/>
-          <a:ln w="19050">
-            <a:solidFill>
-              <a:srgbClr val="0068B7"/>
-            </a:solidFill>
-            <a:prstDash val="solid"/>
-          </a:ln>
-        </p:spPr>
+          <p:cNvPr id="14" name="Text 12"/>
+          <p:cNvSpPr/>
+          <p:nvPr/>
+        </p:nvSpPr>
+        <p:spPr>
+          <a:xfrm>
+            <a:off x="7799832" y="2935224"/>
+            <a:ext cx="3145536" cy="256032"/>
+          </a:xfrm>
+          <a:prstGeom prst="rect">
+            <a:avLst/>
+          </a:prstGeom>
+          <a:noFill/>
+          <a:ln/>
+        </p:spPr>
+        <p:txBody>
+          <a:bodyPr wrap="square" lIns="0" tIns="0" rIns="0" bIns="0" rtlCol="0" anchor="ctr"/>
+          <a:lstStyle/>
+          <a:p>
+            <a:pPr indent="0" marL="0">
+              <a:buNone/>
+            </a:pPr>
+            <a:r>
+              <a:rPr lang="en-US" sz="1300" b="1" dirty="0">
+                <a:solidFill>
+                  <a:srgbClr val="0068B7"/>
+                </a:solidFill>
+                <a:latin typeface="Aptos" pitchFamily="34" charset="0"/>
+                <a:ea typeface="Aptos" pitchFamily="34" charset="-122"/>
+                <a:cs typeface="Aptos" pitchFamily="34" charset="-120"/>
+              </a:rPr>
+              <a:t>Concept checkpoints</a:t>
+            </a:r>
+            <a:endParaRPr lang="en-US" sz="1300" dirty="0"/>
+          </a:p>
+        </p:txBody>
+      </p:sp>
+      <p:sp>
+        <p:nvSpPr>
+          <p:cNvPr id="15" name="Text 13"/>
+          <p:cNvSpPr/>
+          <p:nvPr/>
+        </p:nvSpPr>
+        <p:spPr>
+          <a:xfrm>
+            <a:off x="7818120" y="3300984"/>
+            <a:ext cx="3090672" cy="877824"/>
+          </a:xfrm>
+          <a:prstGeom prst="rect">
+            <a:avLst/>
+          </a:prstGeom>
+          <a:noFill/>
+          <a:ln/>
+        </p:spPr>
+        <p:txBody>
+          <a:bodyPr wrap="square" lIns="254" tIns="254" rIns="254" bIns="254" rtlCol="0" anchor="t">
+            <a:normAutofit/>
+          </a:bodyPr>
+          <a:lstStyle/>
+          <a:p>
+            <a:r>
+              <a:rPr lang="en-US" sz="1380" dirty="0">
+                <a:solidFill>
+                  <a:srgbClr val="17364A"/>
+                </a:solidFill>
+                <a:latin typeface="Aptos" pitchFamily="34" charset="0"/>
+                <a:ea typeface="Aptos" pitchFamily="34" charset="-122"/>
+                <a:cs typeface="Aptos" pitchFamily="34" charset="-120"/>
+              </a:rPr>
+              <a:t>How will retrieval quality and citation accuracy be tested?</a:t>
+            </a:r>
+            <a:endParaRPr lang="en-US" sz="1380" dirty="0"/>
+          </a:p>
+          <a:p>
+            <a:r>
+              <a:rPr lang="en-US" sz="1380" dirty="0">
+                <a:solidFill>
+                  <a:srgbClr val="17364A"/>
+                </a:solidFill>
+                <a:latin typeface="Aptos" pitchFamily="34" charset="0"/>
+                <a:ea typeface="Aptos" pitchFamily="34" charset="-122"/>
+                <a:cs typeface="Aptos" pitchFamily="34" charset="-120"/>
+              </a:rPr>
+              <a:t>What should the system do when sources are missing, outdated, or conflicting?</a:t>
+            </a:r>
+            <a:endParaRPr lang="en-US" sz="1380" dirty="0"/>
+          </a:p>
+        </p:txBody>
       </p:sp>
       <p:sp>
         <p:nvSpPr>
           <p:cNvPr id="16" name="Shape 14"/>
-          <p:cNvSpPr/>
-          <p:nvPr/>
-        </p:nvSpPr>
-        <p:spPr>
-          <a:xfrm>
-            <a:off x="9198864" y="4206240"/>
-            <a:ext cx="347472" cy="347472"/>
-          </a:xfrm>
-          <a:prstGeom prst="ellipse">
-            <a:avLst/>
-          </a:prstGeom>
-          <a:solidFill>
-            <a:srgbClr val="2F8A28"/>
-          </a:solidFill>
-          <a:ln w="12700">
-            <a:solidFill>
-              <a:srgbClr val="2F8A28"/>
-            </a:solidFill>
-            <a:prstDash val="solid"/>
-          </a:ln>
-        </p:spPr>
-      </p:sp>
-      <p:sp>
-        <p:nvSpPr>
-          <p:cNvPr id="17" name="Text 15"/>
-          <p:cNvSpPr/>
-          <p:nvPr/>
-        </p:nvSpPr>
-        <p:spPr>
-          <a:xfrm>
-            <a:off x="7909560" y="3977640"/>
-            <a:ext cx="2926080" cy="182880"/>
-          </a:xfrm>
-          <a:prstGeom prst="rect">
-            <a:avLst/>
-          </a:prstGeom>
-          <a:noFill/>
-          <a:ln/>
-        </p:spPr>
-        <p:txBody>
-          <a:bodyPr wrap="square" lIns="0" tIns="0" rIns="0" bIns="0" rtlCol="0" anchor="ctr"/>
-          <a:lstStyle/>
-          <a:p>
-            <a:pPr algn="ctr" indent="0" marL="0">
-              <a:buNone/>
-            </a:pPr>
-            <a:r>
-              <a:rPr lang="en-US" sz="1000" dirty="0">
-                <a:solidFill>
-                  <a:srgbClr val="003A63"/>
-                </a:solidFill>
-                <a:latin typeface="Aptos" pitchFamily="34" charset="0"/>
-                <a:ea typeface="Aptos" pitchFamily="34" charset="-122"/>
-                <a:cs typeface="Aptos" pitchFamily="34" charset="-120"/>
-              </a:rPr>
-              <a:t>Concept to action</a:t>
-            </a:r>
-            <a:endParaRPr lang="en-US" sz="1000" dirty="0"/>
-          </a:p>
-        </p:txBody>
-      </p:sp>
-      <p:sp>
-        <p:nvSpPr>
-          <p:cNvPr id="18" name="Shape 16"/>
           <p:cNvSpPr/>
           <p:nvPr/>
         </p:nvSpPr>
@@ -8042,7 +7787,7 @@
       </p:sp>
       <p:sp>
         <p:nvSpPr>
-          <p:cNvPr id="19" name="Text 17"/>
+          <p:cNvPr id="17" name="Text 15"/>
           <p:cNvSpPr/>
           <p:nvPr/>
         </p:nvSpPr>
@@ -8081,7 +7826,7 @@
       </p:sp>
       <p:sp>
         <p:nvSpPr>
-          <p:cNvPr id="20" name="Text 18"/>
+          <p:cNvPr id="18" name="Text 16"/>
           <p:cNvSpPr/>
           <p:nvPr/>
         </p:nvSpPr>
@@ -8589,13 +8334,11 @@
             </a:avLst>
           </a:prstGeom>
           <a:solidFill>
-            <a:srgbClr val="FFFFFF">
-              <a:alpha val="88000"/>
-            </a:srgbClr>
+            <a:srgbClr val="FFFFFF"/>
           </a:solidFill>
           <a:ln w="12700">
             <a:solidFill>
-              <a:srgbClr val="D6E8F2"/>
+              <a:srgbClr val="B9D7E6"/>
             </a:solidFill>
             <a:prstDash val="solid"/>
           </a:ln>
@@ -8603,119 +8346,98 @@
       </p:sp>
       <p:sp>
         <p:nvSpPr>
-          <p:cNvPr id="14" name="Shape 12"/>
-          <p:cNvSpPr/>
-          <p:nvPr/>
-        </p:nvSpPr>
-        <p:spPr>
-          <a:xfrm>
-            <a:off x="8074152" y="3291840"/>
-            <a:ext cx="2596896" cy="749808"/>
-          </a:xfrm>
-          <a:prstGeom prst="rect">
-            <a:avLst/>
-          </a:prstGeom>
-          <a:solidFill>
-            <a:srgbClr val="EAF6F8"/>
-          </a:solidFill>
-          <a:ln w="12700">
-            <a:solidFill>
-              <a:srgbClr val="8ABBD8"/>
-            </a:solidFill>
-            <a:prstDash val="solid"/>
-          </a:ln>
-        </p:spPr>
-      </p:sp>
-      <p:sp>
-        <p:nvSpPr>
-          <p:cNvPr id="15" name="Shape 13"/>
-          <p:cNvSpPr/>
-          <p:nvPr/>
-        </p:nvSpPr>
-        <p:spPr>
-          <a:xfrm>
-            <a:off x="8202168" y="3721608"/>
-            <a:ext cx="2340864" cy="0"/>
-          </a:xfrm>
-          <a:prstGeom prst="line">
-            <a:avLst/>
-          </a:prstGeom>
-          <a:noFill/>
-          <a:ln w="19050">
-            <a:solidFill>
-              <a:srgbClr val="0068B7"/>
-            </a:solidFill>
-            <a:prstDash val="solid"/>
-          </a:ln>
-        </p:spPr>
+          <p:cNvPr id="14" name="Text 12"/>
+          <p:cNvSpPr/>
+          <p:nvPr/>
+        </p:nvSpPr>
+        <p:spPr>
+          <a:xfrm>
+            <a:off x="7799832" y="2935224"/>
+            <a:ext cx="3145536" cy="256032"/>
+          </a:xfrm>
+          <a:prstGeom prst="rect">
+            <a:avLst/>
+          </a:prstGeom>
+          <a:noFill/>
+          <a:ln/>
+        </p:spPr>
+        <p:txBody>
+          <a:bodyPr wrap="square" lIns="0" tIns="0" rIns="0" bIns="0" rtlCol="0" anchor="ctr"/>
+          <a:lstStyle/>
+          <a:p>
+            <a:pPr indent="0" marL="0">
+              <a:buNone/>
+            </a:pPr>
+            <a:r>
+              <a:rPr lang="en-US" sz="1300" b="1" dirty="0">
+                <a:solidFill>
+                  <a:srgbClr val="0068B7"/>
+                </a:solidFill>
+                <a:latin typeface="Aptos" pitchFamily="34" charset="0"/>
+                <a:ea typeface="Aptos" pitchFamily="34" charset="-122"/>
+                <a:cs typeface="Aptos" pitchFamily="34" charset="-120"/>
+              </a:rPr>
+              <a:t>Concept checkpoints</a:t>
+            </a:r>
+            <a:endParaRPr lang="en-US" sz="1300" dirty="0"/>
+          </a:p>
+        </p:txBody>
+      </p:sp>
+      <p:sp>
+        <p:nvSpPr>
+          <p:cNvPr id="15" name="Text 13"/>
+          <p:cNvSpPr/>
+          <p:nvPr/>
+        </p:nvSpPr>
+        <p:spPr>
+          <a:xfrm>
+            <a:off x="7818120" y="3300984"/>
+            <a:ext cx="3090672" cy="877824"/>
+          </a:xfrm>
+          <a:prstGeom prst="rect">
+            <a:avLst/>
+          </a:prstGeom>
+          <a:noFill/>
+          <a:ln/>
+        </p:spPr>
+        <p:txBody>
+          <a:bodyPr wrap="square" lIns="254" tIns="254" rIns="254" bIns="254" rtlCol="0" anchor="t">
+            <a:normAutofit/>
+          </a:bodyPr>
+          <a:lstStyle/>
+          <a:p>
+            <a:r>
+              <a:rPr lang="en-US" sz="1380" dirty="0">
+                <a:solidFill>
+                  <a:srgbClr val="17364A"/>
+                </a:solidFill>
+                <a:latin typeface="Aptos" pitchFamily="34" charset="0"/>
+                <a:ea typeface="Aptos" pitchFamily="34" charset="-122"/>
+                <a:cs typeface="Aptos" pitchFamily="34" charset="-120"/>
+              </a:rPr>
+              <a:t>Include content inventory, source authority, document owners, update schedule, sensitivity.</a:t>
+            </a:r>
+            <a:endParaRPr lang="en-US" sz="1380" dirty="0"/>
+          </a:p>
+          <a:p>
+            <a:r>
+              <a:rPr lang="en-US" sz="1380" dirty="0">
+                <a:solidFill>
+                  <a:srgbClr val="17364A"/>
+                </a:solidFill>
+                <a:latin typeface="Aptos" pitchFamily="34" charset="0"/>
+                <a:ea typeface="Aptos" pitchFamily="34" charset="-122"/>
+                <a:cs typeface="Aptos" pitchFamily="34" charset="-120"/>
+              </a:rPr>
+              <a:t>The checklist should identify at least three “do not answer” or escalation situations,.</a:t>
+            </a:r>
+            <a:endParaRPr lang="en-US" sz="1380" dirty="0"/>
+          </a:p>
+        </p:txBody>
       </p:sp>
       <p:sp>
         <p:nvSpPr>
           <p:cNvPr id="16" name="Shape 14"/>
-          <p:cNvSpPr/>
-          <p:nvPr/>
-        </p:nvSpPr>
-        <p:spPr>
-          <a:xfrm>
-            <a:off x="9198864" y="4206240"/>
-            <a:ext cx="347472" cy="347472"/>
-          </a:xfrm>
-          <a:prstGeom prst="ellipse">
-            <a:avLst/>
-          </a:prstGeom>
-          <a:solidFill>
-            <a:srgbClr val="2F8A28"/>
-          </a:solidFill>
-          <a:ln w="12700">
-            <a:solidFill>
-              <a:srgbClr val="2F8A28"/>
-            </a:solidFill>
-            <a:prstDash val="solid"/>
-          </a:ln>
-        </p:spPr>
-      </p:sp>
-      <p:sp>
-        <p:nvSpPr>
-          <p:cNvPr id="17" name="Text 15"/>
-          <p:cNvSpPr/>
-          <p:nvPr/>
-        </p:nvSpPr>
-        <p:spPr>
-          <a:xfrm>
-            <a:off x="7909560" y="3977640"/>
-            <a:ext cx="2926080" cy="182880"/>
-          </a:xfrm>
-          <a:prstGeom prst="rect">
-            <a:avLst/>
-          </a:prstGeom>
-          <a:noFill/>
-          <a:ln/>
-        </p:spPr>
-        <p:txBody>
-          <a:bodyPr wrap="square" lIns="0" tIns="0" rIns="0" bIns="0" rtlCol="0" anchor="ctr"/>
-          <a:lstStyle/>
-          <a:p>
-            <a:pPr algn="ctr" indent="0" marL="0">
-              <a:buNone/>
-            </a:pPr>
-            <a:r>
-              <a:rPr lang="en-US" sz="1000" dirty="0">
-                <a:solidFill>
-                  <a:srgbClr val="003A63"/>
-                </a:solidFill>
-                <a:latin typeface="Aptos" pitchFamily="34" charset="0"/>
-                <a:ea typeface="Aptos" pitchFamily="34" charset="-122"/>
-                <a:cs typeface="Aptos" pitchFamily="34" charset="-120"/>
-              </a:rPr>
-              <a:t>Concept to action</a:t>
-            </a:r>
-            <a:endParaRPr lang="en-US" sz="1000" dirty="0"/>
-          </a:p>
-        </p:txBody>
-      </p:sp>
-      <p:sp>
-        <p:nvSpPr>
-          <p:cNvPr id="18" name="Shape 16"/>
           <p:cNvSpPr/>
           <p:nvPr/>
         </p:nvSpPr>
@@ -8742,7 +8464,7 @@
       </p:sp>
       <p:sp>
         <p:nvSpPr>
-          <p:cNvPr id="19" name="Text 17"/>
+          <p:cNvPr id="17" name="Text 15"/>
           <p:cNvSpPr/>
           <p:nvPr/>
         </p:nvSpPr>
@@ -8781,7 +8503,7 @@
       </p:sp>
       <p:sp>
         <p:nvSpPr>
-          <p:cNvPr id="20" name="Text 18"/>
+          <p:cNvPr id="18" name="Text 16"/>
           <p:cNvSpPr/>
           <p:nvPr/>
         </p:nvSpPr>
@@ -9289,13 +9011,11 @@
             </a:avLst>
           </a:prstGeom>
           <a:solidFill>
-            <a:srgbClr val="FFFFFF">
-              <a:alpha val="88000"/>
-            </a:srgbClr>
+            <a:srgbClr val="FFFFFF"/>
           </a:solidFill>
           <a:ln w="12700">
             <a:solidFill>
-              <a:srgbClr val="D6E8F2"/>
+              <a:srgbClr val="B9D7E6"/>
             </a:solidFill>
             <a:prstDash val="solid"/>
           </a:ln>
@@ -9303,119 +9023,112 @@
       </p:sp>
       <p:sp>
         <p:nvSpPr>
-          <p:cNvPr id="14" name="Shape 12"/>
-          <p:cNvSpPr/>
-          <p:nvPr/>
-        </p:nvSpPr>
-        <p:spPr>
-          <a:xfrm>
-            <a:off x="8074152" y="3291840"/>
-            <a:ext cx="2596896" cy="749808"/>
-          </a:xfrm>
-          <a:prstGeom prst="rect">
-            <a:avLst/>
-          </a:prstGeom>
-          <a:solidFill>
-            <a:srgbClr val="EAF6F8"/>
-          </a:solidFill>
-          <a:ln w="12700">
-            <a:solidFill>
-              <a:srgbClr val="8ABBD8"/>
-            </a:solidFill>
-            <a:prstDash val="solid"/>
-          </a:ln>
-        </p:spPr>
-      </p:sp>
-      <p:sp>
-        <p:nvSpPr>
-          <p:cNvPr id="15" name="Shape 13"/>
-          <p:cNvSpPr/>
-          <p:nvPr/>
-        </p:nvSpPr>
-        <p:spPr>
-          <a:xfrm>
-            <a:off x="8202168" y="3721608"/>
-            <a:ext cx="2340864" cy="0"/>
-          </a:xfrm>
-          <a:prstGeom prst="line">
-            <a:avLst/>
-          </a:prstGeom>
-          <a:noFill/>
-          <a:ln w="19050">
-            <a:solidFill>
-              <a:srgbClr val="0068B7"/>
-            </a:solidFill>
-            <a:prstDash val="solid"/>
-          </a:ln>
-        </p:spPr>
+          <p:cNvPr id="14" name="Text 12"/>
+          <p:cNvSpPr/>
+          <p:nvPr/>
+        </p:nvSpPr>
+        <p:spPr>
+          <a:xfrm>
+            <a:off x="7799832" y="2935224"/>
+            <a:ext cx="3145536" cy="256032"/>
+          </a:xfrm>
+          <a:prstGeom prst="rect">
+            <a:avLst/>
+          </a:prstGeom>
+          <a:noFill/>
+          <a:ln/>
+        </p:spPr>
+        <p:txBody>
+          <a:bodyPr wrap="square" lIns="0" tIns="0" rIns="0" bIns="0" rtlCol="0" anchor="ctr"/>
+          <a:lstStyle/>
+          <a:p>
+            <a:pPr indent="0" marL="0">
+              <a:buNone/>
+            </a:pPr>
+            <a:r>
+              <a:rPr lang="en-US" sz="1300" b="1" dirty="0">
+                <a:solidFill>
+                  <a:srgbClr val="0068B7"/>
+                </a:solidFill>
+                <a:latin typeface="Aptos" pitchFamily="34" charset="0"/>
+                <a:ea typeface="Aptos" pitchFamily="34" charset="-122"/>
+                <a:cs typeface="Aptos" pitchFamily="34" charset="-120"/>
+              </a:rPr>
+              <a:t>Concept checkpoints</a:t>
+            </a:r>
+            <a:endParaRPr lang="en-US" sz="1300" dirty="0"/>
+          </a:p>
+        </p:txBody>
+      </p:sp>
+      <p:sp>
+        <p:nvSpPr>
+          <p:cNvPr id="15" name="Text 13"/>
+          <p:cNvSpPr/>
+          <p:nvPr/>
+        </p:nvSpPr>
+        <p:spPr>
+          <a:xfrm>
+            <a:off x="7818120" y="3300984"/>
+            <a:ext cx="3090672" cy="877824"/>
+          </a:xfrm>
+          <a:prstGeom prst="rect">
+            <a:avLst/>
+          </a:prstGeom>
+          <a:noFill/>
+          <a:ln/>
+        </p:spPr>
+        <p:txBody>
+          <a:bodyPr wrap="square" lIns="254" tIns="254" rIns="254" bIns="254" rtlCol="0" anchor="t">
+            <a:normAutofit/>
+          </a:bodyPr>
+          <a:lstStyle/>
+          <a:p>
+            <a:r>
+              <a:rPr lang="en-US" sz="1380" dirty="0">
+                <a:solidFill>
+                  <a:srgbClr val="17364A"/>
+                </a:solidFill>
+                <a:latin typeface="Aptos" pitchFamily="34" charset="0"/>
+                <a:ea typeface="Aptos" pitchFamily="34" charset="-122"/>
+                <a:cs typeface="Aptos" pitchFamily="34" charset="-120"/>
+              </a:rPr>
+              <a:t>RAG readiness checklist</a:t>
+            </a:r>
+            <a:endParaRPr lang="en-US" sz="1380" dirty="0"/>
+          </a:p>
+          <a:p>
+            <a:r>
+              <a:rPr lang="en-US" sz="1380" dirty="0">
+                <a:solidFill>
+                  <a:srgbClr val="17364A"/>
+                </a:solidFill>
+                <a:latin typeface="Aptos" pitchFamily="34" charset="0"/>
+                <a:ea typeface="Aptos" pitchFamily="34" charset="-122"/>
+                <a:cs typeface="Aptos" pitchFamily="34" charset="-120"/>
+              </a:rPr>
+              <a:t>Content inventory and ownership table</a:t>
+            </a:r>
+            <a:endParaRPr lang="en-US" sz="1380" dirty="0"/>
+          </a:p>
+          <a:p>
+            <a:r>
+              <a:rPr lang="en-US" sz="1380" dirty="0">
+                <a:solidFill>
+                  <a:srgbClr val="17364A"/>
+                </a:solidFill>
+                <a:latin typeface="Aptos" pitchFamily="34" charset="0"/>
+                <a:ea typeface="Aptos" pitchFamily="34" charset="-122"/>
+                <a:cs typeface="Aptos" pitchFamily="34" charset="-120"/>
+              </a:rPr>
+              <a:t>Retrieval test question set</a:t>
+            </a:r>
+            <a:endParaRPr lang="en-US" sz="1380" dirty="0"/>
+          </a:p>
+        </p:txBody>
       </p:sp>
       <p:sp>
         <p:nvSpPr>
           <p:cNvPr id="16" name="Shape 14"/>
-          <p:cNvSpPr/>
-          <p:nvPr/>
-        </p:nvSpPr>
-        <p:spPr>
-          <a:xfrm>
-            <a:off x="9198864" y="4206240"/>
-            <a:ext cx="347472" cy="347472"/>
-          </a:xfrm>
-          <a:prstGeom prst="ellipse">
-            <a:avLst/>
-          </a:prstGeom>
-          <a:solidFill>
-            <a:srgbClr val="2F8A28"/>
-          </a:solidFill>
-          <a:ln w="12700">
-            <a:solidFill>
-              <a:srgbClr val="2F8A28"/>
-            </a:solidFill>
-            <a:prstDash val="solid"/>
-          </a:ln>
-        </p:spPr>
-      </p:sp>
-      <p:sp>
-        <p:nvSpPr>
-          <p:cNvPr id="17" name="Text 15"/>
-          <p:cNvSpPr/>
-          <p:nvPr/>
-        </p:nvSpPr>
-        <p:spPr>
-          <a:xfrm>
-            <a:off x="7909560" y="3977640"/>
-            <a:ext cx="2926080" cy="182880"/>
-          </a:xfrm>
-          <a:prstGeom prst="rect">
-            <a:avLst/>
-          </a:prstGeom>
-          <a:noFill/>
-          <a:ln/>
-        </p:spPr>
-        <p:txBody>
-          <a:bodyPr wrap="square" lIns="0" tIns="0" rIns="0" bIns="0" rtlCol="0" anchor="ctr"/>
-          <a:lstStyle/>
-          <a:p>
-            <a:pPr algn="ctr" indent="0" marL="0">
-              <a:buNone/>
-            </a:pPr>
-            <a:r>
-              <a:rPr lang="en-US" sz="1000" dirty="0">
-                <a:solidFill>
-                  <a:srgbClr val="003A63"/>
-                </a:solidFill>
-                <a:latin typeface="Aptos" pitchFamily="34" charset="0"/>
-                <a:ea typeface="Aptos" pitchFamily="34" charset="-122"/>
-                <a:cs typeface="Aptos" pitchFamily="34" charset="-120"/>
-              </a:rPr>
-              <a:t>Concept to action</a:t>
-            </a:r>
-            <a:endParaRPr lang="en-US" sz="1000" dirty="0"/>
-          </a:p>
-        </p:txBody>
-      </p:sp>
-      <p:sp>
-        <p:nvSpPr>
-          <p:cNvPr id="18" name="Shape 16"/>
           <p:cNvSpPr/>
           <p:nvPr/>
         </p:nvSpPr>
@@ -9442,7 +9155,7 @@
       </p:sp>
       <p:sp>
         <p:nvSpPr>
-          <p:cNvPr id="19" name="Text 17"/>
+          <p:cNvPr id="17" name="Text 15"/>
           <p:cNvSpPr/>
           <p:nvPr/>
         </p:nvSpPr>
@@ -9481,7 +9194,7 @@
       </p:sp>
       <p:sp>
         <p:nvSpPr>
-          <p:cNvPr id="20" name="Text 18"/>
+          <p:cNvPr id="18" name="Text 16"/>
           <p:cNvSpPr/>
           <p:nvPr/>
         </p:nvSpPr>
@@ -9961,13 +9674,11 @@
             </a:avLst>
           </a:prstGeom>
           <a:solidFill>
-            <a:srgbClr val="FFFFFF">
-              <a:alpha val="88000"/>
-            </a:srgbClr>
+            <a:srgbClr val="FFFFFF"/>
           </a:solidFill>
           <a:ln w="12700">
             <a:solidFill>
-              <a:srgbClr val="D6E8F2"/>
+              <a:srgbClr val="B9D7E6"/>
             </a:solidFill>
             <a:prstDash val="solid"/>
           </a:ln>
@@ -9975,119 +9686,84 @@
       </p:sp>
       <p:sp>
         <p:nvSpPr>
-          <p:cNvPr id="14" name="Shape 12"/>
-          <p:cNvSpPr/>
-          <p:nvPr/>
-        </p:nvSpPr>
-        <p:spPr>
-          <a:xfrm>
-            <a:off x="8074152" y="3291840"/>
-            <a:ext cx="2596896" cy="749808"/>
-          </a:xfrm>
-          <a:prstGeom prst="rect">
-            <a:avLst/>
-          </a:prstGeom>
-          <a:solidFill>
-            <a:srgbClr val="EAF6F8"/>
-          </a:solidFill>
-          <a:ln w="12700">
-            <a:solidFill>
-              <a:srgbClr val="8ABBD8"/>
-            </a:solidFill>
-            <a:prstDash val="solid"/>
-          </a:ln>
-        </p:spPr>
-      </p:sp>
-      <p:sp>
-        <p:nvSpPr>
-          <p:cNvPr id="15" name="Shape 13"/>
-          <p:cNvSpPr/>
-          <p:nvPr/>
-        </p:nvSpPr>
-        <p:spPr>
-          <a:xfrm>
-            <a:off x="8202168" y="3721608"/>
-            <a:ext cx="2340864" cy="0"/>
-          </a:xfrm>
-          <a:prstGeom prst="line">
-            <a:avLst/>
-          </a:prstGeom>
-          <a:noFill/>
-          <a:ln w="19050">
-            <a:solidFill>
-              <a:srgbClr val="0068B7"/>
-            </a:solidFill>
-            <a:prstDash val="solid"/>
-          </a:ln>
-        </p:spPr>
+          <p:cNvPr id="14" name="Text 12"/>
+          <p:cNvSpPr/>
+          <p:nvPr/>
+        </p:nvSpPr>
+        <p:spPr>
+          <a:xfrm>
+            <a:off x="7799832" y="2935224"/>
+            <a:ext cx="3145536" cy="256032"/>
+          </a:xfrm>
+          <a:prstGeom prst="rect">
+            <a:avLst/>
+          </a:prstGeom>
+          <a:noFill/>
+          <a:ln/>
+        </p:spPr>
+        <p:txBody>
+          <a:bodyPr wrap="square" lIns="0" tIns="0" rIns="0" bIns="0" rtlCol="0" anchor="ctr"/>
+          <a:lstStyle/>
+          <a:p>
+            <a:pPr indent="0" marL="0">
+              <a:buNone/>
+            </a:pPr>
+            <a:r>
+              <a:rPr lang="en-US" sz="1300" b="1" dirty="0">
+                <a:solidFill>
+                  <a:srgbClr val="0068B7"/>
+                </a:solidFill>
+                <a:latin typeface="Aptos" pitchFamily="34" charset="0"/>
+                <a:ea typeface="Aptos" pitchFamily="34" charset="-122"/>
+                <a:cs typeface="Aptos" pitchFamily="34" charset="-120"/>
+              </a:rPr>
+              <a:t>Concept checkpoints</a:t>
+            </a:r>
+            <a:endParaRPr lang="en-US" sz="1300" dirty="0"/>
+          </a:p>
+        </p:txBody>
+      </p:sp>
+      <p:sp>
+        <p:nvSpPr>
+          <p:cNvPr id="15" name="Text 13"/>
+          <p:cNvSpPr/>
+          <p:nvPr/>
+        </p:nvSpPr>
+        <p:spPr>
+          <a:xfrm>
+            <a:off x="7818120" y="3300984"/>
+            <a:ext cx="3090672" cy="877824"/>
+          </a:xfrm>
+          <a:prstGeom prst="rect">
+            <a:avLst/>
+          </a:prstGeom>
+          <a:noFill/>
+          <a:ln/>
+        </p:spPr>
+        <p:txBody>
+          <a:bodyPr wrap="square" lIns="254" tIns="254" rIns="254" bIns="254" rtlCol="0" anchor="t">
+            <a:normAutofit/>
+          </a:bodyPr>
+          <a:lstStyle/>
+          <a:p>
+            <a:r>
+              <a:rPr lang="en-US" sz="1380" dirty="0">
+                <a:solidFill>
+                  <a:srgbClr val="17364A"/>
+                </a:solidFill>
+                <a:latin typeface="Aptos" pitchFamily="34" charset="0"/>
+                <a:ea typeface="Aptos" pitchFamily="34" charset="-122"/>
+                <a:cs typeface="Aptos" pitchFamily="34" charset="-120"/>
+              </a:rPr>
+              <a:t>Citation and source verification protocol</a:t>
+            </a:r>
+            <a:endParaRPr lang="en-US" sz="1380" dirty="0"/>
+          </a:p>
+        </p:txBody>
       </p:sp>
       <p:sp>
         <p:nvSpPr>
           <p:cNvPr id="16" name="Shape 14"/>
-          <p:cNvSpPr/>
-          <p:nvPr/>
-        </p:nvSpPr>
-        <p:spPr>
-          <a:xfrm>
-            <a:off x="9198864" y="4206240"/>
-            <a:ext cx="347472" cy="347472"/>
-          </a:xfrm>
-          <a:prstGeom prst="ellipse">
-            <a:avLst/>
-          </a:prstGeom>
-          <a:solidFill>
-            <a:srgbClr val="2F8A28"/>
-          </a:solidFill>
-          <a:ln w="12700">
-            <a:solidFill>
-              <a:srgbClr val="2F8A28"/>
-            </a:solidFill>
-            <a:prstDash val="solid"/>
-          </a:ln>
-        </p:spPr>
-      </p:sp>
-      <p:sp>
-        <p:nvSpPr>
-          <p:cNvPr id="17" name="Text 15"/>
-          <p:cNvSpPr/>
-          <p:nvPr/>
-        </p:nvSpPr>
-        <p:spPr>
-          <a:xfrm>
-            <a:off x="7909560" y="3977640"/>
-            <a:ext cx="2926080" cy="182880"/>
-          </a:xfrm>
-          <a:prstGeom prst="rect">
-            <a:avLst/>
-          </a:prstGeom>
-          <a:noFill/>
-          <a:ln/>
-        </p:spPr>
-        <p:txBody>
-          <a:bodyPr wrap="square" lIns="0" tIns="0" rIns="0" bIns="0" rtlCol="0" anchor="ctr"/>
-          <a:lstStyle/>
-          <a:p>
-            <a:pPr algn="ctr" indent="0" marL="0">
-              <a:buNone/>
-            </a:pPr>
-            <a:r>
-              <a:rPr lang="en-US" sz="1000" dirty="0">
-                <a:solidFill>
-                  <a:srgbClr val="003A63"/>
-                </a:solidFill>
-                <a:latin typeface="Aptos" pitchFamily="34" charset="0"/>
-                <a:ea typeface="Aptos" pitchFamily="34" charset="-122"/>
-                <a:cs typeface="Aptos" pitchFamily="34" charset="-120"/>
-              </a:rPr>
-              <a:t>Concept to action</a:t>
-            </a:r>
-            <a:endParaRPr lang="en-US" sz="1000" dirty="0"/>
-          </a:p>
-        </p:txBody>
-      </p:sp>
-      <p:sp>
-        <p:nvSpPr>
-          <p:cNvPr id="18" name="Shape 16"/>
           <p:cNvSpPr/>
           <p:nvPr/>
         </p:nvSpPr>
@@ -10114,7 +9790,7 @@
       </p:sp>
       <p:sp>
         <p:nvSpPr>
-          <p:cNvPr id="19" name="Text 17"/>
+          <p:cNvPr id="17" name="Text 15"/>
           <p:cNvSpPr/>
           <p:nvPr/>
         </p:nvSpPr>
@@ -10153,7 +9829,7 @@
       </p:sp>
       <p:sp>
         <p:nvSpPr>
-          <p:cNvPr id="20" name="Text 18"/>
+          <p:cNvPr id="18" name="Text 16"/>
           <p:cNvSpPr/>
           <p:nvPr/>
         </p:nvSpPr>
@@ -10686,20 +10362,20 @@
         </p:nvSpPr>
         <p:spPr>
           <a:xfrm>
-            <a:off x="7635240" y="3730752"/>
-            <a:ext cx="1033272" cy="749808"/>
+            <a:off x="7909560" y="3675888"/>
+            <a:ext cx="3154680" cy="1691640"/>
           </a:xfrm>
           <a:prstGeom prst="roundRect">
             <a:avLst>
-              <a:gd name="adj" fmla="val 14634"/>
+              <a:gd name="adj" fmla="val 6486"/>
             </a:avLst>
           </a:prstGeom>
           <a:solidFill>
-            <a:srgbClr val="0068B7"/>
+            <a:srgbClr val="FFFFFF"/>
           </a:solidFill>
           <a:ln w="12700">
             <a:solidFill>
-              <a:srgbClr val="0068B7"/>
+              <a:srgbClr val="B9D7E6"/>
             </a:solidFill>
             <a:prstDash val="solid"/>
           </a:ln>
@@ -10713,172 +10389,100 @@
         </p:nvSpPr>
         <p:spPr>
           <a:xfrm>
-            <a:off x="7708392" y="3922776"/>
-            <a:ext cx="886968" cy="310896"/>
-          </a:xfrm>
-          <a:prstGeom prst="rect">
-            <a:avLst/>
-          </a:prstGeom>
-          <a:noFill/>
-          <a:ln/>
-        </p:spPr>
-        <p:txBody>
-          <a:bodyPr wrap="square" lIns="0" tIns="0" rIns="0" bIns="0" rtlCol="0" anchor="ctr">
+            <a:off x="8074152" y="3822192"/>
+            <a:ext cx="2825496" cy="256032"/>
+          </a:xfrm>
+          <a:prstGeom prst="rect">
+            <a:avLst/>
+          </a:prstGeom>
+          <a:noFill/>
+          <a:ln/>
+        </p:spPr>
+        <p:txBody>
+          <a:bodyPr wrap="square" lIns="0" tIns="0" rIns="0" bIns="0" rtlCol="0" anchor="ctr"/>
+          <a:lstStyle/>
+          <a:p>
+            <a:pPr indent="0" marL="0">
+              <a:buNone/>
+            </a:pPr>
+            <a:r>
+              <a:rPr lang="en-US" sz="1300" b="1" dirty="0">
+                <a:solidFill>
+                  <a:srgbClr val="0068B7"/>
+                </a:solidFill>
+                <a:latin typeface="Aptos" pitchFamily="34" charset="0"/>
+                <a:ea typeface="Aptos" pitchFamily="34" charset="-122"/>
+                <a:cs typeface="Aptos" pitchFamily="34" charset="-120"/>
+              </a:rPr>
+              <a:t>Learning sequence</a:t>
+            </a:r>
+            <a:endParaRPr lang="en-US" sz="1300" dirty="0"/>
+          </a:p>
+        </p:txBody>
+      </p:sp>
+      <p:sp>
+        <p:nvSpPr>
+          <p:cNvPr id="15" name="Text 13"/>
+          <p:cNvSpPr/>
+          <p:nvPr/>
+        </p:nvSpPr>
+        <p:spPr>
+          <a:xfrm>
+            <a:off x="8092440" y="4187952"/>
+            <a:ext cx="2770632" cy="1033272"/>
+          </a:xfrm>
+          <a:prstGeom prst="rect">
+            <a:avLst/>
+          </a:prstGeom>
+          <a:noFill/>
+          <a:ln/>
+        </p:spPr>
+        <p:txBody>
+          <a:bodyPr wrap="square" lIns="254" tIns="254" rIns="254" bIns="254" rtlCol="0" anchor="t">
             <a:normAutofit/>
           </a:bodyPr>
           <a:lstStyle/>
           <a:p>
-            <a:pPr algn="ctr" indent="0" marL="0">
-              <a:buNone/>
-            </a:pPr>
-            <a:r>
-              <a:rPr lang="en-US" sz="1500" b="1" dirty="0">
-                <a:solidFill>
-                  <a:srgbClr val="FFFFFF"/>
-                </a:solidFill>
-                <a:latin typeface="Aptos" pitchFamily="34" charset="0"/>
-                <a:ea typeface="Aptos" pitchFamily="34" charset="-122"/>
-                <a:cs typeface="Aptos" pitchFamily="34" charset="-120"/>
-              </a:rPr>
-              <a:t>Learn</a:t>
-            </a:r>
-            <a:endParaRPr lang="en-US" sz="1500" dirty="0"/>
-          </a:p>
-        </p:txBody>
-      </p:sp>
-      <p:sp>
-        <p:nvSpPr>
-          <p:cNvPr id="15" name="Shape 13"/>
-          <p:cNvSpPr/>
-          <p:nvPr/>
-        </p:nvSpPr>
-        <p:spPr>
-          <a:xfrm>
-            <a:off x="8924544" y="3730752"/>
-            <a:ext cx="1033272" cy="749808"/>
-          </a:xfrm>
-          <a:prstGeom prst="roundRect">
-            <a:avLst>
-              <a:gd name="adj" fmla="val 14634"/>
-            </a:avLst>
-          </a:prstGeom>
-          <a:solidFill>
-            <a:srgbClr val="2F8A28"/>
-          </a:solidFill>
-          <a:ln w="12700">
-            <a:solidFill>
-              <a:srgbClr val="2F8A28"/>
-            </a:solidFill>
-            <a:prstDash val="solid"/>
-          </a:ln>
-        </p:spPr>
-      </p:sp>
-      <p:sp>
-        <p:nvSpPr>
-          <p:cNvPr id="16" name="Text 14"/>
-          <p:cNvSpPr/>
-          <p:nvPr/>
-        </p:nvSpPr>
-        <p:spPr>
-          <a:xfrm>
-            <a:off x="8997696" y="3922776"/>
-            <a:ext cx="886968" cy="310896"/>
-          </a:xfrm>
-          <a:prstGeom prst="rect">
-            <a:avLst/>
-          </a:prstGeom>
-          <a:noFill/>
-          <a:ln/>
-        </p:spPr>
-        <p:txBody>
-          <a:bodyPr wrap="square" lIns="0" tIns="0" rIns="0" bIns="0" rtlCol="0" anchor="ctr">
-            <a:normAutofit/>
-          </a:bodyPr>
-          <a:lstStyle/>
-          <a:p>
-            <a:pPr algn="ctr" indent="0" marL="0">
-              <a:buNone/>
-            </a:pPr>
-            <a:r>
-              <a:rPr lang="en-US" sz="1500" b="1" dirty="0">
-                <a:solidFill>
-                  <a:srgbClr val="FFFFFF"/>
-                </a:solidFill>
-                <a:latin typeface="Aptos" pitchFamily="34" charset="0"/>
-                <a:ea typeface="Aptos" pitchFamily="34" charset="-122"/>
-                <a:cs typeface="Aptos" pitchFamily="34" charset="-120"/>
-              </a:rPr>
-              <a:t>Apply</a:t>
-            </a:r>
-            <a:endParaRPr lang="en-US" sz="1500" dirty="0"/>
-          </a:p>
-        </p:txBody>
-      </p:sp>
-      <p:sp>
-        <p:nvSpPr>
-          <p:cNvPr id="17" name="Shape 15"/>
-          <p:cNvSpPr/>
-          <p:nvPr/>
-        </p:nvSpPr>
-        <p:spPr>
-          <a:xfrm>
-            <a:off x="10213848" y="3730752"/>
-            <a:ext cx="1033272" cy="749808"/>
-          </a:xfrm>
-          <a:prstGeom prst="roundRect">
-            <a:avLst>
-              <a:gd name="adj" fmla="val 14634"/>
-            </a:avLst>
-          </a:prstGeom>
-          <a:solidFill>
-            <a:srgbClr val="6A4CA3"/>
-          </a:solidFill>
-          <a:ln w="12700">
-            <a:solidFill>
-              <a:srgbClr val="6A4CA3"/>
-            </a:solidFill>
-            <a:prstDash val="solid"/>
-          </a:ln>
-        </p:spPr>
-      </p:sp>
-      <p:sp>
-        <p:nvSpPr>
-          <p:cNvPr id="18" name="Text 16"/>
-          <p:cNvSpPr/>
-          <p:nvPr/>
-        </p:nvSpPr>
-        <p:spPr>
-          <a:xfrm>
-            <a:off x="10287000" y="3922776"/>
-            <a:ext cx="886968" cy="310896"/>
-          </a:xfrm>
-          <a:prstGeom prst="rect">
-            <a:avLst/>
-          </a:prstGeom>
-          <a:noFill/>
-          <a:ln/>
-        </p:spPr>
-        <p:txBody>
-          <a:bodyPr wrap="square" lIns="0" tIns="0" rIns="0" bIns="0" rtlCol="0" anchor="ctr">
-            <a:normAutofit/>
-          </a:bodyPr>
-          <a:lstStyle/>
-          <a:p>
-            <a:pPr algn="ctr" indent="0" marL="0">
-              <a:buNone/>
-            </a:pPr>
-            <a:r>
-              <a:rPr lang="en-US" sz="1500" b="1" dirty="0">
-                <a:solidFill>
-                  <a:srgbClr val="FFFFFF"/>
-                </a:solidFill>
-                <a:latin typeface="Aptos" pitchFamily="34" charset="0"/>
-                <a:ea typeface="Aptos" pitchFamily="34" charset="-122"/>
-                <a:cs typeface="Aptos" pitchFamily="34" charset="-120"/>
-              </a:rPr>
-              <a:t>Document</a:t>
-            </a:r>
-            <a:endParaRPr lang="en-US" sz="1500" dirty="0"/>
+            <a:r>
+              <a:rPr lang="en-US" sz="1380" dirty="0">
+                <a:solidFill>
+                  <a:srgbClr val="17364A"/>
+                </a:solidFill>
+                <a:latin typeface="Aptos" pitchFamily="34" charset="0"/>
+                <a:ea typeface="Aptos" pitchFamily="34" charset="-122"/>
+                <a:cs typeface="Aptos" pitchFamily="34" charset="-120"/>
+              </a:rPr>
+              <a:t>Read the module for shared vocabulary and context.</a:t>
+            </a:r>
+            <a:endParaRPr lang="en-US" sz="1380" dirty="0"/>
+          </a:p>
+          <a:p>
+            <a:r>
+              <a:rPr lang="en-US" sz="1380" dirty="0">
+                <a:solidFill>
+                  <a:srgbClr val="17364A"/>
+                </a:solidFill>
+                <a:latin typeface="Aptos" pitchFamily="34" charset="0"/>
+                <a:ea typeface="Aptos" pitchFamily="34" charset="-122"/>
+                <a:cs typeface="Aptos" pitchFamily="34" charset="-120"/>
+              </a:rPr>
+              <a:t>Complete the practical exercise to apply the concept.</a:t>
+            </a:r>
+            <a:endParaRPr lang="en-US" sz="1380" dirty="0"/>
+          </a:p>
+          <a:p>
+            <a:r>
+              <a:rPr lang="en-US" sz="1380" dirty="0">
+                <a:solidFill>
+                  <a:srgbClr val="17364A"/>
+                </a:solidFill>
+                <a:latin typeface="Aptos" pitchFamily="34" charset="0"/>
+                <a:ea typeface="Aptos" pitchFamily="34" charset="-122"/>
+                <a:cs typeface="Aptos" pitchFamily="34" charset="-120"/>
+              </a:rPr>
+              <a:t>Use the notes and references for deeper review.</a:t>
+            </a:r>
+            <a:endParaRPr lang="en-US" sz="1380" dirty="0"/>
           </a:p>
         </p:txBody>
       </p:sp>
@@ -11351,13 +10955,11 @@
             </a:avLst>
           </a:prstGeom>
           <a:solidFill>
-            <a:srgbClr val="FFFFFF">
-              <a:alpha val="88000"/>
-            </a:srgbClr>
+            <a:srgbClr val="FFFFFF"/>
           </a:solidFill>
           <a:ln w="12700">
             <a:solidFill>
-              <a:srgbClr val="D6E8F2"/>
+              <a:srgbClr val="B9D7E6"/>
             </a:solidFill>
             <a:prstDash val="solid"/>
           </a:ln>
@@ -11365,119 +10967,112 @@
       </p:sp>
       <p:sp>
         <p:nvSpPr>
-          <p:cNvPr id="14" name="Shape 12"/>
-          <p:cNvSpPr/>
-          <p:nvPr/>
-        </p:nvSpPr>
-        <p:spPr>
-          <a:xfrm>
-            <a:off x="8074152" y="3291840"/>
-            <a:ext cx="2596896" cy="749808"/>
-          </a:xfrm>
-          <a:prstGeom prst="rect">
-            <a:avLst/>
-          </a:prstGeom>
-          <a:solidFill>
-            <a:srgbClr val="EAF6F8"/>
-          </a:solidFill>
-          <a:ln w="12700">
-            <a:solidFill>
-              <a:srgbClr val="8ABBD8"/>
-            </a:solidFill>
-            <a:prstDash val="solid"/>
-          </a:ln>
-        </p:spPr>
-      </p:sp>
-      <p:sp>
-        <p:nvSpPr>
-          <p:cNvPr id="15" name="Shape 13"/>
-          <p:cNvSpPr/>
-          <p:nvPr/>
-        </p:nvSpPr>
-        <p:spPr>
-          <a:xfrm>
-            <a:off x="8202168" y="3721608"/>
-            <a:ext cx="2340864" cy="0"/>
-          </a:xfrm>
-          <a:prstGeom prst="line">
-            <a:avLst/>
-          </a:prstGeom>
-          <a:noFill/>
-          <a:ln w="19050">
-            <a:solidFill>
-              <a:srgbClr val="0068B7"/>
-            </a:solidFill>
-            <a:prstDash val="solid"/>
-          </a:ln>
-        </p:spPr>
+          <p:cNvPr id="14" name="Text 12"/>
+          <p:cNvSpPr/>
+          <p:nvPr/>
+        </p:nvSpPr>
+        <p:spPr>
+          <a:xfrm>
+            <a:off x="7799832" y="2935224"/>
+            <a:ext cx="3145536" cy="256032"/>
+          </a:xfrm>
+          <a:prstGeom prst="rect">
+            <a:avLst/>
+          </a:prstGeom>
+          <a:noFill/>
+          <a:ln/>
+        </p:spPr>
+        <p:txBody>
+          <a:bodyPr wrap="square" lIns="0" tIns="0" rIns="0" bIns="0" rtlCol="0" anchor="ctr"/>
+          <a:lstStyle/>
+          <a:p>
+            <a:pPr indent="0" marL="0">
+              <a:buNone/>
+            </a:pPr>
+            <a:r>
+              <a:rPr lang="en-US" sz="1300" b="1" dirty="0">
+                <a:solidFill>
+                  <a:srgbClr val="0068B7"/>
+                </a:solidFill>
+                <a:latin typeface="Aptos" pitchFamily="34" charset="0"/>
+                <a:ea typeface="Aptos" pitchFamily="34" charset="-122"/>
+                <a:cs typeface="Aptos" pitchFamily="34" charset="-120"/>
+              </a:rPr>
+              <a:t>Concept checkpoints</a:t>
+            </a:r>
+            <a:endParaRPr lang="en-US" sz="1300" dirty="0"/>
+          </a:p>
+        </p:txBody>
+      </p:sp>
+      <p:sp>
+        <p:nvSpPr>
+          <p:cNvPr id="15" name="Text 13"/>
+          <p:cNvSpPr/>
+          <p:nvPr/>
+        </p:nvSpPr>
+        <p:spPr>
+          <a:xfrm>
+            <a:off x="7818120" y="3300984"/>
+            <a:ext cx="3090672" cy="877824"/>
+          </a:xfrm>
+          <a:prstGeom prst="rect">
+            <a:avLst/>
+          </a:prstGeom>
+          <a:noFill/>
+          <a:ln/>
+        </p:spPr>
+        <p:txBody>
+          <a:bodyPr wrap="square" lIns="254" tIns="254" rIns="254" bIns="254" rtlCol="0" anchor="t">
+            <a:normAutofit/>
+          </a:bodyPr>
+          <a:lstStyle/>
+          <a:p>
+            <a:r>
+              <a:rPr lang="en-US" sz="1380" dirty="0">
+                <a:solidFill>
+                  <a:srgbClr val="17364A"/>
+                </a:solidFill>
+                <a:latin typeface="Aptos" pitchFamily="34" charset="0"/>
+                <a:ea typeface="Aptos" pitchFamily="34" charset="-122"/>
+                <a:cs typeface="Aptos" pitchFamily="34" charset="-120"/>
+              </a:rPr>
+              <a:t>RAG readiness checklist</a:t>
+            </a:r>
+            <a:endParaRPr lang="en-US" sz="1380" dirty="0"/>
+          </a:p>
+          <a:p>
+            <a:r>
+              <a:rPr lang="en-US" sz="1380" dirty="0">
+                <a:solidFill>
+                  <a:srgbClr val="17364A"/>
+                </a:solidFill>
+                <a:latin typeface="Aptos" pitchFamily="34" charset="0"/>
+                <a:ea typeface="Aptos" pitchFamily="34" charset="-122"/>
+                <a:cs typeface="Aptos" pitchFamily="34" charset="-120"/>
+              </a:rPr>
+              <a:t>Content inventory and ownership table</a:t>
+            </a:r>
+            <a:endParaRPr lang="en-US" sz="1380" dirty="0"/>
+          </a:p>
+          <a:p>
+            <a:r>
+              <a:rPr lang="en-US" sz="1380" dirty="0">
+                <a:solidFill>
+                  <a:srgbClr val="17364A"/>
+                </a:solidFill>
+                <a:latin typeface="Aptos" pitchFamily="34" charset="0"/>
+                <a:ea typeface="Aptos" pitchFamily="34" charset="-122"/>
+                <a:cs typeface="Aptos" pitchFamily="34" charset="-120"/>
+              </a:rPr>
+              <a:t>Retrieval test question set</a:t>
+            </a:r>
+            <a:endParaRPr lang="en-US" sz="1380" dirty="0"/>
+          </a:p>
+        </p:txBody>
       </p:sp>
       <p:sp>
         <p:nvSpPr>
           <p:cNvPr id="16" name="Shape 14"/>
-          <p:cNvSpPr/>
-          <p:nvPr/>
-        </p:nvSpPr>
-        <p:spPr>
-          <a:xfrm>
-            <a:off x="9198864" y="4206240"/>
-            <a:ext cx="347472" cy="347472"/>
-          </a:xfrm>
-          <a:prstGeom prst="ellipse">
-            <a:avLst/>
-          </a:prstGeom>
-          <a:solidFill>
-            <a:srgbClr val="2F8A28"/>
-          </a:solidFill>
-          <a:ln w="12700">
-            <a:solidFill>
-              <a:srgbClr val="2F8A28"/>
-            </a:solidFill>
-            <a:prstDash val="solid"/>
-          </a:ln>
-        </p:spPr>
-      </p:sp>
-      <p:sp>
-        <p:nvSpPr>
-          <p:cNvPr id="17" name="Text 15"/>
-          <p:cNvSpPr/>
-          <p:nvPr/>
-        </p:nvSpPr>
-        <p:spPr>
-          <a:xfrm>
-            <a:off x="7909560" y="3977640"/>
-            <a:ext cx="2926080" cy="182880"/>
-          </a:xfrm>
-          <a:prstGeom prst="rect">
-            <a:avLst/>
-          </a:prstGeom>
-          <a:noFill/>
-          <a:ln/>
-        </p:spPr>
-        <p:txBody>
-          <a:bodyPr wrap="square" lIns="0" tIns="0" rIns="0" bIns="0" rtlCol="0" anchor="ctr"/>
-          <a:lstStyle/>
-          <a:p>
-            <a:pPr algn="ctr" indent="0" marL="0">
-              <a:buNone/>
-            </a:pPr>
-            <a:r>
-              <a:rPr lang="en-US" sz="1000" dirty="0">
-                <a:solidFill>
-                  <a:srgbClr val="003A63"/>
-                </a:solidFill>
-                <a:latin typeface="Aptos" pitchFamily="34" charset="0"/>
-                <a:ea typeface="Aptos" pitchFamily="34" charset="-122"/>
-                <a:cs typeface="Aptos" pitchFamily="34" charset="-120"/>
-              </a:rPr>
-              <a:t>Concept to action</a:t>
-            </a:r>
-            <a:endParaRPr lang="en-US" sz="1000" dirty="0"/>
-          </a:p>
-        </p:txBody>
-      </p:sp>
-      <p:sp>
-        <p:nvSpPr>
-          <p:cNvPr id="18" name="Shape 16"/>
           <p:cNvSpPr/>
           <p:nvPr/>
         </p:nvSpPr>
@@ -11504,7 +11099,7 @@
       </p:sp>
       <p:sp>
         <p:nvSpPr>
-          <p:cNvPr id="19" name="Text 17"/>
+          <p:cNvPr id="17" name="Text 15"/>
           <p:cNvSpPr/>
           <p:nvPr/>
         </p:nvSpPr>
@@ -11543,7 +11138,7 @@
       </p:sp>
       <p:sp>
         <p:nvSpPr>
-          <p:cNvPr id="20" name="Text 18"/>
+          <p:cNvPr id="18" name="Text 16"/>
           <p:cNvSpPr/>
           <p:nvPr/>
         </p:nvSpPr>
@@ -12051,13 +11646,11 @@
             </a:avLst>
           </a:prstGeom>
           <a:solidFill>
-            <a:srgbClr val="FFFFFF">
-              <a:alpha val="88000"/>
-            </a:srgbClr>
+            <a:srgbClr val="FFFFFF"/>
           </a:solidFill>
           <a:ln w="12700">
             <a:solidFill>
-              <a:srgbClr val="D6E8F2"/>
+              <a:srgbClr val="B9D7E6"/>
             </a:solidFill>
             <a:prstDash val="solid"/>
           </a:ln>
@@ -12065,119 +11658,112 @@
       </p:sp>
       <p:sp>
         <p:nvSpPr>
-          <p:cNvPr id="14" name="Shape 12"/>
-          <p:cNvSpPr/>
-          <p:nvPr/>
-        </p:nvSpPr>
-        <p:spPr>
-          <a:xfrm>
-            <a:off x="8074152" y="3291840"/>
-            <a:ext cx="2596896" cy="749808"/>
-          </a:xfrm>
-          <a:prstGeom prst="rect">
-            <a:avLst/>
-          </a:prstGeom>
-          <a:solidFill>
-            <a:srgbClr val="EAF6F8"/>
-          </a:solidFill>
-          <a:ln w="12700">
-            <a:solidFill>
-              <a:srgbClr val="8ABBD8"/>
-            </a:solidFill>
-            <a:prstDash val="solid"/>
-          </a:ln>
-        </p:spPr>
-      </p:sp>
-      <p:sp>
-        <p:nvSpPr>
-          <p:cNvPr id="15" name="Shape 13"/>
-          <p:cNvSpPr/>
-          <p:nvPr/>
-        </p:nvSpPr>
-        <p:spPr>
-          <a:xfrm>
-            <a:off x="8202168" y="3721608"/>
-            <a:ext cx="2340864" cy="0"/>
-          </a:xfrm>
-          <a:prstGeom prst="line">
-            <a:avLst/>
-          </a:prstGeom>
-          <a:noFill/>
-          <a:ln w="19050">
-            <a:solidFill>
-              <a:srgbClr val="0068B7"/>
-            </a:solidFill>
-            <a:prstDash val="solid"/>
-          </a:ln>
-        </p:spPr>
+          <p:cNvPr id="14" name="Text 12"/>
+          <p:cNvSpPr/>
+          <p:nvPr/>
+        </p:nvSpPr>
+        <p:spPr>
+          <a:xfrm>
+            <a:off x="7799832" y="2935224"/>
+            <a:ext cx="3145536" cy="256032"/>
+          </a:xfrm>
+          <a:prstGeom prst="rect">
+            <a:avLst/>
+          </a:prstGeom>
+          <a:noFill/>
+          <a:ln/>
+        </p:spPr>
+        <p:txBody>
+          <a:bodyPr wrap="square" lIns="0" tIns="0" rIns="0" bIns="0" rtlCol="0" anchor="ctr"/>
+          <a:lstStyle/>
+          <a:p>
+            <a:pPr indent="0" marL="0">
+              <a:buNone/>
+            </a:pPr>
+            <a:r>
+              <a:rPr lang="en-US" sz="1300" b="1" dirty="0">
+                <a:solidFill>
+                  <a:srgbClr val="0068B7"/>
+                </a:solidFill>
+                <a:latin typeface="Aptos" pitchFamily="34" charset="0"/>
+                <a:ea typeface="Aptos" pitchFamily="34" charset="-122"/>
+                <a:cs typeface="Aptos" pitchFamily="34" charset="-120"/>
+              </a:rPr>
+              <a:t>Concept checkpoints</a:t>
+            </a:r>
+            <a:endParaRPr lang="en-US" sz="1300" dirty="0"/>
+          </a:p>
+        </p:txBody>
+      </p:sp>
+      <p:sp>
+        <p:nvSpPr>
+          <p:cNvPr id="15" name="Text 13"/>
+          <p:cNvSpPr/>
+          <p:nvPr/>
+        </p:nvSpPr>
+        <p:spPr>
+          <a:xfrm>
+            <a:off x="7818120" y="3300984"/>
+            <a:ext cx="3090672" cy="877824"/>
+          </a:xfrm>
+          <a:prstGeom prst="rect">
+            <a:avLst/>
+          </a:prstGeom>
+          <a:noFill/>
+          <a:ln/>
+        </p:spPr>
+        <p:txBody>
+          <a:bodyPr wrap="square" lIns="254" tIns="254" rIns="254" bIns="254" rtlCol="0" anchor="t">
+            <a:normAutofit/>
+          </a:bodyPr>
+          <a:lstStyle/>
+          <a:p>
+            <a:r>
+              <a:rPr lang="en-US" sz="1380" dirty="0">
+                <a:solidFill>
+                  <a:srgbClr val="17364A"/>
+                </a:solidFill>
+                <a:latin typeface="Aptos" pitchFamily="34" charset="0"/>
+                <a:ea typeface="Aptos" pitchFamily="34" charset="-122"/>
+                <a:cs typeface="Aptos" pitchFamily="34" charset="-120"/>
+              </a:rPr>
+              <a:t>1.</a:t>
+            </a:r>
+            <a:endParaRPr lang="en-US" sz="1380" dirty="0"/>
+          </a:p>
+          <a:p>
+            <a:r>
+              <a:rPr lang="en-US" sz="1380" dirty="0">
+                <a:solidFill>
+                  <a:srgbClr val="17364A"/>
+                </a:solidFill>
+                <a:latin typeface="Aptos" pitchFamily="34" charset="0"/>
+                <a:ea typeface="Aptos" pitchFamily="34" charset="-122"/>
+                <a:cs typeface="Aptos" pitchFamily="34" charset="-120"/>
+              </a:rPr>
+              <a:t>What is RAG?</a:t>
+            </a:r>
+            <a:endParaRPr lang="en-US" sz="1380" dirty="0"/>
+          </a:p>
+          <a:p>
+            <a:r>
+              <a:rPr lang="en-US" sz="1380" dirty="0">
+                <a:solidFill>
+                  <a:srgbClr val="17364A"/>
+                </a:solidFill>
+                <a:latin typeface="Aptos" pitchFamily="34" charset="0"/>
+                <a:ea typeface="Aptos" pitchFamily="34" charset="-122"/>
+                <a:cs typeface="Aptos" pitchFamily="34" charset="-120"/>
+              </a:rPr>
+              <a:t>2.</a:t>
+            </a:r>
+            <a:endParaRPr lang="en-US" sz="1380" dirty="0"/>
+          </a:p>
+        </p:txBody>
       </p:sp>
       <p:sp>
         <p:nvSpPr>
           <p:cNvPr id="16" name="Shape 14"/>
-          <p:cNvSpPr/>
-          <p:nvPr/>
-        </p:nvSpPr>
-        <p:spPr>
-          <a:xfrm>
-            <a:off x="9198864" y="4206240"/>
-            <a:ext cx="347472" cy="347472"/>
-          </a:xfrm>
-          <a:prstGeom prst="ellipse">
-            <a:avLst/>
-          </a:prstGeom>
-          <a:solidFill>
-            <a:srgbClr val="2F8A28"/>
-          </a:solidFill>
-          <a:ln w="12700">
-            <a:solidFill>
-              <a:srgbClr val="2F8A28"/>
-            </a:solidFill>
-            <a:prstDash val="solid"/>
-          </a:ln>
-        </p:spPr>
-      </p:sp>
-      <p:sp>
-        <p:nvSpPr>
-          <p:cNvPr id="17" name="Text 15"/>
-          <p:cNvSpPr/>
-          <p:nvPr/>
-        </p:nvSpPr>
-        <p:spPr>
-          <a:xfrm>
-            <a:off x="7909560" y="3977640"/>
-            <a:ext cx="2926080" cy="182880"/>
-          </a:xfrm>
-          <a:prstGeom prst="rect">
-            <a:avLst/>
-          </a:prstGeom>
-          <a:noFill/>
-          <a:ln/>
-        </p:spPr>
-        <p:txBody>
-          <a:bodyPr wrap="square" lIns="0" tIns="0" rIns="0" bIns="0" rtlCol="0" anchor="ctr"/>
-          <a:lstStyle/>
-          <a:p>
-            <a:pPr algn="ctr" indent="0" marL="0">
-              <a:buNone/>
-            </a:pPr>
-            <a:r>
-              <a:rPr lang="en-US" sz="1000" dirty="0">
-                <a:solidFill>
-                  <a:srgbClr val="003A63"/>
-                </a:solidFill>
-                <a:latin typeface="Aptos" pitchFamily="34" charset="0"/>
-                <a:ea typeface="Aptos" pitchFamily="34" charset="-122"/>
-                <a:cs typeface="Aptos" pitchFamily="34" charset="-120"/>
-              </a:rPr>
-              <a:t>Concept to action</a:t>
-            </a:r>
-            <a:endParaRPr lang="en-US" sz="1000" dirty="0"/>
-          </a:p>
-        </p:txBody>
-      </p:sp>
-      <p:sp>
-        <p:nvSpPr>
-          <p:cNvPr id="18" name="Shape 16"/>
           <p:cNvSpPr/>
           <p:nvPr/>
         </p:nvSpPr>
@@ -12204,7 +11790,7 @@
       </p:sp>
       <p:sp>
         <p:nvSpPr>
-          <p:cNvPr id="19" name="Text 17"/>
+          <p:cNvPr id="17" name="Text 15"/>
           <p:cNvSpPr/>
           <p:nvPr/>
         </p:nvSpPr>
@@ -12243,7 +11829,7 @@
       </p:sp>
       <p:sp>
         <p:nvSpPr>
-          <p:cNvPr id="20" name="Text 18"/>
+          <p:cNvPr id="18" name="Text 16"/>
           <p:cNvSpPr/>
           <p:nvPr/>
         </p:nvSpPr>
@@ -12751,13 +12337,11 @@
             </a:avLst>
           </a:prstGeom>
           <a:solidFill>
-            <a:srgbClr val="FFFFFF">
-              <a:alpha val="88000"/>
-            </a:srgbClr>
+            <a:srgbClr val="FFFFFF"/>
           </a:solidFill>
           <a:ln w="12700">
             <a:solidFill>
-              <a:srgbClr val="D6E8F2"/>
+              <a:srgbClr val="B9D7E6"/>
             </a:solidFill>
             <a:prstDash val="solid"/>
           </a:ln>
@@ -12765,119 +12349,98 @@
       </p:sp>
       <p:sp>
         <p:nvSpPr>
-          <p:cNvPr id="14" name="Shape 12"/>
-          <p:cNvSpPr/>
-          <p:nvPr/>
-        </p:nvSpPr>
-        <p:spPr>
-          <a:xfrm>
-            <a:off x="8074152" y="3291840"/>
-            <a:ext cx="2596896" cy="749808"/>
-          </a:xfrm>
-          <a:prstGeom prst="rect">
-            <a:avLst/>
-          </a:prstGeom>
-          <a:solidFill>
-            <a:srgbClr val="EAF6F8"/>
-          </a:solidFill>
-          <a:ln w="12700">
-            <a:solidFill>
-              <a:srgbClr val="8ABBD8"/>
-            </a:solidFill>
-            <a:prstDash val="solid"/>
-          </a:ln>
-        </p:spPr>
-      </p:sp>
-      <p:sp>
-        <p:nvSpPr>
-          <p:cNvPr id="15" name="Shape 13"/>
-          <p:cNvSpPr/>
-          <p:nvPr/>
-        </p:nvSpPr>
-        <p:spPr>
-          <a:xfrm>
-            <a:off x="8202168" y="3721608"/>
-            <a:ext cx="2340864" cy="0"/>
-          </a:xfrm>
-          <a:prstGeom prst="line">
-            <a:avLst/>
-          </a:prstGeom>
-          <a:noFill/>
-          <a:ln w="19050">
-            <a:solidFill>
-              <a:srgbClr val="0068B7"/>
-            </a:solidFill>
-            <a:prstDash val="solid"/>
-          </a:ln>
-        </p:spPr>
+          <p:cNvPr id="14" name="Text 12"/>
+          <p:cNvSpPr/>
+          <p:nvPr/>
+        </p:nvSpPr>
+        <p:spPr>
+          <a:xfrm>
+            <a:off x="7799832" y="2935224"/>
+            <a:ext cx="3145536" cy="256032"/>
+          </a:xfrm>
+          <a:prstGeom prst="rect">
+            <a:avLst/>
+          </a:prstGeom>
+          <a:noFill/>
+          <a:ln/>
+        </p:spPr>
+        <p:txBody>
+          <a:bodyPr wrap="square" lIns="0" tIns="0" rIns="0" bIns="0" rtlCol="0" anchor="ctr"/>
+          <a:lstStyle/>
+          <a:p>
+            <a:pPr indent="0" marL="0">
+              <a:buNone/>
+            </a:pPr>
+            <a:r>
+              <a:rPr lang="en-US" sz="1300" b="1" dirty="0">
+                <a:solidFill>
+                  <a:srgbClr val="0068B7"/>
+                </a:solidFill>
+                <a:latin typeface="Aptos" pitchFamily="34" charset="0"/>
+                <a:ea typeface="Aptos" pitchFamily="34" charset="-122"/>
+                <a:cs typeface="Aptos" pitchFamily="34" charset="-120"/>
+              </a:rPr>
+              <a:t>Concept checkpoints</a:t>
+            </a:r>
+            <a:endParaRPr lang="en-US" sz="1300" dirty="0"/>
+          </a:p>
+        </p:txBody>
+      </p:sp>
+      <p:sp>
+        <p:nvSpPr>
+          <p:cNvPr id="15" name="Text 13"/>
+          <p:cNvSpPr/>
+          <p:nvPr/>
+        </p:nvSpPr>
+        <p:spPr>
+          <a:xfrm>
+            <a:off x="7818120" y="3300984"/>
+            <a:ext cx="3090672" cy="877824"/>
+          </a:xfrm>
+          <a:prstGeom prst="rect">
+            <a:avLst/>
+          </a:prstGeom>
+          <a:noFill/>
+          <a:ln/>
+        </p:spPr>
+        <p:txBody>
+          <a:bodyPr wrap="square" lIns="254" tIns="254" rIns="254" bIns="254" rtlCol="0" anchor="t">
+            <a:normAutofit/>
+          </a:bodyPr>
+          <a:lstStyle/>
+          <a:p>
+            <a:r>
+              <a:rPr lang="en-US" sz="1380" dirty="0">
+                <a:solidFill>
+                  <a:srgbClr val="17364A"/>
+                </a:solidFill>
+                <a:latin typeface="Aptos" pitchFamily="34" charset="0"/>
+                <a:ea typeface="Aptos" pitchFamily="34" charset="-122"/>
+                <a:cs typeface="Aptos" pitchFamily="34" charset="-120"/>
+              </a:rPr>
+              <a:t>NIST Artificial Intelligence Risk Management Framework:.</a:t>
+            </a:r>
+            <a:endParaRPr lang="en-US" sz="1380" dirty="0"/>
+          </a:p>
+          <a:p>
+            <a:r>
+              <a:rPr lang="en-US" sz="1380" dirty="0">
+                <a:solidFill>
+                  <a:srgbClr val="17364A"/>
+                </a:solidFill>
+                <a:latin typeface="Aptos" pitchFamily="34" charset="0"/>
+                <a:ea typeface="Aptos" pitchFamily="34" charset="-122"/>
+                <a:cs typeface="Aptos" pitchFamily="34" charset="-120"/>
+              </a:rPr>
+              <a:t>ONC USCDI: https://isp.healthit.gov/united-states-core-data-interoperability-uscdi</a:t>
+            </a:r>
+            <a:endParaRPr lang="en-US" sz="1380" dirty="0"/>
+          </a:p>
+        </p:txBody>
       </p:sp>
       <p:sp>
         <p:nvSpPr>
           <p:cNvPr id="16" name="Shape 14"/>
-          <p:cNvSpPr/>
-          <p:nvPr/>
-        </p:nvSpPr>
-        <p:spPr>
-          <a:xfrm>
-            <a:off x="9198864" y="4206240"/>
-            <a:ext cx="347472" cy="347472"/>
-          </a:xfrm>
-          <a:prstGeom prst="ellipse">
-            <a:avLst/>
-          </a:prstGeom>
-          <a:solidFill>
-            <a:srgbClr val="2F8A28"/>
-          </a:solidFill>
-          <a:ln w="12700">
-            <a:solidFill>
-              <a:srgbClr val="2F8A28"/>
-            </a:solidFill>
-            <a:prstDash val="solid"/>
-          </a:ln>
-        </p:spPr>
-      </p:sp>
-      <p:sp>
-        <p:nvSpPr>
-          <p:cNvPr id="17" name="Text 15"/>
-          <p:cNvSpPr/>
-          <p:nvPr/>
-        </p:nvSpPr>
-        <p:spPr>
-          <a:xfrm>
-            <a:off x="7909560" y="3977640"/>
-            <a:ext cx="2926080" cy="182880"/>
-          </a:xfrm>
-          <a:prstGeom prst="rect">
-            <a:avLst/>
-          </a:prstGeom>
-          <a:noFill/>
-          <a:ln/>
-        </p:spPr>
-        <p:txBody>
-          <a:bodyPr wrap="square" lIns="0" tIns="0" rIns="0" bIns="0" rtlCol="0" anchor="ctr"/>
-          <a:lstStyle/>
-          <a:p>
-            <a:pPr algn="ctr" indent="0" marL="0">
-              <a:buNone/>
-            </a:pPr>
-            <a:r>
-              <a:rPr lang="en-US" sz="1000" dirty="0">
-                <a:solidFill>
-                  <a:srgbClr val="003A63"/>
-                </a:solidFill>
-                <a:latin typeface="Aptos" pitchFamily="34" charset="0"/>
-                <a:ea typeface="Aptos" pitchFamily="34" charset="-122"/>
-                <a:cs typeface="Aptos" pitchFamily="34" charset="-120"/>
-              </a:rPr>
-              <a:t>Concept to action</a:t>
-            </a:r>
-            <a:endParaRPr lang="en-US" sz="1000" dirty="0"/>
-          </a:p>
-        </p:txBody>
-      </p:sp>
-      <p:sp>
-        <p:nvSpPr>
-          <p:cNvPr id="18" name="Shape 16"/>
           <p:cNvSpPr/>
           <p:nvPr/>
         </p:nvSpPr>
@@ -12904,7 +12467,7 @@
       </p:sp>
       <p:sp>
         <p:nvSpPr>
-          <p:cNvPr id="19" name="Text 17"/>
+          <p:cNvPr id="17" name="Text 15"/>
           <p:cNvSpPr/>
           <p:nvPr/>
         </p:nvSpPr>
@@ -12943,7 +12506,7 @@
       </p:sp>
       <p:sp>
         <p:nvSpPr>
-          <p:cNvPr id="20" name="Text 18"/>
+          <p:cNvPr id="18" name="Text 16"/>
           <p:cNvSpPr/>
           <p:nvPr/>
         </p:nvSpPr>
@@ -13456,20 +13019,20 @@
         </p:nvSpPr>
         <p:spPr>
           <a:xfrm>
-            <a:off x="7818120" y="3977640"/>
-            <a:ext cx="972312" cy="749808"/>
+            <a:off x="8046720" y="3794760"/>
+            <a:ext cx="3063240" cy="1600200"/>
           </a:xfrm>
           <a:prstGeom prst="roundRect">
             <a:avLst>
-              <a:gd name="adj" fmla="val 14634"/>
+              <a:gd name="adj" fmla="val 6857"/>
             </a:avLst>
           </a:prstGeom>
           <a:solidFill>
-            <a:srgbClr val="0068B7"/>
+            <a:srgbClr val="FFFFFF"/>
           </a:solidFill>
           <a:ln w="12700">
             <a:solidFill>
-              <a:srgbClr val="0068B7"/>
+              <a:srgbClr val="B9D7E6"/>
             </a:solidFill>
             <a:prstDash val="solid"/>
           </a:ln>
@@ -13483,172 +13046,100 @@
         </p:nvSpPr>
         <p:spPr>
           <a:xfrm>
-            <a:off x="7891272" y="4169664"/>
-            <a:ext cx="826008" cy="310896"/>
-          </a:xfrm>
-          <a:prstGeom prst="rect">
-            <a:avLst/>
-          </a:prstGeom>
-          <a:noFill/>
-          <a:ln/>
-        </p:spPr>
-        <p:txBody>
-          <a:bodyPr wrap="square" lIns="0" tIns="0" rIns="0" bIns="0" rtlCol="0" anchor="ctr">
+            <a:off x="8211312" y="3941064"/>
+            <a:ext cx="2734056" cy="256032"/>
+          </a:xfrm>
+          <a:prstGeom prst="rect">
+            <a:avLst/>
+          </a:prstGeom>
+          <a:noFill/>
+          <a:ln/>
+        </p:spPr>
+        <p:txBody>
+          <a:bodyPr wrap="square" lIns="0" tIns="0" rIns="0" bIns="0" rtlCol="0" anchor="ctr"/>
+          <a:lstStyle/>
+          <a:p>
+            <a:pPr indent="0" marL="0">
+              <a:buNone/>
+            </a:pPr>
+            <a:r>
+              <a:rPr lang="en-US" sz="1300" b="1" dirty="0">
+                <a:solidFill>
+                  <a:srgbClr val="0068B7"/>
+                </a:solidFill>
+                <a:latin typeface="Aptos" pitchFamily="34" charset="0"/>
+                <a:ea typeface="Aptos" pitchFamily="34" charset="-122"/>
+                <a:cs typeface="Aptos" pitchFamily="34" charset="-120"/>
+              </a:rPr>
+              <a:t>Use the play links to</a:t>
+            </a:r>
+            <a:endParaRPr lang="en-US" sz="1300" dirty="0"/>
+          </a:p>
+        </p:txBody>
+      </p:sp>
+      <p:sp>
+        <p:nvSpPr>
+          <p:cNvPr id="15" name="Text 13"/>
+          <p:cNvSpPr/>
+          <p:nvPr/>
+        </p:nvSpPr>
+        <p:spPr>
+          <a:xfrm>
+            <a:off x="8229600" y="4306824"/>
+            <a:ext cx="2679192" cy="941832"/>
+          </a:xfrm>
+          <a:prstGeom prst="rect">
+            <a:avLst/>
+          </a:prstGeom>
+          <a:noFill/>
+          <a:ln/>
+        </p:spPr>
+        <p:txBody>
+          <a:bodyPr wrap="square" lIns="254" tIns="254" rIns="254" bIns="254" rtlCol="0" anchor="t">
             <a:normAutofit/>
           </a:bodyPr>
           <a:lstStyle/>
           <a:p>
-            <a:pPr algn="ctr" indent="0" marL="0">
-              <a:buNone/>
-            </a:pPr>
-            <a:r>
-              <a:rPr lang="en-US" sz="1500" b="1" dirty="0">
-                <a:solidFill>
-                  <a:srgbClr val="FFFFFF"/>
-                </a:solidFill>
-                <a:latin typeface="Aptos" pitchFamily="34" charset="0"/>
-                <a:ea typeface="Aptos" pitchFamily="34" charset="-122"/>
-                <a:cs typeface="Aptos" pitchFamily="34" charset="-120"/>
-              </a:rPr>
-              <a:t>Lesson</a:t>
-            </a:r>
-            <a:endParaRPr lang="en-US" sz="1500" dirty="0"/>
-          </a:p>
-        </p:txBody>
-      </p:sp>
-      <p:sp>
-        <p:nvSpPr>
-          <p:cNvPr id="15" name="Shape 13"/>
-          <p:cNvSpPr/>
-          <p:nvPr/>
-        </p:nvSpPr>
-        <p:spPr>
-          <a:xfrm>
-            <a:off x="9046464" y="3977640"/>
-            <a:ext cx="972312" cy="749808"/>
-          </a:xfrm>
-          <a:prstGeom prst="roundRect">
-            <a:avLst>
-              <a:gd name="adj" fmla="val 14634"/>
-            </a:avLst>
-          </a:prstGeom>
-          <a:solidFill>
-            <a:srgbClr val="2F8A28"/>
-          </a:solidFill>
-          <a:ln w="12700">
-            <a:solidFill>
-              <a:srgbClr val="2F8A28"/>
-            </a:solidFill>
-            <a:prstDash val="solid"/>
-          </a:ln>
-        </p:spPr>
-      </p:sp>
-      <p:sp>
-        <p:nvSpPr>
-          <p:cNvPr id="16" name="Text 14"/>
-          <p:cNvSpPr/>
-          <p:nvPr/>
-        </p:nvSpPr>
-        <p:spPr>
-          <a:xfrm>
-            <a:off x="9119616" y="4169664"/>
-            <a:ext cx="826008" cy="310896"/>
-          </a:xfrm>
-          <a:prstGeom prst="rect">
-            <a:avLst/>
-          </a:prstGeom>
-          <a:noFill/>
-          <a:ln/>
-        </p:spPr>
-        <p:txBody>
-          <a:bodyPr wrap="square" lIns="0" tIns="0" rIns="0" bIns="0" rtlCol="0" anchor="ctr">
-            <a:normAutofit/>
-          </a:bodyPr>
-          <a:lstStyle/>
-          <a:p>
-            <a:pPr algn="ctr" indent="0" marL="0">
-              <a:buNone/>
-            </a:pPr>
-            <a:r>
-              <a:rPr lang="en-US" sz="1500" b="1" dirty="0">
-                <a:solidFill>
-                  <a:srgbClr val="FFFFFF"/>
-                </a:solidFill>
-                <a:latin typeface="Aptos" pitchFamily="34" charset="0"/>
-                <a:ea typeface="Aptos" pitchFamily="34" charset="-122"/>
-                <a:cs typeface="Aptos" pitchFamily="34" charset="-120"/>
-              </a:rPr>
-              <a:t>Plays</a:t>
-            </a:r>
-            <a:endParaRPr lang="en-US" sz="1500" dirty="0"/>
-          </a:p>
-        </p:txBody>
-      </p:sp>
-      <p:sp>
-        <p:nvSpPr>
-          <p:cNvPr id="17" name="Shape 15"/>
-          <p:cNvSpPr/>
-          <p:nvPr/>
-        </p:nvSpPr>
-        <p:spPr>
-          <a:xfrm>
-            <a:off x="10274808" y="3977640"/>
-            <a:ext cx="972312" cy="749808"/>
-          </a:xfrm>
-          <a:prstGeom prst="roundRect">
-            <a:avLst>
-              <a:gd name="adj" fmla="val 14634"/>
-            </a:avLst>
-          </a:prstGeom>
-          <a:solidFill>
-            <a:srgbClr val="6A4CA3"/>
-          </a:solidFill>
-          <a:ln w="12700">
-            <a:solidFill>
-              <a:srgbClr val="6A4CA3"/>
-            </a:solidFill>
-            <a:prstDash val="solid"/>
-          </a:ln>
-        </p:spPr>
-      </p:sp>
-      <p:sp>
-        <p:nvSpPr>
-          <p:cNvPr id="18" name="Text 16"/>
-          <p:cNvSpPr/>
-          <p:nvPr/>
-        </p:nvSpPr>
-        <p:spPr>
-          <a:xfrm>
-            <a:off x="10347960" y="4169664"/>
-            <a:ext cx="826008" cy="310896"/>
-          </a:xfrm>
-          <a:prstGeom prst="rect">
-            <a:avLst/>
-          </a:prstGeom>
-          <a:noFill/>
-          <a:ln/>
-        </p:spPr>
-        <p:txBody>
-          <a:bodyPr wrap="square" lIns="0" tIns="0" rIns="0" bIns="0" rtlCol="0" anchor="ctr">
-            <a:normAutofit/>
-          </a:bodyPr>
-          <a:lstStyle/>
-          <a:p>
-            <a:pPr algn="ctr" indent="0" marL="0">
-              <a:buNone/>
-            </a:pPr>
-            <a:r>
-              <a:rPr lang="en-US" sz="1500" b="1" dirty="0">
-                <a:solidFill>
-                  <a:srgbClr val="FFFFFF"/>
-                </a:solidFill>
-                <a:latin typeface="Aptos" pitchFamily="34" charset="0"/>
-                <a:ea typeface="Aptos" pitchFamily="34" charset="-122"/>
-                <a:cs typeface="Aptos" pitchFamily="34" charset="-120"/>
-              </a:rPr>
-              <a:t>Action</a:t>
-            </a:r>
-            <a:endParaRPr lang="en-US" sz="1500" dirty="0"/>
+            <a:r>
+              <a:rPr lang="en-US" sz="1380" dirty="0">
+                <a:solidFill>
+                  <a:srgbClr val="17364A"/>
+                </a:solidFill>
+                <a:latin typeface="Aptos" pitchFamily="34" charset="0"/>
+                <a:ea typeface="Aptos" pitchFamily="34" charset="-122"/>
+                <a:cs typeface="Aptos" pitchFamily="34" charset="-120"/>
+              </a:rPr>
+              <a:t>Locate the decision point in the playbook sequence.</a:t>
+            </a:r>
+            <a:endParaRPr lang="en-US" sz="1380" dirty="0"/>
+          </a:p>
+          <a:p>
+            <a:r>
+              <a:rPr lang="en-US" sz="1380" dirty="0">
+                <a:solidFill>
+                  <a:srgbClr val="17364A"/>
+                </a:solidFill>
+                <a:latin typeface="Aptos" pitchFamily="34" charset="0"/>
+                <a:ea typeface="Aptos" pitchFamily="34" charset="-122"/>
+                <a:cs typeface="Aptos" pitchFamily="34" charset="-120"/>
+              </a:rPr>
+              <a:t>Identify who should participate in the work.</a:t>
+            </a:r>
+            <a:endParaRPr lang="en-US" sz="1380" dirty="0"/>
+          </a:p>
+          <a:p>
+            <a:r>
+              <a:rPr lang="en-US" sz="1380" dirty="0">
+                <a:solidFill>
+                  <a:srgbClr val="17364A"/>
+                </a:solidFill>
+                <a:latin typeface="Aptos" pitchFamily="34" charset="0"/>
+                <a:ea typeface="Aptos" pitchFamily="34" charset="-122"/>
+                <a:cs typeface="Aptos" pitchFamily="34" charset="-120"/>
+              </a:rPr>
+              <a:t>Document the review, approval, or implementation step.</a:t>
+            </a:r>
+            <a:endParaRPr lang="en-US" sz="1380" dirty="0"/>
           </a:p>
         </p:txBody>
       </p:sp>
@@ -14126,20 +13617,20 @@
         </p:nvSpPr>
         <p:spPr>
           <a:xfrm>
-            <a:off x="7818120" y="3977640"/>
-            <a:ext cx="972312" cy="749808"/>
+            <a:off x="8046720" y="3794760"/>
+            <a:ext cx="3063240" cy="1600200"/>
           </a:xfrm>
           <a:prstGeom prst="roundRect">
             <a:avLst>
-              <a:gd name="adj" fmla="val 14634"/>
+              <a:gd name="adj" fmla="val 6857"/>
             </a:avLst>
           </a:prstGeom>
           <a:solidFill>
-            <a:srgbClr val="0068B7"/>
+            <a:srgbClr val="FFFFFF"/>
           </a:solidFill>
           <a:ln w="12700">
             <a:solidFill>
-              <a:srgbClr val="0068B7"/>
+              <a:srgbClr val="B9D7E6"/>
             </a:solidFill>
             <a:prstDash val="solid"/>
           </a:ln>
@@ -14153,172 +13644,100 @@
         </p:nvSpPr>
         <p:spPr>
           <a:xfrm>
-            <a:off x="7891272" y="4169664"/>
-            <a:ext cx="826008" cy="310896"/>
-          </a:xfrm>
-          <a:prstGeom prst="rect">
-            <a:avLst/>
-          </a:prstGeom>
-          <a:noFill/>
-          <a:ln/>
-        </p:spPr>
-        <p:txBody>
-          <a:bodyPr wrap="square" lIns="0" tIns="0" rIns="0" bIns="0" rtlCol="0" anchor="ctr">
+            <a:off x="8211312" y="3941064"/>
+            <a:ext cx="2734056" cy="256032"/>
+          </a:xfrm>
+          <a:prstGeom prst="rect">
+            <a:avLst/>
+          </a:prstGeom>
+          <a:noFill/>
+          <a:ln/>
+        </p:spPr>
+        <p:txBody>
+          <a:bodyPr wrap="square" lIns="0" tIns="0" rIns="0" bIns="0" rtlCol="0" anchor="ctr"/>
+          <a:lstStyle/>
+          <a:p>
+            <a:pPr indent="0" marL="0">
+              <a:buNone/>
+            </a:pPr>
+            <a:r>
+              <a:rPr lang="en-US" sz="1300" b="1" dirty="0">
+                <a:solidFill>
+                  <a:srgbClr val="0068B7"/>
+                </a:solidFill>
+                <a:latin typeface="Aptos" pitchFamily="34" charset="0"/>
+                <a:ea typeface="Aptos" pitchFamily="34" charset="-122"/>
+                <a:cs typeface="Aptos" pitchFamily="34" charset="-120"/>
+              </a:rPr>
+              <a:t>Tool selection cues</a:t>
+            </a:r>
+            <a:endParaRPr lang="en-US" sz="1300" dirty="0"/>
+          </a:p>
+        </p:txBody>
+      </p:sp>
+      <p:sp>
+        <p:nvSpPr>
+          <p:cNvPr id="15" name="Text 13"/>
+          <p:cNvSpPr/>
+          <p:nvPr/>
+        </p:nvSpPr>
+        <p:spPr>
+          <a:xfrm>
+            <a:off x="8229600" y="4306824"/>
+            <a:ext cx="2679192" cy="941832"/>
+          </a:xfrm>
+          <a:prstGeom prst="rect">
+            <a:avLst/>
+          </a:prstGeom>
+          <a:noFill/>
+          <a:ln/>
+        </p:spPr>
+        <p:txBody>
+          <a:bodyPr wrap="square" lIns="254" tIns="254" rIns="254" bIns="254" rtlCol="0" anchor="t">
             <a:normAutofit/>
           </a:bodyPr>
           <a:lstStyle/>
           <a:p>
-            <a:pPr algn="ctr" indent="0" marL="0">
-              <a:buNone/>
-            </a:pPr>
-            <a:r>
-              <a:rPr lang="en-US" sz="1500" b="1" dirty="0">
-                <a:solidFill>
-                  <a:srgbClr val="FFFFFF"/>
-                </a:solidFill>
-                <a:latin typeface="Aptos" pitchFamily="34" charset="0"/>
-                <a:ea typeface="Aptos" pitchFamily="34" charset="-122"/>
-                <a:cs typeface="Aptos" pitchFamily="34" charset="-120"/>
-              </a:rPr>
-              <a:t>Concept</a:t>
-            </a:r>
-            <a:endParaRPr lang="en-US" sz="1500" dirty="0"/>
-          </a:p>
-        </p:txBody>
-      </p:sp>
-      <p:sp>
-        <p:nvSpPr>
-          <p:cNvPr id="15" name="Shape 13"/>
-          <p:cNvSpPr/>
-          <p:nvPr/>
-        </p:nvSpPr>
-        <p:spPr>
-          <a:xfrm>
-            <a:off x="9046464" y="3977640"/>
-            <a:ext cx="972312" cy="749808"/>
-          </a:xfrm>
-          <a:prstGeom prst="roundRect">
-            <a:avLst>
-              <a:gd name="adj" fmla="val 14634"/>
-            </a:avLst>
-          </a:prstGeom>
-          <a:solidFill>
-            <a:srgbClr val="2F8A28"/>
-          </a:solidFill>
-          <a:ln w="12700">
-            <a:solidFill>
-              <a:srgbClr val="2F8A28"/>
-            </a:solidFill>
-            <a:prstDash val="solid"/>
-          </a:ln>
-        </p:spPr>
-      </p:sp>
-      <p:sp>
-        <p:nvSpPr>
-          <p:cNvPr id="16" name="Text 14"/>
-          <p:cNvSpPr/>
-          <p:nvPr/>
-        </p:nvSpPr>
-        <p:spPr>
-          <a:xfrm>
-            <a:off x="9119616" y="4169664"/>
-            <a:ext cx="826008" cy="310896"/>
-          </a:xfrm>
-          <a:prstGeom prst="rect">
-            <a:avLst/>
-          </a:prstGeom>
-          <a:noFill/>
-          <a:ln/>
-        </p:spPr>
-        <p:txBody>
-          <a:bodyPr wrap="square" lIns="0" tIns="0" rIns="0" bIns="0" rtlCol="0" anchor="ctr">
-            <a:normAutofit/>
-          </a:bodyPr>
-          <a:lstStyle/>
-          <a:p>
-            <a:pPr algn="ctr" indent="0" marL="0">
-              <a:buNone/>
-            </a:pPr>
-            <a:r>
-              <a:rPr lang="en-US" sz="1500" b="1" dirty="0">
-                <a:solidFill>
-                  <a:srgbClr val="FFFFFF"/>
-                </a:solidFill>
-                <a:latin typeface="Aptos" pitchFamily="34" charset="0"/>
-                <a:ea typeface="Aptos" pitchFamily="34" charset="-122"/>
-                <a:cs typeface="Aptos" pitchFamily="34" charset="-120"/>
-              </a:rPr>
-              <a:t>Tool</a:t>
-            </a:r>
-            <a:endParaRPr lang="en-US" sz="1500" dirty="0"/>
-          </a:p>
-        </p:txBody>
-      </p:sp>
-      <p:sp>
-        <p:nvSpPr>
-          <p:cNvPr id="17" name="Shape 15"/>
-          <p:cNvSpPr/>
-          <p:nvPr/>
-        </p:nvSpPr>
-        <p:spPr>
-          <a:xfrm>
-            <a:off x="10274808" y="3977640"/>
-            <a:ext cx="972312" cy="749808"/>
-          </a:xfrm>
-          <a:prstGeom prst="roundRect">
-            <a:avLst>
-              <a:gd name="adj" fmla="val 14634"/>
-            </a:avLst>
-          </a:prstGeom>
-          <a:solidFill>
-            <a:srgbClr val="D69A2D"/>
-          </a:solidFill>
-          <a:ln w="12700">
-            <a:solidFill>
-              <a:srgbClr val="D69A2D"/>
-            </a:solidFill>
-            <a:prstDash val="solid"/>
-          </a:ln>
-        </p:spPr>
-      </p:sp>
-      <p:sp>
-        <p:nvSpPr>
-          <p:cNvPr id="18" name="Text 16"/>
-          <p:cNvSpPr/>
-          <p:nvPr/>
-        </p:nvSpPr>
-        <p:spPr>
-          <a:xfrm>
-            <a:off x="10347960" y="4169664"/>
-            <a:ext cx="826008" cy="310896"/>
-          </a:xfrm>
-          <a:prstGeom prst="rect">
-            <a:avLst/>
-          </a:prstGeom>
-          <a:noFill/>
-          <a:ln/>
-        </p:spPr>
-        <p:txBody>
-          <a:bodyPr wrap="square" lIns="0" tIns="0" rIns="0" bIns="0" rtlCol="0" anchor="ctr">
-            <a:normAutofit/>
-          </a:bodyPr>
-          <a:lstStyle/>
-          <a:p>
-            <a:pPr algn="ctr" indent="0" marL="0">
-              <a:buNone/>
-            </a:pPr>
-            <a:r>
-              <a:rPr lang="en-US" sz="1500" b="1" dirty="0">
-                <a:solidFill>
-                  <a:srgbClr val="FFFFFF"/>
-                </a:solidFill>
-                <a:latin typeface="Aptos" pitchFamily="34" charset="0"/>
-                <a:ea typeface="Aptos" pitchFamily="34" charset="-122"/>
-                <a:cs typeface="Aptos" pitchFamily="34" charset="-120"/>
-              </a:rPr>
-              <a:t>Artifact</a:t>
-            </a:r>
-            <a:endParaRPr lang="en-US" sz="1500" dirty="0"/>
+            <a:r>
+              <a:rPr lang="en-US" sz="1380" dirty="0">
+                <a:solidFill>
+                  <a:srgbClr val="17364A"/>
+                </a:solidFill>
+                <a:latin typeface="Aptos" pitchFamily="34" charset="0"/>
+                <a:ea typeface="Aptos" pitchFamily="34" charset="-122"/>
+                <a:cs typeface="Aptos" pitchFamily="34" charset="-120"/>
+              </a:rPr>
+              <a:t>Use a tool when no comparable local process exists.</a:t>
+            </a:r>
+            <a:endParaRPr lang="en-US" sz="1380" dirty="0"/>
+          </a:p>
+          <a:p>
+            <a:r>
+              <a:rPr lang="en-US" sz="1380" dirty="0">
+                <a:solidFill>
+                  <a:srgbClr val="17364A"/>
+                </a:solidFill>
+                <a:latin typeface="Aptos" pitchFamily="34" charset="0"/>
+                <a:ea typeface="Aptos" pitchFamily="34" charset="-122"/>
+                <a:cs typeface="Aptos" pitchFamily="34" charset="-120"/>
+              </a:rPr>
+              <a:t>Adapt existing department templates when they already fit the purpose.</a:t>
+            </a:r>
+            <a:endParaRPr lang="en-US" sz="1380" dirty="0"/>
+          </a:p>
+          <a:p>
+            <a:r>
+              <a:rPr lang="en-US" sz="1380" dirty="0">
+                <a:solidFill>
+                  <a:srgbClr val="17364A"/>
+                </a:solidFill>
+                <a:latin typeface="Aptos" pitchFamily="34" charset="0"/>
+                <a:ea typeface="Aptos" pitchFamily="34" charset="-122"/>
+                <a:cs typeface="Aptos" pitchFamily="34" charset="-120"/>
+              </a:rPr>
+              <a:t>Save the completed artifact as evidence of the decision.</a:t>
+            </a:r>
+            <a:endParaRPr lang="en-US" sz="1380" dirty="0"/>
           </a:p>
         </p:txBody>
       </p:sp>
@@ -14791,13 +14210,11 @@
             </a:avLst>
           </a:prstGeom>
           <a:solidFill>
-            <a:srgbClr val="FFFFFF">
-              <a:alpha val="88000"/>
-            </a:srgbClr>
+            <a:srgbClr val="FFFFFF"/>
           </a:solidFill>
           <a:ln w="12700">
             <a:solidFill>
-              <a:srgbClr val="D6E8F2"/>
+              <a:srgbClr val="B9D7E6"/>
             </a:solidFill>
             <a:prstDash val="solid"/>
           </a:ln>
@@ -14805,119 +14222,112 @@
       </p:sp>
       <p:sp>
         <p:nvSpPr>
-          <p:cNvPr id="14" name="Shape 12"/>
-          <p:cNvSpPr/>
-          <p:nvPr/>
-        </p:nvSpPr>
-        <p:spPr>
-          <a:xfrm>
-            <a:off x="8074152" y="3291840"/>
-            <a:ext cx="2596896" cy="749808"/>
-          </a:xfrm>
-          <a:prstGeom prst="rect">
-            <a:avLst/>
-          </a:prstGeom>
-          <a:solidFill>
-            <a:srgbClr val="EAF6F8"/>
-          </a:solidFill>
-          <a:ln w="12700">
-            <a:solidFill>
-              <a:srgbClr val="8ABBD8"/>
-            </a:solidFill>
-            <a:prstDash val="solid"/>
-          </a:ln>
-        </p:spPr>
-      </p:sp>
-      <p:sp>
-        <p:nvSpPr>
-          <p:cNvPr id="15" name="Shape 13"/>
-          <p:cNvSpPr/>
-          <p:nvPr/>
-        </p:nvSpPr>
-        <p:spPr>
-          <a:xfrm>
-            <a:off x="8202168" y="3721608"/>
-            <a:ext cx="2340864" cy="0"/>
-          </a:xfrm>
-          <a:prstGeom prst="line">
-            <a:avLst/>
-          </a:prstGeom>
-          <a:noFill/>
-          <a:ln w="19050">
-            <a:solidFill>
-              <a:srgbClr val="0068B7"/>
-            </a:solidFill>
-            <a:prstDash val="solid"/>
-          </a:ln>
-        </p:spPr>
+          <p:cNvPr id="14" name="Text 12"/>
+          <p:cNvSpPr/>
+          <p:nvPr/>
+        </p:nvSpPr>
+        <p:spPr>
+          <a:xfrm>
+            <a:off x="7799832" y="2935224"/>
+            <a:ext cx="3145536" cy="256032"/>
+          </a:xfrm>
+          <a:prstGeom prst="rect">
+            <a:avLst/>
+          </a:prstGeom>
+          <a:noFill/>
+          <a:ln/>
+        </p:spPr>
+        <p:txBody>
+          <a:bodyPr wrap="square" lIns="0" tIns="0" rIns="0" bIns="0" rtlCol="0" anchor="ctr"/>
+          <a:lstStyle/>
+          <a:p>
+            <a:pPr indent="0" marL="0">
+              <a:buNone/>
+            </a:pPr>
+            <a:r>
+              <a:rPr lang="en-US" sz="1300" b="1" dirty="0">
+                <a:solidFill>
+                  <a:srgbClr val="0068B7"/>
+                </a:solidFill>
+                <a:latin typeface="Aptos" pitchFamily="34" charset="0"/>
+                <a:ea typeface="Aptos" pitchFamily="34" charset="-122"/>
+                <a:cs typeface="Aptos" pitchFamily="34" charset="-120"/>
+              </a:rPr>
+              <a:t>Concept checkpoints</a:t>
+            </a:r>
+            <a:endParaRPr lang="en-US" sz="1300" dirty="0"/>
+          </a:p>
+        </p:txBody>
+      </p:sp>
+      <p:sp>
+        <p:nvSpPr>
+          <p:cNvPr id="15" name="Text 13"/>
+          <p:cNvSpPr/>
+          <p:nvPr/>
+        </p:nvSpPr>
+        <p:spPr>
+          <a:xfrm>
+            <a:off x="7818120" y="3300984"/>
+            <a:ext cx="3090672" cy="877824"/>
+          </a:xfrm>
+          <a:prstGeom prst="rect">
+            <a:avLst/>
+          </a:prstGeom>
+          <a:noFill/>
+          <a:ln/>
+        </p:spPr>
+        <p:txBody>
+          <a:bodyPr wrap="square" lIns="254" tIns="254" rIns="254" bIns="254" rtlCol="0" anchor="t">
+            <a:normAutofit/>
+          </a:bodyPr>
+          <a:lstStyle/>
+          <a:p>
+            <a:r>
+              <a:rPr lang="en-US" sz="1380" dirty="0">
+                <a:solidFill>
+                  <a:srgbClr val="17364A"/>
+                </a:solidFill>
+                <a:latin typeface="Aptos" pitchFamily="34" charset="0"/>
+                <a:ea typeface="Aptos" pitchFamily="34" charset="-122"/>
+                <a:cs typeface="Aptos" pitchFamily="34" charset="-120"/>
+              </a:rPr>
+              <a:t>Describe the major components of a RAG system, including document ingestion, chunking,.</a:t>
+            </a:r>
+            <a:endParaRPr lang="en-US" sz="1380" dirty="0"/>
+          </a:p>
+          <a:p>
+            <a:r>
+              <a:rPr lang="en-US" sz="1380" dirty="0">
+                <a:solidFill>
+                  <a:srgbClr val="17364A"/>
+                </a:solidFill>
+                <a:latin typeface="Aptos" pitchFamily="34" charset="0"/>
+                <a:ea typeface="Aptos" pitchFamily="34" charset="-122"/>
+                <a:cs typeface="Aptos" pitchFamily="34" charset="-120"/>
+              </a:rPr>
+              <a:t>Assess risks related to stale content, access control, retrieval quality, hallucination,.</a:t>
+            </a:r>
+            <a:endParaRPr lang="en-US" sz="1380" dirty="0"/>
+          </a:p>
+          <a:p>
+            <a:r>
+              <a:rPr lang="en-US" sz="1380" dirty="0">
+                <a:solidFill>
+                  <a:srgbClr val="17364A"/>
+                </a:solidFill>
+                <a:latin typeface="Aptos" pitchFamily="34" charset="0"/>
+                <a:ea typeface="Aptos" pitchFamily="34" charset="-122"/>
+                <a:cs typeface="Aptos" pitchFamily="34" charset="-120"/>
+              </a:rPr>
+              <a:t>Design governance and monitoring requirements for agency RAG systems.</a:t>
+            </a:r>
+            <a:endParaRPr lang="en-US" sz="1380" dirty="0"/>
+          </a:p>
+        </p:txBody>
       </p:sp>
       <p:sp>
         <p:nvSpPr>
           <p:cNvPr id="16" name="Shape 14"/>
-          <p:cNvSpPr/>
-          <p:nvPr/>
-        </p:nvSpPr>
-        <p:spPr>
-          <a:xfrm>
-            <a:off x="9198864" y="4206240"/>
-            <a:ext cx="347472" cy="347472"/>
-          </a:xfrm>
-          <a:prstGeom prst="ellipse">
-            <a:avLst/>
-          </a:prstGeom>
-          <a:solidFill>
-            <a:srgbClr val="2F8A28"/>
-          </a:solidFill>
-          <a:ln w="12700">
-            <a:solidFill>
-              <a:srgbClr val="2F8A28"/>
-            </a:solidFill>
-            <a:prstDash val="solid"/>
-          </a:ln>
-        </p:spPr>
-      </p:sp>
-      <p:sp>
-        <p:nvSpPr>
-          <p:cNvPr id="17" name="Text 15"/>
-          <p:cNvSpPr/>
-          <p:nvPr/>
-        </p:nvSpPr>
-        <p:spPr>
-          <a:xfrm>
-            <a:off x="7909560" y="3977640"/>
-            <a:ext cx="2926080" cy="182880"/>
-          </a:xfrm>
-          <a:prstGeom prst="rect">
-            <a:avLst/>
-          </a:prstGeom>
-          <a:noFill/>
-          <a:ln/>
-        </p:spPr>
-        <p:txBody>
-          <a:bodyPr wrap="square" lIns="0" tIns="0" rIns="0" bIns="0" rtlCol="0" anchor="ctr"/>
-          <a:lstStyle/>
-          <a:p>
-            <a:pPr algn="ctr" indent="0" marL="0">
-              <a:buNone/>
-            </a:pPr>
-            <a:r>
-              <a:rPr lang="en-US" sz="1000" dirty="0">
-                <a:solidFill>
-                  <a:srgbClr val="003A63"/>
-                </a:solidFill>
-                <a:latin typeface="Aptos" pitchFamily="34" charset="0"/>
-                <a:ea typeface="Aptos" pitchFamily="34" charset="-122"/>
-                <a:cs typeface="Aptos" pitchFamily="34" charset="-120"/>
-              </a:rPr>
-              <a:t>Concept to action</a:t>
-            </a:r>
-            <a:endParaRPr lang="en-US" sz="1000" dirty="0"/>
-          </a:p>
-        </p:txBody>
-      </p:sp>
-      <p:sp>
-        <p:nvSpPr>
-          <p:cNvPr id="18" name="Shape 16"/>
           <p:cNvSpPr/>
           <p:nvPr/>
         </p:nvSpPr>
@@ -14944,7 +14354,7 @@
       </p:sp>
       <p:sp>
         <p:nvSpPr>
-          <p:cNvPr id="19" name="Text 17"/>
+          <p:cNvPr id="17" name="Text 15"/>
           <p:cNvSpPr/>
           <p:nvPr/>
         </p:nvSpPr>
@@ -14983,7 +14393,7 @@
       </p:sp>
       <p:sp>
         <p:nvSpPr>
-          <p:cNvPr id="20" name="Text 18"/>
+          <p:cNvPr id="18" name="Text 16"/>
           <p:cNvSpPr/>
           <p:nvPr/>
         </p:nvSpPr>
@@ -15463,13 +14873,11 @@
             </a:avLst>
           </a:prstGeom>
           <a:solidFill>
-            <a:srgbClr val="FFFFFF">
-              <a:alpha val="88000"/>
-            </a:srgbClr>
+            <a:srgbClr val="FFFFFF"/>
           </a:solidFill>
           <a:ln w="12700">
             <a:solidFill>
-              <a:srgbClr val="D6E8F2"/>
+              <a:srgbClr val="B9D7E6"/>
             </a:solidFill>
             <a:prstDash val="solid"/>
           </a:ln>
@@ -15477,119 +14885,84 @@
       </p:sp>
       <p:sp>
         <p:nvSpPr>
-          <p:cNvPr id="14" name="Shape 12"/>
-          <p:cNvSpPr/>
-          <p:nvPr/>
-        </p:nvSpPr>
-        <p:spPr>
-          <a:xfrm>
-            <a:off x="8074152" y="3291840"/>
-            <a:ext cx="2596896" cy="749808"/>
-          </a:xfrm>
-          <a:prstGeom prst="rect">
-            <a:avLst/>
-          </a:prstGeom>
-          <a:solidFill>
-            <a:srgbClr val="EAF6F8"/>
-          </a:solidFill>
-          <a:ln w="12700">
-            <a:solidFill>
-              <a:srgbClr val="8ABBD8"/>
-            </a:solidFill>
-            <a:prstDash val="solid"/>
-          </a:ln>
-        </p:spPr>
-      </p:sp>
-      <p:sp>
-        <p:nvSpPr>
-          <p:cNvPr id="15" name="Shape 13"/>
-          <p:cNvSpPr/>
-          <p:nvPr/>
-        </p:nvSpPr>
-        <p:spPr>
-          <a:xfrm>
-            <a:off x="8202168" y="3721608"/>
-            <a:ext cx="2340864" cy="0"/>
-          </a:xfrm>
-          <a:prstGeom prst="line">
-            <a:avLst/>
-          </a:prstGeom>
-          <a:noFill/>
-          <a:ln w="19050">
-            <a:solidFill>
-              <a:srgbClr val="0068B7"/>
-            </a:solidFill>
-            <a:prstDash val="solid"/>
-          </a:ln>
-        </p:spPr>
+          <p:cNvPr id="14" name="Text 12"/>
+          <p:cNvSpPr/>
+          <p:nvPr/>
+        </p:nvSpPr>
+        <p:spPr>
+          <a:xfrm>
+            <a:off x="7799832" y="2935224"/>
+            <a:ext cx="3145536" cy="256032"/>
+          </a:xfrm>
+          <a:prstGeom prst="rect">
+            <a:avLst/>
+          </a:prstGeom>
+          <a:noFill/>
+          <a:ln/>
+        </p:spPr>
+        <p:txBody>
+          <a:bodyPr wrap="square" lIns="0" tIns="0" rIns="0" bIns="0" rtlCol="0" anchor="ctr"/>
+          <a:lstStyle/>
+          <a:p>
+            <a:pPr indent="0" marL="0">
+              <a:buNone/>
+            </a:pPr>
+            <a:r>
+              <a:rPr lang="en-US" sz="1300" b="1" dirty="0">
+                <a:solidFill>
+                  <a:srgbClr val="0068B7"/>
+                </a:solidFill>
+                <a:latin typeface="Aptos" pitchFamily="34" charset="0"/>
+                <a:ea typeface="Aptos" pitchFamily="34" charset="-122"/>
+                <a:cs typeface="Aptos" pitchFamily="34" charset="-120"/>
+              </a:rPr>
+              <a:t>Concept checkpoints</a:t>
+            </a:r>
+            <a:endParaRPr lang="en-US" sz="1300" dirty="0"/>
+          </a:p>
+        </p:txBody>
+      </p:sp>
+      <p:sp>
+        <p:nvSpPr>
+          <p:cNvPr id="15" name="Text 13"/>
+          <p:cNvSpPr/>
+          <p:nvPr/>
+        </p:nvSpPr>
+        <p:spPr>
+          <a:xfrm>
+            <a:off x="7818120" y="3300984"/>
+            <a:ext cx="3090672" cy="877824"/>
+          </a:xfrm>
+          <a:prstGeom prst="rect">
+            <a:avLst/>
+          </a:prstGeom>
+          <a:noFill/>
+          <a:ln/>
+        </p:spPr>
+        <p:txBody>
+          <a:bodyPr wrap="square" lIns="254" tIns="254" rIns="254" bIns="254" rtlCol="0" anchor="t">
+            <a:normAutofit/>
+          </a:bodyPr>
+          <a:lstStyle/>
+          <a:p>
+            <a:r>
+              <a:rPr lang="en-US" sz="1380" dirty="0">
+                <a:solidFill>
+                  <a:srgbClr val="17364A"/>
+                </a:solidFill>
+                <a:latin typeface="Aptos" pitchFamily="34" charset="0"/>
+                <a:ea typeface="Aptos" pitchFamily="34" charset="-122"/>
+                <a:cs typeface="Aptos" pitchFamily="34" charset="-120"/>
+              </a:rPr>
+              <a:t>Produce a RAG readiness checklist for a public health knowledge workflow.</a:t>
+            </a:r>
+            <a:endParaRPr lang="en-US" sz="1380" dirty="0"/>
+          </a:p>
+        </p:txBody>
       </p:sp>
       <p:sp>
         <p:nvSpPr>
           <p:cNvPr id="16" name="Shape 14"/>
-          <p:cNvSpPr/>
-          <p:nvPr/>
-        </p:nvSpPr>
-        <p:spPr>
-          <a:xfrm>
-            <a:off x="9198864" y="4206240"/>
-            <a:ext cx="347472" cy="347472"/>
-          </a:xfrm>
-          <a:prstGeom prst="ellipse">
-            <a:avLst/>
-          </a:prstGeom>
-          <a:solidFill>
-            <a:srgbClr val="2F8A28"/>
-          </a:solidFill>
-          <a:ln w="12700">
-            <a:solidFill>
-              <a:srgbClr val="2F8A28"/>
-            </a:solidFill>
-            <a:prstDash val="solid"/>
-          </a:ln>
-        </p:spPr>
-      </p:sp>
-      <p:sp>
-        <p:nvSpPr>
-          <p:cNvPr id="17" name="Text 15"/>
-          <p:cNvSpPr/>
-          <p:nvPr/>
-        </p:nvSpPr>
-        <p:spPr>
-          <a:xfrm>
-            <a:off x="7909560" y="3977640"/>
-            <a:ext cx="2926080" cy="182880"/>
-          </a:xfrm>
-          <a:prstGeom prst="rect">
-            <a:avLst/>
-          </a:prstGeom>
-          <a:noFill/>
-          <a:ln/>
-        </p:spPr>
-        <p:txBody>
-          <a:bodyPr wrap="square" lIns="0" tIns="0" rIns="0" bIns="0" rtlCol="0" anchor="ctr"/>
-          <a:lstStyle/>
-          <a:p>
-            <a:pPr algn="ctr" indent="0" marL="0">
-              <a:buNone/>
-            </a:pPr>
-            <a:r>
-              <a:rPr lang="en-US" sz="1000" dirty="0">
-                <a:solidFill>
-                  <a:srgbClr val="003A63"/>
-                </a:solidFill>
-                <a:latin typeface="Aptos" pitchFamily="34" charset="0"/>
-                <a:ea typeface="Aptos" pitchFamily="34" charset="-122"/>
-                <a:cs typeface="Aptos" pitchFamily="34" charset="-120"/>
-              </a:rPr>
-              <a:t>Concept to action</a:t>
-            </a:r>
-            <a:endParaRPr lang="en-US" sz="1000" dirty="0"/>
-          </a:p>
-        </p:txBody>
-      </p:sp>
-      <p:sp>
-        <p:nvSpPr>
-          <p:cNvPr id="18" name="Shape 16"/>
           <p:cNvSpPr/>
           <p:nvPr/>
         </p:nvSpPr>
@@ -15616,7 +14989,7 @@
       </p:sp>
       <p:sp>
         <p:nvSpPr>
-          <p:cNvPr id="19" name="Text 17"/>
+          <p:cNvPr id="17" name="Text 15"/>
           <p:cNvSpPr/>
           <p:nvPr/>
         </p:nvSpPr>
@@ -15655,7 +15028,7 @@
       </p:sp>
       <p:sp>
         <p:nvSpPr>
-          <p:cNvPr id="20" name="Text 18"/>
+          <p:cNvPr id="18" name="Text 16"/>
           <p:cNvSpPr/>
           <p:nvPr/>
         </p:nvSpPr>
@@ -16163,13 +15536,11 @@
             </a:avLst>
           </a:prstGeom>
           <a:solidFill>
-            <a:srgbClr val="FFFFFF">
-              <a:alpha val="88000"/>
-            </a:srgbClr>
+            <a:srgbClr val="FFFFFF"/>
           </a:solidFill>
           <a:ln w="12700">
             <a:solidFill>
-              <a:srgbClr val="D6E8F2"/>
+              <a:srgbClr val="B9D7E6"/>
             </a:solidFill>
             <a:prstDash val="solid"/>
           </a:ln>
@@ -16177,119 +15548,112 @@
       </p:sp>
       <p:sp>
         <p:nvSpPr>
-          <p:cNvPr id="14" name="Shape 12"/>
-          <p:cNvSpPr/>
-          <p:nvPr/>
-        </p:nvSpPr>
-        <p:spPr>
-          <a:xfrm>
-            <a:off x="8074152" y="3291840"/>
-            <a:ext cx="2596896" cy="749808"/>
-          </a:xfrm>
-          <a:prstGeom prst="rect">
-            <a:avLst/>
-          </a:prstGeom>
-          <a:solidFill>
-            <a:srgbClr val="EAF6F8"/>
-          </a:solidFill>
-          <a:ln w="12700">
-            <a:solidFill>
-              <a:srgbClr val="8ABBD8"/>
-            </a:solidFill>
-            <a:prstDash val="solid"/>
-          </a:ln>
-        </p:spPr>
-      </p:sp>
-      <p:sp>
-        <p:nvSpPr>
-          <p:cNvPr id="15" name="Shape 13"/>
-          <p:cNvSpPr/>
-          <p:nvPr/>
-        </p:nvSpPr>
-        <p:spPr>
-          <a:xfrm>
-            <a:off x="8202168" y="3721608"/>
-            <a:ext cx="2340864" cy="0"/>
-          </a:xfrm>
-          <a:prstGeom prst="line">
-            <a:avLst/>
-          </a:prstGeom>
-          <a:noFill/>
-          <a:ln w="19050">
-            <a:solidFill>
-              <a:srgbClr val="0068B7"/>
-            </a:solidFill>
-            <a:prstDash val="solid"/>
-          </a:ln>
-        </p:spPr>
+          <p:cNvPr id="14" name="Text 12"/>
+          <p:cNvSpPr/>
+          <p:nvPr/>
+        </p:nvSpPr>
+        <p:spPr>
+          <a:xfrm>
+            <a:off x="7799832" y="2935224"/>
+            <a:ext cx="3145536" cy="256032"/>
+          </a:xfrm>
+          <a:prstGeom prst="rect">
+            <a:avLst/>
+          </a:prstGeom>
+          <a:noFill/>
+          <a:ln/>
+        </p:spPr>
+        <p:txBody>
+          <a:bodyPr wrap="square" lIns="0" tIns="0" rIns="0" bIns="0" rtlCol="0" anchor="ctr"/>
+          <a:lstStyle/>
+          <a:p>
+            <a:pPr indent="0" marL="0">
+              <a:buNone/>
+            </a:pPr>
+            <a:r>
+              <a:rPr lang="en-US" sz="1300" b="1" dirty="0">
+                <a:solidFill>
+                  <a:srgbClr val="0068B7"/>
+                </a:solidFill>
+                <a:latin typeface="Aptos" pitchFamily="34" charset="0"/>
+                <a:ea typeface="Aptos" pitchFamily="34" charset="-122"/>
+                <a:cs typeface="Aptos" pitchFamily="34" charset="-120"/>
+              </a:rPr>
+              <a:t>Concept checkpoints</a:t>
+            </a:r>
+            <a:endParaRPr lang="en-US" sz="1300" dirty="0"/>
+          </a:p>
+        </p:txBody>
+      </p:sp>
+      <p:sp>
+        <p:nvSpPr>
+          <p:cNvPr id="15" name="Text 13"/>
+          <p:cNvSpPr/>
+          <p:nvPr/>
+        </p:nvSpPr>
+        <p:spPr>
+          <a:xfrm>
+            <a:off x="7818120" y="3300984"/>
+            <a:ext cx="3090672" cy="877824"/>
+          </a:xfrm>
+          <a:prstGeom prst="rect">
+            <a:avLst/>
+          </a:prstGeom>
+          <a:noFill/>
+          <a:ln/>
+        </p:spPr>
+        <p:txBody>
+          <a:bodyPr wrap="square" lIns="254" tIns="254" rIns="254" bIns="254" rtlCol="0" anchor="t">
+            <a:normAutofit/>
+          </a:bodyPr>
+          <a:lstStyle/>
+          <a:p>
+            <a:r>
+              <a:rPr lang="en-US" sz="1380" dirty="0">
+                <a:solidFill>
+                  <a:srgbClr val="17364A"/>
+                </a:solidFill>
+                <a:latin typeface="Aptos" pitchFamily="34" charset="0"/>
+                <a:ea typeface="Aptos" pitchFamily="34" charset="-122"/>
+                <a:cs typeface="Aptos" pitchFamily="34" charset="-120"/>
+              </a:rPr>
+              <a:t>Retrieval-augmented generation, often called RAG, combines generative AI with retrieval.</a:t>
+            </a:r>
+            <a:endParaRPr lang="en-US" sz="1380" dirty="0"/>
+          </a:p>
+          <a:p>
+            <a:r>
+              <a:rPr lang="en-US" sz="1380" dirty="0">
+                <a:solidFill>
+                  <a:srgbClr val="17364A"/>
+                </a:solidFill>
+                <a:latin typeface="Aptos" pitchFamily="34" charset="0"/>
+                <a:ea typeface="Aptos" pitchFamily="34" charset="-122"/>
+                <a:cs typeface="Aptos" pitchFamily="34" charset="-120"/>
+              </a:rPr>
+              <a:t>Instead of relying only on a model’s general training, a RAG system searches approved.</a:t>
+            </a:r>
+            <a:endParaRPr lang="en-US" sz="1380" dirty="0"/>
+          </a:p>
+          <a:p>
+            <a:r>
+              <a:rPr lang="en-US" sz="1380" dirty="0">
+                <a:solidFill>
+                  <a:srgbClr val="17364A"/>
+                </a:solidFill>
+                <a:latin typeface="Aptos" pitchFamily="34" charset="0"/>
+                <a:ea typeface="Aptos" pitchFamily="34" charset="-122"/>
+                <a:cs typeface="Aptos" pitchFamily="34" charset="-120"/>
+              </a:rPr>
+              <a:t>In public health, RAG may support policy lookup, protocol interpretation, internal help.</a:t>
+            </a:r>
+            <a:endParaRPr lang="en-US" sz="1380" dirty="0"/>
+          </a:p>
+        </p:txBody>
       </p:sp>
       <p:sp>
         <p:nvSpPr>
           <p:cNvPr id="16" name="Shape 14"/>
-          <p:cNvSpPr/>
-          <p:nvPr/>
-        </p:nvSpPr>
-        <p:spPr>
-          <a:xfrm>
-            <a:off x="9198864" y="4206240"/>
-            <a:ext cx="347472" cy="347472"/>
-          </a:xfrm>
-          <a:prstGeom prst="ellipse">
-            <a:avLst/>
-          </a:prstGeom>
-          <a:solidFill>
-            <a:srgbClr val="2F8A28"/>
-          </a:solidFill>
-          <a:ln w="12700">
-            <a:solidFill>
-              <a:srgbClr val="2F8A28"/>
-            </a:solidFill>
-            <a:prstDash val="solid"/>
-          </a:ln>
-        </p:spPr>
-      </p:sp>
-      <p:sp>
-        <p:nvSpPr>
-          <p:cNvPr id="17" name="Text 15"/>
-          <p:cNvSpPr/>
-          <p:nvPr/>
-        </p:nvSpPr>
-        <p:spPr>
-          <a:xfrm>
-            <a:off x="7909560" y="3977640"/>
-            <a:ext cx="2926080" cy="182880"/>
-          </a:xfrm>
-          <a:prstGeom prst="rect">
-            <a:avLst/>
-          </a:prstGeom>
-          <a:noFill/>
-          <a:ln/>
-        </p:spPr>
-        <p:txBody>
-          <a:bodyPr wrap="square" lIns="0" tIns="0" rIns="0" bIns="0" rtlCol="0" anchor="ctr"/>
-          <a:lstStyle/>
-          <a:p>
-            <a:pPr algn="ctr" indent="0" marL="0">
-              <a:buNone/>
-            </a:pPr>
-            <a:r>
-              <a:rPr lang="en-US" sz="1000" dirty="0">
-                <a:solidFill>
-                  <a:srgbClr val="003A63"/>
-                </a:solidFill>
-                <a:latin typeface="Aptos" pitchFamily="34" charset="0"/>
-                <a:ea typeface="Aptos" pitchFamily="34" charset="-122"/>
-                <a:cs typeface="Aptos" pitchFamily="34" charset="-120"/>
-              </a:rPr>
-              <a:t>Concept to action</a:t>
-            </a:r>
-            <a:endParaRPr lang="en-US" sz="1000" dirty="0"/>
-          </a:p>
-        </p:txBody>
-      </p:sp>
-      <p:sp>
-        <p:nvSpPr>
-          <p:cNvPr id="18" name="Shape 16"/>
           <p:cNvSpPr/>
           <p:nvPr/>
         </p:nvSpPr>
@@ -16316,7 +15680,7 @@
       </p:sp>
       <p:sp>
         <p:nvSpPr>
-          <p:cNvPr id="19" name="Text 17"/>
+          <p:cNvPr id="17" name="Text 15"/>
           <p:cNvSpPr/>
           <p:nvPr/>
         </p:nvSpPr>
@@ -16355,7 +15719,7 @@
       </p:sp>
       <p:sp>
         <p:nvSpPr>
-          <p:cNvPr id="20" name="Text 18"/>
+          <p:cNvPr id="18" name="Text 16"/>
           <p:cNvSpPr/>
           <p:nvPr/>
         </p:nvSpPr>
@@ -16863,13 +16227,11 @@
             </a:avLst>
           </a:prstGeom>
           <a:solidFill>
-            <a:srgbClr val="FFFFFF">
-              <a:alpha val="88000"/>
-            </a:srgbClr>
+            <a:srgbClr val="FFFFFF"/>
           </a:solidFill>
           <a:ln w="12700">
             <a:solidFill>
-              <a:srgbClr val="D6E8F2"/>
+              <a:srgbClr val="B9D7E6"/>
             </a:solidFill>
             <a:prstDash val="solid"/>
           </a:ln>
@@ -16877,119 +16239,112 @@
       </p:sp>
       <p:sp>
         <p:nvSpPr>
-          <p:cNvPr id="14" name="Shape 12"/>
-          <p:cNvSpPr/>
-          <p:nvPr/>
-        </p:nvSpPr>
-        <p:spPr>
-          <a:xfrm>
-            <a:off x="8074152" y="3291840"/>
-            <a:ext cx="2596896" cy="749808"/>
-          </a:xfrm>
-          <a:prstGeom prst="rect">
-            <a:avLst/>
-          </a:prstGeom>
-          <a:solidFill>
-            <a:srgbClr val="EAF6F8"/>
-          </a:solidFill>
-          <a:ln w="12700">
-            <a:solidFill>
-              <a:srgbClr val="8ABBD8"/>
-            </a:solidFill>
-            <a:prstDash val="solid"/>
-          </a:ln>
-        </p:spPr>
-      </p:sp>
-      <p:sp>
-        <p:nvSpPr>
-          <p:cNvPr id="15" name="Shape 13"/>
-          <p:cNvSpPr/>
-          <p:nvPr/>
-        </p:nvSpPr>
-        <p:spPr>
-          <a:xfrm>
-            <a:off x="8202168" y="3721608"/>
-            <a:ext cx="2340864" cy="0"/>
-          </a:xfrm>
-          <a:prstGeom prst="line">
-            <a:avLst/>
-          </a:prstGeom>
-          <a:noFill/>
-          <a:ln w="19050">
-            <a:solidFill>
-              <a:srgbClr val="0068B7"/>
-            </a:solidFill>
-            <a:prstDash val="solid"/>
-          </a:ln>
-        </p:spPr>
+          <p:cNvPr id="14" name="Text 12"/>
+          <p:cNvSpPr/>
+          <p:nvPr/>
+        </p:nvSpPr>
+        <p:spPr>
+          <a:xfrm>
+            <a:off x="7799832" y="2935224"/>
+            <a:ext cx="3145536" cy="256032"/>
+          </a:xfrm>
+          <a:prstGeom prst="rect">
+            <a:avLst/>
+          </a:prstGeom>
+          <a:noFill/>
+          <a:ln/>
+        </p:spPr>
+        <p:txBody>
+          <a:bodyPr wrap="square" lIns="0" tIns="0" rIns="0" bIns="0" rtlCol="0" anchor="ctr"/>
+          <a:lstStyle/>
+          <a:p>
+            <a:pPr indent="0" marL="0">
+              <a:buNone/>
+            </a:pPr>
+            <a:r>
+              <a:rPr lang="en-US" sz="1300" b="1" dirty="0">
+                <a:solidFill>
+                  <a:srgbClr val="0068B7"/>
+                </a:solidFill>
+                <a:latin typeface="Aptos" pitchFamily="34" charset="0"/>
+                <a:ea typeface="Aptos" pitchFamily="34" charset="-122"/>
+                <a:cs typeface="Aptos" pitchFamily="34" charset="-120"/>
+              </a:rPr>
+              <a:t>Concept checkpoints</a:t>
+            </a:r>
+            <a:endParaRPr lang="en-US" sz="1300" dirty="0"/>
+          </a:p>
+        </p:txBody>
+      </p:sp>
+      <p:sp>
+        <p:nvSpPr>
+          <p:cNvPr id="15" name="Text 13"/>
+          <p:cNvSpPr/>
+          <p:nvPr/>
+        </p:nvSpPr>
+        <p:spPr>
+          <a:xfrm>
+            <a:off x="7818120" y="3300984"/>
+            <a:ext cx="3090672" cy="877824"/>
+          </a:xfrm>
+          <a:prstGeom prst="rect">
+            <a:avLst/>
+          </a:prstGeom>
+          <a:noFill/>
+          <a:ln/>
+        </p:spPr>
+        <p:txBody>
+          <a:bodyPr wrap="square" lIns="254" tIns="254" rIns="254" bIns="254" rtlCol="0" anchor="t">
+            <a:normAutofit/>
+          </a:bodyPr>
+          <a:lstStyle/>
+          <a:p>
+            <a:r>
+              <a:rPr lang="en-US" sz="1380" dirty="0">
+                <a:solidFill>
+                  <a:srgbClr val="17364A"/>
+                </a:solidFill>
+                <a:latin typeface="Aptos" pitchFamily="34" charset="0"/>
+                <a:ea typeface="Aptos" pitchFamily="34" charset="-122"/>
+                <a:cs typeface="Aptos" pitchFamily="34" charset="-120"/>
+              </a:rPr>
+              <a:t>RAG matters because public health agencies manage large collections of guidance,.</a:t>
+            </a:r>
+            <a:endParaRPr lang="en-US" sz="1380" dirty="0"/>
+          </a:p>
+          <a:p>
+            <a:r>
+              <a:rPr lang="en-US" sz="1380" dirty="0">
+                <a:solidFill>
+                  <a:srgbClr val="17364A"/>
+                </a:solidFill>
+                <a:latin typeface="Aptos" pitchFamily="34" charset="0"/>
+                <a:ea typeface="Aptos" pitchFamily="34" charset="-122"/>
+                <a:cs typeface="Aptos" pitchFamily="34" charset="-120"/>
+              </a:rPr>
+              <a:t>Staff may spend substantial time searching for answers across shared drives, websites,.</a:t>
+            </a:r>
+            <a:endParaRPr lang="en-US" sz="1380" dirty="0"/>
+          </a:p>
+          <a:p>
+            <a:r>
+              <a:rPr lang="en-US" sz="1380" dirty="0">
+                <a:solidFill>
+                  <a:srgbClr val="17364A"/>
+                </a:solidFill>
+                <a:latin typeface="Aptos" pitchFamily="34" charset="0"/>
+                <a:ea typeface="Aptos" pitchFamily="34" charset="-122"/>
+                <a:cs typeface="Aptos" pitchFamily="34" charset="-120"/>
+              </a:rPr>
+              <a:t>A well-designed RAG system can help users find relevant guidance and produce concise,.</a:t>
+            </a:r>
+            <a:endParaRPr lang="en-US" sz="1380" dirty="0"/>
+          </a:p>
+        </p:txBody>
       </p:sp>
       <p:sp>
         <p:nvSpPr>
           <p:cNvPr id="16" name="Shape 14"/>
-          <p:cNvSpPr/>
-          <p:nvPr/>
-        </p:nvSpPr>
-        <p:spPr>
-          <a:xfrm>
-            <a:off x="9198864" y="4206240"/>
-            <a:ext cx="347472" cy="347472"/>
-          </a:xfrm>
-          <a:prstGeom prst="ellipse">
-            <a:avLst/>
-          </a:prstGeom>
-          <a:solidFill>
-            <a:srgbClr val="2F8A28"/>
-          </a:solidFill>
-          <a:ln w="12700">
-            <a:solidFill>
-              <a:srgbClr val="2F8A28"/>
-            </a:solidFill>
-            <a:prstDash val="solid"/>
-          </a:ln>
-        </p:spPr>
-      </p:sp>
-      <p:sp>
-        <p:nvSpPr>
-          <p:cNvPr id="17" name="Text 15"/>
-          <p:cNvSpPr/>
-          <p:nvPr/>
-        </p:nvSpPr>
-        <p:spPr>
-          <a:xfrm>
-            <a:off x="7909560" y="3977640"/>
-            <a:ext cx="2926080" cy="182880"/>
-          </a:xfrm>
-          <a:prstGeom prst="rect">
-            <a:avLst/>
-          </a:prstGeom>
-          <a:noFill/>
-          <a:ln/>
-        </p:spPr>
-        <p:txBody>
-          <a:bodyPr wrap="square" lIns="0" tIns="0" rIns="0" bIns="0" rtlCol="0" anchor="ctr"/>
-          <a:lstStyle/>
-          <a:p>
-            <a:pPr algn="ctr" indent="0" marL="0">
-              <a:buNone/>
-            </a:pPr>
-            <a:r>
-              <a:rPr lang="en-US" sz="1000" dirty="0">
-                <a:solidFill>
-                  <a:srgbClr val="003A63"/>
-                </a:solidFill>
-                <a:latin typeface="Aptos" pitchFamily="34" charset="0"/>
-                <a:ea typeface="Aptos" pitchFamily="34" charset="-122"/>
-                <a:cs typeface="Aptos" pitchFamily="34" charset="-120"/>
-              </a:rPr>
-              <a:t>Concept to action</a:t>
-            </a:r>
-            <a:endParaRPr lang="en-US" sz="1000" dirty="0"/>
-          </a:p>
-        </p:txBody>
-      </p:sp>
-      <p:sp>
-        <p:nvSpPr>
-          <p:cNvPr id="18" name="Shape 16"/>
           <p:cNvSpPr/>
           <p:nvPr/>
         </p:nvSpPr>
@@ -17016,7 +16371,7 @@
       </p:sp>
       <p:sp>
         <p:nvSpPr>
-          <p:cNvPr id="19" name="Text 17"/>
+          <p:cNvPr id="17" name="Text 15"/>
           <p:cNvSpPr/>
           <p:nvPr/>
         </p:nvSpPr>
@@ -17055,7 +16410,7 @@
       </p:sp>
       <p:sp>
         <p:nvSpPr>
-          <p:cNvPr id="20" name="Text 18"/>
+          <p:cNvPr id="18" name="Text 16"/>
           <p:cNvSpPr/>
           <p:nvPr/>
         </p:nvSpPr>
@@ -17563,13 +16918,11 @@
             </a:avLst>
           </a:prstGeom>
           <a:solidFill>
-            <a:srgbClr val="FFFFFF">
-              <a:alpha val="88000"/>
-            </a:srgbClr>
+            <a:srgbClr val="FFFFFF"/>
           </a:solidFill>
           <a:ln w="12700">
             <a:solidFill>
-              <a:srgbClr val="D6E8F2"/>
+              <a:srgbClr val="B9D7E6"/>
             </a:solidFill>
             <a:prstDash val="solid"/>
           </a:ln>
@@ -17577,119 +16930,112 @@
       </p:sp>
       <p:sp>
         <p:nvSpPr>
-          <p:cNvPr id="14" name="Shape 12"/>
-          <p:cNvSpPr/>
-          <p:nvPr/>
-        </p:nvSpPr>
-        <p:spPr>
-          <a:xfrm>
-            <a:off x="8074152" y="3291840"/>
-            <a:ext cx="2596896" cy="749808"/>
-          </a:xfrm>
-          <a:prstGeom prst="rect">
-            <a:avLst/>
-          </a:prstGeom>
-          <a:solidFill>
-            <a:srgbClr val="EAF6F8"/>
-          </a:solidFill>
-          <a:ln w="12700">
-            <a:solidFill>
-              <a:srgbClr val="8ABBD8"/>
-            </a:solidFill>
-            <a:prstDash val="solid"/>
-          </a:ln>
-        </p:spPr>
-      </p:sp>
-      <p:sp>
-        <p:nvSpPr>
-          <p:cNvPr id="15" name="Shape 13"/>
-          <p:cNvSpPr/>
-          <p:nvPr/>
-        </p:nvSpPr>
-        <p:spPr>
-          <a:xfrm>
-            <a:off x="8202168" y="3721608"/>
-            <a:ext cx="2340864" cy="0"/>
-          </a:xfrm>
-          <a:prstGeom prst="line">
-            <a:avLst/>
-          </a:prstGeom>
-          <a:noFill/>
-          <a:ln w="19050">
-            <a:solidFill>
-              <a:srgbClr val="0068B7"/>
-            </a:solidFill>
-            <a:prstDash val="solid"/>
-          </a:ln>
-        </p:spPr>
+          <p:cNvPr id="14" name="Text 12"/>
+          <p:cNvSpPr/>
+          <p:nvPr/>
+        </p:nvSpPr>
+        <p:spPr>
+          <a:xfrm>
+            <a:off x="7799832" y="2935224"/>
+            <a:ext cx="3145536" cy="256032"/>
+          </a:xfrm>
+          <a:prstGeom prst="rect">
+            <a:avLst/>
+          </a:prstGeom>
+          <a:noFill/>
+          <a:ln/>
+        </p:spPr>
+        <p:txBody>
+          <a:bodyPr wrap="square" lIns="0" tIns="0" rIns="0" bIns="0" rtlCol="0" anchor="ctr"/>
+          <a:lstStyle/>
+          <a:p>
+            <a:pPr indent="0" marL="0">
+              <a:buNone/>
+            </a:pPr>
+            <a:r>
+              <a:rPr lang="en-US" sz="1300" b="1" dirty="0">
+                <a:solidFill>
+                  <a:srgbClr val="0068B7"/>
+                </a:solidFill>
+                <a:latin typeface="Aptos" pitchFamily="34" charset="0"/>
+                <a:ea typeface="Aptos" pitchFamily="34" charset="-122"/>
+                <a:cs typeface="Aptos" pitchFamily="34" charset="-120"/>
+              </a:rPr>
+              <a:t>Concept checkpoints</a:t>
+            </a:r>
+            <a:endParaRPr lang="en-US" sz="1300" dirty="0"/>
+          </a:p>
+        </p:txBody>
+      </p:sp>
+      <p:sp>
+        <p:nvSpPr>
+          <p:cNvPr id="15" name="Text 13"/>
+          <p:cNvSpPr/>
+          <p:nvPr/>
+        </p:nvSpPr>
+        <p:spPr>
+          <a:xfrm>
+            <a:off x="7818120" y="3300984"/>
+            <a:ext cx="3090672" cy="877824"/>
+          </a:xfrm>
+          <a:prstGeom prst="rect">
+            <a:avLst/>
+          </a:prstGeom>
+          <a:noFill/>
+          <a:ln/>
+        </p:spPr>
+        <p:txBody>
+          <a:bodyPr wrap="square" lIns="254" tIns="254" rIns="254" bIns="254" rtlCol="0" anchor="t">
+            <a:normAutofit/>
+          </a:bodyPr>
+          <a:lstStyle/>
+          <a:p>
+            <a:r>
+              <a:rPr lang="en-US" sz="1380" dirty="0">
+                <a:solidFill>
+                  <a:srgbClr val="17364A"/>
+                </a:solidFill>
+                <a:latin typeface="Aptos" pitchFamily="34" charset="0"/>
+                <a:ea typeface="Aptos" pitchFamily="34" charset="-122"/>
+                <a:cs typeface="Aptos" pitchFamily="34" charset="-120"/>
+              </a:rPr>
+              <a:t>A state health department may create an internal RAG assistant to help staff find current.</a:t>
+            </a:r>
+            <a:endParaRPr lang="en-US" sz="1380" dirty="0"/>
+          </a:p>
+          <a:p>
+            <a:r>
+              <a:rPr lang="en-US" sz="1380" dirty="0">
+                <a:solidFill>
+                  <a:srgbClr val="17364A"/>
+                </a:solidFill>
+                <a:latin typeface="Aptos" pitchFamily="34" charset="0"/>
+                <a:ea typeface="Aptos" pitchFamily="34" charset="-122"/>
+                <a:cs typeface="Aptos" pitchFamily="34" charset="-120"/>
+              </a:rPr>
+              <a:t>The assistant could search approved protocols, case definitions, reporting rules, and.</a:t>
+            </a:r>
+            <a:endParaRPr lang="en-US" sz="1380" dirty="0"/>
+          </a:p>
+          <a:p>
+            <a:r>
+              <a:rPr lang="en-US" sz="1380" dirty="0">
+                <a:solidFill>
+                  <a:srgbClr val="17364A"/>
+                </a:solidFill>
+                <a:latin typeface="Aptos" pitchFamily="34" charset="0"/>
+                <a:ea typeface="Aptos" pitchFamily="34" charset="-122"/>
+                <a:cs typeface="Aptos" pitchFamily="34" charset="-120"/>
+              </a:rPr>
+              <a:t>When a user asks what steps to take for a suspected condition, the system could summarize.</a:t>
+            </a:r>
+            <a:endParaRPr lang="en-US" sz="1380" dirty="0"/>
+          </a:p>
+        </p:txBody>
       </p:sp>
       <p:sp>
         <p:nvSpPr>
           <p:cNvPr id="16" name="Shape 14"/>
-          <p:cNvSpPr/>
-          <p:nvPr/>
-        </p:nvSpPr>
-        <p:spPr>
-          <a:xfrm>
-            <a:off x="9198864" y="4206240"/>
-            <a:ext cx="347472" cy="347472"/>
-          </a:xfrm>
-          <a:prstGeom prst="ellipse">
-            <a:avLst/>
-          </a:prstGeom>
-          <a:solidFill>
-            <a:srgbClr val="2F8A28"/>
-          </a:solidFill>
-          <a:ln w="12700">
-            <a:solidFill>
-              <a:srgbClr val="2F8A28"/>
-            </a:solidFill>
-            <a:prstDash val="solid"/>
-          </a:ln>
-        </p:spPr>
-      </p:sp>
-      <p:sp>
-        <p:nvSpPr>
-          <p:cNvPr id="17" name="Text 15"/>
-          <p:cNvSpPr/>
-          <p:nvPr/>
-        </p:nvSpPr>
-        <p:spPr>
-          <a:xfrm>
-            <a:off x="7909560" y="3977640"/>
-            <a:ext cx="2926080" cy="182880"/>
-          </a:xfrm>
-          <a:prstGeom prst="rect">
-            <a:avLst/>
-          </a:prstGeom>
-          <a:noFill/>
-          <a:ln/>
-        </p:spPr>
-        <p:txBody>
-          <a:bodyPr wrap="square" lIns="0" tIns="0" rIns="0" bIns="0" rtlCol="0" anchor="ctr"/>
-          <a:lstStyle/>
-          <a:p>
-            <a:pPr algn="ctr" indent="0" marL="0">
-              <a:buNone/>
-            </a:pPr>
-            <a:r>
-              <a:rPr lang="en-US" sz="1000" dirty="0">
-                <a:solidFill>
-                  <a:srgbClr val="003A63"/>
-                </a:solidFill>
-                <a:latin typeface="Aptos" pitchFamily="34" charset="0"/>
-                <a:ea typeface="Aptos" pitchFamily="34" charset="-122"/>
-                <a:cs typeface="Aptos" pitchFamily="34" charset="-120"/>
-              </a:rPr>
-              <a:t>Concept to action</a:t>
-            </a:r>
-            <a:endParaRPr lang="en-US" sz="1000" dirty="0"/>
-          </a:p>
-        </p:txBody>
-      </p:sp>
-      <p:sp>
-        <p:nvSpPr>
-          <p:cNvPr id="18" name="Shape 16"/>
           <p:cNvSpPr/>
           <p:nvPr/>
         </p:nvSpPr>
@@ -17716,7 +17062,7 @@
       </p:sp>
       <p:sp>
         <p:nvSpPr>
-          <p:cNvPr id="19" name="Text 17"/>
+          <p:cNvPr id="17" name="Text 15"/>
           <p:cNvSpPr/>
           <p:nvPr/>
         </p:nvSpPr>
@@ -17755,7 +17101,7 @@
       </p:sp>
       <p:sp>
         <p:nvSpPr>
-          <p:cNvPr id="20" name="Text 18"/>
+          <p:cNvPr id="18" name="Text 16"/>
           <p:cNvSpPr/>
           <p:nvPr/>
         </p:nvSpPr>

--- a/downloads/presentations/modules/arc-300.pptx
+++ b/downloads/presentations/modules/arc-300.pptx
@@ -3353,49 +3353,58 @@
           <a:ln/>
         </p:spPr>
         <p:txBody>
-          <a:bodyPr wrap="square" lIns="635" tIns="635" rIns="635" bIns="635" rtlCol="0" anchor="t">
+          <a:bodyPr wrap="square" lIns="1016" tIns="1016" rIns="1016" bIns="1016" rtlCol="0" anchor="t">
             <a:normAutofit/>
           </a:bodyPr>
           <a:lstStyle/>
           <a:p>
+            <a:pPr indent="0" marL="0">
+              <a:buNone/>
+            </a:pPr>
             <a:r>
               <a:rPr lang="en-US" sz="2100" dirty="0">
                 <a:solidFill>
-                  <a:srgbClr val="17364A"/>
-                </a:solidFill>
-                <a:latin typeface="Aptos" pitchFamily="34" charset="0"/>
-                <a:ea typeface="Aptos" pitchFamily="34" charset="-122"/>
-                <a:cs typeface="Aptos" pitchFamily="34" charset="-120"/>
-              </a:rPr>
-              <a:t>A RAG system begins with content selection.</a:t>
+                  <a:srgbClr val="003A63"/>
+                </a:solidFill>
+                <a:latin typeface="Aptos" pitchFamily="34" charset="0"/>
+                <a:ea typeface="Aptos" pitchFamily="34" charset="-122"/>
+                <a:cs typeface="Aptos" pitchFamily="34" charset="-120"/>
+              </a:rPr>
+              <a:t>• A RAG system begins with content selection.</a:t>
             </a:r>
             <a:endParaRPr lang="en-US" sz="2100" dirty="0"/>
           </a:p>
           <a:p>
+            <a:pPr indent="0" marL="0">
+              <a:buNone/>
+            </a:pPr>
             <a:r>
               <a:rPr lang="en-US" sz="2100" dirty="0">
                 <a:solidFill>
-                  <a:srgbClr val="17364A"/>
-                </a:solidFill>
-                <a:latin typeface="Aptos" pitchFamily="34" charset="0"/>
-                <a:ea typeface="Aptos" pitchFamily="34" charset="-122"/>
-                <a:cs typeface="Aptos" pitchFamily="34" charset="-120"/>
-              </a:rPr>
-              <a:t>Agencies should decide which documents are authoritative, current, approved for the use case, and.</a:t>
+                  <a:srgbClr val="003A63"/>
+                </a:solidFill>
+                <a:latin typeface="Aptos" pitchFamily="34" charset="0"/>
+                <a:ea typeface="Aptos" pitchFamily="34" charset="-122"/>
+                <a:cs typeface="Aptos" pitchFamily="34" charset="-120"/>
+              </a:rPr>
+              <a:t>• Agencies should decide which documents are authoritative, current, approved for the use case,.</a:t>
             </a:r>
             <a:endParaRPr lang="en-US" sz="2100" dirty="0"/>
           </a:p>
           <a:p>
+            <a:pPr indent="0" marL="0">
+              <a:buNone/>
+            </a:pPr>
             <a:r>
               <a:rPr lang="en-US" sz="2100" dirty="0">
                 <a:solidFill>
-                  <a:srgbClr val="17364A"/>
-                </a:solidFill>
-                <a:latin typeface="Aptos" pitchFamily="34" charset="0"/>
-                <a:ea typeface="Aptos" pitchFamily="34" charset="-122"/>
-                <a:cs typeface="Aptos" pitchFamily="34" charset="-120"/>
-              </a:rPr>
-              <a:t>Content inventories should include owner, version, effective date, review date, sensitivity level, and.</a:t>
+                  <a:srgbClr val="003A63"/>
+                </a:solidFill>
+                <a:latin typeface="Aptos" pitchFamily="34" charset="0"/>
+                <a:ea typeface="Aptos" pitchFamily="34" charset="-122"/>
+                <a:cs typeface="Aptos" pitchFamily="34" charset="-120"/>
+              </a:rPr>
+              <a:t>• Content inventories should include owner, version, effective date, review date, sensitivity.</a:t>
             </a:r>
             <a:endParaRPr lang="en-US" sz="2100" dirty="0"/>
           </a:p>
@@ -3475,17 +3484,17 @@
         </p:nvSpPr>
         <p:spPr>
           <a:xfrm>
-            <a:off x="7799832" y="1828800"/>
-            <a:ext cx="3145536" cy="685800"/>
-          </a:xfrm>
-          <a:prstGeom prst="rect">
-            <a:avLst/>
-          </a:prstGeom>
-          <a:noFill/>
-          <a:ln/>
-        </p:spPr>
-        <p:txBody>
-          <a:bodyPr wrap="square" lIns="0" tIns="0" rIns="0" bIns="0" rtlCol="0" anchor="t">
+            <a:off x="7799832" y="1801368"/>
+            <a:ext cx="3145536" cy="758952"/>
+          </a:xfrm>
+          <a:prstGeom prst="rect">
+            <a:avLst/>
+          </a:prstGeom>
+          <a:noFill/>
+          <a:ln/>
+        </p:spPr>
+        <p:txBody>
+          <a:bodyPr wrap="square" lIns="254" tIns="254" rIns="254" bIns="254" rtlCol="0" anchor="t">
             <a:normAutofit/>
           </a:bodyPr>
           <a:lstStyle/>
@@ -3494,7 +3503,7 @@
               <a:buNone/>
             </a:pPr>
             <a:r>
-              <a:rPr lang="en-US" sz="1550" dirty="0">
+              <a:rPr lang="en-US" sz="1320" dirty="0">
                 <a:solidFill>
                   <a:srgbClr val="17364A"/>
                 </a:solidFill>
@@ -3504,7 +3513,7 @@
               </a:rPr>
               <a:t>A RAG system begins with content selection.</a:t>
             </a:r>
-            <a:endParaRPr lang="en-US" sz="1550" dirty="0"/>
+            <a:endParaRPr lang="en-US" sz="1320" dirty="0"/>
           </a:p>
         </p:txBody>
       </p:sp>
@@ -3592,13 +3601,16 @@
           <a:ln/>
         </p:spPr>
         <p:txBody>
-          <a:bodyPr wrap="square" lIns="254" tIns="254" rIns="254" bIns="254" rtlCol="0" anchor="t">
+          <a:bodyPr wrap="square" lIns="508" tIns="508" rIns="508" bIns="508" rtlCol="0" anchor="t">
             <a:normAutofit/>
           </a:bodyPr>
           <a:lstStyle/>
           <a:p>
-            <a:r>
-              <a:rPr lang="en-US" sz="1380" dirty="0">
+            <a:pPr indent="0" marL="0">
+              <a:buNone/>
+            </a:pPr>
+            <a:r>
+              <a:rPr lang="en-US" sz="1220" dirty="0">
                 <a:solidFill>
                   <a:srgbClr val="17364A"/>
                 </a:solidFill>
@@ -3606,13 +3618,16 @@
                 <a:ea typeface="Aptos" pitchFamily="34" charset="-122"/>
                 <a:cs typeface="Aptos" pitchFamily="34" charset="-120"/>
               </a:rPr>
-              <a:t>Agencies should decide which documents are authoritative, current, approved for the use.</a:t>
-            </a:r>
-            <a:endParaRPr lang="en-US" sz="1380" dirty="0"/>
-          </a:p>
-          <a:p>
-            <a:r>
-              <a:rPr lang="en-US" sz="1380" dirty="0">
+              <a:t>Agencies should decide which documents are authoritative, current,.</a:t>
+            </a:r>
+            <a:endParaRPr lang="en-US" sz="1220" dirty="0"/>
+          </a:p>
+          <a:p>
+            <a:pPr indent="0" marL="0">
+              <a:buNone/>
+            </a:pPr>
+            <a:r>
+              <a:rPr lang="en-US" sz="1220" dirty="0">
                 <a:solidFill>
                   <a:srgbClr val="17364A"/>
                 </a:solidFill>
@@ -3620,13 +3635,16 @@
                 <a:ea typeface="Aptos" pitchFamily="34" charset="-122"/>
                 <a:cs typeface="Aptos" pitchFamily="34" charset="-120"/>
               </a:rPr>
-              <a:t>Content inventories should include owner, version, effective date, review date,.</a:t>
-            </a:r>
-            <a:endParaRPr lang="en-US" sz="1380" dirty="0"/>
-          </a:p>
-          <a:p>
-            <a:r>
-              <a:rPr lang="en-US" sz="1380" dirty="0">
+              <a:t>Content inventories should include owner, version, effective date,.</a:t>
+            </a:r>
+            <a:endParaRPr lang="en-US" sz="1220" dirty="0"/>
+          </a:p>
+          <a:p>
+            <a:pPr indent="0" marL="0">
+              <a:buNone/>
+            </a:pPr>
+            <a:r>
+              <a:rPr lang="en-US" sz="1220" dirty="0">
                 <a:solidFill>
                   <a:srgbClr val="17364A"/>
                 </a:solidFill>
@@ -3634,9 +3652,9 @@
                 <a:ea typeface="Aptos" pitchFamily="34" charset="-122"/>
                 <a:cs typeface="Aptos" pitchFamily="34" charset="-120"/>
               </a:rPr>
-              <a:t>Without this foundation, retrieval can surface obsolete or unauthorized material.</a:t>
-            </a:r>
-            <a:endParaRPr lang="en-US" sz="1380" dirty="0"/>
+              <a:t>Without this foundation, retrieval can surface obsolete or.</a:t>
+            </a:r>
+            <a:endParaRPr lang="en-US" sz="1220" dirty="0"/>
           </a:p>
         </p:txBody>
       </p:sp>
@@ -3714,17 +3732,17 @@
         </p:nvSpPr>
         <p:spPr>
           <a:xfrm>
-            <a:off x="7799832" y="5001768"/>
-            <a:ext cx="3145536" cy="502920"/>
-          </a:xfrm>
-          <a:prstGeom prst="rect">
-            <a:avLst/>
-          </a:prstGeom>
-          <a:noFill/>
-          <a:ln/>
-        </p:spPr>
-        <p:txBody>
-          <a:bodyPr wrap="square" lIns="0" tIns="0" rIns="0" bIns="0" rtlCol="0" anchor="t">
+            <a:off x="7799832" y="4974336"/>
+            <a:ext cx="3145536" cy="576072"/>
+          </a:xfrm>
+          <a:prstGeom prst="rect">
+            <a:avLst/>
+          </a:prstGeom>
+          <a:noFill/>
+          <a:ln/>
+        </p:spPr>
+        <p:txBody>
+          <a:bodyPr wrap="square" lIns="254" tIns="254" rIns="254" bIns="254" rtlCol="0" anchor="t">
             <a:normAutofit/>
           </a:bodyPr>
           <a:lstStyle/>
@@ -3733,7 +3751,7 @@
               <a:buNone/>
             </a:pPr>
             <a:r>
-              <a:rPr lang="en-US" sz="1550" dirty="0">
+              <a:rPr lang="en-US" sz="1320" dirty="0">
                 <a:solidFill>
                   <a:srgbClr val="17364A"/>
                 </a:solidFill>
@@ -3741,9 +3759,9 @@
                 <a:ea typeface="Aptos" pitchFamily="34" charset="-122"/>
                 <a:cs typeface="Aptos" pitchFamily="34" charset="-120"/>
               </a:rPr>
-              <a:t>Use the assignment to test whether you can explain the concept, apply it to a realistic public health situation, and identify what would need review before the work moves forward.</a:t>
-            </a:r>
-            <a:endParaRPr lang="en-US" sz="1550" dirty="0"/>
+              <a:t>Use the assignment to test whether you can explain the concept, apply it to a realistic public health situation, and.</a:t>
+            </a:r>
+            <a:endParaRPr lang="en-US" sz="1320" dirty="0"/>
           </a:p>
         </p:txBody>
       </p:sp>
@@ -4044,49 +4062,58 @@
           <a:ln/>
         </p:spPr>
         <p:txBody>
-          <a:bodyPr wrap="square" lIns="635" tIns="635" rIns="635" bIns="635" rtlCol="0" anchor="t">
+          <a:bodyPr wrap="square" lIns="1016" tIns="1016" rIns="1016" bIns="1016" rtlCol="0" anchor="t">
             <a:normAutofit/>
           </a:bodyPr>
           <a:lstStyle/>
           <a:p>
+            <a:pPr indent="0" marL="0">
+              <a:buNone/>
+            </a:pPr>
             <a:r>
               <a:rPr lang="en-US" sz="2100" dirty="0">
                 <a:solidFill>
-                  <a:srgbClr val="17364A"/>
-                </a:solidFill>
-                <a:latin typeface="Aptos" pitchFamily="34" charset="0"/>
-                <a:ea typeface="Aptos" pitchFamily="34" charset="-122"/>
-                <a:cs typeface="Aptos" pitchFamily="34" charset="-120"/>
-              </a:rPr>
-              <a:t>Generation should be constrained by retrieved material.</a:t>
+                  <a:srgbClr val="003A63"/>
+                </a:solidFill>
+                <a:latin typeface="Aptos" pitchFamily="34" charset="0"/>
+                <a:ea typeface="Aptos" pitchFamily="34" charset="-122"/>
+                <a:cs typeface="Aptos" pitchFamily="34" charset="-120"/>
+              </a:rPr>
+              <a:t>• Generation should be constrained by retrieved material.</a:t>
             </a:r>
             <a:endParaRPr lang="en-US" sz="2100" dirty="0"/>
           </a:p>
           <a:p>
+            <a:pPr indent="0" marL="0">
+              <a:buNone/>
+            </a:pPr>
             <a:r>
               <a:rPr lang="en-US" sz="2100" dirty="0">
                 <a:solidFill>
-                  <a:srgbClr val="17364A"/>
-                </a:solidFill>
-                <a:latin typeface="Aptos" pitchFamily="34" charset="0"/>
-                <a:ea typeface="Aptos" pitchFamily="34" charset="-122"/>
-                <a:cs typeface="Aptos" pitchFamily="34" charset="-120"/>
-              </a:rPr>
-              <a:t>The system should be instructed to answer from sources, cite them, identify uncertainty, and avoid.</a:t>
+                  <a:srgbClr val="003A63"/>
+                </a:solidFill>
+                <a:latin typeface="Aptos" pitchFamily="34" charset="0"/>
+                <a:ea typeface="Aptos" pitchFamily="34" charset="-122"/>
+                <a:cs typeface="Aptos" pitchFamily="34" charset="-120"/>
+              </a:rPr>
+              <a:t>• The system should be instructed to answer from sources, cite them, identify uncertainty, and.</a:t>
             </a:r>
             <a:endParaRPr lang="en-US" sz="2100" dirty="0"/>
           </a:p>
           <a:p>
+            <a:pPr indent="0" marL="0">
+              <a:buNone/>
+            </a:pPr>
             <a:r>
               <a:rPr lang="en-US" sz="2100" dirty="0">
                 <a:solidFill>
-                  <a:srgbClr val="17364A"/>
-                </a:solidFill>
-                <a:latin typeface="Aptos" pitchFamily="34" charset="0"/>
-                <a:ea typeface="Aptos" pitchFamily="34" charset="-122"/>
-                <a:cs typeface="Aptos" pitchFamily="34" charset="-120"/>
-              </a:rPr>
-              <a:t>It should also explain when guidance conflicts or when source material is insufficient.</a:t>
+                  <a:srgbClr val="003A63"/>
+                </a:solidFill>
+                <a:latin typeface="Aptos" pitchFamily="34" charset="0"/>
+                <a:ea typeface="Aptos" pitchFamily="34" charset="-122"/>
+                <a:cs typeface="Aptos" pitchFamily="34" charset="-120"/>
+              </a:rPr>
+              <a:t>• It should also explain when guidance conflicts or when source material is insufficient.</a:t>
             </a:r>
             <a:endParaRPr lang="en-US" sz="2100" dirty="0"/>
           </a:p>
@@ -4166,17 +4193,17 @@
         </p:nvSpPr>
         <p:spPr>
           <a:xfrm>
-            <a:off x="7799832" y="1828800"/>
-            <a:ext cx="3145536" cy="685800"/>
-          </a:xfrm>
-          <a:prstGeom prst="rect">
-            <a:avLst/>
-          </a:prstGeom>
-          <a:noFill/>
-          <a:ln/>
-        </p:spPr>
-        <p:txBody>
-          <a:bodyPr wrap="square" lIns="0" tIns="0" rIns="0" bIns="0" rtlCol="0" anchor="t">
+            <a:off x="7799832" y="1801368"/>
+            <a:ext cx="3145536" cy="758952"/>
+          </a:xfrm>
+          <a:prstGeom prst="rect">
+            <a:avLst/>
+          </a:prstGeom>
+          <a:noFill/>
+          <a:ln/>
+        </p:spPr>
+        <p:txBody>
+          <a:bodyPr wrap="square" lIns="254" tIns="254" rIns="254" bIns="254" rtlCol="0" anchor="t">
             <a:normAutofit/>
           </a:bodyPr>
           <a:lstStyle/>
@@ -4185,7 +4212,7 @@
               <a:buNone/>
             </a:pPr>
             <a:r>
-              <a:rPr lang="en-US" sz="1550" dirty="0">
+              <a:rPr lang="en-US" sz="1320" dirty="0">
                 <a:solidFill>
                   <a:srgbClr val="17364A"/>
                 </a:solidFill>
@@ -4195,7 +4222,7 @@
               </a:rPr>
               <a:t>Generation should be constrained by retrieved material.</a:t>
             </a:r>
-            <a:endParaRPr lang="en-US" sz="1550" dirty="0"/>
+            <a:endParaRPr lang="en-US" sz="1320" dirty="0"/>
           </a:p>
         </p:txBody>
       </p:sp>
@@ -4283,13 +4310,16 @@
           <a:ln/>
         </p:spPr>
         <p:txBody>
-          <a:bodyPr wrap="square" lIns="254" tIns="254" rIns="254" bIns="254" rtlCol="0" anchor="t">
+          <a:bodyPr wrap="square" lIns="508" tIns="508" rIns="508" bIns="508" rtlCol="0" anchor="t">
             <a:normAutofit/>
           </a:bodyPr>
           <a:lstStyle/>
           <a:p>
-            <a:r>
-              <a:rPr lang="en-US" sz="1380" dirty="0">
+            <a:pPr indent="0" marL="0">
+              <a:buNone/>
+            </a:pPr>
+            <a:r>
+              <a:rPr lang="en-US" sz="1220" dirty="0">
                 <a:solidFill>
                   <a:srgbClr val="17364A"/>
                 </a:solidFill>
@@ -4297,13 +4327,16 @@
                 <a:ea typeface="Aptos" pitchFamily="34" charset="-122"/>
                 <a:cs typeface="Aptos" pitchFamily="34" charset="-120"/>
               </a:rPr>
-              <a:t>The system should be instructed to answer from sources, cite them, identify uncertainty,.</a:t>
-            </a:r>
-            <a:endParaRPr lang="en-US" sz="1380" dirty="0"/>
-          </a:p>
-          <a:p>
-            <a:r>
-              <a:rPr lang="en-US" sz="1380" dirty="0">
+              <a:t>The system should be instructed to answer from sources, cite them,.</a:t>
+            </a:r>
+            <a:endParaRPr lang="en-US" sz="1220" dirty="0"/>
+          </a:p>
+          <a:p>
+            <a:pPr indent="0" marL="0">
+              <a:buNone/>
+            </a:pPr>
+            <a:r>
+              <a:rPr lang="en-US" sz="1220" dirty="0">
                 <a:solidFill>
                   <a:srgbClr val="17364A"/>
                 </a:solidFill>
@@ -4311,13 +4344,16 @@
                 <a:ea typeface="Aptos" pitchFamily="34" charset="-122"/>
                 <a:cs typeface="Aptos" pitchFamily="34" charset="-120"/>
               </a:rPr>
-              <a:t>Users should be able to open the cited source and verify key statements.</a:t>
-            </a:r>
-            <a:endParaRPr lang="en-US" sz="1380" dirty="0"/>
-          </a:p>
-          <a:p>
-            <a:r>
-              <a:rPr lang="en-US" sz="1380" dirty="0">
+              <a:t>Users should be able to open the cited source and verify key.</a:t>
+            </a:r>
+            <a:endParaRPr lang="en-US" sz="1220" dirty="0"/>
+          </a:p>
+          <a:p>
+            <a:pPr indent="0" marL="0">
+              <a:buNone/>
+            </a:pPr>
+            <a:r>
+              <a:rPr lang="en-US" sz="1220" dirty="0">
                 <a:solidFill>
                   <a:srgbClr val="17364A"/>
                 </a:solidFill>
@@ -4325,9 +4361,9 @@
                 <a:ea typeface="Aptos" pitchFamily="34" charset="-122"/>
                 <a:cs typeface="Aptos" pitchFamily="34" charset="-120"/>
               </a:rPr>
-              <a:t>Monitoring should include retrieval failures, unsupported answers, stale content, user.</a:t>
-            </a:r>
-            <a:endParaRPr lang="en-US" sz="1380" dirty="0"/>
+              <a:t>Monitoring should include retrieval failures, unsupported answers,.</a:t>
+            </a:r>
+            <a:endParaRPr lang="en-US" sz="1220" dirty="0"/>
           </a:p>
         </p:txBody>
       </p:sp>
@@ -4405,17 +4441,17 @@
         </p:nvSpPr>
         <p:spPr>
           <a:xfrm>
-            <a:off x="7799832" y="5001768"/>
-            <a:ext cx="3145536" cy="502920"/>
-          </a:xfrm>
-          <a:prstGeom prst="rect">
-            <a:avLst/>
-          </a:prstGeom>
-          <a:noFill/>
-          <a:ln/>
-        </p:spPr>
-        <p:txBody>
-          <a:bodyPr wrap="square" lIns="0" tIns="0" rIns="0" bIns="0" rtlCol="0" anchor="t">
+            <a:off x="7799832" y="4974336"/>
+            <a:ext cx="3145536" cy="576072"/>
+          </a:xfrm>
+          <a:prstGeom prst="rect">
+            <a:avLst/>
+          </a:prstGeom>
+          <a:noFill/>
+          <a:ln/>
+        </p:spPr>
+        <p:txBody>
+          <a:bodyPr wrap="square" lIns="254" tIns="254" rIns="254" bIns="254" rtlCol="0" anchor="t">
             <a:normAutofit/>
           </a:bodyPr>
           <a:lstStyle/>
@@ -4424,7 +4460,7 @@
               <a:buNone/>
             </a:pPr>
             <a:r>
-              <a:rPr lang="en-US" sz="1550" dirty="0">
+              <a:rPr lang="en-US" sz="1320" dirty="0">
                 <a:solidFill>
                   <a:srgbClr val="17364A"/>
                 </a:solidFill>
@@ -4432,9 +4468,9 @@
                 <a:ea typeface="Aptos" pitchFamily="34" charset="-122"/>
                 <a:cs typeface="Aptos" pitchFamily="34" charset="-120"/>
               </a:rPr>
-              <a:t>Use the assignment to test whether you can explain the concept, apply it to a realistic public health situation, and identify what would need review before the work moves forward.</a:t>
-            </a:r>
-            <a:endParaRPr lang="en-US" sz="1550" dirty="0"/>
+              <a:t>Use the assignment to test whether you can explain the concept, apply it to a realistic public health situation, and.</a:t>
+            </a:r>
+            <a:endParaRPr lang="en-US" sz="1320" dirty="0"/>
           </a:p>
         </p:txBody>
       </p:sp>
@@ -4735,49 +4771,58 @@
           <a:ln/>
         </p:spPr>
         <p:txBody>
-          <a:bodyPr wrap="square" lIns="635" tIns="635" rIns="635" bIns="635" rtlCol="0" anchor="t">
+          <a:bodyPr wrap="square" lIns="1016" tIns="1016" rIns="1016" bIns="1016" rtlCol="0" anchor="t">
             <a:normAutofit/>
           </a:bodyPr>
           <a:lstStyle/>
           <a:p>
+            <a:pPr indent="0" marL="0">
+              <a:buNone/>
+            </a:pPr>
             <a:r>
               <a:rPr lang="en-US" sz="2100" dirty="0">
                 <a:solidFill>
-                  <a:srgbClr val="17364A"/>
-                </a:solidFill>
-                <a:latin typeface="Aptos" pitchFamily="34" charset="0"/>
-                <a:ea typeface="Aptos" pitchFamily="34" charset="-122"/>
-                <a:cs typeface="Aptos" pitchFamily="34" charset="-120"/>
-              </a:rPr>
-              <a:t>Stale or conflicting content.</a:t>
+                  <a:srgbClr val="003A63"/>
+                </a:solidFill>
+                <a:latin typeface="Aptos" pitchFamily="34" charset="0"/>
+                <a:ea typeface="Aptos" pitchFamily="34" charset="-122"/>
+                <a:cs typeface="Aptos" pitchFamily="34" charset="-120"/>
+              </a:rPr>
+              <a:t>• Stale or conflicting content.</a:t>
             </a:r>
             <a:endParaRPr lang="en-US" sz="2100" dirty="0"/>
           </a:p>
           <a:p>
+            <a:pPr indent="0" marL="0">
+              <a:buNone/>
+            </a:pPr>
             <a:r>
               <a:rPr lang="en-US" sz="2100" dirty="0">
                 <a:solidFill>
-                  <a:srgbClr val="17364A"/>
-                </a:solidFill>
-                <a:latin typeface="Aptos" pitchFamily="34" charset="0"/>
-                <a:ea typeface="Aptos" pitchFamily="34" charset="-122"/>
-                <a:cs typeface="Aptos" pitchFamily="34" charset="-120"/>
-              </a:rPr>
-              <a:t>Outdated or inconsistent documents can produce wrong answers.</a:t>
+                  <a:srgbClr val="003A63"/>
+                </a:solidFill>
+                <a:latin typeface="Aptos" pitchFamily="34" charset="0"/>
+                <a:ea typeface="Aptos" pitchFamily="34" charset="-122"/>
+                <a:cs typeface="Aptos" pitchFamily="34" charset="-120"/>
+              </a:rPr>
+              <a:t>• Outdated or inconsistent documents can produce wrong answers.</a:t>
             </a:r>
             <a:endParaRPr lang="en-US" sz="2100" dirty="0"/>
           </a:p>
           <a:p>
+            <a:pPr indent="0" marL="0">
+              <a:buNone/>
+            </a:pPr>
             <a:r>
               <a:rPr lang="en-US" sz="2100" dirty="0">
                 <a:solidFill>
-                  <a:srgbClr val="17364A"/>
-                </a:solidFill>
-                <a:latin typeface="Aptos" pitchFamily="34" charset="0"/>
-                <a:ea typeface="Aptos" pitchFamily="34" charset="-122"/>
-                <a:cs typeface="Aptos" pitchFamily="34" charset="-120"/>
-              </a:rPr>
-              <a:t>Guardrails include content ownership, version control, review dates, and archival rules.</a:t>
+                  <a:srgbClr val="003A63"/>
+                </a:solidFill>
+                <a:latin typeface="Aptos" pitchFamily="34" charset="0"/>
+                <a:ea typeface="Aptos" pitchFamily="34" charset="-122"/>
+                <a:cs typeface="Aptos" pitchFamily="34" charset="-120"/>
+              </a:rPr>
+              <a:t>• Guardrails include content ownership, version control, review dates, and archival rules.</a:t>
             </a:r>
             <a:endParaRPr lang="en-US" sz="2100" dirty="0"/>
           </a:p>
@@ -4857,17 +4902,17 @@
         </p:nvSpPr>
         <p:spPr>
           <a:xfrm>
-            <a:off x="7799832" y="1828800"/>
-            <a:ext cx="3145536" cy="685800"/>
-          </a:xfrm>
-          <a:prstGeom prst="rect">
-            <a:avLst/>
-          </a:prstGeom>
-          <a:noFill/>
-          <a:ln/>
-        </p:spPr>
-        <p:txBody>
-          <a:bodyPr wrap="square" lIns="0" tIns="0" rIns="0" bIns="0" rtlCol="0" anchor="t">
+            <a:off x="7799832" y="1801368"/>
+            <a:ext cx="3145536" cy="758952"/>
+          </a:xfrm>
+          <a:prstGeom prst="rect">
+            <a:avLst/>
+          </a:prstGeom>
+          <a:noFill/>
+          <a:ln/>
+        </p:spPr>
+        <p:txBody>
+          <a:bodyPr wrap="square" lIns="254" tIns="254" rIns="254" bIns="254" rtlCol="0" anchor="t">
             <a:normAutofit/>
           </a:bodyPr>
           <a:lstStyle/>
@@ -4876,7 +4921,7 @@
               <a:buNone/>
             </a:pPr>
             <a:r>
-              <a:rPr lang="en-US" sz="1550" dirty="0">
+              <a:rPr lang="en-US" sz="1320" dirty="0">
                 <a:solidFill>
                   <a:srgbClr val="17364A"/>
                 </a:solidFill>
@@ -4886,7 +4931,7 @@
               </a:rPr>
               <a:t>Stale or conflicting content.</a:t>
             </a:r>
-            <a:endParaRPr lang="en-US" sz="1550" dirty="0"/>
+            <a:endParaRPr lang="en-US" sz="1320" dirty="0"/>
           </a:p>
         </p:txBody>
       </p:sp>
@@ -4974,13 +5019,16 @@
           <a:ln/>
         </p:spPr>
         <p:txBody>
-          <a:bodyPr wrap="square" lIns="254" tIns="254" rIns="254" bIns="254" rtlCol="0" anchor="t">
+          <a:bodyPr wrap="square" lIns="508" tIns="508" rIns="508" bIns="508" rtlCol="0" anchor="t">
             <a:normAutofit/>
           </a:bodyPr>
           <a:lstStyle/>
           <a:p>
-            <a:r>
-              <a:rPr lang="en-US" sz="1380" dirty="0">
+            <a:pPr indent="0" marL="0">
+              <a:buNone/>
+            </a:pPr>
+            <a:r>
+              <a:rPr lang="en-US" sz="1220" dirty="0">
                 <a:solidFill>
                   <a:srgbClr val="17364A"/>
                 </a:solidFill>
@@ -4990,11 +5038,14 @@
               </a:rPr>
               <a:t>Permission leakage.</a:t>
             </a:r>
-            <a:endParaRPr lang="en-US" sz="1380" dirty="0"/>
-          </a:p>
-          <a:p>
-            <a:r>
-              <a:rPr lang="en-US" sz="1380" dirty="0">
+            <a:endParaRPr lang="en-US" sz="1220" dirty="0"/>
+          </a:p>
+          <a:p>
+            <a:pPr indent="0" marL="0">
+              <a:buNone/>
+            </a:pPr>
+            <a:r>
+              <a:rPr lang="en-US" sz="1220" dirty="0">
                 <a:solidFill>
                   <a:srgbClr val="17364A"/>
                 </a:solidFill>
@@ -5004,11 +5055,14 @@
               </a:rPr>
               <a:t>RAG may retrieve content a user should not see.</a:t>
             </a:r>
-            <a:endParaRPr lang="en-US" sz="1380" dirty="0"/>
-          </a:p>
-          <a:p>
-            <a:r>
-              <a:rPr lang="en-US" sz="1380" dirty="0">
+            <a:endParaRPr lang="en-US" sz="1220" dirty="0"/>
+          </a:p>
+          <a:p>
+            <a:pPr indent="0" marL="0">
+              <a:buNone/>
+            </a:pPr>
+            <a:r>
+              <a:rPr lang="en-US" sz="1220" dirty="0">
                 <a:solidFill>
                   <a:srgbClr val="17364A"/>
                 </a:solidFill>
@@ -5016,9 +5070,9 @@
                 <a:ea typeface="Aptos" pitchFamily="34" charset="-122"/>
                 <a:cs typeface="Aptos" pitchFamily="34" charset="-120"/>
               </a:rPr>
-              <a:t>Guardrails include role-based access, document-level permissions, and audit logs.</a:t>
-            </a:r>
-            <a:endParaRPr lang="en-US" sz="1380" dirty="0"/>
+              <a:t>Guardrails include role-based access, document-level permissions,.</a:t>
+            </a:r>
+            <a:endParaRPr lang="en-US" sz="1220" dirty="0"/>
           </a:p>
         </p:txBody>
       </p:sp>
@@ -5096,17 +5150,17 @@
         </p:nvSpPr>
         <p:spPr>
           <a:xfrm>
-            <a:off x="7799832" y="5001768"/>
-            <a:ext cx="3145536" cy="502920"/>
-          </a:xfrm>
-          <a:prstGeom prst="rect">
-            <a:avLst/>
-          </a:prstGeom>
-          <a:noFill/>
-          <a:ln/>
-        </p:spPr>
-        <p:txBody>
-          <a:bodyPr wrap="square" lIns="0" tIns="0" rIns="0" bIns="0" rtlCol="0" anchor="t">
+            <a:off x="7799832" y="4974336"/>
+            <a:ext cx="3145536" cy="576072"/>
+          </a:xfrm>
+          <a:prstGeom prst="rect">
+            <a:avLst/>
+          </a:prstGeom>
+          <a:noFill/>
+          <a:ln/>
+        </p:spPr>
+        <p:txBody>
+          <a:bodyPr wrap="square" lIns="254" tIns="254" rIns="254" bIns="254" rtlCol="0" anchor="t">
             <a:normAutofit/>
           </a:bodyPr>
           <a:lstStyle/>
@@ -5115,7 +5169,7 @@
               <a:buNone/>
             </a:pPr>
             <a:r>
-              <a:rPr lang="en-US" sz="1550" dirty="0">
+              <a:rPr lang="en-US" sz="1320" dirty="0">
                 <a:solidFill>
                   <a:srgbClr val="17364A"/>
                 </a:solidFill>
@@ -5123,9 +5177,9 @@
                 <a:ea typeface="Aptos" pitchFamily="34" charset="-122"/>
                 <a:cs typeface="Aptos" pitchFamily="34" charset="-120"/>
               </a:rPr>
-              <a:t>Use the assignment to test whether you can explain the concept, apply it to a realistic public health situation, and identify what would need review before the work moves forward.</a:t>
-            </a:r>
-            <a:endParaRPr lang="en-US" sz="1550" dirty="0"/>
+              <a:t>Use the assignment to test whether you can explain the concept, apply it to a realistic public health situation, and.</a:t>
+            </a:r>
+            <a:endParaRPr lang="en-US" sz="1320" dirty="0"/>
           </a:p>
         </p:txBody>
       </p:sp>
@@ -5426,49 +5480,58 @@
           <a:ln/>
         </p:spPr>
         <p:txBody>
-          <a:bodyPr wrap="square" lIns="635" tIns="635" rIns="635" bIns="635" rtlCol="0" anchor="t">
+          <a:bodyPr wrap="square" lIns="1016" tIns="1016" rIns="1016" bIns="1016" rtlCol="0" anchor="t">
             <a:normAutofit/>
           </a:bodyPr>
           <a:lstStyle/>
           <a:p>
+            <a:pPr indent="0" marL="0">
+              <a:buNone/>
+            </a:pPr>
             <a:r>
               <a:rPr lang="en-US" sz="2100" dirty="0">
                 <a:solidFill>
-                  <a:srgbClr val="17364A"/>
-                </a:solidFill>
-                <a:latin typeface="Aptos" pitchFamily="34" charset="0"/>
-                <a:ea typeface="Aptos" pitchFamily="34" charset="-122"/>
-                <a:cs typeface="Aptos" pitchFamily="34" charset="-120"/>
-              </a:rPr>
-              <a:t>Unsupported generation.</a:t>
+                  <a:srgbClr val="003A63"/>
+                </a:solidFill>
+                <a:latin typeface="Aptos" pitchFamily="34" charset="0"/>
+                <a:ea typeface="Aptos" pitchFamily="34" charset="-122"/>
+                <a:cs typeface="Aptos" pitchFamily="34" charset="-120"/>
+              </a:rPr>
+              <a:t>• Unsupported generation.</a:t>
             </a:r>
             <a:endParaRPr lang="en-US" sz="2100" dirty="0"/>
           </a:p>
           <a:p>
+            <a:pPr indent="0" marL="0">
+              <a:buNone/>
+            </a:pPr>
             <a:r>
               <a:rPr lang="en-US" sz="2100" dirty="0">
                 <a:solidFill>
-                  <a:srgbClr val="17364A"/>
-                </a:solidFill>
-                <a:latin typeface="Aptos" pitchFamily="34" charset="0"/>
-                <a:ea typeface="Aptos" pitchFamily="34" charset="-122"/>
-                <a:cs typeface="Aptos" pitchFamily="34" charset="-120"/>
-              </a:rPr>
-              <a:t>The model may add claims beyond retrieved sources.</a:t>
+                  <a:srgbClr val="003A63"/>
+                </a:solidFill>
+                <a:latin typeface="Aptos" pitchFamily="34" charset="0"/>
+                <a:ea typeface="Aptos" pitchFamily="34" charset="-122"/>
+                <a:cs typeface="Aptos" pitchFamily="34" charset="-120"/>
+              </a:rPr>
+              <a:t>• The model may add claims beyond retrieved sources.</a:t>
             </a:r>
             <a:endParaRPr lang="en-US" sz="2100" dirty="0"/>
           </a:p>
           <a:p>
+            <a:pPr indent="0" marL="0">
+              <a:buNone/>
+            </a:pPr>
             <a:r>
               <a:rPr lang="en-US" sz="2100" dirty="0">
                 <a:solidFill>
-                  <a:srgbClr val="17364A"/>
-                </a:solidFill>
-                <a:latin typeface="Aptos" pitchFamily="34" charset="0"/>
-                <a:ea typeface="Aptos" pitchFamily="34" charset="-122"/>
-                <a:cs typeface="Aptos" pitchFamily="34" charset="-120"/>
-              </a:rPr>
-              <a:t>Guardrails include source-only instructions, citation requirements, and reviewer verification.</a:t>
+                  <a:srgbClr val="003A63"/>
+                </a:solidFill>
+                <a:latin typeface="Aptos" pitchFamily="34" charset="0"/>
+                <a:ea typeface="Aptos" pitchFamily="34" charset="-122"/>
+                <a:cs typeface="Aptos" pitchFamily="34" charset="-120"/>
+              </a:rPr>
+              <a:t>• Guardrails include source-only instructions, citation requirements, and reviewer verification.</a:t>
             </a:r>
             <a:endParaRPr lang="en-US" sz="2100" dirty="0"/>
           </a:p>
@@ -5548,17 +5611,17 @@
         </p:nvSpPr>
         <p:spPr>
           <a:xfrm>
-            <a:off x="7799832" y="1828800"/>
-            <a:ext cx="3145536" cy="685800"/>
-          </a:xfrm>
-          <a:prstGeom prst="rect">
-            <a:avLst/>
-          </a:prstGeom>
-          <a:noFill/>
-          <a:ln/>
-        </p:spPr>
-        <p:txBody>
-          <a:bodyPr wrap="square" lIns="0" tIns="0" rIns="0" bIns="0" rtlCol="0" anchor="t">
+            <a:off x="7799832" y="1801368"/>
+            <a:ext cx="3145536" cy="758952"/>
+          </a:xfrm>
+          <a:prstGeom prst="rect">
+            <a:avLst/>
+          </a:prstGeom>
+          <a:noFill/>
+          <a:ln/>
+        </p:spPr>
+        <p:txBody>
+          <a:bodyPr wrap="square" lIns="254" tIns="254" rIns="254" bIns="254" rtlCol="0" anchor="t">
             <a:normAutofit/>
           </a:bodyPr>
           <a:lstStyle/>
@@ -5567,7 +5630,7 @@
               <a:buNone/>
             </a:pPr>
             <a:r>
-              <a:rPr lang="en-US" sz="1550" dirty="0">
+              <a:rPr lang="en-US" sz="1320" dirty="0">
                 <a:solidFill>
                   <a:srgbClr val="17364A"/>
                 </a:solidFill>
@@ -5577,7 +5640,7 @@
               </a:rPr>
               <a:t>Unsupported generation.</a:t>
             </a:r>
-            <a:endParaRPr lang="en-US" sz="1550" dirty="0"/>
+            <a:endParaRPr lang="en-US" sz="1320" dirty="0"/>
           </a:p>
         </p:txBody>
       </p:sp>
@@ -5665,13 +5728,16 @@
           <a:ln/>
         </p:spPr>
         <p:txBody>
-          <a:bodyPr wrap="square" lIns="254" tIns="254" rIns="254" bIns="254" rtlCol="0" anchor="t">
+          <a:bodyPr wrap="square" lIns="508" tIns="508" rIns="508" bIns="508" rtlCol="0" anchor="t">
             <a:normAutofit/>
           </a:bodyPr>
           <a:lstStyle/>
           <a:p>
-            <a:r>
-              <a:rPr lang="en-US" sz="1380" dirty="0">
+            <a:pPr indent="0" marL="0">
+              <a:buNone/>
+            </a:pPr>
+            <a:r>
+              <a:rPr lang="en-US" sz="1220" dirty="0">
                 <a:solidFill>
                   <a:srgbClr val="17364A"/>
                 </a:solidFill>
@@ -5681,11 +5747,14 @@
               </a:rPr>
               <a:t>Unsupported generation.</a:t>
             </a:r>
-            <a:endParaRPr lang="en-US" sz="1380" dirty="0"/>
-          </a:p>
-          <a:p>
-            <a:r>
-              <a:rPr lang="en-US" sz="1380" dirty="0">
+            <a:endParaRPr lang="en-US" sz="1220" dirty="0"/>
+          </a:p>
+          <a:p>
+            <a:pPr indent="0" marL="0">
+              <a:buNone/>
+            </a:pPr>
+            <a:r>
+              <a:rPr lang="en-US" sz="1220" dirty="0">
                 <a:solidFill>
                   <a:srgbClr val="17364A"/>
                 </a:solidFill>
@@ -5695,11 +5764,14 @@
               </a:rPr>
               <a:t>The model may add claims beyond retrieved sources.</a:t>
             </a:r>
-            <a:endParaRPr lang="en-US" sz="1380" dirty="0"/>
-          </a:p>
-          <a:p>
-            <a:r>
-              <a:rPr lang="en-US" sz="1380" dirty="0">
+            <a:endParaRPr lang="en-US" sz="1220" dirty="0"/>
+          </a:p>
+          <a:p>
+            <a:pPr indent="0" marL="0">
+              <a:buNone/>
+            </a:pPr>
+            <a:r>
+              <a:rPr lang="en-US" sz="1220" dirty="0">
                 <a:solidFill>
                   <a:srgbClr val="17364A"/>
                 </a:solidFill>
@@ -5707,9 +5779,9 @@
                 <a:ea typeface="Aptos" pitchFamily="34" charset="-122"/>
                 <a:cs typeface="Aptos" pitchFamily="34" charset="-120"/>
               </a:rPr>
-              <a:t>Guardrails include source-only instructions, citation requirements, and reviewer.</a:t>
-            </a:r>
-            <a:endParaRPr lang="en-US" sz="1380" dirty="0"/>
+              <a:t>Guardrails include source-only instructions, citation.</a:t>
+            </a:r>
+            <a:endParaRPr lang="en-US" sz="1220" dirty="0"/>
           </a:p>
         </p:txBody>
       </p:sp>
@@ -5787,17 +5859,17 @@
         </p:nvSpPr>
         <p:spPr>
           <a:xfrm>
-            <a:off x="7799832" y="5001768"/>
-            <a:ext cx="3145536" cy="502920"/>
-          </a:xfrm>
-          <a:prstGeom prst="rect">
-            <a:avLst/>
-          </a:prstGeom>
-          <a:noFill/>
-          <a:ln/>
-        </p:spPr>
-        <p:txBody>
-          <a:bodyPr wrap="square" lIns="0" tIns="0" rIns="0" bIns="0" rtlCol="0" anchor="t">
+            <a:off x="7799832" y="4974336"/>
+            <a:ext cx="3145536" cy="576072"/>
+          </a:xfrm>
+          <a:prstGeom prst="rect">
+            <a:avLst/>
+          </a:prstGeom>
+          <a:noFill/>
+          <a:ln/>
+        </p:spPr>
+        <p:txBody>
+          <a:bodyPr wrap="square" lIns="254" tIns="254" rIns="254" bIns="254" rtlCol="0" anchor="t">
             <a:normAutofit/>
           </a:bodyPr>
           <a:lstStyle/>
@@ -5806,7 +5878,7 @@
               <a:buNone/>
             </a:pPr>
             <a:r>
-              <a:rPr lang="en-US" sz="1550" dirty="0">
+              <a:rPr lang="en-US" sz="1320" dirty="0">
                 <a:solidFill>
                   <a:srgbClr val="17364A"/>
                 </a:solidFill>
@@ -5814,9 +5886,9 @@
                 <a:ea typeface="Aptos" pitchFamily="34" charset="-122"/>
                 <a:cs typeface="Aptos" pitchFamily="34" charset="-120"/>
               </a:rPr>
-              <a:t>Use the assignment to test whether you can explain the concept, apply it to a realistic public health situation, and identify what would need review before the work moves forward.</a:t>
-            </a:r>
-            <a:endParaRPr lang="en-US" sz="1550" dirty="0"/>
+              <a:t>Use the assignment to test whether you can explain the concept, apply it to a realistic public health situation, and.</a:t>
+            </a:r>
+            <a:endParaRPr lang="en-US" sz="1320" dirty="0"/>
           </a:p>
         </p:txBody>
       </p:sp>
@@ -6117,49 +6189,58 @@
           <a:ln/>
         </p:spPr>
         <p:txBody>
-          <a:bodyPr wrap="square" lIns="635" tIns="635" rIns="635" bIns="635" rtlCol="0" anchor="t">
+          <a:bodyPr wrap="square" lIns="1016" tIns="1016" rIns="1016" bIns="1016" rtlCol="0" anchor="t">
             <a:normAutofit/>
           </a:bodyPr>
           <a:lstStyle/>
           <a:p>
+            <a:pPr indent="0" marL="0">
+              <a:buNone/>
+            </a:pPr>
             <a:r>
               <a:rPr lang="en-US" sz="2100" dirty="0">
                 <a:solidFill>
-                  <a:srgbClr val="17364A"/>
-                </a:solidFill>
-                <a:latin typeface="Aptos" pitchFamily="34" charset="0"/>
-                <a:ea typeface="Aptos" pitchFamily="34" charset="-122"/>
-                <a:cs typeface="Aptos" pitchFamily="34" charset="-120"/>
-              </a:rPr>
-              <a:t>RAG supports generative AI by grounding outputs in defined sources.</a:t>
+                  <a:srgbClr val="003A63"/>
+                </a:solidFill>
+                <a:latin typeface="Aptos" pitchFamily="34" charset="0"/>
+                <a:ea typeface="Aptos" pitchFamily="34" charset="-122"/>
+                <a:cs typeface="Aptos" pitchFamily="34" charset="-120"/>
+              </a:rPr>
+              <a:t>• RAG supports generative AI by grounding outputs in defined sources.</a:t>
             </a:r>
             <a:endParaRPr lang="en-US" sz="2100" dirty="0"/>
           </a:p>
           <a:p>
+            <a:pPr indent="0" marL="0">
+              <a:buNone/>
+            </a:pPr>
             <a:r>
               <a:rPr lang="en-US" sz="2100" dirty="0">
                 <a:solidFill>
-                  <a:srgbClr val="17364A"/>
-                </a:solidFill>
-                <a:latin typeface="Aptos" pitchFamily="34" charset="0"/>
-                <a:ea typeface="Aptos" pitchFamily="34" charset="-122"/>
-                <a:cs typeface="Aptos" pitchFamily="34" charset="-120"/>
-              </a:rPr>
-              <a:t>It may be used in chat assistants, training tools, policy support, emergency operations, procurement.</a:t>
+                  <a:srgbClr val="003A63"/>
+                </a:solidFill>
+                <a:latin typeface="Aptos" pitchFamily="34" charset="0"/>
+                <a:ea typeface="Aptos" pitchFamily="34" charset="-122"/>
+                <a:cs typeface="Aptos" pitchFamily="34" charset="-120"/>
+              </a:rPr>
+              <a:t>• It may be used in chat assistants, training tools, policy support, emergency operations,.</a:t>
             </a:r>
             <a:endParaRPr lang="en-US" sz="2100" dirty="0"/>
           </a:p>
           <a:p>
+            <a:pPr indent="0" marL="0">
+              <a:buNone/>
+            </a:pPr>
             <a:r>
               <a:rPr lang="en-US" sz="2100" dirty="0">
                 <a:solidFill>
-                  <a:srgbClr val="17364A"/>
-                </a:solidFill>
-                <a:latin typeface="Aptos" pitchFamily="34" charset="0"/>
-                <a:ea typeface="Aptos" pitchFamily="34" charset="-122"/>
-                <a:cs typeface="Aptos" pitchFamily="34" charset="-120"/>
-              </a:rPr>
-              <a:t>It can also support agentic workflows by giving agents access to approved guidance, but actions based.</a:t>
+                  <a:srgbClr val="003A63"/>
+                </a:solidFill>
+                <a:latin typeface="Aptos" pitchFamily="34" charset="0"/>
+                <a:ea typeface="Aptos" pitchFamily="34" charset="-122"/>
+                <a:cs typeface="Aptos" pitchFamily="34" charset="-120"/>
+              </a:rPr>
+              <a:t>• It can also support agentic workflows by giving agents access to approved guidance, but.</a:t>
             </a:r>
             <a:endParaRPr lang="en-US" sz="2100" dirty="0"/>
           </a:p>
@@ -6239,17 +6320,17 @@
         </p:nvSpPr>
         <p:spPr>
           <a:xfrm>
-            <a:off x="7799832" y="1828800"/>
-            <a:ext cx="3145536" cy="685800"/>
-          </a:xfrm>
-          <a:prstGeom prst="rect">
-            <a:avLst/>
-          </a:prstGeom>
-          <a:noFill/>
-          <a:ln/>
-        </p:spPr>
-        <p:txBody>
-          <a:bodyPr wrap="square" lIns="0" tIns="0" rIns="0" bIns="0" rtlCol="0" anchor="t">
+            <a:off x="7799832" y="1801368"/>
+            <a:ext cx="3145536" cy="758952"/>
+          </a:xfrm>
+          <a:prstGeom prst="rect">
+            <a:avLst/>
+          </a:prstGeom>
+          <a:noFill/>
+          <a:ln/>
+        </p:spPr>
+        <p:txBody>
+          <a:bodyPr wrap="square" lIns="254" tIns="254" rIns="254" bIns="254" rtlCol="0" anchor="t">
             <a:normAutofit/>
           </a:bodyPr>
           <a:lstStyle/>
@@ -6258,7 +6339,7 @@
               <a:buNone/>
             </a:pPr>
             <a:r>
-              <a:rPr lang="en-US" sz="1550" dirty="0">
+              <a:rPr lang="en-US" sz="1320" dirty="0">
                 <a:solidFill>
                   <a:srgbClr val="17364A"/>
                 </a:solidFill>
@@ -6268,7 +6349,7 @@
               </a:rPr>
               <a:t>RAG supports generative AI by grounding outputs in defined sources.</a:t>
             </a:r>
-            <a:endParaRPr lang="en-US" sz="1550" dirty="0"/>
+            <a:endParaRPr lang="en-US" sz="1320" dirty="0"/>
           </a:p>
         </p:txBody>
       </p:sp>
@@ -6356,13 +6437,16 @@
           <a:ln/>
         </p:spPr>
         <p:txBody>
-          <a:bodyPr wrap="square" lIns="254" tIns="254" rIns="254" bIns="254" rtlCol="0" anchor="t">
+          <a:bodyPr wrap="square" lIns="508" tIns="508" rIns="508" bIns="508" rtlCol="0" anchor="t">
             <a:normAutofit/>
           </a:bodyPr>
           <a:lstStyle/>
           <a:p>
-            <a:r>
-              <a:rPr lang="en-US" sz="1380" dirty="0">
+            <a:pPr indent="0" marL="0">
+              <a:buNone/>
+            </a:pPr>
+            <a:r>
+              <a:rPr lang="en-US" sz="1220" dirty="0">
                 <a:solidFill>
                   <a:srgbClr val="17364A"/>
                 </a:solidFill>
@@ -6370,13 +6454,16 @@
                 <a:ea typeface="Aptos" pitchFamily="34" charset="-122"/>
                 <a:cs typeface="Aptos" pitchFamily="34" charset="-120"/>
               </a:rPr>
-              <a:t>It may be used in chat assistants, training tools, policy support, emergency operations,.</a:t>
-            </a:r>
-            <a:endParaRPr lang="en-US" sz="1380" dirty="0"/>
-          </a:p>
-          <a:p>
-            <a:r>
-              <a:rPr lang="en-US" sz="1380" dirty="0">
+              <a:t>It may be used in chat assistants, training tools, policy support,.</a:t>
+            </a:r>
+            <a:endParaRPr lang="en-US" sz="1220" dirty="0"/>
+          </a:p>
+          <a:p>
+            <a:pPr indent="0" marL="0">
+              <a:buNone/>
+            </a:pPr>
+            <a:r>
+              <a:rPr lang="en-US" sz="1220" dirty="0">
                 <a:solidFill>
                   <a:srgbClr val="17364A"/>
                 </a:solidFill>
@@ -6384,13 +6471,16 @@
                 <a:ea typeface="Aptos" pitchFamily="34" charset="-122"/>
                 <a:cs typeface="Aptos" pitchFamily="34" charset="-120"/>
               </a:rPr>
-              <a:t>It can also support agentic workflows by giving agents access to approved guidance, but.</a:t>
-            </a:r>
-            <a:endParaRPr lang="en-US" sz="1380" dirty="0"/>
-          </a:p>
-          <a:p>
-            <a:r>
-              <a:rPr lang="en-US" sz="1380" dirty="0">
+              <a:t>It can also support agentic workflows by giving agents access to.</a:t>
+            </a:r>
+            <a:endParaRPr lang="en-US" sz="1220" dirty="0"/>
+          </a:p>
+          <a:p>
+            <a:pPr indent="0" marL="0">
+              <a:buNone/>
+            </a:pPr>
+            <a:r>
+              <a:rPr lang="en-US" sz="1220" dirty="0">
                 <a:solidFill>
                   <a:srgbClr val="17364A"/>
                 </a:solidFill>
@@ -6400,7 +6490,7 @@
               </a:rPr>
               <a:t>Public health RAG systems should be built around trust.</a:t>
             </a:r>
-            <a:endParaRPr lang="en-US" sz="1380" dirty="0"/>
+            <a:endParaRPr lang="en-US" sz="1220" dirty="0"/>
           </a:p>
         </p:txBody>
       </p:sp>
@@ -6478,17 +6568,17 @@
         </p:nvSpPr>
         <p:spPr>
           <a:xfrm>
-            <a:off x="7799832" y="5001768"/>
-            <a:ext cx="3145536" cy="502920"/>
-          </a:xfrm>
-          <a:prstGeom prst="rect">
-            <a:avLst/>
-          </a:prstGeom>
-          <a:noFill/>
-          <a:ln/>
-        </p:spPr>
-        <p:txBody>
-          <a:bodyPr wrap="square" lIns="0" tIns="0" rIns="0" bIns="0" rtlCol="0" anchor="t">
+            <a:off x="7799832" y="4974336"/>
+            <a:ext cx="3145536" cy="576072"/>
+          </a:xfrm>
+          <a:prstGeom prst="rect">
+            <a:avLst/>
+          </a:prstGeom>
+          <a:noFill/>
+          <a:ln/>
+        </p:spPr>
+        <p:txBody>
+          <a:bodyPr wrap="square" lIns="254" tIns="254" rIns="254" bIns="254" rtlCol="0" anchor="t">
             <a:normAutofit/>
           </a:bodyPr>
           <a:lstStyle/>
@@ -6497,7 +6587,7 @@
               <a:buNone/>
             </a:pPr>
             <a:r>
-              <a:rPr lang="en-US" sz="1550" dirty="0">
+              <a:rPr lang="en-US" sz="1320" dirty="0">
                 <a:solidFill>
                   <a:srgbClr val="17364A"/>
                 </a:solidFill>
@@ -6505,9 +6595,9 @@
                 <a:ea typeface="Aptos" pitchFamily="34" charset="-122"/>
                 <a:cs typeface="Aptos" pitchFamily="34" charset="-120"/>
               </a:rPr>
-              <a:t>Use the assignment to test whether you can explain the concept, apply it to a realistic public health situation, and identify what would need review before the work moves forward.</a:t>
-            </a:r>
-            <a:endParaRPr lang="en-US" sz="1550" dirty="0"/>
+              <a:t>Use the assignment to test whether you can explain the concept, apply it to a realistic public health situation, and.</a:t>
+            </a:r>
+            <a:endParaRPr lang="en-US" sz="1320" dirty="0"/>
           </a:p>
         </p:txBody>
       </p:sp>
@@ -6808,49 +6898,58 @@
           <a:ln/>
         </p:spPr>
         <p:txBody>
-          <a:bodyPr wrap="square" lIns="635" tIns="635" rIns="635" bIns="635" rtlCol="0" anchor="t">
+          <a:bodyPr wrap="square" lIns="1016" tIns="1016" rIns="1016" bIns="1016" rtlCol="0" anchor="t">
             <a:normAutofit/>
           </a:bodyPr>
           <a:lstStyle/>
           <a:p>
+            <a:pPr indent="0" marL="0">
+              <a:buNone/>
+            </a:pPr>
             <a:r>
               <a:rPr lang="en-US" sz="2100" dirty="0">
                 <a:solidFill>
-                  <a:srgbClr val="17364A"/>
-                </a:solidFill>
-                <a:latin typeface="Aptos" pitchFamily="34" charset="0"/>
-                <a:ea typeface="Aptos" pitchFamily="34" charset="-122"/>
-                <a:cs typeface="Aptos" pitchFamily="34" charset="-120"/>
-              </a:rPr>
-              <a:t>What content collection would the RAG system use?</a:t>
+                  <a:srgbClr val="003A63"/>
+                </a:solidFill>
+                <a:latin typeface="Aptos" pitchFamily="34" charset="0"/>
+                <a:ea typeface="Aptos" pitchFamily="34" charset="-122"/>
+                <a:cs typeface="Aptos" pitchFamily="34" charset="-120"/>
+              </a:rPr>
+              <a:t>• What content collection would the RAG system use?</a:t>
             </a:r>
             <a:endParaRPr lang="en-US" sz="2100" dirty="0"/>
           </a:p>
           <a:p>
+            <a:pPr indent="0" marL="0">
+              <a:buNone/>
+            </a:pPr>
             <a:r>
               <a:rPr lang="en-US" sz="2100" dirty="0">
                 <a:solidFill>
-                  <a:srgbClr val="17364A"/>
-                </a:solidFill>
-                <a:latin typeface="Aptos" pitchFamily="34" charset="0"/>
-                <a:ea typeface="Aptos" pitchFamily="34" charset="-122"/>
-                <a:cs typeface="Aptos" pitchFamily="34" charset="-120"/>
-              </a:rPr>
-              <a:t>Who owns and updates each source document?</a:t>
+                  <a:srgbClr val="003A63"/>
+                </a:solidFill>
+                <a:latin typeface="Aptos" pitchFamily="34" charset="0"/>
+                <a:ea typeface="Aptos" pitchFamily="34" charset="-122"/>
+                <a:cs typeface="Aptos" pitchFamily="34" charset="-120"/>
+              </a:rPr>
+              <a:t>• Who owns and updates each source document?</a:t>
             </a:r>
             <a:endParaRPr lang="en-US" sz="2100" dirty="0"/>
           </a:p>
           <a:p>
+            <a:pPr indent="0" marL="0">
+              <a:buNone/>
+            </a:pPr>
             <a:r>
               <a:rPr lang="en-US" sz="2100" dirty="0">
                 <a:solidFill>
-                  <a:srgbClr val="17364A"/>
-                </a:solidFill>
-                <a:latin typeface="Aptos" pitchFamily="34" charset="0"/>
-                <a:ea typeface="Aptos" pitchFamily="34" charset="-122"/>
-                <a:cs typeface="Aptos" pitchFamily="34" charset="-120"/>
-              </a:rPr>
-              <a:t>How will access permissions be enforced?</a:t>
+                  <a:srgbClr val="003A63"/>
+                </a:solidFill>
+                <a:latin typeface="Aptos" pitchFamily="34" charset="0"/>
+                <a:ea typeface="Aptos" pitchFamily="34" charset="-122"/>
+                <a:cs typeface="Aptos" pitchFamily="34" charset="-120"/>
+              </a:rPr>
+              <a:t>• How will access permissions be enforced?</a:t>
             </a:r>
             <a:endParaRPr lang="en-US" sz="2100" dirty="0"/>
           </a:p>
@@ -6930,17 +7029,17 @@
         </p:nvSpPr>
         <p:spPr>
           <a:xfrm>
-            <a:off x="7799832" y="1828800"/>
-            <a:ext cx="3145536" cy="685800"/>
-          </a:xfrm>
-          <a:prstGeom prst="rect">
-            <a:avLst/>
-          </a:prstGeom>
-          <a:noFill/>
-          <a:ln/>
-        </p:spPr>
-        <p:txBody>
-          <a:bodyPr wrap="square" lIns="0" tIns="0" rIns="0" bIns="0" rtlCol="0" anchor="t">
+            <a:off x="7799832" y="1801368"/>
+            <a:ext cx="3145536" cy="758952"/>
+          </a:xfrm>
+          <a:prstGeom prst="rect">
+            <a:avLst/>
+          </a:prstGeom>
+          <a:noFill/>
+          <a:ln/>
+        </p:spPr>
+        <p:txBody>
+          <a:bodyPr wrap="square" lIns="254" tIns="254" rIns="254" bIns="254" rtlCol="0" anchor="t">
             <a:normAutofit/>
           </a:bodyPr>
           <a:lstStyle/>
@@ -6949,7 +7048,7 @@
               <a:buNone/>
             </a:pPr>
             <a:r>
-              <a:rPr lang="en-US" sz="1550" dirty="0">
+              <a:rPr lang="en-US" sz="1320" dirty="0">
                 <a:solidFill>
                   <a:srgbClr val="17364A"/>
                 </a:solidFill>
@@ -6959,7 +7058,7 @@
               </a:rPr>
               <a:t>What content collection would the RAG system use?</a:t>
             </a:r>
-            <a:endParaRPr lang="en-US" sz="1550" dirty="0"/>
+            <a:endParaRPr lang="en-US" sz="1320" dirty="0"/>
           </a:p>
         </p:txBody>
       </p:sp>
@@ -7047,13 +7146,16 @@
           <a:ln/>
         </p:spPr>
         <p:txBody>
-          <a:bodyPr wrap="square" lIns="254" tIns="254" rIns="254" bIns="254" rtlCol="0" anchor="t">
+          <a:bodyPr wrap="square" lIns="508" tIns="508" rIns="508" bIns="508" rtlCol="0" anchor="t">
             <a:normAutofit/>
           </a:bodyPr>
           <a:lstStyle/>
           <a:p>
-            <a:r>
-              <a:rPr lang="en-US" sz="1380" dirty="0">
+            <a:pPr indent="0" marL="0">
+              <a:buNone/>
+            </a:pPr>
+            <a:r>
+              <a:rPr lang="en-US" sz="1220" dirty="0">
                 <a:solidFill>
                   <a:srgbClr val="17364A"/>
                 </a:solidFill>
@@ -7063,11 +7165,14 @@
               </a:rPr>
               <a:t>What content collection would the RAG system use?</a:t>
             </a:r>
-            <a:endParaRPr lang="en-US" sz="1380" dirty="0"/>
-          </a:p>
-          <a:p>
-            <a:r>
-              <a:rPr lang="en-US" sz="1380" dirty="0">
+            <a:endParaRPr lang="en-US" sz="1220" dirty="0"/>
+          </a:p>
+          <a:p>
+            <a:pPr indent="0" marL="0">
+              <a:buNone/>
+            </a:pPr>
+            <a:r>
+              <a:rPr lang="en-US" sz="1220" dirty="0">
                 <a:solidFill>
                   <a:srgbClr val="17364A"/>
                 </a:solidFill>
@@ -7077,11 +7182,14 @@
               </a:rPr>
               <a:t>Who owns and updates each source document?</a:t>
             </a:r>
-            <a:endParaRPr lang="en-US" sz="1380" dirty="0"/>
-          </a:p>
-          <a:p>
-            <a:r>
-              <a:rPr lang="en-US" sz="1380" dirty="0">
+            <a:endParaRPr lang="en-US" sz="1220" dirty="0"/>
+          </a:p>
+          <a:p>
+            <a:pPr indent="0" marL="0">
+              <a:buNone/>
+            </a:pPr>
+            <a:r>
+              <a:rPr lang="en-US" sz="1220" dirty="0">
                 <a:solidFill>
                   <a:srgbClr val="17364A"/>
                 </a:solidFill>
@@ -7091,7 +7199,7 @@
               </a:rPr>
               <a:t>How will access permissions be enforced?</a:t>
             </a:r>
-            <a:endParaRPr lang="en-US" sz="1380" dirty="0"/>
+            <a:endParaRPr lang="en-US" sz="1220" dirty="0"/>
           </a:p>
         </p:txBody>
       </p:sp>
@@ -7169,17 +7277,17 @@
         </p:nvSpPr>
         <p:spPr>
           <a:xfrm>
-            <a:off x="7799832" y="5001768"/>
-            <a:ext cx="3145536" cy="502920"/>
-          </a:xfrm>
-          <a:prstGeom prst="rect">
-            <a:avLst/>
-          </a:prstGeom>
-          <a:noFill/>
-          <a:ln/>
-        </p:spPr>
-        <p:txBody>
-          <a:bodyPr wrap="square" lIns="0" tIns="0" rIns="0" bIns="0" rtlCol="0" anchor="t">
+            <a:off x="7799832" y="4974336"/>
+            <a:ext cx="3145536" cy="576072"/>
+          </a:xfrm>
+          <a:prstGeom prst="rect">
+            <a:avLst/>
+          </a:prstGeom>
+          <a:noFill/>
+          <a:ln/>
+        </p:spPr>
+        <p:txBody>
+          <a:bodyPr wrap="square" lIns="254" tIns="254" rIns="254" bIns="254" rtlCol="0" anchor="t">
             <a:normAutofit/>
           </a:bodyPr>
           <a:lstStyle/>
@@ -7188,7 +7296,7 @@
               <a:buNone/>
             </a:pPr>
             <a:r>
-              <a:rPr lang="en-US" sz="1550" dirty="0">
+              <a:rPr lang="en-US" sz="1320" dirty="0">
                 <a:solidFill>
                   <a:srgbClr val="17364A"/>
                 </a:solidFill>
@@ -7196,9 +7304,9 @@
                 <a:ea typeface="Aptos" pitchFamily="34" charset="-122"/>
                 <a:cs typeface="Aptos" pitchFamily="34" charset="-120"/>
               </a:rPr>
-              <a:t>Use the assignment to test whether you can explain the concept, apply it to a realistic public health situation, and identify what would need review before the work moves forward.</a:t>
-            </a:r>
-            <a:endParaRPr lang="en-US" sz="1550" dirty="0"/>
+              <a:t>Use the assignment to test whether you can explain the concept, apply it to a realistic public health situation, and.</a:t>
+            </a:r>
+            <a:endParaRPr lang="en-US" sz="1320" dirty="0"/>
           </a:p>
         </p:txBody>
       </p:sp>
@@ -7499,35 +7607,41 @@
           <a:ln/>
         </p:spPr>
         <p:txBody>
-          <a:bodyPr wrap="square" lIns="635" tIns="635" rIns="635" bIns="635" rtlCol="0" anchor="t">
+          <a:bodyPr wrap="square" lIns="1016" tIns="1016" rIns="1016" bIns="1016" rtlCol="0" anchor="t">
             <a:normAutofit/>
           </a:bodyPr>
           <a:lstStyle/>
           <a:p>
+            <a:pPr indent="0" marL="0">
+              <a:buNone/>
+            </a:pPr>
             <a:r>
               <a:rPr lang="en-US" sz="2100" dirty="0">
                 <a:solidFill>
-                  <a:srgbClr val="17364A"/>
-                </a:solidFill>
-                <a:latin typeface="Aptos" pitchFamily="34" charset="0"/>
-                <a:ea typeface="Aptos" pitchFamily="34" charset="-122"/>
-                <a:cs typeface="Aptos" pitchFamily="34" charset="-120"/>
-              </a:rPr>
-              <a:t>How will retrieval quality and citation accuracy be tested?</a:t>
+                  <a:srgbClr val="003A63"/>
+                </a:solidFill>
+                <a:latin typeface="Aptos" pitchFamily="34" charset="0"/>
+                <a:ea typeface="Aptos" pitchFamily="34" charset="-122"/>
+                <a:cs typeface="Aptos" pitchFamily="34" charset="-120"/>
+              </a:rPr>
+              <a:t>• How will retrieval quality and citation accuracy be tested?</a:t>
             </a:r>
             <a:endParaRPr lang="en-US" sz="2100" dirty="0"/>
           </a:p>
           <a:p>
+            <a:pPr indent="0" marL="0">
+              <a:buNone/>
+            </a:pPr>
             <a:r>
               <a:rPr lang="en-US" sz="2100" dirty="0">
                 <a:solidFill>
-                  <a:srgbClr val="17364A"/>
-                </a:solidFill>
-                <a:latin typeface="Aptos" pitchFamily="34" charset="0"/>
-                <a:ea typeface="Aptos" pitchFamily="34" charset="-122"/>
-                <a:cs typeface="Aptos" pitchFamily="34" charset="-120"/>
-              </a:rPr>
-              <a:t>What should the system do when sources are missing, outdated, or conflicting?</a:t>
+                  <a:srgbClr val="003A63"/>
+                </a:solidFill>
+                <a:latin typeface="Aptos" pitchFamily="34" charset="0"/>
+                <a:ea typeface="Aptos" pitchFamily="34" charset="-122"/>
+                <a:cs typeface="Aptos" pitchFamily="34" charset="-120"/>
+              </a:rPr>
+              <a:t>• What should the system do when sources are missing, outdated, or conflicting?</a:t>
             </a:r>
             <a:endParaRPr lang="en-US" sz="2100" dirty="0"/>
           </a:p>
@@ -7607,17 +7721,17 @@
         </p:nvSpPr>
         <p:spPr>
           <a:xfrm>
-            <a:off x="7799832" y="1828800"/>
-            <a:ext cx="3145536" cy="685800"/>
-          </a:xfrm>
-          <a:prstGeom prst="rect">
-            <a:avLst/>
-          </a:prstGeom>
-          <a:noFill/>
-          <a:ln/>
-        </p:spPr>
-        <p:txBody>
-          <a:bodyPr wrap="square" lIns="0" tIns="0" rIns="0" bIns="0" rtlCol="0" anchor="t">
+            <a:off x="7799832" y="1801368"/>
+            <a:ext cx="3145536" cy="758952"/>
+          </a:xfrm>
+          <a:prstGeom prst="rect">
+            <a:avLst/>
+          </a:prstGeom>
+          <a:noFill/>
+          <a:ln/>
+        </p:spPr>
+        <p:txBody>
+          <a:bodyPr wrap="square" lIns="254" tIns="254" rIns="254" bIns="254" rtlCol="0" anchor="t">
             <a:normAutofit/>
           </a:bodyPr>
           <a:lstStyle/>
@@ -7626,7 +7740,7 @@
               <a:buNone/>
             </a:pPr>
             <a:r>
-              <a:rPr lang="en-US" sz="1550" dirty="0">
+              <a:rPr lang="en-US" sz="1320" dirty="0">
                 <a:solidFill>
                   <a:srgbClr val="17364A"/>
                 </a:solidFill>
@@ -7636,7 +7750,7 @@
               </a:rPr>
               <a:t>How will retrieval quality and citation accuracy be tested?</a:t>
             </a:r>
-            <a:endParaRPr lang="en-US" sz="1550" dirty="0"/>
+            <a:endParaRPr lang="en-US" sz="1320" dirty="0"/>
           </a:p>
         </p:txBody>
       </p:sp>
@@ -7724,13 +7838,16 @@
           <a:ln/>
         </p:spPr>
         <p:txBody>
-          <a:bodyPr wrap="square" lIns="254" tIns="254" rIns="254" bIns="254" rtlCol="0" anchor="t">
+          <a:bodyPr wrap="square" lIns="508" tIns="508" rIns="508" bIns="508" rtlCol="0" anchor="t">
             <a:normAutofit/>
           </a:bodyPr>
           <a:lstStyle/>
           <a:p>
-            <a:r>
-              <a:rPr lang="en-US" sz="1380" dirty="0">
+            <a:pPr indent="0" marL="0">
+              <a:buNone/>
+            </a:pPr>
+            <a:r>
+              <a:rPr lang="en-US" sz="1220" dirty="0">
                 <a:solidFill>
                   <a:srgbClr val="17364A"/>
                 </a:solidFill>
@@ -7740,11 +7857,14 @@
               </a:rPr>
               <a:t>How will retrieval quality and citation accuracy be tested?</a:t>
             </a:r>
-            <a:endParaRPr lang="en-US" sz="1380" dirty="0"/>
-          </a:p>
-          <a:p>
-            <a:r>
-              <a:rPr lang="en-US" sz="1380" dirty="0">
+            <a:endParaRPr lang="en-US" sz="1220" dirty="0"/>
+          </a:p>
+          <a:p>
+            <a:pPr indent="0" marL="0">
+              <a:buNone/>
+            </a:pPr>
+            <a:r>
+              <a:rPr lang="en-US" sz="1220" dirty="0">
                 <a:solidFill>
                   <a:srgbClr val="17364A"/>
                 </a:solidFill>
@@ -7752,9 +7872,9 @@
                 <a:ea typeface="Aptos" pitchFamily="34" charset="-122"/>
                 <a:cs typeface="Aptos" pitchFamily="34" charset="-120"/>
               </a:rPr>
-              <a:t>What should the system do when sources are missing, outdated, or conflicting?</a:t>
-            </a:r>
-            <a:endParaRPr lang="en-US" sz="1380" dirty="0"/>
+              <a:t>What should the system do when sources are missing, outdated, or.</a:t>
+            </a:r>
+            <a:endParaRPr lang="en-US" sz="1220" dirty="0"/>
           </a:p>
         </p:txBody>
       </p:sp>
@@ -7832,17 +7952,17 @@
         </p:nvSpPr>
         <p:spPr>
           <a:xfrm>
-            <a:off x="7799832" y="5001768"/>
-            <a:ext cx="3145536" cy="502920"/>
-          </a:xfrm>
-          <a:prstGeom prst="rect">
-            <a:avLst/>
-          </a:prstGeom>
-          <a:noFill/>
-          <a:ln/>
-        </p:spPr>
-        <p:txBody>
-          <a:bodyPr wrap="square" lIns="0" tIns="0" rIns="0" bIns="0" rtlCol="0" anchor="t">
+            <a:off x="7799832" y="4974336"/>
+            <a:ext cx="3145536" cy="576072"/>
+          </a:xfrm>
+          <a:prstGeom prst="rect">
+            <a:avLst/>
+          </a:prstGeom>
+          <a:noFill/>
+          <a:ln/>
+        </p:spPr>
+        <p:txBody>
+          <a:bodyPr wrap="square" lIns="254" tIns="254" rIns="254" bIns="254" rtlCol="0" anchor="t">
             <a:normAutofit/>
           </a:bodyPr>
           <a:lstStyle/>
@@ -7851,7 +7971,7 @@
               <a:buNone/>
             </a:pPr>
             <a:r>
-              <a:rPr lang="en-US" sz="1550" dirty="0">
+              <a:rPr lang="en-US" sz="1320" dirty="0">
                 <a:solidFill>
                   <a:srgbClr val="17364A"/>
                 </a:solidFill>
@@ -7859,9 +7979,9 @@
                 <a:ea typeface="Aptos" pitchFamily="34" charset="-122"/>
                 <a:cs typeface="Aptos" pitchFamily="34" charset="-120"/>
               </a:rPr>
-              <a:t>Use the assignment to test whether you can explain the concept, apply it to a realistic public health situation, and identify what would need review before the work moves forward.</a:t>
-            </a:r>
-            <a:endParaRPr lang="en-US" sz="1550" dirty="0"/>
+              <a:t>Use the assignment to test whether you can explain the concept, apply it to a realistic public health situation, and.</a:t>
+            </a:r>
+            <a:endParaRPr lang="en-US" sz="1320" dirty="0"/>
           </a:p>
         </p:txBody>
       </p:sp>
@@ -8162,49 +8282,58 @@
           <a:ln/>
         </p:spPr>
         <p:txBody>
-          <a:bodyPr wrap="square" lIns="635" tIns="635" rIns="635" bIns="635" rtlCol="0" anchor="t">
+          <a:bodyPr wrap="square" lIns="1016" tIns="1016" rIns="1016" bIns="1016" rtlCol="0" anchor="t">
             <a:normAutofit/>
           </a:bodyPr>
           <a:lstStyle/>
           <a:p>
+            <a:pPr indent="0" marL="0">
+              <a:buNone/>
+            </a:pPr>
             <a:r>
               <a:rPr lang="en-US" sz="2100" dirty="0">
                 <a:solidFill>
-                  <a:srgbClr val="17364A"/>
-                </a:solidFill>
-                <a:latin typeface="Aptos" pitchFamily="34" charset="0"/>
-                <a:ea typeface="Aptos" pitchFamily="34" charset="-122"/>
-                <a:cs typeface="Aptos" pitchFamily="34" charset="-120"/>
-              </a:rPr>
-              <a:t>Create a RAG readiness checklist for one public health knowledge workflow.</a:t>
+                  <a:srgbClr val="003A63"/>
+                </a:solidFill>
+                <a:latin typeface="Aptos" pitchFamily="34" charset="0"/>
+                <a:ea typeface="Aptos" pitchFamily="34" charset="-122"/>
+                <a:cs typeface="Aptos" pitchFamily="34" charset="-120"/>
+              </a:rPr>
+              <a:t>• Create a RAG readiness checklist for one public health knowledge workflow.</a:t>
             </a:r>
             <a:endParaRPr lang="en-US" sz="2100" dirty="0"/>
           </a:p>
           <a:p>
+            <a:pPr indent="0" marL="0">
+              <a:buNone/>
+            </a:pPr>
             <a:r>
               <a:rPr lang="en-US" sz="2100" dirty="0">
                 <a:solidFill>
-                  <a:srgbClr val="17364A"/>
-                </a:solidFill>
-                <a:latin typeface="Aptos" pitchFamily="34" charset="0"/>
-                <a:ea typeface="Aptos" pitchFamily="34" charset="-122"/>
-                <a:cs typeface="Aptos" pitchFamily="34" charset="-120"/>
-              </a:rPr>
-              <a:t>Include content inventory, source authority, document owners, update schedule, sensitivity level,.</a:t>
+                  <a:srgbClr val="003A63"/>
+                </a:solidFill>
+                <a:latin typeface="Aptos" pitchFamily="34" charset="0"/>
+                <a:ea typeface="Aptos" pitchFamily="34" charset="-122"/>
+                <a:cs typeface="Aptos" pitchFamily="34" charset="-120"/>
+              </a:rPr>
+              <a:t>• Include content inventory, source authority, document owners, update schedule, sensitivity.</a:t>
             </a:r>
             <a:endParaRPr lang="en-US" sz="2100" dirty="0"/>
           </a:p>
           <a:p>
+            <a:pPr indent="0" marL="0">
+              <a:buNone/>
+            </a:pPr>
             <a:r>
               <a:rPr lang="en-US" sz="2100" dirty="0">
                 <a:solidFill>
-                  <a:srgbClr val="17364A"/>
-                </a:solidFill>
-                <a:latin typeface="Aptos" pitchFamily="34" charset="0"/>
-                <a:ea typeface="Aptos" pitchFamily="34" charset="-122"/>
-                <a:cs typeface="Aptos" pitchFamily="34" charset="-120"/>
-              </a:rPr>
-              <a:t>The checklist should identify at least three “do not answer” or escalation situations, such as missing.</a:t>
+                  <a:srgbClr val="003A63"/>
+                </a:solidFill>
+                <a:latin typeface="Aptos" pitchFamily="34" charset="0"/>
+                <a:ea typeface="Aptos" pitchFamily="34" charset="-122"/>
+                <a:cs typeface="Aptos" pitchFamily="34" charset="-120"/>
+              </a:rPr>
+              <a:t>• The checklist should identify at least three “do not answer” or escalation situations, such as.</a:t>
             </a:r>
             <a:endParaRPr lang="en-US" sz="2100" dirty="0"/>
           </a:p>
@@ -8284,17 +8413,17 @@
         </p:nvSpPr>
         <p:spPr>
           <a:xfrm>
-            <a:off x="7799832" y="1828800"/>
-            <a:ext cx="3145536" cy="685800"/>
-          </a:xfrm>
-          <a:prstGeom prst="rect">
-            <a:avLst/>
-          </a:prstGeom>
-          <a:noFill/>
-          <a:ln/>
-        </p:spPr>
-        <p:txBody>
-          <a:bodyPr wrap="square" lIns="0" tIns="0" rIns="0" bIns="0" rtlCol="0" anchor="t">
+            <a:off x="7799832" y="1801368"/>
+            <a:ext cx="3145536" cy="758952"/>
+          </a:xfrm>
+          <a:prstGeom prst="rect">
+            <a:avLst/>
+          </a:prstGeom>
+          <a:noFill/>
+          <a:ln/>
+        </p:spPr>
+        <p:txBody>
+          <a:bodyPr wrap="square" lIns="254" tIns="254" rIns="254" bIns="254" rtlCol="0" anchor="t">
             <a:normAutofit/>
           </a:bodyPr>
           <a:lstStyle/>
@@ -8303,7 +8432,7 @@
               <a:buNone/>
             </a:pPr>
             <a:r>
-              <a:rPr lang="en-US" sz="1550" dirty="0">
+              <a:rPr lang="en-US" sz="1320" dirty="0">
                 <a:solidFill>
                   <a:srgbClr val="17364A"/>
                 </a:solidFill>
@@ -8313,7 +8442,7 @@
               </a:rPr>
               <a:t>Create a RAG readiness checklist for one public health knowledge workflow.</a:t>
             </a:r>
-            <a:endParaRPr lang="en-US" sz="1550" dirty="0"/>
+            <a:endParaRPr lang="en-US" sz="1320" dirty="0"/>
           </a:p>
         </p:txBody>
       </p:sp>
@@ -8401,13 +8530,16 @@
           <a:ln/>
         </p:spPr>
         <p:txBody>
-          <a:bodyPr wrap="square" lIns="254" tIns="254" rIns="254" bIns="254" rtlCol="0" anchor="t">
+          <a:bodyPr wrap="square" lIns="508" tIns="508" rIns="508" bIns="508" rtlCol="0" anchor="t">
             <a:normAutofit/>
           </a:bodyPr>
           <a:lstStyle/>
           <a:p>
-            <a:r>
-              <a:rPr lang="en-US" sz="1380" dirty="0">
+            <a:pPr indent="0" marL="0">
+              <a:buNone/>
+            </a:pPr>
+            <a:r>
+              <a:rPr lang="en-US" sz="1220" dirty="0">
                 <a:solidFill>
                   <a:srgbClr val="17364A"/>
                 </a:solidFill>
@@ -8415,13 +8547,16 @@
                 <a:ea typeface="Aptos" pitchFamily="34" charset="-122"/>
                 <a:cs typeface="Aptos" pitchFamily="34" charset="-120"/>
               </a:rPr>
-              <a:t>Include content inventory, source authority, document owners, update schedule, sensitivity.</a:t>
-            </a:r>
-            <a:endParaRPr lang="en-US" sz="1380" dirty="0"/>
-          </a:p>
-          <a:p>
-            <a:r>
-              <a:rPr lang="en-US" sz="1380" dirty="0">
+              <a:t>Include content inventory, source authority, document owners,.</a:t>
+            </a:r>
+            <a:endParaRPr lang="en-US" sz="1220" dirty="0"/>
+          </a:p>
+          <a:p>
+            <a:pPr indent="0" marL="0">
+              <a:buNone/>
+            </a:pPr>
+            <a:r>
+              <a:rPr lang="en-US" sz="1220" dirty="0">
                 <a:solidFill>
                   <a:srgbClr val="17364A"/>
                 </a:solidFill>
@@ -8429,9 +8564,9 @@
                 <a:ea typeface="Aptos" pitchFamily="34" charset="-122"/>
                 <a:cs typeface="Aptos" pitchFamily="34" charset="-120"/>
               </a:rPr>
-              <a:t>The checklist should identify at least three “do not answer” or escalation situations,.</a:t>
-            </a:r>
-            <a:endParaRPr lang="en-US" sz="1380" dirty="0"/>
+              <a:t>The checklist should identify at least three “do not answer” or.</a:t>
+            </a:r>
+            <a:endParaRPr lang="en-US" sz="1220" dirty="0"/>
           </a:p>
         </p:txBody>
       </p:sp>
@@ -8509,17 +8644,17 @@
         </p:nvSpPr>
         <p:spPr>
           <a:xfrm>
-            <a:off x="7799832" y="5001768"/>
-            <a:ext cx="3145536" cy="502920"/>
-          </a:xfrm>
-          <a:prstGeom prst="rect">
-            <a:avLst/>
-          </a:prstGeom>
-          <a:noFill/>
-          <a:ln/>
-        </p:spPr>
-        <p:txBody>
-          <a:bodyPr wrap="square" lIns="0" tIns="0" rIns="0" bIns="0" rtlCol="0" anchor="t">
+            <a:off x="7799832" y="4974336"/>
+            <a:ext cx="3145536" cy="576072"/>
+          </a:xfrm>
+          <a:prstGeom prst="rect">
+            <a:avLst/>
+          </a:prstGeom>
+          <a:noFill/>
+          <a:ln/>
+        </p:spPr>
+        <p:txBody>
+          <a:bodyPr wrap="square" lIns="254" tIns="254" rIns="254" bIns="254" rtlCol="0" anchor="t">
             <a:normAutofit/>
           </a:bodyPr>
           <a:lstStyle/>
@@ -8528,7 +8663,7 @@
               <a:buNone/>
             </a:pPr>
             <a:r>
-              <a:rPr lang="en-US" sz="1550" dirty="0">
+              <a:rPr lang="en-US" sz="1320" dirty="0">
                 <a:solidFill>
                   <a:srgbClr val="17364A"/>
                 </a:solidFill>
@@ -8536,9 +8671,9 @@
                 <a:ea typeface="Aptos" pitchFamily="34" charset="-122"/>
                 <a:cs typeface="Aptos" pitchFamily="34" charset="-120"/>
               </a:rPr>
-              <a:t>Use the assignment to test whether you can explain the concept, apply it to a realistic public health situation, and identify what would need review before the work moves forward.</a:t>
-            </a:r>
-            <a:endParaRPr lang="en-US" sz="1550" dirty="0"/>
+              <a:t>Use the assignment to test whether you can explain the concept, apply it to a realistic public health situation, and.</a:t>
+            </a:r>
+            <a:endParaRPr lang="en-US" sz="1320" dirty="0"/>
           </a:p>
         </p:txBody>
       </p:sp>
@@ -8839,49 +8974,58 @@
           <a:ln/>
         </p:spPr>
         <p:txBody>
-          <a:bodyPr wrap="square" lIns="635" tIns="635" rIns="635" bIns="635" rtlCol="0" anchor="t">
+          <a:bodyPr wrap="square" lIns="1016" tIns="1016" rIns="1016" bIns="1016" rtlCol="0" anchor="t">
             <a:normAutofit/>
           </a:bodyPr>
           <a:lstStyle/>
           <a:p>
+            <a:pPr indent="0" marL="0">
+              <a:buNone/>
+            </a:pPr>
             <a:r>
               <a:rPr lang="en-US" sz="2100" dirty="0">
                 <a:solidFill>
-                  <a:srgbClr val="17364A"/>
-                </a:solidFill>
-                <a:latin typeface="Aptos" pitchFamily="34" charset="0"/>
-                <a:ea typeface="Aptos" pitchFamily="34" charset="-122"/>
-                <a:cs typeface="Aptos" pitchFamily="34" charset="-120"/>
-              </a:rPr>
-              <a:t>RAG readiness checklist</a:t>
+                  <a:srgbClr val="003A63"/>
+                </a:solidFill>
+                <a:latin typeface="Aptos" pitchFamily="34" charset="0"/>
+                <a:ea typeface="Aptos" pitchFamily="34" charset="-122"/>
+                <a:cs typeface="Aptos" pitchFamily="34" charset="-120"/>
+              </a:rPr>
+              <a:t>• RAG readiness checklist</a:t>
             </a:r>
             <a:endParaRPr lang="en-US" sz="2100" dirty="0"/>
           </a:p>
           <a:p>
+            <a:pPr indent="0" marL="0">
+              <a:buNone/>
+            </a:pPr>
             <a:r>
               <a:rPr lang="en-US" sz="2100" dirty="0">
                 <a:solidFill>
-                  <a:srgbClr val="17364A"/>
-                </a:solidFill>
-                <a:latin typeface="Aptos" pitchFamily="34" charset="0"/>
-                <a:ea typeface="Aptos" pitchFamily="34" charset="-122"/>
-                <a:cs typeface="Aptos" pitchFamily="34" charset="-120"/>
-              </a:rPr>
-              <a:t>Content inventory and ownership table</a:t>
+                  <a:srgbClr val="003A63"/>
+                </a:solidFill>
+                <a:latin typeface="Aptos" pitchFamily="34" charset="0"/>
+                <a:ea typeface="Aptos" pitchFamily="34" charset="-122"/>
+                <a:cs typeface="Aptos" pitchFamily="34" charset="-120"/>
+              </a:rPr>
+              <a:t>• Content inventory and ownership table</a:t>
             </a:r>
             <a:endParaRPr lang="en-US" sz="2100" dirty="0"/>
           </a:p>
           <a:p>
+            <a:pPr indent="0" marL="0">
+              <a:buNone/>
+            </a:pPr>
             <a:r>
               <a:rPr lang="en-US" sz="2100" dirty="0">
                 <a:solidFill>
-                  <a:srgbClr val="17364A"/>
-                </a:solidFill>
-                <a:latin typeface="Aptos" pitchFamily="34" charset="0"/>
-                <a:ea typeface="Aptos" pitchFamily="34" charset="-122"/>
-                <a:cs typeface="Aptos" pitchFamily="34" charset="-120"/>
-              </a:rPr>
-              <a:t>Retrieval test question set</a:t>
+                  <a:srgbClr val="003A63"/>
+                </a:solidFill>
+                <a:latin typeface="Aptos" pitchFamily="34" charset="0"/>
+                <a:ea typeface="Aptos" pitchFamily="34" charset="-122"/>
+                <a:cs typeface="Aptos" pitchFamily="34" charset="-120"/>
+              </a:rPr>
+              <a:t>• Retrieval test question set</a:t>
             </a:r>
             <a:endParaRPr lang="en-US" sz="2100" dirty="0"/>
           </a:p>
@@ -8961,17 +9105,17 @@
         </p:nvSpPr>
         <p:spPr>
           <a:xfrm>
-            <a:off x="7799832" y="1828800"/>
-            <a:ext cx="3145536" cy="685800"/>
-          </a:xfrm>
-          <a:prstGeom prst="rect">
-            <a:avLst/>
-          </a:prstGeom>
-          <a:noFill/>
-          <a:ln/>
-        </p:spPr>
-        <p:txBody>
-          <a:bodyPr wrap="square" lIns="0" tIns="0" rIns="0" bIns="0" rtlCol="0" anchor="t">
+            <a:off x="7799832" y="1801368"/>
+            <a:ext cx="3145536" cy="758952"/>
+          </a:xfrm>
+          <a:prstGeom prst="rect">
+            <a:avLst/>
+          </a:prstGeom>
+          <a:noFill/>
+          <a:ln/>
+        </p:spPr>
+        <p:txBody>
+          <a:bodyPr wrap="square" lIns="254" tIns="254" rIns="254" bIns="254" rtlCol="0" anchor="t">
             <a:normAutofit/>
           </a:bodyPr>
           <a:lstStyle/>
@@ -8980,7 +9124,7 @@
               <a:buNone/>
             </a:pPr>
             <a:r>
-              <a:rPr lang="en-US" sz="1550" dirty="0">
+              <a:rPr lang="en-US" sz="1320" dirty="0">
                 <a:solidFill>
                   <a:srgbClr val="17364A"/>
                 </a:solidFill>
@@ -8990,7 +9134,7 @@
               </a:rPr>
               <a:t>RAG readiness checklist</a:t>
             </a:r>
-            <a:endParaRPr lang="en-US" sz="1550" dirty="0"/>
+            <a:endParaRPr lang="en-US" sz="1320" dirty="0"/>
           </a:p>
         </p:txBody>
       </p:sp>
@@ -9078,13 +9222,16 @@
           <a:ln/>
         </p:spPr>
         <p:txBody>
-          <a:bodyPr wrap="square" lIns="254" tIns="254" rIns="254" bIns="254" rtlCol="0" anchor="t">
+          <a:bodyPr wrap="square" lIns="508" tIns="508" rIns="508" bIns="508" rtlCol="0" anchor="t">
             <a:normAutofit/>
           </a:bodyPr>
           <a:lstStyle/>
           <a:p>
-            <a:r>
-              <a:rPr lang="en-US" sz="1380" dirty="0">
+            <a:pPr indent="0" marL="0">
+              <a:buNone/>
+            </a:pPr>
+            <a:r>
+              <a:rPr lang="en-US" sz="1220" dirty="0">
                 <a:solidFill>
                   <a:srgbClr val="17364A"/>
                 </a:solidFill>
@@ -9094,11 +9241,14 @@
               </a:rPr>
               <a:t>RAG readiness checklist</a:t>
             </a:r>
-            <a:endParaRPr lang="en-US" sz="1380" dirty="0"/>
-          </a:p>
-          <a:p>
-            <a:r>
-              <a:rPr lang="en-US" sz="1380" dirty="0">
+            <a:endParaRPr lang="en-US" sz="1220" dirty="0"/>
+          </a:p>
+          <a:p>
+            <a:pPr indent="0" marL="0">
+              <a:buNone/>
+            </a:pPr>
+            <a:r>
+              <a:rPr lang="en-US" sz="1220" dirty="0">
                 <a:solidFill>
                   <a:srgbClr val="17364A"/>
                 </a:solidFill>
@@ -9108,11 +9258,14 @@
               </a:rPr>
               <a:t>Content inventory and ownership table</a:t>
             </a:r>
-            <a:endParaRPr lang="en-US" sz="1380" dirty="0"/>
-          </a:p>
-          <a:p>
-            <a:r>
-              <a:rPr lang="en-US" sz="1380" dirty="0">
+            <a:endParaRPr lang="en-US" sz="1220" dirty="0"/>
+          </a:p>
+          <a:p>
+            <a:pPr indent="0" marL="0">
+              <a:buNone/>
+            </a:pPr>
+            <a:r>
+              <a:rPr lang="en-US" sz="1220" dirty="0">
                 <a:solidFill>
                   <a:srgbClr val="17364A"/>
                 </a:solidFill>
@@ -9122,7 +9275,7 @@
               </a:rPr>
               <a:t>Retrieval test question set</a:t>
             </a:r>
-            <a:endParaRPr lang="en-US" sz="1380" dirty="0"/>
+            <a:endParaRPr lang="en-US" sz="1220" dirty="0"/>
           </a:p>
         </p:txBody>
       </p:sp>
@@ -9200,17 +9353,17 @@
         </p:nvSpPr>
         <p:spPr>
           <a:xfrm>
-            <a:off x="7799832" y="5001768"/>
-            <a:ext cx="3145536" cy="502920"/>
-          </a:xfrm>
-          <a:prstGeom prst="rect">
-            <a:avLst/>
-          </a:prstGeom>
-          <a:noFill/>
-          <a:ln/>
-        </p:spPr>
-        <p:txBody>
-          <a:bodyPr wrap="square" lIns="0" tIns="0" rIns="0" bIns="0" rtlCol="0" anchor="t">
+            <a:off x="7799832" y="4974336"/>
+            <a:ext cx="3145536" cy="576072"/>
+          </a:xfrm>
+          <a:prstGeom prst="rect">
+            <a:avLst/>
+          </a:prstGeom>
+          <a:noFill/>
+          <a:ln/>
+        </p:spPr>
+        <p:txBody>
+          <a:bodyPr wrap="square" lIns="254" tIns="254" rIns="254" bIns="254" rtlCol="0" anchor="t">
             <a:normAutofit/>
           </a:bodyPr>
           <a:lstStyle/>
@@ -9219,7 +9372,7 @@
               <a:buNone/>
             </a:pPr>
             <a:r>
-              <a:rPr lang="en-US" sz="1550" dirty="0">
+              <a:rPr lang="en-US" sz="1320" dirty="0">
                 <a:solidFill>
                   <a:srgbClr val="17364A"/>
                 </a:solidFill>
@@ -9227,9 +9380,9 @@
                 <a:ea typeface="Aptos" pitchFamily="34" charset="-122"/>
                 <a:cs typeface="Aptos" pitchFamily="34" charset="-120"/>
               </a:rPr>
-              <a:t>Use the assignment to test whether you can explain the concept, apply it to a realistic public health situation, and identify what would need review before the work moves forward.</a:t>
-            </a:r>
-            <a:endParaRPr lang="en-US" sz="1550" dirty="0"/>
+              <a:t>Use the assignment to test whether you can explain the concept, apply it to a realistic public health situation, and.</a:t>
+            </a:r>
+            <a:endParaRPr lang="en-US" sz="1320" dirty="0"/>
           </a:p>
         </p:txBody>
       </p:sp>
@@ -9530,21 +9683,24 @@
           <a:ln/>
         </p:spPr>
         <p:txBody>
-          <a:bodyPr wrap="square" lIns="635" tIns="635" rIns="635" bIns="635" rtlCol="0" anchor="t">
+          <a:bodyPr wrap="square" lIns="1016" tIns="1016" rIns="1016" bIns="1016" rtlCol="0" anchor="t">
             <a:normAutofit/>
           </a:bodyPr>
           <a:lstStyle/>
           <a:p>
+            <a:pPr indent="0" marL="0">
+              <a:buNone/>
+            </a:pPr>
             <a:r>
               <a:rPr lang="en-US" sz="2100" dirty="0">
                 <a:solidFill>
-                  <a:srgbClr val="17364A"/>
-                </a:solidFill>
-                <a:latin typeface="Aptos" pitchFamily="34" charset="0"/>
-                <a:ea typeface="Aptos" pitchFamily="34" charset="-122"/>
-                <a:cs typeface="Aptos" pitchFamily="34" charset="-120"/>
-              </a:rPr>
-              <a:t>Citation and source verification protocol</a:t>
+                  <a:srgbClr val="003A63"/>
+                </a:solidFill>
+                <a:latin typeface="Aptos" pitchFamily="34" charset="0"/>
+                <a:ea typeface="Aptos" pitchFamily="34" charset="-122"/>
+                <a:cs typeface="Aptos" pitchFamily="34" charset="-120"/>
+              </a:rPr>
+              <a:t>• Citation and source verification protocol</a:t>
             </a:r>
             <a:endParaRPr lang="en-US" sz="2100" dirty="0"/>
           </a:p>
@@ -9624,17 +9780,17 @@
         </p:nvSpPr>
         <p:spPr>
           <a:xfrm>
-            <a:off x="7799832" y="1828800"/>
-            <a:ext cx="3145536" cy="685800"/>
-          </a:xfrm>
-          <a:prstGeom prst="rect">
-            <a:avLst/>
-          </a:prstGeom>
-          <a:noFill/>
-          <a:ln/>
-        </p:spPr>
-        <p:txBody>
-          <a:bodyPr wrap="square" lIns="0" tIns="0" rIns="0" bIns="0" rtlCol="0" anchor="t">
+            <a:off x="7799832" y="1801368"/>
+            <a:ext cx="3145536" cy="758952"/>
+          </a:xfrm>
+          <a:prstGeom prst="rect">
+            <a:avLst/>
+          </a:prstGeom>
+          <a:noFill/>
+          <a:ln/>
+        </p:spPr>
+        <p:txBody>
+          <a:bodyPr wrap="square" lIns="254" tIns="254" rIns="254" bIns="254" rtlCol="0" anchor="t">
             <a:normAutofit/>
           </a:bodyPr>
           <a:lstStyle/>
@@ -9643,7 +9799,7 @@
               <a:buNone/>
             </a:pPr>
             <a:r>
-              <a:rPr lang="en-US" sz="1550" dirty="0">
+              <a:rPr lang="en-US" sz="1320" dirty="0">
                 <a:solidFill>
                   <a:srgbClr val="17364A"/>
                 </a:solidFill>
@@ -9653,7 +9809,7 @@
               </a:rPr>
               <a:t>Citation and source verification protocol</a:t>
             </a:r>
-            <a:endParaRPr lang="en-US" sz="1550" dirty="0"/>
+            <a:endParaRPr lang="en-US" sz="1320" dirty="0"/>
           </a:p>
         </p:txBody>
       </p:sp>
@@ -9741,13 +9897,16 @@
           <a:ln/>
         </p:spPr>
         <p:txBody>
-          <a:bodyPr wrap="square" lIns="254" tIns="254" rIns="254" bIns="254" rtlCol="0" anchor="t">
+          <a:bodyPr wrap="square" lIns="508" tIns="508" rIns="508" bIns="508" rtlCol="0" anchor="t">
             <a:normAutofit/>
           </a:bodyPr>
           <a:lstStyle/>
           <a:p>
-            <a:r>
-              <a:rPr lang="en-US" sz="1380" dirty="0">
+            <a:pPr indent="0" marL="0">
+              <a:buNone/>
+            </a:pPr>
+            <a:r>
+              <a:rPr lang="en-US" sz="1220" dirty="0">
                 <a:solidFill>
                   <a:srgbClr val="17364A"/>
                 </a:solidFill>
@@ -9757,7 +9916,7 @@
               </a:rPr>
               <a:t>Citation and source verification protocol</a:t>
             </a:r>
-            <a:endParaRPr lang="en-US" sz="1380" dirty="0"/>
+            <a:endParaRPr lang="en-US" sz="1220" dirty="0"/>
           </a:p>
         </p:txBody>
       </p:sp>
@@ -9835,17 +9994,17 @@
         </p:nvSpPr>
         <p:spPr>
           <a:xfrm>
-            <a:off x="7799832" y="5001768"/>
-            <a:ext cx="3145536" cy="502920"/>
-          </a:xfrm>
-          <a:prstGeom prst="rect">
-            <a:avLst/>
-          </a:prstGeom>
-          <a:noFill/>
-          <a:ln/>
-        </p:spPr>
-        <p:txBody>
-          <a:bodyPr wrap="square" lIns="0" tIns="0" rIns="0" bIns="0" rtlCol="0" anchor="t">
+            <a:off x="7799832" y="4974336"/>
+            <a:ext cx="3145536" cy="576072"/>
+          </a:xfrm>
+          <a:prstGeom prst="rect">
+            <a:avLst/>
+          </a:prstGeom>
+          <a:noFill/>
+          <a:ln/>
+        </p:spPr>
+        <p:txBody>
+          <a:bodyPr wrap="square" lIns="254" tIns="254" rIns="254" bIns="254" rtlCol="0" anchor="t">
             <a:normAutofit/>
           </a:bodyPr>
           <a:lstStyle/>
@@ -9854,7 +10013,7 @@
               <a:buNone/>
             </a:pPr>
             <a:r>
-              <a:rPr lang="en-US" sz="1550" dirty="0">
+              <a:rPr lang="en-US" sz="1320" dirty="0">
                 <a:solidFill>
                   <a:srgbClr val="17364A"/>
                 </a:solidFill>
@@ -9862,9 +10021,9 @@
                 <a:ea typeface="Aptos" pitchFamily="34" charset="-122"/>
                 <a:cs typeface="Aptos" pitchFamily="34" charset="-120"/>
               </a:rPr>
-              <a:t>Use the assignment to test whether you can explain the concept, apply it to a realistic public health situation, and identify what would need review before the work moves forward.</a:t>
-            </a:r>
-            <a:endParaRPr lang="en-US" sz="1550" dirty="0"/>
+              <a:t>Use the assignment to test whether you can explain the concept, apply it to a realistic public health situation, and.</a:t>
+            </a:r>
+            <a:endParaRPr lang="en-US" sz="1320" dirty="0"/>
           </a:p>
         </p:txBody>
       </p:sp>
@@ -10165,49 +10324,58 @@
           <a:ln/>
         </p:spPr>
         <p:txBody>
-          <a:bodyPr wrap="square" lIns="635" tIns="635" rIns="635" bIns="635" rtlCol="0" anchor="t">
+          <a:bodyPr wrap="square" lIns="1016" tIns="1016" rIns="1016" bIns="1016" rtlCol="0" anchor="t">
             <a:normAutofit/>
           </a:bodyPr>
           <a:lstStyle/>
           <a:p>
+            <a:pPr indent="0" marL="0">
+              <a:buNone/>
+            </a:pPr>
             <a:r>
               <a:rPr lang="en-US" sz="2100" dirty="0">
                 <a:solidFill>
-                  <a:srgbClr val="17364A"/>
-                </a:solidFill>
-                <a:latin typeface="Aptos" pitchFamily="34" charset="0"/>
-                <a:ea typeface="Aptos" pitchFamily="34" charset="-122"/>
-                <a:cs typeface="Aptos" pitchFamily="34" charset="-120"/>
-              </a:rPr>
-              <a:t>Retrieval-augmented generation, often called RAG, combines generative AI with retrieval from a defined set of.</a:t>
+                  <a:srgbClr val="003A63"/>
+                </a:solidFill>
+                <a:latin typeface="Aptos" pitchFamily="34" charset="0"/>
+                <a:ea typeface="Aptos" pitchFamily="34" charset="-122"/>
+                <a:cs typeface="Aptos" pitchFamily="34" charset="-120"/>
+              </a:rPr>
+              <a:t>• Retrieval-augmented generation, often called RAG, combines generative AI with retrieval from a.</a:t>
             </a:r>
             <a:endParaRPr lang="en-US" sz="2100" dirty="0"/>
           </a:p>
           <a:p>
+            <a:pPr indent="0" marL="0">
+              <a:buNone/>
+            </a:pPr>
             <a:r>
               <a:rPr lang="en-US" sz="2100" dirty="0">
                 <a:solidFill>
-                  <a:srgbClr val="17364A"/>
-                </a:solidFill>
-                <a:latin typeface="Aptos" pitchFamily="34" charset="0"/>
-                <a:ea typeface="Aptos" pitchFamily="34" charset="-122"/>
-                <a:cs typeface="Aptos" pitchFamily="34" charset="-120"/>
-              </a:rPr>
-              <a:t>Instead of relying only on a model’s general training, a RAG system searches approved content and uses retrieved.</a:t>
+                  <a:srgbClr val="003A63"/>
+                </a:solidFill>
+                <a:latin typeface="Aptos" pitchFamily="34" charset="0"/>
+                <a:ea typeface="Aptos" pitchFamily="34" charset="-122"/>
+                <a:cs typeface="Aptos" pitchFamily="34" charset="-120"/>
+              </a:rPr>
+              <a:t>• Instead of relying only on a model’s general training, a RAG system searches approved content.</a:t>
             </a:r>
             <a:endParaRPr lang="en-US" sz="2100" dirty="0"/>
           </a:p>
           <a:p>
+            <a:pPr indent="0" marL="0">
+              <a:buNone/>
+            </a:pPr>
             <a:r>
               <a:rPr lang="en-US" sz="2100" dirty="0">
                 <a:solidFill>
-                  <a:srgbClr val="17364A"/>
-                </a:solidFill>
-                <a:latin typeface="Aptos" pitchFamily="34" charset="0"/>
-                <a:ea typeface="Aptos" pitchFamily="34" charset="-122"/>
-                <a:cs typeface="Aptos" pitchFamily="34" charset="-120"/>
-              </a:rPr>
-              <a:t>In public health, RAG may support policy lookup, protocol interpretation, internal help desks, training support,.</a:t>
+                  <a:srgbClr val="003A63"/>
+                </a:solidFill>
+                <a:latin typeface="Aptos" pitchFamily="34" charset="0"/>
+                <a:ea typeface="Aptos" pitchFamily="34" charset="-122"/>
+                <a:cs typeface="Aptos" pitchFamily="34" charset="-120"/>
+              </a:rPr>
+              <a:t>• In public health, RAG may support policy lookup, protocol interpretation, internal help desks,.</a:t>
             </a:r>
             <a:endParaRPr lang="en-US" sz="2100" dirty="0"/>
           </a:p>
@@ -10287,17 +10455,17 @@
         </p:nvSpPr>
         <p:spPr>
           <a:xfrm>
-            <a:off x="8074152" y="1920240"/>
-            <a:ext cx="2825496" cy="1280160"/>
-          </a:xfrm>
-          <a:prstGeom prst="rect">
-            <a:avLst/>
-          </a:prstGeom>
-          <a:noFill/>
-          <a:ln/>
-        </p:spPr>
-        <p:txBody>
-          <a:bodyPr wrap="square" lIns="0" tIns="0" rIns="0" bIns="0" rtlCol="0" anchor="t">
+            <a:off x="8074152" y="1892808"/>
+            <a:ext cx="2825496" cy="1353312"/>
+          </a:xfrm>
+          <a:prstGeom prst="rect">
+            <a:avLst/>
+          </a:prstGeom>
+          <a:noFill/>
+          <a:ln/>
+        </p:spPr>
+        <p:txBody>
+          <a:bodyPr wrap="square" lIns="254" tIns="254" rIns="254" bIns="254" rtlCol="0" anchor="t">
             <a:normAutofit/>
           </a:bodyPr>
           <a:lstStyle/>
@@ -10306,7 +10474,7 @@
               <a:buNone/>
             </a:pPr>
             <a:r>
-              <a:rPr lang="en-US" sz="1550" dirty="0">
+              <a:rPr lang="en-US" sz="1320" dirty="0">
                 <a:solidFill>
                   <a:srgbClr val="17364A"/>
                 </a:solidFill>
@@ -10314,43 +10482,9 @@
                 <a:ea typeface="Aptos" pitchFamily="34" charset="-122"/>
                 <a:cs typeface="Aptos" pitchFamily="34" charset="-120"/>
               </a:rPr>
-              <a:t>Level: intermediate/practitioner</a:t>
-            </a:r>
-            <a:endParaRPr lang="en-US" sz="1550" dirty="0"/>
-          </a:p>
-          <a:p>
-            <a:pPr indent="0" marL="0">
-              <a:buNone/>
-            </a:pPr>
-            <a:r>
-              <a:rPr lang="en-US" sz="1550" dirty="0">
-                <a:solidFill>
-                  <a:srgbClr val="17364A"/>
-                </a:solidFill>
-                <a:latin typeface="Aptos" pitchFamily="34" charset="0"/>
-                <a:ea typeface="Aptos" pitchFamily="34" charset="-122"/>
-                <a:cs typeface="Aptos" pitchFamily="34" charset="-120"/>
-              </a:rPr>
-              <a:t>Primary track: Technical Architecture Track</a:t>
-            </a:r>
-            <a:endParaRPr lang="en-US" sz="1550" dirty="0"/>
-          </a:p>
-          <a:p>
-            <a:pPr indent="0" marL="0">
-              <a:buNone/>
-            </a:pPr>
-            <a:r>
-              <a:rPr lang="en-US" sz="1550" dirty="0">
-                <a:solidFill>
-                  <a:srgbClr val="17364A"/>
-                </a:solidFill>
-                <a:latin typeface="Aptos" pitchFamily="34" charset="0"/>
-                <a:ea typeface="Aptos" pitchFamily="34" charset="-122"/>
-                <a:cs typeface="Aptos" pitchFamily="34" charset="-120"/>
-              </a:rPr>
-              <a:t>Appears in tracks: analytics-modeling</a:t>
-            </a:r>
-            <a:endParaRPr lang="en-US" sz="1550" dirty="0"/>
+              <a:t>Level: intermediate/practitioner Primary track: Technical Architecture Track Appears in tracks: analytics-modeling</a:t>
+            </a:r>
+            <a:endParaRPr lang="en-US" sz="1320" dirty="0"/>
           </a:p>
         </p:txBody>
       </p:sp>
@@ -10438,13 +10572,16 @@
           <a:ln/>
         </p:spPr>
         <p:txBody>
-          <a:bodyPr wrap="square" lIns="254" tIns="254" rIns="254" bIns="254" rtlCol="0" anchor="t">
+          <a:bodyPr wrap="square" lIns="508" tIns="508" rIns="508" bIns="508" rtlCol="0" anchor="t">
             <a:normAutofit/>
           </a:bodyPr>
           <a:lstStyle/>
           <a:p>
-            <a:r>
-              <a:rPr lang="en-US" sz="1380" dirty="0">
+            <a:pPr indent="0" marL="0">
+              <a:buNone/>
+            </a:pPr>
+            <a:r>
+              <a:rPr lang="en-US" sz="1220" dirty="0">
                 <a:solidFill>
                   <a:srgbClr val="17364A"/>
                 </a:solidFill>
@@ -10454,11 +10591,14 @@
               </a:rPr>
               <a:t>Read the module for shared vocabulary and context.</a:t>
             </a:r>
-            <a:endParaRPr lang="en-US" sz="1380" dirty="0"/>
-          </a:p>
-          <a:p>
-            <a:r>
-              <a:rPr lang="en-US" sz="1380" dirty="0">
+            <a:endParaRPr lang="en-US" sz="1220" dirty="0"/>
+          </a:p>
+          <a:p>
+            <a:pPr indent="0" marL="0">
+              <a:buNone/>
+            </a:pPr>
+            <a:r>
+              <a:rPr lang="en-US" sz="1220" dirty="0">
                 <a:solidFill>
                   <a:srgbClr val="17364A"/>
                 </a:solidFill>
@@ -10468,11 +10608,14 @@
               </a:rPr>
               <a:t>Complete the practical exercise to apply the concept.</a:t>
             </a:r>
-            <a:endParaRPr lang="en-US" sz="1380" dirty="0"/>
-          </a:p>
-          <a:p>
-            <a:r>
-              <a:rPr lang="en-US" sz="1380" dirty="0">
+            <a:endParaRPr lang="en-US" sz="1220" dirty="0"/>
+          </a:p>
+          <a:p>
+            <a:pPr indent="0" marL="0">
+              <a:buNone/>
+            </a:pPr>
+            <a:r>
+              <a:rPr lang="en-US" sz="1220" dirty="0">
                 <a:solidFill>
                   <a:srgbClr val="17364A"/>
                 </a:solidFill>
@@ -10482,7 +10625,7 @@
               </a:rPr>
               <a:t>Use the notes and references for deeper review.</a:t>
             </a:r>
-            <a:endParaRPr lang="en-US" sz="1380" dirty="0"/>
+            <a:endParaRPr lang="en-US" sz="1220" dirty="0"/>
           </a:p>
         </p:txBody>
       </p:sp>
@@ -10783,49 +10926,58 @@
           <a:ln/>
         </p:spPr>
         <p:txBody>
-          <a:bodyPr wrap="square" lIns="635" tIns="635" rIns="635" bIns="635" rtlCol="0" anchor="t">
+          <a:bodyPr wrap="square" lIns="1016" tIns="1016" rIns="1016" bIns="1016" rtlCol="0" anchor="t">
             <a:normAutofit/>
           </a:bodyPr>
           <a:lstStyle/>
           <a:p>
+            <a:pPr indent="0" marL="0">
+              <a:buNone/>
+            </a:pPr>
             <a:r>
               <a:rPr lang="en-US" sz="2100" dirty="0">
                 <a:solidFill>
-                  <a:srgbClr val="17364A"/>
-                </a:solidFill>
-                <a:latin typeface="Aptos" pitchFamily="34" charset="0"/>
-                <a:ea typeface="Aptos" pitchFamily="34" charset="-122"/>
-                <a:cs typeface="Aptos" pitchFamily="34" charset="-120"/>
-              </a:rPr>
-              <a:t>RAG readiness checklist</a:t>
+                  <a:srgbClr val="003A63"/>
+                </a:solidFill>
+                <a:latin typeface="Aptos" pitchFamily="34" charset="0"/>
+                <a:ea typeface="Aptos" pitchFamily="34" charset="-122"/>
+                <a:cs typeface="Aptos" pitchFamily="34" charset="-120"/>
+              </a:rPr>
+              <a:t>• RAG readiness checklist</a:t>
             </a:r>
             <a:endParaRPr lang="en-US" sz="2100" dirty="0"/>
           </a:p>
           <a:p>
+            <a:pPr indent="0" marL="0">
+              <a:buNone/>
+            </a:pPr>
             <a:r>
               <a:rPr lang="en-US" sz="2100" dirty="0">
                 <a:solidFill>
-                  <a:srgbClr val="17364A"/>
-                </a:solidFill>
-                <a:latin typeface="Aptos" pitchFamily="34" charset="0"/>
-                <a:ea typeface="Aptos" pitchFamily="34" charset="-122"/>
-                <a:cs typeface="Aptos" pitchFamily="34" charset="-120"/>
-              </a:rPr>
-              <a:t>Content inventory and ownership table</a:t>
+                  <a:srgbClr val="003A63"/>
+                </a:solidFill>
+                <a:latin typeface="Aptos" pitchFamily="34" charset="0"/>
+                <a:ea typeface="Aptos" pitchFamily="34" charset="-122"/>
+                <a:cs typeface="Aptos" pitchFamily="34" charset="-120"/>
+              </a:rPr>
+              <a:t>• Content inventory and ownership table</a:t>
             </a:r>
             <a:endParaRPr lang="en-US" sz="2100" dirty="0"/>
           </a:p>
           <a:p>
+            <a:pPr indent="0" marL="0">
+              <a:buNone/>
+            </a:pPr>
             <a:r>
               <a:rPr lang="en-US" sz="2100" dirty="0">
                 <a:solidFill>
-                  <a:srgbClr val="17364A"/>
-                </a:solidFill>
-                <a:latin typeface="Aptos" pitchFamily="34" charset="0"/>
-                <a:ea typeface="Aptos" pitchFamily="34" charset="-122"/>
-                <a:cs typeface="Aptos" pitchFamily="34" charset="-120"/>
-              </a:rPr>
-              <a:t>Retrieval test question set</a:t>
+                  <a:srgbClr val="003A63"/>
+                </a:solidFill>
+                <a:latin typeface="Aptos" pitchFamily="34" charset="0"/>
+                <a:ea typeface="Aptos" pitchFamily="34" charset="-122"/>
+                <a:cs typeface="Aptos" pitchFamily="34" charset="-120"/>
+              </a:rPr>
+              <a:t>• Retrieval test question set</a:t>
             </a:r>
             <a:endParaRPr lang="en-US" sz="2100" dirty="0"/>
           </a:p>
@@ -10905,17 +11057,17 @@
         </p:nvSpPr>
         <p:spPr>
           <a:xfrm>
-            <a:off x="7799832" y="1828800"/>
-            <a:ext cx="3145536" cy="685800"/>
-          </a:xfrm>
-          <a:prstGeom prst="rect">
-            <a:avLst/>
-          </a:prstGeom>
-          <a:noFill/>
-          <a:ln/>
-        </p:spPr>
-        <p:txBody>
-          <a:bodyPr wrap="square" lIns="0" tIns="0" rIns="0" bIns="0" rtlCol="0" anchor="t">
+            <a:off x="7799832" y="1801368"/>
+            <a:ext cx="3145536" cy="758952"/>
+          </a:xfrm>
+          <a:prstGeom prst="rect">
+            <a:avLst/>
+          </a:prstGeom>
+          <a:noFill/>
+          <a:ln/>
+        </p:spPr>
+        <p:txBody>
+          <a:bodyPr wrap="square" lIns="254" tIns="254" rIns="254" bIns="254" rtlCol="0" anchor="t">
             <a:normAutofit/>
           </a:bodyPr>
           <a:lstStyle/>
@@ -10924,7 +11076,7 @@
               <a:buNone/>
             </a:pPr>
             <a:r>
-              <a:rPr lang="en-US" sz="1550" dirty="0">
+              <a:rPr lang="en-US" sz="1320" dirty="0">
                 <a:solidFill>
                   <a:srgbClr val="17364A"/>
                 </a:solidFill>
@@ -10934,7 +11086,7 @@
               </a:rPr>
               <a:t>RAG readiness checklist</a:t>
             </a:r>
-            <a:endParaRPr lang="en-US" sz="1550" dirty="0"/>
+            <a:endParaRPr lang="en-US" sz="1320" dirty="0"/>
           </a:p>
         </p:txBody>
       </p:sp>
@@ -11022,13 +11174,16 @@
           <a:ln/>
         </p:spPr>
         <p:txBody>
-          <a:bodyPr wrap="square" lIns="254" tIns="254" rIns="254" bIns="254" rtlCol="0" anchor="t">
+          <a:bodyPr wrap="square" lIns="508" tIns="508" rIns="508" bIns="508" rtlCol="0" anchor="t">
             <a:normAutofit/>
           </a:bodyPr>
           <a:lstStyle/>
           <a:p>
-            <a:r>
-              <a:rPr lang="en-US" sz="1380" dirty="0">
+            <a:pPr indent="0" marL="0">
+              <a:buNone/>
+            </a:pPr>
+            <a:r>
+              <a:rPr lang="en-US" sz="1220" dirty="0">
                 <a:solidFill>
                   <a:srgbClr val="17364A"/>
                 </a:solidFill>
@@ -11038,11 +11193,14 @@
               </a:rPr>
               <a:t>RAG readiness checklist</a:t>
             </a:r>
-            <a:endParaRPr lang="en-US" sz="1380" dirty="0"/>
-          </a:p>
-          <a:p>
-            <a:r>
-              <a:rPr lang="en-US" sz="1380" dirty="0">
+            <a:endParaRPr lang="en-US" sz="1220" dirty="0"/>
+          </a:p>
+          <a:p>
+            <a:pPr indent="0" marL="0">
+              <a:buNone/>
+            </a:pPr>
+            <a:r>
+              <a:rPr lang="en-US" sz="1220" dirty="0">
                 <a:solidFill>
                   <a:srgbClr val="17364A"/>
                 </a:solidFill>
@@ -11052,11 +11210,14 @@
               </a:rPr>
               <a:t>Content inventory and ownership table</a:t>
             </a:r>
-            <a:endParaRPr lang="en-US" sz="1380" dirty="0"/>
-          </a:p>
-          <a:p>
-            <a:r>
-              <a:rPr lang="en-US" sz="1380" dirty="0">
+            <a:endParaRPr lang="en-US" sz="1220" dirty="0"/>
+          </a:p>
+          <a:p>
+            <a:pPr indent="0" marL="0">
+              <a:buNone/>
+            </a:pPr>
+            <a:r>
+              <a:rPr lang="en-US" sz="1220" dirty="0">
                 <a:solidFill>
                   <a:srgbClr val="17364A"/>
                 </a:solidFill>
@@ -11066,7 +11227,7 @@
               </a:rPr>
               <a:t>Retrieval test question set</a:t>
             </a:r>
-            <a:endParaRPr lang="en-US" sz="1380" dirty="0"/>
+            <a:endParaRPr lang="en-US" sz="1220" dirty="0"/>
           </a:p>
         </p:txBody>
       </p:sp>
@@ -11144,17 +11305,17 @@
         </p:nvSpPr>
         <p:spPr>
           <a:xfrm>
-            <a:off x="7799832" y="5001768"/>
-            <a:ext cx="3145536" cy="502920"/>
-          </a:xfrm>
-          <a:prstGeom prst="rect">
-            <a:avLst/>
-          </a:prstGeom>
-          <a:noFill/>
-          <a:ln/>
-        </p:spPr>
-        <p:txBody>
-          <a:bodyPr wrap="square" lIns="0" tIns="0" rIns="0" bIns="0" rtlCol="0" anchor="t">
+            <a:off x="7799832" y="4974336"/>
+            <a:ext cx="3145536" cy="576072"/>
+          </a:xfrm>
+          <a:prstGeom prst="rect">
+            <a:avLst/>
+          </a:prstGeom>
+          <a:noFill/>
+          <a:ln/>
+        </p:spPr>
+        <p:txBody>
+          <a:bodyPr wrap="square" lIns="254" tIns="254" rIns="254" bIns="254" rtlCol="0" anchor="t">
             <a:normAutofit/>
           </a:bodyPr>
           <a:lstStyle/>
@@ -11163,7 +11324,7 @@
               <a:buNone/>
             </a:pPr>
             <a:r>
-              <a:rPr lang="en-US" sz="1550" dirty="0">
+              <a:rPr lang="en-US" sz="1320" dirty="0">
                 <a:solidFill>
                   <a:srgbClr val="17364A"/>
                 </a:solidFill>
@@ -11171,9 +11332,9 @@
                 <a:ea typeface="Aptos" pitchFamily="34" charset="-122"/>
                 <a:cs typeface="Aptos" pitchFamily="34" charset="-120"/>
               </a:rPr>
-              <a:t>Use the assignment to test whether you can explain the concept, apply it to a realistic public health situation, and identify what would need review before the work moves forward.</a:t>
-            </a:r>
-            <a:endParaRPr lang="en-US" sz="1550" dirty="0"/>
+              <a:t>Use the assignment to test whether you can explain the concept, apply it to a realistic public health situation, and.</a:t>
+            </a:r>
+            <a:endParaRPr lang="en-US" sz="1320" dirty="0"/>
           </a:p>
         </p:txBody>
       </p:sp>
@@ -11474,49 +11635,58 @@
           <a:ln/>
         </p:spPr>
         <p:txBody>
-          <a:bodyPr wrap="square" lIns="635" tIns="635" rIns="635" bIns="635" rtlCol="0" anchor="t">
+          <a:bodyPr wrap="square" lIns="1016" tIns="1016" rIns="1016" bIns="1016" rtlCol="0" anchor="t">
             <a:normAutofit/>
           </a:bodyPr>
           <a:lstStyle/>
           <a:p>
+            <a:pPr indent="0" marL="0">
+              <a:buNone/>
+            </a:pPr>
             <a:r>
               <a:rPr lang="en-US" sz="2100" dirty="0">
                 <a:solidFill>
-                  <a:srgbClr val="17364A"/>
-                </a:solidFill>
-                <a:latin typeface="Aptos" pitchFamily="34" charset="0"/>
-                <a:ea typeface="Aptos" pitchFamily="34" charset="-122"/>
-                <a:cs typeface="Aptos" pitchFamily="34" charset="-120"/>
-              </a:rPr>
-              <a:t>1. What is RAG?</a:t>
+                  <a:srgbClr val="003A63"/>
+                </a:solidFill>
+                <a:latin typeface="Aptos" pitchFamily="34" charset="0"/>
+                <a:ea typeface="Aptos" pitchFamily="34" charset="-122"/>
+                <a:cs typeface="Aptos" pitchFamily="34" charset="-120"/>
+              </a:rPr>
+              <a:t>• 1. What is RAG?</a:t>
             </a:r>
             <a:endParaRPr lang="en-US" sz="2100" dirty="0"/>
           </a:p>
           <a:p>
+            <a:pPr indent="0" marL="0">
+              <a:buNone/>
+            </a:pPr>
             <a:r>
               <a:rPr lang="en-US" sz="2100" dirty="0">
                 <a:solidFill>
-                  <a:srgbClr val="17364A"/>
-                </a:solidFill>
-                <a:latin typeface="Aptos" pitchFamily="34" charset="0"/>
-                <a:ea typeface="Aptos" pitchFamily="34" charset="-122"/>
-                <a:cs typeface="Aptos" pitchFamily="34" charset="-120"/>
-              </a:rPr>
-              <a:t>2. Why does chunking matter?</a:t>
+                  <a:srgbClr val="003A63"/>
+                </a:solidFill>
+                <a:latin typeface="Aptos" pitchFamily="34" charset="0"/>
+                <a:ea typeface="Aptos" pitchFamily="34" charset="-122"/>
+                <a:cs typeface="Aptos" pitchFamily="34" charset="-120"/>
+              </a:rPr>
+              <a:t>• 2. Why does chunking matter?</a:t>
             </a:r>
             <a:endParaRPr lang="en-US" sz="2100" dirty="0"/>
           </a:p>
           <a:p>
+            <a:pPr indent="0" marL="0">
+              <a:buNone/>
+            </a:pPr>
             <a:r>
               <a:rPr lang="en-US" sz="2100" dirty="0">
                 <a:solidFill>
-                  <a:srgbClr val="17364A"/>
-                </a:solidFill>
-                <a:latin typeface="Aptos" pitchFamily="34" charset="0"/>
-                <a:ea typeface="Aptos" pitchFamily="34" charset="-122"/>
-                <a:cs typeface="Aptos" pitchFamily="34" charset="-120"/>
-              </a:rPr>
-              <a:t>3. What is a major RAG governance risk?</a:t>
+                  <a:srgbClr val="003A63"/>
+                </a:solidFill>
+                <a:latin typeface="Aptos" pitchFamily="34" charset="0"/>
+                <a:ea typeface="Aptos" pitchFamily="34" charset="-122"/>
+                <a:cs typeface="Aptos" pitchFamily="34" charset="-120"/>
+              </a:rPr>
+              <a:t>• 3. What is a major RAG governance risk?</a:t>
             </a:r>
             <a:endParaRPr lang="en-US" sz="2100" dirty="0"/>
           </a:p>
@@ -11596,17 +11766,17 @@
         </p:nvSpPr>
         <p:spPr>
           <a:xfrm>
-            <a:off x="7799832" y="1828800"/>
-            <a:ext cx="3145536" cy="685800"/>
-          </a:xfrm>
-          <a:prstGeom prst="rect">
-            <a:avLst/>
-          </a:prstGeom>
-          <a:noFill/>
-          <a:ln/>
-        </p:spPr>
-        <p:txBody>
-          <a:bodyPr wrap="square" lIns="0" tIns="0" rIns="0" bIns="0" rtlCol="0" anchor="t">
+            <a:off x="7799832" y="1801368"/>
+            <a:ext cx="3145536" cy="758952"/>
+          </a:xfrm>
+          <a:prstGeom prst="rect">
+            <a:avLst/>
+          </a:prstGeom>
+          <a:noFill/>
+          <a:ln/>
+        </p:spPr>
+        <p:txBody>
+          <a:bodyPr wrap="square" lIns="254" tIns="254" rIns="254" bIns="254" rtlCol="0" anchor="t">
             <a:normAutofit/>
           </a:bodyPr>
           <a:lstStyle/>
@@ -11615,7 +11785,7 @@
               <a:buNone/>
             </a:pPr>
             <a:r>
-              <a:rPr lang="en-US" sz="1550" dirty="0">
+              <a:rPr lang="en-US" sz="1320" dirty="0">
                 <a:solidFill>
                   <a:srgbClr val="17364A"/>
                 </a:solidFill>
@@ -11625,7 +11795,7 @@
               </a:rPr>
               <a:t>1. What is RAG?</a:t>
             </a:r>
-            <a:endParaRPr lang="en-US" sz="1550" dirty="0"/>
+            <a:endParaRPr lang="en-US" sz="1320" dirty="0"/>
           </a:p>
         </p:txBody>
       </p:sp>
@@ -11713,13 +11883,16 @@
           <a:ln/>
         </p:spPr>
         <p:txBody>
-          <a:bodyPr wrap="square" lIns="254" tIns="254" rIns="254" bIns="254" rtlCol="0" anchor="t">
+          <a:bodyPr wrap="square" lIns="508" tIns="508" rIns="508" bIns="508" rtlCol="0" anchor="t">
             <a:normAutofit/>
           </a:bodyPr>
           <a:lstStyle/>
           <a:p>
-            <a:r>
-              <a:rPr lang="en-US" sz="1380" dirty="0">
+            <a:pPr indent="0" marL="0">
+              <a:buNone/>
+            </a:pPr>
+            <a:r>
+              <a:rPr lang="en-US" sz="1220" dirty="0">
                 <a:solidFill>
                   <a:srgbClr val="17364A"/>
                 </a:solidFill>
@@ -11729,11 +11902,14 @@
               </a:rPr>
               <a:t>1.</a:t>
             </a:r>
-            <a:endParaRPr lang="en-US" sz="1380" dirty="0"/>
-          </a:p>
-          <a:p>
-            <a:r>
-              <a:rPr lang="en-US" sz="1380" dirty="0">
+            <a:endParaRPr lang="en-US" sz="1220" dirty="0"/>
+          </a:p>
+          <a:p>
+            <a:pPr indent="0" marL="0">
+              <a:buNone/>
+            </a:pPr>
+            <a:r>
+              <a:rPr lang="en-US" sz="1220" dirty="0">
                 <a:solidFill>
                   <a:srgbClr val="17364A"/>
                 </a:solidFill>
@@ -11743,11 +11919,14 @@
               </a:rPr>
               <a:t>What is RAG?</a:t>
             </a:r>
-            <a:endParaRPr lang="en-US" sz="1380" dirty="0"/>
-          </a:p>
-          <a:p>
-            <a:r>
-              <a:rPr lang="en-US" sz="1380" dirty="0">
+            <a:endParaRPr lang="en-US" sz="1220" dirty="0"/>
+          </a:p>
+          <a:p>
+            <a:pPr indent="0" marL="0">
+              <a:buNone/>
+            </a:pPr>
+            <a:r>
+              <a:rPr lang="en-US" sz="1220" dirty="0">
                 <a:solidFill>
                   <a:srgbClr val="17364A"/>
                 </a:solidFill>
@@ -11757,7 +11936,7 @@
               </a:rPr>
               <a:t>2.</a:t>
             </a:r>
-            <a:endParaRPr lang="en-US" sz="1380" dirty="0"/>
+            <a:endParaRPr lang="en-US" sz="1220" dirty="0"/>
           </a:p>
         </p:txBody>
       </p:sp>
@@ -11835,17 +12014,17 @@
         </p:nvSpPr>
         <p:spPr>
           <a:xfrm>
-            <a:off x="7799832" y="5001768"/>
-            <a:ext cx="3145536" cy="502920"/>
-          </a:xfrm>
-          <a:prstGeom prst="rect">
-            <a:avLst/>
-          </a:prstGeom>
-          <a:noFill/>
-          <a:ln/>
-        </p:spPr>
-        <p:txBody>
-          <a:bodyPr wrap="square" lIns="0" tIns="0" rIns="0" bIns="0" rtlCol="0" anchor="t">
+            <a:off x="7799832" y="4974336"/>
+            <a:ext cx="3145536" cy="576072"/>
+          </a:xfrm>
+          <a:prstGeom prst="rect">
+            <a:avLst/>
+          </a:prstGeom>
+          <a:noFill/>
+          <a:ln/>
+        </p:spPr>
+        <p:txBody>
+          <a:bodyPr wrap="square" lIns="254" tIns="254" rIns="254" bIns="254" rtlCol="0" anchor="t">
             <a:normAutofit/>
           </a:bodyPr>
           <a:lstStyle/>
@@ -11854,7 +12033,7 @@
               <a:buNone/>
             </a:pPr>
             <a:r>
-              <a:rPr lang="en-US" sz="1550" dirty="0">
+              <a:rPr lang="en-US" sz="1320" dirty="0">
                 <a:solidFill>
                   <a:srgbClr val="17364A"/>
                 </a:solidFill>
@@ -11862,9 +12041,9 @@
                 <a:ea typeface="Aptos" pitchFamily="34" charset="-122"/>
                 <a:cs typeface="Aptos" pitchFamily="34" charset="-120"/>
               </a:rPr>
-              <a:t>Use the assignment to test whether you can explain the concept, apply it to a realistic public health situation, and identify what would need review before the work moves forward.</a:t>
-            </a:r>
-            <a:endParaRPr lang="en-US" sz="1550" dirty="0"/>
+              <a:t>Use the assignment to test whether you can explain the concept, apply it to a realistic public health situation, and.</a:t>
+            </a:r>
+            <a:endParaRPr lang="en-US" sz="1320" dirty="0"/>
           </a:p>
         </p:txBody>
       </p:sp>
@@ -12165,49 +12344,58 @@
           <a:ln/>
         </p:spPr>
         <p:txBody>
-          <a:bodyPr wrap="square" lIns="635" tIns="635" rIns="635" bIns="635" rtlCol="0" anchor="t">
+          <a:bodyPr wrap="square" lIns="1016" tIns="1016" rIns="1016" bIns="1016" rtlCol="0" anchor="t">
             <a:normAutofit/>
           </a:bodyPr>
           <a:lstStyle/>
           <a:p>
+            <a:pPr indent="0" marL="0">
+              <a:buNone/>
+            </a:pPr>
             <a:r>
               <a:rPr lang="en-US" sz="2100" dirty="0">
                 <a:solidFill>
-                  <a:srgbClr val="17364A"/>
-                </a:solidFill>
-                <a:latin typeface="Aptos" pitchFamily="34" charset="0"/>
-                <a:ea typeface="Aptos" pitchFamily="34" charset="-122"/>
-                <a:cs typeface="Aptos" pitchFamily="34" charset="-120"/>
-              </a:rPr>
-              <a:t>NIST AI RMF Generative AI Profile:.</a:t>
+                  <a:srgbClr val="003A63"/>
+                </a:solidFill>
+                <a:latin typeface="Aptos" pitchFamily="34" charset="0"/>
+                <a:ea typeface="Aptos" pitchFamily="34" charset="-122"/>
+                <a:cs typeface="Aptos" pitchFamily="34" charset="-120"/>
+              </a:rPr>
+              <a:t>• NIST AI RMF Generative AI Profile:.</a:t>
             </a:r>
             <a:endParaRPr lang="en-US" sz="2100" dirty="0"/>
           </a:p>
           <a:p>
+            <a:pPr indent="0" marL="0">
+              <a:buNone/>
+            </a:pPr>
             <a:r>
               <a:rPr lang="en-US" sz="2100" dirty="0">
                 <a:solidFill>
-                  <a:srgbClr val="17364A"/>
-                </a:solidFill>
-                <a:latin typeface="Aptos" pitchFamily="34" charset="0"/>
-                <a:ea typeface="Aptos" pitchFamily="34" charset="-122"/>
-                <a:cs typeface="Aptos" pitchFamily="34" charset="-120"/>
-              </a:rPr>
-              <a:t>OWASP Top 10 for Large Language Model Applications:.</a:t>
+                  <a:srgbClr val="003A63"/>
+                </a:solidFill>
+                <a:latin typeface="Aptos" pitchFamily="34" charset="0"/>
+                <a:ea typeface="Aptos" pitchFamily="34" charset="-122"/>
+                <a:cs typeface="Aptos" pitchFamily="34" charset="-120"/>
+              </a:rPr>
+              <a:t>• OWASP Top 10 for Large Language Model Applications:.</a:t>
             </a:r>
             <a:endParaRPr lang="en-US" sz="2100" dirty="0"/>
           </a:p>
           <a:p>
+            <a:pPr indent="0" marL="0">
+              <a:buNone/>
+            </a:pPr>
             <a:r>
               <a:rPr lang="en-US" sz="2100" dirty="0">
                 <a:solidFill>
-                  <a:srgbClr val="17364A"/>
-                </a:solidFill>
-                <a:latin typeface="Aptos" pitchFamily="34" charset="0"/>
-                <a:ea typeface="Aptos" pitchFamily="34" charset="-122"/>
-                <a:cs typeface="Aptos" pitchFamily="34" charset="-120"/>
-              </a:rPr>
-              <a:t>NIST Artificial Intelligence Risk Management Framework:.</a:t>
+                  <a:srgbClr val="003A63"/>
+                </a:solidFill>
+                <a:latin typeface="Aptos" pitchFamily="34" charset="0"/>
+                <a:ea typeface="Aptos" pitchFamily="34" charset="-122"/>
+                <a:cs typeface="Aptos" pitchFamily="34" charset="-120"/>
+              </a:rPr>
+              <a:t>• NIST Artificial Intelligence Risk Management Framework:.</a:t>
             </a:r>
             <a:endParaRPr lang="en-US" sz="2100" dirty="0"/>
           </a:p>
@@ -12287,17 +12475,17 @@
         </p:nvSpPr>
         <p:spPr>
           <a:xfrm>
-            <a:off x="7799832" y="1828800"/>
-            <a:ext cx="3145536" cy="685800"/>
-          </a:xfrm>
-          <a:prstGeom prst="rect">
-            <a:avLst/>
-          </a:prstGeom>
-          <a:noFill/>
-          <a:ln/>
-        </p:spPr>
-        <p:txBody>
-          <a:bodyPr wrap="square" lIns="0" tIns="0" rIns="0" bIns="0" rtlCol="0" anchor="t">
+            <a:off x="7799832" y="1801368"/>
+            <a:ext cx="3145536" cy="758952"/>
+          </a:xfrm>
+          <a:prstGeom prst="rect">
+            <a:avLst/>
+          </a:prstGeom>
+          <a:noFill/>
+          <a:ln/>
+        </p:spPr>
+        <p:txBody>
+          <a:bodyPr wrap="square" lIns="254" tIns="254" rIns="254" bIns="254" rtlCol="0" anchor="t">
             <a:normAutofit/>
           </a:bodyPr>
           <a:lstStyle/>
@@ -12306,7 +12494,7 @@
               <a:buNone/>
             </a:pPr>
             <a:r>
-              <a:rPr lang="en-US" sz="1550" dirty="0">
+              <a:rPr lang="en-US" sz="1320" dirty="0">
                 <a:solidFill>
                   <a:srgbClr val="17364A"/>
                 </a:solidFill>
@@ -12316,7 +12504,7 @@
               </a:rPr>
               <a:t>NIST AI RMF Generative AI Profile:.</a:t>
             </a:r>
-            <a:endParaRPr lang="en-US" sz="1550" dirty="0"/>
+            <a:endParaRPr lang="en-US" sz="1320" dirty="0"/>
           </a:p>
         </p:txBody>
       </p:sp>
@@ -12404,13 +12592,16 @@
           <a:ln/>
         </p:spPr>
         <p:txBody>
-          <a:bodyPr wrap="square" lIns="254" tIns="254" rIns="254" bIns="254" rtlCol="0" anchor="t">
+          <a:bodyPr wrap="square" lIns="508" tIns="508" rIns="508" bIns="508" rtlCol="0" anchor="t">
             <a:normAutofit/>
           </a:bodyPr>
           <a:lstStyle/>
           <a:p>
-            <a:r>
-              <a:rPr lang="en-US" sz="1380" dirty="0">
+            <a:pPr indent="0" marL="0">
+              <a:buNone/>
+            </a:pPr>
+            <a:r>
+              <a:rPr lang="en-US" sz="1220" dirty="0">
                 <a:solidFill>
                   <a:srgbClr val="17364A"/>
                 </a:solidFill>
@@ -12420,11 +12611,14 @@
               </a:rPr>
               <a:t>NIST Artificial Intelligence Risk Management Framework:.</a:t>
             </a:r>
-            <a:endParaRPr lang="en-US" sz="1380" dirty="0"/>
-          </a:p>
-          <a:p>
-            <a:r>
-              <a:rPr lang="en-US" sz="1380" dirty="0">
+            <a:endParaRPr lang="en-US" sz="1220" dirty="0"/>
+          </a:p>
+          <a:p>
+            <a:pPr indent="0" marL="0">
+              <a:buNone/>
+            </a:pPr>
+            <a:r>
+              <a:rPr lang="en-US" sz="1220" dirty="0">
                 <a:solidFill>
                   <a:srgbClr val="17364A"/>
                 </a:solidFill>
@@ -12432,9 +12626,9 @@
                 <a:ea typeface="Aptos" pitchFamily="34" charset="-122"/>
                 <a:cs typeface="Aptos" pitchFamily="34" charset="-120"/>
               </a:rPr>
-              <a:t>ONC USCDI: https://isp.healthit.gov/united-states-core-data-interoperability-uscdi</a:t>
-            </a:r>
-            <a:endParaRPr lang="en-US" sz="1380" dirty="0"/>
+              <a:t>ONC USCDI:.</a:t>
+            </a:r>
+            <a:endParaRPr lang="en-US" sz="1220" dirty="0"/>
           </a:p>
         </p:txBody>
       </p:sp>
@@ -12512,17 +12706,17 @@
         </p:nvSpPr>
         <p:spPr>
           <a:xfrm>
-            <a:off x="7799832" y="5001768"/>
-            <a:ext cx="3145536" cy="502920"/>
-          </a:xfrm>
-          <a:prstGeom prst="rect">
-            <a:avLst/>
-          </a:prstGeom>
-          <a:noFill/>
-          <a:ln/>
-        </p:spPr>
-        <p:txBody>
-          <a:bodyPr wrap="square" lIns="0" tIns="0" rIns="0" bIns="0" rtlCol="0" anchor="t">
+            <a:off x="7799832" y="4974336"/>
+            <a:ext cx="3145536" cy="576072"/>
+          </a:xfrm>
+          <a:prstGeom prst="rect">
+            <a:avLst/>
+          </a:prstGeom>
+          <a:noFill/>
+          <a:ln/>
+        </p:spPr>
+        <p:txBody>
+          <a:bodyPr wrap="square" lIns="254" tIns="254" rIns="254" bIns="254" rtlCol="0" anchor="t">
             <a:normAutofit/>
           </a:bodyPr>
           <a:lstStyle/>
@@ -12531,7 +12725,7 @@
               <a:buNone/>
             </a:pPr>
             <a:r>
-              <a:rPr lang="en-US" sz="1550" dirty="0">
+              <a:rPr lang="en-US" sz="1320" dirty="0">
                 <a:solidFill>
                   <a:srgbClr val="17364A"/>
                 </a:solidFill>
@@ -12539,9 +12733,9 @@
                 <a:ea typeface="Aptos" pitchFamily="34" charset="-122"/>
                 <a:cs typeface="Aptos" pitchFamily="34" charset="-120"/>
               </a:rPr>
-              <a:t>Use the assignment to test whether you can explain the concept, apply it to a realistic public health situation, and identify what would need review before the work moves forward.</a:t>
-            </a:r>
-            <a:endParaRPr lang="en-US" sz="1550" dirty="0"/>
+              <a:t>Use the assignment to test whether you can explain the concept, apply it to a realistic public health situation, and.</a:t>
+            </a:r>
+            <a:endParaRPr lang="en-US" sz="1320" dirty="0"/>
           </a:p>
         </p:txBody>
       </p:sp>
@@ -12842,63 +13036,75 @@
           <a:ln/>
         </p:spPr>
         <p:txBody>
-          <a:bodyPr wrap="square" lIns="635" tIns="635" rIns="635" bIns="635" rtlCol="0" anchor="t">
+          <a:bodyPr wrap="square" lIns="1016" tIns="1016" rIns="1016" bIns="1016" rtlCol="0" anchor="t">
             <a:normAutofit/>
           </a:bodyPr>
           <a:lstStyle/>
           <a:p>
+            <a:pPr indent="0" marL="0">
+              <a:buNone/>
+            </a:pPr>
             <a:r>
               <a:rPr lang="en-US" sz="1900" dirty="0">
                 <a:solidFill>
-                  <a:srgbClr val="17364A"/>
-                </a:solidFill>
-                <a:latin typeface="Aptos" pitchFamily="34" charset="0"/>
-                <a:ea typeface="Aptos" pitchFamily="34" charset="-122"/>
-                <a:cs typeface="Aptos" pitchFamily="34" charset="-120"/>
-              </a:rPr>
-              <a:t>Play 3: Establish AI Governance - This lesson informs Play 3 by helping learners connect the lesson topic to.</a:t>
+                  <a:srgbClr val="003A63"/>
+                </a:solidFill>
+                <a:latin typeface="Aptos" pitchFamily="34" charset="0"/>
+                <a:ea typeface="Aptos" pitchFamily="34" charset="-122"/>
+                <a:cs typeface="Aptos" pitchFamily="34" charset="-120"/>
+              </a:rPr>
+              <a:t>• Play 3: Establish AI Governance - This lesson informs Play 3 by helping learners connect the.</a:t>
             </a:r>
             <a:endParaRPr lang="en-US" sz="1900" dirty="0"/>
           </a:p>
           <a:p>
+            <a:pPr indent="0" marL="0">
+              <a:buNone/>
+            </a:pPr>
             <a:r>
               <a:rPr lang="en-US" sz="1900" dirty="0">
                 <a:solidFill>
-                  <a:srgbClr val="17364A"/>
-                </a:solidFill>
-                <a:latin typeface="Aptos" pitchFamily="34" charset="0"/>
-                <a:ea typeface="Aptos" pitchFamily="34" charset="-122"/>
-                <a:cs typeface="Aptos" pitchFamily="34" charset="-120"/>
-              </a:rPr>
-              <a:t>Play 12: Execute Governance and Oversight - This lesson informs Play 12 by helping learners connect the.</a:t>
+                  <a:srgbClr val="003A63"/>
+                </a:solidFill>
+                <a:latin typeface="Aptos" pitchFamily="34" charset="0"/>
+                <a:ea typeface="Aptos" pitchFamily="34" charset="-122"/>
+                <a:cs typeface="Aptos" pitchFamily="34" charset="-120"/>
+              </a:rPr>
+              <a:t>• Play 12: Execute Governance and Oversight - This lesson informs Play 12 by helping learners.</a:t>
             </a:r>
             <a:endParaRPr lang="en-US" sz="1900" dirty="0"/>
           </a:p>
           <a:p>
+            <a:pPr indent="0" marL="0">
+              <a:buNone/>
+            </a:pPr>
             <a:r>
               <a:rPr lang="en-US" sz="1900" dirty="0">
                 <a:solidFill>
-                  <a:srgbClr val="17364A"/>
-                </a:solidFill>
-                <a:latin typeface="Aptos" pitchFamily="34" charset="0"/>
-                <a:ea typeface="Aptos" pitchFamily="34" charset="-122"/>
-                <a:cs typeface="Aptos" pitchFamily="34" charset="-120"/>
-              </a:rPr>
-              <a:t>Play 11: Build and Deploy AI Solutions - This lesson informs Play 11 by helping learners connect the lesson.</a:t>
+                  <a:srgbClr val="003A63"/>
+                </a:solidFill>
+                <a:latin typeface="Aptos" pitchFamily="34" charset="0"/>
+                <a:ea typeface="Aptos" pitchFamily="34" charset="-122"/>
+                <a:cs typeface="Aptos" pitchFamily="34" charset="-120"/>
+              </a:rPr>
+              <a:t>• Play 11: Build and Deploy AI Solutions - This lesson informs Play 11 by helping learners.</a:t>
             </a:r>
             <a:endParaRPr lang="en-US" sz="1900" dirty="0"/>
           </a:p>
           <a:p>
+            <a:pPr indent="0" marL="0">
+              <a:buNone/>
+            </a:pPr>
             <a:r>
               <a:rPr lang="en-US" sz="1900" dirty="0">
                 <a:solidFill>
-                  <a:srgbClr val="17364A"/>
-                </a:solidFill>
-                <a:latin typeface="Aptos" pitchFamily="34" charset="0"/>
-                <a:ea typeface="Aptos" pitchFamily="34" charset="-122"/>
-                <a:cs typeface="Aptos" pitchFamily="34" charset="-120"/>
-              </a:rPr>
-              <a:t>Play 1: Vision &amp; Guardrails - This lesson informs Play 1 by helping learners connect the lesson topic to.</a:t>
+                  <a:srgbClr val="003A63"/>
+                </a:solidFill>
+                <a:latin typeface="Aptos" pitchFamily="34" charset="0"/>
+                <a:ea typeface="Aptos" pitchFamily="34" charset="-122"/>
+                <a:cs typeface="Aptos" pitchFamily="34" charset="-120"/>
+              </a:rPr>
+              <a:t>• Play 1: Vision &amp; Guardrails - This lesson informs Play 1 by helping learners connect the.</a:t>
             </a:r>
             <a:endParaRPr lang="en-US" sz="1900" dirty="0"/>
           </a:p>
@@ -12978,17 +13184,17 @@
         </p:nvSpPr>
         <p:spPr>
           <a:xfrm>
-            <a:off x="8211312" y="1920240"/>
-            <a:ext cx="2734056" cy="1463040"/>
-          </a:xfrm>
-          <a:prstGeom prst="rect">
-            <a:avLst/>
-          </a:prstGeom>
-          <a:noFill/>
-          <a:ln/>
-        </p:spPr>
-        <p:txBody>
-          <a:bodyPr wrap="square" lIns="0" tIns="0" rIns="0" bIns="0" rtlCol="0" anchor="t">
+            <a:off x="8211312" y="1892808"/>
+            <a:ext cx="2734056" cy="1536192"/>
+          </a:xfrm>
+          <a:prstGeom prst="rect">
+            <a:avLst/>
+          </a:prstGeom>
+          <a:noFill/>
+          <a:ln/>
+        </p:spPr>
+        <p:txBody>
+          <a:bodyPr wrap="square" lIns="254" tIns="254" rIns="254" bIns="254" rtlCol="0" anchor="t">
             <a:normAutofit/>
           </a:bodyPr>
           <a:lstStyle/>
@@ -12997,7 +13203,7 @@
               <a:buNone/>
             </a:pPr>
             <a:r>
-              <a:rPr lang="en-US" sz="1550" dirty="0">
+              <a:rPr lang="en-US" sz="1320" dirty="0">
                 <a:solidFill>
                   <a:srgbClr val="17364A"/>
                 </a:solidFill>
@@ -13005,9 +13211,9 @@
                 <a:ea typeface="Aptos" pitchFamily="34" charset="-122"/>
                 <a:cs typeface="Aptos" pitchFamily="34" charset="-120"/>
               </a:rPr>
-              <a:t>Use the related plays to identify decisions, participants, timing, approvals, and documentation needed for responsible implementation.</a:t>
-            </a:r>
-            <a:endParaRPr lang="en-US" sz="1550" dirty="0"/>
+              <a:t>Use the related plays to identify decisions, participants, timing, approvals, and documentation needed for responsible.</a:t>
+            </a:r>
+            <a:endParaRPr lang="en-US" sz="1320" dirty="0"/>
           </a:p>
         </p:txBody>
       </p:sp>
@@ -13095,13 +13301,16 @@
           <a:ln/>
         </p:spPr>
         <p:txBody>
-          <a:bodyPr wrap="square" lIns="254" tIns="254" rIns="254" bIns="254" rtlCol="0" anchor="t">
+          <a:bodyPr wrap="square" lIns="508" tIns="508" rIns="508" bIns="508" rtlCol="0" anchor="t">
             <a:normAutofit/>
           </a:bodyPr>
           <a:lstStyle/>
           <a:p>
-            <a:r>
-              <a:rPr lang="en-US" sz="1380" dirty="0">
+            <a:pPr indent="0" marL="0">
+              <a:buNone/>
+            </a:pPr>
+            <a:r>
+              <a:rPr lang="en-US" sz="1220" dirty="0">
                 <a:solidFill>
                   <a:srgbClr val="17364A"/>
                 </a:solidFill>
@@ -13111,11 +13320,14 @@
               </a:rPr>
               <a:t>Locate the decision point in the playbook sequence.</a:t>
             </a:r>
-            <a:endParaRPr lang="en-US" sz="1380" dirty="0"/>
-          </a:p>
-          <a:p>
-            <a:r>
-              <a:rPr lang="en-US" sz="1380" dirty="0">
+            <a:endParaRPr lang="en-US" sz="1220" dirty="0"/>
+          </a:p>
+          <a:p>
+            <a:pPr indent="0" marL="0">
+              <a:buNone/>
+            </a:pPr>
+            <a:r>
+              <a:rPr lang="en-US" sz="1220" dirty="0">
                 <a:solidFill>
                   <a:srgbClr val="17364A"/>
                 </a:solidFill>
@@ -13125,11 +13337,14 @@
               </a:rPr>
               <a:t>Identify who should participate in the work.</a:t>
             </a:r>
-            <a:endParaRPr lang="en-US" sz="1380" dirty="0"/>
-          </a:p>
-          <a:p>
-            <a:r>
-              <a:rPr lang="en-US" sz="1380" dirty="0">
+            <a:endParaRPr lang="en-US" sz="1220" dirty="0"/>
+          </a:p>
+          <a:p>
+            <a:pPr indent="0" marL="0">
+              <a:buNone/>
+            </a:pPr>
+            <a:r>
+              <a:rPr lang="en-US" sz="1220" dirty="0">
                 <a:solidFill>
                   <a:srgbClr val="17364A"/>
                 </a:solidFill>
@@ -13139,7 +13354,7 @@
               </a:rPr>
               <a:t>Document the review, approval, or implementation step.</a:t>
             </a:r>
-            <a:endParaRPr lang="en-US" sz="1380" dirty="0"/>
+            <a:endParaRPr lang="en-US" sz="1220" dirty="0"/>
           </a:p>
         </p:txBody>
       </p:sp>
@@ -13440,63 +13655,75 @@
           <a:ln/>
         </p:spPr>
         <p:txBody>
-          <a:bodyPr wrap="square" lIns="635" tIns="635" rIns="635" bIns="635" rtlCol="0" anchor="t">
+          <a:bodyPr wrap="square" lIns="1016" tIns="1016" rIns="1016" bIns="1016" rtlCol="0" anchor="t">
             <a:normAutofit/>
           </a:bodyPr>
           <a:lstStyle/>
           <a:p>
+            <a:pPr indent="0" marL="0">
+              <a:buNone/>
+            </a:pPr>
             <a:r>
               <a:rPr lang="en-US" sz="1850" dirty="0">
                 <a:solidFill>
-                  <a:srgbClr val="17364A"/>
-                </a:solidFill>
-                <a:latin typeface="Aptos" pitchFamily="34" charset="0"/>
-                <a:ea typeface="Aptos" pitchFamily="34" charset="-122"/>
-                <a:cs typeface="Aptos" pitchFamily="34" charset="-120"/>
-              </a:rPr>
-              <a:t>Tool 16: Incident Response Checklist (Checklist) - Use Incident Response Checklist to translate this lesson.</a:t>
+                  <a:srgbClr val="003A63"/>
+                </a:solidFill>
+                <a:latin typeface="Aptos" pitchFamily="34" charset="0"/>
+                <a:ea typeface="Aptos" pitchFamily="34" charset="-122"/>
+                <a:cs typeface="Aptos" pitchFamily="34" charset="-120"/>
+              </a:rPr>
+              <a:t>• Tool 16: Incident Response Checklist (Checklist) - Use Incident Response Checklist to.</a:t>
             </a:r>
             <a:endParaRPr lang="en-US" sz="1850" dirty="0"/>
           </a:p>
           <a:p>
+            <a:pPr indent="0" marL="0">
+              <a:buNone/>
+            </a:pPr>
             <a:r>
               <a:rPr lang="en-US" sz="1850" dirty="0">
                 <a:solidFill>
-                  <a:srgbClr val="17364A"/>
-                </a:solidFill>
-                <a:latin typeface="Aptos" pitchFamily="34" charset="0"/>
-                <a:ea typeface="Aptos" pitchFamily="34" charset="-122"/>
-                <a:cs typeface="Aptos" pitchFamily="34" charset="-120"/>
-              </a:rPr>
-              <a:t>Tool 17: Compliance Audit Checklist (Checklist) - Use Compliance Audit Checklist to translate this lesson.</a:t>
+                  <a:srgbClr val="003A63"/>
+                </a:solidFill>
+                <a:latin typeface="Aptos" pitchFamily="34" charset="0"/>
+                <a:ea typeface="Aptos" pitchFamily="34" charset="-122"/>
+                <a:cs typeface="Aptos" pitchFamily="34" charset="-120"/>
+              </a:rPr>
+              <a:t>• Tool 17: Compliance Audit Checklist (Checklist) - Use Compliance Audit Checklist to translate.</a:t>
             </a:r>
             <a:endParaRPr lang="en-US" sz="1850" dirty="0"/>
           </a:p>
           <a:p>
+            <a:pPr indent="0" marL="0">
+              <a:buNone/>
+            </a:pPr>
             <a:r>
               <a:rPr lang="en-US" sz="1850" dirty="0">
                 <a:solidFill>
-                  <a:srgbClr val="17364A"/>
-                </a:solidFill>
-                <a:latin typeface="Aptos" pitchFamily="34" charset="0"/>
-                <a:ea typeface="Aptos" pitchFamily="34" charset="-122"/>
-                <a:cs typeface="Aptos" pitchFamily="34" charset="-120"/>
-              </a:rPr>
-              <a:t>Tool 18: Policy Update &amp; Version Control Log (Log) - Use this tool to complete or strengthen the practical.</a:t>
+                  <a:srgbClr val="003A63"/>
+                </a:solidFill>
+                <a:latin typeface="Aptos" pitchFamily="34" charset="0"/>
+                <a:ea typeface="Aptos" pitchFamily="34" charset="-122"/>
+                <a:cs typeface="Aptos" pitchFamily="34" charset="-120"/>
+              </a:rPr>
+              <a:t>• Tool 18: Policy Update &amp; Version Control Log (Log) - Use this tool to complete or strengthen.</a:t>
             </a:r>
             <a:endParaRPr lang="en-US" sz="1850" dirty="0"/>
           </a:p>
           <a:p>
+            <a:pPr indent="0" marL="0">
+              <a:buNone/>
+            </a:pPr>
             <a:r>
               <a:rPr lang="en-US" sz="1850" dirty="0">
                 <a:solidFill>
-                  <a:srgbClr val="17364A"/>
-                </a:solidFill>
-                <a:latin typeface="Aptos" pitchFamily="34" charset="0"/>
-                <a:ea typeface="Aptos" pitchFamily="34" charset="-122"/>
-                <a:cs typeface="Aptos" pitchFamily="34" charset="-120"/>
-              </a:rPr>
-              <a:t>Tool 19: Plain-Language AI Public Notice Template (Template) - Use Plain-Language AI Public Notice Template.</a:t>
+                  <a:srgbClr val="003A63"/>
+                </a:solidFill>
+                <a:latin typeface="Aptos" pitchFamily="34" charset="0"/>
+                <a:ea typeface="Aptos" pitchFamily="34" charset="-122"/>
+                <a:cs typeface="Aptos" pitchFamily="34" charset="-120"/>
+              </a:rPr>
+              <a:t>• Tool 19: Plain-Language AI Public Notice Template (Template) - Use Plain-Language AI Public.</a:t>
             </a:r>
             <a:endParaRPr lang="en-US" sz="1850" dirty="0"/>
           </a:p>
@@ -13576,17 +13803,17 @@
         </p:nvSpPr>
         <p:spPr>
           <a:xfrm>
-            <a:off x="8211312" y="1920240"/>
-            <a:ext cx="2734056" cy="1463040"/>
-          </a:xfrm>
-          <a:prstGeom prst="rect">
-            <a:avLst/>
-          </a:prstGeom>
-          <a:noFill/>
-          <a:ln/>
-        </p:spPr>
-        <p:txBody>
-          <a:bodyPr wrap="square" lIns="0" tIns="0" rIns="0" bIns="0" rtlCol="0" anchor="t">
+            <a:off x="8211312" y="1892808"/>
+            <a:ext cx="2734056" cy="1536192"/>
+          </a:xfrm>
+          <a:prstGeom prst="rect">
+            <a:avLst/>
+          </a:prstGeom>
+          <a:noFill/>
+          <a:ln/>
+        </p:spPr>
+        <p:txBody>
+          <a:bodyPr wrap="square" lIns="254" tIns="254" rIns="254" bIns="254" rtlCol="0" anchor="t">
             <a:normAutofit/>
           </a:bodyPr>
           <a:lstStyle/>
@@ -13595,7 +13822,7 @@
               <a:buNone/>
             </a:pPr>
             <a:r>
-              <a:rPr lang="en-US" sz="1550" dirty="0">
+              <a:rPr lang="en-US" sz="1320" dirty="0">
                 <a:solidFill>
                   <a:srgbClr val="17364A"/>
                 </a:solidFill>
@@ -13603,9 +13830,9 @@
                 <a:ea typeface="Aptos" pitchFamily="34" charset="-122"/>
                 <a:cs typeface="Aptos" pitchFamily="34" charset="-120"/>
               </a:rPr>
-              <a:t>Use linked tools when your department needs a structured worksheet, template, checklist, review process, or documentation artifact.</a:t>
-            </a:r>
-            <a:endParaRPr lang="en-US" sz="1550" dirty="0"/>
+              <a:t>Use linked tools when your department needs a structured worksheet, template, checklist, review process, or.</a:t>
+            </a:r>
+            <a:endParaRPr lang="en-US" sz="1320" dirty="0"/>
           </a:p>
         </p:txBody>
       </p:sp>
@@ -13693,13 +13920,16 @@
           <a:ln/>
         </p:spPr>
         <p:txBody>
-          <a:bodyPr wrap="square" lIns="254" tIns="254" rIns="254" bIns="254" rtlCol="0" anchor="t">
+          <a:bodyPr wrap="square" lIns="508" tIns="508" rIns="508" bIns="508" rtlCol="0" anchor="t">
             <a:normAutofit/>
           </a:bodyPr>
           <a:lstStyle/>
           <a:p>
-            <a:r>
-              <a:rPr lang="en-US" sz="1380" dirty="0">
+            <a:pPr indent="0" marL="0">
+              <a:buNone/>
+            </a:pPr>
+            <a:r>
+              <a:rPr lang="en-US" sz="1220" dirty="0">
                 <a:solidFill>
                   <a:srgbClr val="17364A"/>
                 </a:solidFill>
@@ -13709,11 +13939,14 @@
               </a:rPr>
               <a:t>Use a tool when no comparable local process exists.</a:t>
             </a:r>
-            <a:endParaRPr lang="en-US" sz="1380" dirty="0"/>
-          </a:p>
-          <a:p>
-            <a:r>
-              <a:rPr lang="en-US" sz="1380" dirty="0">
+            <a:endParaRPr lang="en-US" sz="1220" dirty="0"/>
+          </a:p>
+          <a:p>
+            <a:pPr indent="0" marL="0">
+              <a:buNone/>
+            </a:pPr>
+            <a:r>
+              <a:rPr lang="en-US" sz="1220" dirty="0">
                 <a:solidFill>
                   <a:srgbClr val="17364A"/>
                 </a:solidFill>
@@ -13721,13 +13954,16 @@
                 <a:ea typeface="Aptos" pitchFamily="34" charset="-122"/>
                 <a:cs typeface="Aptos" pitchFamily="34" charset="-120"/>
               </a:rPr>
-              <a:t>Adapt existing department templates when they already fit the purpose.</a:t>
-            </a:r>
-            <a:endParaRPr lang="en-US" sz="1380" dirty="0"/>
-          </a:p>
-          <a:p>
-            <a:r>
-              <a:rPr lang="en-US" sz="1380" dirty="0">
+              <a:t>Adapt existing department templates when they already fit the.</a:t>
+            </a:r>
+            <a:endParaRPr lang="en-US" sz="1220" dirty="0"/>
+          </a:p>
+          <a:p>
+            <a:pPr indent="0" marL="0">
+              <a:buNone/>
+            </a:pPr>
+            <a:r>
+              <a:rPr lang="en-US" sz="1220" dirty="0">
                 <a:solidFill>
                   <a:srgbClr val="17364A"/>
                 </a:solidFill>
@@ -13737,7 +13973,7 @@
               </a:rPr>
               <a:t>Save the completed artifact as evidence of the decision.</a:t>
             </a:r>
-            <a:endParaRPr lang="en-US" sz="1380" dirty="0"/>
+            <a:endParaRPr lang="en-US" sz="1220" dirty="0"/>
           </a:p>
         </p:txBody>
       </p:sp>
@@ -14038,49 +14274,58 @@
           <a:ln/>
         </p:spPr>
         <p:txBody>
-          <a:bodyPr wrap="square" lIns="635" tIns="635" rIns="635" bIns="635" rtlCol="0" anchor="t">
+          <a:bodyPr wrap="square" lIns="1016" tIns="1016" rIns="1016" bIns="1016" rtlCol="0" anchor="t">
             <a:normAutofit/>
           </a:bodyPr>
           <a:lstStyle/>
           <a:p>
+            <a:pPr indent="0" marL="0">
+              <a:buNone/>
+            </a:pPr>
             <a:r>
               <a:rPr lang="en-US" sz="2100" dirty="0">
                 <a:solidFill>
-                  <a:srgbClr val="17364A"/>
-                </a:solidFill>
-                <a:latin typeface="Aptos" pitchFamily="34" charset="0"/>
-                <a:ea typeface="Aptos" pitchFamily="34" charset="-122"/>
-                <a:cs typeface="Aptos" pitchFamily="34" charset="-120"/>
-              </a:rPr>
-              <a:t>Define retrieval-augmented generation in plain language.</a:t>
+                  <a:srgbClr val="003A63"/>
+                </a:solidFill>
+                <a:latin typeface="Aptos" pitchFamily="34" charset="0"/>
+                <a:ea typeface="Aptos" pitchFamily="34" charset="-122"/>
+                <a:cs typeface="Aptos" pitchFamily="34" charset="-120"/>
+              </a:rPr>
+              <a:t>• Define retrieval-augmented generation in plain language.</a:t>
             </a:r>
             <a:endParaRPr lang="en-US" sz="2100" dirty="0"/>
           </a:p>
           <a:p>
+            <a:pPr indent="0" marL="0">
+              <a:buNone/>
+            </a:pPr>
             <a:r>
               <a:rPr lang="en-US" sz="2100" dirty="0">
                 <a:solidFill>
-                  <a:srgbClr val="17364A"/>
-                </a:solidFill>
-                <a:latin typeface="Aptos" pitchFamily="34" charset="0"/>
-                <a:ea typeface="Aptos" pitchFamily="34" charset="-122"/>
-                <a:cs typeface="Aptos" pitchFamily="34" charset="-120"/>
-              </a:rPr>
-              <a:t>Describe the major components of a RAG system, including document ingestion, chunking, embeddings,.</a:t>
+                  <a:srgbClr val="003A63"/>
+                </a:solidFill>
+                <a:latin typeface="Aptos" pitchFamily="34" charset="0"/>
+                <a:ea typeface="Aptos" pitchFamily="34" charset="-122"/>
+                <a:cs typeface="Aptos" pitchFamily="34" charset="-120"/>
+              </a:rPr>
+              <a:t>• Describe the major components of a RAG system, including document ingestion, chunking,.</a:t>
             </a:r>
             <a:endParaRPr lang="en-US" sz="2100" dirty="0"/>
           </a:p>
           <a:p>
+            <a:pPr indent="0" marL="0">
+              <a:buNone/>
+            </a:pPr>
             <a:r>
               <a:rPr lang="en-US" sz="2100" dirty="0">
                 <a:solidFill>
-                  <a:srgbClr val="17364A"/>
-                </a:solidFill>
-                <a:latin typeface="Aptos" pitchFamily="34" charset="0"/>
-                <a:ea typeface="Aptos" pitchFamily="34" charset="-122"/>
-                <a:cs typeface="Aptos" pitchFamily="34" charset="-120"/>
-              </a:rPr>
-              <a:t>Identify public health use cases where RAG may improve knowledge work.</a:t>
+                  <a:srgbClr val="003A63"/>
+                </a:solidFill>
+                <a:latin typeface="Aptos" pitchFamily="34" charset="0"/>
+                <a:ea typeface="Aptos" pitchFamily="34" charset="-122"/>
+                <a:cs typeface="Aptos" pitchFamily="34" charset="-120"/>
+              </a:rPr>
+              <a:t>• Identify public health use cases where RAG may improve knowledge work.</a:t>
             </a:r>
             <a:endParaRPr lang="en-US" sz="2100" dirty="0"/>
           </a:p>
@@ -14160,17 +14405,17 @@
         </p:nvSpPr>
         <p:spPr>
           <a:xfrm>
-            <a:off x="7799832" y="1828800"/>
-            <a:ext cx="3145536" cy="685800"/>
-          </a:xfrm>
-          <a:prstGeom prst="rect">
-            <a:avLst/>
-          </a:prstGeom>
-          <a:noFill/>
-          <a:ln/>
-        </p:spPr>
-        <p:txBody>
-          <a:bodyPr wrap="square" lIns="0" tIns="0" rIns="0" bIns="0" rtlCol="0" anchor="t">
+            <a:off x="7799832" y="1801368"/>
+            <a:ext cx="3145536" cy="758952"/>
+          </a:xfrm>
+          <a:prstGeom prst="rect">
+            <a:avLst/>
+          </a:prstGeom>
+          <a:noFill/>
+          <a:ln/>
+        </p:spPr>
+        <p:txBody>
+          <a:bodyPr wrap="square" lIns="254" tIns="254" rIns="254" bIns="254" rtlCol="0" anchor="t">
             <a:normAutofit/>
           </a:bodyPr>
           <a:lstStyle/>
@@ -14179,7 +14424,7 @@
               <a:buNone/>
             </a:pPr>
             <a:r>
-              <a:rPr lang="en-US" sz="1550" dirty="0">
+              <a:rPr lang="en-US" sz="1320" dirty="0">
                 <a:solidFill>
                   <a:srgbClr val="17364A"/>
                 </a:solidFill>
@@ -14189,7 +14434,7 @@
               </a:rPr>
               <a:t>Define retrieval-augmented generation in plain language.</a:t>
             </a:r>
-            <a:endParaRPr lang="en-US" sz="1550" dirty="0"/>
+            <a:endParaRPr lang="en-US" sz="1320" dirty="0"/>
           </a:p>
         </p:txBody>
       </p:sp>
@@ -14277,13 +14522,16 @@
           <a:ln/>
         </p:spPr>
         <p:txBody>
-          <a:bodyPr wrap="square" lIns="254" tIns="254" rIns="254" bIns="254" rtlCol="0" anchor="t">
+          <a:bodyPr wrap="square" lIns="508" tIns="508" rIns="508" bIns="508" rtlCol="0" anchor="t">
             <a:normAutofit/>
           </a:bodyPr>
           <a:lstStyle/>
           <a:p>
-            <a:r>
-              <a:rPr lang="en-US" sz="1380" dirty="0">
+            <a:pPr indent="0" marL="0">
+              <a:buNone/>
+            </a:pPr>
+            <a:r>
+              <a:rPr lang="en-US" sz="1220" dirty="0">
                 <a:solidFill>
                   <a:srgbClr val="17364A"/>
                 </a:solidFill>
@@ -14291,13 +14539,16 @@
                 <a:ea typeface="Aptos" pitchFamily="34" charset="-122"/>
                 <a:cs typeface="Aptos" pitchFamily="34" charset="-120"/>
               </a:rPr>
-              <a:t>Describe the major components of a RAG system, including document ingestion, chunking,.</a:t>
-            </a:r>
-            <a:endParaRPr lang="en-US" sz="1380" dirty="0"/>
-          </a:p>
-          <a:p>
-            <a:r>
-              <a:rPr lang="en-US" sz="1380" dirty="0">
+              <a:t>Describe the major components of a RAG system, including document.</a:t>
+            </a:r>
+            <a:endParaRPr lang="en-US" sz="1220" dirty="0"/>
+          </a:p>
+          <a:p>
+            <a:pPr indent="0" marL="0">
+              <a:buNone/>
+            </a:pPr>
+            <a:r>
+              <a:rPr lang="en-US" sz="1220" dirty="0">
                 <a:solidFill>
                   <a:srgbClr val="17364A"/>
                 </a:solidFill>
@@ -14305,13 +14556,16 @@
                 <a:ea typeface="Aptos" pitchFamily="34" charset="-122"/>
                 <a:cs typeface="Aptos" pitchFamily="34" charset="-120"/>
               </a:rPr>
-              <a:t>Assess risks related to stale content, access control, retrieval quality, hallucination,.</a:t>
-            </a:r>
-            <a:endParaRPr lang="en-US" sz="1380" dirty="0"/>
-          </a:p>
-          <a:p>
-            <a:r>
-              <a:rPr lang="en-US" sz="1380" dirty="0">
+              <a:t>Assess risks related to stale content, access control, retrieval.</a:t>
+            </a:r>
+            <a:endParaRPr lang="en-US" sz="1220" dirty="0"/>
+          </a:p>
+          <a:p>
+            <a:pPr indent="0" marL="0">
+              <a:buNone/>
+            </a:pPr>
+            <a:r>
+              <a:rPr lang="en-US" sz="1220" dirty="0">
                 <a:solidFill>
                   <a:srgbClr val="17364A"/>
                 </a:solidFill>
@@ -14319,9 +14573,9 @@
                 <a:ea typeface="Aptos" pitchFamily="34" charset="-122"/>
                 <a:cs typeface="Aptos" pitchFamily="34" charset="-120"/>
               </a:rPr>
-              <a:t>Design governance and monitoring requirements for agency RAG systems.</a:t>
-            </a:r>
-            <a:endParaRPr lang="en-US" sz="1380" dirty="0"/>
+              <a:t>Design governance and monitoring requirements for agency RAG.</a:t>
+            </a:r>
+            <a:endParaRPr lang="en-US" sz="1220" dirty="0"/>
           </a:p>
         </p:txBody>
       </p:sp>
@@ -14399,17 +14653,17 @@
         </p:nvSpPr>
         <p:spPr>
           <a:xfrm>
-            <a:off x="7799832" y="5001768"/>
-            <a:ext cx="3145536" cy="502920"/>
-          </a:xfrm>
-          <a:prstGeom prst="rect">
-            <a:avLst/>
-          </a:prstGeom>
-          <a:noFill/>
-          <a:ln/>
-        </p:spPr>
-        <p:txBody>
-          <a:bodyPr wrap="square" lIns="0" tIns="0" rIns="0" bIns="0" rtlCol="0" anchor="t">
+            <a:off x="7799832" y="4974336"/>
+            <a:ext cx="3145536" cy="576072"/>
+          </a:xfrm>
+          <a:prstGeom prst="rect">
+            <a:avLst/>
+          </a:prstGeom>
+          <a:noFill/>
+          <a:ln/>
+        </p:spPr>
+        <p:txBody>
+          <a:bodyPr wrap="square" lIns="254" tIns="254" rIns="254" bIns="254" rtlCol="0" anchor="t">
             <a:normAutofit/>
           </a:bodyPr>
           <a:lstStyle/>
@@ -14418,7 +14672,7 @@
               <a:buNone/>
             </a:pPr>
             <a:r>
-              <a:rPr lang="en-US" sz="1550" dirty="0">
+              <a:rPr lang="en-US" sz="1320" dirty="0">
                 <a:solidFill>
                   <a:srgbClr val="17364A"/>
                 </a:solidFill>
@@ -14426,9 +14680,9 @@
                 <a:ea typeface="Aptos" pitchFamily="34" charset="-122"/>
                 <a:cs typeface="Aptos" pitchFamily="34" charset="-120"/>
               </a:rPr>
-              <a:t>Use the assignment to test whether you can explain the concept, apply it to a realistic public health situation, and identify what would need review before the work moves forward.</a:t>
-            </a:r>
-            <a:endParaRPr lang="en-US" sz="1550" dirty="0"/>
+              <a:t>Use the assignment to test whether you can explain the concept, apply it to a realistic public health situation, and.</a:t>
+            </a:r>
+            <a:endParaRPr lang="en-US" sz="1320" dirty="0"/>
           </a:p>
         </p:txBody>
       </p:sp>
@@ -14729,21 +14983,24 @@
           <a:ln/>
         </p:spPr>
         <p:txBody>
-          <a:bodyPr wrap="square" lIns="635" tIns="635" rIns="635" bIns="635" rtlCol="0" anchor="t">
+          <a:bodyPr wrap="square" lIns="1016" tIns="1016" rIns="1016" bIns="1016" rtlCol="0" anchor="t">
             <a:normAutofit/>
           </a:bodyPr>
           <a:lstStyle/>
           <a:p>
+            <a:pPr indent="0" marL="0">
+              <a:buNone/>
+            </a:pPr>
             <a:r>
               <a:rPr lang="en-US" sz="2100" dirty="0">
                 <a:solidFill>
-                  <a:srgbClr val="17364A"/>
-                </a:solidFill>
-                <a:latin typeface="Aptos" pitchFamily="34" charset="0"/>
-                <a:ea typeface="Aptos" pitchFamily="34" charset="-122"/>
-                <a:cs typeface="Aptos" pitchFamily="34" charset="-120"/>
-              </a:rPr>
-              <a:t>Produce a RAG readiness checklist for a public health knowledge workflow.</a:t>
+                  <a:srgbClr val="003A63"/>
+                </a:solidFill>
+                <a:latin typeface="Aptos" pitchFamily="34" charset="0"/>
+                <a:ea typeface="Aptos" pitchFamily="34" charset="-122"/>
+                <a:cs typeface="Aptos" pitchFamily="34" charset="-120"/>
+              </a:rPr>
+              <a:t>• Produce a RAG readiness checklist for a public health knowledge workflow.</a:t>
             </a:r>
             <a:endParaRPr lang="en-US" sz="2100" dirty="0"/>
           </a:p>
@@ -14823,17 +15080,17 @@
         </p:nvSpPr>
         <p:spPr>
           <a:xfrm>
-            <a:off x="7799832" y="1828800"/>
-            <a:ext cx="3145536" cy="685800"/>
-          </a:xfrm>
-          <a:prstGeom prst="rect">
-            <a:avLst/>
-          </a:prstGeom>
-          <a:noFill/>
-          <a:ln/>
-        </p:spPr>
-        <p:txBody>
-          <a:bodyPr wrap="square" lIns="0" tIns="0" rIns="0" bIns="0" rtlCol="0" anchor="t">
+            <a:off x="7799832" y="1801368"/>
+            <a:ext cx="3145536" cy="758952"/>
+          </a:xfrm>
+          <a:prstGeom prst="rect">
+            <a:avLst/>
+          </a:prstGeom>
+          <a:noFill/>
+          <a:ln/>
+        </p:spPr>
+        <p:txBody>
+          <a:bodyPr wrap="square" lIns="254" tIns="254" rIns="254" bIns="254" rtlCol="0" anchor="t">
             <a:normAutofit/>
           </a:bodyPr>
           <a:lstStyle/>
@@ -14842,7 +15099,7 @@
               <a:buNone/>
             </a:pPr>
             <a:r>
-              <a:rPr lang="en-US" sz="1550" dirty="0">
+              <a:rPr lang="en-US" sz="1320" dirty="0">
                 <a:solidFill>
                   <a:srgbClr val="17364A"/>
                 </a:solidFill>
@@ -14852,7 +15109,7 @@
               </a:rPr>
               <a:t>Produce a RAG readiness checklist for a public health knowledge workflow.</a:t>
             </a:r>
-            <a:endParaRPr lang="en-US" sz="1550" dirty="0"/>
+            <a:endParaRPr lang="en-US" sz="1320" dirty="0"/>
           </a:p>
         </p:txBody>
       </p:sp>
@@ -14940,13 +15197,16 @@
           <a:ln/>
         </p:spPr>
         <p:txBody>
-          <a:bodyPr wrap="square" lIns="254" tIns="254" rIns="254" bIns="254" rtlCol="0" anchor="t">
+          <a:bodyPr wrap="square" lIns="508" tIns="508" rIns="508" bIns="508" rtlCol="0" anchor="t">
             <a:normAutofit/>
           </a:bodyPr>
           <a:lstStyle/>
           <a:p>
-            <a:r>
-              <a:rPr lang="en-US" sz="1380" dirty="0">
+            <a:pPr indent="0" marL="0">
+              <a:buNone/>
+            </a:pPr>
+            <a:r>
+              <a:rPr lang="en-US" sz="1220" dirty="0">
                 <a:solidFill>
                   <a:srgbClr val="17364A"/>
                 </a:solidFill>
@@ -14954,9 +15214,9 @@
                 <a:ea typeface="Aptos" pitchFamily="34" charset="-122"/>
                 <a:cs typeface="Aptos" pitchFamily="34" charset="-120"/>
               </a:rPr>
-              <a:t>Produce a RAG readiness checklist for a public health knowledge workflow.</a:t>
-            </a:r>
-            <a:endParaRPr lang="en-US" sz="1380" dirty="0"/>
+              <a:t>Produce a RAG readiness checklist for a public health knowledge.</a:t>
+            </a:r>
+            <a:endParaRPr lang="en-US" sz="1220" dirty="0"/>
           </a:p>
         </p:txBody>
       </p:sp>
@@ -15034,17 +15294,17 @@
         </p:nvSpPr>
         <p:spPr>
           <a:xfrm>
-            <a:off x="7799832" y="5001768"/>
-            <a:ext cx="3145536" cy="502920"/>
-          </a:xfrm>
-          <a:prstGeom prst="rect">
-            <a:avLst/>
-          </a:prstGeom>
-          <a:noFill/>
-          <a:ln/>
-        </p:spPr>
-        <p:txBody>
-          <a:bodyPr wrap="square" lIns="0" tIns="0" rIns="0" bIns="0" rtlCol="0" anchor="t">
+            <a:off x="7799832" y="4974336"/>
+            <a:ext cx="3145536" cy="576072"/>
+          </a:xfrm>
+          <a:prstGeom prst="rect">
+            <a:avLst/>
+          </a:prstGeom>
+          <a:noFill/>
+          <a:ln/>
+        </p:spPr>
+        <p:txBody>
+          <a:bodyPr wrap="square" lIns="254" tIns="254" rIns="254" bIns="254" rtlCol="0" anchor="t">
             <a:normAutofit/>
           </a:bodyPr>
           <a:lstStyle/>
@@ -15053,7 +15313,7 @@
               <a:buNone/>
             </a:pPr>
             <a:r>
-              <a:rPr lang="en-US" sz="1550" dirty="0">
+              <a:rPr lang="en-US" sz="1320" dirty="0">
                 <a:solidFill>
                   <a:srgbClr val="17364A"/>
                 </a:solidFill>
@@ -15061,9 +15321,9 @@
                 <a:ea typeface="Aptos" pitchFamily="34" charset="-122"/>
                 <a:cs typeface="Aptos" pitchFamily="34" charset="-120"/>
               </a:rPr>
-              <a:t>Use the assignment to test whether you can explain the concept, apply it to a realistic public health situation, and identify what would need review before the work moves forward.</a:t>
-            </a:r>
-            <a:endParaRPr lang="en-US" sz="1550" dirty="0"/>
+              <a:t>Use the assignment to test whether you can explain the concept, apply it to a realistic public health situation, and.</a:t>
+            </a:r>
+            <a:endParaRPr lang="en-US" sz="1320" dirty="0"/>
           </a:p>
         </p:txBody>
       </p:sp>
@@ -15364,49 +15624,58 @@
           <a:ln/>
         </p:spPr>
         <p:txBody>
-          <a:bodyPr wrap="square" lIns="635" tIns="635" rIns="635" bIns="635" rtlCol="0" anchor="t">
+          <a:bodyPr wrap="square" lIns="1016" tIns="1016" rIns="1016" bIns="1016" rtlCol="0" anchor="t">
             <a:normAutofit/>
           </a:bodyPr>
           <a:lstStyle/>
           <a:p>
+            <a:pPr indent="0" marL="0">
+              <a:buNone/>
+            </a:pPr>
             <a:r>
               <a:rPr lang="en-US" sz="2100" dirty="0">
                 <a:solidFill>
-                  <a:srgbClr val="17364A"/>
-                </a:solidFill>
-                <a:latin typeface="Aptos" pitchFamily="34" charset="0"/>
-                <a:ea typeface="Aptos" pitchFamily="34" charset="-122"/>
-                <a:cs typeface="Aptos" pitchFamily="34" charset="-120"/>
-              </a:rPr>
-              <a:t>Retrieval-augmented generation, often called RAG, combines generative AI with retrieval from a defined.</a:t>
+                  <a:srgbClr val="003A63"/>
+                </a:solidFill>
+                <a:latin typeface="Aptos" pitchFamily="34" charset="0"/>
+                <a:ea typeface="Aptos" pitchFamily="34" charset="-122"/>
+                <a:cs typeface="Aptos" pitchFamily="34" charset="-120"/>
+              </a:rPr>
+              <a:t>• Retrieval-augmented generation, often called RAG, combines generative AI with retrieval from a.</a:t>
             </a:r>
             <a:endParaRPr lang="en-US" sz="2100" dirty="0"/>
           </a:p>
           <a:p>
+            <a:pPr indent="0" marL="0">
+              <a:buNone/>
+            </a:pPr>
             <a:r>
               <a:rPr lang="en-US" sz="2100" dirty="0">
                 <a:solidFill>
-                  <a:srgbClr val="17364A"/>
-                </a:solidFill>
-                <a:latin typeface="Aptos" pitchFamily="34" charset="0"/>
-                <a:ea typeface="Aptos" pitchFamily="34" charset="-122"/>
-                <a:cs typeface="Aptos" pitchFamily="34" charset="-120"/>
-              </a:rPr>
-              <a:t>Instead of relying only on a model’s general training, a RAG system searches approved content and uses.</a:t>
+                  <a:srgbClr val="003A63"/>
+                </a:solidFill>
+                <a:latin typeface="Aptos" pitchFamily="34" charset="0"/>
+                <a:ea typeface="Aptos" pitchFamily="34" charset="-122"/>
+                <a:cs typeface="Aptos" pitchFamily="34" charset="-120"/>
+              </a:rPr>
+              <a:t>• Instead of relying only on a model’s general training, a RAG system searches approved content.</a:t>
             </a:r>
             <a:endParaRPr lang="en-US" sz="2100" dirty="0"/>
           </a:p>
           <a:p>
+            <a:pPr indent="0" marL="0">
+              <a:buNone/>
+            </a:pPr>
             <a:r>
               <a:rPr lang="en-US" sz="2100" dirty="0">
                 <a:solidFill>
-                  <a:srgbClr val="17364A"/>
-                </a:solidFill>
-                <a:latin typeface="Aptos" pitchFamily="34" charset="0"/>
-                <a:ea typeface="Aptos" pitchFamily="34" charset="-122"/>
-                <a:cs typeface="Aptos" pitchFamily="34" charset="-120"/>
-              </a:rPr>
-              <a:t>In public health, RAG may support policy lookup, protocol interpretation, internal help desks, training.</a:t>
+                  <a:srgbClr val="003A63"/>
+                </a:solidFill>
+                <a:latin typeface="Aptos" pitchFamily="34" charset="0"/>
+                <a:ea typeface="Aptos" pitchFamily="34" charset="-122"/>
+                <a:cs typeface="Aptos" pitchFamily="34" charset="-120"/>
+              </a:rPr>
+              <a:t>• In public health, RAG may support policy lookup, protocol interpretation, internal help desks,.</a:t>
             </a:r>
             <a:endParaRPr lang="en-US" sz="2100" dirty="0"/>
           </a:p>
@@ -15486,17 +15755,17 @@
         </p:nvSpPr>
         <p:spPr>
           <a:xfrm>
-            <a:off x="7799832" y="1828800"/>
-            <a:ext cx="3145536" cy="685800"/>
-          </a:xfrm>
-          <a:prstGeom prst="rect">
-            <a:avLst/>
-          </a:prstGeom>
-          <a:noFill/>
-          <a:ln/>
-        </p:spPr>
-        <p:txBody>
-          <a:bodyPr wrap="square" lIns="0" tIns="0" rIns="0" bIns="0" rtlCol="0" anchor="t">
+            <a:off x="7799832" y="1801368"/>
+            <a:ext cx="3145536" cy="758952"/>
+          </a:xfrm>
+          <a:prstGeom prst="rect">
+            <a:avLst/>
+          </a:prstGeom>
+          <a:noFill/>
+          <a:ln/>
+        </p:spPr>
+        <p:txBody>
+          <a:bodyPr wrap="square" lIns="254" tIns="254" rIns="254" bIns="254" rtlCol="0" anchor="t">
             <a:normAutofit/>
           </a:bodyPr>
           <a:lstStyle/>
@@ -15505,7 +15774,7 @@
               <a:buNone/>
             </a:pPr>
             <a:r>
-              <a:rPr lang="en-US" sz="1550" dirty="0">
+              <a:rPr lang="en-US" sz="1320" dirty="0">
                 <a:solidFill>
                   <a:srgbClr val="17364A"/>
                 </a:solidFill>
@@ -15515,7 +15784,7 @@
               </a:rPr>
               <a:t>Retrieval-augmented generation, often called RAG, combines generative AI with retrieval from a defined.</a:t>
             </a:r>
-            <a:endParaRPr lang="en-US" sz="1550" dirty="0"/>
+            <a:endParaRPr lang="en-US" sz="1320" dirty="0"/>
           </a:p>
         </p:txBody>
       </p:sp>
@@ -15603,13 +15872,16 @@
           <a:ln/>
         </p:spPr>
         <p:txBody>
-          <a:bodyPr wrap="square" lIns="254" tIns="254" rIns="254" bIns="254" rtlCol="0" anchor="t">
+          <a:bodyPr wrap="square" lIns="508" tIns="508" rIns="508" bIns="508" rtlCol="0" anchor="t">
             <a:normAutofit/>
           </a:bodyPr>
           <a:lstStyle/>
           <a:p>
-            <a:r>
-              <a:rPr lang="en-US" sz="1380" dirty="0">
+            <a:pPr indent="0" marL="0">
+              <a:buNone/>
+            </a:pPr>
+            <a:r>
+              <a:rPr lang="en-US" sz="1220" dirty="0">
                 <a:solidFill>
                   <a:srgbClr val="17364A"/>
                 </a:solidFill>
@@ -15617,13 +15889,16 @@
                 <a:ea typeface="Aptos" pitchFamily="34" charset="-122"/>
                 <a:cs typeface="Aptos" pitchFamily="34" charset="-120"/>
               </a:rPr>
-              <a:t>Retrieval-augmented generation, often called RAG, combines generative AI with retrieval.</a:t>
-            </a:r>
-            <a:endParaRPr lang="en-US" sz="1380" dirty="0"/>
-          </a:p>
-          <a:p>
-            <a:r>
-              <a:rPr lang="en-US" sz="1380" dirty="0">
+              <a:t>Retrieval-augmented generation, often called RAG, combines.</a:t>
+            </a:r>
+            <a:endParaRPr lang="en-US" sz="1220" dirty="0"/>
+          </a:p>
+          <a:p>
+            <a:pPr indent="0" marL="0">
+              <a:buNone/>
+            </a:pPr>
+            <a:r>
+              <a:rPr lang="en-US" sz="1220" dirty="0">
                 <a:solidFill>
                   <a:srgbClr val="17364A"/>
                 </a:solidFill>
@@ -15631,13 +15906,16 @@
                 <a:ea typeface="Aptos" pitchFamily="34" charset="-122"/>
                 <a:cs typeface="Aptos" pitchFamily="34" charset="-120"/>
               </a:rPr>
-              <a:t>Instead of relying only on a model’s general training, a RAG system searches approved.</a:t>
-            </a:r>
-            <a:endParaRPr lang="en-US" sz="1380" dirty="0"/>
-          </a:p>
-          <a:p>
-            <a:r>
-              <a:rPr lang="en-US" sz="1380" dirty="0">
+              <a:t>Instead of relying only on a model’s general training, a RAG.</a:t>
+            </a:r>
+            <a:endParaRPr lang="en-US" sz="1220" dirty="0"/>
+          </a:p>
+          <a:p>
+            <a:pPr indent="0" marL="0">
+              <a:buNone/>
+            </a:pPr>
+            <a:r>
+              <a:rPr lang="en-US" sz="1220" dirty="0">
                 <a:solidFill>
                   <a:srgbClr val="17364A"/>
                 </a:solidFill>
@@ -15645,9 +15923,9 @@
                 <a:ea typeface="Aptos" pitchFamily="34" charset="-122"/>
                 <a:cs typeface="Aptos" pitchFamily="34" charset="-120"/>
               </a:rPr>
-              <a:t>In public health, RAG may support policy lookup, protocol interpretation, internal help.</a:t>
-            </a:r>
-            <a:endParaRPr lang="en-US" sz="1380" dirty="0"/>
+              <a:t>In public health, RAG may support policy lookup, protocol.</a:t>
+            </a:r>
+            <a:endParaRPr lang="en-US" sz="1220" dirty="0"/>
           </a:p>
         </p:txBody>
       </p:sp>
@@ -15725,17 +16003,17 @@
         </p:nvSpPr>
         <p:spPr>
           <a:xfrm>
-            <a:off x="7799832" y="5001768"/>
-            <a:ext cx="3145536" cy="502920"/>
-          </a:xfrm>
-          <a:prstGeom prst="rect">
-            <a:avLst/>
-          </a:prstGeom>
-          <a:noFill/>
-          <a:ln/>
-        </p:spPr>
-        <p:txBody>
-          <a:bodyPr wrap="square" lIns="0" tIns="0" rIns="0" bIns="0" rtlCol="0" anchor="t">
+            <a:off x="7799832" y="4974336"/>
+            <a:ext cx="3145536" cy="576072"/>
+          </a:xfrm>
+          <a:prstGeom prst="rect">
+            <a:avLst/>
+          </a:prstGeom>
+          <a:noFill/>
+          <a:ln/>
+        </p:spPr>
+        <p:txBody>
+          <a:bodyPr wrap="square" lIns="254" tIns="254" rIns="254" bIns="254" rtlCol="0" anchor="t">
             <a:normAutofit/>
           </a:bodyPr>
           <a:lstStyle/>
@@ -15744,7 +16022,7 @@
               <a:buNone/>
             </a:pPr>
             <a:r>
-              <a:rPr lang="en-US" sz="1550" dirty="0">
+              <a:rPr lang="en-US" sz="1320" dirty="0">
                 <a:solidFill>
                   <a:srgbClr val="17364A"/>
                 </a:solidFill>
@@ -15752,9 +16030,9 @@
                 <a:ea typeface="Aptos" pitchFamily="34" charset="-122"/>
                 <a:cs typeface="Aptos" pitchFamily="34" charset="-120"/>
               </a:rPr>
-              <a:t>Use the assignment to test whether you can explain the concept, apply it to a realistic public health situation, and identify what would need review before the work moves forward.</a:t>
-            </a:r>
-            <a:endParaRPr lang="en-US" sz="1550" dirty="0"/>
+              <a:t>Use the assignment to test whether you can explain the concept, apply it to a realistic public health situation, and.</a:t>
+            </a:r>
+            <a:endParaRPr lang="en-US" sz="1320" dirty="0"/>
           </a:p>
         </p:txBody>
       </p:sp>
@@ -16055,49 +16333,58 @@
           <a:ln/>
         </p:spPr>
         <p:txBody>
-          <a:bodyPr wrap="square" lIns="635" tIns="635" rIns="635" bIns="635" rtlCol="0" anchor="t">
+          <a:bodyPr wrap="square" lIns="1016" tIns="1016" rIns="1016" bIns="1016" rtlCol="0" anchor="t">
             <a:normAutofit/>
           </a:bodyPr>
           <a:lstStyle/>
           <a:p>
+            <a:pPr indent="0" marL="0">
+              <a:buNone/>
+            </a:pPr>
             <a:r>
               <a:rPr lang="en-US" sz="2100" dirty="0">
                 <a:solidFill>
-                  <a:srgbClr val="17364A"/>
-                </a:solidFill>
-                <a:latin typeface="Aptos" pitchFamily="34" charset="0"/>
-                <a:ea typeface="Aptos" pitchFamily="34" charset="-122"/>
-                <a:cs typeface="Aptos" pitchFamily="34" charset="-120"/>
-              </a:rPr>
-              <a:t>RAG matters because public health agencies manage large collections of guidance, protocols, policies,.</a:t>
+                  <a:srgbClr val="003A63"/>
+                </a:solidFill>
+                <a:latin typeface="Aptos" pitchFamily="34" charset="0"/>
+                <a:ea typeface="Aptos" pitchFamily="34" charset="-122"/>
+                <a:cs typeface="Aptos" pitchFamily="34" charset="-120"/>
+              </a:rPr>
+              <a:t>• RAG matters because public health agencies manage large collections of guidance, protocols,.</a:t>
             </a:r>
             <a:endParaRPr lang="en-US" sz="2100" dirty="0"/>
           </a:p>
           <a:p>
+            <a:pPr indent="0" marL="0">
+              <a:buNone/>
+            </a:pPr>
             <a:r>
               <a:rPr lang="en-US" sz="2100" dirty="0">
                 <a:solidFill>
-                  <a:srgbClr val="17364A"/>
-                </a:solidFill>
-                <a:latin typeface="Aptos" pitchFamily="34" charset="0"/>
-                <a:ea typeface="Aptos" pitchFamily="34" charset="-122"/>
-                <a:cs typeface="Aptos" pitchFamily="34" charset="-120"/>
-              </a:rPr>
-              <a:t>Staff may spend substantial time searching for answers across shared drives, websites, portals, and.</a:t>
+                  <a:srgbClr val="003A63"/>
+                </a:solidFill>
+                <a:latin typeface="Aptos" pitchFamily="34" charset="0"/>
+                <a:ea typeface="Aptos" pitchFamily="34" charset="-122"/>
+                <a:cs typeface="Aptos" pitchFamily="34" charset="-120"/>
+              </a:rPr>
+              <a:t>• Staff may spend substantial time searching for answers across shared drives, websites,.</a:t>
             </a:r>
             <a:endParaRPr lang="en-US" sz="2100" dirty="0"/>
           </a:p>
           <a:p>
+            <a:pPr indent="0" marL="0">
+              <a:buNone/>
+            </a:pPr>
             <a:r>
               <a:rPr lang="en-US" sz="2100" dirty="0">
                 <a:solidFill>
-                  <a:srgbClr val="17364A"/>
-                </a:solidFill>
-                <a:latin typeface="Aptos" pitchFamily="34" charset="0"/>
-                <a:ea typeface="Aptos" pitchFamily="34" charset="-122"/>
-                <a:cs typeface="Aptos" pitchFamily="34" charset="-120"/>
-              </a:rPr>
-              <a:t>A well-designed RAG system can help users find relevant guidance and produce concise, source-linked.</a:t>
+                  <a:srgbClr val="003A63"/>
+                </a:solidFill>
+                <a:latin typeface="Aptos" pitchFamily="34" charset="0"/>
+                <a:ea typeface="Aptos" pitchFamily="34" charset="-122"/>
+                <a:cs typeface="Aptos" pitchFamily="34" charset="-120"/>
+              </a:rPr>
+              <a:t>• A well-designed RAG system can help users find relevant guidance and produce concise,.</a:t>
             </a:r>
             <a:endParaRPr lang="en-US" sz="2100" dirty="0"/>
           </a:p>
@@ -16177,17 +16464,17 @@
         </p:nvSpPr>
         <p:spPr>
           <a:xfrm>
-            <a:off x="7799832" y="1828800"/>
-            <a:ext cx="3145536" cy="685800"/>
-          </a:xfrm>
-          <a:prstGeom prst="rect">
-            <a:avLst/>
-          </a:prstGeom>
-          <a:noFill/>
-          <a:ln/>
-        </p:spPr>
-        <p:txBody>
-          <a:bodyPr wrap="square" lIns="0" tIns="0" rIns="0" bIns="0" rtlCol="0" anchor="t">
+            <a:off x="7799832" y="1801368"/>
+            <a:ext cx="3145536" cy="758952"/>
+          </a:xfrm>
+          <a:prstGeom prst="rect">
+            <a:avLst/>
+          </a:prstGeom>
+          <a:noFill/>
+          <a:ln/>
+        </p:spPr>
+        <p:txBody>
+          <a:bodyPr wrap="square" lIns="254" tIns="254" rIns="254" bIns="254" rtlCol="0" anchor="t">
             <a:normAutofit/>
           </a:bodyPr>
           <a:lstStyle/>
@@ -16196,7 +16483,7 @@
               <a:buNone/>
             </a:pPr>
             <a:r>
-              <a:rPr lang="en-US" sz="1550" dirty="0">
+              <a:rPr lang="en-US" sz="1320" dirty="0">
                 <a:solidFill>
                   <a:srgbClr val="17364A"/>
                 </a:solidFill>
@@ -16206,7 +16493,7 @@
               </a:rPr>
               <a:t>RAG matters because public health agencies manage large collections of guidance, protocols, policies,.</a:t>
             </a:r>
-            <a:endParaRPr lang="en-US" sz="1550" dirty="0"/>
+            <a:endParaRPr lang="en-US" sz="1320" dirty="0"/>
           </a:p>
         </p:txBody>
       </p:sp>
@@ -16294,13 +16581,16 @@
           <a:ln/>
         </p:spPr>
         <p:txBody>
-          <a:bodyPr wrap="square" lIns="254" tIns="254" rIns="254" bIns="254" rtlCol="0" anchor="t">
+          <a:bodyPr wrap="square" lIns="508" tIns="508" rIns="508" bIns="508" rtlCol="0" anchor="t">
             <a:normAutofit/>
           </a:bodyPr>
           <a:lstStyle/>
           <a:p>
-            <a:r>
-              <a:rPr lang="en-US" sz="1380" dirty="0">
+            <a:pPr indent="0" marL="0">
+              <a:buNone/>
+            </a:pPr>
+            <a:r>
+              <a:rPr lang="en-US" sz="1220" dirty="0">
                 <a:solidFill>
                   <a:srgbClr val="17364A"/>
                 </a:solidFill>
@@ -16308,13 +16598,16 @@
                 <a:ea typeface="Aptos" pitchFamily="34" charset="-122"/>
                 <a:cs typeface="Aptos" pitchFamily="34" charset="-120"/>
               </a:rPr>
-              <a:t>RAG matters because public health agencies manage large collections of guidance,.</a:t>
-            </a:r>
-            <a:endParaRPr lang="en-US" sz="1380" dirty="0"/>
-          </a:p>
-          <a:p>
-            <a:r>
-              <a:rPr lang="en-US" sz="1380" dirty="0">
+              <a:t>RAG matters because public health agencies manage large.</a:t>
+            </a:r>
+            <a:endParaRPr lang="en-US" sz="1220" dirty="0"/>
+          </a:p>
+          <a:p>
+            <a:pPr indent="0" marL="0">
+              <a:buNone/>
+            </a:pPr>
+            <a:r>
+              <a:rPr lang="en-US" sz="1220" dirty="0">
                 <a:solidFill>
                   <a:srgbClr val="17364A"/>
                 </a:solidFill>
@@ -16322,13 +16615,16 @@
                 <a:ea typeface="Aptos" pitchFamily="34" charset="-122"/>
                 <a:cs typeface="Aptos" pitchFamily="34" charset="-120"/>
               </a:rPr>
-              <a:t>Staff may spend substantial time searching for answers across shared drives, websites,.</a:t>
-            </a:r>
-            <a:endParaRPr lang="en-US" sz="1380" dirty="0"/>
-          </a:p>
-          <a:p>
-            <a:r>
-              <a:rPr lang="en-US" sz="1380" dirty="0">
+              <a:t>Staff may spend substantial time searching for answers across.</a:t>
+            </a:r>
+            <a:endParaRPr lang="en-US" sz="1220" dirty="0"/>
+          </a:p>
+          <a:p>
+            <a:pPr indent="0" marL="0">
+              <a:buNone/>
+            </a:pPr>
+            <a:r>
+              <a:rPr lang="en-US" sz="1220" dirty="0">
                 <a:solidFill>
                   <a:srgbClr val="17364A"/>
                 </a:solidFill>
@@ -16336,9 +16632,9 @@
                 <a:ea typeface="Aptos" pitchFamily="34" charset="-122"/>
                 <a:cs typeface="Aptos" pitchFamily="34" charset="-120"/>
               </a:rPr>
-              <a:t>A well-designed RAG system can help users find relevant guidance and produce concise,.</a:t>
-            </a:r>
-            <a:endParaRPr lang="en-US" sz="1380" dirty="0"/>
+              <a:t>A well-designed RAG system can help users find relevant guidance.</a:t>
+            </a:r>
+            <a:endParaRPr lang="en-US" sz="1220" dirty="0"/>
           </a:p>
         </p:txBody>
       </p:sp>
@@ -16416,17 +16712,17 @@
         </p:nvSpPr>
         <p:spPr>
           <a:xfrm>
-            <a:off x="7799832" y="5001768"/>
-            <a:ext cx="3145536" cy="502920"/>
-          </a:xfrm>
-          <a:prstGeom prst="rect">
-            <a:avLst/>
-          </a:prstGeom>
-          <a:noFill/>
-          <a:ln/>
-        </p:spPr>
-        <p:txBody>
-          <a:bodyPr wrap="square" lIns="0" tIns="0" rIns="0" bIns="0" rtlCol="0" anchor="t">
+            <a:off x="7799832" y="4974336"/>
+            <a:ext cx="3145536" cy="576072"/>
+          </a:xfrm>
+          <a:prstGeom prst="rect">
+            <a:avLst/>
+          </a:prstGeom>
+          <a:noFill/>
+          <a:ln/>
+        </p:spPr>
+        <p:txBody>
+          <a:bodyPr wrap="square" lIns="254" tIns="254" rIns="254" bIns="254" rtlCol="0" anchor="t">
             <a:normAutofit/>
           </a:bodyPr>
           <a:lstStyle/>
@@ -16435,7 +16731,7 @@
               <a:buNone/>
             </a:pPr>
             <a:r>
-              <a:rPr lang="en-US" sz="1550" dirty="0">
+              <a:rPr lang="en-US" sz="1320" dirty="0">
                 <a:solidFill>
                   <a:srgbClr val="17364A"/>
                 </a:solidFill>
@@ -16443,9 +16739,9 @@
                 <a:ea typeface="Aptos" pitchFamily="34" charset="-122"/>
                 <a:cs typeface="Aptos" pitchFamily="34" charset="-120"/>
               </a:rPr>
-              <a:t>Use the assignment to test whether you can explain the concept, apply it to a realistic public health situation, and identify what would need review before the work moves forward.</a:t>
-            </a:r>
-            <a:endParaRPr lang="en-US" sz="1550" dirty="0"/>
+              <a:t>Use the assignment to test whether you can explain the concept, apply it to a realistic public health situation, and.</a:t>
+            </a:r>
+            <a:endParaRPr lang="en-US" sz="1320" dirty="0"/>
           </a:p>
         </p:txBody>
       </p:sp>
@@ -16746,49 +17042,58 @@
           <a:ln/>
         </p:spPr>
         <p:txBody>
-          <a:bodyPr wrap="square" lIns="635" tIns="635" rIns="635" bIns="635" rtlCol="0" anchor="t">
+          <a:bodyPr wrap="square" lIns="1016" tIns="1016" rIns="1016" bIns="1016" rtlCol="0" anchor="t">
             <a:normAutofit/>
           </a:bodyPr>
           <a:lstStyle/>
           <a:p>
+            <a:pPr indent="0" marL="0">
+              <a:buNone/>
+            </a:pPr>
             <a:r>
               <a:rPr lang="en-US" sz="2100" dirty="0">
                 <a:solidFill>
-                  <a:srgbClr val="17364A"/>
-                </a:solidFill>
-                <a:latin typeface="Aptos" pitchFamily="34" charset="0"/>
-                <a:ea typeface="Aptos" pitchFamily="34" charset="-122"/>
-                <a:cs typeface="Aptos" pitchFamily="34" charset="-120"/>
-              </a:rPr>
-              <a:t>A state health department may create an internal RAG assistant to help staff find current infectious.</a:t>
+                  <a:srgbClr val="003A63"/>
+                </a:solidFill>
+                <a:latin typeface="Aptos" pitchFamily="34" charset="0"/>
+                <a:ea typeface="Aptos" pitchFamily="34" charset="-122"/>
+                <a:cs typeface="Aptos" pitchFamily="34" charset="-120"/>
+              </a:rPr>
+              <a:t>• A state health department may create an internal RAG assistant to help staff find current.</a:t>
             </a:r>
             <a:endParaRPr lang="en-US" sz="2100" dirty="0"/>
           </a:p>
           <a:p>
+            <a:pPr indent="0" marL="0">
+              <a:buNone/>
+            </a:pPr>
             <a:r>
               <a:rPr lang="en-US" sz="2100" dirty="0">
                 <a:solidFill>
-                  <a:srgbClr val="17364A"/>
-                </a:solidFill>
-                <a:latin typeface="Aptos" pitchFamily="34" charset="0"/>
-                <a:ea typeface="Aptos" pitchFamily="34" charset="-122"/>
-                <a:cs typeface="Aptos" pitchFamily="34" charset="-120"/>
-              </a:rPr>
-              <a:t>The assistant could search approved protocols, case definitions, reporting rules, and escalation.</a:t>
+                  <a:srgbClr val="003A63"/>
+                </a:solidFill>
+                <a:latin typeface="Aptos" pitchFamily="34" charset="0"/>
+                <a:ea typeface="Aptos" pitchFamily="34" charset="-122"/>
+                <a:cs typeface="Aptos" pitchFamily="34" charset="-120"/>
+              </a:rPr>
+              <a:t>• The assistant could search approved protocols, case definitions, reporting rules, and.</a:t>
             </a:r>
             <a:endParaRPr lang="en-US" sz="2100" dirty="0"/>
           </a:p>
           <a:p>
+            <a:pPr indent="0" marL="0">
+              <a:buNone/>
+            </a:pPr>
             <a:r>
               <a:rPr lang="en-US" sz="2100" dirty="0">
                 <a:solidFill>
-                  <a:srgbClr val="17364A"/>
-                </a:solidFill>
-                <a:latin typeface="Aptos" pitchFamily="34" charset="0"/>
-                <a:ea typeface="Aptos" pitchFamily="34" charset="-122"/>
-                <a:cs typeface="Aptos" pitchFamily="34" charset="-120"/>
-              </a:rPr>
-              <a:t>When a user asks what steps to take for a suspected condition, the system could summarize relevant.</a:t>
+                  <a:srgbClr val="003A63"/>
+                </a:solidFill>
+                <a:latin typeface="Aptos" pitchFamily="34" charset="0"/>
+                <a:ea typeface="Aptos" pitchFamily="34" charset="-122"/>
+                <a:cs typeface="Aptos" pitchFamily="34" charset="-120"/>
+              </a:rPr>
+              <a:t>• When a user asks what steps to take for a suspected condition, the system could summarize.</a:t>
             </a:r>
             <a:endParaRPr lang="en-US" sz="2100" dirty="0"/>
           </a:p>
@@ -16868,17 +17173,17 @@
         </p:nvSpPr>
         <p:spPr>
           <a:xfrm>
-            <a:off x="7799832" y="1828800"/>
-            <a:ext cx="3145536" cy="685800"/>
-          </a:xfrm>
-          <a:prstGeom prst="rect">
-            <a:avLst/>
-          </a:prstGeom>
-          <a:noFill/>
-          <a:ln/>
-        </p:spPr>
-        <p:txBody>
-          <a:bodyPr wrap="square" lIns="0" tIns="0" rIns="0" bIns="0" rtlCol="0" anchor="t">
+            <a:off x="7799832" y="1801368"/>
+            <a:ext cx="3145536" cy="758952"/>
+          </a:xfrm>
+          <a:prstGeom prst="rect">
+            <a:avLst/>
+          </a:prstGeom>
+          <a:noFill/>
+          <a:ln/>
+        </p:spPr>
+        <p:txBody>
+          <a:bodyPr wrap="square" lIns="254" tIns="254" rIns="254" bIns="254" rtlCol="0" anchor="t">
             <a:normAutofit/>
           </a:bodyPr>
           <a:lstStyle/>
@@ -16887,7 +17192,7 @@
               <a:buNone/>
             </a:pPr>
             <a:r>
-              <a:rPr lang="en-US" sz="1550" dirty="0">
+              <a:rPr lang="en-US" sz="1320" dirty="0">
                 <a:solidFill>
                   <a:srgbClr val="17364A"/>
                 </a:solidFill>
@@ -16897,7 +17202,7 @@
               </a:rPr>
               <a:t>A state health department may create an internal RAG assistant to help staff find current infectious.</a:t>
             </a:r>
-            <a:endParaRPr lang="en-US" sz="1550" dirty="0"/>
+            <a:endParaRPr lang="en-US" sz="1320" dirty="0"/>
           </a:p>
         </p:txBody>
       </p:sp>
@@ -16985,13 +17290,16 @@
           <a:ln/>
         </p:spPr>
         <p:txBody>
-          <a:bodyPr wrap="square" lIns="254" tIns="254" rIns="254" bIns="254" rtlCol="0" anchor="t">
+          <a:bodyPr wrap="square" lIns="508" tIns="508" rIns="508" bIns="508" rtlCol="0" anchor="t">
             <a:normAutofit/>
           </a:bodyPr>
           <a:lstStyle/>
           <a:p>
-            <a:r>
-              <a:rPr lang="en-US" sz="1380" dirty="0">
+            <a:pPr indent="0" marL="0">
+              <a:buNone/>
+            </a:pPr>
+            <a:r>
+              <a:rPr lang="en-US" sz="1220" dirty="0">
                 <a:solidFill>
                   <a:srgbClr val="17364A"/>
                 </a:solidFill>
@@ -16999,13 +17307,16 @@
                 <a:ea typeface="Aptos" pitchFamily="34" charset="-122"/>
                 <a:cs typeface="Aptos" pitchFamily="34" charset="-120"/>
               </a:rPr>
-              <a:t>A state health department may create an internal RAG assistant to help staff find current.</a:t>
-            </a:r>
-            <a:endParaRPr lang="en-US" sz="1380" dirty="0"/>
-          </a:p>
-          <a:p>
-            <a:r>
-              <a:rPr lang="en-US" sz="1380" dirty="0">
+              <a:t>A state health department may create an internal RAG assistant to.</a:t>
+            </a:r>
+            <a:endParaRPr lang="en-US" sz="1220" dirty="0"/>
+          </a:p>
+          <a:p>
+            <a:pPr indent="0" marL="0">
+              <a:buNone/>
+            </a:pPr>
+            <a:r>
+              <a:rPr lang="en-US" sz="1220" dirty="0">
                 <a:solidFill>
                   <a:srgbClr val="17364A"/>
                 </a:solidFill>
@@ -17013,13 +17324,16 @@
                 <a:ea typeface="Aptos" pitchFamily="34" charset="-122"/>
                 <a:cs typeface="Aptos" pitchFamily="34" charset="-120"/>
               </a:rPr>
-              <a:t>The assistant could search approved protocols, case definitions, reporting rules, and.</a:t>
-            </a:r>
-            <a:endParaRPr lang="en-US" sz="1380" dirty="0"/>
-          </a:p>
-          <a:p>
-            <a:r>
-              <a:rPr lang="en-US" sz="1380" dirty="0">
+              <a:t>The assistant could search approved protocols, case definitions,.</a:t>
+            </a:r>
+            <a:endParaRPr lang="en-US" sz="1220" dirty="0"/>
+          </a:p>
+          <a:p>
+            <a:pPr indent="0" marL="0">
+              <a:buNone/>
+            </a:pPr>
+            <a:r>
+              <a:rPr lang="en-US" sz="1220" dirty="0">
                 <a:solidFill>
                   <a:srgbClr val="17364A"/>
                 </a:solidFill>
@@ -17027,9 +17341,9 @@
                 <a:ea typeface="Aptos" pitchFamily="34" charset="-122"/>
                 <a:cs typeface="Aptos" pitchFamily="34" charset="-120"/>
               </a:rPr>
-              <a:t>When a user asks what steps to take for a suspected condition, the system could summarize.</a:t>
-            </a:r>
-            <a:endParaRPr lang="en-US" sz="1380" dirty="0"/>
+              <a:t>When a user asks what steps to take for a suspected condition, the.</a:t>
+            </a:r>
+            <a:endParaRPr lang="en-US" sz="1220" dirty="0"/>
           </a:p>
         </p:txBody>
       </p:sp>
@@ -17107,17 +17421,17 @@
         </p:nvSpPr>
         <p:spPr>
           <a:xfrm>
-            <a:off x="7799832" y="5001768"/>
-            <a:ext cx="3145536" cy="502920"/>
-          </a:xfrm>
-          <a:prstGeom prst="rect">
-            <a:avLst/>
-          </a:prstGeom>
-          <a:noFill/>
-          <a:ln/>
-        </p:spPr>
-        <p:txBody>
-          <a:bodyPr wrap="square" lIns="0" tIns="0" rIns="0" bIns="0" rtlCol="0" anchor="t">
+            <a:off x="7799832" y="4974336"/>
+            <a:ext cx="3145536" cy="576072"/>
+          </a:xfrm>
+          <a:prstGeom prst="rect">
+            <a:avLst/>
+          </a:prstGeom>
+          <a:noFill/>
+          <a:ln/>
+        </p:spPr>
+        <p:txBody>
+          <a:bodyPr wrap="square" lIns="254" tIns="254" rIns="254" bIns="254" rtlCol="0" anchor="t">
             <a:normAutofit/>
           </a:bodyPr>
           <a:lstStyle/>
@@ -17126,7 +17440,7 @@
               <a:buNone/>
             </a:pPr>
             <a:r>
-              <a:rPr lang="en-US" sz="1550" dirty="0">
+              <a:rPr lang="en-US" sz="1320" dirty="0">
                 <a:solidFill>
                   <a:srgbClr val="17364A"/>
                 </a:solidFill>
@@ -17134,9 +17448,9 @@
                 <a:ea typeface="Aptos" pitchFamily="34" charset="-122"/>
                 <a:cs typeface="Aptos" pitchFamily="34" charset="-120"/>
               </a:rPr>
-              <a:t>Use the assignment to test whether you can explain the concept, apply it to a realistic public health situation, and identify what would need review before the work moves forward.</a:t>
-            </a:r>
-            <a:endParaRPr lang="en-US" sz="1550" dirty="0"/>
+              <a:t>Use the assignment to test whether you can explain the concept, apply it to a realistic public health situation, and.</a:t>
+            </a:r>
+            <a:endParaRPr lang="en-US" sz="1320" dirty="0"/>
           </a:p>
         </p:txBody>
       </p:sp>

--- a/downloads/presentations/modules/arc-300.pptx
+++ b/downloads/presentations/modules/arc-300.pptx
@@ -3419,11 +3419,11 @@
         <p:spPr>
           <a:xfrm>
             <a:off x="7635240" y="1325880"/>
-            <a:ext cx="3474720" cy="1325880"/>
+            <a:ext cx="3474720" cy="1207008"/>
           </a:xfrm>
           <a:prstGeom prst="roundRect">
             <a:avLst>
-              <a:gd name="adj" fmla="val 8276"/>
+              <a:gd name="adj" fmla="val 9091"/>
             </a:avLst>
           </a:prstGeom>
           <a:solidFill>
@@ -3485,7 +3485,7 @@
         <p:spPr>
           <a:xfrm>
             <a:off x="7799832" y="1801368"/>
-            <a:ext cx="3145536" cy="758952"/>
+            <a:ext cx="3145536" cy="640080"/>
           </a:xfrm>
           <a:prstGeom prst="rect">
             <a:avLst/>
@@ -3525,12 +3525,12 @@
         </p:nvSpPr>
         <p:spPr>
           <a:xfrm>
-            <a:off x="7635240" y="2788920"/>
-            <a:ext cx="3474720" cy="1536192"/>
+            <a:off x="7635240" y="2670048"/>
+            <a:ext cx="3474720" cy="1377086"/>
           </a:xfrm>
           <a:prstGeom prst="roundRect">
             <a:avLst>
-              <a:gd name="adj" fmla="val 7143"/>
+              <a:gd name="adj" fmla="val 7968"/>
             </a:avLst>
           </a:prstGeom>
           <a:solidFill>
@@ -3552,8 +3552,8 @@
         </p:nvSpPr>
         <p:spPr>
           <a:xfrm>
-            <a:off x="7799832" y="2935224"/>
-            <a:ext cx="3145536" cy="256032"/>
+            <a:off x="7799832" y="2798064"/>
+            <a:ext cx="3145536" cy="237744"/>
           </a:xfrm>
           <a:prstGeom prst="rect">
             <a:avLst/>
@@ -3569,7 +3569,7 @@
               <a:buNone/>
             </a:pPr>
             <a:r>
-              <a:rPr lang="en-US" sz="1300" b="1" dirty="0">
+              <a:rPr lang="en-US" sz="1250" b="1" dirty="0">
                 <a:solidFill>
                   <a:srgbClr val="0068B7"/>
                 </a:solidFill>
@@ -3577,101 +3577,317 @@
                 <a:ea typeface="Aptos" pitchFamily="34" charset="-122"/>
                 <a:cs typeface="Aptos" pitchFamily="34" charset="-120"/>
               </a:rPr>
-              <a:t>Concept checkpoints</a:t>
-            </a:r>
-            <a:endParaRPr lang="en-US" sz="1300" dirty="0"/>
-          </a:p>
-        </p:txBody>
-      </p:sp>
-      <p:sp>
-        <p:nvSpPr>
-          <p:cNvPr id="15" name="Text 13"/>
-          <p:cNvSpPr/>
-          <p:nvPr/>
-        </p:nvSpPr>
-        <p:spPr>
-          <a:xfrm>
-            <a:off x="7818120" y="3300984"/>
-            <a:ext cx="3090672" cy="877824"/>
-          </a:xfrm>
-          <a:prstGeom prst="rect">
-            <a:avLst/>
-          </a:prstGeom>
-          <a:noFill/>
-          <a:ln/>
-        </p:spPr>
-        <p:txBody>
-          <a:bodyPr wrap="square" lIns="508" tIns="508" rIns="508" bIns="508" rtlCol="0" anchor="t">
+              <a:t>Human-in-the-loop use</a:t>
+            </a:r>
+            <a:endParaRPr lang="en-US" sz="1250" dirty="0"/>
+          </a:p>
+        </p:txBody>
+      </p:sp>
+      <p:sp>
+        <p:nvSpPr>
+          <p:cNvPr id="15" name="Shape 13"/>
+          <p:cNvSpPr/>
+          <p:nvPr/>
+        </p:nvSpPr>
+        <p:spPr>
+          <a:xfrm>
+            <a:off x="8763000" y="3351276"/>
+            <a:ext cx="164592" cy="0"/>
+          </a:xfrm>
+          <a:prstGeom prst="line">
+            <a:avLst/>
+          </a:prstGeom>
+          <a:noFill/>
+          <a:ln w="15240">
+            <a:solidFill>
+              <a:srgbClr val="8ABBD8"/>
+            </a:solidFill>
+            <a:prstDash val="solid"/>
+          </a:ln>
+        </p:spPr>
+      </p:sp>
+      <p:sp>
+        <p:nvSpPr>
+          <p:cNvPr id="16" name="Shape 14"/>
+          <p:cNvSpPr/>
+          <p:nvPr/>
+        </p:nvSpPr>
+        <p:spPr>
+          <a:xfrm>
+            <a:off x="7872984" y="3200400"/>
+            <a:ext cx="890016" cy="301752"/>
+          </a:xfrm>
+          <a:prstGeom prst="roundRect">
+            <a:avLst>
+              <a:gd name="adj" fmla="val 24242"/>
+            </a:avLst>
+          </a:prstGeom>
+          <a:solidFill>
+            <a:srgbClr val="0068B7"/>
+          </a:solidFill>
+          <a:ln w="12700">
+            <a:solidFill>
+              <a:srgbClr val="0068B7"/>
+            </a:solidFill>
+            <a:prstDash val="solid"/>
+          </a:ln>
+        </p:spPr>
+      </p:sp>
+      <p:sp>
+        <p:nvSpPr>
+          <p:cNvPr id="17" name="Text 15"/>
+          <p:cNvSpPr/>
+          <p:nvPr/>
+        </p:nvSpPr>
+        <p:spPr>
+          <a:xfrm>
+            <a:off x="7909560" y="3273552"/>
+            <a:ext cx="816864" cy="146304"/>
+          </a:xfrm>
+          <a:prstGeom prst="rect">
+            <a:avLst/>
+          </a:prstGeom>
+          <a:noFill/>
+          <a:ln/>
+        </p:spPr>
+        <p:txBody>
+          <a:bodyPr wrap="square" lIns="0" tIns="0" rIns="0" bIns="0" rtlCol="0" anchor="ctr">
             <a:normAutofit/>
           </a:bodyPr>
           <a:lstStyle/>
           <a:p>
-            <a:pPr indent="0" marL="0">
-              <a:buNone/>
-            </a:pPr>
-            <a:r>
-              <a:rPr lang="en-US" sz="1220" dirty="0">
-                <a:solidFill>
-                  <a:srgbClr val="17364A"/>
-                </a:solidFill>
-                <a:latin typeface="Aptos" pitchFamily="34" charset="0"/>
-                <a:ea typeface="Aptos" pitchFamily="34" charset="-122"/>
-                <a:cs typeface="Aptos" pitchFamily="34" charset="-120"/>
-              </a:rPr>
-              <a:t>Agencies should decide which documents are authoritative, current,.</a:t>
-            </a:r>
-            <a:endParaRPr lang="en-US" sz="1220" dirty="0"/>
-          </a:p>
-          <a:p>
-            <a:pPr indent="0" marL="0">
-              <a:buNone/>
-            </a:pPr>
-            <a:r>
-              <a:rPr lang="en-US" sz="1220" dirty="0">
-                <a:solidFill>
-                  <a:srgbClr val="17364A"/>
-                </a:solidFill>
-                <a:latin typeface="Aptos" pitchFamily="34" charset="0"/>
-                <a:ea typeface="Aptos" pitchFamily="34" charset="-122"/>
-                <a:cs typeface="Aptos" pitchFamily="34" charset="-120"/>
-              </a:rPr>
-              <a:t>Content inventories should include owner, version, effective date,.</a:t>
-            </a:r>
-            <a:endParaRPr lang="en-US" sz="1220" dirty="0"/>
-          </a:p>
-          <a:p>
-            <a:pPr indent="0" marL="0">
-              <a:buNone/>
-            </a:pPr>
-            <a:r>
-              <a:rPr lang="en-US" sz="1220" dirty="0">
-                <a:solidFill>
-                  <a:srgbClr val="17364A"/>
-                </a:solidFill>
-                <a:latin typeface="Aptos" pitchFamily="34" charset="0"/>
-                <a:ea typeface="Aptos" pitchFamily="34" charset="-122"/>
-                <a:cs typeface="Aptos" pitchFamily="34" charset="-120"/>
-              </a:rPr>
-              <a:t>Without this foundation, retrieval can surface obsolete or.</a:t>
-            </a:r>
-            <a:endParaRPr lang="en-US" sz="1220" dirty="0"/>
-          </a:p>
-        </p:txBody>
-      </p:sp>
-      <p:sp>
-        <p:nvSpPr>
-          <p:cNvPr id="16" name="Shape 14"/>
-          <p:cNvSpPr/>
-          <p:nvPr/>
-        </p:nvSpPr>
-        <p:spPr>
-          <a:xfrm>
-            <a:off x="7635240" y="4498848"/>
-            <a:ext cx="3474720" cy="1143000"/>
+            <a:pPr algn="ctr" indent="0" marL="0">
+              <a:buNone/>
+            </a:pPr>
+            <a:r>
+              <a:rPr lang="en-US" sz="880" b="1" dirty="0">
+                <a:solidFill>
+                  <a:srgbClr val="FFFFFF"/>
+                </a:solidFill>
+                <a:latin typeface="Aptos" pitchFamily="34" charset="0"/>
+                <a:ea typeface="Aptos" pitchFamily="34" charset="-122"/>
+                <a:cs typeface="Aptos" pitchFamily="34" charset="-120"/>
+              </a:rPr>
+              <a:t>Input</a:t>
+            </a:r>
+            <a:endParaRPr lang="en-US" sz="880" dirty="0"/>
+          </a:p>
+        </p:txBody>
+      </p:sp>
+      <p:sp>
+        <p:nvSpPr>
+          <p:cNvPr id="18" name="Shape 16"/>
+          <p:cNvSpPr/>
+          <p:nvPr/>
+        </p:nvSpPr>
+        <p:spPr>
+          <a:xfrm>
+            <a:off x="9817608" y="3351276"/>
+            <a:ext cx="164592" cy="0"/>
+          </a:xfrm>
+          <a:prstGeom prst="line">
+            <a:avLst/>
+          </a:prstGeom>
+          <a:noFill/>
+          <a:ln w="15240">
+            <a:solidFill>
+              <a:srgbClr val="8ABBD8"/>
+            </a:solidFill>
+            <a:prstDash val="solid"/>
+          </a:ln>
+        </p:spPr>
+      </p:sp>
+      <p:sp>
+        <p:nvSpPr>
+          <p:cNvPr id="19" name="Shape 17"/>
+          <p:cNvSpPr/>
+          <p:nvPr/>
+        </p:nvSpPr>
+        <p:spPr>
+          <a:xfrm>
+            <a:off x="8927592" y="3200400"/>
+            <a:ext cx="890016" cy="301752"/>
           </a:xfrm>
           <a:prstGeom prst="roundRect">
             <a:avLst>
-              <a:gd name="adj" fmla="val 9600"/>
+              <a:gd name="adj" fmla="val 24242"/>
+            </a:avLst>
+          </a:prstGeom>
+          <a:solidFill>
+            <a:srgbClr val="2F8A28"/>
+          </a:solidFill>
+          <a:ln w="12700">
+            <a:solidFill>
+              <a:srgbClr val="2F8A28"/>
+            </a:solidFill>
+            <a:prstDash val="solid"/>
+          </a:ln>
+        </p:spPr>
+      </p:sp>
+      <p:sp>
+        <p:nvSpPr>
+          <p:cNvPr id="20" name="Text 18"/>
+          <p:cNvSpPr/>
+          <p:nvPr/>
+        </p:nvSpPr>
+        <p:spPr>
+          <a:xfrm>
+            <a:off x="8964168" y="3273552"/>
+            <a:ext cx="816864" cy="146304"/>
+          </a:xfrm>
+          <a:prstGeom prst="rect">
+            <a:avLst/>
+          </a:prstGeom>
+          <a:noFill/>
+          <a:ln/>
+        </p:spPr>
+        <p:txBody>
+          <a:bodyPr wrap="square" lIns="0" tIns="0" rIns="0" bIns="0" rtlCol="0" anchor="ctr">
+            <a:normAutofit/>
+          </a:bodyPr>
+          <a:lstStyle/>
+          <a:p>
+            <a:pPr algn="ctr" indent="0" marL="0">
+              <a:buNone/>
+            </a:pPr>
+            <a:r>
+              <a:rPr lang="en-US" sz="880" b="1" dirty="0">
+                <a:solidFill>
+                  <a:srgbClr val="FFFFFF"/>
+                </a:solidFill>
+                <a:latin typeface="Aptos" pitchFamily="34" charset="0"/>
+                <a:ea typeface="Aptos" pitchFamily="34" charset="-122"/>
+                <a:cs typeface="Aptos" pitchFamily="34" charset="-120"/>
+              </a:rPr>
+              <a:t>AI assist</a:t>
+            </a:r>
+            <a:endParaRPr lang="en-US" sz="880" dirty="0"/>
+          </a:p>
+        </p:txBody>
+      </p:sp>
+      <p:sp>
+        <p:nvSpPr>
+          <p:cNvPr id="21" name="Shape 19"/>
+          <p:cNvSpPr/>
+          <p:nvPr/>
+        </p:nvSpPr>
+        <p:spPr>
+          <a:xfrm>
+            <a:off x="9982200" y="3200400"/>
+            <a:ext cx="890016" cy="301752"/>
+          </a:xfrm>
+          <a:prstGeom prst="roundRect">
+            <a:avLst>
+              <a:gd name="adj" fmla="val 24242"/>
+            </a:avLst>
+          </a:prstGeom>
+          <a:solidFill>
+            <a:srgbClr val="6A4CA3"/>
+          </a:solidFill>
+          <a:ln w="12700">
+            <a:solidFill>
+              <a:srgbClr val="6A4CA3"/>
+            </a:solidFill>
+            <a:prstDash val="solid"/>
+          </a:ln>
+        </p:spPr>
+      </p:sp>
+      <p:sp>
+        <p:nvSpPr>
+          <p:cNvPr id="22" name="Text 20"/>
+          <p:cNvSpPr/>
+          <p:nvPr/>
+        </p:nvSpPr>
+        <p:spPr>
+          <a:xfrm>
+            <a:off x="10018776" y="3273552"/>
+            <a:ext cx="816864" cy="146304"/>
+          </a:xfrm>
+          <a:prstGeom prst="rect">
+            <a:avLst/>
+          </a:prstGeom>
+          <a:noFill/>
+          <a:ln/>
+        </p:spPr>
+        <p:txBody>
+          <a:bodyPr wrap="square" lIns="0" tIns="0" rIns="0" bIns="0" rtlCol="0" anchor="ctr">
+            <a:normAutofit/>
+          </a:bodyPr>
+          <a:lstStyle/>
+          <a:p>
+            <a:pPr algn="ctr" indent="0" marL="0">
+              <a:buNone/>
+            </a:pPr>
+            <a:r>
+              <a:rPr lang="en-US" sz="880" b="1" dirty="0">
+                <a:solidFill>
+                  <a:srgbClr val="FFFFFF"/>
+                </a:solidFill>
+                <a:latin typeface="Aptos" pitchFamily="34" charset="0"/>
+                <a:ea typeface="Aptos" pitchFamily="34" charset="-122"/>
+                <a:cs typeface="Aptos" pitchFamily="34" charset="-120"/>
+              </a:rPr>
+              <a:t>Review</a:t>
+            </a:r>
+            <a:endParaRPr lang="en-US" sz="880" dirty="0"/>
+          </a:p>
+        </p:txBody>
+      </p:sp>
+      <p:sp>
+        <p:nvSpPr>
+          <p:cNvPr id="23" name="Text 21"/>
+          <p:cNvSpPr/>
+          <p:nvPr/>
+        </p:nvSpPr>
+        <p:spPr>
+          <a:xfrm>
+            <a:off x="7854696" y="3694176"/>
+            <a:ext cx="3035808" cy="206654"/>
+          </a:xfrm>
+          <a:prstGeom prst="rect">
+            <a:avLst/>
+          </a:prstGeom>
+          <a:noFill/>
+          <a:ln/>
+        </p:spPr>
+        <p:txBody>
+          <a:bodyPr wrap="square" lIns="254" tIns="254" rIns="254" bIns="254" rtlCol="0" anchor="t">
+            <a:normAutofit/>
+          </a:bodyPr>
+          <a:lstStyle/>
+          <a:p>
+            <a:pPr indent="0" marL="0">
+              <a:buNone/>
+            </a:pPr>
+            <a:r>
+              <a:rPr lang="en-US" sz="1120" dirty="0">
+                <a:solidFill>
+                  <a:srgbClr val="17364A"/>
+                </a:solidFill>
+                <a:latin typeface="Aptos" pitchFamily="34" charset="0"/>
+                <a:ea typeface="Aptos" pitchFamily="34" charset="-122"/>
+                <a:cs typeface="Aptos" pitchFamily="34" charset="-120"/>
+              </a:rPr>
+              <a:t>AI can support work, but public health judgment remains responsible for interpretation and final use.</a:t>
+            </a:r>
+            <a:endParaRPr lang="en-US" sz="1120" dirty="0"/>
+          </a:p>
+        </p:txBody>
+      </p:sp>
+      <p:sp>
+        <p:nvSpPr>
+          <p:cNvPr id="24" name="Shape 22"/>
+          <p:cNvSpPr/>
+          <p:nvPr/>
+        </p:nvSpPr>
+        <p:spPr>
+          <a:xfrm>
+            <a:off x="7635240" y="4184294"/>
+            <a:ext cx="3474720" cy="1466698"/>
+          </a:xfrm>
+          <a:prstGeom prst="roundRect">
+            <a:avLst>
+              <a:gd name="adj" fmla="val 7481"/>
             </a:avLst>
           </a:prstGeom>
           <a:solidFill>
@@ -3687,13 +3903,13 @@
       </p:sp>
       <p:sp>
         <p:nvSpPr>
-          <p:cNvPr id="17" name="Text 15"/>
-          <p:cNvSpPr/>
-          <p:nvPr/>
-        </p:nvSpPr>
-        <p:spPr>
-          <a:xfrm>
-            <a:off x="7799832" y="4645152"/>
+          <p:cNvPr id="25" name="Text 23"/>
+          <p:cNvSpPr/>
+          <p:nvPr/>
+        </p:nvSpPr>
+        <p:spPr>
+          <a:xfrm>
+            <a:off x="7799832" y="4330598"/>
             <a:ext cx="3145536" cy="256032"/>
           </a:xfrm>
           <a:prstGeom prst="rect">
@@ -3726,14 +3942,14 @@
       </p:sp>
       <p:sp>
         <p:nvSpPr>
-          <p:cNvPr id="18" name="Text 16"/>
-          <p:cNvSpPr/>
-          <p:nvPr/>
-        </p:nvSpPr>
-        <p:spPr>
-          <a:xfrm>
-            <a:off x="7799832" y="4974336"/>
-            <a:ext cx="3145536" cy="576072"/>
+          <p:cNvPr id="26" name="Text 24"/>
+          <p:cNvSpPr/>
+          <p:nvPr/>
+        </p:nvSpPr>
+        <p:spPr>
+          <a:xfrm>
+            <a:off x="7799832" y="4659782"/>
+            <a:ext cx="3145536" cy="899770"/>
           </a:xfrm>
           <a:prstGeom prst="rect">
             <a:avLst/>
@@ -3759,7 +3975,7 @@
                 <a:ea typeface="Aptos" pitchFamily="34" charset="-122"/>
                 <a:cs typeface="Aptos" pitchFamily="34" charset="-120"/>
               </a:rPr>
-              <a:t>Use the assignment to test whether you can explain the concept, apply it to a realistic public health situation, and.</a:t>
+              <a:t>Use the assignment to test whether you can explain the concept, apply it to a realistic public health situation, and identify what would need review before the work moves forward.</a:t>
             </a:r>
             <a:endParaRPr lang="en-US" sz="1320" dirty="0"/>
           </a:p>
@@ -4128,11 +4344,11 @@
         <p:spPr>
           <a:xfrm>
             <a:off x="7635240" y="1325880"/>
-            <a:ext cx="3474720" cy="1325880"/>
+            <a:ext cx="3474720" cy="1207008"/>
           </a:xfrm>
           <a:prstGeom prst="roundRect">
             <a:avLst>
-              <a:gd name="adj" fmla="val 8276"/>
+              <a:gd name="adj" fmla="val 9091"/>
             </a:avLst>
           </a:prstGeom>
           <a:solidFill>
@@ -4194,7 +4410,7 @@
         <p:spPr>
           <a:xfrm>
             <a:off x="7799832" y="1801368"/>
-            <a:ext cx="3145536" cy="758952"/>
+            <a:ext cx="3145536" cy="640080"/>
           </a:xfrm>
           <a:prstGeom prst="rect">
             <a:avLst/>
@@ -4234,12 +4450,12 @@
         </p:nvSpPr>
         <p:spPr>
           <a:xfrm>
-            <a:off x="7635240" y="2788920"/>
-            <a:ext cx="3474720" cy="1536192"/>
+            <a:off x="7635240" y="2670048"/>
+            <a:ext cx="3474720" cy="1377086"/>
           </a:xfrm>
           <a:prstGeom prst="roundRect">
             <a:avLst>
-              <a:gd name="adj" fmla="val 7143"/>
+              <a:gd name="adj" fmla="val 7968"/>
             </a:avLst>
           </a:prstGeom>
           <a:solidFill>
@@ -4261,7 +4477,7 @@
         </p:nvSpPr>
         <p:spPr>
           <a:xfrm>
-            <a:off x="7799832" y="2935224"/>
+            <a:off x="7799832" y="2816352"/>
             <a:ext cx="3145536" cy="256032"/>
           </a:xfrm>
           <a:prstGeom prst="rect">
@@ -4300,8 +4516,8 @@
         </p:nvSpPr>
         <p:spPr>
           <a:xfrm>
-            <a:off x="7818120" y="3300984"/>
-            <a:ext cx="3090672" cy="877824"/>
+            <a:off x="7818120" y="3182112"/>
+            <a:ext cx="3090672" cy="718718"/>
           </a:xfrm>
           <a:prstGeom prst="rect">
             <a:avLst/>
@@ -4375,12 +4591,12 @@
         </p:nvSpPr>
         <p:spPr>
           <a:xfrm>
-            <a:off x="7635240" y="4498848"/>
-            <a:ext cx="3474720" cy="1143000"/>
+            <a:off x="7635240" y="4184294"/>
+            <a:ext cx="3474720" cy="1466698"/>
           </a:xfrm>
           <a:prstGeom prst="roundRect">
             <a:avLst>
-              <a:gd name="adj" fmla="val 9600"/>
+              <a:gd name="adj" fmla="val 7481"/>
             </a:avLst>
           </a:prstGeom>
           <a:solidFill>
@@ -4402,7 +4618,7 @@
         </p:nvSpPr>
         <p:spPr>
           <a:xfrm>
-            <a:off x="7799832" y="4645152"/>
+            <a:off x="7799832" y="4330598"/>
             <a:ext cx="3145536" cy="256032"/>
           </a:xfrm>
           <a:prstGeom prst="rect">
@@ -4441,8 +4657,8 @@
         </p:nvSpPr>
         <p:spPr>
           <a:xfrm>
-            <a:off x="7799832" y="4974336"/>
-            <a:ext cx="3145536" cy="576072"/>
+            <a:off x="7799832" y="4659782"/>
+            <a:ext cx="3145536" cy="899770"/>
           </a:xfrm>
           <a:prstGeom prst="rect">
             <a:avLst/>
@@ -4468,7 +4684,7 @@
                 <a:ea typeface="Aptos" pitchFamily="34" charset="-122"/>
                 <a:cs typeface="Aptos" pitchFamily="34" charset="-120"/>
               </a:rPr>
-              <a:t>Use the assignment to test whether you can explain the concept, apply it to a realistic public health situation, and.</a:t>
+              <a:t>Use the assignment to test whether you can explain the concept, apply it to a realistic public health situation, and identify what would need review before the work moves forward.</a:t>
             </a:r>
             <a:endParaRPr lang="en-US" sz="1320" dirty="0"/>
           </a:p>
@@ -4837,11 +5053,11 @@
         <p:spPr>
           <a:xfrm>
             <a:off x="7635240" y="1325880"/>
-            <a:ext cx="3474720" cy="1325880"/>
+            <a:ext cx="3474720" cy="1207008"/>
           </a:xfrm>
           <a:prstGeom prst="roundRect">
             <a:avLst>
-              <a:gd name="adj" fmla="val 8276"/>
+              <a:gd name="adj" fmla="val 9091"/>
             </a:avLst>
           </a:prstGeom>
           <a:solidFill>
@@ -4903,7 +5119,7 @@
         <p:spPr>
           <a:xfrm>
             <a:off x="7799832" y="1801368"/>
-            <a:ext cx="3145536" cy="758952"/>
+            <a:ext cx="3145536" cy="640080"/>
           </a:xfrm>
           <a:prstGeom prst="rect">
             <a:avLst/>
@@ -4943,12 +5159,12 @@
         </p:nvSpPr>
         <p:spPr>
           <a:xfrm>
-            <a:off x="7635240" y="2788920"/>
-            <a:ext cx="3474720" cy="1536192"/>
+            <a:off x="7635240" y="2670048"/>
+            <a:ext cx="3474720" cy="1377086"/>
           </a:xfrm>
           <a:prstGeom prst="roundRect">
             <a:avLst>
-              <a:gd name="adj" fmla="val 7143"/>
+              <a:gd name="adj" fmla="val 7968"/>
             </a:avLst>
           </a:prstGeom>
           <a:solidFill>
@@ -4970,7 +5186,7 @@
         </p:nvSpPr>
         <p:spPr>
           <a:xfrm>
-            <a:off x="7799832" y="2935224"/>
+            <a:off x="7799832" y="2816352"/>
             <a:ext cx="3145536" cy="256032"/>
           </a:xfrm>
           <a:prstGeom prst="rect">
@@ -5009,8 +5225,8 @@
         </p:nvSpPr>
         <p:spPr>
           <a:xfrm>
-            <a:off x="7818120" y="3300984"/>
-            <a:ext cx="3090672" cy="877824"/>
+            <a:off x="7818120" y="3182112"/>
+            <a:ext cx="3090672" cy="718718"/>
           </a:xfrm>
           <a:prstGeom prst="rect">
             <a:avLst/>
@@ -5084,12 +5300,12 @@
         </p:nvSpPr>
         <p:spPr>
           <a:xfrm>
-            <a:off x="7635240" y="4498848"/>
-            <a:ext cx="3474720" cy="1143000"/>
+            <a:off x="7635240" y="4184294"/>
+            <a:ext cx="3474720" cy="1466698"/>
           </a:xfrm>
           <a:prstGeom prst="roundRect">
             <a:avLst>
-              <a:gd name="adj" fmla="val 9600"/>
+              <a:gd name="adj" fmla="val 7481"/>
             </a:avLst>
           </a:prstGeom>
           <a:solidFill>
@@ -5111,7 +5327,7 @@
         </p:nvSpPr>
         <p:spPr>
           <a:xfrm>
-            <a:off x="7799832" y="4645152"/>
+            <a:off x="7799832" y="4330598"/>
             <a:ext cx="3145536" cy="256032"/>
           </a:xfrm>
           <a:prstGeom prst="rect">
@@ -5150,8 +5366,8 @@
         </p:nvSpPr>
         <p:spPr>
           <a:xfrm>
-            <a:off x="7799832" y="4974336"/>
-            <a:ext cx="3145536" cy="576072"/>
+            <a:off x="7799832" y="4659782"/>
+            <a:ext cx="3145536" cy="899770"/>
           </a:xfrm>
           <a:prstGeom prst="rect">
             <a:avLst/>
@@ -5177,7 +5393,7 @@
                 <a:ea typeface="Aptos" pitchFamily="34" charset="-122"/>
                 <a:cs typeface="Aptos" pitchFamily="34" charset="-120"/>
               </a:rPr>
-              <a:t>Use the assignment to test whether you can explain the concept, apply it to a realistic public health situation, and.</a:t>
+              <a:t>Use the assignment to test whether you can explain the concept, apply it to a realistic public health situation, and identify what would need review before the work moves forward.</a:t>
             </a:r>
             <a:endParaRPr lang="en-US" sz="1320" dirty="0"/>
           </a:p>
@@ -5546,11 +5762,11 @@
         <p:spPr>
           <a:xfrm>
             <a:off x="7635240" y="1325880"/>
-            <a:ext cx="3474720" cy="1325880"/>
+            <a:ext cx="3474720" cy="1207008"/>
           </a:xfrm>
           <a:prstGeom prst="roundRect">
             <a:avLst>
-              <a:gd name="adj" fmla="val 8276"/>
+              <a:gd name="adj" fmla="val 9091"/>
             </a:avLst>
           </a:prstGeom>
           <a:solidFill>
@@ -5612,7 +5828,7 @@
         <p:spPr>
           <a:xfrm>
             <a:off x="7799832" y="1801368"/>
-            <a:ext cx="3145536" cy="758952"/>
+            <a:ext cx="3145536" cy="640080"/>
           </a:xfrm>
           <a:prstGeom prst="rect">
             <a:avLst/>
@@ -5652,12 +5868,12 @@
         </p:nvSpPr>
         <p:spPr>
           <a:xfrm>
-            <a:off x="7635240" y="2788920"/>
-            <a:ext cx="3474720" cy="1536192"/>
+            <a:off x="7635240" y="2670048"/>
+            <a:ext cx="3474720" cy="1377086"/>
           </a:xfrm>
           <a:prstGeom prst="roundRect">
             <a:avLst>
-              <a:gd name="adj" fmla="val 7143"/>
+              <a:gd name="adj" fmla="val 7968"/>
             </a:avLst>
           </a:prstGeom>
           <a:solidFill>
@@ -5679,7 +5895,7 @@
         </p:nvSpPr>
         <p:spPr>
           <a:xfrm>
-            <a:off x="7799832" y="2935224"/>
+            <a:off x="7799832" y="2816352"/>
             <a:ext cx="3145536" cy="256032"/>
           </a:xfrm>
           <a:prstGeom prst="rect">
@@ -5718,8 +5934,8 @@
         </p:nvSpPr>
         <p:spPr>
           <a:xfrm>
-            <a:off x="7818120" y="3300984"/>
-            <a:ext cx="3090672" cy="877824"/>
+            <a:off x="7818120" y="3182112"/>
+            <a:ext cx="3090672" cy="718718"/>
           </a:xfrm>
           <a:prstGeom prst="rect">
             <a:avLst/>
@@ -5793,12 +6009,12 @@
         </p:nvSpPr>
         <p:spPr>
           <a:xfrm>
-            <a:off x="7635240" y="4498848"/>
-            <a:ext cx="3474720" cy="1143000"/>
+            <a:off x="7635240" y="4184294"/>
+            <a:ext cx="3474720" cy="1466698"/>
           </a:xfrm>
           <a:prstGeom prst="roundRect">
             <a:avLst>
-              <a:gd name="adj" fmla="val 9600"/>
+              <a:gd name="adj" fmla="val 7481"/>
             </a:avLst>
           </a:prstGeom>
           <a:solidFill>
@@ -5820,7 +6036,7 @@
         </p:nvSpPr>
         <p:spPr>
           <a:xfrm>
-            <a:off x="7799832" y="4645152"/>
+            <a:off x="7799832" y="4330598"/>
             <a:ext cx="3145536" cy="256032"/>
           </a:xfrm>
           <a:prstGeom prst="rect">
@@ -5859,8 +6075,8 @@
         </p:nvSpPr>
         <p:spPr>
           <a:xfrm>
-            <a:off x="7799832" y="4974336"/>
-            <a:ext cx="3145536" cy="576072"/>
+            <a:off x="7799832" y="4659782"/>
+            <a:ext cx="3145536" cy="899770"/>
           </a:xfrm>
           <a:prstGeom prst="rect">
             <a:avLst/>
@@ -5886,7 +6102,7 @@
                 <a:ea typeface="Aptos" pitchFamily="34" charset="-122"/>
                 <a:cs typeface="Aptos" pitchFamily="34" charset="-120"/>
               </a:rPr>
-              <a:t>Use the assignment to test whether you can explain the concept, apply it to a realistic public health situation, and.</a:t>
+              <a:t>Use the assignment to test whether you can explain the concept, apply it to a realistic public health situation, and identify what would need review before the work moves forward.</a:t>
             </a:r>
             <a:endParaRPr lang="en-US" sz="1320" dirty="0"/>
           </a:p>
@@ -6255,11 +6471,11 @@
         <p:spPr>
           <a:xfrm>
             <a:off x="7635240" y="1325880"/>
-            <a:ext cx="3474720" cy="1325880"/>
+            <a:ext cx="3474720" cy="1207008"/>
           </a:xfrm>
           <a:prstGeom prst="roundRect">
             <a:avLst>
-              <a:gd name="adj" fmla="val 8276"/>
+              <a:gd name="adj" fmla="val 9091"/>
             </a:avLst>
           </a:prstGeom>
           <a:solidFill>
@@ -6321,7 +6537,7 @@
         <p:spPr>
           <a:xfrm>
             <a:off x="7799832" y="1801368"/>
-            <a:ext cx="3145536" cy="758952"/>
+            <a:ext cx="3145536" cy="640080"/>
           </a:xfrm>
           <a:prstGeom prst="rect">
             <a:avLst/>
@@ -6361,12 +6577,12 @@
         </p:nvSpPr>
         <p:spPr>
           <a:xfrm>
-            <a:off x="7635240" y="2788920"/>
-            <a:ext cx="3474720" cy="1536192"/>
+            <a:off x="7635240" y="2670048"/>
+            <a:ext cx="3474720" cy="1377086"/>
           </a:xfrm>
           <a:prstGeom prst="roundRect">
             <a:avLst>
-              <a:gd name="adj" fmla="val 7143"/>
+              <a:gd name="adj" fmla="val 7968"/>
             </a:avLst>
           </a:prstGeom>
           <a:solidFill>
@@ -6388,7 +6604,7 @@
         </p:nvSpPr>
         <p:spPr>
           <a:xfrm>
-            <a:off x="7799832" y="2935224"/>
+            <a:off x="7799832" y="2816352"/>
             <a:ext cx="3145536" cy="256032"/>
           </a:xfrm>
           <a:prstGeom prst="rect">
@@ -6427,8 +6643,8 @@
         </p:nvSpPr>
         <p:spPr>
           <a:xfrm>
-            <a:off x="7818120" y="3300984"/>
-            <a:ext cx="3090672" cy="877824"/>
+            <a:off x="7818120" y="3182112"/>
+            <a:ext cx="3090672" cy="718718"/>
           </a:xfrm>
           <a:prstGeom prst="rect">
             <a:avLst/>
@@ -6502,12 +6718,12 @@
         </p:nvSpPr>
         <p:spPr>
           <a:xfrm>
-            <a:off x="7635240" y="4498848"/>
-            <a:ext cx="3474720" cy="1143000"/>
+            <a:off x="7635240" y="4184294"/>
+            <a:ext cx="3474720" cy="1466698"/>
           </a:xfrm>
           <a:prstGeom prst="roundRect">
             <a:avLst>
-              <a:gd name="adj" fmla="val 9600"/>
+              <a:gd name="adj" fmla="val 7481"/>
             </a:avLst>
           </a:prstGeom>
           <a:solidFill>
@@ -6529,7 +6745,7 @@
         </p:nvSpPr>
         <p:spPr>
           <a:xfrm>
-            <a:off x="7799832" y="4645152"/>
+            <a:off x="7799832" y="4330598"/>
             <a:ext cx="3145536" cy="256032"/>
           </a:xfrm>
           <a:prstGeom prst="rect">
@@ -6568,8 +6784,8 @@
         </p:nvSpPr>
         <p:spPr>
           <a:xfrm>
-            <a:off x="7799832" y="4974336"/>
-            <a:ext cx="3145536" cy="576072"/>
+            <a:off x="7799832" y="4659782"/>
+            <a:ext cx="3145536" cy="899770"/>
           </a:xfrm>
           <a:prstGeom prst="rect">
             <a:avLst/>
@@ -6595,7 +6811,7 @@
                 <a:ea typeface="Aptos" pitchFamily="34" charset="-122"/>
                 <a:cs typeface="Aptos" pitchFamily="34" charset="-120"/>
               </a:rPr>
-              <a:t>Use the assignment to test whether you can explain the concept, apply it to a realistic public health situation, and.</a:t>
+              <a:t>Use the assignment to test whether you can explain the concept, apply it to a realistic public health situation, and identify what would need review before the work moves forward.</a:t>
             </a:r>
             <a:endParaRPr lang="en-US" sz="1320" dirty="0"/>
           </a:p>
@@ -6964,11 +7180,11 @@
         <p:spPr>
           <a:xfrm>
             <a:off x="7635240" y="1325880"/>
-            <a:ext cx="3474720" cy="1325880"/>
+            <a:ext cx="3474720" cy="1207008"/>
           </a:xfrm>
           <a:prstGeom prst="roundRect">
             <a:avLst>
-              <a:gd name="adj" fmla="val 8276"/>
+              <a:gd name="adj" fmla="val 9091"/>
             </a:avLst>
           </a:prstGeom>
           <a:solidFill>
@@ -7030,7 +7246,7 @@
         <p:spPr>
           <a:xfrm>
             <a:off x="7799832" y="1801368"/>
-            <a:ext cx="3145536" cy="758952"/>
+            <a:ext cx="3145536" cy="640080"/>
           </a:xfrm>
           <a:prstGeom prst="rect">
             <a:avLst/>
@@ -7070,12 +7286,12 @@
         </p:nvSpPr>
         <p:spPr>
           <a:xfrm>
-            <a:off x="7635240" y="2788920"/>
-            <a:ext cx="3474720" cy="1536192"/>
+            <a:off x="7635240" y="2670048"/>
+            <a:ext cx="3474720" cy="1377086"/>
           </a:xfrm>
           <a:prstGeom prst="roundRect">
             <a:avLst>
-              <a:gd name="adj" fmla="val 7143"/>
+              <a:gd name="adj" fmla="val 7968"/>
             </a:avLst>
           </a:prstGeom>
           <a:solidFill>
@@ -7097,7 +7313,7 @@
         </p:nvSpPr>
         <p:spPr>
           <a:xfrm>
-            <a:off x="7799832" y="2935224"/>
+            <a:off x="7799832" y="2816352"/>
             <a:ext cx="3145536" cy="256032"/>
           </a:xfrm>
           <a:prstGeom prst="rect">
@@ -7136,8 +7352,8 @@
         </p:nvSpPr>
         <p:spPr>
           <a:xfrm>
-            <a:off x="7818120" y="3300984"/>
-            <a:ext cx="3090672" cy="877824"/>
+            <a:off x="7818120" y="3182112"/>
+            <a:ext cx="3090672" cy="718718"/>
           </a:xfrm>
           <a:prstGeom prst="rect">
             <a:avLst/>
@@ -7211,12 +7427,12 @@
         </p:nvSpPr>
         <p:spPr>
           <a:xfrm>
-            <a:off x="7635240" y="4498848"/>
-            <a:ext cx="3474720" cy="1143000"/>
+            <a:off x="7635240" y="4184294"/>
+            <a:ext cx="3474720" cy="1466698"/>
           </a:xfrm>
           <a:prstGeom prst="roundRect">
             <a:avLst>
-              <a:gd name="adj" fmla="val 9600"/>
+              <a:gd name="adj" fmla="val 7481"/>
             </a:avLst>
           </a:prstGeom>
           <a:solidFill>
@@ -7238,7 +7454,7 @@
         </p:nvSpPr>
         <p:spPr>
           <a:xfrm>
-            <a:off x="7799832" y="4645152"/>
+            <a:off x="7799832" y="4330598"/>
             <a:ext cx="3145536" cy="256032"/>
           </a:xfrm>
           <a:prstGeom prst="rect">
@@ -7277,8 +7493,8 @@
         </p:nvSpPr>
         <p:spPr>
           <a:xfrm>
-            <a:off x="7799832" y="4974336"/>
-            <a:ext cx="3145536" cy="576072"/>
+            <a:off x="7799832" y="4659782"/>
+            <a:ext cx="3145536" cy="899770"/>
           </a:xfrm>
           <a:prstGeom prst="rect">
             <a:avLst/>
@@ -7304,7 +7520,7 @@
                 <a:ea typeface="Aptos" pitchFamily="34" charset="-122"/>
                 <a:cs typeface="Aptos" pitchFamily="34" charset="-120"/>
               </a:rPr>
-              <a:t>Use the assignment to test whether you can explain the concept, apply it to a realistic public health situation, and.</a:t>
+              <a:t>Use the assignment to test whether you can explain the concept, apply it to a realistic public health situation, and identify what would need review before the work moves forward.</a:t>
             </a:r>
             <a:endParaRPr lang="en-US" sz="1320" dirty="0"/>
           </a:p>
@@ -7656,11 +7872,11 @@
         <p:spPr>
           <a:xfrm>
             <a:off x="7635240" y="1325880"/>
-            <a:ext cx="3474720" cy="1325880"/>
+            <a:ext cx="3474720" cy="1207008"/>
           </a:xfrm>
           <a:prstGeom prst="roundRect">
             <a:avLst>
-              <a:gd name="adj" fmla="val 8276"/>
+              <a:gd name="adj" fmla="val 9091"/>
             </a:avLst>
           </a:prstGeom>
           <a:solidFill>
@@ -7722,7 +7938,7 @@
         <p:spPr>
           <a:xfrm>
             <a:off x="7799832" y="1801368"/>
-            <a:ext cx="3145536" cy="758952"/>
+            <a:ext cx="3145536" cy="640080"/>
           </a:xfrm>
           <a:prstGeom prst="rect">
             <a:avLst/>
@@ -7762,12 +7978,12 @@
         </p:nvSpPr>
         <p:spPr>
           <a:xfrm>
-            <a:off x="7635240" y="2788920"/>
-            <a:ext cx="3474720" cy="1536192"/>
+            <a:off x="7635240" y="2670048"/>
+            <a:ext cx="3474720" cy="1377086"/>
           </a:xfrm>
           <a:prstGeom prst="roundRect">
             <a:avLst>
-              <a:gd name="adj" fmla="val 7143"/>
+              <a:gd name="adj" fmla="val 7968"/>
             </a:avLst>
           </a:prstGeom>
           <a:solidFill>
@@ -7789,7 +8005,7 @@
         </p:nvSpPr>
         <p:spPr>
           <a:xfrm>
-            <a:off x="7799832" y="2935224"/>
+            <a:off x="7799832" y="2816352"/>
             <a:ext cx="3145536" cy="256032"/>
           </a:xfrm>
           <a:prstGeom prst="rect">
@@ -7828,8 +8044,8 @@
         </p:nvSpPr>
         <p:spPr>
           <a:xfrm>
-            <a:off x="7818120" y="3300984"/>
-            <a:ext cx="3090672" cy="877824"/>
+            <a:off x="7818120" y="3182112"/>
+            <a:ext cx="3090672" cy="718718"/>
           </a:xfrm>
           <a:prstGeom prst="rect">
             <a:avLst/>
@@ -7886,12 +8102,12 @@
         </p:nvSpPr>
         <p:spPr>
           <a:xfrm>
-            <a:off x="7635240" y="4498848"/>
-            <a:ext cx="3474720" cy="1143000"/>
+            <a:off x="7635240" y="4184294"/>
+            <a:ext cx="3474720" cy="1466698"/>
           </a:xfrm>
           <a:prstGeom prst="roundRect">
             <a:avLst>
-              <a:gd name="adj" fmla="val 9600"/>
+              <a:gd name="adj" fmla="val 7481"/>
             </a:avLst>
           </a:prstGeom>
           <a:solidFill>
@@ -7913,7 +8129,7 @@
         </p:nvSpPr>
         <p:spPr>
           <a:xfrm>
-            <a:off x="7799832" y="4645152"/>
+            <a:off x="7799832" y="4330598"/>
             <a:ext cx="3145536" cy="256032"/>
           </a:xfrm>
           <a:prstGeom prst="rect">
@@ -7952,8 +8168,8 @@
         </p:nvSpPr>
         <p:spPr>
           <a:xfrm>
-            <a:off x="7799832" y="4974336"/>
-            <a:ext cx="3145536" cy="576072"/>
+            <a:off x="7799832" y="4659782"/>
+            <a:ext cx="3145536" cy="899770"/>
           </a:xfrm>
           <a:prstGeom prst="rect">
             <a:avLst/>
@@ -7979,7 +8195,7 @@
                 <a:ea typeface="Aptos" pitchFamily="34" charset="-122"/>
                 <a:cs typeface="Aptos" pitchFamily="34" charset="-120"/>
               </a:rPr>
-              <a:t>Use the assignment to test whether you can explain the concept, apply it to a realistic public health situation, and.</a:t>
+              <a:t>Use the assignment to test whether you can explain the concept, apply it to a realistic public health situation, and identify what would need review before the work moves forward.</a:t>
             </a:r>
             <a:endParaRPr lang="en-US" sz="1320" dirty="0"/>
           </a:p>
@@ -8348,11 +8564,11 @@
         <p:spPr>
           <a:xfrm>
             <a:off x="7635240" y="1325880"/>
-            <a:ext cx="3474720" cy="1325880"/>
+            <a:ext cx="3474720" cy="1207008"/>
           </a:xfrm>
           <a:prstGeom prst="roundRect">
             <a:avLst>
-              <a:gd name="adj" fmla="val 8276"/>
+              <a:gd name="adj" fmla="val 9091"/>
             </a:avLst>
           </a:prstGeom>
           <a:solidFill>
@@ -8414,7 +8630,7 @@
         <p:spPr>
           <a:xfrm>
             <a:off x="7799832" y="1801368"/>
-            <a:ext cx="3145536" cy="758952"/>
+            <a:ext cx="3145536" cy="640080"/>
           </a:xfrm>
           <a:prstGeom prst="rect">
             <a:avLst/>
@@ -8454,12 +8670,12 @@
         </p:nvSpPr>
         <p:spPr>
           <a:xfrm>
-            <a:off x="7635240" y="2788920"/>
-            <a:ext cx="3474720" cy="1536192"/>
+            <a:off x="7635240" y="2670048"/>
+            <a:ext cx="3474720" cy="1377086"/>
           </a:xfrm>
           <a:prstGeom prst="roundRect">
             <a:avLst>
-              <a:gd name="adj" fmla="val 7143"/>
+              <a:gd name="adj" fmla="val 7968"/>
             </a:avLst>
           </a:prstGeom>
           <a:solidFill>
@@ -8481,7 +8697,7 @@
         </p:nvSpPr>
         <p:spPr>
           <a:xfrm>
-            <a:off x="7799832" y="2935224"/>
+            <a:off x="7799832" y="2816352"/>
             <a:ext cx="3145536" cy="256032"/>
           </a:xfrm>
           <a:prstGeom prst="rect">
@@ -8520,8 +8736,8 @@
         </p:nvSpPr>
         <p:spPr>
           <a:xfrm>
-            <a:off x="7818120" y="3300984"/>
-            <a:ext cx="3090672" cy="877824"/>
+            <a:off x="7818120" y="3182112"/>
+            <a:ext cx="3090672" cy="718718"/>
           </a:xfrm>
           <a:prstGeom prst="rect">
             <a:avLst/>
@@ -8578,12 +8794,12 @@
         </p:nvSpPr>
         <p:spPr>
           <a:xfrm>
-            <a:off x="7635240" y="4498848"/>
-            <a:ext cx="3474720" cy="1143000"/>
+            <a:off x="7635240" y="4184294"/>
+            <a:ext cx="3474720" cy="1466698"/>
           </a:xfrm>
           <a:prstGeom prst="roundRect">
             <a:avLst>
-              <a:gd name="adj" fmla="val 9600"/>
+              <a:gd name="adj" fmla="val 7481"/>
             </a:avLst>
           </a:prstGeom>
           <a:solidFill>
@@ -8605,7 +8821,7 @@
         </p:nvSpPr>
         <p:spPr>
           <a:xfrm>
-            <a:off x="7799832" y="4645152"/>
+            <a:off x="7799832" y="4330598"/>
             <a:ext cx="3145536" cy="256032"/>
           </a:xfrm>
           <a:prstGeom prst="rect">
@@ -8644,8 +8860,8 @@
         </p:nvSpPr>
         <p:spPr>
           <a:xfrm>
-            <a:off x="7799832" y="4974336"/>
-            <a:ext cx="3145536" cy="576072"/>
+            <a:off x="7799832" y="4659782"/>
+            <a:ext cx="3145536" cy="899770"/>
           </a:xfrm>
           <a:prstGeom prst="rect">
             <a:avLst/>
@@ -8671,7 +8887,7 @@
                 <a:ea typeface="Aptos" pitchFamily="34" charset="-122"/>
                 <a:cs typeface="Aptos" pitchFamily="34" charset="-120"/>
               </a:rPr>
-              <a:t>Use the assignment to test whether you can explain the concept, apply it to a realistic public health situation, and.</a:t>
+              <a:t>Use the assignment to test whether you can explain the concept, apply it to a realistic public health situation, and identify what would need review before the work moves forward.</a:t>
             </a:r>
             <a:endParaRPr lang="en-US" sz="1320" dirty="0"/>
           </a:p>
@@ -9040,11 +9256,11 @@
         <p:spPr>
           <a:xfrm>
             <a:off x="7635240" y="1325880"/>
-            <a:ext cx="3474720" cy="1325880"/>
+            <a:ext cx="3474720" cy="1207008"/>
           </a:xfrm>
           <a:prstGeom prst="roundRect">
             <a:avLst>
-              <a:gd name="adj" fmla="val 8276"/>
+              <a:gd name="adj" fmla="val 9091"/>
             </a:avLst>
           </a:prstGeom>
           <a:solidFill>
@@ -9106,7 +9322,7 @@
         <p:spPr>
           <a:xfrm>
             <a:off x="7799832" y="1801368"/>
-            <a:ext cx="3145536" cy="758952"/>
+            <a:ext cx="3145536" cy="640080"/>
           </a:xfrm>
           <a:prstGeom prst="rect">
             <a:avLst/>
@@ -9146,12 +9362,12 @@
         </p:nvSpPr>
         <p:spPr>
           <a:xfrm>
-            <a:off x="7635240" y="2788920"/>
-            <a:ext cx="3474720" cy="1536192"/>
+            <a:off x="7635240" y="2670048"/>
+            <a:ext cx="3474720" cy="1377086"/>
           </a:xfrm>
           <a:prstGeom prst="roundRect">
             <a:avLst>
-              <a:gd name="adj" fmla="val 7143"/>
+              <a:gd name="adj" fmla="val 7968"/>
             </a:avLst>
           </a:prstGeom>
           <a:solidFill>
@@ -9173,7 +9389,7 @@
         </p:nvSpPr>
         <p:spPr>
           <a:xfrm>
-            <a:off x="7799832" y="2935224"/>
+            <a:off x="7799832" y="2816352"/>
             <a:ext cx="3145536" cy="256032"/>
           </a:xfrm>
           <a:prstGeom prst="rect">
@@ -9212,8 +9428,8 @@
         </p:nvSpPr>
         <p:spPr>
           <a:xfrm>
-            <a:off x="7818120" y="3300984"/>
-            <a:ext cx="3090672" cy="877824"/>
+            <a:off x="7818120" y="3182112"/>
+            <a:ext cx="3090672" cy="718718"/>
           </a:xfrm>
           <a:prstGeom prst="rect">
             <a:avLst/>
@@ -9287,12 +9503,12 @@
         </p:nvSpPr>
         <p:spPr>
           <a:xfrm>
-            <a:off x="7635240" y="4498848"/>
-            <a:ext cx="3474720" cy="1143000"/>
+            <a:off x="7635240" y="4184294"/>
+            <a:ext cx="3474720" cy="1466698"/>
           </a:xfrm>
           <a:prstGeom prst="roundRect">
             <a:avLst>
-              <a:gd name="adj" fmla="val 9600"/>
+              <a:gd name="adj" fmla="val 7481"/>
             </a:avLst>
           </a:prstGeom>
           <a:solidFill>
@@ -9314,7 +9530,7 @@
         </p:nvSpPr>
         <p:spPr>
           <a:xfrm>
-            <a:off x="7799832" y="4645152"/>
+            <a:off x="7799832" y="4330598"/>
             <a:ext cx="3145536" cy="256032"/>
           </a:xfrm>
           <a:prstGeom prst="rect">
@@ -9353,8 +9569,8 @@
         </p:nvSpPr>
         <p:spPr>
           <a:xfrm>
-            <a:off x="7799832" y="4974336"/>
-            <a:ext cx="3145536" cy="576072"/>
+            <a:off x="7799832" y="4659782"/>
+            <a:ext cx="3145536" cy="899770"/>
           </a:xfrm>
           <a:prstGeom prst="rect">
             <a:avLst/>
@@ -9380,7 +9596,7 @@
                 <a:ea typeface="Aptos" pitchFamily="34" charset="-122"/>
                 <a:cs typeface="Aptos" pitchFamily="34" charset="-120"/>
               </a:rPr>
-              <a:t>Use the assignment to test whether you can explain the concept, apply it to a realistic public health situation, and.</a:t>
+              <a:t>Use the assignment to test whether you can explain the concept, apply it to a realistic public health situation, and identify what would need review before the work moves forward.</a:t>
             </a:r>
             <a:endParaRPr lang="en-US" sz="1320" dirty="0"/>
           </a:p>
@@ -9715,11 +9931,11 @@
         <p:spPr>
           <a:xfrm>
             <a:off x="7635240" y="1325880"/>
-            <a:ext cx="3474720" cy="1325880"/>
+            <a:ext cx="3474720" cy="1207008"/>
           </a:xfrm>
           <a:prstGeom prst="roundRect">
             <a:avLst>
-              <a:gd name="adj" fmla="val 8276"/>
+              <a:gd name="adj" fmla="val 9091"/>
             </a:avLst>
           </a:prstGeom>
           <a:solidFill>
@@ -9781,7 +9997,7 @@
         <p:spPr>
           <a:xfrm>
             <a:off x="7799832" y="1801368"/>
-            <a:ext cx="3145536" cy="758952"/>
+            <a:ext cx="3145536" cy="640080"/>
           </a:xfrm>
           <a:prstGeom prst="rect">
             <a:avLst/>
@@ -9821,12 +10037,12 @@
         </p:nvSpPr>
         <p:spPr>
           <a:xfrm>
-            <a:off x="7635240" y="2788920"/>
-            <a:ext cx="3474720" cy="1536192"/>
+            <a:off x="7635240" y="2670048"/>
+            <a:ext cx="3474720" cy="1377086"/>
           </a:xfrm>
           <a:prstGeom prst="roundRect">
             <a:avLst>
-              <a:gd name="adj" fmla="val 7143"/>
+              <a:gd name="adj" fmla="val 7968"/>
             </a:avLst>
           </a:prstGeom>
           <a:solidFill>
@@ -9848,7 +10064,7 @@
         </p:nvSpPr>
         <p:spPr>
           <a:xfrm>
-            <a:off x="7799832" y="2935224"/>
+            <a:off x="7799832" y="2816352"/>
             <a:ext cx="3145536" cy="256032"/>
           </a:xfrm>
           <a:prstGeom prst="rect">
@@ -9887,8 +10103,8 @@
         </p:nvSpPr>
         <p:spPr>
           <a:xfrm>
-            <a:off x="7818120" y="3300984"/>
-            <a:ext cx="3090672" cy="877824"/>
+            <a:off x="7818120" y="3182112"/>
+            <a:ext cx="3090672" cy="718718"/>
           </a:xfrm>
           <a:prstGeom prst="rect">
             <a:avLst/>
@@ -9928,12 +10144,12 @@
         </p:nvSpPr>
         <p:spPr>
           <a:xfrm>
-            <a:off x="7635240" y="4498848"/>
-            <a:ext cx="3474720" cy="1143000"/>
+            <a:off x="7635240" y="4184294"/>
+            <a:ext cx="3474720" cy="1466698"/>
           </a:xfrm>
           <a:prstGeom prst="roundRect">
             <a:avLst>
-              <a:gd name="adj" fmla="val 9600"/>
+              <a:gd name="adj" fmla="val 7481"/>
             </a:avLst>
           </a:prstGeom>
           <a:solidFill>
@@ -9955,7 +10171,7 @@
         </p:nvSpPr>
         <p:spPr>
           <a:xfrm>
-            <a:off x="7799832" y="4645152"/>
+            <a:off x="7799832" y="4330598"/>
             <a:ext cx="3145536" cy="256032"/>
           </a:xfrm>
           <a:prstGeom prst="rect">
@@ -9994,8 +10210,8 @@
         </p:nvSpPr>
         <p:spPr>
           <a:xfrm>
-            <a:off x="7799832" y="4974336"/>
-            <a:ext cx="3145536" cy="576072"/>
+            <a:off x="7799832" y="4659782"/>
+            <a:ext cx="3145536" cy="899770"/>
           </a:xfrm>
           <a:prstGeom prst="rect">
             <a:avLst/>
@@ -10021,7 +10237,7 @@
                 <a:ea typeface="Aptos" pitchFamily="34" charset="-122"/>
                 <a:cs typeface="Aptos" pitchFamily="34" charset="-120"/>
               </a:rPr>
-              <a:t>Use the assignment to test whether you can explain the concept, apply it to a realistic public health situation, and.</a:t>
+              <a:t>Use the assignment to test whether you can explain the concept, apply it to a realistic public health situation, and identify what would need review before the work moves forward.</a:t>
             </a:r>
             <a:endParaRPr lang="en-US" sz="1320" dirty="0"/>
           </a:p>
@@ -10992,11 +11208,11 @@
         <p:spPr>
           <a:xfrm>
             <a:off x="7635240" y="1325880"/>
-            <a:ext cx="3474720" cy="1325880"/>
+            <a:ext cx="3474720" cy="1207008"/>
           </a:xfrm>
           <a:prstGeom prst="roundRect">
             <a:avLst>
-              <a:gd name="adj" fmla="val 8276"/>
+              <a:gd name="adj" fmla="val 9091"/>
             </a:avLst>
           </a:prstGeom>
           <a:solidFill>
@@ -11058,7 +11274,7 @@
         <p:spPr>
           <a:xfrm>
             <a:off x="7799832" y="1801368"/>
-            <a:ext cx="3145536" cy="758952"/>
+            <a:ext cx="3145536" cy="640080"/>
           </a:xfrm>
           <a:prstGeom prst="rect">
             <a:avLst/>
@@ -11098,12 +11314,12 @@
         </p:nvSpPr>
         <p:spPr>
           <a:xfrm>
-            <a:off x="7635240" y="2788920"/>
-            <a:ext cx="3474720" cy="1536192"/>
+            <a:off x="7635240" y="2670048"/>
+            <a:ext cx="3474720" cy="1377086"/>
           </a:xfrm>
           <a:prstGeom prst="roundRect">
             <a:avLst>
-              <a:gd name="adj" fmla="val 7143"/>
+              <a:gd name="adj" fmla="val 7968"/>
             </a:avLst>
           </a:prstGeom>
           <a:solidFill>
@@ -11125,7 +11341,7 @@
         </p:nvSpPr>
         <p:spPr>
           <a:xfrm>
-            <a:off x="7799832" y="2935224"/>
+            <a:off x="7799832" y="2816352"/>
             <a:ext cx="3145536" cy="256032"/>
           </a:xfrm>
           <a:prstGeom prst="rect">
@@ -11164,8 +11380,8 @@
         </p:nvSpPr>
         <p:spPr>
           <a:xfrm>
-            <a:off x="7818120" y="3300984"/>
-            <a:ext cx="3090672" cy="877824"/>
+            <a:off x="7818120" y="3182112"/>
+            <a:ext cx="3090672" cy="718718"/>
           </a:xfrm>
           <a:prstGeom prst="rect">
             <a:avLst/>
@@ -11239,12 +11455,12 @@
         </p:nvSpPr>
         <p:spPr>
           <a:xfrm>
-            <a:off x="7635240" y="4498848"/>
-            <a:ext cx="3474720" cy="1143000"/>
+            <a:off x="7635240" y="4184294"/>
+            <a:ext cx="3474720" cy="1466698"/>
           </a:xfrm>
           <a:prstGeom prst="roundRect">
             <a:avLst>
-              <a:gd name="adj" fmla="val 9600"/>
+              <a:gd name="adj" fmla="val 7481"/>
             </a:avLst>
           </a:prstGeom>
           <a:solidFill>
@@ -11266,7 +11482,7 @@
         </p:nvSpPr>
         <p:spPr>
           <a:xfrm>
-            <a:off x="7799832" y="4645152"/>
+            <a:off x="7799832" y="4330598"/>
             <a:ext cx="3145536" cy="256032"/>
           </a:xfrm>
           <a:prstGeom prst="rect">
@@ -11305,8 +11521,8 @@
         </p:nvSpPr>
         <p:spPr>
           <a:xfrm>
-            <a:off x="7799832" y="4974336"/>
-            <a:ext cx="3145536" cy="576072"/>
+            <a:off x="7799832" y="4659782"/>
+            <a:ext cx="3145536" cy="899770"/>
           </a:xfrm>
           <a:prstGeom prst="rect">
             <a:avLst/>
@@ -11332,7 +11548,7 @@
                 <a:ea typeface="Aptos" pitchFamily="34" charset="-122"/>
                 <a:cs typeface="Aptos" pitchFamily="34" charset="-120"/>
               </a:rPr>
-              <a:t>Use the assignment to test whether you can explain the concept, apply it to a realistic public health situation, and.</a:t>
+              <a:t>Use the assignment to test whether you can explain the concept, apply it to a realistic public health situation, and identify what would need review before the work moves forward.</a:t>
             </a:r>
             <a:endParaRPr lang="en-US" sz="1320" dirty="0"/>
           </a:p>
@@ -11701,11 +11917,11 @@
         <p:spPr>
           <a:xfrm>
             <a:off x="7635240" y="1325880"/>
-            <a:ext cx="3474720" cy="1325880"/>
+            <a:ext cx="3474720" cy="1207008"/>
           </a:xfrm>
           <a:prstGeom prst="roundRect">
             <a:avLst>
-              <a:gd name="adj" fmla="val 8276"/>
+              <a:gd name="adj" fmla="val 9091"/>
             </a:avLst>
           </a:prstGeom>
           <a:solidFill>
@@ -11767,7 +11983,7 @@
         <p:spPr>
           <a:xfrm>
             <a:off x="7799832" y="1801368"/>
-            <a:ext cx="3145536" cy="758952"/>
+            <a:ext cx="3145536" cy="640080"/>
           </a:xfrm>
           <a:prstGeom prst="rect">
             <a:avLst/>
@@ -11807,12 +12023,12 @@
         </p:nvSpPr>
         <p:spPr>
           <a:xfrm>
-            <a:off x="7635240" y="2788920"/>
-            <a:ext cx="3474720" cy="1536192"/>
+            <a:off x="7635240" y="2670048"/>
+            <a:ext cx="3474720" cy="1377086"/>
           </a:xfrm>
           <a:prstGeom prst="roundRect">
             <a:avLst>
-              <a:gd name="adj" fmla="val 7143"/>
+              <a:gd name="adj" fmla="val 7968"/>
             </a:avLst>
           </a:prstGeom>
           <a:solidFill>
@@ -11834,7 +12050,7 @@
         </p:nvSpPr>
         <p:spPr>
           <a:xfrm>
-            <a:off x="7799832" y="2935224"/>
+            <a:off x="7799832" y="2816352"/>
             <a:ext cx="3145536" cy="256032"/>
           </a:xfrm>
           <a:prstGeom prst="rect">
@@ -11873,8 +12089,8 @@
         </p:nvSpPr>
         <p:spPr>
           <a:xfrm>
-            <a:off x="7818120" y="3300984"/>
-            <a:ext cx="3090672" cy="877824"/>
+            <a:off x="7818120" y="3182112"/>
+            <a:ext cx="3090672" cy="718718"/>
           </a:xfrm>
           <a:prstGeom prst="rect">
             <a:avLst/>
@@ -11948,12 +12164,12 @@
         </p:nvSpPr>
         <p:spPr>
           <a:xfrm>
-            <a:off x="7635240" y="4498848"/>
-            <a:ext cx="3474720" cy="1143000"/>
+            <a:off x="7635240" y="4184294"/>
+            <a:ext cx="3474720" cy="1466698"/>
           </a:xfrm>
           <a:prstGeom prst="roundRect">
             <a:avLst>
-              <a:gd name="adj" fmla="val 9600"/>
+              <a:gd name="adj" fmla="val 7481"/>
             </a:avLst>
           </a:prstGeom>
           <a:solidFill>
@@ -11975,7 +12191,7 @@
         </p:nvSpPr>
         <p:spPr>
           <a:xfrm>
-            <a:off x="7799832" y="4645152"/>
+            <a:off x="7799832" y="4330598"/>
             <a:ext cx="3145536" cy="256032"/>
           </a:xfrm>
           <a:prstGeom prst="rect">
@@ -12014,8 +12230,8 @@
         </p:nvSpPr>
         <p:spPr>
           <a:xfrm>
-            <a:off x="7799832" y="4974336"/>
-            <a:ext cx="3145536" cy="576072"/>
+            <a:off x="7799832" y="4659782"/>
+            <a:ext cx="3145536" cy="899770"/>
           </a:xfrm>
           <a:prstGeom prst="rect">
             <a:avLst/>
@@ -12041,7 +12257,7 @@
                 <a:ea typeface="Aptos" pitchFamily="34" charset="-122"/>
                 <a:cs typeface="Aptos" pitchFamily="34" charset="-120"/>
               </a:rPr>
-              <a:t>Use the assignment to test whether you can explain the concept, apply it to a realistic public health situation, and.</a:t>
+              <a:t>Use the assignment to test whether you can explain the concept, apply it to a realistic public health situation, and identify what would need review before the work moves forward.</a:t>
             </a:r>
             <a:endParaRPr lang="en-US" sz="1320" dirty="0"/>
           </a:p>
@@ -12410,11 +12626,11 @@
         <p:spPr>
           <a:xfrm>
             <a:off x="7635240" y="1325880"/>
-            <a:ext cx="3474720" cy="1325880"/>
+            <a:ext cx="3474720" cy="1207008"/>
           </a:xfrm>
           <a:prstGeom prst="roundRect">
             <a:avLst>
-              <a:gd name="adj" fmla="val 8276"/>
+              <a:gd name="adj" fmla="val 9091"/>
             </a:avLst>
           </a:prstGeom>
           <a:solidFill>
@@ -12476,7 +12692,7 @@
         <p:spPr>
           <a:xfrm>
             <a:off x="7799832" y="1801368"/>
-            <a:ext cx="3145536" cy="758952"/>
+            <a:ext cx="3145536" cy="640080"/>
           </a:xfrm>
           <a:prstGeom prst="rect">
             <a:avLst/>
@@ -12516,12 +12732,12 @@
         </p:nvSpPr>
         <p:spPr>
           <a:xfrm>
-            <a:off x="7635240" y="2788920"/>
-            <a:ext cx="3474720" cy="1536192"/>
+            <a:off x="7635240" y="2670048"/>
+            <a:ext cx="3474720" cy="1377086"/>
           </a:xfrm>
           <a:prstGeom prst="roundRect">
             <a:avLst>
-              <a:gd name="adj" fmla="val 7143"/>
+              <a:gd name="adj" fmla="val 7968"/>
             </a:avLst>
           </a:prstGeom>
           <a:solidFill>
@@ -12543,7 +12759,7 @@
         </p:nvSpPr>
         <p:spPr>
           <a:xfrm>
-            <a:off x="7799832" y="2935224"/>
+            <a:off x="7799832" y="2816352"/>
             <a:ext cx="3145536" cy="256032"/>
           </a:xfrm>
           <a:prstGeom prst="rect">
@@ -12582,8 +12798,8 @@
         </p:nvSpPr>
         <p:spPr>
           <a:xfrm>
-            <a:off x="7818120" y="3300984"/>
-            <a:ext cx="3090672" cy="877824"/>
+            <a:off x="7818120" y="3182112"/>
+            <a:ext cx="3090672" cy="718718"/>
           </a:xfrm>
           <a:prstGeom prst="rect">
             <a:avLst/>
@@ -12640,12 +12856,12 @@
         </p:nvSpPr>
         <p:spPr>
           <a:xfrm>
-            <a:off x="7635240" y="4498848"/>
-            <a:ext cx="3474720" cy="1143000"/>
+            <a:off x="7635240" y="4184294"/>
+            <a:ext cx="3474720" cy="1466698"/>
           </a:xfrm>
           <a:prstGeom prst="roundRect">
             <a:avLst>
-              <a:gd name="adj" fmla="val 9600"/>
+              <a:gd name="adj" fmla="val 7481"/>
             </a:avLst>
           </a:prstGeom>
           <a:solidFill>
@@ -12667,7 +12883,7 @@
         </p:nvSpPr>
         <p:spPr>
           <a:xfrm>
-            <a:off x="7799832" y="4645152"/>
+            <a:off x="7799832" y="4330598"/>
             <a:ext cx="3145536" cy="256032"/>
           </a:xfrm>
           <a:prstGeom prst="rect">
@@ -12706,8 +12922,8 @@
         </p:nvSpPr>
         <p:spPr>
           <a:xfrm>
-            <a:off x="7799832" y="4974336"/>
-            <a:ext cx="3145536" cy="576072"/>
+            <a:off x="7799832" y="4659782"/>
+            <a:ext cx="3145536" cy="899770"/>
           </a:xfrm>
           <a:prstGeom prst="rect">
             <a:avLst/>
@@ -12733,7 +12949,7 @@
                 <a:ea typeface="Aptos" pitchFamily="34" charset="-122"/>
                 <a:cs typeface="Aptos" pitchFamily="34" charset="-120"/>
               </a:rPr>
-              <a:t>Use the assignment to test whether you can explain the concept, apply it to a realistic public health situation, and.</a:t>
+              <a:t>Use the assignment to test whether you can explain the concept, apply it to a realistic public health situation, and identify what would need review before the work moves forward.</a:t>
             </a:r>
             <a:endParaRPr lang="en-US" sz="1320" dirty="0"/>
           </a:p>
@@ -13211,7 +13427,7 @@
                 <a:ea typeface="Aptos" pitchFamily="34" charset="-122"/>
                 <a:cs typeface="Aptos" pitchFamily="34" charset="-120"/>
               </a:rPr>
-              <a:t>Use the related plays to identify decisions, participants, timing, approvals, and documentation needed for responsible.</a:t>
+              <a:t>Use the related plays to identify decisions, participants, timing, approvals, and documentation needed for responsible implementation.</a:t>
             </a:r>
             <a:endParaRPr lang="en-US" sz="1320" dirty="0"/>
           </a:p>
@@ -13830,7 +14046,7 @@
                 <a:ea typeface="Aptos" pitchFamily="34" charset="-122"/>
                 <a:cs typeface="Aptos" pitchFamily="34" charset="-120"/>
               </a:rPr>
-              <a:t>Use linked tools when your department needs a structured worksheet, template, checklist, review process, or.</a:t>
+              <a:t>Use linked tools when your department needs a structured worksheet, template, checklist, review process, or documentation artifact.</a:t>
             </a:r>
             <a:endParaRPr lang="en-US" sz="1320" dirty="0"/>
           </a:p>
@@ -14340,11 +14556,11 @@
         <p:spPr>
           <a:xfrm>
             <a:off x="7635240" y="1325880"/>
-            <a:ext cx="3474720" cy="1325880"/>
+            <a:ext cx="3474720" cy="1207008"/>
           </a:xfrm>
           <a:prstGeom prst="roundRect">
             <a:avLst>
-              <a:gd name="adj" fmla="val 8276"/>
+              <a:gd name="adj" fmla="val 9091"/>
             </a:avLst>
           </a:prstGeom>
           <a:solidFill>
@@ -14406,7 +14622,7 @@
         <p:spPr>
           <a:xfrm>
             <a:off x="7799832" y="1801368"/>
-            <a:ext cx="3145536" cy="758952"/>
+            <a:ext cx="3145536" cy="640080"/>
           </a:xfrm>
           <a:prstGeom prst="rect">
             <a:avLst/>
@@ -14446,12 +14662,12 @@
         </p:nvSpPr>
         <p:spPr>
           <a:xfrm>
-            <a:off x="7635240" y="2788920"/>
-            <a:ext cx="3474720" cy="1536192"/>
+            <a:off x="7635240" y="2670048"/>
+            <a:ext cx="3474720" cy="1377086"/>
           </a:xfrm>
           <a:prstGeom prst="roundRect">
             <a:avLst>
-              <a:gd name="adj" fmla="val 7143"/>
+              <a:gd name="adj" fmla="val 7968"/>
             </a:avLst>
           </a:prstGeom>
           <a:solidFill>
@@ -14473,7 +14689,7 @@
         </p:nvSpPr>
         <p:spPr>
           <a:xfrm>
-            <a:off x="7799832" y="2935224"/>
+            <a:off x="7799832" y="2816352"/>
             <a:ext cx="3145536" cy="256032"/>
           </a:xfrm>
           <a:prstGeom prst="rect">
@@ -14512,8 +14728,8 @@
         </p:nvSpPr>
         <p:spPr>
           <a:xfrm>
-            <a:off x="7818120" y="3300984"/>
-            <a:ext cx="3090672" cy="877824"/>
+            <a:off x="7818120" y="3182112"/>
+            <a:ext cx="3090672" cy="718718"/>
           </a:xfrm>
           <a:prstGeom prst="rect">
             <a:avLst/>
@@ -14587,12 +14803,12 @@
         </p:nvSpPr>
         <p:spPr>
           <a:xfrm>
-            <a:off x="7635240" y="4498848"/>
-            <a:ext cx="3474720" cy="1143000"/>
+            <a:off x="7635240" y="4184294"/>
+            <a:ext cx="3474720" cy="1466698"/>
           </a:xfrm>
           <a:prstGeom prst="roundRect">
             <a:avLst>
-              <a:gd name="adj" fmla="val 9600"/>
+              <a:gd name="adj" fmla="val 7481"/>
             </a:avLst>
           </a:prstGeom>
           <a:solidFill>
@@ -14614,7 +14830,7 @@
         </p:nvSpPr>
         <p:spPr>
           <a:xfrm>
-            <a:off x="7799832" y="4645152"/>
+            <a:off x="7799832" y="4330598"/>
             <a:ext cx="3145536" cy="256032"/>
           </a:xfrm>
           <a:prstGeom prst="rect">
@@ -14653,8 +14869,8 @@
         </p:nvSpPr>
         <p:spPr>
           <a:xfrm>
-            <a:off x="7799832" y="4974336"/>
-            <a:ext cx="3145536" cy="576072"/>
+            <a:off x="7799832" y="4659782"/>
+            <a:ext cx="3145536" cy="899770"/>
           </a:xfrm>
           <a:prstGeom prst="rect">
             <a:avLst/>
@@ -14680,7 +14896,7 @@
                 <a:ea typeface="Aptos" pitchFamily="34" charset="-122"/>
                 <a:cs typeface="Aptos" pitchFamily="34" charset="-120"/>
               </a:rPr>
-              <a:t>Use the assignment to test whether you can explain the concept, apply it to a realistic public health situation, and.</a:t>
+              <a:t>Use the assignment to test whether you can explain the concept, apply it to a realistic public health situation, and identify what would need review before the work moves forward.</a:t>
             </a:r>
             <a:endParaRPr lang="en-US" sz="1320" dirty="0"/>
           </a:p>
@@ -15015,11 +15231,11 @@
         <p:spPr>
           <a:xfrm>
             <a:off x="7635240" y="1325880"/>
-            <a:ext cx="3474720" cy="1325880"/>
+            <a:ext cx="3474720" cy="1207008"/>
           </a:xfrm>
           <a:prstGeom prst="roundRect">
             <a:avLst>
-              <a:gd name="adj" fmla="val 8276"/>
+              <a:gd name="adj" fmla="val 9091"/>
             </a:avLst>
           </a:prstGeom>
           <a:solidFill>
@@ -15081,7 +15297,7 @@
         <p:spPr>
           <a:xfrm>
             <a:off x="7799832" y="1801368"/>
-            <a:ext cx="3145536" cy="758952"/>
+            <a:ext cx="3145536" cy="640080"/>
           </a:xfrm>
           <a:prstGeom prst="rect">
             <a:avLst/>
@@ -15121,12 +15337,12 @@
         </p:nvSpPr>
         <p:spPr>
           <a:xfrm>
-            <a:off x="7635240" y="2788920"/>
-            <a:ext cx="3474720" cy="1536192"/>
+            <a:off x="7635240" y="2670048"/>
+            <a:ext cx="3474720" cy="1377086"/>
           </a:xfrm>
           <a:prstGeom prst="roundRect">
             <a:avLst>
-              <a:gd name="adj" fmla="val 7143"/>
+              <a:gd name="adj" fmla="val 7968"/>
             </a:avLst>
           </a:prstGeom>
           <a:solidFill>
@@ -15148,7 +15364,7 @@
         </p:nvSpPr>
         <p:spPr>
           <a:xfrm>
-            <a:off x="7799832" y="2935224"/>
+            <a:off x="7799832" y="2816352"/>
             <a:ext cx="3145536" cy="256032"/>
           </a:xfrm>
           <a:prstGeom prst="rect">
@@ -15187,8 +15403,8 @@
         </p:nvSpPr>
         <p:spPr>
           <a:xfrm>
-            <a:off x="7818120" y="3300984"/>
-            <a:ext cx="3090672" cy="877824"/>
+            <a:off x="7818120" y="3182112"/>
+            <a:ext cx="3090672" cy="718718"/>
           </a:xfrm>
           <a:prstGeom prst="rect">
             <a:avLst/>
@@ -15228,12 +15444,12 @@
         </p:nvSpPr>
         <p:spPr>
           <a:xfrm>
-            <a:off x="7635240" y="4498848"/>
-            <a:ext cx="3474720" cy="1143000"/>
+            <a:off x="7635240" y="4184294"/>
+            <a:ext cx="3474720" cy="1466698"/>
           </a:xfrm>
           <a:prstGeom prst="roundRect">
             <a:avLst>
-              <a:gd name="adj" fmla="val 9600"/>
+              <a:gd name="adj" fmla="val 7481"/>
             </a:avLst>
           </a:prstGeom>
           <a:solidFill>
@@ -15255,7 +15471,7 @@
         </p:nvSpPr>
         <p:spPr>
           <a:xfrm>
-            <a:off x="7799832" y="4645152"/>
+            <a:off x="7799832" y="4330598"/>
             <a:ext cx="3145536" cy="256032"/>
           </a:xfrm>
           <a:prstGeom prst="rect">
@@ -15294,8 +15510,8 @@
         </p:nvSpPr>
         <p:spPr>
           <a:xfrm>
-            <a:off x="7799832" y="4974336"/>
-            <a:ext cx="3145536" cy="576072"/>
+            <a:off x="7799832" y="4659782"/>
+            <a:ext cx="3145536" cy="899770"/>
           </a:xfrm>
           <a:prstGeom prst="rect">
             <a:avLst/>
@@ -15321,7 +15537,7 @@
                 <a:ea typeface="Aptos" pitchFamily="34" charset="-122"/>
                 <a:cs typeface="Aptos" pitchFamily="34" charset="-120"/>
               </a:rPr>
-              <a:t>Use the assignment to test whether you can explain the concept, apply it to a realistic public health situation, and.</a:t>
+              <a:t>Use the assignment to test whether you can explain the concept, apply it to a realistic public health situation, and identify what would need review before the work moves forward.</a:t>
             </a:r>
             <a:endParaRPr lang="en-US" sz="1320" dirty="0"/>
           </a:p>
@@ -15690,11 +15906,11 @@
         <p:spPr>
           <a:xfrm>
             <a:off x="7635240" y="1325880"/>
-            <a:ext cx="3474720" cy="1325880"/>
+            <a:ext cx="3474720" cy="1255471"/>
           </a:xfrm>
           <a:prstGeom prst="roundRect">
             <a:avLst>
-              <a:gd name="adj" fmla="val 8276"/>
+              <a:gd name="adj" fmla="val 8740"/>
             </a:avLst>
           </a:prstGeom>
           <a:solidFill>
@@ -15756,7 +15972,7 @@
         <p:spPr>
           <a:xfrm>
             <a:off x="7799832" y="1801368"/>
-            <a:ext cx="3145536" cy="758952"/>
+            <a:ext cx="3145536" cy="688543"/>
           </a:xfrm>
           <a:prstGeom prst="rect">
             <a:avLst/>
@@ -15796,12 +16012,12 @@
         </p:nvSpPr>
         <p:spPr>
           <a:xfrm>
-            <a:off x="7635240" y="2788920"/>
-            <a:ext cx="3474720" cy="1536192"/>
+            <a:off x="7635240" y="2718511"/>
+            <a:ext cx="3474720" cy="1328623"/>
           </a:xfrm>
           <a:prstGeom prst="roundRect">
             <a:avLst>
-              <a:gd name="adj" fmla="val 7143"/>
+              <a:gd name="adj" fmla="val 8259"/>
             </a:avLst>
           </a:prstGeom>
           <a:solidFill>
@@ -15823,8 +16039,8 @@
         </p:nvSpPr>
         <p:spPr>
           <a:xfrm>
-            <a:off x="7799832" y="2935224"/>
-            <a:ext cx="3145536" cy="256032"/>
+            <a:off x="7799832" y="2846527"/>
+            <a:ext cx="3145536" cy="237744"/>
           </a:xfrm>
           <a:prstGeom prst="rect">
             <a:avLst/>
@@ -15840,7 +16056,7 @@
               <a:buNone/>
             </a:pPr>
             <a:r>
-              <a:rPr lang="en-US" sz="1300" b="1" dirty="0">
+              <a:rPr lang="en-US" sz="1250" b="1" dirty="0">
                 <a:solidFill>
                   <a:srgbClr val="0068B7"/>
                 </a:solidFill>
@@ -15848,101 +16064,317 @@
                 <a:ea typeface="Aptos" pitchFamily="34" charset="-122"/>
                 <a:cs typeface="Aptos" pitchFamily="34" charset="-120"/>
               </a:rPr>
-              <a:t>Concept checkpoints</a:t>
-            </a:r>
-            <a:endParaRPr lang="en-US" sz="1300" dirty="0"/>
-          </a:p>
-        </p:txBody>
-      </p:sp>
-      <p:sp>
-        <p:nvSpPr>
-          <p:cNvPr id="15" name="Text 13"/>
-          <p:cNvSpPr/>
-          <p:nvPr/>
-        </p:nvSpPr>
-        <p:spPr>
-          <a:xfrm>
-            <a:off x="7818120" y="3300984"/>
-            <a:ext cx="3090672" cy="877824"/>
-          </a:xfrm>
-          <a:prstGeom prst="rect">
-            <a:avLst/>
-          </a:prstGeom>
-          <a:noFill/>
-          <a:ln/>
-        </p:spPr>
-        <p:txBody>
-          <a:bodyPr wrap="square" lIns="508" tIns="508" rIns="508" bIns="508" rtlCol="0" anchor="t">
+              <a:t>Human-in-the-loop use</a:t>
+            </a:r>
+            <a:endParaRPr lang="en-US" sz="1250" dirty="0"/>
+          </a:p>
+        </p:txBody>
+      </p:sp>
+      <p:sp>
+        <p:nvSpPr>
+          <p:cNvPr id="15" name="Shape 13"/>
+          <p:cNvSpPr/>
+          <p:nvPr/>
+        </p:nvSpPr>
+        <p:spPr>
+          <a:xfrm>
+            <a:off x="8763000" y="3399739"/>
+            <a:ext cx="164592" cy="0"/>
+          </a:xfrm>
+          <a:prstGeom prst="line">
+            <a:avLst/>
+          </a:prstGeom>
+          <a:noFill/>
+          <a:ln w="15240">
+            <a:solidFill>
+              <a:srgbClr val="8ABBD8"/>
+            </a:solidFill>
+            <a:prstDash val="solid"/>
+          </a:ln>
+        </p:spPr>
+      </p:sp>
+      <p:sp>
+        <p:nvSpPr>
+          <p:cNvPr id="16" name="Shape 14"/>
+          <p:cNvSpPr/>
+          <p:nvPr/>
+        </p:nvSpPr>
+        <p:spPr>
+          <a:xfrm>
+            <a:off x="7872984" y="3248863"/>
+            <a:ext cx="890016" cy="301752"/>
+          </a:xfrm>
+          <a:prstGeom prst="roundRect">
+            <a:avLst>
+              <a:gd name="adj" fmla="val 24242"/>
+            </a:avLst>
+          </a:prstGeom>
+          <a:solidFill>
+            <a:srgbClr val="0068B7"/>
+          </a:solidFill>
+          <a:ln w="12700">
+            <a:solidFill>
+              <a:srgbClr val="0068B7"/>
+            </a:solidFill>
+            <a:prstDash val="solid"/>
+          </a:ln>
+        </p:spPr>
+      </p:sp>
+      <p:sp>
+        <p:nvSpPr>
+          <p:cNvPr id="17" name="Text 15"/>
+          <p:cNvSpPr/>
+          <p:nvPr/>
+        </p:nvSpPr>
+        <p:spPr>
+          <a:xfrm>
+            <a:off x="7909560" y="3322015"/>
+            <a:ext cx="816864" cy="146304"/>
+          </a:xfrm>
+          <a:prstGeom prst="rect">
+            <a:avLst/>
+          </a:prstGeom>
+          <a:noFill/>
+          <a:ln/>
+        </p:spPr>
+        <p:txBody>
+          <a:bodyPr wrap="square" lIns="0" tIns="0" rIns="0" bIns="0" rtlCol="0" anchor="ctr">
             <a:normAutofit/>
           </a:bodyPr>
           <a:lstStyle/>
           <a:p>
-            <a:pPr indent="0" marL="0">
-              <a:buNone/>
-            </a:pPr>
-            <a:r>
-              <a:rPr lang="en-US" sz="1220" dirty="0">
-                <a:solidFill>
-                  <a:srgbClr val="17364A"/>
-                </a:solidFill>
-                <a:latin typeface="Aptos" pitchFamily="34" charset="0"/>
-                <a:ea typeface="Aptos" pitchFamily="34" charset="-122"/>
-                <a:cs typeface="Aptos" pitchFamily="34" charset="-120"/>
-              </a:rPr>
-              <a:t>Retrieval-augmented generation, often called RAG, combines.</a:t>
-            </a:r>
-            <a:endParaRPr lang="en-US" sz="1220" dirty="0"/>
-          </a:p>
-          <a:p>
-            <a:pPr indent="0" marL="0">
-              <a:buNone/>
-            </a:pPr>
-            <a:r>
-              <a:rPr lang="en-US" sz="1220" dirty="0">
-                <a:solidFill>
-                  <a:srgbClr val="17364A"/>
-                </a:solidFill>
-                <a:latin typeface="Aptos" pitchFamily="34" charset="0"/>
-                <a:ea typeface="Aptos" pitchFamily="34" charset="-122"/>
-                <a:cs typeface="Aptos" pitchFamily="34" charset="-120"/>
-              </a:rPr>
-              <a:t>Instead of relying only on a model’s general training, a RAG.</a:t>
-            </a:r>
-            <a:endParaRPr lang="en-US" sz="1220" dirty="0"/>
-          </a:p>
-          <a:p>
-            <a:pPr indent="0" marL="0">
-              <a:buNone/>
-            </a:pPr>
-            <a:r>
-              <a:rPr lang="en-US" sz="1220" dirty="0">
-                <a:solidFill>
-                  <a:srgbClr val="17364A"/>
-                </a:solidFill>
-                <a:latin typeface="Aptos" pitchFamily="34" charset="0"/>
-                <a:ea typeface="Aptos" pitchFamily="34" charset="-122"/>
-                <a:cs typeface="Aptos" pitchFamily="34" charset="-120"/>
-              </a:rPr>
-              <a:t>In public health, RAG may support policy lookup, protocol.</a:t>
-            </a:r>
-            <a:endParaRPr lang="en-US" sz="1220" dirty="0"/>
-          </a:p>
-        </p:txBody>
-      </p:sp>
-      <p:sp>
-        <p:nvSpPr>
-          <p:cNvPr id="16" name="Shape 14"/>
-          <p:cNvSpPr/>
-          <p:nvPr/>
-        </p:nvSpPr>
-        <p:spPr>
-          <a:xfrm>
-            <a:off x="7635240" y="4498848"/>
-            <a:ext cx="3474720" cy="1143000"/>
+            <a:pPr algn="ctr" indent="0" marL="0">
+              <a:buNone/>
+            </a:pPr>
+            <a:r>
+              <a:rPr lang="en-US" sz="880" b="1" dirty="0">
+                <a:solidFill>
+                  <a:srgbClr val="FFFFFF"/>
+                </a:solidFill>
+                <a:latin typeface="Aptos" pitchFamily="34" charset="0"/>
+                <a:ea typeface="Aptos" pitchFamily="34" charset="-122"/>
+                <a:cs typeface="Aptos" pitchFamily="34" charset="-120"/>
+              </a:rPr>
+              <a:t>Input</a:t>
+            </a:r>
+            <a:endParaRPr lang="en-US" sz="880" dirty="0"/>
+          </a:p>
+        </p:txBody>
+      </p:sp>
+      <p:sp>
+        <p:nvSpPr>
+          <p:cNvPr id="18" name="Shape 16"/>
+          <p:cNvSpPr/>
+          <p:nvPr/>
+        </p:nvSpPr>
+        <p:spPr>
+          <a:xfrm>
+            <a:off x="9817608" y="3399739"/>
+            <a:ext cx="164592" cy="0"/>
+          </a:xfrm>
+          <a:prstGeom prst="line">
+            <a:avLst/>
+          </a:prstGeom>
+          <a:noFill/>
+          <a:ln w="15240">
+            <a:solidFill>
+              <a:srgbClr val="8ABBD8"/>
+            </a:solidFill>
+            <a:prstDash val="solid"/>
+          </a:ln>
+        </p:spPr>
+      </p:sp>
+      <p:sp>
+        <p:nvSpPr>
+          <p:cNvPr id="19" name="Shape 17"/>
+          <p:cNvSpPr/>
+          <p:nvPr/>
+        </p:nvSpPr>
+        <p:spPr>
+          <a:xfrm>
+            <a:off x="8927592" y="3248863"/>
+            <a:ext cx="890016" cy="301752"/>
           </a:xfrm>
           <a:prstGeom prst="roundRect">
             <a:avLst>
-              <a:gd name="adj" fmla="val 9600"/>
+              <a:gd name="adj" fmla="val 24242"/>
+            </a:avLst>
+          </a:prstGeom>
+          <a:solidFill>
+            <a:srgbClr val="2F8A28"/>
+          </a:solidFill>
+          <a:ln w="12700">
+            <a:solidFill>
+              <a:srgbClr val="2F8A28"/>
+            </a:solidFill>
+            <a:prstDash val="solid"/>
+          </a:ln>
+        </p:spPr>
+      </p:sp>
+      <p:sp>
+        <p:nvSpPr>
+          <p:cNvPr id="20" name="Text 18"/>
+          <p:cNvSpPr/>
+          <p:nvPr/>
+        </p:nvSpPr>
+        <p:spPr>
+          <a:xfrm>
+            <a:off x="8964168" y="3322015"/>
+            <a:ext cx="816864" cy="146304"/>
+          </a:xfrm>
+          <a:prstGeom prst="rect">
+            <a:avLst/>
+          </a:prstGeom>
+          <a:noFill/>
+          <a:ln/>
+        </p:spPr>
+        <p:txBody>
+          <a:bodyPr wrap="square" lIns="0" tIns="0" rIns="0" bIns="0" rtlCol="0" anchor="ctr">
+            <a:normAutofit/>
+          </a:bodyPr>
+          <a:lstStyle/>
+          <a:p>
+            <a:pPr algn="ctr" indent="0" marL="0">
+              <a:buNone/>
+            </a:pPr>
+            <a:r>
+              <a:rPr lang="en-US" sz="880" b="1" dirty="0">
+                <a:solidFill>
+                  <a:srgbClr val="FFFFFF"/>
+                </a:solidFill>
+                <a:latin typeface="Aptos" pitchFamily="34" charset="0"/>
+                <a:ea typeface="Aptos" pitchFamily="34" charset="-122"/>
+                <a:cs typeface="Aptos" pitchFamily="34" charset="-120"/>
+              </a:rPr>
+              <a:t>AI assist</a:t>
+            </a:r>
+            <a:endParaRPr lang="en-US" sz="880" dirty="0"/>
+          </a:p>
+        </p:txBody>
+      </p:sp>
+      <p:sp>
+        <p:nvSpPr>
+          <p:cNvPr id="21" name="Shape 19"/>
+          <p:cNvSpPr/>
+          <p:nvPr/>
+        </p:nvSpPr>
+        <p:spPr>
+          <a:xfrm>
+            <a:off x="9982200" y="3248863"/>
+            <a:ext cx="890016" cy="301752"/>
+          </a:xfrm>
+          <a:prstGeom prst="roundRect">
+            <a:avLst>
+              <a:gd name="adj" fmla="val 24242"/>
+            </a:avLst>
+          </a:prstGeom>
+          <a:solidFill>
+            <a:srgbClr val="6A4CA3"/>
+          </a:solidFill>
+          <a:ln w="12700">
+            <a:solidFill>
+              <a:srgbClr val="6A4CA3"/>
+            </a:solidFill>
+            <a:prstDash val="solid"/>
+          </a:ln>
+        </p:spPr>
+      </p:sp>
+      <p:sp>
+        <p:nvSpPr>
+          <p:cNvPr id="22" name="Text 20"/>
+          <p:cNvSpPr/>
+          <p:nvPr/>
+        </p:nvSpPr>
+        <p:spPr>
+          <a:xfrm>
+            <a:off x="10018776" y="3322015"/>
+            <a:ext cx="816864" cy="146304"/>
+          </a:xfrm>
+          <a:prstGeom prst="rect">
+            <a:avLst/>
+          </a:prstGeom>
+          <a:noFill/>
+          <a:ln/>
+        </p:spPr>
+        <p:txBody>
+          <a:bodyPr wrap="square" lIns="0" tIns="0" rIns="0" bIns="0" rtlCol="0" anchor="ctr">
+            <a:normAutofit/>
+          </a:bodyPr>
+          <a:lstStyle/>
+          <a:p>
+            <a:pPr algn="ctr" indent="0" marL="0">
+              <a:buNone/>
+            </a:pPr>
+            <a:r>
+              <a:rPr lang="en-US" sz="880" b="1" dirty="0">
+                <a:solidFill>
+                  <a:srgbClr val="FFFFFF"/>
+                </a:solidFill>
+                <a:latin typeface="Aptos" pitchFamily="34" charset="0"/>
+                <a:ea typeface="Aptos" pitchFamily="34" charset="-122"/>
+                <a:cs typeface="Aptos" pitchFamily="34" charset="-120"/>
+              </a:rPr>
+              <a:t>Review</a:t>
+            </a:r>
+            <a:endParaRPr lang="en-US" sz="880" dirty="0"/>
+          </a:p>
+        </p:txBody>
+      </p:sp>
+      <p:sp>
+        <p:nvSpPr>
+          <p:cNvPr id="23" name="Text 21"/>
+          <p:cNvSpPr/>
+          <p:nvPr/>
+        </p:nvSpPr>
+        <p:spPr>
+          <a:xfrm>
+            <a:off x="7854696" y="3742639"/>
+            <a:ext cx="3035808" cy="158191"/>
+          </a:xfrm>
+          <a:prstGeom prst="rect">
+            <a:avLst/>
+          </a:prstGeom>
+          <a:noFill/>
+          <a:ln/>
+        </p:spPr>
+        <p:txBody>
+          <a:bodyPr wrap="square" lIns="254" tIns="254" rIns="254" bIns="254" rtlCol="0" anchor="t">
+            <a:normAutofit/>
+          </a:bodyPr>
+          <a:lstStyle/>
+          <a:p>
+            <a:pPr indent="0" marL="0">
+              <a:buNone/>
+            </a:pPr>
+            <a:r>
+              <a:rPr lang="en-US" sz="1120" dirty="0">
+                <a:solidFill>
+                  <a:srgbClr val="17364A"/>
+                </a:solidFill>
+                <a:latin typeface="Aptos" pitchFamily="34" charset="0"/>
+                <a:ea typeface="Aptos" pitchFamily="34" charset="-122"/>
+                <a:cs typeface="Aptos" pitchFamily="34" charset="-120"/>
+              </a:rPr>
+              <a:t>AI can support work, but public health judgment remains responsible for interpretation and final use.</a:t>
+            </a:r>
+            <a:endParaRPr lang="en-US" sz="1120" dirty="0"/>
+          </a:p>
+        </p:txBody>
+      </p:sp>
+      <p:sp>
+        <p:nvSpPr>
+          <p:cNvPr id="24" name="Shape 22"/>
+          <p:cNvSpPr/>
+          <p:nvPr/>
+        </p:nvSpPr>
+        <p:spPr>
+          <a:xfrm>
+            <a:off x="7635240" y="4184294"/>
+            <a:ext cx="3474720" cy="1466698"/>
+          </a:xfrm>
+          <a:prstGeom prst="roundRect">
+            <a:avLst>
+              <a:gd name="adj" fmla="val 7481"/>
             </a:avLst>
           </a:prstGeom>
           <a:solidFill>
@@ -15958,13 +16390,13 @@
       </p:sp>
       <p:sp>
         <p:nvSpPr>
-          <p:cNvPr id="17" name="Text 15"/>
-          <p:cNvSpPr/>
-          <p:nvPr/>
-        </p:nvSpPr>
-        <p:spPr>
-          <a:xfrm>
-            <a:off x="7799832" y="4645152"/>
+          <p:cNvPr id="25" name="Text 23"/>
+          <p:cNvSpPr/>
+          <p:nvPr/>
+        </p:nvSpPr>
+        <p:spPr>
+          <a:xfrm>
+            <a:off x="7799832" y="4330598"/>
             <a:ext cx="3145536" cy="256032"/>
           </a:xfrm>
           <a:prstGeom prst="rect">
@@ -15997,14 +16429,14 @@
       </p:sp>
       <p:sp>
         <p:nvSpPr>
-          <p:cNvPr id="18" name="Text 16"/>
-          <p:cNvSpPr/>
-          <p:nvPr/>
-        </p:nvSpPr>
-        <p:spPr>
-          <a:xfrm>
-            <a:off x="7799832" y="4974336"/>
-            <a:ext cx="3145536" cy="576072"/>
+          <p:cNvPr id="26" name="Text 24"/>
+          <p:cNvSpPr/>
+          <p:nvPr/>
+        </p:nvSpPr>
+        <p:spPr>
+          <a:xfrm>
+            <a:off x="7799832" y="4659782"/>
+            <a:ext cx="3145536" cy="899770"/>
           </a:xfrm>
           <a:prstGeom prst="rect">
             <a:avLst/>
@@ -16030,7 +16462,7 @@
                 <a:ea typeface="Aptos" pitchFamily="34" charset="-122"/>
                 <a:cs typeface="Aptos" pitchFamily="34" charset="-120"/>
               </a:rPr>
-              <a:t>Use the assignment to test whether you can explain the concept, apply it to a realistic public health situation, and.</a:t>
+              <a:t>Use the assignment to test whether you can explain the concept, apply it to a realistic public health situation, and identify what would need review before the work moves forward.</a:t>
             </a:r>
             <a:endParaRPr lang="en-US" sz="1320" dirty="0"/>
           </a:p>
@@ -16399,11 +16831,11 @@
         <p:spPr>
           <a:xfrm>
             <a:off x="7635240" y="1325880"/>
-            <a:ext cx="3474720" cy="1325880"/>
+            <a:ext cx="3474720" cy="1255471"/>
           </a:xfrm>
           <a:prstGeom prst="roundRect">
             <a:avLst>
-              <a:gd name="adj" fmla="val 8276"/>
+              <a:gd name="adj" fmla="val 8740"/>
             </a:avLst>
           </a:prstGeom>
           <a:solidFill>
@@ -16465,7 +16897,7 @@
         <p:spPr>
           <a:xfrm>
             <a:off x="7799832" y="1801368"/>
-            <a:ext cx="3145536" cy="758952"/>
+            <a:ext cx="3145536" cy="688543"/>
           </a:xfrm>
           <a:prstGeom prst="rect">
             <a:avLst/>
@@ -16505,12 +16937,12 @@
         </p:nvSpPr>
         <p:spPr>
           <a:xfrm>
-            <a:off x="7635240" y="2788920"/>
-            <a:ext cx="3474720" cy="1536192"/>
+            <a:off x="7635240" y="2718511"/>
+            <a:ext cx="3474720" cy="1328623"/>
           </a:xfrm>
           <a:prstGeom prst="roundRect">
             <a:avLst>
-              <a:gd name="adj" fmla="val 7143"/>
+              <a:gd name="adj" fmla="val 8259"/>
             </a:avLst>
           </a:prstGeom>
           <a:solidFill>
@@ -16532,8 +16964,8 @@
         </p:nvSpPr>
         <p:spPr>
           <a:xfrm>
-            <a:off x="7799832" y="2935224"/>
-            <a:ext cx="3145536" cy="256032"/>
+            <a:off x="7799832" y="2846527"/>
+            <a:ext cx="3145536" cy="237744"/>
           </a:xfrm>
           <a:prstGeom prst="rect">
             <a:avLst/>
@@ -16549,7 +16981,7 @@
               <a:buNone/>
             </a:pPr>
             <a:r>
-              <a:rPr lang="en-US" sz="1300" b="1" dirty="0">
+              <a:rPr lang="en-US" sz="1250" b="1" dirty="0">
                 <a:solidFill>
                   <a:srgbClr val="0068B7"/>
                 </a:solidFill>
@@ -16557,101 +16989,317 @@
                 <a:ea typeface="Aptos" pitchFamily="34" charset="-122"/>
                 <a:cs typeface="Aptos" pitchFamily="34" charset="-120"/>
               </a:rPr>
-              <a:t>Concept checkpoints</a:t>
-            </a:r>
-            <a:endParaRPr lang="en-US" sz="1300" dirty="0"/>
-          </a:p>
-        </p:txBody>
-      </p:sp>
-      <p:sp>
-        <p:nvSpPr>
-          <p:cNvPr id="15" name="Text 13"/>
-          <p:cNvSpPr/>
-          <p:nvPr/>
-        </p:nvSpPr>
-        <p:spPr>
-          <a:xfrm>
-            <a:off x="7818120" y="3300984"/>
-            <a:ext cx="3090672" cy="877824"/>
-          </a:xfrm>
-          <a:prstGeom prst="rect">
-            <a:avLst/>
-          </a:prstGeom>
-          <a:noFill/>
-          <a:ln/>
-        </p:spPr>
-        <p:txBody>
-          <a:bodyPr wrap="square" lIns="508" tIns="508" rIns="508" bIns="508" rtlCol="0" anchor="t">
+              <a:t>Human-in-the-loop use</a:t>
+            </a:r>
+            <a:endParaRPr lang="en-US" sz="1250" dirty="0"/>
+          </a:p>
+        </p:txBody>
+      </p:sp>
+      <p:sp>
+        <p:nvSpPr>
+          <p:cNvPr id="15" name="Shape 13"/>
+          <p:cNvSpPr/>
+          <p:nvPr/>
+        </p:nvSpPr>
+        <p:spPr>
+          <a:xfrm>
+            <a:off x="8763000" y="3399739"/>
+            <a:ext cx="164592" cy="0"/>
+          </a:xfrm>
+          <a:prstGeom prst="line">
+            <a:avLst/>
+          </a:prstGeom>
+          <a:noFill/>
+          <a:ln w="15240">
+            <a:solidFill>
+              <a:srgbClr val="8ABBD8"/>
+            </a:solidFill>
+            <a:prstDash val="solid"/>
+          </a:ln>
+        </p:spPr>
+      </p:sp>
+      <p:sp>
+        <p:nvSpPr>
+          <p:cNvPr id="16" name="Shape 14"/>
+          <p:cNvSpPr/>
+          <p:nvPr/>
+        </p:nvSpPr>
+        <p:spPr>
+          <a:xfrm>
+            <a:off x="7872984" y="3248863"/>
+            <a:ext cx="890016" cy="301752"/>
+          </a:xfrm>
+          <a:prstGeom prst="roundRect">
+            <a:avLst>
+              <a:gd name="adj" fmla="val 24242"/>
+            </a:avLst>
+          </a:prstGeom>
+          <a:solidFill>
+            <a:srgbClr val="0068B7"/>
+          </a:solidFill>
+          <a:ln w="12700">
+            <a:solidFill>
+              <a:srgbClr val="0068B7"/>
+            </a:solidFill>
+            <a:prstDash val="solid"/>
+          </a:ln>
+        </p:spPr>
+      </p:sp>
+      <p:sp>
+        <p:nvSpPr>
+          <p:cNvPr id="17" name="Text 15"/>
+          <p:cNvSpPr/>
+          <p:nvPr/>
+        </p:nvSpPr>
+        <p:spPr>
+          <a:xfrm>
+            <a:off x="7909560" y="3322015"/>
+            <a:ext cx="816864" cy="146304"/>
+          </a:xfrm>
+          <a:prstGeom prst="rect">
+            <a:avLst/>
+          </a:prstGeom>
+          <a:noFill/>
+          <a:ln/>
+        </p:spPr>
+        <p:txBody>
+          <a:bodyPr wrap="square" lIns="0" tIns="0" rIns="0" bIns="0" rtlCol="0" anchor="ctr">
             <a:normAutofit/>
           </a:bodyPr>
           <a:lstStyle/>
           <a:p>
-            <a:pPr indent="0" marL="0">
-              <a:buNone/>
-            </a:pPr>
-            <a:r>
-              <a:rPr lang="en-US" sz="1220" dirty="0">
-                <a:solidFill>
-                  <a:srgbClr val="17364A"/>
-                </a:solidFill>
-                <a:latin typeface="Aptos" pitchFamily="34" charset="0"/>
-                <a:ea typeface="Aptos" pitchFamily="34" charset="-122"/>
-                <a:cs typeface="Aptos" pitchFamily="34" charset="-120"/>
-              </a:rPr>
-              <a:t>RAG matters because public health agencies manage large.</a:t>
-            </a:r>
-            <a:endParaRPr lang="en-US" sz="1220" dirty="0"/>
-          </a:p>
-          <a:p>
-            <a:pPr indent="0" marL="0">
-              <a:buNone/>
-            </a:pPr>
-            <a:r>
-              <a:rPr lang="en-US" sz="1220" dirty="0">
-                <a:solidFill>
-                  <a:srgbClr val="17364A"/>
-                </a:solidFill>
-                <a:latin typeface="Aptos" pitchFamily="34" charset="0"/>
-                <a:ea typeface="Aptos" pitchFamily="34" charset="-122"/>
-                <a:cs typeface="Aptos" pitchFamily="34" charset="-120"/>
-              </a:rPr>
-              <a:t>Staff may spend substantial time searching for answers across.</a:t>
-            </a:r>
-            <a:endParaRPr lang="en-US" sz="1220" dirty="0"/>
-          </a:p>
-          <a:p>
-            <a:pPr indent="0" marL="0">
-              <a:buNone/>
-            </a:pPr>
-            <a:r>
-              <a:rPr lang="en-US" sz="1220" dirty="0">
-                <a:solidFill>
-                  <a:srgbClr val="17364A"/>
-                </a:solidFill>
-                <a:latin typeface="Aptos" pitchFamily="34" charset="0"/>
-                <a:ea typeface="Aptos" pitchFamily="34" charset="-122"/>
-                <a:cs typeface="Aptos" pitchFamily="34" charset="-120"/>
-              </a:rPr>
-              <a:t>A well-designed RAG system can help users find relevant guidance.</a:t>
-            </a:r>
-            <a:endParaRPr lang="en-US" sz="1220" dirty="0"/>
-          </a:p>
-        </p:txBody>
-      </p:sp>
-      <p:sp>
-        <p:nvSpPr>
-          <p:cNvPr id="16" name="Shape 14"/>
-          <p:cNvSpPr/>
-          <p:nvPr/>
-        </p:nvSpPr>
-        <p:spPr>
-          <a:xfrm>
-            <a:off x="7635240" y="4498848"/>
-            <a:ext cx="3474720" cy="1143000"/>
+            <a:pPr algn="ctr" indent="0" marL="0">
+              <a:buNone/>
+            </a:pPr>
+            <a:r>
+              <a:rPr lang="en-US" sz="880" b="1" dirty="0">
+                <a:solidFill>
+                  <a:srgbClr val="FFFFFF"/>
+                </a:solidFill>
+                <a:latin typeface="Aptos" pitchFamily="34" charset="0"/>
+                <a:ea typeface="Aptos" pitchFamily="34" charset="-122"/>
+                <a:cs typeface="Aptos" pitchFamily="34" charset="-120"/>
+              </a:rPr>
+              <a:t>Input</a:t>
+            </a:r>
+            <a:endParaRPr lang="en-US" sz="880" dirty="0"/>
+          </a:p>
+        </p:txBody>
+      </p:sp>
+      <p:sp>
+        <p:nvSpPr>
+          <p:cNvPr id="18" name="Shape 16"/>
+          <p:cNvSpPr/>
+          <p:nvPr/>
+        </p:nvSpPr>
+        <p:spPr>
+          <a:xfrm>
+            <a:off x="9817608" y="3399739"/>
+            <a:ext cx="164592" cy="0"/>
+          </a:xfrm>
+          <a:prstGeom prst="line">
+            <a:avLst/>
+          </a:prstGeom>
+          <a:noFill/>
+          <a:ln w="15240">
+            <a:solidFill>
+              <a:srgbClr val="8ABBD8"/>
+            </a:solidFill>
+            <a:prstDash val="solid"/>
+          </a:ln>
+        </p:spPr>
+      </p:sp>
+      <p:sp>
+        <p:nvSpPr>
+          <p:cNvPr id="19" name="Shape 17"/>
+          <p:cNvSpPr/>
+          <p:nvPr/>
+        </p:nvSpPr>
+        <p:spPr>
+          <a:xfrm>
+            <a:off x="8927592" y="3248863"/>
+            <a:ext cx="890016" cy="301752"/>
           </a:xfrm>
           <a:prstGeom prst="roundRect">
             <a:avLst>
-              <a:gd name="adj" fmla="val 9600"/>
+              <a:gd name="adj" fmla="val 24242"/>
+            </a:avLst>
+          </a:prstGeom>
+          <a:solidFill>
+            <a:srgbClr val="2F8A28"/>
+          </a:solidFill>
+          <a:ln w="12700">
+            <a:solidFill>
+              <a:srgbClr val="2F8A28"/>
+            </a:solidFill>
+            <a:prstDash val="solid"/>
+          </a:ln>
+        </p:spPr>
+      </p:sp>
+      <p:sp>
+        <p:nvSpPr>
+          <p:cNvPr id="20" name="Text 18"/>
+          <p:cNvSpPr/>
+          <p:nvPr/>
+        </p:nvSpPr>
+        <p:spPr>
+          <a:xfrm>
+            <a:off x="8964168" y="3322015"/>
+            <a:ext cx="816864" cy="146304"/>
+          </a:xfrm>
+          <a:prstGeom prst="rect">
+            <a:avLst/>
+          </a:prstGeom>
+          <a:noFill/>
+          <a:ln/>
+        </p:spPr>
+        <p:txBody>
+          <a:bodyPr wrap="square" lIns="0" tIns="0" rIns="0" bIns="0" rtlCol="0" anchor="ctr">
+            <a:normAutofit/>
+          </a:bodyPr>
+          <a:lstStyle/>
+          <a:p>
+            <a:pPr algn="ctr" indent="0" marL="0">
+              <a:buNone/>
+            </a:pPr>
+            <a:r>
+              <a:rPr lang="en-US" sz="880" b="1" dirty="0">
+                <a:solidFill>
+                  <a:srgbClr val="FFFFFF"/>
+                </a:solidFill>
+                <a:latin typeface="Aptos" pitchFamily="34" charset="0"/>
+                <a:ea typeface="Aptos" pitchFamily="34" charset="-122"/>
+                <a:cs typeface="Aptos" pitchFamily="34" charset="-120"/>
+              </a:rPr>
+              <a:t>AI assist</a:t>
+            </a:r>
+            <a:endParaRPr lang="en-US" sz="880" dirty="0"/>
+          </a:p>
+        </p:txBody>
+      </p:sp>
+      <p:sp>
+        <p:nvSpPr>
+          <p:cNvPr id="21" name="Shape 19"/>
+          <p:cNvSpPr/>
+          <p:nvPr/>
+        </p:nvSpPr>
+        <p:spPr>
+          <a:xfrm>
+            <a:off x="9982200" y="3248863"/>
+            <a:ext cx="890016" cy="301752"/>
+          </a:xfrm>
+          <a:prstGeom prst="roundRect">
+            <a:avLst>
+              <a:gd name="adj" fmla="val 24242"/>
+            </a:avLst>
+          </a:prstGeom>
+          <a:solidFill>
+            <a:srgbClr val="6A4CA3"/>
+          </a:solidFill>
+          <a:ln w="12700">
+            <a:solidFill>
+              <a:srgbClr val="6A4CA3"/>
+            </a:solidFill>
+            <a:prstDash val="solid"/>
+          </a:ln>
+        </p:spPr>
+      </p:sp>
+      <p:sp>
+        <p:nvSpPr>
+          <p:cNvPr id="22" name="Text 20"/>
+          <p:cNvSpPr/>
+          <p:nvPr/>
+        </p:nvSpPr>
+        <p:spPr>
+          <a:xfrm>
+            <a:off x="10018776" y="3322015"/>
+            <a:ext cx="816864" cy="146304"/>
+          </a:xfrm>
+          <a:prstGeom prst="rect">
+            <a:avLst/>
+          </a:prstGeom>
+          <a:noFill/>
+          <a:ln/>
+        </p:spPr>
+        <p:txBody>
+          <a:bodyPr wrap="square" lIns="0" tIns="0" rIns="0" bIns="0" rtlCol="0" anchor="ctr">
+            <a:normAutofit/>
+          </a:bodyPr>
+          <a:lstStyle/>
+          <a:p>
+            <a:pPr algn="ctr" indent="0" marL="0">
+              <a:buNone/>
+            </a:pPr>
+            <a:r>
+              <a:rPr lang="en-US" sz="880" b="1" dirty="0">
+                <a:solidFill>
+                  <a:srgbClr val="FFFFFF"/>
+                </a:solidFill>
+                <a:latin typeface="Aptos" pitchFamily="34" charset="0"/>
+                <a:ea typeface="Aptos" pitchFamily="34" charset="-122"/>
+                <a:cs typeface="Aptos" pitchFamily="34" charset="-120"/>
+              </a:rPr>
+              <a:t>Review</a:t>
+            </a:r>
+            <a:endParaRPr lang="en-US" sz="880" dirty="0"/>
+          </a:p>
+        </p:txBody>
+      </p:sp>
+      <p:sp>
+        <p:nvSpPr>
+          <p:cNvPr id="23" name="Text 21"/>
+          <p:cNvSpPr/>
+          <p:nvPr/>
+        </p:nvSpPr>
+        <p:spPr>
+          <a:xfrm>
+            <a:off x="7854696" y="3742639"/>
+            <a:ext cx="3035808" cy="158191"/>
+          </a:xfrm>
+          <a:prstGeom prst="rect">
+            <a:avLst/>
+          </a:prstGeom>
+          <a:noFill/>
+          <a:ln/>
+        </p:spPr>
+        <p:txBody>
+          <a:bodyPr wrap="square" lIns="254" tIns="254" rIns="254" bIns="254" rtlCol="0" anchor="t">
+            <a:normAutofit/>
+          </a:bodyPr>
+          <a:lstStyle/>
+          <a:p>
+            <a:pPr indent="0" marL="0">
+              <a:buNone/>
+            </a:pPr>
+            <a:r>
+              <a:rPr lang="en-US" sz="1120" dirty="0">
+                <a:solidFill>
+                  <a:srgbClr val="17364A"/>
+                </a:solidFill>
+                <a:latin typeface="Aptos" pitchFamily="34" charset="0"/>
+                <a:ea typeface="Aptos" pitchFamily="34" charset="-122"/>
+                <a:cs typeface="Aptos" pitchFamily="34" charset="-120"/>
+              </a:rPr>
+              <a:t>AI can support work, but public health judgment remains responsible for interpretation and final use.</a:t>
+            </a:r>
+            <a:endParaRPr lang="en-US" sz="1120" dirty="0"/>
+          </a:p>
+        </p:txBody>
+      </p:sp>
+      <p:sp>
+        <p:nvSpPr>
+          <p:cNvPr id="24" name="Shape 22"/>
+          <p:cNvSpPr/>
+          <p:nvPr/>
+        </p:nvSpPr>
+        <p:spPr>
+          <a:xfrm>
+            <a:off x="7635240" y="4184294"/>
+            <a:ext cx="3474720" cy="1466698"/>
+          </a:xfrm>
+          <a:prstGeom prst="roundRect">
+            <a:avLst>
+              <a:gd name="adj" fmla="val 7481"/>
             </a:avLst>
           </a:prstGeom>
           <a:solidFill>
@@ -16667,13 +17315,13 @@
       </p:sp>
       <p:sp>
         <p:nvSpPr>
-          <p:cNvPr id="17" name="Text 15"/>
-          <p:cNvSpPr/>
-          <p:nvPr/>
-        </p:nvSpPr>
-        <p:spPr>
-          <a:xfrm>
-            <a:off x="7799832" y="4645152"/>
+          <p:cNvPr id="25" name="Text 23"/>
+          <p:cNvSpPr/>
+          <p:nvPr/>
+        </p:nvSpPr>
+        <p:spPr>
+          <a:xfrm>
+            <a:off x="7799832" y="4330598"/>
             <a:ext cx="3145536" cy="256032"/>
           </a:xfrm>
           <a:prstGeom prst="rect">
@@ -16706,14 +17354,14 @@
       </p:sp>
       <p:sp>
         <p:nvSpPr>
-          <p:cNvPr id="18" name="Text 16"/>
-          <p:cNvSpPr/>
-          <p:nvPr/>
-        </p:nvSpPr>
-        <p:spPr>
-          <a:xfrm>
-            <a:off x="7799832" y="4974336"/>
-            <a:ext cx="3145536" cy="576072"/>
+          <p:cNvPr id="26" name="Text 24"/>
+          <p:cNvSpPr/>
+          <p:nvPr/>
+        </p:nvSpPr>
+        <p:spPr>
+          <a:xfrm>
+            <a:off x="7799832" y="4659782"/>
+            <a:ext cx="3145536" cy="899770"/>
           </a:xfrm>
           <a:prstGeom prst="rect">
             <a:avLst/>
@@ -16739,7 +17387,7 @@
                 <a:ea typeface="Aptos" pitchFamily="34" charset="-122"/>
                 <a:cs typeface="Aptos" pitchFamily="34" charset="-120"/>
               </a:rPr>
-              <a:t>Use the assignment to test whether you can explain the concept, apply it to a realistic public health situation, and.</a:t>
+              <a:t>Use the assignment to test whether you can explain the concept, apply it to a realistic public health situation, and identify what would need review before the work moves forward.</a:t>
             </a:r>
             <a:endParaRPr lang="en-US" sz="1320" dirty="0"/>
           </a:p>
@@ -17108,11 +17756,11 @@
         <p:spPr>
           <a:xfrm>
             <a:off x="7635240" y="1325880"/>
-            <a:ext cx="3474720" cy="1325880"/>
+            <a:ext cx="3474720" cy="1255471"/>
           </a:xfrm>
           <a:prstGeom prst="roundRect">
             <a:avLst>
-              <a:gd name="adj" fmla="val 8276"/>
+              <a:gd name="adj" fmla="val 8740"/>
             </a:avLst>
           </a:prstGeom>
           <a:solidFill>
@@ -17174,7 +17822,7 @@
         <p:spPr>
           <a:xfrm>
             <a:off x="7799832" y="1801368"/>
-            <a:ext cx="3145536" cy="758952"/>
+            <a:ext cx="3145536" cy="688543"/>
           </a:xfrm>
           <a:prstGeom prst="rect">
             <a:avLst/>
@@ -17214,12 +17862,12 @@
         </p:nvSpPr>
         <p:spPr>
           <a:xfrm>
-            <a:off x="7635240" y="2788920"/>
-            <a:ext cx="3474720" cy="1536192"/>
+            <a:off x="7635240" y="2718511"/>
+            <a:ext cx="3474720" cy="1328623"/>
           </a:xfrm>
           <a:prstGeom prst="roundRect">
             <a:avLst>
-              <a:gd name="adj" fmla="val 7143"/>
+              <a:gd name="adj" fmla="val 8259"/>
             </a:avLst>
           </a:prstGeom>
           <a:solidFill>
@@ -17241,7 +17889,7 @@
         </p:nvSpPr>
         <p:spPr>
           <a:xfrm>
-            <a:off x="7799832" y="2935224"/>
+            <a:off x="7799832" y="2864815"/>
             <a:ext cx="3145536" cy="256032"/>
           </a:xfrm>
           <a:prstGeom prst="rect">
@@ -17280,8 +17928,8 @@
         </p:nvSpPr>
         <p:spPr>
           <a:xfrm>
-            <a:off x="7818120" y="3300984"/>
-            <a:ext cx="3090672" cy="877824"/>
+            <a:off x="7818120" y="3230575"/>
+            <a:ext cx="3090672" cy="670255"/>
           </a:xfrm>
           <a:prstGeom prst="rect">
             <a:avLst/>
@@ -17355,12 +18003,12 @@
         </p:nvSpPr>
         <p:spPr>
           <a:xfrm>
-            <a:off x="7635240" y="4498848"/>
-            <a:ext cx="3474720" cy="1143000"/>
+            <a:off x="7635240" y="4184294"/>
+            <a:ext cx="3474720" cy="1466698"/>
           </a:xfrm>
           <a:prstGeom prst="roundRect">
             <a:avLst>
-              <a:gd name="adj" fmla="val 9600"/>
+              <a:gd name="adj" fmla="val 7481"/>
             </a:avLst>
           </a:prstGeom>
           <a:solidFill>
@@ -17382,7 +18030,7 @@
         </p:nvSpPr>
         <p:spPr>
           <a:xfrm>
-            <a:off x="7799832" y="4645152"/>
+            <a:off x="7799832" y="4330598"/>
             <a:ext cx="3145536" cy="256032"/>
           </a:xfrm>
           <a:prstGeom prst="rect">
@@ -17421,8 +18069,8 @@
         </p:nvSpPr>
         <p:spPr>
           <a:xfrm>
-            <a:off x="7799832" y="4974336"/>
-            <a:ext cx="3145536" cy="576072"/>
+            <a:off x="7799832" y="4659782"/>
+            <a:ext cx="3145536" cy="899770"/>
           </a:xfrm>
           <a:prstGeom prst="rect">
             <a:avLst/>
@@ -17448,7 +18096,7 @@
                 <a:ea typeface="Aptos" pitchFamily="34" charset="-122"/>
                 <a:cs typeface="Aptos" pitchFamily="34" charset="-120"/>
               </a:rPr>
-              <a:t>Use the assignment to test whether you can explain the concept, apply it to a realistic public health situation, and.</a:t>
+              <a:t>Use the assignment to test whether you can explain the concept, apply it to a realistic public health situation, and identify what would need review before the work moves forward.</a:t>
             </a:r>
             <a:endParaRPr lang="en-US" sz="1320" dirty="0"/>
           </a:p>

--- a/downloads/presentations/modules/arc-300.pptx
+++ b/downloads/presentations/modules/arc-300.pptx
@@ -3343,8 +3343,8 @@
         </p:nvSpPr>
         <p:spPr>
           <a:xfrm>
-            <a:off x="868680" y="1508760"/>
-            <a:ext cx="6309360" cy="4160520"/>
+            <a:off x="822960" y="1463040"/>
+            <a:ext cx="6565392" cy="4343400"/>
           </a:xfrm>
           <a:prstGeom prst="rect">
             <a:avLst/>
@@ -3362,7 +3362,7 @@
               <a:buNone/>
             </a:pPr>
             <a:r>
-              <a:rPr lang="en-US" sz="2100" dirty="0">
+              <a:rPr lang="en-US" sz="1920" dirty="0">
                 <a:solidFill>
                   <a:srgbClr val="003A63"/>
                 </a:solidFill>
@@ -3372,14 +3372,14 @@
               </a:rPr>
               <a:t>• A RAG system begins with content selection.</a:t>
             </a:r>
-            <a:endParaRPr lang="en-US" sz="2100" dirty="0"/>
-          </a:p>
-          <a:p>
-            <a:pPr indent="0" marL="0">
-              <a:buNone/>
-            </a:pPr>
-            <a:r>
-              <a:rPr lang="en-US" sz="2100" dirty="0">
+            <a:endParaRPr lang="en-US" sz="1920" dirty="0"/>
+          </a:p>
+          <a:p>
+            <a:pPr indent="0" marL="0">
+              <a:buNone/>
+            </a:pPr>
+            <a:r>
+              <a:rPr lang="en-US" sz="1920" dirty="0">
                 <a:solidFill>
                   <a:srgbClr val="003A63"/>
                 </a:solidFill>
@@ -3387,16 +3387,16 @@
                 <a:ea typeface="Aptos" pitchFamily="34" charset="-122"/>
                 <a:cs typeface="Aptos" pitchFamily="34" charset="-120"/>
               </a:rPr>
-              <a:t>• Agencies should decide which documents are authoritative, current, approved for the use case,.</a:t>
-            </a:r>
-            <a:endParaRPr lang="en-US" sz="2100" dirty="0"/>
-          </a:p>
-          <a:p>
-            <a:pPr indent="0" marL="0">
-              <a:buNone/>
-            </a:pPr>
-            <a:r>
-              <a:rPr lang="en-US" sz="2100" dirty="0">
+              <a:t>• Agencies should decide which documents are authoritative, current, approved.</a:t>
+            </a:r>
+            <a:endParaRPr lang="en-US" sz="1920" dirty="0"/>
+          </a:p>
+          <a:p>
+            <a:pPr indent="0" marL="0">
+              <a:buNone/>
+            </a:pPr>
+            <a:r>
+              <a:rPr lang="en-US" sz="1920" dirty="0">
                 <a:solidFill>
                   <a:srgbClr val="003A63"/>
                 </a:solidFill>
@@ -3404,9 +3404,9 @@
                 <a:ea typeface="Aptos" pitchFamily="34" charset="-122"/>
                 <a:cs typeface="Aptos" pitchFamily="34" charset="-120"/>
               </a:rPr>
-              <a:t>• Content inventories should include owner, version, effective date, review date, sensitivity.</a:t>
-            </a:r>
-            <a:endParaRPr lang="en-US" sz="2100" dirty="0"/>
+              <a:t>• Content inventories should include owner, version, effective date, review.</a:t>
+            </a:r>
+            <a:endParaRPr lang="en-US" sz="1920" dirty="0"/>
           </a:p>
         </p:txBody>
       </p:sp>
@@ -3418,12 +3418,12 @@
         </p:nvSpPr>
         <p:spPr>
           <a:xfrm>
-            <a:off x="7635240" y="1325880"/>
-            <a:ext cx="3474720" cy="1207008"/>
+            <a:off x="7543800" y="1325880"/>
+            <a:ext cx="3611880" cy="1261872"/>
           </a:xfrm>
           <a:prstGeom prst="roundRect">
             <a:avLst>
-              <a:gd name="adj" fmla="val 9091"/>
+              <a:gd name="adj" fmla="val 8696"/>
             </a:avLst>
           </a:prstGeom>
           <a:solidFill>
@@ -3445,8 +3445,8 @@
         </p:nvSpPr>
         <p:spPr>
           <a:xfrm>
-            <a:off x="7799832" y="1472184"/>
-            <a:ext cx="3145536" cy="256032"/>
+            <a:off x="7708392" y="1453896"/>
+            <a:ext cx="3282696" cy="228600"/>
           </a:xfrm>
           <a:prstGeom prst="rect">
             <a:avLst/>
@@ -3462,7 +3462,7 @@
               <a:buNone/>
             </a:pPr>
             <a:r>
-              <a:rPr lang="en-US" sz="1300" b="1" dirty="0">
+              <a:rPr lang="en-US" sz="1220" b="1" dirty="0">
                 <a:solidFill>
                   <a:srgbClr val="0068B7"/>
                 </a:solidFill>
@@ -3472,7 +3472,7 @@
               </a:rPr>
               <a:t>Practice focus</a:t>
             </a:r>
-            <a:endParaRPr lang="en-US" sz="1300" dirty="0"/>
+            <a:endParaRPr lang="en-US" sz="1220" dirty="0"/>
           </a:p>
         </p:txBody>
       </p:sp>
@@ -3484,8 +3484,8 @@
         </p:nvSpPr>
         <p:spPr>
           <a:xfrm>
-            <a:off x="7799832" y="1801368"/>
-            <a:ext cx="3145536" cy="640080"/>
+            <a:off x="7708392" y="1764792"/>
+            <a:ext cx="3282696" cy="749808"/>
           </a:xfrm>
           <a:prstGeom prst="rect">
             <a:avLst/>
@@ -3503,7 +3503,7 @@
               <a:buNone/>
             </a:pPr>
             <a:r>
-              <a:rPr lang="en-US" sz="1320" dirty="0">
+              <a:rPr lang="en-US" sz="1220" dirty="0">
                 <a:solidFill>
                   <a:srgbClr val="17364A"/>
                 </a:solidFill>
@@ -3513,7 +3513,7 @@
               </a:rPr>
               <a:t>A RAG system begins with content selection.</a:t>
             </a:r>
-            <a:endParaRPr lang="en-US" sz="1320" dirty="0"/>
+            <a:endParaRPr lang="en-US" sz="1220" dirty="0"/>
           </a:p>
         </p:txBody>
       </p:sp>
@@ -3525,12 +3525,12 @@
         </p:nvSpPr>
         <p:spPr>
           <a:xfrm>
-            <a:off x="7635240" y="2670048"/>
-            <a:ext cx="3474720" cy="1377086"/>
+            <a:off x="7543800" y="2724912"/>
+            <a:ext cx="3611880" cy="1527048"/>
           </a:xfrm>
           <a:prstGeom prst="roundRect">
             <a:avLst>
-              <a:gd name="adj" fmla="val 7968"/>
+              <a:gd name="adj" fmla="val 7186"/>
             </a:avLst>
           </a:prstGeom>
           <a:solidFill>
@@ -3552,24 +3552,26 @@
         </p:nvSpPr>
         <p:spPr>
           <a:xfrm>
-            <a:off x="7799832" y="2798064"/>
-            <a:ext cx="3145536" cy="237744"/>
-          </a:xfrm>
-          <a:prstGeom prst="rect">
-            <a:avLst/>
-          </a:prstGeom>
-          <a:noFill/>
-          <a:ln/>
-        </p:spPr>
-        <p:txBody>
-          <a:bodyPr wrap="square" lIns="0" tIns="0" rIns="0" bIns="0" rtlCol="0" anchor="ctr"/>
-          <a:lstStyle/>
-          <a:p>
-            <a:pPr indent="0" marL="0">
-              <a:buNone/>
-            </a:pPr>
-            <a:r>
-              <a:rPr lang="en-US" sz="1250" b="1" dirty="0">
+            <a:off x="7708392" y="2852928"/>
+            <a:ext cx="3282696" cy="219456"/>
+          </a:xfrm>
+          <a:prstGeom prst="rect">
+            <a:avLst/>
+          </a:prstGeom>
+          <a:noFill/>
+          <a:ln/>
+        </p:spPr>
+        <p:txBody>
+          <a:bodyPr wrap="square" lIns="0" tIns="0" rIns="0" bIns="0" rtlCol="0" anchor="ctr">
+            <a:normAutofit/>
+          </a:bodyPr>
+          <a:lstStyle/>
+          <a:p>
+            <a:pPr indent="0" marL="0">
+              <a:buNone/>
+            </a:pPr>
+            <a:r>
+              <a:rPr lang="en-US" sz="1160" b="1" dirty="0">
                 <a:solidFill>
                   <a:srgbClr val="0068B7"/>
                 </a:solidFill>
@@ -3579,7 +3581,7 @@
               </a:rPr>
               <a:t>Human-in-the-loop use</a:t>
             </a:r>
-            <a:endParaRPr lang="en-US" sz="1250" dirty="0"/>
+            <a:endParaRPr lang="en-US" sz="1160" dirty="0"/>
           </a:p>
         </p:txBody>
       </p:sp>
@@ -3591,7 +3593,7 @@
         </p:nvSpPr>
         <p:spPr>
           <a:xfrm>
-            <a:off x="8763000" y="3351276"/>
+            <a:off x="8717280" y="3406140"/>
             <a:ext cx="164592" cy="0"/>
           </a:xfrm>
           <a:prstGeom prst="line">
@@ -3614,8 +3616,8 @@
         </p:nvSpPr>
         <p:spPr>
           <a:xfrm>
-            <a:off x="7872984" y="3200400"/>
-            <a:ext cx="890016" cy="301752"/>
+            <a:off x="7781544" y="3255264"/>
+            <a:ext cx="935736" cy="301752"/>
           </a:xfrm>
           <a:prstGeom prst="roundRect">
             <a:avLst>
@@ -3641,8 +3643,8 @@
         </p:nvSpPr>
         <p:spPr>
           <a:xfrm>
-            <a:off x="7909560" y="3273552"/>
-            <a:ext cx="816864" cy="146304"/>
+            <a:off x="7818120" y="3328416"/>
+            <a:ext cx="862584" cy="146304"/>
           </a:xfrm>
           <a:prstGeom prst="rect">
             <a:avLst/>
@@ -3682,7 +3684,7 @@
         </p:nvSpPr>
         <p:spPr>
           <a:xfrm>
-            <a:off x="9817608" y="3351276"/>
+            <a:off x="9817608" y="3406140"/>
             <a:ext cx="164592" cy="0"/>
           </a:xfrm>
           <a:prstGeom prst="line">
@@ -3705,8 +3707,8 @@
         </p:nvSpPr>
         <p:spPr>
           <a:xfrm>
-            <a:off x="8927592" y="3200400"/>
-            <a:ext cx="890016" cy="301752"/>
+            <a:off x="8881872" y="3255264"/>
+            <a:ext cx="935736" cy="301752"/>
           </a:xfrm>
           <a:prstGeom prst="roundRect">
             <a:avLst>
@@ -3732,8 +3734,8 @@
         </p:nvSpPr>
         <p:spPr>
           <a:xfrm>
-            <a:off x="8964168" y="3273552"/>
-            <a:ext cx="816864" cy="146304"/>
+            <a:off x="8918448" y="3328416"/>
+            <a:ext cx="862584" cy="146304"/>
           </a:xfrm>
           <a:prstGeom prst="rect">
             <a:avLst/>
@@ -3773,8 +3775,8 @@
         </p:nvSpPr>
         <p:spPr>
           <a:xfrm>
-            <a:off x="9982200" y="3200400"/>
-            <a:ext cx="890016" cy="301752"/>
+            <a:off x="9982200" y="3255264"/>
+            <a:ext cx="935736" cy="301752"/>
           </a:xfrm>
           <a:prstGeom prst="roundRect">
             <a:avLst>
@@ -3800,8 +3802,8 @@
         </p:nvSpPr>
         <p:spPr>
           <a:xfrm>
-            <a:off x="10018776" y="3273552"/>
-            <a:ext cx="816864" cy="146304"/>
+            <a:off x="10018776" y="3328416"/>
+            <a:ext cx="862584" cy="146304"/>
           </a:xfrm>
           <a:prstGeom prst="rect">
             <a:avLst/>
@@ -3841,8 +3843,8 @@
         </p:nvSpPr>
         <p:spPr>
           <a:xfrm>
-            <a:off x="7854696" y="3694176"/>
-            <a:ext cx="3035808" cy="206654"/>
+            <a:off x="7763256" y="3749040"/>
+            <a:ext cx="3172968" cy="356616"/>
           </a:xfrm>
           <a:prstGeom prst="rect">
             <a:avLst/>
@@ -3860,7 +3862,7 @@
               <a:buNone/>
             </a:pPr>
             <a:r>
-              <a:rPr lang="en-US" sz="1120" dirty="0">
+              <a:rPr lang="en-US" sz="1040" dirty="0">
                 <a:solidFill>
                   <a:srgbClr val="17364A"/>
                 </a:solidFill>
@@ -3868,9 +3870,9 @@
                 <a:ea typeface="Aptos" pitchFamily="34" charset="-122"/>
                 <a:cs typeface="Aptos" pitchFamily="34" charset="-120"/>
               </a:rPr>
-              <a:t>AI can support work, but public health judgment remains responsible for interpretation and final use.</a:t>
-            </a:r>
-            <a:endParaRPr lang="en-US" sz="1120" dirty="0"/>
+              <a:t>AI can support work, but public health judgment remains responsible.</a:t>
+            </a:r>
+            <a:endParaRPr lang="en-US" sz="1040" dirty="0"/>
           </a:p>
         </p:txBody>
       </p:sp>
@@ -3882,12 +3884,12 @@
         </p:nvSpPr>
         <p:spPr>
           <a:xfrm>
-            <a:off x="7635240" y="4184294"/>
-            <a:ext cx="3474720" cy="1466698"/>
+            <a:off x="7543800" y="4389120"/>
+            <a:ext cx="3611880" cy="1261872"/>
           </a:xfrm>
           <a:prstGeom prst="roundRect">
             <a:avLst>
-              <a:gd name="adj" fmla="val 7481"/>
+              <a:gd name="adj" fmla="val 8696"/>
             </a:avLst>
           </a:prstGeom>
           <a:solidFill>
@@ -3909,8 +3911,8 @@
         </p:nvSpPr>
         <p:spPr>
           <a:xfrm>
-            <a:off x="7799832" y="4330598"/>
-            <a:ext cx="3145536" cy="256032"/>
+            <a:off x="7708392" y="4517136"/>
+            <a:ext cx="3282696" cy="228600"/>
           </a:xfrm>
           <a:prstGeom prst="rect">
             <a:avLst/>
@@ -3926,7 +3928,7 @@
               <a:buNone/>
             </a:pPr>
             <a:r>
-              <a:rPr lang="en-US" sz="1300" b="1" dirty="0">
+              <a:rPr lang="en-US" sz="1220" b="1" dirty="0">
                 <a:solidFill>
                   <a:srgbClr val="0068B7"/>
                 </a:solidFill>
@@ -3936,7 +3938,7 @@
               </a:rPr>
               <a:t>What to produce</a:t>
             </a:r>
-            <a:endParaRPr lang="en-US" sz="1300" dirty="0"/>
+            <a:endParaRPr lang="en-US" sz="1220" dirty="0"/>
           </a:p>
         </p:txBody>
       </p:sp>
@@ -3948,8 +3950,8 @@
         </p:nvSpPr>
         <p:spPr>
           <a:xfrm>
-            <a:off x="7799832" y="4659782"/>
-            <a:ext cx="3145536" cy="899770"/>
+            <a:off x="7708392" y="4828032"/>
+            <a:ext cx="3282696" cy="749808"/>
           </a:xfrm>
           <a:prstGeom prst="rect">
             <a:avLst/>
@@ -3967,7 +3969,7 @@
               <a:buNone/>
             </a:pPr>
             <a:r>
-              <a:rPr lang="en-US" sz="1320" dirty="0">
+              <a:rPr lang="en-US" sz="1220" dirty="0">
                 <a:solidFill>
                   <a:srgbClr val="17364A"/>
                 </a:solidFill>
@@ -3975,9 +3977,9 @@
                 <a:ea typeface="Aptos" pitchFamily="34" charset="-122"/>
                 <a:cs typeface="Aptos" pitchFamily="34" charset="-120"/>
               </a:rPr>
-              <a:t>Use the assignment to test whether you can explain the concept, apply it to a realistic public health situation, and identify what would need review before the work moves forward.</a:t>
-            </a:r>
-            <a:endParaRPr lang="en-US" sz="1320" dirty="0"/>
+              <a:t>Use the assignment to test whether you can explain the concept, apply it to a.</a:t>
+            </a:r>
+            <a:endParaRPr lang="en-US" sz="1220" dirty="0"/>
           </a:p>
         </p:txBody>
       </p:sp>
@@ -4268,8 +4270,8 @@
         </p:nvSpPr>
         <p:spPr>
           <a:xfrm>
-            <a:off x="868680" y="1508760"/>
-            <a:ext cx="6309360" cy="4160520"/>
+            <a:off x="822960" y="1463040"/>
+            <a:ext cx="6565392" cy="4343400"/>
           </a:xfrm>
           <a:prstGeom prst="rect">
             <a:avLst/>
@@ -4287,7 +4289,7 @@
               <a:buNone/>
             </a:pPr>
             <a:r>
-              <a:rPr lang="en-US" sz="2100" dirty="0">
+              <a:rPr lang="en-US" sz="1920" dirty="0">
                 <a:solidFill>
                   <a:srgbClr val="003A63"/>
                 </a:solidFill>
@@ -4297,14 +4299,14 @@
               </a:rPr>
               <a:t>• Generation should be constrained by retrieved material.</a:t>
             </a:r>
-            <a:endParaRPr lang="en-US" sz="2100" dirty="0"/>
-          </a:p>
-          <a:p>
-            <a:pPr indent="0" marL="0">
-              <a:buNone/>
-            </a:pPr>
-            <a:r>
-              <a:rPr lang="en-US" sz="2100" dirty="0">
+            <a:endParaRPr lang="en-US" sz="1920" dirty="0"/>
+          </a:p>
+          <a:p>
+            <a:pPr indent="0" marL="0">
+              <a:buNone/>
+            </a:pPr>
+            <a:r>
+              <a:rPr lang="en-US" sz="1920" dirty="0">
                 <a:solidFill>
                   <a:srgbClr val="003A63"/>
                 </a:solidFill>
@@ -4312,16 +4314,16 @@
                 <a:ea typeface="Aptos" pitchFamily="34" charset="-122"/>
                 <a:cs typeface="Aptos" pitchFamily="34" charset="-120"/>
               </a:rPr>
-              <a:t>• The system should be instructed to answer from sources, cite them, identify uncertainty, and.</a:t>
-            </a:r>
-            <a:endParaRPr lang="en-US" sz="2100" dirty="0"/>
-          </a:p>
-          <a:p>
-            <a:pPr indent="0" marL="0">
-              <a:buNone/>
-            </a:pPr>
-            <a:r>
-              <a:rPr lang="en-US" sz="2100" dirty="0">
+              <a:t>• The system should be instructed to answer from sources, cite them, identify.</a:t>
+            </a:r>
+            <a:endParaRPr lang="en-US" sz="1920" dirty="0"/>
+          </a:p>
+          <a:p>
+            <a:pPr indent="0" marL="0">
+              <a:buNone/>
+            </a:pPr>
+            <a:r>
+              <a:rPr lang="en-US" sz="1920" dirty="0">
                 <a:solidFill>
                   <a:srgbClr val="003A63"/>
                 </a:solidFill>
@@ -4329,9 +4331,9 @@
                 <a:ea typeface="Aptos" pitchFamily="34" charset="-122"/>
                 <a:cs typeface="Aptos" pitchFamily="34" charset="-120"/>
               </a:rPr>
-              <a:t>• It should also explain when guidance conflicts or when source material is insufficient.</a:t>
-            </a:r>
-            <a:endParaRPr lang="en-US" sz="2100" dirty="0"/>
+              <a:t>• It should also explain when guidance conflicts or when source material is.</a:t>
+            </a:r>
+            <a:endParaRPr lang="en-US" sz="1920" dirty="0"/>
           </a:p>
         </p:txBody>
       </p:sp>
@@ -4343,12 +4345,12 @@
         </p:nvSpPr>
         <p:spPr>
           <a:xfrm>
-            <a:off x="7635240" y="1325880"/>
-            <a:ext cx="3474720" cy="1207008"/>
+            <a:off x="7543800" y="1325880"/>
+            <a:ext cx="3611880" cy="1261872"/>
           </a:xfrm>
           <a:prstGeom prst="roundRect">
             <a:avLst>
-              <a:gd name="adj" fmla="val 9091"/>
+              <a:gd name="adj" fmla="val 8696"/>
             </a:avLst>
           </a:prstGeom>
           <a:solidFill>
@@ -4370,8 +4372,8 @@
         </p:nvSpPr>
         <p:spPr>
           <a:xfrm>
-            <a:off x="7799832" y="1472184"/>
-            <a:ext cx="3145536" cy="256032"/>
+            <a:off x="7708392" y="1453896"/>
+            <a:ext cx="3282696" cy="228600"/>
           </a:xfrm>
           <a:prstGeom prst="rect">
             <a:avLst/>
@@ -4387,7 +4389,7 @@
               <a:buNone/>
             </a:pPr>
             <a:r>
-              <a:rPr lang="en-US" sz="1300" b="1" dirty="0">
+              <a:rPr lang="en-US" sz="1220" b="1" dirty="0">
                 <a:solidFill>
                   <a:srgbClr val="0068B7"/>
                 </a:solidFill>
@@ -4397,7 +4399,7 @@
               </a:rPr>
               <a:t>Practice focus</a:t>
             </a:r>
-            <a:endParaRPr lang="en-US" sz="1300" dirty="0"/>
+            <a:endParaRPr lang="en-US" sz="1220" dirty="0"/>
           </a:p>
         </p:txBody>
       </p:sp>
@@ -4409,8 +4411,8 @@
         </p:nvSpPr>
         <p:spPr>
           <a:xfrm>
-            <a:off x="7799832" y="1801368"/>
-            <a:ext cx="3145536" cy="640080"/>
+            <a:off x="7708392" y="1764792"/>
+            <a:ext cx="3282696" cy="749808"/>
           </a:xfrm>
           <a:prstGeom prst="rect">
             <a:avLst/>
@@ -4428,7 +4430,7 @@
               <a:buNone/>
             </a:pPr>
             <a:r>
-              <a:rPr lang="en-US" sz="1320" dirty="0">
+              <a:rPr lang="en-US" sz="1220" dirty="0">
                 <a:solidFill>
                   <a:srgbClr val="17364A"/>
                 </a:solidFill>
@@ -4438,7 +4440,7 @@
               </a:rPr>
               <a:t>Generation should be constrained by retrieved material.</a:t>
             </a:r>
-            <a:endParaRPr lang="en-US" sz="1320" dirty="0"/>
+            <a:endParaRPr lang="en-US" sz="1220" dirty="0"/>
           </a:p>
         </p:txBody>
       </p:sp>
@@ -4450,12 +4452,12 @@
         </p:nvSpPr>
         <p:spPr>
           <a:xfrm>
-            <a:off x="7635240" y="2670048"/>
-            <a:ext cx="3474720" cy="1377086"/>
+            <a:off x="7543800" y="2724912"/>
+            <a:ext cx="3611880" cy="1527048"/>
           </a:xfrm>
           <a:prstGeom prst="roundRect">
             <a:avLst>
-              <a:gd name="adj" fmla="val 7968"/>
+              <a:gd name="adj" fmla="val 7186"/>
             </a:avLst>
           </a:prstGeom>
           <a:solidFill>
@@ -4477,8 +4479,8 @@
         </p:nvSpPr>
         <p:spPr>
           <a:xfrm>
-            <a:off x="7799832" y="2816352"/>
-            <a:ext cx="3145536" cy="256032"/>
+            <a:off x="7708392" y="2852928"/>
+            <a:ext cx="3282696" cy="228600"/>
           </a:xfrm>
           <a:prstGeom prst="rect">
             <a:avLst/>
@@ -4494,7 +4496,7 @@
               <a:buNone/>
             </a:pPr>
             <a:r>
-              <a:rPr lang="en-US" sz="1300" b="1" dirty="0">
+              <a:rPr lang="en-US" sz="1220" b="1" dirty="0">
                 <a:solidFill>
                   <a:srgbClr val="0068B7"/>
                 </a:solidFill>
@@ -4504,7 +4506,7 @@
               </a:rPr>
               <a:t>Concept checkpoints</a:t>
             </a:r>
-            <a:endParaRPr lang="en-US" sz="1300" dirty="0"/>
+            <a:endParaRPr lang="en-US" sz="1220" dirty="0"/>
           </a:p>
         </p:txBody>
       </p:sp>
@@ -4516,8 +4518,8 @@
         </p:nvSpPr>
         <p:spPr>
           <a:xfrm>
-            <a:off x="7818120" y="3182112"/>
-            <a:ext cx="3090672" cy="718718"/>
+            <a:off x="7726680" y="3182112"/>
+            <a:ext cx="3227832" cy="960120"/>
           </a:xfrm>
           <a:prstGeom prst="rect">
             <a:avLst/>
@@ -4535,7 +4537,7 @@
               <a:buNone/>
             </a:pPr>
             <a:r>
-              <a:rPr lang="en-US" sz="1220" dirty="0">
+              <a:rPr lang="en-US" sz="1140" dirty="0">
                 <a:solidFill>
                   <a:srgbClr val="17364A"/>
                 </a:solidFill>
@@ -4543,16 +4545,16 @@
                 <a:ea typeface="Aptos" pitchFamily="34" charset="-122"/>
                 <a:cs typeface="Aptos" pitchFamily="34" charset="-120"/>
               </a:rPr>
-              <a:t>The system should be instructed to answer from sources, cite them,.</a:t>
-            </a:r>
-            <a:endParaRPr lang="en-US" sz="1220" dirty="0"/>
-          </a:p>
-          <a:p>
-            <a:pPr indent="0" marL="0">
-              <a:buNone/>
-            </a:pPr>
-            <a:r>
-              <a:rPr lang="en-US" sz="1220" dirty="0">
+              <a:t>The system should be instructed to answer from.</a:t>
+            </a:r>
+            <a:endParaRPr lang="en-US" sz="1140" dirty="0"/>
+          </a:p>
+          <a:p>
+            <a:pPr indent="0" marL="0">
+              <a:buNone/>
+            </a:pPr>
+            <a:r>
+              <a:rPr lang="en-US" sz="1140" dirty="0">
                 <a:solidFill>
                   <a:srgbClr val="17364A"/>
                 </a:solidFill>
@@ -4560,16 +4562,16 @@
                 <a:ea typeface="Aptos" pitchFamily="34" charset="-122"/>
                 <a:cs typeface="Aptos" pitchFamily="34" charset="-120"/>
               </a:rPr>
-              <a:t>Users should be able to open the cited source and verify key.</a:t>
-            </a:r>
-            <a:endParaRPr lang="en-US" sz="1220" dirty="0"/>
-          </a:p>
-          <a:p>
-            <a:pPr indent="0" marL="0">
-              <a:buNone/>
-            </a:pPr>
-            <a:r>
-              <a:rPr lang="en-US" sz="1220" dirty="0">
+              <a:t>Users should be able to open the cited source and.</a:t>
+            </a:r>
+            <a:endParaRPr lang="en-US" sz="1140" dirty="0"/>
+          </a:p>
+          <a:p>
+            <a:pPr indent="0" marL="0">
+              <a:buNone/>
+            </a:pPr>
+            <a:r>
+              <a:rPr lang="en-US" sz="1140" dirty="0">
                 <a:solidFill>
                   <a:srgbClr val="17364A"/>
                 </a:solidFill>
@@ -4577,9 +4579,9 @@
                 <a:ea typeface="Aptos" pitchFamily="34" charset="-122"/>
                 <a:cs typeface="Aptos" pitchFamily="34" charset="-120"/>
               </a:rPr>
-              <a:t>Monitoring should include retrieval failures, unsupported answers,.</a:t>
-            </a:r>
-            <a:endParaRPr lang="en-US" sz="1220" dirty="0"/>
+              <a:t>Monitoring should include retrieval failures,.</a:t>
+            </a:r>
+            <a:endParaRPr lang="en-US" sz="1140" dirty="0"/>
           </a:p>
         </p:txBody>
       </p:sp>
@@ -4591,12 +4593,12 @@
         </p:nvSpPr>
         <p:spPr>
           <a:xfrm>
-            <a:off x="7635240" y="4184294"/>
-            <a:ext cx="3474720" cy="1466698"/>
+            <a:off x="7543800" y="4389120"/>
+            <a:ext cx="3611880" cy="1261872"/>
           </a:xfrm>
           <a:prstGeom prst="roundRect">
             <a:avLst>
-              <a:gd name="adj" fmla="val 7481"/>
+              <a:gd name="adj" fmla="val 8696"/>
             </a:avLst>
           </a:prstGeom>
           <a:solidFill>
@@ -4618,8 +4620,8 @@
         </p:nvSpPr>
         <p:spPr>
           <a:xfrm>
-            <a:off x="7799832" y="4330598"/>
-            <a:ext cx="3145536" cy="256032"/>
+            <a:off x="7708392" y="4517136"/>
+            <a:ext cx="3282696" cy="228600"/>
           </a:xfrm>
           <a:prstGeom prst="rect">
             <a:avLst/>
@@ -4635,7 +4637,7 @@
               <a:buNone/>
             </a:pPr>
             <a:r>
-              <a:rPr lang="en-US" sz="1300" b="1" dirty="0">
+              <a:rPr lang="en-US" sz="1220" b="1" dirty="0">
                 <a:solidFill>
                   <a:srgbClr val="0068B7"/>
                 </a:solidFill>
@@ -4645,7 +4647,7 @@
               </a:rPr>
               <a:t>What to produce</a:t>
             </a:r>
-            <a:endParaRPr lang="en-US" sz="1300" dirty="0"/>
+            <a:endParaRPr lang="en-US" sz="1220" dirty="0"/>
           </a:p>
         </p:txBody>
       </p:sp>
@@ -4657,8 +4659,8 @@
         </p:nvSpPr>
         <p:spPr>
           <a:xfrm>
-            <a:off x="7799832" y="4659782"/>
-            <a:ext cx="3145536" cy="899770"/>
+            <a:off x="7708392" y="4828032"/>
+            <a:ext cx="3282696" cy="749808"/>
           </a:xfrm>
           <a:prstGeom prst="rect">
             <a:avLst/>
@@ -4676,7 +4678,7 @@
               <a:buNone/>
             </a:pPr>
             <a:r>
-              <a:rPr lang="en-US" sz="1320" dirty="0">
+              <a:rPr lang="en-US" sz="1220" dirty="0">
                 <a:solidFill>
                   <a:srgbClr val="17364A"/>
                 </a:solidFill>
@@ -4684,9 +4686,9 @@
                 <a:ea typeface="Aptos" pitchFamily="34" charset="-122"/>
                 <a:cs typeface="Aptos" pitchFamily="34" charset="-120"/>
               </a:rPr>
-              <a:t>Use the assignment to test whether you can explain the concept, apply it to a realistic public health situation, and identify what would need review before the work moves forward.</a:t>
-            </a:r>
-            <a:endParaRPr lang="en-US" sz="1320" dirty="0"/>
+              <a:t>Use the assignment to test whether you can explain the concept, apply it to a.</a:t>
+            </a:r>
+            <a:endParaRPr lang="en-US" sz="1220" dirty="0"/>
           </a:p>
         </p:txBody>
       </p:sp>
@@ -4977,8 +4979,8 @@
         </p:nvSpPr>
         <p:spPr>
           <a:xfrm>
-            <a:off x="868680" y="1508760"/>
-            <a:ext cx="6309360" cy="4160520"/>
+            <a:off x="822960" y="1463040"/>
+            <a:ext cx="6565392" cy="4343400"/>
           </a:xfrm>
           <a:prstGeom prst="rect">
             <a:avLst/>
@@ -4996,7 +4998,7 @@
               <a:buNone/>
             </a:pPr>
             <a:r>
-              <a:rPr lang="en-US" sz="2100" dirty="0">
+              <a:rPr lang="en-US" sz="1920" dirty="0">
                 <a:solidFill>
                   <a:srgbClr val="003A63"/>
                 </a:solidFill>
@@ -5006,14 +5008,14 @@
               </a:rPr>
               <a:t>• Stale or conflicting content.</a:t>
             </a:r>
-            <a:endParaRPr lang="en-US" sz="2100" dirty="0"/>
-          </a:p>
-          <a:p>
-            <a:pPr indent="0" marL="0">
-              <a:buNone/>
-            </a:pPr>
-            <a:r>
-              <a:rPr lang="en-US" sz="2100" dirty="0">
+            <a:endParaRPr lang="en-US" sz="1920" dirty="0"/>
+          </a:p>
+          <a:p>
+            <a:pPr indent="0" marL="0">
+              <a:buNone/>
+            </a:pPr>
+            <a:r>
+              <a:rPr lang="en-US" sz="1920" dirty="0">
                 <a:solidFill>
                   <a:srgbClr val="003A63"/>
                 </a:solidFill>
@@ -5023,14 +5025,14 @@
               </a:rPr>
               <a:t>• Outdated or inconsistent documents can produce wrong answers.</a:t>
             </a:r>
-            <a:endParaRPr lang="en-US" sz="2100" dirty="0"/>
-          </a:p>
-          <a:p>
-            <a:pPr indent="0" marL="0">
-              <a:buNone/>
-            </a:pPr>
-            <a:r>
-              <a:rPr lang="en-US" sz="2100" dirty="0">
+            <a:endParaRPr lang="en-US" sz="1920" dirty="0"/>
+          </a:p>
+          <a:p>
+            <a:pPr indent="0" marL="0">
+              <a:buNone/>
+            </a:pPr>
+            <a:r>
+              <a:rPr lang="en-US" sz="1920" dirty="0">
                 <a:solidFill>
                   <a:srgbClr val="003A63"/>
                 </a:solidFill>
@@ -5038,9 +5040,9 @@
                 <a:ea typeface="Aptos" pitchFamily="34" charset="-122"/>
                 <a:cs typeface="Aptos" pitchFamily="34" charset="-120"/>
               </a:rPr>
-              <a:t>• Guardrails include content ownership, version control, review dates, and archival rules.</a:t>
-            </a:r>
-            <a:endParaRPr lang="en-US" sz="2100" dirty="0"/>
+              <a:t>• Guardrails include content ownership, version control, review dates, and.</a:t>
+            </a:r>
+            <a:endParaRPr lang="en-US" sz="1920" dirty="0"/>
           </a:p>
         </p:txBody>
       </p:sp>
@@ -5052,12 +5054,12 @@
         </p:nvSpPr>
         <p:spPr>
           <a:xfrm>
-            <a:off x="7635240" y="1325880"/>
-            <a:ext cx="3474720" cy="1207008"/>
+            <a:off x="7543800" y="1325880"/>
+            <a:ext cx="3611880" cy="1261872"/>
           </a:xfrm>
           <a:prstGeom prst="roundRect">
             <a:avLst>
-              <a:gd name="adj" fmla="val 9091"/>
+              <a:gd name="adj" fmla="val 8696"/>
             </a:avLst>
           </a:prstGeom>
           <a:solidFill>
@@ -5079,8 +5081,8 @@
         </p:nvSpPr>
         <p:spPr>
           <a:xfrm>
-            <a:off x="7799832" y="1472184"/>
-            <a:ext cx="3145536" cy="256032"/>
+            <a:off x="7708392" y="1453896"/>
+            <a:ext cx="3282696" cy="228600"/>
           </a:xfrm>
           <a:prstGeom prst="rect">
             <a:avLst/>
@@ -5096,7 +5098,7 @@
               <a:buNone/>
             </a:pPr>
             <a:r>
-              <a:rPr lang="en-US" sz="1300" b="1" dirty="0">
+              <a:rPr lang="en-US" sz="1220" b="1" dirty="0">
                 <a:solidFill>
                   <a:srgbClr val="0068B7"/>
                 </a:solidFill>
@@ -5106,7 +5108,7 @@
               </a:rPr>
               <a:t>Risk check</a:t>
             </a:r>
-            <a:endParaRPr lang="en-US" sz="1300" dirty="0"/>
+            <a:endParaRPr lang="en-US" sz="1220" dirty="0"/>
           </a:p>
         </p:txBody>
       </p:sp>
@@ -5118,8 +5120,8 @@
         </p:nvSpPr>
         <p:spPr>
           <a:xfrm>
-            <a:off x="7799832" y="1801368"/>
-            <a:ext cx="3145536" cy="640080"/>
+            <a:off x="7708392" y="1764792"/>
+            <a:ext cx="3282696" cy="749808"/>
           </a:xfrm>
           <a:prstGeom prst="rect">
             <a:avLst/>
@@ -5137,7 +5139,7 @@
               <a:buNone/>
             </a:pPr>
             <a:r>
-              <a:rPr lang="en-US" sz="1320" dirty="0">
+              <a:rPr lang="en-US" sz="1220" dirty="0">
                 <a:solidFill>
                   <a:srgbClr val="17364A"/>
                 </a:solidFill>
@@ -5147,7 +5149,7 @@
               </a:rPr>
               <a:t>Stale or conflicting content.</a:t>
             </a:r>
-            <a:endParaRPr lang="en-US" sz="1320" dirty="0"/>
+            <a:endParaRPr lang="en-US" sz="1220" dirty="0"/>
           </a:p>
         </p:txBody>
       </p:sp>
@@ -5159,12 +5161,12 @@
         </p:nvSpPr>
         <p:spPr>
           <a:xfrm>
-            <a:off x="7635240" y="2670048"/>
-            <a:ext cx="3474720" cy="1377086"/>
+            <a:off x="7543800" y="2724912"/>
+            <a:ext cx="3611880" cy="1527048"/>
           </a:xfrm>
           <a:prstGeom prst="roundRect">
             <a:avLst>
-              <a:gd name="adj" fmla="val 7968"/>
+              <a:gd name="adj" fmla="val 7186"/>
             </a:avLst>
           </a:prstGeom>
           <a:solidFill>
@@ -5186,8 +5188,8 @@
         </p:nvSpPr>
         <p:spPr>
           <a:xfrm>
-            <a:off x="7799832" y="2816352"/>
-            <a:ext cx="3145536" cy="256032"/>
+            <a:off x="7708392" y="2852928"/>
+            <a:ext cx="3282696" cy="228600"/>
           </a:xfrm>
           <a:prstGeom prst="rect">
             <a:avLst/>
@@ -5203,7 +5205,7 @@
               <a:buNone/>
             </a:pPr>
             <a:r>
-              <a:rPr lang="en-US" sz="1300" b="1" dirty="0">
+              <a:rPr lang="en-US" sz="1220" b="1" dirty="0">
                 <a:solidFill>
                   <a:srgbClr val="0068B7"/>
                 </a:solidFill>
@@ -5213,7 +5215,7 @@
               </a:rPr>
               <a:t>Concept checkpoints</a:t>
             </a:r>
-            <a:endParaRPr lang="en-US" sz="1300" dirty="0"/>
+            <a:endParaRPr lang="en-US" sz="1220" dirty="0"/>
           </a:p>
         </p:txBody>
       </p:sp>
@@ -5225,8 +5227,8 @@
         </p:nvSpPr>
         <p:spPr>
           <a:xfrm>
-            <a:off x="7818120" y="3182112"/>
-            <a:ext cx="3090672" cy="718718"/>
+            <a:off x="7726680" y="3182112"/>
+            <a:ext cx="3227832" cy="960120"/>
           </a:xfrm>
           <a:prstGeom prst="rect">
             <a:avLst/>
@@ -5244,7 +5246,7 @@
               <a:buNone/>
             </a:pPr>
             <a:r>
-              <a:rPr lang="en-US" sz="1220" dirty="0">
+              <a:rPr lang="en-US" sz="1140" dirty="0">
                 <a:solidFill>
                   <a:srgbClr val="17364A"/>
                 </a:solidFill>
@@ -5254,14 +5256,14 @@
               </a:rPr>
               <a:t>Permission leakage.</a:t>
             </a:r>
-            <a:endParaRPr lang="en-US" sz="1220" dirty="0"/>
-          </a:p>
-          <a:p>
-            <a:pPr indent="0" marL="0">
-              <a:buNone/>
-            </a:pPr>
-            <a:r>
-              <a:rPr lang="en-US" sz="1220" dirty="0">
+            <a:endParaRPr lang="en-US" sz="1140" dirty="0"/>
+          </a:p>
+          <a:p>
+            <a:pPr indent="0" marL="0">
+              <a:buNone/>
+            </a:pPr>
+            <a:r>
+              <a:rPr lang="en-US" sz="1140" dirty="0">
                 <a:solidFill>
                   <a:srgbClr val="17364A"/>
                 </a:solidFill>
@@ -5271,14 +5273,14 @@
               </a:rPr>
               <a:t>RAG may retrieve content a user should not see.</a:t>
             </a:r>
-            <a:endParaRPr lang="en-US" sz="1220" dirty="0"/>
-          </a:p>
-          <a:p>
-            <a:pPr indent="0" marL="0">
-              <a:buNone/>
-            </a:pPr>
-            <a:r>
-              <a:rPr lang="en-US" sz="1220" dirty="0">
+            <a:endParaRPr lang="en-US" sz="1140" dirty="0"/>
+          </a:p>
+          <a:p>
+            <a:pPr indent="0" marL="0">
+              <a:buNone/>
+            </a:pPr>
+            <a:r>
+              <a:rPr lang="en-US" sz="1140" dirty="0">
                 <a:solidFill>
                   <a:srgbClr val="17364A"/>
                 </a:solidFill>
@@ -5286,9 +5288,9 @@
                 <a:ea typeface="Aptos" pitchFamily="34" charset="-122"/>
                 <a:cs typeface="Aptos" pitchFamily="34" charset="-120"/>
               </a:rPr>
-              <a:t>Guardrails include role-based access, document-level permissions,.</a:t>
-            </a:r>
-            <a:endParaRPr lang="en-US" sz="1220" dirty="0"/>
+              <a:t>Guardrails include role-based access,.</a:t>
+            </a:r>
+            <a:endParaRPr lang="en-US" sz="1140" dirty="0"/>
           </a:p>
         </p:txBody>
       </p:sp>
@@ -5300,12 +5302,12 @@
         </p:nvSpPr>
         <p:spPr>
           <a:xfrm>
-            <a:off x="7635240" y="4184294"/>
-            <a:ext cx="3474720" cy="1466698"/>
+            <a:off x="7543800" y="4389120"/>
+            <a:ext cx="3611880" cy="1261872"/>
           </a:xfrm>
           <a:prstGeom prst="roundRect">
             <a:avLst>
-              <a:gd name="adj" fmla="val 7481"/>
+              <a:gd name="adj" fmla="val 8696"/>
             </a:avLst>
           </a:prstGeom>
           <a:solidFill>
@@ -5327,8 +5329,8 @@
         </p:nvSpPr>
         <p:spPr>
           <a:xfrm>
-            <a:off x="7799832" y="4330598"/>
-            <a:ext cx="3145536" cy="256032"/>
+            <a:off x="7708392" y="4517136"/>
+            <a:ext cx="3282696" cy="228600"/>
           </a:xfrm>
           <a:prstGeom prst="rect">
             <a:avLst/>
@@ -5344,7 +5346,7 @@
               <a:buNone/>
             </a:pPr>
             <a:r>
-              <a:rPr lang="en-US" sz="1300" b="1" dirty="0">
+              <a:rPr lang="en-US" sz="1220" b="1" dirty="0">
                 <a:solidFill>
                   <a:srgbClr val="0068B7"/>
                 </a:solidFill>
@@ -5354,7 +5356,7 @@
               </a:rPr>
               <a:t>Safeguard to plan</a:t>
             </a:r>
-            <a:endParaRPr lang="en-US" sz="1300" dirty="0"/>
+            <a:endParaRPr lang="en-US" sz="1220" dirty="0"/>
           </a:p>
         </p:txBody>
       </p:sp>
@@ -5366,8 +5368,8 @@
         </p:nvSpPr>
         <p:spPr>
           <a:xfrm>
-            <a:off x="7799832" y="4659782"/>
-            <a:ext cx="3145536" cy="899770"/>
+            <a:off x="7708392" y="4828032"/>
+            <a:ext cx="3282696" cy="749808"/>
           </a:xfrm>
           <a:prstGeom prst="rect">
             <a:avLst/>
@@ -5385,7 +5387,7 @@
               <a:buNone/>
             </a:pPr>
             <a:r>
-              <a:rPr lang="en-US" sz="1320" dirty="0">
+              <a:rPr lang="en-US" sz="1220" dirty="0">
                 <a:solidFill>
                   <a:srgbClr val="17364A"/>
                 </a:solidFill>
@@ -5393,9 +5395,9 @@
                 <a:ea typeface="Aptos" pitchFamily="34" charset="-122"/>
                 <a:cs typeface="Aptos" pitchFamily="34" charset="-120"/>
               </a:rPr>
-              <a:t>Use the assignment to test whether you can explain the concept, apply it to a realistic public health situation, and identify what would need review before the work moves forward.</a:t>
-            </a:r>
-            <a:endParaRPr lang="en-US" sz="1320" dirty="0"/>
+              <a:t>Use the assignment to test whether you can explain the concept, apply it to a.</a:t>
+            </a:r>
+            <a:endParaRPr lang="en-US" sz="1220" dirty="0"/>
           </a:p>
         </p:txBody>
       </p:sp>
@@ -5686,8 +5688,8 @@
         </p:nvSpPr>
         <p:spPr>
           <a:xfrm>
-            <a:off x="868680" y="1508760"/>
-            <a:ext cx="6309360" cy="4160520"/>
+            <a:off x="822960" y="1463040"/>
+            <a:ext cx="6565392" cy="4343400"/>
           </a:xfrm>
           <a:prstGeom prst="rect">
             <a:avLst/>
@@ -5705,7 +5707,7 @@
               <a:buNone/>
             </a:pPr>
             <a:r>
-              <a:rPr lang="en-US" sz="2100" dirty="0">
+              <a:rPr lang="en-US" sz="1920" dirty="0">
                 <a:solidFill>
                   <a:srgbClr val="003A63"/>
                 </a:solidFill>
@@ -5715,14 +5717,14 @@
               </a:rPr>
               <a:t>• Unsupported generation.</a:t>
             </a:r>
-            <a:endParaRPr lang="en-US" sz="2100" dirty="0"/>
-          </a:p>
-          <a:p>
-            <a:pPr indent="0" marL="0">
-              <a:buNone/>
-            </a:pPr>
-            <a:r>
-              <a:rPr lang="en-US" sz="2100" dirty="0">
+            <a:endParaRPr lang="en-US" sz="1920" dirty="0"/>
+          </a:p>
+          <a:p>
+            <a:pPr indent="0" marL="0">
+              <a:buNone/>
+            </a:pPr>
+            <a:r>
+              <a:rPr lang="en-US" sz="1920" dirty="0">
                 <a:solidFill>
                   <a:srgbClr val="003A63"/>
                 </a:solidFill>
@@ -5732,14 +5734,14 @@
               </a:rPr>
               <a:t>• The model may add claims beyond retrieved sources.</a:t>
             </a:r>
-            <a:endParaRPr lang="en-US" sz="2100" dirty="0"/>
-          </a:p>
-          <a:p>
-            <a:pPr indent="0" marL="0">
-              <a:buNone/>
-            </a:pPr>
-            <a:r>
-              <a:rPr lang="en-US" sz="2100" dirty="0">
+            <a:endParaRPr lang="en-US" sz="1920" dirty="0"/>
+          </a:p>
+          <a:p>
+            <a:pPr indent="0" marL="0">
+              <a:buNone/>
+            </a:pPr>
+            <a:r>
+              <a:rPr lang="en-US" sz="1920" dirty="0">
                 <a:solidFill>
                   <a:srgbClr val="003A63"/>
                 </a:solidFill>
@@ -5747,9 +5749,9 @@
                 <a:ea typeface="Aptos" pitchFamily="34" charset="-122"/>
                 <a:cs typeface="Aptos" pitchFamily="34" charset="-120"/>
               </a:rPr>
-              <a:t>• Guardrails include source-only instructions, citation requirements, and reviewer verification.</a:t>
-            </a:r>
-            <a:endParaRPr lang="en-US" sz="2100" dirty="0"/>
+              <a:t>• Guardrails include source-only instructions, citation requirements, and.</a:t>
+            </a:r>
+            <a:endParaRPr lang="en-US" sz="1920" dirty="0"/>
           </a:p>
         </p:txBody>
       </p:sp>
@@ -5761,12 +5763,12 @@
         </p:nvSpPr>
         <p:spPr>
           <a:xfrm>
-            <a:off x="7635240" y="1325880"/>
-            <a:ext cx="3474720" cy="1207008"/>
+            <a:off x="7543800" y="1325880"/>
+            <a:ext cx="3611880" cy="1261872"/>
           </a:xfrm>
           <a:prstGeom prst="roundRect">
             <a:avLst>
-              <a:gd name="adj" fmla="val 9091"/>
+              <a:gd name="adj" fmla="val 8696"/>
             </a:avLst>
           </a:prstGeom>
           <a:solidFill>
@@ -5788,8 +5790,8 @@
         </p:nvSpPr>
         <p:spPr>
           <a:xfrm>
-            <a:off x="7799832" y="1472184"/>
-            <a:ext cx="3145536" cy="256032"/>
+            <a:off x="7708392" y="1453896"/>
+            <a:ext cx="3282696" cy="228600"/>
           </a:xfrm>
           <a:prstGeom prst="rect">
             <a:avLst/>
@@ -5805,7 +5807,7 @@
               <a:buNone/>
             </a:pPr>
             <a:r>
-              <a:rPr lang="en-US" sz="1300" b="1" dirty="0">
+              <a:rPr lang="en-US" sz="1220" b="1" dirty="0">
                 <a:solidFill>
                   <a:srgbClr val="0068B7"/>
                 </a:solidFill>
@@ -5815,7 +5817,7 @@
               </a:rPr>
               <a:t>Risk check</a:t>
             </a:r>
-            <a:endParaRPr lang="en-US" sz="1300" dirty="0"/>
+            <a:endParaRPr lang="en-US" sz="1220" dirty="0"/>
           </a:p>
         </p:txBody>
       </p:sp>
@@ -5827,8 +5829,8 @@
         </p:nvSpPr>
         <p:spPr>
           <a:xfrm>
-            <a:off x="7799832" y="1801368"/>
-            <a:ext cx="3145536" cy="640080"/>
+            <a:off x="7708392" y="1764792"/>
+            <a:ext cx="3282696" cy="749808"/>
           </a:xfrm>
           <a:prstGeom prst="rect">
             <a:avLst/>
@@ -5846,7 +5848,7 @@
               <a:buNone/>
             </a:pPr>
             <a:r>
-              <a:rPr lang="en-US" sz="1320" dirty="0">
+              <a:rPr lang="en-US" sz="1220" dirty="0">
                 <a:solidFill>
                   <a:srgbClr val="17364A"/>
                 </a:solidFill>
@@ -5856,7 +5858,7 @@
               </a:rPr>
               <a:t>Unsupported generation.</a:t>
             </a:r>
-            <a:endParaRPr lang="en-US" sz="1320" dirty="0"/>
+            <a:endParaRPr lang="en-US" sz="1220" dirty="0"/>
           </a:p>
         </p:txBody>
       </p:sp>
@@ -5868,12 +5870,12 @@
         </p:nvSpPr>
         <p:spPr>
           <a:xfrm>
-            <a:off x="7635240" y="2670048"/>
-            <a:ext cx="3474720" cy="1377086"/>
+            <a:off x="7543800" y="2724912"/>
+            <a:ext cx="3611880" cy="1527048"/>
           </a:xfrm>
           <a:prstGeom prst="roundRect">
             <a:avLst>
-              <a:gd name="adj" fmla="val 7968"/>
+              <a:gd name="adj" fmla="val 7186"/>
             </a:avLst>
           </a:prstGeom>
           <a:solidFill>
@@ -5895,8 +5897,8 @@
         </p:nvSpPr>
         <p:spPr>
           <a:xfrm>
-            <a:off x="7799832" y="2816352"/>
-            <a:ext cx="3145536" cy="256032"/>
+            <a:off x="7708392" y="2852928"/>
+            <a:ext cx="3282696" cy="228600"/>
           </a:xfrm>
           <a:prstGeom prst="rect">
             <a:avLst/>
@@ -5912,7 +5914,7 @@
               <a:buNone/>
             </a:pPr>
             <a:r>
-              <a:rPr lang="en-US" sz="1300" b="1" dirty="0">
+              <a:rPr lang="en-US" sz="1220" b="1" dirty="0">
                 <a:solidFill>
                   <a:srgbClr val="0068B7"/>
                 </a:solidFill>
@@ -5922,7 +5924,7 @@
               </a:rPr>
               <a:t>Concept checkpoints</a:t>
             </a:r>
-            <a:endParaRPr lang="en-US" sz="1300" dirty="0"/>
+            <a:endParaRPr lang="en-US" sz="1220" dirty="0"/>
           </a:p>
         </p:txBody>
       </p:sp>
@@ -5934,8 +5936,8 @@
         </p:nvSpPr>
         <p:spPr>
           <a:xfrm>
-            <a:off x="7818120" y="3182112"/>
-            <a:ext cx="3090672" cy="718718"/>
+            <a:off x="7726680" y="3182112"/>
+            <a:ext cx="3227832" cy="960120"/>
           </a:xfrm>
           <a:prstGeom prst="rect">
             <a:avLst/>
@@ -5953,7 +5955,7 @@
               <a:buNone/>
             </a:pPr>
             <a:r>
-              <a:rPr lang="en-US" sz="1220" dirty="0">
+              <a:rPr lang="en-US" sz="1140" dirty="0">
                 <a:solidFill>
                   <a:srgbClr val="17364A"/>
                 </a:solidFill>
@@ -5963,14 +5965,14 @@
               </a:rPr>
               <a:t>Unsupported generation.</a:t>
             </a:r>
-            <a:endParaRPr lang="en-US" sz="1220" dirty="0"/>
-          </a:p>
-          <a:p>
-            <a:pPr indent="0" marL="0">
-              <a:buNone/>
-            </a:pPr>
-            <a:r>
-              <a:rPr lang="en-US" sz="1220" dirty="0">
+            <a:endParaRPr lang="en-US" sz="1140" dirty="0"/>
+          </a:p>
+          <a:p>
+            <a:pPr indent="0" marL="0">
+              <a:buNone/>
+            </a:pPr>
+            <a:r>
+              <a:rPr lang="en-US" sz="1140" dirty="0">
                 <a:solidFill>
                   <a:srgbClr val="17364A"/>
                 </a:solidFill>
@@ -5980,14 +5982,14 @@
               </a:rPr>
               <a:t>The model may add claims beyond retrieved sources.</a:t>
             </a:r>
-            <a:endParaRPr lang="en-US" sz="1220" dirty="0"/>
-          </a:p>
-          <a:p>
-            <a:pPr indent="0" marL="0">
-              <a:buNone/>
-            </a:pPr>
-            <a:r>
-              <a:rPr lang="en-US" sz="1220" dirty="0">
+            <a:endParaRPr lang="en-US" sz="1140" dirty="0"/>
+          </a:p>
+          <a:p>
+            <a:pPr indent="0" marL="0">
+              <a:buNone/>
+            </a:pPr>
+            <a:r>
+              <a:rPr lang="en-US" sz="1140" dirty="0">
                 <a:solidFill>
                   <a:srgbClr val="17364A"/>
                 </a:solidFill>
@@ -5995,9 +5997,9 @@
                 <a:ea typeface="Aptos" pitchFamily="34" charset="-122"/>
                 <a:cs typeface="Aptos" pitchFamily="34" charset="-120"/>
               </a:rPr>
-              <a:t>Guardrails include source-only instructions, citation.</a:t>
-            </a:r>
-            <a:endParaRPr lang="en-US" sz="1220" dirty="0"/>
+              <a:t>Guardrails include source-only instructions,.</a:t>
+            </a:r>
+            <a:endParaRPr lang="en-US" sz="1140" dirty="0"/>
           </a:p>
         </p:txBody>
       </p:sp>
@@ -6009,12 +6011,12 @@
         </p:nvSpPr>
         <p:spPr>
           <a:xfrm>
-            <a:off x="7635240" y="4184294"/>
-            <a:ext cx="3474720" cy="1466698"/>
+            <a:off x="7543800" y="4389120"/>
+            <a:ext cx="3611880" cy="1261872"/>
           </a:xfrm>
           <a:prstGeom prst="roundRect">
             <a:avLst>
-              <a:gd name="adj" fmla="val 7481"/>
+              <a:gd name="adj" fmla="val 8696"/>
             </a:avLst>
           </a:prstGeom>
           <a:solidFill>
@@ -6036,8 +6038,8 @@
         </p:nvSpPr>
         <p:spPr>
           <a:xfrm>
-            <a:off x="7799832" y="4330598"/>
-            <a:ext cx="3145536" cy="256032"/>
+            <a:off x="7708392" y="4517136"/>
+            <a:ext cx="3282696" cy="228600"/>
           </a:xfrm>
           <a:prstGeom prst="rect">
             <a:avLst/>
@@ -6053,7 +6055,7 @@
               <a:buNone/>
             </a:pPr>
             <a:r>
-              <a:rPr lang="en-US" sz="1300" b="1" dirty="0">
+              <a:rPr lang="en-US" sz="1220" b="1" dirty="0">
                 <a:solidFill>
                   <a:srgbClr val="0068B7"/>
                 </a:solidFill>
@@ -6063,7 +6065,7 @@
               </a:rPr>
               <a:t>Safeguard to plan</a:t>
             </a:r>
-            <a:endParaRPr lang="en-US" sz="1300" dirty="0"/>
+            <a:endParaRPr lang="en-US" sz="1220" dirty="0"/>
           </a:p>
         </p:txBody>
       </p:sp>
@@ -6075,8 +6077,8 @@
         </p:nvSpPr>
         <p:spPr>
           <a:xfrm>
-            <a:off x="7799832" y="4659782"/>
-            <a:ext cx="3145536" cy="899770"/>
+            <a:off x="7708392" y="4828032"/>
+            <a:ext cx="3282696" cy="749808"/>
           </a:xfrm>
           <a:prstGeom prst="rect">
             <a:avLst/>
@@ -6094,7 +6096,7 @@
               <a:buNone/>
             </a:pPr>
             <a:r>
-              <a:rPr lang="en-US" sz="1320" dirty="0">
+              <a:rPr lang="en-US" sz="1220" dirty="0">
                 <a:solidFill>
                   <a:srgbClr val="17364A"/>
                 </a:solidFill>
@@ -6102,9 +6104,9 @@
                 <a:ea typeface="Aptos" pitchFamily="34" charset="-122"/>
                 <a:cs typeface="Aptos" pitchFamily="34" charset="-120"/>
               </a:rPr>
-              <a:t>Use the assignment to test whether you can explain the concept, apply it to a realistic public health situation, and identify what would need review before the work moves forward.</a:t>
-            </a:r>
-            <a:endParaRPr lang="en-US" sz="1320" dirty="0"/>
+              <a:t>Use the assignment to test whether you can explain the concept, apply it to a.</a:t>
+            </a:r>
+            <a:endParaRPr lang="en-US" sz="1220" dirty="0"/>
           </a:p>
         </p:txBody>
       </p:sp>
@@ -6395,8 +6397,8 @@
         </p:nvSpPr>
         <p:spPr>
           <a:xfrm>
-            <a:off x="868680" y="1508760"/>
-            <a:ext cx="6309360" cy="4160520"/>
+            <a:off x="822960" y="1463040"/>
+            <a:ext cx="6565392" cy="4343400"/>
           </a:xfrm>
           <a:prstGeom prst="rect">
             <a:avLst/>
@@ -6414,7 +6416,7 @@
               <a:buNone/>
             </a:pPr>
             <a:r>
-              <a:rPr lang="en-US" sz="2100" dirty="0">
+              <a:rPr lang="en-US" sz="1920" dirty="0">
                 <a:solidFill>
                   <a:srgbClr val="003A63"/>
                 </a:solidFill>
@@ -6424,14 +6426,14 @@
               </a:rPr>
               <a:t>• RAG supports generative AI by grounding outputs in defined sources.</a:t>
             </a:r>
-            <a:endParaRPr lang="en-US" sz="2100" dirty="0"/>
-          </a:p>
-          <a:p>
-            <a:pPr indent="0" marL="0">
-              <a:buNone/>
-            </a:pPr>
-            <a:r>
-              <a:rPr lang="en-US" sz="2100" dirty="0">
+            <a:endParaRPr lang="en-US" sz="1920" dirty="0"/>
+          </a:p>
+          <a:p>
+            <a:pPr indent="0" marL="0">
+              <a:buNone/>
+            </a:pPr>
+            <a:r>
+              <a:rPr lang="en-US" sz="1920" dirty="0">
                 <a:solidFill>
                   <a:srgbClr val="003A63"/>
                 </a:solidFill>
@@ -6439,16 +6441,16 @@
                 <a:ea typeface="Aptos" pitchFamily="34" charset="-122"/>
                 <a:cs typeface="Aptos" pitchFamily="34" charset="-120"/>
               </a:rPr>
-              <a:t>• It may be used in chat assistants, training tools, policy support, emergency operations,.</a:t>
-            </a:r>
-            <a:endParaRPr lang="en-US" sz="2100" dirty="0"/>
-          </a:p>
-          <a:p>
-            <a:pPr indent="0" marL="0">
-              <a:buNone/>
-            </a:pPr>
-            <a:r>
-              <a:rPr lang="en-US" sz="2100" dirty="0">
+              <a:t>• It may be used in chat assistants, training tools, policy support, emergency.</a:t>
+            </a:r>
+            <a:endParaRPr lang="en-US" sz="1920" dirty="0"/>
+          </a:p>
+          <a:p>
+            <a:pPr indent="0" marL="0">
+              <a:buNone/>
+            </a:pPr>
+            <a:r>
+              <a:rPr lang="en-US" sz="1920" dirty="0">
                 <a:solidFill>
                   <a:srgbClr val="003A63"/>
                 </a:solidFill>
@@ -6456,9 +6458,9 @@
                 <a:ea typeface="Aptos" pitchFamily="34" charset="-122"/>
                 <a:cs typeface="Aptos" pitchFamily="34" charset="-120"/>
               </a:rPr>
-              <a:t>• It can also support agentic workflows by giving agents access to approved guidance, but.</a:t>
-            </a:r>
-            <a:endParaRPr lang="en-US" sz="2100" dirty="0"/>
+              <a:t>• It can also support agentic workflows by giving agents access to approved.</a:t>
+            </a:r>
+            <a:endParaRPr lang="en-US" sz="1920" dirty="0"/>
           </a:p>
         </p:txBody>
       </p:sp>
@@ -6470,12 +6472,12 @@
         </p:nvSpPr>
         <p:spPr>
           <a:xfrm>
-            <a:off x="7635240" y="1325880"/>
-            <a:ext cx="3474720" cy="1207008"/>
+            <a:off x="7543800" y="1325880"/>
+            <a:ext cx="3611880" cy="1261872"/>
           </a:xfrm>
           <a:prstGeom prst="roundRect">
             <a:avLst>
-              <a:gd name="adj" fmla="val 9091"/>
+              <a:gd name="adj" fmla="val 8696"/>
             </a:avLst>
           </a:prstGeom>
           <a:solidFill>
@@ -6497,8 +6499,8 @@
         </p:nvSpPr>
         <p:spPr>
           <a:xfrm>
-            <a:off x="7799832" y="1472184"/>
-            <a:ext cx="3145536" cy="256032"/>
+            <a:off x="7708392" y="1453896"/>
+            <a:ext cx="3282696" cy="228600"/>
           </a:xfrm>
           <a:prstGeom prst="rect">
             <a:avLst/>
@@ -6514,7 +6516,7 @@
               <a:buNone/>
             </a:pPr>
             <a:r>
-              <a:rPr lang="en-US" sz="1300" b="1" dirty="0">
+              <a:rPr lang="en-US" sz="1220" b="1" dirty="0">
                 <a:solidFill>
                   <a:srgbClr val="0068B7"/>
                 </a:solidFill>
@@ -6524,7 +6526,7 @@
               </a:rPr>
               <a:t>Implementation cue</a:t>
             </a:r>
-            <a:endParaRPr lang="en-US" sz="1300" dirty="0"/>
+            <a:endParaRPr lang="en-US" sz="1220" dirty="0"/>
           </a:p>
         </p:txBody>
       </p:sp>
@@ -6536,8 +6538,8 @@
         </p:nvSpPr>
         <p:spPr>
           <a:xfrm>
-            <a:off x="7799832" y="1801368"/>
-            <a:ext cx="3145536" cy="640080"/>
+            <a:off x="7708392" y="1764792"/>
+            <a:ext cx="3282696" cy="749808"/>
           </a:xfrm>
           <a:prstGeom prst="rect">
             <a:avLst/>
@@ -6555,7 +6557,7 @@
               <a:buNone/>
             </a:pPr>
             <a:r>
-              <a:rPr lang="en-US" sz="1320" dirty="0">
+              <a:rPr lang="en-US" sz="1220" dirty="0">
                 <a:solidFill>
                   <a:srgbClr val="17364A"/>
                 </a:solidFill>
@@ -6565,7 +6567,7 @@
               </a:rPr>
               <a:t>RAG supports generative AI by grounding outputs in defined sources.</a:t>
             </a:r>
-            <a:endParaRPr lang="en-US" sz="1320" dirty="0"/>
+            <a:endParaRPr lang="en-US" sz="1220" dirty="0"/>
           </a:p>
         </p:txBody>
       </p:sp>
@@ -6577,12 +6579,12 @@
         </p:nvSpPr>
         <p:spPr>
           <a:xfrm>
-            <a:off x="7635240" y="2670048"/>
-            <a:ext cx="3474720" cy="1377086"/>
+            <a:off x="7543800" y="2724912"/>
+            <a:ext cx="3611880" cy="1527048"/>
           </a:xfrm>
           <a:prstGeom prst="roundRect">
             <a:avLst>
-              <a:gd name="adj" fmla="val 7968"/>
+              <a:gd name="adj" fmla="val 7186"/>
             </a:avLst>
           </a:prstGeom>
           <a:solidFill>
@@ -6604,8 +6606,8 @@
         </p:nvSpPr>
         <p:spPr>
           <a:xfrm>
-            <a:off x="7799832" y="2816352"/>
-            <a:ext cx="3145536" cy="256032"/>
+            <a:off x="7708392" y="2852928"/>
+            <a:ext cx="3282696" cy="228600"/>
           </a:xfrm>
           <a:prstGeom prst="rect">
             <a:avLst/>
@@ -6621,7 +6623,7 @@
               <a:buNone/>
             </a:pPr>
             <a:r>
-              <a:rPr lang="en-US" sz="1300" b="1" dirty="0">
+              <a:rPr lang="en-US" sz="1220" b="1" dirty="0">
                 <a:solidFill>
                   <a:srgbClr val="0068B7"/>
                 </a:solidFill>
@@ -6631,7 +6633,7 @@
               </a:rPr>
               <a:t>Concept checkpoints</a:t>
             </a:r>
-            <a:endParaRPr lang="en-US" sz="1300" dirty="0"/>
+            <a:endParaRPr lang="en-US" sz="1220" dirty="0"/>
           </a:p>
         </p:txBody>
       </p:sp>
@@ -6643,8 +6645,8 @@
         </p:nvSpPr>
         <p:spPr>
           <a:xfrm>
-            <a:off x="7818120" y="3182112"/>
-            <a:ext cx="3090672" cy="718718"/>
+            <a:off x="7726680" y="3182112"/>
+            <a:ext cx="3227832" cy="960120"/>
           </a:xfrm>
           <a:prstGeom prst="rect">
             <a:avLst/>
@@ -6662,7 +6664,7 @@
               <a:buNone/>
             </a:pPr>
             <a:r>
-              <a:rPr lang="en-US" sz="1220" dirty="0">
+              <a:rPr lang="en-US" sz="1140" dirty="0">
                 <a:solidFill>
                   <a:srgbClr val="17364A"/>
                 </a:solidFill>
@@ -6670,16 +6672,16 @@
                 <a:ea typeface="Aptos" pitchFamily="34" charset="-122"/>
                 <a:cs typeface="Aptos" pitchFamily="34" charset="-120"/>
               </a:rPr>
-              <a:t>It may be used in chat assistants, training tools, policy support,.</a:t>
-            </a:r>
-            <a:endParaRPr lang="en-US" sz="1220" dirty="0"/>
-          </a:p>
-          <a:p>
-            <a:pPr indent="0" marL="0">
-              <a:buNone/>
-            </a:pPr>
-            <a:r>
-              <a:rPr lang="en-US" sz="1220" dirty="0">
+              <a:t>It may be used in chat assistants, training tools,.</a:t>
+            </a:r>
+            <a:endParaRPr lang="en-US" sz="1140" dirty="0"/>
+          </a:p>
+          <a:p>
+            <a:pPr indent="0" marL="0">
+              <a:buNone/>
+            </a:pPr>
+            <a:r>
+              <a:rPr lang="en-US" sz="1140" dirty="0">
                 <a:solidFill>
                   <a:srgbClr val="17364A"/>
                 </a:solidFill>
@@ -6687,16 +6689,16 @@
                 <a:ea typeface="Aptos" pitchFamily="34" charset="-122"/>
                 <a:cs typeface="Aptos" pitchFamily="34" charset="-120"/>
               </a:rPr>
-              <a:t>It can also support agentic workflows by giving agents access to.</a:t>
-            </a:r>
-            <a:endParaRPr lang="en-US" sz="1220" dirty="0"/>
-          </a:p>
-          <a:p>
-            <a:pPr indent="0" marL="0">
-              <a:buNone/>
-            </a:pPr>
-            <a:r>
-              <a:rPr lang="en-US" sz="1220" dirty="0">
+              <a:t>It can also support agentic workflows by giving.</a:t>
+            </a:r>
+            <a:endParaRPr lang="en-US" sz="1140" dirty="0"/>
+          </a:p>
+          <a:p>
+            <a:pPr indent="0" marL="0">
+              <a:buNone/>
+            </a:pPr>
+            <a:r>
+              <a:rPr lang="en-US" sz="1140" dirty="0">
                 <a:solidFill>
                   <a:srgbClr val="17364A"/>
                 </a:solidFill>
@@ -6704,9 +6706,9 @@
                 <a:ea typeface="Aptos" pitchFamily="34" charset="-122"/>
                 <a:cs typeface="Aptos" pitchFamily="34" charset="-120"/>
               </a:rPr>
-              <a:t>Public health RAG systems should be built around trust.</a:t>
-            </a:r>
-            <a:endParaRPr lang="en-US" sz="1220" dirty="0"/>
+              <a:t>Public health RAG systems should be built around.</a:t>
+            </a:r>
+            <a:endParaRPr lang="en-US" sz="1140" dirty="0"/>
           </a:p>
         </p:txBody>
       </p:sp>
@@ -6718,12 +6720,12 @@
         </p:nvSpPr>
         <p:spPr>
           <a:xfrm>
-            <a:off x="7635240" y="4184294"/>
-            <a:ext cx="3474720" cy="1466698"/>
+            <a:off x="7543800" y="4389120"/>
+            <a:ext cx="3611880" cy="1261872"/>
           </a:xfrm>
           <a:prstGeom prst="roundRect">
             <a:avLst>
-              <a:gd name="adj" fmla="val 7481"/>
+              <a:gd name="adj" fmla="val 8696"/>
             </a:avLst>
           </a:prstGeom>
           <a:solidFill>
@@ -6745,8 +6747,8 @@
         </p:nvSpPr>
         <p:spPr>
           <a:xfrm>
-            <a:off x="7799832" y="4330598"/>
-            <a:ext cx="3145536" cy="256032"/>
+            <a:off x="7708392" y="4517136"/>
+            <a:ext cx="3282696" cy="228600"/>
           </a:xfrm>
           <a:prstGeom prst="rect">
             <a:avLst/>
@@ -6762,7 +6764,7 @@
               <a:buNone/>
             </a:pPr>
             <a:r>
-              <a:rPr lang="en-US" sz="1300" b="1" dirty="0">
+              <a:rPr lang="en-US" sz="1220" b="1" dirty="0">
                 <a:solidFill>
                   <a:srgbClr val="0068B7"/>
                 </a:solidFill>
@@ -6772,7 +6774,7 @@
               </a:rPr>
               <a:t>Next action</a:t>
             </a:r>
-            <a:endParaRPr lang="en-US" sz="1300" dirty="0"/>
+            <a:endParaRPr lang="en-US" sz="1220" dirty="0"/>
           </a:p>
         </p:txBody>
       </p:sp>
@@ -6784,8 +6786,8 @@
         </p:nvSpPr>
         <p:spPr>
           <a:xfrm>
-            <a:off x="7799832" y="4659782"/>
-            <a:ext cx="3145536" cy="899770"/>
+            <a:off x="7708392" y="4828032"/>
+            <a:ext cx="3282696" cy="749808"/>
           </a:xfrm>
           <a:prstGeom prst="rect">
             <a:avLst/>
@@ -6803,7 +6805,7 @@
               <a:buNone/>
             </a:pPr>
             <a:r>
-              <a:rPr lang="en-US" sz="1320" dirty="0">
+              <a:rPr lang="en-US" sz="1220" dirty="0">
                 <a:solidFill>
                   <a:srgbClr val="17364A"/>
                 </a:solidFill>
@@ -6811,9 +6813,9 @@
                 <a:ea typeface="Aptos" pitchFamily="34" charset="-122"/>
                 <a:cs typeface="Aptos" pitchFamily="34" charset="-120"/>
               </a:rPr>
-              <a:t>Use the assignment to test whether you can explain the concept, apply it to a realistic public health situation, and identify what would need review before the work moves forward.</a:t>
-            </a:r>
-            <a:endParaRPr lang="en-US" sz="1320" dirty="0"/>
+              <a:t>Use the assignment to test whether you can explain the concept, apply it to a.</a:t>
+            </a:r>
+            <a:endParaRPr lang="en-US" sz="1220" dirty="0"/>
           </a:p>
         </p:txBody>
       </p:sp>
@@ -7104,8 +7106,8 @@
         </p:nvSpPr>
         <p:spPr>
           <a:xfrm>
-            <a:off x="868680" y="1508760"/>
-            <a:ext cx="6309360" cy="4160520"/>
+            <a:off x="822960" y="1463040"/>
+            <a:ext cx="6565392" cy="4343400"/>
           </a:xfrm>
           <a:prstGeom prst="rect">
             <a:avLst/>
@@ -7123,7 +7125,7 @@
               <a:buNone/>
             </a:pPr>
             <a:r>
-              <a:rPr lang="en-US" sz="2100" dirty="0">
+              <a:rPr lang="en-US" sz="1920" dirty="0">
                 <a:solidFill>
                   <a:srgbClr val="003A63"/>
                 </a:solidFill>
@@ -7133,14 +7135,14 @@
               </a:rPr>
               <a:t>• What content collection would the RAG system use?</a:t>
             </a:r>
-            <a:endParaRPr lang="en-US" sz="2100" dirty="0"/>
-          </a:p>
-          <a:p>
-            <a:pPr indent="0" marL="0">
-              <a:buNone/>
-            </a:pPr>
-            <a:r>
-              <a:rPr lang="en-US" sz="2100" dirty="0">
+            <a:endParaRPr lang="en-US" sz="1920" dirty="0"/>
+          </a:p>
+          <a:p>
+            <a:pPr indent="0" marL="0">
+              <a:buNone/>
+            </a:pPr>
+            <a:r>
+              <a:rPr lang="en-US" sz="1920" dirty="0">
                 <a:solidFill>
                   <a:srgbClr val="003A63"/>
                 </a:solidFill>
@@ -7150,14 +7152,14 @@
               </a:rPr>
               <a:t>• Who owns and updates each source document?</a:t>
             </a:r>
-            <a:endParaRPr lang="en-US" sz="2100" dirty="0"/>
-          </a:p>
-          <a:p>
-            <a:pPr indent="0" marL="0">
-              <a:buNone/>
-            </a:pPr>
-            <a:r>
-              <a:rPr lang="en-US" sz="2100" dirty="0">
+            <a:endParaRPr lang="en-US" sz="1920" dirty="0"/>
+          </a:p>
+          <a:p>
+            <a:pPr indent="0" marL="0">
+              <a:buNone/>
+            </a:pPr>
+            <a:r>
+              <a:rPr lang="en-US" sz="1920" dirty="0">
                 <a:solidFill>
                   <a:srgbClr val="003A63"/>
                 </a:solidFill>
@@ -7167,7 +7169,7 @@
               </a:rPr>
               <a:t>• How will access permissions be enforced?</a:t>
             </a:r>
-            <a:endParaRPr lang="en-US" sz="2100" dirty="0"/>
+            <a:endParaRPr lang="en-US" sz="1920" dirty="0"/>
           </a:p>
         </p:txBody>
       </p:sp>
@@ -7179,12 +7181,12 @@
         </p:nvSpPr>
         <p:spPr>
           <a:xfrm>
-            <a:off x="7635240" y="1325880"/>
-            <a:ext cx="3474720" cy="1207008"/>
+            <a:off x="7543800" y="1325880"/>
+            <a:ext cx="3611880" cy="1261872"/>
           </a:xfrm>
           <a:prstGeom prst="roundRect">
             <a:avLst>
-              <a:gd name="adj" fmla="val 9091"/>
+              <a:gd name="adj" fmla="val 8696"/>
             </a:avLst>
           </a:prstGeom>
           <a:solidFill>
@@ -7206,8 +7208,8 @@
         </p:nvSpPr>
         <p:spPr>
           <a:xfrm>
-            <a:off x="7799832" y="1472184"/>
-            <a:ext cx="3145536" cy="256032"/>
+            <a:off x="7708392" y="1453896"/>
+            <a:ext cx="3282696" cy="228600"/>
           </a:xfrm>
           <a:prstGeom prst="rect">
             <a:avLst/>
@@ -7223,7 +7225,7 @@
               <a:buNone/>
             </a:pPr>
             <a:r>
-              <a:rPr lang="en-US" sz="1300" b="1" dirty="0">
+              <a:rPr lang="en-US" sz="1220" b="1" dirty="0">
                 <a:solidFill>
                   <a:srgbClr val="0068B7"/>
                 </a:solidFill>
@@ -7233,7 +7235,7 @@
               </a:rPr>
               <a:t>Practice focus</a:t>
             </a:r>
-            <a:endParaRPr lang="en-US" sz="1300" dirty="0"/>
+            <a:endParaRPr lang="en-US" sz="1220" dirty="0"/>
           </a:p>
         </p:txBody>
       </p:sp>
@@ -7245,8 +7247,8 @@
         </p:nvSpPr>
         <p:spPr>
           <a:xfrm>
-            <a:off x="7799832" y="1801368"/>
-            <a:ext cx="3145536" cy="640080"/>
+            <a:off x="7708392" y="1764792"/>
+            <a:ext cx="3282696" cy="749808"/>
           </a:xfrm>
           <a:prstGeom prst="rect">
             <a:avLst/>
@@ -7264,7 +7266,7 @@
               <a:buNone/>
             </a:pPr>
             <a:r>
-              <a:rPr lang="en-US" sz="1320" dirty="0">
+              <a:rPr lang="en-US" sz="1220" dirty="0">
                 <a:solidFill>
                   <a:srgbClr val="17364A"/>
                 </a:solidFill>
@@ -7274,7 +7276,7 @@
               </a:rPr>
               <a:t>What content collection would the RAG system use?</a:t>
             </a:r>
-            <a:endParaRPr lang="en-US" sz="1320" dirty="0"/>
+            <a:endParaRPr lang="en-US" sz="1220" dirty="0"/>
           </a:p>
         </p:txBody>
       </p:sp>
@@ -7286,12 +7288,12 @@
         </p:nvSpPr>
         <p:spPr>
           <a:xfrm>
-            <a:off x="7635240" y="2670048"/>
-            <a:ext cx="3474720" cy="1377086"/>
+            <a:off x="7543800" y="2724912"/>
+            <a:ext cx="3611880" cy="1527048"/>
           </a:xfrm>
           <a:prstGeom prst="roundRect">
             <a:avLst>
-              <a:gd name="adj" fmla="val 7968"/>
+              <a:gd name="adj" fmla="val 7186"/>
             </a:avLst>
           </a:prstGeom>
           <a:solidFill>
@@ -7313,8 +7315,8 @@
         </p:nvSpPr>
         <p:spPr>
           <a:xfrm>
-            <a:off x="7799832" y="2816352"/>
-            <a:ext cx="3145536" cy="256032"/>
+            <a:off x="7708392" y="2852928"/>
+            <a:ext cx="3282696" cy="228600"/>
           </a:xfrm>
           <a:prstGeom prst="rect">
             <a:avLst/>
@@ -7330,7 +7332,7 @@
               <a:buNone/>
             </a:pPr>
             <a:r>
-              <a:rPr lang="en-US" sz="1300" b="1" dirty="0">
+              <a:rPr lang="en-US" sz="1220" b="1" dirty="0">
                 <a:solidFill>
                   <a:srgbClr val="0068B7"/>
                 </a:solidFill>
@@ -7340,7 +7342,7 @@
               </a:rPr>
               <a:t>Concept checkpoints</a:t>
             </a:r>
-            <a:endParaRPr lang="en-US" sz="1300" dirty="0"/>
+            <a:endParaRPr lang="en-US" sz="1220" dirty="0"/>
           </a:p>
         </p:txBody>
       </p:sp>
@@ -7352,8 +7354,8 @@
         </p:nvSpPr>
         <p:spPr>
           <a:xfrm>
-            <a:off x="7818120" y="3182112"/>
-            <a:ext cx="3090672" cy="718718"/>
+            <a:off x="7726680" y="3182112"/>
+            <a:ext cx="3227832" cy="960120"/>
           </a:xfrm>
           <a:prstGeom prst="rect">
             <a:avLst/>
@@ -7371,7 +7373,7 @@
               <a:buNone/>
             </a:pPr>
             <a:r>
-              <a:rPr lang="en-US" sz="1220" dirty="0">
+              <a:rPr lang="en-US" sz="1140" dirty="0">
                 <a:solidFill>
                   <a:srgbClr val="17364A"/>
                 </a:solidFill>
@@ -7381,14 +7383,14 @@
               </a:rPr>
               <a:t>What content collection would the RAG system use?</a:t>
             </a:r>
-            <a:endParaRPr lang="en-US" sz="1220" dirty="0"/>
-          </a:p>
-          <a:p>
-            <a:pPr indent="0" marL="0">
-              <a:buNone/>
-            </a:pPr>
-            <a:r>
-              <a:rPr lang="en-US" sz="1220" dirty="0">
+            <a:endParaRPr lang="en-US" sz="1140" dirty="0"/>
+          </a:p>
+          <a:p>
+            <a:pPr indent="0" marL="0">
+              <a:buNone/>
+            </a:pPr>
+            <a:r>
+              <a:rPr lang="en-US" sz="1140" dirty="0">
                 <a:solidFill>
                   <a:srgbClr val="17364A"/>
                 </a:solidFill>
@@ -7398,14 +7400,14 @@
               </a:rPr>
               <a:t>Who owns and updates each source document?</a:t>
             </a:r>
-            <a:endParaRPr lang="en-US" sz="1220" dirty="0"/>
-          </a:p>
-          <a:p>
-            <a:pPr indent="0" marL="0">
-              <a:buNone/>
-            </a:pPr>
-            <a:r>
-              <a:rPr lang="en-US" sz="1220" dirty="0">
+            <a:endParaRPr lang="en-US" sz="1140" dirty="0"/>
+          </a:p>
+          <a:p>
+            <a:pPr indent="0" marL="0">
+              <a:buNone/>
+            </a:pPr>
+            <a:r>
+              <a:rPr lang="en-US" sz="1140" dirty="0">
                 <a:solidFill>
                   <a:srgbClr val="17364A"/>
                 </a:solidFill>
@@ -7415,7 +7417,7 @@
               </a:rPr>
               <a:t>How will access permissions be enforced?</a:t>
             </a:r>
-            <a:endParaRPr lang="en-US" sz="1220" dirty="0"/>
+            <a:endParaRPr lang="en-US" sz="1140" dirty="0"/>
           </a:p>
         </p:txBody>
       </p:sp>
@@ -7427,12 +7429,12 @@
         </p:nvSpPr>
         <p:spPr>
           <a:xfrm>
-            <a:off x="7635240" y="4184294"/>
-            <a:ext cx="3474720" cy="1466698"/>
+            <a:off x="7543800" y="4389120"/>
+            <a:ext cx="3611880" cy="1261872"/>
           </a:xfrm>
           <a:prstGeom prst="roundRect">
             <a:avLst>
-              <a:gd name="adj" fmla="val 7481"/>
+              <a:gd name="adj" fmla="val 8696"/>
             </a:avLst>
           </a:prstGeom>
           <a:solidFill>
@@ -7454,8 +7456,8 @@
         </p:nvSpPr>
         <p:spPr>
           <a:xfrm>
-            <a:off x="7799832" y="4330598"/>
-            <a:ext cx="3145536" cy="256032"/>
+            <a:off x="7708392" y="4517136"/>
+            <a:ext cx="3282696" cy="228600"/>
           </a:xfrm>
           <a:prstGeom prst="rect">
             <a:avLst/>
@@ -7471,7 +7473,7 @@
               <a:buNone/>
             </a:pPr>
             <a:r>
-              <a:rPr lang="en-US" sz="1300" b="1" dirty="0">
+              <a:rPr lang="en-US" sz="1220" b="1" dirty="0">
                 <a:solidFill>
                   <a:srgbClr val="0068B7"/>
                 </a:solidFill>
@@ -7481,7 +7483,7 @@
               </a:rPr>
               <a:t>What to produce</a:t>
             </a:r>
-            <a:endParaRPr lang="en-US" sz="1300" dirty="0"/>
+            <a:endParaRPr lang="en-US" sz="1220" dirty="0"/>
           </a:p>
         </p:txBody>
       </p:sp>
@@ -7493,8 +7495,8 @@
         </p:nvSpPr>
         <p:spPr>
           <a:xfrm>
-            <a:off x="7799832" y="4659782"/>
-            <a:ext cx="3145536" cy="899770"/>
+            <a:off x="7708392" y="4828032"/>
+            <a:ext cx="3282696" cy="749808"/>
           </a:xfrm>
           <a:prstGeom prst="rect">
             <a:avLst/>
@@ -7512,7 +7514,7 @@
               <a:buNone/>
             </a:pPr>
             <a:r>
-              <a:rPr lang="en-US" sz="1320" dirty="0">
+              <a:rPr lang="en-US" sz="1220" dirty="0">
                 <a:solidFill>
                   <a:srgbClr val="17364A"/>
                 </a:solidFill>
@@ -7520,9 +7522,9 @@
                 <a:ea typeface="Aptos" pitchFamily="34" charset="-122"/>
                 <a:cs typeface="Aptos" pitchFamily="34" charset="-120"/>
               </a:rPr>
-              <a:t>Use the assignment to test whether you can explain the concept, apply it to a realistic public health situation, and identify what would need review before the work moves forward.</a:t>
-            </a:r>
-            <a:endParaRPr lang="en-US" sz="1320" dirty="0"/>
+              <a:t>Use the assignment to test whether you can explain the concept, apply it to a.</a:t>
+            </a:r>
+            <a:endParaRPr lang="en-US" sz="1220" dirty="0"/>
           </a:p>
         </p:txBody>
       </p:sp>
@@ -7813,8 +7815,8 @@
         </p:nvSpPr>
         <p:spPr>
           <a:xfrm>
-            <a:off x="868680" y="1508760"/>
-            <a:ext cx="6309360" cy="4160520"/>
+            <a:off x="822960" y="1463040"/>
+            <a:ext cx="6565392" cy="4343400"/>
           </a:xfrm>
           <a:prstGeom prst="rect">
             <a:avLst/>
@@ -7832,7 +7834,7 @@
               <a:buNone/>
             </a:pPr>
             <a:r>
-              <a:rPr lang="en-US" sz="2100" dirty="0">
+              <a:rPr lang="en-US" sz="1920" dirty="0">
                 <a:solidFill>
                   <a:srgbClr val="003A63"/>
                 </a:solidFill>
@@ -7842,14 +7844,14 @@
               </a:rPr>
               <a:t>• How will retrieval quality and citation accuracy be tested?</a:t>
             </a:r>
-            <a:endParaRPr lang="en-US" sz="2100" dirty="0"/>
-          </a:p>
-          <a:p>
-            <a:pPr indent="0" marL="0">
-              <a:buNone/>
-            </a:pPr>
-            <a:r>
-              <a:rPr lang="en-US" sz="2100" dirty="0">
+            <a:endParaRPr lang="en-US" sz="1920" dirty="0"/>
+          </a:p>
+          <a:p>
+            <a:pPr indent="0" marL="0">
+              <a:buNone/>
+            </a:pPr>
+            <a:r>
+              <a:rPr lang="en-US" sz="1920" dirty="0">
                 <a:solidFill>
                   <a:srgbClr val="003A63"/>
                 </a:solidFill>
@@ -7859,7 +7861,7 @@
               </a:rPr>
               <a:t>• What should the system do when sources are missing, outdated, or conflicting?</a:t>
             </a:r>
-            <a:endParaRPr lang="en-US" sz="2100" dirty="0"/>
+            <a:endParaRPr lang="en-US" sz="1920" dirty="0"/>
           </a:p>
         </p:txBody>
       </p:sp>
@@ -7871,12 +7873,12 @@
         </p:nvSpPr>
         <p:spPr>
           <a:xfrm>
-            <a:off x="7635240" y="1325880"/>
-            <a:ext cx="3474720" cy="1207008"/>
+            <a:off x="7543800" y="1325880"/>
+            <a:ext cx="3611880" cy="1261872"/>
           </a:xfrm>
           <a:prstGeom prst="roundRect">
             <a:avLst>
-              <a:gd name="adj" fmla="val 9091"/>
+              <a:gd name="adj" fmla="val 8696"/>
             </a:avLst>
           </a:prstGeom>
           <a:solidFill>
@@ -7898,8 +7900,8 @@
         </p:nvSpPr>
         <p:spPr>
           <a:xfrm>
-            <a:off x="7799832" y="1472184"/>
-            <a:ext cx="3145536" cy="256032"/>
+            <a:off x="7708392" y="1453896"/>
+            <a:ext cx="3282696" cy="228600"/>
           </a:xfrm>
           <a:prstGeom prst="rect">
             <a:avLst/>
@@ -7915,7 +7917,7 @@
               <a:buNone/>
             </a:pPr>
             <a:r>
-              <a:rPr lang="en-US" sz="1300" b="1" dirty="0">
+              <a:rPr lang="en-US" sz="1220" b="1" dirty="0">
                 <a:solidFill>
                   <a:srgbClr val="0068B7"/>
                 </a:solidFill>
@@ -7925,7 +7927,7 @@
               </a:rPr>
               <a:t>Practice focus</a:t>
             </a:r>
-            <a:endParaRPr lang="en-US" sz="1300" dirty="0"/>
+            <a:endParaRPr lang="en-US" sz="1220" dirty="0"/>
           </a:p>
         </p:txBody>
       </p:sp>
@@ -7937,8 +7939,8 @@
         </p:nvSpPr>
         <p:spPr>
           <a:xfrm>
-            <a:off x="7799832" y="1801368"/>
-            <a:ext cx="3145536" cy="640080"/>
+            <a:off x="7708392" y="1764792"/>
+            <a:ext cx="3282696" cy="749808"/>
           </a:xfrm>
           <a:prstGeom prst="rect">
             <a:avLst/>
@@ -7956,7 +7958,7 @@
               <a:buNone/>
             </a:pPr>
             <a:r>
-              <a:rPr lang="en-US" sz="1320" dirty="0">
+              <a:rPr lang="en-US" sz="1220" dirty="0">
                 <a:solidFill>
                   <a:srgbClr val="17364A"/>
                 </a:solidFill>
@@ -7966,7 +7968,7 @@
               </a:rPr>
               <a:t>How will retrieval quality and citation accuracy be tested?</a:t>
             </a:r>
-            <a:endParaRPr lang="en-US" sz="1320" dirty="0"/>
+            <a:endParaRPr lang="en-US" sz="1220" dirty="0"/>
           </a:p>
         </p:txBody>
       </p:sp>
@@ -7978,12 +7980,12 @@
         </p:nvSpPr>
         <p:spPr>
           <a:xfrm>
-            <a:off x="7635240" y="2670048"/>
-            <a:ext cx="3474720" cy="1377086"/>
+            <a:off x="7543800" y="2724912"/>
+            <a:ext cx="3611880" cy="1527048"/>
           </a:xfrm>
           <a:prstGeom prst="roundRect">
             <a:avLst>
-              <a:gd name="adj" fmla="val 7968"/>
+              <a:gd name="adj" fmla="val 7186"/>
             </a:avLst>
           </a:prstGeom>
           <a:solidFill>
@@ -8005,8 +8007,8 @@
         </p:nvSpPr>
         <p:spPr>
           <a:xfrm>
-            <a:off x="7799832" y="2816352"/>
-            <a:ext cx="3145536" cy="256032"/>
+            <a:off x="7708392" y="2852928"/>
+            <a:ext cx="3282696" cy="228600"/>
           </a:xfrm>
           <a:prstGeom prst="rect">
             <a:avLst/>
@@ -8022,7 +8024,7 @@
               <a:buNone/>
             </a:pPr>
             <a:r>
-              <a:rPr lang="en-US" sz="1300" b="1" dirty="0">
+              <a:rPr lang="en-US" sz="1220" b="1" dirty="0">
                 <a:solidFill>
                   <a:srgbClr val="0068B7"/>
                 </a:solidFill>
@@ -8032,7 +8034,7 @@
               </a:rPr>
               <a:t>Concept checkpoints</a:t>
             </a:r>
-            <a:endParaRPr lang="en-US" sz="1300" dirty="0"/>
+            <a:endParaRPr lang="en-US" sz="1220" dirty="0"/>
           </a:p>
         </p:txBody>
       </p:sp>
@@ -8044,8 +8046,8 @@
         </p:nvSpPr>
         <p:spPr>
           <a:xfrm>
-            <a:off x="7818120" y="3182112"/>
-            <a:ext cx="3090672" cy="718718"/>
+            <a:off x="7726680" y="3182112"/>
+            <a:ext cx="3227832" cy="960120"/>
           </a:xfrm>
           <a:prstGeom prst="rect">
             <a:avLst/>
@@ -8063,7 +8065,7 @@
               <a:buNone/>
             </a:pPr>
             <a:r>
-              <a:rPr lang="en-US" sz="1220" dirty="0">
+              <a:rPr lang="en-US" sz="1140" dirty="0">
                 <a:solidFill>
                   <a:srgbClr val="17364A"/>
                 </a:solidFill>
@@ -8071,16 +8073,16 @@
                 <a:ea typeface="Aptos" pitchFamily="34" charset="-122"/>
                 <a:cs typeface="Aptos" pitchFamily="34" charset="-120"/>
               </a:rPr>
-              <a:t>How will retrieval quality and citation accuracy be tested?</a:t>
-            </a:r>
-            <a:endParaRPr lang="en-US" sz="1220" dirty="0"/>
-          </a:p>
-          <a:p>
-            <a:pPr indent="0" marL="0">
-              <a:buNone/>
-            </a:pPr>
-            <a:r>
-              <a:rPr lang="en-US" sz="1220" dirty="0">
+              <a:t>How will retrieval quality and citation accuracy.</a:t>
+            </a:r>
+            <a:endParaRPr lang="en-US" sz="1140" dirty="0"/>
+          </a:p>
+          <a:p>
+            <a:pPr indent="0" marL="0">
+              <a:buNone/>
+            </a:pPr>
+            <a:r>
+              <a:rPr lang="en-US" sz="1140" dirty="0">
                 <a:solidFill>
                   <a:srgbClr val="17364A"/>
                 </a:solidFill>
@@ -8088,9 +8090,9 @@
                 <a:ea typeface="Aptos" pitchFamily="34" charset="-122"/>
                 <a:cs typeface="Aptos" pitchFamily="34" charset="-120"/>
               </a:rPr>
-              <a:t>What should the system do when sources are missing, outdated, or.</a:t>
-            </a:r>
-            <a:endParaRPr lang="en-US" sz="1220" dirty="0"/>
+              <a:t>What should the system do when sources are.</a:t>
+            </a:r>
+            <a:endParaRPr lang="en-US" sz="1140" dirty="0"/>
           </a:p>
         </p:txBody>
       </p:sp>
@@ -8102,12 +8104,12 @@
         </p:nvSpPr>
         <p:spPr>
           <a:xfrm>
-            <a:off x="7635240" y="4184294"/>
-            <a:ext cx="3474720" cy="1466698"/>
+            <a:off x="7543800" y="4389120"/>
+            <a:ext cx="3611880" cy="1261872"/>
           </a:xfrm>
           <a:prstGeom prst="roundRect">
             <a:avLst>
-              <a:gd name="adj" fmla="val 7481"/>
+              <a:gd name="adj" fmla="val 8696"/>
             </a:avLst>
           </a:prstGeom>
           <a:solidFill>
@@ -8129,8 +8131,8 @@
         </p:nvSpPr>
         <p:spPr>
           <a:xfrm>
-            <a:off x="7799832" y="4330598"/>
-            <a:ext cx="3145536" cy="256032"/>
+            <a:off x="7708392" y="4517136"/>
+            <a:ext cx="3282696" cy="228600"/>
           </a:xfrm>
           <a:prstGeom prst="rect">
             <a:avLst/>
@@ -8146,7 +8148,7 @@
               <a:buNone/>
             </a:pPr>
             <a:r>
-              <a:rPr lang="en-US" sz="1300" b="1" dirty="0">
+              <a:rPr lang="en-US" sz="1220" b="1" dirty="0">
                 <a:solidFill>
                   <a:srgbClr val="0068B7"/>
                 </a:solidFill>
@@ -8156,7 +8158,7 @@
               </a:rPr>
               <a:t>What to produce</a:t>
             </a:r>
-            <a:endParaRPr lang="en-US" sz="1300" dirty="0"/>
+            <a:endParaRPr lang="en-US" sz="1220" dirty="0"/>
           </a:p>
         </p:txBody>
       </p:sp>
@@ -8168,8 +8170,8 @@
         </p:nvSpPr>
         <p:spPr>
           <a:xfrm>
-            <a:off x="7799832" y="4659782"/>
-            <a:ext cx="3145536" cy="899770"/>
+            <a:off x="7708392" y="4828032"/>
+            <a:ext cx="3282696" cy="749808"/>
           </a:xfrm>
           <a:prstGeom prst="rect">
             <a:avLst/>
@@ -8187,7 +8189,7 @@
               <a:buNone/>
             </a:pPr>
             <a:r>
-              <a:rPr lang="en-US" sz="1320" dirty="0">
+              <a:rPr lang="en-US" sz="1220" dirty="0">
                 <a:solidFill>
                   <a:srgbClr val="17364A"/>
                 </a:solidFill>
@@ -8195,9 +8197,9 @@
                 <a:ea typeface="Aptos" pitchFamily="34" charset="-122"/>
                 <a:cs typeface="Aptos" pitchFamily="34" charset="-120"/>
               </a:rPr>
-              <a:t>Use the assignment to test whether you can explain the concept, apply it to a realistic public health situation, and identify what would need review before the work moves forward.</a:t>
-            </a:r>
-            <a:endParaRPr lang="en-US" sz="1320" dirty="0"/>
+              <a:t>Use the assignment to test whether you can explain the concept, apply it to a.</a:t>
+            </a:r>
+            <a:endParaRPr lang="en-US" sz="1220" dirty="0"/>
           </a:p>
         </p:txBody>
       </p:sp>
@@ -8488,8 +8490,8 @@
         </p:nvSpPr>
         <p:spPr>
           <a:xfrm>
-            <a:off x="868680" y="1508760"/>
-            <a:ext cx="6309360" cy="4160520"/>
+            <a:off x="822960" y="1463040"/>
+            <a:ext cx="6565392" cy="4343400"/>
           </a:xfrm>
           <a:prstGeom prst="rect">
             <a:avLst/>
@@ -8507,7 +8509,7 @@
               <a:buNone/>
             </a:pPr>
             <a:r>
-              <a:rPr lang="en-US" sz="2100" dirty="0">
+              <a:rPr lang="en-US" sz="1920" dirty="0">
                 <a:solidFill>
                   <a:srgbClr val="003A63"/>
                 </a:solidFill>
@@ -8517,14 +8519,14 @@
               </a:rPr>
               <a:t>• Create a RAG readiness checklist for one public health knowledge workflow.</a:t>
             </a:r>
-            <a:endParaRPr lang="en-US" sz="2100" dirty="0"/>
-          </a:p>
-          <a:p>
-            <a:pPr indent="0" marL="0">
-              <a:buNone/>
-            </a:pPr>
-            <a:r>
-              <a:rPr lang="en-US" sz="2100" dirty="0">
+            <a:endParaRPr lang="en-US" sz="1920" dirty="0"/>
+          </a:p>
+          <a:p>
+            <a:pPr indent="0" marL="0">
+              <a:buNone/>
+            </a:pPr>
+            <a:r>
+              <a:rPr lang="en-US" sz="1920" dirty="0">
                 <a:solidFill>
                   <a:srgbClr val="003A63"/>
                 </a:solidFill>
@@ -8532,16 +8534,16 @@
                 <a:ea typeface="Aptos" pitchFamily="34" charset="-122"/>
                 <a:cs typeface="Aptos" pitchFamily="34" charset="-120"/>
               </a:rPr>
-              <a:t>• Include content inventory, source authority, document owners, update schedule, sensitivity.</a:t>
-            </a:r>
-            <a:endParaRPr lang="en-US" sz="2100" dirty="0"/>
-          </a:p>
-          <a:p>
-            <a:pPr indent="0" marL="0">
-              <a:buNone/>
-            </a:pPr>
-            <a:r>
-              <a:rPr lang="en-US" sz="2100" dirty="0">
+              <a:t>• Include content inventory, source authority, document owners, update.</a:t>
+            </a:r>
+            <a:endParaRPr lang="en-US" sz="1920" dirty="0"/>
+          </a:p>
+          <a:p>
+            <a:pPr indent="0" marL="0">
+              <a:buNone/>
+            </a:pPr>
+            <a:r>
+              <a:rPr lang="en-US" sz="1920" dirty="0">
                 <a:solidFill>
                   <a:srgbClr val="003A63"/>
                 </a:solidFill>
@@ -8549,9 +8551,9 @@
                 <a:ea typeface="Aptos" pitchFamily="34" charset="-122"/>
                 <a:cs typeface="Aptos" pitchFamily="34" charset="-120"/>
               </a:rPr>
-              <a:t>• The checklist should identify at least three “do not answer” or escalation situations, such as.</a:t>
-            </a:r>
-            <a:endParaRPr lang="en-US" sz="2100" dirty="0"/>
+              <a:t>• The checklist should identify at least three “do not answer” or escalation.</a:t>
+            </a:r>
+            <a:endParaRPr lang="en-US" sz="1920" dirty="0"/>
           </a:p>
         </p:txBody>
       </p:sp>
@@ -8563,12 +8565,12 @@
         </p:nvSpPr>
         <p:spPr>
           <a:xfrm>
-            <a:off x="7635240" y="1325880"/>
-            <a:ext cx="3474720" cy="1207008"/>
+            <a:off x="7543800" y="1325880"/>
+            <a:ext cx="3611880" cy="1261872"/>
           </a:xfrm>
           <a:prstGeom prst="roundRect">
             <a:avLst>
-              <a:gd name="adj" fmla="val 9091"/>
+              <a:gd name="adj" fmla="val 8696"/>
             </a:avLst>
           </a:prstGeom>
           <a:solidFill>
@@ -8590,8 +8592,8 @@
         </p:nvSpPr>
         <p:spPr>
           <a:xfrm>
-            <a:off x="7799832" y="1472184"/>
-            <a:ext cx="3145536" cy="256032"/>
+            <a:off x="7708392" y="1453896"/>
+            <a:ext cx="3282696" cy="228600"/>
           </a:xfrm>
           <a:prstGeom prst="rect">
             <a:avLst/>
@@ -8607,7 +8609,7 @@
               <a:buNone/>
             </a:pPr>
             <a:r>
-              <a:rPr lang="en-US" sz="1300" b="1" dirty="0">
+              <a:rPr lang="en-US" sz="1220" b="1" dirty="0">
                 <a:solidFill>
                   <a:srgbClr val="0068B7"/>
                 </a:solidFill>
@@ -8617,7 +8619,7 @@
               </a:rPr>
               <a:t>Practice focus</a:t>
             </a:r>
-            <a:endParaRPr lang="en-US" sz="1300" dirty="0"/>
+            <a:endParaRPr lang="en-US" sz="1220" dirty="0"/>
           </a:p>
         </p:txBody>
       </p:sp>
@@ -8629,8 +8631,8 @@
         </p:nvSpPr>
         <p:spPr>
           <a:xfrm>
-            <a:off x="7799832" y="1801368"/>
-            <a:ext cx="3145536" cy="640080"/>
+            <a:off x="7708392" y="1764792"/>
+            <a:ext cx="3282696" cy="749808"/>
           </a:xfrm>
           <a:prstGeom prst="rect">
             <a:avLst/>
@@ -8648,7 +8650,7 @@
               <a:buNone/>
             </a:pPr>
             <a:r>
-              <a:rPr lang="en-US" sz="1320" dirty="0">
+              <a:rPr lang="en-US" sz="1220" dirty="0">
                 <a:solidFill>
                   <a:srgbClr val="17364A"/>
                 </a:solidFill>
@@ -8658,7 +8660,7 @@
               </a:rPr>
               <a:t>Create a RAG readiness checklist for one public health knowledge workflow.</a:t>
             </a:r>
-            <a:endParaRPr lang="en-US" sz="1320" dirty="0"/>
+            <a:endParaRPr lang="en-US" sz="1220" dirty="0"/>
           </a:p>
         </p:txBody>
       </p:sp>
@@ -8670,12 +8672,12 @@
         </p:nvSpPr>
         <p:spPr>
           <a:xfrm>
-            <a:off x="7635240" y="2670048"/>
-            <a:ext cx="3474720" cy="1377086"/>
+            <a:off x="7543800" y="2724912"/>
+            <a:ext cx="3611880" cy="1527048"/>
           </a:xfrm>
           <a:prstGeom prst="roundRect">
             <a:avLst>
-              <a:gd name="adj" fmla="val 7968"/>
+              <a:gd name="adj" fmla="val 7186"/>
             </a:avLst>
           </a:prstGeom>
           <a:solidFill>
@@ -8697,8 +8699,8 @@
         </p:nvSpPr>
         <p:spPr>
           <a:xfrm>
-            <a:off x="7799832" y="2816352"/>
-            <a:ext cx="3145536" cy="256032"/>
+            <a:off x="7708392" y="2852928"/>
+            <a:ext cx="3282696" cy="228600"/>
           </a:xfrm>
           <a:prstGeom prst="rect">
             <a:avLst/>
@@ -8714,7 +8716,7 @@
               <a:buNone/>
             </a:pPr>
             <a:r>
-              <a:rPr lang="en-US" sz="1300" b="1" dirty="0">
+              <a:rPr lang="en-US" sz="1220" b="1" dirty="0">
                 <a:solidFill>
                   <a:srgbClr val="0068B7"/>
                 </a:solidFill>
@@ -8724,7 +8726,7 @@
               </a:rPr>
               <a:t>Concept checkpoints</a:t>
             </a:r>
-            <a:endParaRPr lang="en-US" sz="1300" dirty="0"/>
+            <a:endParaRPr lang="en-US" sz="1220" dirty="0"/>
           </a:p>
         </p:txBody>
       </p:sp>
@@ -8736,8 +8738,8 @@
         </p:nvSpPr>
         <p:spPr>
           <a:xfrm>
-            <a:off x="7818120" y="3182112"/>
-            <a:ext cx="3090672" cy="718718"/>
+            <a:off x="7726680" y="3182112"/>
+            <a:ext cx="3227832" cy="960120"/>
           </a:xfrm>
           <a:prstGeom prst="rect">
             <a:avLst/>
@@ -8755,7 +8757,7 @@
               <a:buNone/>
             </a:pPr>
             <a:r>
-              <a:rPr lang="en-US" sz="1220" dirty="0">
+              <a:rPr lang="en-US" sz="1140" dirty="0">
                 <a:solidFill>
                   <a:srgbClr val="17364A"/>
                 </a:solidFill>
@@ -8763,16 +8765,16 @@
                 <a:ea typeface="Aptos" pitchFamily="34" charset="-122"/>
                 <a:cs typeface="Aptos" pitchFamily="34" charset="-120"/>
               </a:rPr>
-              <a:t>Include content inventory, source authority, document owners,.</a:t>
-            </a:r>
-            <a:endParaRPr lang="en-US" sz="1220" dirty="0"/>
-          </a:p>
-          <a:p>
-            <a:pPr indent="0" marL="0">
-              <a:buNone/>
-            </a:pPr>
-            <a:r>
-              <a:rPr lang="en-US" sz="1220" dirty="0">
+              <a:t>Include content inventory, source authority,.</a:t>
+            </a:r>
+            <a:endParaRPr lang="en-US" sz="1140" dirty="0"/>
+          </a:p>
+          <a:p>
+            <a:pPr indent="0" marL="0">
+              <a:buNone/>
+            </a:pPr>
+            <a:r>
+              <a:rPr lang="en-US" sz="1140" dirty="0">
                 <a:solidFill>
                   <a:srgbClr val="17364A"/>
                 </a:solidFill>
@@ -8780,9 +8782,9 @@
                 <a:ea typeface="Aptos" pitchFamily="34" charset="-122"/>
                 <a:cs typeface="Aptos" pitchFamily="34" charset="-120"/>
               </a:rPr>
-              <a:t>The checklist should identify at least three “do not answer” or.</a:t>
-            </a:r>
-            <a:endParaRPr lang="en-US" sz="1220" dirty="0"/>
+              <a:t>The checklist should identify at least three “do.</a:t>
+            </a:r>
+            <a:endParaRPr lang="en-US" sz="1140" dirty="0"/>
           </a:p>
         </p:txBody>
       </p:sp>
@@ -8794,12 +8796,12 @@
         </p:nvSpPr>
         <p:spPr>
           <a:xfrm>
-            <a:off x="7635240" y="4184294"/>
-            <a:ext cx="3474720" cy="1466698"/>
+            <a:off x="7543800" y="4389120"/>
+            <a:ext cx="3611880" cy="1261872"/>
           </a:xfrm>
           <a:prstGeom prst="roundRect">
             <a:avLst>
-              <a:gd name="adj" fmla="val 7481"/>
+              <a:gd name="adj" fmla="val 8696"/>
             </a:avLst>
           </a:prstGeom>
           <a:solidFill>
@@ -8821,8 +8823,8 @@
         </p:nvSpPr>
         <p:spPr>
           <a:xfrm>
-            <a:off x="7799832" y="4330598"/>
-            <a:ext cx="3145536" cy="256032"/>
+            <a:off x="7708392" y="4517136"/>
+            <a:ext cx="3282696" cy="228600"/>
           </a:xfrm>
           <a:prstGeom prst="rect">
             <a:avLst/>
@@ -8838,7 +8840,7 @@
               <a:buNone/>
             </a:pPr>
             <a:r>
-              <a:rPr lang="en-US" sz="1300" b="1" dirty="0">
+              <a:rPr lang="en-US" sz="1220" b="1" dirty="0">
                 <a:solidFill>
                   <a:srgbClr val="0068B7"/>
                 </a:solidFill>
@@ -8848,7 +8850,7 @@
               </a:rPr>
               <a:t>What to produce</a:t>
             </a:r>
-            <a:endParaRPr lang="en-US" sz="1300" dirty="0"/>
+            <a:endParaRPr lang="en-US" sz="1220" dirty="0"/>
           </a:p>
         </p:txBody>
       </p:sp>
@@ -8860,8 +8862,8 @@
         </p:nvSpPr>
         <p:spPr>
           <a:xfrm>
-            <a:off x="7799832" y="4659782"/>
-            <a:ext cx="3145536" cy="899770"/>
+            <a:off x="7708392" y="4828032"/>
+            <a:ext cx="3282696" cy="749808"/>
           </a:xfrm>
           <a:prstGeom prst="rect">
             <a:avLst/>
@@ -8879,7 +8881,7 @@
               <a:buNone/>
             </a:pPr>
             <a:r>
-              <a:rPr lang="en-US" sz="1320" dirty="0">
+              <a:rPr lang="en-US" sz="1220" dirty="0">
                 <a:solidFill>
                   <a:srgbClr val="17364A"/>
                 </a:solidFill>
@@ -8887,9 +8889,9 @@
                 <a:ea typeface="Aptos" pitchFamily="34" charset="-122"/>
                 <a:cs typeface="Aptos" pitchFamily="34" charset="-120"/>
               </a:rPr>
-              <a:t>Use the assignment to test whether you can explain the concept, apply it to a realistic public health situation, and identify what would need review before the work moves forward.</a:t>
-            </a:r>
-            <a:endParaRPr lang="en-US" sz="1320" dirty="0"/>
+              <a:t>Use the assignment to test whether you can explain the concept, apply it to a.</a:t>
+            </a:r>
+            <a:endParaRPr lang="en-US" sz="1220" dirty="0"/>
           </a:p>
         </p:txBody>
       </p:sp>
@@ -9180,8 +9182,8 @@
         </p:nvSpPr>
         <p:spPr>
           <a:xfrm>
-            <a:off x="868680" y="1508760"/>
-            <a:ext cx="6309360" cy="4160520"/>
+            <a:off x="822960" y="1463040"/>
+            <a:ext cx="6565392" cy="4343400"/>
           </a:xfrm>
           <a:prstGeom prst="rect">
             <a:avLst/>
@@ -9199,7 +9201,7 @@
               <a:buNone/>
             </a:pPr>
             <a:r>
-              <a:rPr lang="en-US" sz="2100" dirty="0">
+              <a:rPr lang="en-US" sz="1920" dirty="0">
                 <a:solidFill>
                   <a:srgbClr val="003A63"/>
                 </a:solidFill>
@@ -9209,14 +9211,14 @@
               </a:rPr>
               <a:t>• RAG readiness checklist</a:t>
             </a:r>
-            <a:endParaRPr lang="en-US" sz="2100" dirty="0"/>
-          </a:p>
-          <a:p>
-            <a:pPr indent="0" marL="0">
-              <a:buNone/>
-            </a:pPr>
-            <a:r>
-              <a:rPr lang="en-US" sz="2100" dirty="0">
+            <a:endParaRPr lang="en-US" sz="1920" dirty="0"/>
+          </a:p>
+          <a:p>
+            <a:pPr indent="0" marL="0">
+              <a:buNone/>
+            </a:pPr>
+            <a:r>
+              <a:rPr lang="en-US" sz="1920" dirty="0">
                 <a:solidFill>
                   <a:srgbClr val="003A63"/>
                 </a:solidFill>
@@ -9226,14 +9228,14 @@
               </a:rPr>
               <a:t>• Content inventory and ownership table</a:t>
             </a:r>
-            <a:endParaRPr lang="en-US" sz="2100" dirty="0"/>
-          </a:p>
-          <a:p>
-            <a:pPr indent="0" marL="0">
-              <a:buNone/>
-            </a:pPr>
-            <a:r>
-              <a:rPr lang="en-US" sz="2100" dirty="0">
+            <a:endParaRPr lang="en-US" sz="1920" dirty="0"/>
+          </a:p>
+          <a:p>
+            <a:pPr indent="0" marL="0">
+              <a:buNone/>
+            </a:pPr>
+            <a:r>
+              <a:rPr lang="en-US" sz="1920" dirty="0">
                 <a:solidFill>
                   <a:srgbClr val="003A63"/>
                 </a:solidFill>
@@ -9243,7 +9245,7 @@
               </a:rPr>
               <a:t>• Retrieval test question set</a:t>
             </a:r>
-            <a:endParaRPr lang="en-US" sz="2100" dirty="0"/>
+            <a:endParaRPr lang="en-US" sz="1920" dirty="0"/>
           </a:p>
         </p:txBody>
       </p:sp>
@@ -9255,12 +9257,12 @@
         </p:nvSpPr>
         <p:spPr>
           <a:xfrm>
-            <a:off x="7635240" y="1325880"/>
-            <a:ext cx="3474720" cy="1207008"/>
+            <a:off x="7543800" y="1325880"/>
+            <a:ext cx="3611880" cy="1261872"/>
           </a:xfrm>
           <a:prstGeom prst="roundRect">
             <a:avLst>
-              <a:gd name="adj" fmla="val 9091"/>
+              <a:gd name="adj" fmla="val 8696"/>
             </a:avLst>
           </a:prstGeom>
           <a:solidFill>
@@ -9282,8 +9284,8 @@
         </p:nvSpPr>
         <p:spPr>
           <a:xfrm>
-            <a:off x="7799832" y="1472184"/>
-            <a:ext cx="3145536" cy="256032"/>
+            <a:off x="7708392" y="1453896"/>
+            <a:ext cx="3282696" cy="228600"/>
           </a:xfrm>
           <a:prstGeom prst="rect">
             <a:avLst/>
@@ -9299,7 +9301,7 @@
               <a:buNone/>
             </a:pPr>
             <a:r>
-              <a:rPr lang="en-US" sz="1300" b="1" dirty="0">
+              <a:rPr lang="en-US" sz="1220" b="1" dirty="0">
                 <a:solidFill>
                   <a:srgbClr val="0068B7"/>
                 </a:solidFill>
@@ -9309,7 +9311,7 @@
               </a:rPr>
               <a:t>Practice focus</a:t>
             </a:r>
-            <a:endParaRPr lang="en-US" sz="1300" dirty="0"/>
+            <a:endParaRPr lang="en-US" sz="1220" dirty="0"/>
           </a:p>
         </p:txBody>
       </p:sp>
@@ -9321,8 +9323,8 @@
         </p:nvSpPr>
         <p:spPr>
           <a:xfrm>
-            <a:off x="7799832" y="1801368"/>
-            <a:ext cx="3145536" cy="640080"/>
+            <a:off x="7708392" y="1764792"/>
+            <a:ext cx="3282696" cy="749808"/>
           </a:xfrm>
           <a:prstGeom prst="rect">
             <a:avLst/>
@@ -9340,7 +9342,7 @@
               <a:buNone/>
             </a:pPr>
             <a:r>
-              <a:rPr lang="en-US" sz="1320" dirty="0">
+              <a:rPr lang="en-US" sz="1220" dirty="0">
                 <a:solidFill>
                   <a:srgbClr val="17364A"/>
                 </a:solidFill>
@@ -9350,7 +9352,7 @@
               </a:rPr>
               <a:t>RAG readiness checklist</a:t>
             </a:r>
-            <a:endParaRPr lang="en-US" sz="1320" dirty="0"/>
+            <a:endParaRPr lang="en-US" sz="1220" dirty="0"/>
           </a:p>
         </p:txBody>
       </p:sp>
@@ -9362,12 +9364,12 @@
         </p:nvSpPr>
         <p:spPr>
           <a:xfrm>
-            <a:off x="7635240" y="2670048"/>
-            <a:ext cx="3474720" cy="1377086"/>
+            <a:off x="7543800" y="2724912"/>
+            <a:ext cx="3611880" cy="1527048"/>
           </a:xfrm>
           <a:prstGeom prst="roundRect">
             <a:avLst>
-              <a:gd name="adj" fmla="val 7968"/>
+              <a:gd name="adj" fmla="val 7186"/>
             </a:avLst>
           </a:prstGeom>
           <a:solidFill>
@@ -9389,8 +9391,8 @@
         </p:nvSpPr>
         <p:spPr>
           <a:xfrm>
-            <a:off x="7799832" y="2816352"/>
-            <a:ext cx="3145536" cy="256032"/>
+            <a:off x="7708392" y="2852928"/>
+            <a:ext cx="3282696" cy="228600"/>
           </a:xfrm>
           <a:prstGeom prst="rect">
             <a:avLst/>
@@ -9406,7 +9408,7 @@
               <a:buNone/>
             </a:pPr>
             <a:r>
-              <a:rPr lang="en-US" sz="1300" b="1" dirty="0">
+              <a:rPr lang="en-US" sz="1220" b="1" dirty="0">
                 <a:solidFill>
                   <a:srgbClr val="0068B7"/>
                 </a:solidFill>
@@ -9416,7 +9418,7 @@
               </a:rPr>
               <a:t>Concept checkpoints</a:t>
             </a:r>
-            <a:endParaRPr lang="en-US" sz="1300" dirty="0"/>
+            <a:endParaRPr lang="en-US" sz="1220" dirty="0"/>
           </a:p>
         </p:txBody>
       </p:sp>
@@ -9428,8 +9430,8 @@
         </p:nvSpPr>
         <p:spPr>
           <a:xfrm>
-            <a:off x="7818120" y="3182112"/>
-            <a:ext cx="3090672" cy="718718"/>
+            <a:off x="7726680" y="3182112"/>
+            <a:ext cx="3227832" cy="960120"/>
           </a:xfrm>
           <a:prstGeom prst="rect">
             <a:avLst/>
@@ -9447,7 +9449,7 @@
               <a:buNone/>
             </a:pPr>
             <a:r>
-              <a:rPr lang="en-US" sz="1220" dirty="0">
+              <a:rPr lang="en-US" sz="1140" dirty="0">
                 <a:solidFill>
                   <a:srgbClr val="17364A"/>
                 </a:solidFill>
@@ -9457,14 +9459,14 @@
               </a:rPr>
               <a:t>RAG readiness checklist</a:t>
             </a:r>
-            <a:endParaRPr lang="en-US" sz="1220" dirty="0"/>
-          </a:p>
-          <a:p>
-            <a:pPr indent="0" marL="0">
-              <a:buNone/>
-            </a:pPr>
-            <a:r>
-              <a:rPr lang="en-US" sz="1220" dirty="0">
+            <a:endParaRPr lang="en-US" sz="1140" dirty="0"/>
+          </a:p>
+          <a:p>
+            <a:pPr indent="0" marL="0">
+              <a:buNone/>
+            </a:pPr>
+            <a:r>
+              <a:rPr lang="en-US" sz="1140" dirty="0">
                 <a:solidFill>
                   <a:srgbClr val="17364A"/>
                 </a:solidFill>
@@ -9474,14 +9476,14 @@
               </a:rPr>
               <a:t>Content inventory and ownership table</a:t>
             </a:r>
-            <a:endParaRPr lang="en-US" sz="1220" dirty="0"/>
-          </a:p>
-          <a:p>
-            <a:pPr indent="0" marL="0">
-              <a:buNone/>
-            </a:pPr>
-            <a:r>
-              <a:rPr lang="en-US" sz="1220" dirty="0">
+            <a:endParaRPr lang="en-US" sz="1140" dirty="0"/>
+          </a:p>
+          <a:p>
+            <a:pPr indent="0" marL="0">
+              <a:buNone/>
+            </a:pPr>
+            <a:r>
+              <a:rPr lang="en-US" sz="1140" dirty="0">
                 <a:solidFill>
                   <a:srgbClr val="17364A"/>
                 </a:solidFill>
@@ -9491,7 +9493,7 @@
               </a:rPr>
               <a:t>Retrieval test question set</a:t>
             </a:r>
-            <a:endParaRPr lang="en-US" sz="1220" dirty="0"/>
+            <a:endParaRPr lang="en-US" sz="1140" dirty="0"/>
           </a:p>
         </p:txBody>
       </p:sp>
@@ -9503,12 +9505,12 @@
         </p:nvSpPr>
         <p:spPr>
           <a:xfrm>
-            <a:off x="7635240" y="4184294"/>
-            <a:ext cx="3474720" cy="1466698"/>
+            <a:off x="7543800" y="4389120"/>
+            <a:ext cx="3611880" cy="1261872"/>
           </a:xfrm>
           <a:prstGeom prst="roundRect">
             <a:avLst>
-              <a:gd name="adj" fmla="val 7481"/>
+              <a:gd name="adj" fmla="val 8696"/>
             </a:avLst>
           </a:prstGeom>
           <a:solidFill>
@@ -9530,8 +9532,8 @@
         </p:nvSpPr>
         <p:spPr>
           <a:xfrm>
-            <a:off x="7799832" y="4330598"/>
-            <a:ext cx="3145536" cy="256032"/>
+            <a:off x="7708392" y="4517136"/>
+            <a:ext cx="3282696" cy="228600"/>
           </a:xfrm>
           <a:prstGeom prst="rect">
             <a:avLst/>
@@ -9547,7 +9549,7 @@
               <a:buNone/>
             </a:pPr>
             <a:r>
-              <a:rPr lang="en-US" sz="1300" b="1" dirty="0">
+              <a:rPr lang="en-US" sz="1220" b="1" dirty="0">
                 <a:solidFill>
                   <a:srgbClr val="0068B7"/>
                 </a:solidFill>
@@ -9557,7 +9559,7 @@
               </a:rPr>
               <a:t>What to produce</a:t>
             </a:r>
-            <a:endParaRPr lang="en-US" sz="1300" dirty="0"/>
+            <a:endParaRPr lang="en-US" sz="1220" dirty="0"/>
           </a:p>
         </p:txBody>
       </p:sp>
@@ -9569,8 +9571,8 @@
         </p:nvSpPr>
         <p:spPr>
           <a:xfrm>
-            <a:off x="7799832" y="4659782"/>
-            <a:ext cx="3145536" cy="899770"/>
+            <a:off x="7708392" y="4828032"/>
+            <a:ext cx="3282696" cy="749808"/>
           </a:xfrm>
           <a:prstGeom prst="rect">
             <a:avLst/>
@@ -9588,7 +9590,7 @@
               <a:buNone/>
             </a:pPr>
             <a:r>
-              <a:rPr lang="en-US" sz="1320" dirty="0">
+              <a:rPr lang="en-US" sz="1220" dirty="0">
                 <a:solidFill>
                   <a:srgbClr val="17364A"/>
                 </a:solidFill>
@@ -9596,9 +9598,9 @@
                 <a:ea typeface="Aptos" pitchFamily="34" charset="-122"/>
                 <a:cs typeface="Aptos" pitchFamily="34" charset="-120"/>
               </a:rPr>
-              <a:t>Use the assignment to test whether you can explain the concept, apply it to a realistic public health situation, and identify what would need review before the work moves forward.</a:t>
-            </a:r>
-            <a:endParaRPr lang="en-US" sz="1320" dirty="0"/>
+              <a:t>Use the assignment to test whether you can explain the concept, apply it to a.</a:t>
+            </a:r>
+            <a:endParaRPr lang="en-US" sz="1220" dirty="0"/>
           </a:p>
         </p:txBody>
       </p:sp>
@@ -9889,8 +9891,8 @@
         </p:nvSpPr>
         <p:spPr>
           <a:xfrm>
-            <a:off x="868680" y="1508760"/>
-            <a:ext cx="6309360" cy="4160520"/>
+            <a:off x="822960" y="1463040"/>
+            <a:ext cx="6565392" cy="4343400"/>
           </a:xfrm>
           <a:prstGeom prst="rect">
             <a:avLst/>
@@ -9908,7 +9910,7 @@
               <a:buNone/>
             </a:pPr>
             <a:r>
-              <a:rPr lang="en-US" sz="2100" dirty="0">
+              <a:rPr lang="en-US" sz="1920" dirty="0">
                 <a:solidFill>
                   <a:srgbClr val="003A63"/>
                 </a:solidFill>
@@ -9918,7 +9920,7 @@
               </a:rPr>
               <a:t>• Citation and source verification protocol</a:t>
             </a:r>
-            <a:endParaRPr lang="en-US" sz="2100" dirty="0"/>
+            <a:endParaRPr lang="en-US" sz="1920" dirty="0"/>
           </a:p>
         </p:txBody>
       </p:sp>
@@ -9930,12 +9932,12 @@
         </p:nvSpPr>
         <p:spPr>
           <a:xfrm>
-            <a:off x="7635240" y="1325880"/>
-            <a:ext cx="3474720" cy="1207008"/>
+            <a:off x="7543800" y="1325880"/>
+            <a:ext cx="3611880" cy="1261872"/>
           </a:xfrm>
           <a:prstGeom prst="roundRect">
             <a:avLst>
-              <a:gd name="adj" fmla="val 9091"/>
+              <a:gd name="adj" fmla="val 8696"/>
             </a:avLst>
           </a:prstGeom>
           <a:solidFill>
@@ -9957,8 +9959,8 @@
         </p:nvSpPr>
         <p:spPr>
           <a:xfrm>
-            <a:off x="7799832" y="1472184"/>
-            <a:ext cx="3145536" cy="256032"/>
+            <a:off x="7708392" y="1453896"/>
+            <a:ext cx="3282696" cy="228600"/>
           </a:xfrm>
           <a:prstGeom prst="rect">
             <a:avLst/>
@@ -9974,7 +9976,7 @@
               <a:buNone/>
             </a:pPr>
             <a:r>
-              <a:rPr lang="en-US" sz="1300" b="1" dirty="0">
+              <a:rPr lang="en-US" sz="1220" b="1" dirty="0">
                 <a:solidFill>
                   <a:srgbClr val="0068B7"/>
                 </a:solidFill>
@@ -9984,7 +9986,7 @@
               </a:rPr>
               <a:t>Practice focus</a:t>
             </a:r>
-            <a:endParaRPr lang="en-US" sz="1300" dirty="0"/>
+            <a:endParaRPr lang="en-US" sz="1220" dirty="0"/>
           </a:p>
         </p:txBody>
       </p:sp>
@@ -9996,8 +9998,8 @@
         </p:nvSpPr>
         <p:spPr>
           <a:xfrm>
-            <a:off x="7799832" y="1801368"/>
-            <a:ext cx="3145536" cy="640080"/>
+            <a:off x="7708392" y="1764792"/>
+            <a:ext cx="3282696" cy="749808"/>
           </a:xfrm>
           <a:prstGeom prst="rect">
             <a:avLst/>
@@ -10015,7 +10017,7 @@
               <a:buNone/>
             </a:pPr>
             <a:r>
-              <a:rPr lang="en-US" sz="1320" dirty="0">
+              <a:rPr lang="en-US" sz="1220" dirty="0">
                 <a:solidFill>
                   <a:srgbClr val="17364A"/>
                 </a:solidFill>
@@ -10025,7 +10027,7 @@
               </a:rPr>
               <a:t>Citation and source verification protocol</a:t>
             </a:r>
-            <a:endParaRPr lang="en-US" sz="1320" dirty="0"/>
+            <a:endParaRPr lang="en-US" sz="1220" dirty="0"/>
           </a:p>
         </p:txBody>
       </p:sp>
@@ -10037,12 +10039,12 @@
         </p:nvSpPr>
         <p:spPr>
           <a:xfrm>
-            <a:off x="7635240" y="2670048"/>
-            <a:ext cx="3474720" cy="1377086"/>
+            <a:off x="7543800" y="2724912"/>
+            <a:ext cx="3611880" cy="1527048"/>
           </a:xfrm>
           <a:prstGeom prst="roundRect">
             <a:avLst>
-              <a:gd name="adj" fmla="val 7968"/>
+              <a:gd name="adj" fmla="val 7186"/>
             </a:avLst>
           </a:prstGeom>
           <a:solidFill>
@@ -10064,8 +10066,8 @@
         </p:nvSpPr>
         <p:spPr>
           <a:xfrm>
-            <a:off x="7799832" y="2816352"/>
-            <a:ext cx="3145536" cy="256032"/>
+            <a:off x="7708392" y="2852928"/>
+            <a:ext cx="3282696" cy="228600"/>
           </a:xfrm>
           <a:prstGeom prst="rect">
             <a:avLst/>
@@ -10081,7 +10083,7 @@
               <a:buNone/>
             </a:pPr>
             <a:r>
-              <a:rPr lang="en-US" sz="1300" b="1" dirty="0">
+              <a:rPr lang="en-US" sz="1220" b="1" dirty="0">
                 <a:solidFill>
                   <a:srgbClr val="0068B7"/>
                 </a:solidFill>
@@ -10091,7 +10093,7 @@
               </a:rPr>
               <a:t>Concept checkpoints</a:t>
             </a:r>
-            <a:endParaRPr lang="en-US" sz="1300" dirty="0"/>
+            <a:endParaRPr lang="en-US" sz="1220" dirty="0"/>
           </a:p>
         </p:txBody>
       </p:sp>
@@ -10103,8 +10105,8 @@
         </p:nvSpPr>
         <p:spPr>
           <a:xfrm>
-            <a:off x="7818120" y="3182112"/>
-            <a:ext cx="3090672" cy="718718"/>
+            <a:off x="7726680" y="3182112"/>
+            <a:ext cx="3227832" cy="960120"/>
           </a:xfrm>
           <a:prstGeom prst="rect">
             <a:avLst/>
@@ -10122,7 +10124,7 @@
               <a:buNone/>
             </a:pPr>
             <a:r>
-              <a:rPr lang="en-US" sz="1220" dirty="0">
+              <a:rPr lang="en-US" sz="1140" dirty="0">
                 <a:solidFill>
                   <a:srgbClr val="17364A"/>
                 </a:solidFill>
@@ -10132,7 +10134,7 @@
               </a:rPr>
               <a:t>Citation and source verification protocol</a:t>
             </a:r>
-            <a:endParaRPr lang="en-US" sz="1220" dirty="0"/>
+            <a:endParaRPr lang="en-US" sz="1140" dirty="0"/>
           </a:p>
         </p:txBody>
       </p:sp>
@@ -10144,12 +10146,12 @@
         </p:nvSpPr>
         <p:spPr>
           <a:xfrm>
-            <a:off x="7635240" y="4184294"/>
-            <a:ext cx="3474720" cy="1466698"/>
+            <a:off x="7543800" y="4389120"/>
+            <a:ext cx="3611880" cy="1261872"/>
           </a:xfrm>
           <a:prstGeom prst="roundRect">
             <a:avLst>
-              <a:gd name="adj" fmla="val 7481"/>
+              <a:gd name="adj" fmla="val 8696"/>
             </a:avLst>
           </a:prstGeom>
           <a:solidFill>
@@ -10171,8 +10173,8 @@
         </p:nvSpPr>
         <p:spPr>
           <a:xfrm>
-            <a:off x="7799832" y="4330598"/>
-            <a:ext cx="3145536" cy="256032"/>
+            <a:off x="7708392" y="4517136"/>
+            <a:ext cx="3282696" cy="228600"/>
           </a:xfrm>
           <a:prstGeom prst="rect">
             <a:avLst/>
@@ -10188,7 +10190,7 @@
               <a:buNone/>
             </a:pPr>
             <a:r>
-              <a:rPr lang="en-US" sz="1300" b="1" dirty="0">
+              <a:rPr lang="en-US" sz="1220" b="1" dirty="0">
                 <a:solidFill>
                   <a:srgbClr val="0068B7"/>
                 </a:solidFill>
@@ -10198,7 +10200,7 @@
               </a:rPr>
               <a:t>What to produce</a:t>
             </a:r>
-            <a:endParaRPr lang="en-US" sz="1300" dirty="0"/>
+            <a:endParaRPr lang="en-US" sz="1220" dirty="0"/>
           </a:p>
         </p:txBody>
       </p:sp>
@@ -10210,8 +10212,8 @@
         </p:nvSpPr>
         <p:spPr>
           <a:xfrm>
-            <a:off x="7799832" y="4659782"/>
-            <a:ext cx="3145536" cy="899770"/>
+            <a:off x="7708392" y="4828032"/>
+            <a:ext cx="3282696" cy="749808"/>
           </a:xfrm>
           <a:prstGeom prst="rect">
             <a:avLst/>
@@ -10229,7 +10231,7 @@
               <a:buNone/>
             </a:pPr>
             <a:r>
-              <a:rPr lang="en-US" sz="1320" dirty="0">
+              <a:rPr lang="en-US" sz="1220" dirty="0">
                 <a:solidFill>
                   <a:srgbClr val="17364A"/>
                 </a:solidFill>
@@ -10237,9 +10239,9 @@
                 <a:ea typeface="Aptos" pitchFamily="34" charset="-122"/>
                 <a:cs typeface="Aptos" pitchFamily="34" charset="-120"/>
               </a:rPr>
-              <a:t>Use the assignment to test whether you can explain the concept, apply it to a realistic public health situation, and identify what would need review before the work moves forward.</a:t>
-            </a:r>
-            <a:endParaRPr lang="en-US" sz="1320" dirty="0"/>
+              <a:t>Use the assignment to test whether you can explain the concept, apply it to a.</a:t>
+            </a:r>
+            <a:endParaRPr lang="en-US" sz="1220" dirty="0"/>
           </a:p>
         </p:txBody>
       </p:sp>
@@ -10557,7 +10559,7 @@
                 <a:ea typeface="Aptos" pitchFamily="34" charset="-122"/>
                 <a:cs typeface="Aptos" pitchFamily="34" charset="-120"/>
               </a:rPr>
-              <a:t>• Retrieval-augmented generation, often called RAG, combines generative AI with retrieval from a.</a:t>
+              <a:t>• Retrieval-augmented generation, often called RAG, combines generative AI.</a:t>
             </a:r>
             <a:endParaRPr lang="en-US" sz="2100" dirty="0"/>
           </a:p>
@@ -10574,7 +10576,7 @@
                 <a:ea typeface="Aptos" pitchFamily="34" charset="-122"/>
                 <a:cs typeface="Aptos" pitchFamily="34" charset="-120"/>
               </a:rPr>
-              <a:t>• Instead of relying only on a model’s general training, a RAG system searches approved content.</a:t>
+              <a:t>• Instead of relying only on a model’s general training, a RAG system searches.</a:t>
             </a:r>
             <a:endParaRPr lang="en-US" sz="2100" dirty="0"/>
           </a:p>
@@ -10591,7 +10593,7 @@
                 <a:ea typeface="Aptos" pitchFamily="34" charset="-122"/>
                 <a:cs typeface="Aptos" pitchFamily="34" charset="-120"/>
               </a:rPr>
-              <a:t>• In public health, RAG may support policy lookup, protocol interpretation, internal help desks,.</a:t>
+              <a:t>• In public health, RAG may support policy lookup, protocol interpretation,.</a:t>
             </a:r>
             <a:endParaRPr lang="en-US" sz="2100" dirty="0"/>
           </a:p>
@@ -10632,8 +10634,8 @@
         </p:nvSpPr>
         <p:spPr>
           <a:xfrm>
-            <a:off x="8074152" y="1563624"/>
-            <a:ext cx="2825496" cy="256032"/>
+            <a:off x="8074152" y="1545336"/>
+            <a:ext cx="2825496" cy="228600"/>
           </a:xfrm>
           <a:prstGeom prst="rect">
             <a:avLst/>
@@ -10649,7 +10651,7 @@
               <a:buNone/>
             </a:pPr>
             <a:r>
-              <a:rPr lang="en-US" sz="1300" b="1" dirty="0">
+              <a:rPr lang="en-US" sz="1220" b="1" dirty="0">
                 <a:solidFill>
                   <a:srgbClr val="0068B7"/>
                 </a:solidFill>
@@ -10659,7 +10661,7 @@
               </a:rPr>
               <a:t>Module details</a:t>
             </a:r>
-            <a:endParaRPr lang="en-US" sz="1300" dirty="0"/>
+            <a:endParaRPr lang="en-US" sz="1220" dirty="0"/>
           </a:p>
         </p:txBody>
       </p:sp>
@@ -10671,8 +10673,8 @@
         </p:nvSpPr>
         <p:spPr>
           <a:xfrm>
-            <a:off x="8074152" y="1892808"/>
-            <a:ext cx="2825496" cy="1353312"/>
+            <a:off x="8074152" y="1856232"/>
+            <a:ext cx="2825496" cy="1408176"/>
           </a:xfrm>
           <a:prstGeom prst="rect">
             <a:avLst/>
@@ -10690,7 +10692,7 @@
               <a:buNone/>
             </a:pPr>
             <a:r>
-              <a:rPr lang="en-US" sz="1320" dirty="0">
+              <a:rPr lang="en-US" sz="1220" dirty="0">
                 <a:solidFill>
                   <a:srgbClr val="17364A"/>
                 </a:solidFill>
@@ -10698,9 +10700,9 @@
                 <a:ea typeface="Aptos" pitchFamily="34" charset="-122"/>
                 <a:cs typeface="Aptos" pitchFamily="34" charset="-120"/>
               </a:rPr>
-              <a:t>Level: intermediate/practitioner Primary track: Technical Architecture Track Appears in tracks: analytics-modeling</a:t>
-            </a:r>
-            <a:endParaRPr lang="en-US" sz="1320" dirty="0"/>
+              <a:t>Level: intermediate/practitioner Primary track: Technical Architecture Track.</a:t>
+            </a:r>
+            <a:endParaRPr lang="en-US" sz="1220" dirty="0"/>
           </a:p>
         </p:txBody>
       </p:sp>
@@ -10739,8 +10741,8 @@
         </p:nvSpPr>
         <p:spPr>
           <a:xfrm>
-            <a:off x="8074152" y="3822192"/>
-            <a:ext cx="2825496" cy="256032"/>
+            <a:off x="8074152" y="3803904"/>
+            <a:ext cx="2825496" cy="228600"/>
           </a:xfrm>
           <a:prstGeom prst="rect">
             <a:avLst/>
@@ -10756,7 +10758,7 @@
               <a:buNone/>
             </a:pPr>
             <a:r>
-              <a:rPr lang="en-US" sz="1300" b="1" dirty="0">
+              <a:rPr lang="en-US" sz="1220" b="1" dirty="0">
                 <a:solidFill>
                   <a:srgbClr val="0068B7"/>
                 </a:solidFill>
@@ -10766,7 +10768,7 @@
               </a:rPr>
               <a:t>Learning sequence</a:t>
             </a:r>
-            <a:endParaRPr lang="en-US" sz="1300" dirty="0"/>
+            <a:endParaRPr lang="en-US" sz="1220" dirty="0"/>
           </a:p>
         </p:txBody>
       </p:sp>
@@ -10778,8 +10780,8 @@
         </p:nvSpPr>
         <p:spPr>
           <a:xfrm>
-            <a:off x="8092440" y="4187952"/>
-            <a:ext cx="2770632" cy="1033272"/>
+            <a:off x="8092440" y="4133088"/>
+            <a:ext cx="2770632" cy="1124712"/>
           </a:xfrm>
           <a:prstGeom prst="rect">
             <a:avLst/>
@@ -10797,7 +10799,7 @@
               <a:buNone/>
             </a:pPr>
             <a:r>
-              <a:rPr lang="en-US" sz="1220" dirty="0">
+              <a:rPr lang="en-US" sz="1140" dirty="0">
                 <a:solidFill>
                   <a:srgbClr val="17364A"/>
                 </a:solidFill>
@@ -10807,14 +10809,14 @@
               </a:rPr>
               <a:t>Read the module for shared vocabulary and context.</a:t>
             </a:r>
-            <a:endParaRPr lang="en-US" sz="1220" dirty="0"/>
-          </a:p>
-          <a:p>
-            <a:pPr indent="0" marL="0">
-              <a:buNone/>
-            </a:pPr>
-            <a:r>
-              <a:rPr lang="en-US" sz="1220" dirty="0">
+            <a:endParaRPr lang="en-US" sz="1140" dirty="0"/>
+          </a:p>
+          <a:p>
+            <a:pPr indent="0" marL="0">
+              <a:buNone/>
+            </a:pPr>
+            <a:r>
+              <a:rPr lang="en-US" sz="1140" dirty="0">
                 <a:solidFill>
                   <a:srgbClr val="17364A"/>
                 </a:solidFill>
@@ -10822,16 +10824,16 @@
                 <a:ea typeface="Aptos" pitchFamily="34" charset="-122"/>
                 <a:cs typeface="Aptos" pitchFamily="34" charset="-120"/>
               </a:rPr>
-              <a:t>Complete the practical exercise to apply the concept.</a:t>
-            </a:r>
-            <a:endParaRPr lang="en-US" sz="1220" dirty="0"/>
-          </a:p>
-          <a:p>
-            <a:pPr indent="0" marL="0">
-              <a:buNone/>
-            </a:pPr>
-            <a:r>
-              <a:rPr lang="en-US" sz="1220" dirty="0">
+              <a:t>Complete the practical exercise to apply the.</a:t>
+            </a:r>
+            <a:endParaRPr lang="en-US" sz="1140" dirty="0"/>
+          </a:p>
+          <a:p>
+            <a:pPr indent="0" marL="0">
+              <a:buNone/>
+            </a:pPr>
+            <a:r>
+              <a:rPr lang="en-US" sz="1140" dirty="0">
                 <a:solidFill>
                   <a:srgbClr val="17364A"/>
                 </a:solidFill>
@@ -10841,7 +10843,7 @@
               </a:rPr>
               <a:t>Use the notes and references for deeper review.</a:t>
             </a:r>
-            <a:endParaRPr lang="en-US" sz="1220" dirty="0"/>
+            <a:endParaRPr lang="en-US" sz="1140" dirty="0"/>
           </a:p>
         </p:txBody>
       </p:sp>
@@ -11132,8 +11134,8 @@
         </p:nvSpPr>
         <p:spPr>
           <a:xfrm>
-            <a:off x="868680" y="1508760"/>
-            <a:ext cx="6309360" cy="4160520"/>
+            <a:off x="822960" y="1463040"/>
+            <a:ext cx="6565392" cy="4343400"/>
           </a:xfrm>
           <a:prstGeom prst="rect">
             <a:avLst/>
@@ -11151,7 +11153,7 @@
               <a:buNone/>
             </a:pPr>
             <a:r>
-              <a:rPr lang="en-US" sz="2100" dirty="0">
+              <a:rPr lang="en-US" sz="1920" dirty="0">
                 <a:solidFill>
                   <a:srgbClr val="003A63"/>
                 </a:solidFill>
@@ -11161,14 +11163,14 @@
               </a:rPr>
               <a:t>• RAG readiness checklist</a:t>
             </a:r>
-            <a:endParaRPr lang="en-US" sz="2100" dirty="0"/>
-          </a:p>
-          <a:p>
-            <a:pPr indent="0" marL="0">
-              <a:buNone/>
-            </a:pPr>
-            <a:r>
-              <a:rPr lang="en-US" sz="2100" dirty="0">
+            <a:endParaRPr lang="en-US" sz="1920" dirty="0"/>
+          </a:p>
+          <a:p>
+            <a:pPr indent="0" marL="0">
+              <a:buNone/>
+            </a:pPr>
+            <a:r>
+              <a:rPr lang="en-US" sz="1920" dirty="0">
                 <a:solidFill>
                   <a:srgbClr val="003A63"/>
                 </a:solidFill>
@@ -11178,14 +11180,14 @@
               </a:rPr>
               <a:t>• Content inventory and ownership table</a:t>
             </a:r>
-            <a:endParaRPr lang="en-US" sz="2100" dirty="0"/>
-          </a:p>
-          <a:p>
-            <a:pPr indent="0" marL="0">
-              <a:buNone/>
-            </a:pPr>
-            <a:r>
-              <a:rPr lang="en-US" sz="2100" dirty="0">
+            <a:endParaRPr lang="en-US" sz="1920" dirty="0"/>
+          </a:p>
+          <a:p>
+            <a:pPr indent="0" marL="0">
+              <a:buNone/>
+            </a:pPr>
+            <a:r>
+              <a:rPr lang="en-US" sz="1920" dirty="0">
                 <a:solidFill>
                   <a:srgbClr val="003A63"/>
                 </a:solidFill>
@@ -11195,7 +11197,7 @@
               </a:rPr>
               <a:t>• Retrieval test question set</a:t>
             </a:r>
-            <a:endParaRPr lang="en-US" sz="2100" dirty="0"/>
+            <a:endParaRPr lang="en-US" sz="1920" dirty="0"/>
           </a:p>
         </p:txBody>
       </p:sp>
@@ -11207,12 +11209,12 @@
         </p:nvSpPr>
         <p:spPr>
           <a:xfrm>
-            <a:off x="7635240" y="1325880"/>
-            <a:ext cx="3474720" cy="1207008"/>
+            <a:off x="7543800" y="1325880"/>
+            <a:ext cx="3611880" cy="1261872"/>
           </a:xfrm>
           <a:prstGeom prst="roundRect">
             <a:avLst>
-              <a:gd name="adj" fmla="val 9091"/>
+              <a:gd name="adj" fmla="val 8696"/>
             </a:avLst>
           </a:prstGeom>
           <a:solidFill>
@@ -11234,8 +11236,8 @@
         </p:nvSpPr>
         <p:spPr>
           <a:xfrm>
-            <a:off x="7799832" y="1472184"/>
-            <a:ext cx="3145536" cy="256032"/>
+            <a:off x="7708392" y="1453896"/>
+            <a:ext cx="3282696" cy="228600"/>
           </a:xfrm>
           <a:prstGeom prst="rect">
             <a:avLst/>
@@ -11251,7 +11253,7 @@
               <a:buNone/>
             </a:pPr>
             <a:r>
-              <a:rPr lang="en-US" sz="1300" b="1" dirty="0">
+              <a:rPr lang="en-US" sz="1220" b="1" dirty="0">
                 <a:solidFill>
                   <a:srgbClr val="0068B7"/>
                 </a:solidFill>
@@ -11261,7 +11263,7 @@
               </a:rPr>
               <a:t>Practice focus</a:t>
             </a:r>
-            <a:endParaRPr lang="en-US" sz="1300" dirty="0"/>
+            <a:endParaRPr lang="en-US" sz="1220" dirty="0"/>
           </a:p>
         </p:txBody>
       </p:sp>
@@ -11273,8 +11275,8 @@
         </p:nvSpPr>
         <p:spPr>
           <a:xfrm>
-            <a:off x="7799832" y="1801368"/>
-            <a:ext cx="3145536" cy="640080"/>
+            <a:off x="7708392" y="1764792"/>
+            <a:ext cx="3282696" cy="749808"/>
           </a:xfrm>
           <a:prstGeom prst="rect">
             <a:avLst/>
@@ -11292,7 +11294,7 @@
               <a:buNone/>
             </a:pPr>
             <a:r>
-              <a:rPr lang="en-US" sz="1320" dirty="0">
+              <a:rPr lang="en-US" sz="1220" dirty="0">
                 <a:solidFill>
                   <a:srgbClr val="17364A"/>
                 </a:solidFill>
@@ -11302,7 +11304,7 @@
               </a:rPr>
               <a:t>RAG readiness checklist</a:t>
             </a:r>
-            <a:endParaRPr lang="en-US" sz="1320" dirty="0"/>
+            <a:endParaRPr lang="en-US" sz="1220" dirty="0"/>
           </a:p>
         </p:txBody>
       </p:sp>
@@ -11314,12 +11316,12 @@
         </p:nvSpPr>
         <p:spPr>
           <a:xfrm>
-            <a:off x="7635240" y="2670048"/>
-            <a:ext cx="3474720" cy="1377086"/>
+            <a:off x="7543800" y="2724912"/>
+            <a:ext cx="3611880" cy="1527048"/>
           </a:xfrm>
           <a:prstGeom prst="roundRect">
             <a:avLst>
-              <a:gd name="adj" fmla="val 7968"/>
+              <a:gd name="adj" fmla="val 7186"/>
             </a:avLst>
           </a:prstGeom>
           <a:solidFill>
@@ -11341,8 +11343,8 @@
         </p:nvSpPr>
         <p:spPr>
           <a:xfrm>
-            <a:off x="7799832" y="2816352"/>
-            <a:ext cx="3145536" cy="256032"/>
+            <a:off x="7708392" y="2852928"/>
+            <a:ext cx="3282696" cy="228600"/>
           </a:xfrm>
           <a:prstGeom prst="rect">
             <a:avLst/>
@@ -11358,7 +11360,7 @@
               <a:buNone/>
             </a:pPr>
             <a:r>
-              <a:rPr lang="en-US" sz="1300" b="1" dirty="0">
+              <a:rPr lang="en-US" sz="1220" b="1" dirty="0">
                 <a:solidFill>
                   <a:srgbClr val="0068B7"/>
                 </a:solidFill>
@@ -11368,7 +11370,7 @@
               </a:rPr>
               <a:t>Concept checkpoints</a:t>
             </a:r>
-            <a:endParaRPr lang="en-US" sz="1300" dirty="0"/>
+            <a:endParaRPr lang="en-US" sz="1220" dirty="0"/>
           </a:p>
         </p:txBody>
       </p:sp>
@@ -11380,8 +11382,8 @@
         </p:nvSpPr>
         <p:spPr>
           <a:xfrm>
-            <a:off x="7818120" y="3182112"/>
-            <a:ext cx="3090672" cy="718718"/>
+            <a:off x="7726680" y="3182112"/>
+            <a:ext cx="3227832" cy="960120"/>
           </a:xfrm>
           <a:prstGeom prst="rect">
             <a:avLst/>
@@ -11399,7 +11401,7 @@
               <a:buNone/>
             </a:pPr>
             <a:r>
-              <a:rPr lang="en-US" sz="1220" dirty="0">
+              <a:rPr lang="en-US" sz="1140" dirty="0">
                 <a:solidFill>
                   <a:srgbClr val="17364A"/>
                 </a:solidFill>
@@ -11409,14 +11411,14 @@
               </a:rPr>
               <a:t>RAG readiness checklist</a:t>
             </a:r>
-            <a:endParaRPr lang="en-US" sz="1220" dirty="0"/>
-          </a:p>
-          <a:p>
-            <a:pPr indent="0" marL="0">
-              <a:buNone/>
-            </a:pPr>
-            <a:r>
-              <a:rPr lang="en-US" sz="1220" dirty="0">
+            <a:endParaRPr lang="en-US" sz="1140" dirty="0"/>
+          </a:p>
+          <a:p>
+            <a:pPr indent="0" marL="0">
+              <a:buNone/>
+            </a:pPr>
+            <a:r>
+              <a:rPr lang="en-US" sz="1140" dirty="0">
                 <a:solidFill>
                   <a:srgbClr val="17364A"/>
                 </a:solidFill>
@@ -11426,14 +11428,14 @@
               </a:rPr>
               <a:t>Content inventory and ownership table</a:t>
             </a:r>
-            <a:endParaRPr lang="en-US" sz="1220" dirty="0"/>
-          </a:p>
-          <a:p>
-            <a:pPr indent="0" marL="0">
-              <a:buNone/>
-            </a:pPr>
-            <a:r>
-              <a:rPr lang="en-US" sz="1220" dirty="0">
+            <a:endParaRPr lang="en-US" sz="1140" dirty="0"/>
+          </a:p>
+          <a:p>
+            <a:pPr indent="0" marL="0">
+              <a:buNone/>
+            </a:pPr>
+            <a:r>
+              <a:rPr lang="en-US" sz="1140" dirty="0">
                 <a:solidFill>
                   <a:srgbClr val="17364A"/>
                 </a:solidFill>
@@ -11443,7 +11445,7 @@
               </a:rPr>
               <a:t>Retrieval test question set</a:t>
             </a:r>
-            <a:endParaRPr lang="en-US" sz="1220" dirty="0"/>
+            <a:endParaRPr lang="en-US" sz="1140" dirty="0"/>
           </a:p>
         </p:txBody>
       </p:sp>
@@ -11455,12 +11457,12 @@
         </p:nvSpPr>
         <p:spPr>
           <a:xfrm>
-            <a:off x="7635240" y="4184294"/>
-            <a:ext cx="3474720" cy="1466698"/>
+            <a:off x="7543800" y="4389120"/>
+            <a:ext cx="3611880" cy="1261872"/>
           </a:xfrm>
           <a:prstGeom prst="roundRect">
             <a:avLst>
-              <a:gd name="adj" fmla="val 7481"/>
+              <a:gd name="adj" fmla="val 8696"/>
             </a:avLst>
           </a:prstGeom>
           <a:solidFill>
@@ -11482,8 +11484,8 @@
         </p:nvSpPr>
         <p:spPr>
           <a:xfrm>
-            <a:off x="7799832" y="4330598"/>
-            <a:ext cx="3145536" cy="256032"/>
+            <a:off x="7708392" y="4517136"/>
+            <a:ext cx="3282696" cy="228600"/>
           </a:xfrm>
           <a:prstGeom prst="rect">
             <a:avLst/>
@@ -11499,7 +11501,7 @@
               <a:buNone/>
             </a:pPr>
             <a:r>
-              <a:rPr lang="en-US" sz="1300" b="1" dirty="0">
+              <a:rPr lang="en-US" sz="1220" b="1" dirty="0">
                 <a:solidFill>
                   <a:srgbClr val="0068B7"/>
                 </a:solidFill>
@@ -11509,7 +11511,7 @@
               </a:rPr>
               <a:t>What to produce</a:t>
             </a:r>
-            <a:endParaRPr lang="en-US" sz="1300" dirty="0"/>
+            <a:endParaRPr lang="en-US" sz="1220" dirty="0"/>
           </a:p>
         </p:txBody>
       </p:sp>
@@ -11521,8 +11523,8 @@
         </p:nvSpPr>
         <p:spPr>
           <a:xfrm>
-            <a:off x="7799832" y="4659782"/>
-            <a:ext cx="3145536" cy="899770"/>
+            <a:off x="7708392" y="4828032"/>
+            <a:ext cx="3282696" cy="749808"/>
           </a:xfrm>
           <a:prstGeom prst="rect">
             <a:avLst/>
@@ -11540,7 +11542,7 @@
               <a:buNone/>
             </a:pPr>
             <a:r>
-              <a:rPr lang="en-US" sz="1320" dirty="0">
+              <a:rPr lang="en-US" sz="1220" dirty="0">
                 <a:solidFill>
                   <a:srgbClr val="17364A"/>
                 </a:solidFill>
@@ -11548,9 +11550,9 @@
                 <a:ea typeface="Aptos" pitchFamily="34" charset="-122"/>
                 <a:cs typeface="Aptos" pitchFamily="34" charset="-120"/>
               </a:rPr>
-              <a:t>Use the assignment to test whether you can explain the concept, apply it to a realistic public health situation, and identify what would need review before the work moves forward.</a:t>
-            </a:r>
-            <a:endParaRPr lang="en-US" sz="1320" dirty="0"/>
+              <a:t>Use the assignment to test whether you can explain the concept, apply it to a.</a:t>
+            </a:r>
+            <a:endParaRPr lang="en-US" sz="1220" dirty="0"/>
           </a:p>
         </p:txBody>
       </p:sp>
@@ -11841,8 +11843,8 @@
         </p:nvSpPr>
         <p:spPr>
           <a:xfrm>
-            <a:off x="868680" y="1508760"/>
-            <a:ext cx="6309360" cy="4160520"/>
+            <a:off x="822960" y="1463040"/>
+            <a:ext cx="6565392" cy="4343400"/>
           </a:xfrm>
           <a:prstGeom prst="rect">
             <a:avLst/>
@@ -11860,7 +11862,7 @@
               <a:buNone/>
             </a:pPr>
             <a:r>
-              <a:rPr lang="en-US" sz="2100" dirty="0">
+              <a:rPr lang="en-US" sz="1920" dirty="0">
                 <a:solidFill>
                   <a:srgbClr val="003A63"/>
                 </a:solidFill>
@@ -11870,14 +11872,14 @@
               </a:rPr>
               <a:t>• 1. What is RAG?</a:t>
             </a:r>
-            <a:endParaRPr lang="en-US" sz="2100" dirty="0"/>
-          </a:p>
-          <a:p>
-            <a:pPr indent="0" marL="0">
-              <a:buNone/>
-            </a:pPr>
-            <a:r>
-              <a:rPr lang="en-US" sz="2100" dirty="0">
+            <a:endParaRPr lang="en-US" sz="1920" dirty="0"/>
+          </a:p>
+          <a:p>
+            <a:pPr indent="0" marL="0">
+              <a:buNone/>
+            </a:pPr>
+            <a:r>
+              <a:rPr lang="en-US" sz="1920" dirty="0">
                 <a:solidFill>
                   <a:srgbClr val="003A63"/>
                 </a:solidFill>
@@ -11887,14 +11889,14 @@
               </a:rPr>
               <a:t>• 2. Why does chunking matter?</a:t>
             </a:r>
-            <a:endParaRPr lang="en-US" sz="2100" dirty="0"/>
-          </a:p>
-          <a:p>
-            <a:pPr indent="0" marL="0">
-              <a:buNone/>
-            </a:pPr>
-            <a:r>
-              <a:rPr lang="en-US" sz="2100" dirty="0">
+            <a:endParaRPr lang="en-US" sz="1920" dirty="0"/>
+          </a:p>
+          <a:p>
+            <a:pPr indent="0" marL="0">
+              <a:buNone/>
+            </a:pPr>
+            <a:r>
+              <a:rPr lang="en-US" sz="1920" dirty="0">
                 <a:solidFill>
                   <a:srgbClr val="003A63"/>
                 </a:solidFill>
@@ -11904,7 +11906,7 @@
               </a:rPr>
               <a:t>• 3. What is a major RAG governance risk?</a:t>
             </a:r>
-            <a:endParaRPr lang="en-US" sz="2100" dirty="0"/>
+            <a:endParaRPr lang="en-US" sz="1920" dirty="0"/>
           </a:p>
         </p:txBody>
       </p:sp>
@@ -11916,12 +11918,12 @@
         </p:nvSpPr>
         <p:spPr>
           <a:xfrm>
-            <a:off x="7635240" y="1325880"/>
-            <a:ext cx="3474720" cy="1207008"/>
+            <a:off x="7543800" y="1325880"/>
+            <a:ext cx="3611880" cy="1261872"/>
           </a:xfrm>
           <a:prstGeom prst="roundRect">
             <a:avLst>
-              <a:gd name="adj" fmla="val 9091"/>
+              <a:gd name="adj" fmla="val 8696"/>
             </a:avLst>
           </a:prstGeom>
           <a:solidFill>
@@ -11943,8 +11945,8 @@
         </p:nvSpPr>
         <p:spPr>
           <a:xfrm>
-            <a:off x="7799832" y="1472184"/>
-            <a:ext cx="3145536" cy="256032"/>
+            <a:off x="7708392" y="1453896"/>
+            <a:ext cx="3282696" cy="228600"/>
           </a:xfrm>
           <a:prstGeom prst="rect">
             <a:avLst/>
@@ -11960,7 +11962,7 @@
               <a:buNone/>
             </a:pPr>
             <a:r>
-              <a:rPr lang="en-US" sz="1300" b="1" dirty="0">
+              <a:rPr lang="en-US" sz="1220" b="1" dirty="0">
                 <a:solidFill>
                   <a:srgbClr val="0068B7"/>
                 </a:solidFill>
@@ -11970,7 +11972,7 @@
               </a:rPr>
               <a:t>Practice focus</a:t>
             </a:r>
-            <a:endParaRPr lang="en-US" sz="1300" dirty="0"/>
+            <a:endParaRPr lang="en-US" sz="1220" dirty="0"/>
           </a:p>
         </p:txBody>
       </p:sp>
@@ -11982,8 +11984,8 @@
         </p:nvSpPr>
         <p:spPr>
           <a:xfrm>
-            <a:off x="7799832" y="1801368"/>
-            <a:ext cx="3145536" cy="640080"/>
+            <a:off x="7708392" y="1764792"/>
+            <a:ext cx="3282696" cy="749808"/>
           </a:xfrm>
           <a:prstGeom prst="rect">
             <a:avLst/>
@@ -12001,7 +12003,7 @@
               <a:buNone/>
             </a:pPr>
             <a:r>
-              <a:rPr lang="en-US" sz="1320" dirty="0">
+              <a:rPr lang="en-US" sz="1220" dirty="0">
                 <a:solidFill>
                   <a:srgbClr val="17364A"/>
                 </a:solidFill>
@@ -12011,7 +12013,7 @@
               </a:rPr>
               <a:t>1. What is RAG?</a:t>
             </a:r>
-            <a:endParaRPr lang="en-US" sz="1320" dirty="0"/>
+            <a:endParaRPr lang="en-US" sz="1220" dirty="0"/>
           </a:p>
         </p:txBody>
       </p:sp>
@@ -12023,12 +12025,12 @@
         </p:nvSpPr>
         <p:spPr>
           <a:xfrm>
-            <a:off x="7635240" y="2670048"/>
-            <a:ext cx="3474720" cy="1377086"/>
+            <a:off x="7543800" y="2724912"/>
+            <a:ext cx="3611880" cy="1527048"/>
           </a:xfrm>
           <a:prstGeom prst="roundRect">
             <a:avLst>
-              <a:gd name="adj" fmla="val 7968"/>
+              <a:gd name="adj" fmla="val 7186"/>
             </a:avLst>
           </a:prstGeom>
           <a:solidFill>
@@ -12050,8 +12052,8 @@
         </p:nvSpPr>
         <p:spPr>
           <a:xfrm>
-            <a:off x="7799832" y="2816352"/>
-            <a:ext cx="3145536" cy="256032"/>
+            <a:off x="7708392" y="2852928"/>
+            <a:ext cx="3282696" cy="228600"/>
           </a:xfrm>
           <a:prstGeom prst="rect">
             <a:avLst/>
@@ -12067,7 +12069,7 @@
               <a:buNone/>
             </a:pPr>
             <a:r>
-              <a:rPr lang="en-US" sz="1300" b="1" dirty="0">
+              <a:rPr lang="en-US" sz="1220" b="1" dirty="0">
                 <a:solidFill>
                   <a:srgbClr val="0068B7"/>
                 </a:solidFill>
@@ -12077,7 +12079,7 @@
               </a:rPr>
               <a:t>Concept checkpoints</a:t>
             </a:r>
-            <a:endParaRPr lang="en-US" sz="1300" dirty="0"/>
+            <a:endParaRPr lang="en-US" sz="1220" dirty="0"/>
           </a:p>
         </p:txBody>
       </p:sp>
@@ -12089,8 +12091,8 @@
         </p:nvSpPr>
         <p:spPr>
           <a:xfrm>
-            <a:off x="7818120" y="3182112"/>
-            <a:ext cx="3090672" cy="718718"/>
+            <a:off x="7726680" y="3182112"/>
+            <a:ext cx="3227832" cy="960120"/>
           </a:xfrm>
           <a:prstGeom prst="rect">
             <a:avLst/>
@@ -12108,7 +12110,7 @@
               <a:buNone/>
             </a:pPr>
             <a:r>
-              <a:rPr lang="en-US" sz="1220" dirty="0">
+              <a:rPr lang="en-US" sz="1140" dirty="0">
                 <a:solidFill>
                   <a:srgbClr val="17364A"/>
                 </a:solidFill>
@@ -12118,14 +12120,14 @@
               </a:rPr>
               <a:t>1.</a:t>
             </a:r>
-            <a:endParaRPr lang="en-US" sz="1220" dirty="0"/>
-          </a:p>
-          <a:p>
-            <a:pPr indent="0" marL="0">
-              <a:buNone/>
-            </a:pPr>
-            <a:r>
-              <a:rPr lang="en-US" sz="1220" dirty="0">
+            <a:endParaRPr lang="en-US" sz="1140" dirty="0"/>
+          </a:p>
+          <a:p>
+            <a:pPr indent="0" marL="0">
+              <a:buNone/>
+            </a:pPr>
+            <a:r>
+              <a:rPr lang="en-US" sz="1140" dirty="0">
                 <a:solidFill>
                   <a:srgbClr val="17364A"/>
                 </a:solidFill>
@@ -12135,14 +12137,14 @@
               </a:rPr>
               <a:t>What is RAG?</a:t>
             </a:r>
-            <a:endParaRPr lang="en-US" sz="1220" dirty="0"/>
-          </a:p>
-          <a:p>
-            <a:pPr indent="0" marL="0">
-              <a:buNone/>
-            </a:pPr>
-            <a:r>
-              <a:rPr lang="en-US" sz="1220" dirty="0">
+            <a:endParaRPr lang="en-US" sz="1140" dirty="0"/>
+          </a:p>
+          <a:p>
+            <a:pPr indent="0" marL="0">
+              <a:buNone/>
+            </a:pPr>
+            <a:r>
+              <a:rPr lang="en-US" sz="1140" dirty="0">
                 <a:solidFill>
                   <a:srgbClr val="17364A"/>
                 </a:solidFill>
@@ -12152,7 +12154,7 @@
               </a:rPr>
               <a:t>2.</a:t>
             </a:r>
-            <a:endParaRPr lang="en-US" sz="1220" dirty="0"/>
+            <a:endParaRPr lang="en-US" sz="1140" dirty="0"/>
           </a:p>
         </p:txBody>
       </p:sp>
@@ -12164,12 +12166,12 @@
         </p:nvSpPr>
         <p:spPr>
           <a:xfrm>
-            <a:off x="7635240" y="4184294"/>
-            <a:ext cx="3474720" cy="1466698"/>
+            <a:off x="7543800" y="4389120"/>
+            <a:ext cx="3611880" cy="1261872"/>
           </a:xfrm>
           <a:prstGeom prst="roundRect">
             <a:avLst>
-              <a:gd name="adj" fmla="val 7481"/>
+              <a:gd name="adj" fmla="val 8696"/>
             </a:avLst>
           </a:prstGeom>
           <a:solidFill>
@@ -12191,8 +12193,8 @@
         </p:nvSpPr>
         <p:spPr>
           <a:xfrm>
-            <a:off x="7799832" y="4330598"/>
-            <a:ext cx="3145536" cy="256032"/>
+            <a:off x="7708392" y="4517136"/>
+            <a:ext cx="3282696" cy="228600"/>
           </a:xfrm>
           <a:prstGeom prst="rect">
             <a:avLst/>
@@ -12208,7 +12210,7 @@
               <a:buNone/>
             </a:pPr>
             <a:r>
-              <a:rPr lang="en-US" sz="1300" b="1" dirty="0">
+              <a:rPr lang="en-US" sz="1220" b="1" dirty="0">
                 <a:solidFill>
                   <a:srgbClr val="0068B7"/>
                 </a:solidFill>
@@ -12218,7 +12220,7 @@
               </a:rPr>
               <a:t>What to produce</a:t>
             </a:r>
-            <a:endParaRPr lang="en-US" sz="1300" dirty="0"/>
+            <a:endParaRPr lang="en-US" sz="1220" dirty="0"/>
           </a:p>
         </p:txBody>
       </p:sp>
@@ -12230,8 +12232,8 @@
         </p:nvSpPr>
         <p:spPr>
           <a:xfrm>
-            <a:off x="7799832" y="4659782"/>
-            <a:ext cx="3145536" cy="899770"/>
+            <a:off x="7708392" y="4828032"/>
+            <a:ext cx="3282696" cy="749808"/>
           </a:xfrm>
           <a:prstGeom prst="rect">
             <a:avLst/>
@@ -12249,7 +12251,7 @@
               <a:buNone/>
             </a:pPr>
             <a:r>
-              <a:rPr lang="en-US" sz="1320" dirty="0">
+              <a:rPr lang="en-US" sz="1220" dirty="0">
                 <a:solidFill>
                   <a:srgbClr val="17364A"/>
                 </a:solidFill>
@@ -12257,9 +12259,9 @@
                 <a:ea typeface="Aptos" pitchFamily="34" charset="-122"/>
                 <a:cs typeface="Aptos" pitchFamily="34" charset="-120"/>
               </a:rPr>
-              <a:t>Use the assignment to test whether you can explain the concept, apply it to a realistic public health situation, and identify what would need review before the work moves forward.</a:t>
-            </a:r>
-            <a:endParaRPr lang="en-US" sz="1320" dirty="0"/>
+              <a:t>Use the assignment to test whether you can explain the concept, apply it to a.</a:t>
+            </a:r>
+            <a:endParaRPr lang="en-US" sz="1220" dirty="0"/>
           </a:p>
         </p:txBody>
       </p:sp>
@@ -12550,8 +12552,8 @@
         </p:nvSpPr>
         <p:spPr>
           <a:xfrm>
-            <a:off x="868680" y="1508760"/>
-            <a:ext cx="6309360" cy="4160520"/>
+            <a:off x="822960" y="1463040"/>
+            <a:ext cx="6565392" cy="4343400"/>
           </a:xfrm>
           <a:prstGeom prst="rect">
             <a:avLst/>
@@ -12569,7 +12571,7 @@
               <a:buNone/>
             </a:pPr>
             <a:r>
-              <a:rPr lang="en-US" sz="2100" dirty="0">
+              <a:rPr lang="en-US" sz="1920" dirty="0">
                 <a:solidFill>
                   <a:srgbClr val="003A63"/>
                 </a:solidFill>
@@ -12579,14 +12581,14 @@
               </a:rPr>
               <a:t>• NIST AI RMF Generative AI Profile:.</a:t>
             </a:r>
-            <a:endParaRPr lang="en-US" sz="2100" dirty="0"/>
-          </a:p>
-          <a:p>
-            <a:pPr indent="0" marL="0">
-              <a:buNone/>
-            </a:pPr>
-            <a:r>
-              <a:rPr lang="en-US" sz="2100" dirty="0">
+            <a:endParaRPr lang="en-US" sz="1920" dirty="0"/>
+          </a:p>
+          <a:p>
+            <a:pPr indent="0" marL="0">
+              <a:buNone/>
+            </a:pPr>
+            <a:r>
+              <a:rPr lang="en-US" sz="1920" dirty="0">
                 <a:solidFill>
                   <a:srgbClr val="003A63"/>
                 </a:solidFill>
@@ -12596,14 +12598,14 @@
               </a:rPr>
               <a:t>• OWASP Top 10 for Large Language Model Applications:.</a:t>
             </a:r>
-            <a:endParaRPr lang="en-US" sz="2100" dirty="0"/>
-          </a:p>
-          <a:p>
-            <a:pPr indent="0" marL="0">
-              <a:buNone/>
-            </a:pPr>
-            <a:r>
-              <a:rPr lang="en-US" sz="2100" dirty="0">
+            <a:endParaRPr lang="en-US" sz="1920" dirty="0"/>
+          </a:p>
+          <a:p>
+            <a:pPr indent="0" marL="0">
+              <a:buNone/>
+            </a:pPr>
+            <a:r>
+              <a:rPr lang="en-US" sz="1920" dirty="0">
                 <a:solidFill>
                   <a:srgbClr val="003A63"/>
                 </a:solidFill>
@@ -12613,7 +12615,7 @@
               </a:rPr>
               <a:t>• NIST Artificial Intelligence Risk Management Framework:.</a:t>
             </a:r>
-            <a:endParaRPr lang="en-US" sz="2100" dirty="0"/>
+            <a:endParaRPr lang="en-US" sz="1920" dirty="0"/>
           </a:p>
         </p:txBody>
       </p:sp>
@@ -12625,12 +12627,12 @@
         </p:nvSpPr>
         <p:spPr>
           <a:xfrm>
-            <a:off x="7635240" y="1325880"/>
-            <a:ext cx="3474720" cy="1207008"/>
+            <a:off x="7543800" y="1325880"/>
+            <a:ext cx="3611880" cy="1261872"/>
           </a:xfrm>
           <a:prstGeom prst="roundRect">
             <a:avLst>
-              <a:gd name="adj" fmla="val 9091"/>
+              <a:gd name="adj" fmla="val 8696"/>
             </a:avLst>
           </a:prstGeom>
           <a:solidFill>
@@ -12652,8 +12654,8 @@
         </p:nvSpPr>
         <p:spPr>
           <a:xfrm>
-            <a:off x="7799832" y="1472184"/>
-            <a:ext cx="3145536" cy="256032"/>
+            <a:off x="7708392" y="1453896"/>
+            <a:ext cx="3282696" cy="228600"/>
           </a:xfrm>
           <a:prstGeom prst="rect">
             <a:avLst/>
@@ -12669,7 +12671,7 @@
               <a:buNone/>
             </a:pPr>
             <a:r>
-              <a:rPr lang="en-US" sz="1300" b="1" dirty="0">
+              <a:rPr lang="en-US" sz="1220" b="1" dirty="0">
                 <a:solidFill>
                   <a:srgbClr val="0068B7"/>
                 </a:solidFill>
@@ -12679,7 +12681,7 @@
               </a:rPr>
               <a:t>Practice focus</a:t>
             </a:r>
-            <a:endParaRPr lang="en-US" sz="1300" dirty="0"/>
+            <a:endParaRPr lang="en-US" sz="1220" dirty="0"/>
           </a:p>
         </p:txBody>
       </p:sp>
@@ -12691,8 +12693,8 @@
         </p:nvSpPr>
         <p:spPr>
           <a:xfrm>
-            <a:off x="7799832" y="1801368"/>
-            <a:ext cx="3145536" cy="640080"/>
+            <a:off x="7708392" y="1764792"/>
+            <a:ext cx="3282696" cy="749808"/>
           </a:xfrm>
           <a:prstGeom prst="rect">
             <a:avLst/>
@@ -12710,7 +12712,7 @@
               <a:buNone/>
             </a:pPr>
             <a:r>
-              <a:rPr lang="en-US" sz="1320" dirty="0">
+              <a:rPr lang="en-US" sz="1220" dirty="0">
                 <a:solidFill>
                   <a:srgbClr val="17364A"/>
                 </a:solidFill>
@@ -12720,7 +12722,7 @@
               </a:rPr>
               <a:t>NIST AI RMF Generative AI Profile:.</a:t>
             </a:r>
-            <a:endParaRPr lang="en-US" sz="1320" dirty="0"/>
+            <a:endParaRPr lang="en-US" sz="1220" dirty="0"/>
           </a:p>
         </p:txBody>
       </p:sp>
@@ -12732,12 +12734,12 @@
         </p:nvSpPr>
         <p:spPr>
           <a:xfrm>
-            <a:off x="7635240" y="2670048"/>
-            <a:ext cx="3474720" cy="1377086"/>
+            <a:off x="7543800" y="2724912"/>
+            <a:ext cx="3611880" cy="1527048"/>
           </a:xfrm>
           <a:prstGeom prst="roundRect">
             <a:avLst>
-              <a:gd name="adj" fmla="val 7968"/>
+              <a:gd name="adj" fmla="val 7186"/>
             </a:avLst>
           </a:prstGeom>
           <a:solidFill>
@@ -12759,8 +12761,8 @@
         </p:nvSpPr>
         <p:spPr>
           <a:xfrm>
-            <a:off x="7799832" y="2816352"/>
-            <a:ext cx="3145536" cy="256032"/>
+            <a:off x="7708392" y="2852928"/>
+            <a:ext cx="3282696" cy="228600"/>
           </a:xfrm>
           <a:prstGeom prst="rect">
             <a:avLst/>
@@ -12776,7 +12778,7 @@
               <a:buNone/>
             </a:pPr>
             <a:r>
-              <a:rPr lang="en-US" sz="1300" b="1" dirty="0">
+              <a:rPr lang="en-US" sz="1220" b="1" dirty="0">
                 <a:solidFill>
                   <a:srgbClr val="0068B7"/>
                 </a:solidFill>
@@ -12786,7 +12788,7 @@
               </a:rPr>
               <a:t>Concept checkpoints</a:t>
             </a:r>
-            <a:endParaRPr lang="en-US" sz="1300" dirty="0"/>
+            <a:endParaRPr lang="en-US" sz="1220" dirty="0"/>
           </a:p>
         </p:txBody>
       </p:sp>
@@ -12798,8 +12800,8 @@
         </p:nvSpPr>
         <p:spPr>
           <a:xfrm>
-            <a:off x="7818120" y="3182112"/>
-            <a:ext cx="3090672" cy="718718"/>
+            <a:off x="7726680" y="3182112"/>
+            <a:ext cx="3227832" cy="960120"/>
           </a:xfrm>
           <a:prstGeom prst="rect">
             <a:avLst/>
@@ -12817,7 +12819,7 @@
               <a:buNone/>
             </a:pPr>
             <a:r>
-              <a:rPr lang="en-US" sz="1220" dirty="0">
+              <a:rPr lang="en-US" sz="1140" dirty="0">
                 <a:solidFill>
                   <a:srgbClr val="17364A"/>
                 </a:solidFill>
@@ -12825,16 +12827,16 @@
                 <a:ea typeface="Aptos" pitchFamily="34" charset="-122"/>
                 <a:cs typeface="Aptos" pitchFamily="34" charset="-120"/>
               </a:rPr>
-              <a:t>NIST Artificial Intelligence Risk Management Framework:.</a:t>
-            </a:r>
-            <a:endParaRPr lang="en-US" sz="1220" dirty="0"/>
-          </a:p>
-          <a:p>
-            <a:pPr indent="0" marL="0">
-              <a:buNone/>
-            </a:pPr>
-            <a:r>
-              <a:rPr lang="en-US" sz="1220" dirty="0">
+              <a:t>NIST Artificial Intelligence Risk Management.</a:t>
+            </a:r>
+            <a:endParaRPr lang="en-US" sz="1140" dirty="0"/>
+          </a:p>
+          <a:p>
+            <a:pPr indent="0" marL="0">
+              <a:buNone/>
+            </a:pPr>
+            <a:r>
+              <a:rPr lang="en-US" sz="1140" dirty="0">
                 <a:solidFill>
                   <a:srgbClr val="17364A"/>
                 </a:solidFill>
@@ -12844,7 +12846,7 @@
               </a:rPr>
               <a:t>ONC USCDI:.</a:t>
             </a:r>
-            <a:endParaRPr lang="en-US" sz="1220" dirty="0"/>
+            <a:endParaRPr lang="en-US" sz="1140" dirty="0"/>
           </a:p>
         </p:txBody>
       </p:sp>
@@ -12856,12 +12858,12 @@
         </p:nvSpPr>
         <p:spPr>
           <a:xfrm>
-            <a:off x="7635240" y="4184294"/>
-            <a:ext cx="3474720" cy="1466698"/>
+            <a:off x="7543800" y="4389120"/>
+            <a:ext cx="3611880" cy="1261872"/>
           </a:xfrm>
           <a:prstGeom prst="roundRect">
             <a:avLst>
-              <a:gd name="adj" fmla="val 7481"/>
+              <a:gd name="adj" fmla="val 8696"/>
             </a:avLst>
           </a:prstGeom>
           <a:solidFill>
@@ -12883,8 +12885,8 @@
         </p:nvSpPr>
         <p:spPr>
           <a:xfrm>
-            <a:off x="7799832" y="4330598"/>
-            <a:ext cx="3145536" cy="256032"/>
+            <a:off x="7708392" y="4517136"/>
+            <a:ext cx="3282696" cy="228600"/>
           </a:xfrm>
           <a:prstGeom prst="rect">
             <a:avLst/>
@@ -12900,7 +12902,7 @@
               <a:buNone/>
             </a:pPr>
             <a:r>
-              <a:rPr lang="en-US" sz="1300" b="1" dirty="0">
+              <a:rPr lang="en-US" sz="1220" b="1" dirty="0">
                 <a:solidFill>
                   <a:srgbClr val="0068B7"/>
                 </a:solidFill>
@@ -12910,7 +12912,7 @@
               </a:rPr>
               <a:t>What to produce</a:t>
             </a:r>
-            <a:endParaRPr lang="en-US" sz="1300" dirty="0"/>
+            <a:endParaRPr lang="en-US" sz="1220" dirty="0"/>
           </a:p>
         </p:txBody>
       </p:sp>
@@ -12922,8 +12924,8 @@
         </p:nvSpPr>
         <p:spPr>
           <a:xfrm>
-            <a:off x="7799832" y="4659782"/>
-            <a:ext cx="3145536" cy="899770"/>
+            <a:off x="7708392" y="4828032"/>
+            <a:ext cx="3282696" cy="749808"/>
           </a:xfrm>
           <a:prstGeom prst="rect">
             <a:avLst/>
@@ -12941,7 +12943,7 @@
               <a:buNone/>
             </a:pPr>
             <a:r>
-              <a:rPr lang="en-US" sz="1320" dirty="0">
+              <a:rPr lang="en-US" sz="1220" dirty="0">
                 <a:solidFill>
                   <a:srgbClr val="17364A"/>
                 </a:solidFill>
@@ -12949,9 +12951,9 @@
                 <a:ea typeface="Aptos" pitchFamily="34" charset="-122"/>
                 <a:cs typeface="Aptos" pitchFamily="34" charset="-120"/>
               </a:rPr>
-              <a:t>Use the assignment to test whether you can explain the concept, apply it to a realistic public health situation, and identify what would need review before the work moves forward.</a:t>
-            </a:r>
-            <a:endParaRPr lang="en-US" sz="1320" dirty="0"/>
+              <a:t>Use the assignment to test whether you can explain the concept, apply it to a.</a:t>
+            </a:r>
+            <a:endParaRPr lang="en-US" sz="1220" dirty="0"/>
           </a:p>
         </p:txBody>
       </p:sp>
@@ -13269,7 +13271,7 @@
                 <a:ea typeface="Aptos" pitchFamily="34" charset="-122"/>
                 <a:cs typeface="Aptos" pitchFamily="34" charset="-120"/>
               </a:rPr>
-              <a:t>• Play 3: Establish AI Governance - This lesson informs Play 3 by helping learners connect the.</a:t>
+              <a:t>• Play 3: Establish AI Governance - This lesson informs Play 3 by helping.</a:t>
             </a:r>
             <a:endParaRPr lang="en-US" sz="1900" dirty="0"/>
           </a:p>
@@ -13286,7 +13288,7 @@
                 <a:ea typeface="Aptos" pitchFamily="34" charset="-122"/>
                 <a:cs typeface="Aptos" pitchFamily="34" charset="-120"/>
               </a:rPr>
-              <a:t>• Play 12: Execute Governance and Oversight - This lesson informs Play 12 by helping learners.</a:t>
+              <a:t>• Play 12: Execute Governance and Oversight - This lesson informs Play 12 by.</a:t>
             </a:r>
             <a:endParaRPr lang="en-US" sz="1900" dirty="0"/>
           </a:p>
@@ -13303,7 +13305,7 @@
                 <a:ea typeface="Aptos" pitchFamily="34" charset="-122"/>
                 <a:cs typeface="Aptos" pitchFamily="34" charset="-120"/>
               </a:rPr>
-              <a:t>• Play 11: Build and Deploy AI Solutions - This lesson informs Play 11 by helping learners.</a:t>
+              <a:t>• Play 11: Build and Deploy AI Solutions - This lesson informs Play 11 by.</a:t>
             </a:r>
             <a:endParaRPr lang="en-US" sz="1900" dirty="0"/>
           </a:p>
@@ -13320,7 +13322,7 @@
                 <a:ea typeface="Aptos" pitchFamily="34" charset="-122"/>
                 <a:cs typeface="Aptos" pitchFamily="34" charset="-120"/>
               </a:rPr>
-              <a:t>• Play 1: Vision &amp; Guardrails - This lesson informs Play 1 by helping learners connect the.</a:t>
+              <a:t>• Play 1: Vision &amp; Guardrails - This lesson informs Play 1 by helping learners.</a:t>
             </a:r>
             <a:endParaRPr lang="en-US" sz="1900" dirty="0"/>
           </a:p>
@@ -13361,8 +13363,8 @@
         </p:nvSpPr>
         <p:spPr>
           <a:xfrm>
-            <a:off x="8211312" y="1563624"/>
-            <a:ext cx="2734056" cy="256032"/>
+            <a:off x="8211312" y="1545336"/>
+            <a:ext cx="2734056" cy="228600"/>
           </a:xfrm>
           <a:prstGeom prst="rect">
             <a:avLst/>
@@ -13378,7 +13380,7 @@
               <a:buNone/>
             </a:pPr>
             <a:r>
-              <a:rPr lang="en-US" sz="1300" b="1" dirty="0">
+              <a:rPr lang="en-US" sz="1220" b="1" dirty="0">
                 <a:solidFill>
                   <a:srgbClr val="0068B7"/>
                 </a:solidFill>
@@ -13388,7 +13390,7 @@
               </a:rPr>
               <a:t>Apply the lesson</a:t>
             </a:r>
-            <a:endParaRPr lang="en-US" sz="1300" dirty="0"/>
+            <a:endParaRPr lang="en-US" sz="1220" dirty="0"/>
           </a:p>
         </p:txBody>
       </p:sp>
@@ -13400,8 +13402,8 @@
         </p:nvSpPr>
         <p:spPr>
           <a:xfrm>
-            <a:off x="8211312" y="1892808"/>
-            <a:ext cx="2734056" cy="1536192"/>
+            <a:off x="8211312" y="1856232"/>
+            <a:ext cx="2734056" cy="1591056"/>
           </a:xfrm>
           <a:prstGeom prst="rect">
             <a:avLst/>
@@ -13419,7 +13421,7 @@
               <a:buNone/>
             </a:pPr>
             <a:r>
-              <a:rPr lang="en-US" sz="1320" dirty="0">
+              <a:rPr lang="en-US" sz="1220" dirty="0">
                 <a:solidFill>
                   <a:srgbClr val="17364A"/>
                 </a:solidFill>
@@ -13427,9 +13429,9 @@
                 <a:ea typeface="Aptos" pitchFamily="34" charset="-122"/>
                 <a:cs typeface="Aptos" pitchFamily="34" charset="-120"/>
               </a:rPr>
-              <a:t>Use the related plays to identify decisions, participants, timing, approvals, and documentation needed for responsible implementation.</a:t>
-            </a:r>
-            <a:endParaRPr lang="en-US" sz="1320" dirty="0"/>
+              <a:t>Use the related plays to identify decisions, participants, timing, approvals,.</a:t>
+            </a:r>
+            <a:endParaRPr lang="en-US" sz="1220" dirty="0"/>
           </a:p>
         </p:txBody>
       </p:sp>
@@ -13468,8 +13470,8 @@
         </p:nvSpPr>
         <p:spPr>
           <a:xfrm>
-            <a:off x="8211312" y="3941064"/>
-            <a:ext cx="2734056" cy="256032"/>
+            <a:off x="8211312" y="3922776"/>
+            <a:ext cx="2734056" cy="228600"/>
           </a:xfrm>
           <a:prstGeom prst="rect">
             <a:avLst/>
@@ -13485,7 +13487,7 @@
               <a:buNone/>
             </a:pPr>
             <a:r>
-              <a:rPr lang="en-US" sz="1300" b="1" dirty="0">
+              <a:rPr lang="en-US" sz="1220" b="1" dirty="0">
                 <a:solidFill>
                   <a:srgbClr val="0068B7"/>
                 </a:solidFill>
@@ -13495,7 +13497,7 @@
               </a:rPr>
               <a:t>Use the play links to</a:t>
             </a:r>
-            <a:endParaRPr lang="en-US" sz="1300" dirty="0"/>
+            <a:endParaRPr lang="en-US" sz="1220" dirty="0"/>
           </a:p>
         </p:txBody>
       </p:sp>
@@ -13507,8 +13509,8 @@
         </p:nvSpPr>
         <p:spPr>
           <a:xfrm>
-            <a:off x="8229600" y="4306824"/>
-            <a:ext cx="2679192" cy="941832"/>
+            <a:off x="8229600" y="4251960"/>
+            <a:ext cx="2679192" cy="1033272"/>
           </a:xfrm>
           <a:prstGeom prst="rect">
             <a:avLst/>
@@ -13526,7 +13528,7 @@
               <a:buNone/>
             </a:pPr>
             <a:r>
-              <a:rPr lang="en-US" sz="1220" dirty="0">
+              <a:rPr lang="en-US" sz="1140" dirty="0">
                 <a:solidFill>
                   <a:srgbClr val="17364A"/>
                 </a:solidFill>
@@ -13536,14 +13538,14 @@
               </a:rPr>
               <a:t>Locate the decision point in the playbook sequence.</a:t>
             </a:r>
-            <a:endParaRPr lang="en-US" sz="1220" dirty="0"/>
-          </a:p>
-          <a:p>
-            <a:pPr indent="0" marL="0">
-              <a:buNone/>
-            </a:pPr>
-            <a:r>
-              <a:rPr lang="en-US" sz="1220" dirty="0">
+            <a:endParaRPr lang="en-US" sz="1140" dirty="0"/>
+          </a:p>
+          <a:p>
+            <a:pPr indent="0" marL="0">
+              <a:buNone/>
+            </a:pPr>
+            <a:r>
+              <a:rPr lang="en-US" sz="1140" dirty="0">
                 <a:solidFill>
                   <a:srgbClr val="17364A"/>
                 </a:solidFill>
@@ -13553,14 +13555,14 @@
               </a:rPr>
               <a:t>Identify who should participate in the work.</a:t>
             </a:r>
-            <a:endParaRPr lang="en-US" sz="1220" dirty="0"/>
-          </a:p>
-          <a:p>
-            <a:pPr indent="0" marL="0">
-              <a:buNone/>
-            </a:pPr>
-            <a:r>
-              <a:rPr lang="en-US" sz="1220" dirty="0">
+            <a:endParaRPr lang="en-US" sz="1140" dirty="0"/>
+          </a:p>
+          <a:p>
+            <a:pPr indent="0" marL="0">
+              <a:buNone/>
+            </a:pPr>
+            <a:r>
+              <a:rPr lang="en-US" sz="1140" dirty="0">
                 <a:solidFill>
                   <a:srgbClr val="17364A"/>
                 </a:solidFill>
@@ -13568,9 +13570,9 @@
                 <a:ea typeface="Aptos" pitchFamily="34" charset="-122"/>
                 <a:cs typeface="Aptos" pitchFamily="34" charset="-120"/>
               </a:rPr>
-              <a:t>Document the review, approval, or implementation step.</a:t>
-            </a:r>
-            <a:endParaRPr lang="en-US" sz="1220" dirty="0"/>
+              <a:t>Document the review, approval, or implementation.</a:t>
+            </a:r>
+            <a:endParaRPr lang="en-US" sz="1140" dirty="0"/>
           </a:p>
         </p:txBody>
       </p:sp>
@@ -13888,7 +13890,7 @@
                 <a:ea typeface="Aptos" pitchFamily="34" charset="-122"/>
                 <a:cs typeface="Aptos" pitchFamily="34" charset="-120"/>
               </a:rPr>
-              <a:t>• Tool 16: Incident Response Checklist (Checklist) - Use Incident Response Checklist to.</a:t>
+              <a:t>• Tool 16: Incident Response Checklist (Checklist) - Use Incident Response.</a:t>
             </a:r>
             <a:endParaRPr lang="en-US" sz="1850" dirty="0"/>
           </a:p>
@@ -13905,7 +13907,7 @@
                 <a:ea typeface="Aptos" pitchFamily="34" charset="-122"/>
                 <a:cs typeface="Aptos" pitchFamily="34" charset="-120"/>
               </a:rPr>
-              <a:t>• Tool 17: Compliance Audit Checklist (Checklist) - Use Compliance Audit Checklist to translate.</a:t>
+              <a:t>• Tool 17: Compliance Audit Checklist (Checklist) - Use Compliance Audit.</a:t>
             </a:r>
             <a:endParaRPr lang="en-US" sz="1850" dirty="0"/>
           </a:p>
@@ -13922,7 +13924,7 @@
                 <a:ea typeface="Aptos" pitchFamily="34" charset="-122"/>
                 <a:cs typeface="Aptos" pitchFamily="34" charset="-120"/>
               </a:rPr>
-              <a:t>• Tool 18: Policy Update &amp; Version Control Log (Log) - Use this tool to complete or strengthen.</a:t>
+              <a:t>• Tool 18: Policy Update &amp; Version Control Log (Log) - Use this tool to.</a:t>
             </a:r>
             <a:endParaRPr lang="en-US" sz="1850" dirty="0"/>
           </a:p>
@@ -13939,7 +13941,7 @@
                 <a:ea typeface="Aptos" pitchFamily="34" charset="-122"/>
                 <a:cs typeface="Aptos" pitchFamily="34" charset="-120"/>
               </a:rPr>
-              <a:t>• Tool 19: Plain-Language AI Public Notice Template (Template) - Use Plain-Language AI Public.</a:t>
+              <a:t>• Tool 19: Plain-Language AI Public Notice Template (Template) - Use.</a:t>
             </a:r>
             <a:endParaRPr lang="en-US" sz="1850" dirty="0"/>
           </a:p>
@@ -13980,8 +13982,8 @@
         </p:nvSpPr>
         <p:spPr>
           <a:xfrm>
-            <a:off x="8211312" y="1563624"/>
-            <a:ext cx="2734056" cy="256032"/>
+            <a:off x="8211312" y="1545336"/>
+            <a:ext cx="2734056" cy="228600"/>
           </a:xfrm>
           <a:prstGeom prst="rect">
             <a:avLst/>
@@ -13997,7 +13999,7 @@
               <a:buNone/>
             </a:pPr>
             <a:r>
-              <a:rPr lang="en-US" sz="1300" b="1" dirty="0">
+              <a:rPr lang="en-US" sz="1220" b="1" dirty="0">
                 <a:solidFill>
                   <a:srgbClr val="0068B7"/>
                 </a:solidFill>
@@ -14007,7 +14009,7 @@
               </a:rPr>
               <a:t>Use the tools</a:t>
             </a:r>
-            <a:endParaRPr lang="en-US" sz="1300" dirty="0"/>
+            <a:endParaRPr lang="en-US" sz="1220" dirty="0"/>
           </a:p>
         </p:txBody>
       </p:sp>
@@ -14019,8 +14021,8 @@
         </p:nvSpPr>
         <p:spPr>
           <a:xfrm>
-            <a:off x="8211312" y="1892808"/>
-            <a:ext cx="2734056" cy="1536192"/>
+            <a:off x="8211312" y="1856232"/>
+            <a:ext cx="2734056" cy="1591056"/>
           </a:xfrm>
           <a:prstGeom prst="rect">
             <a:avLst/>
@@ -14038,7 +14040,7 @@
               <a:buNone/>
             </a:pPr>
             <a:r>
-              <a:rPr lang="en-US" sz="1320" dirty="0">
+              <a:rPr lang="en-US" sz="1220" dirty="0">
                 <a:solidFill>
                   <a:srgbClr val="17364A"/>
                 </a:solidFill>
@@ -14046,9 +14048,9 @@
                 <a:ea typeface="Aptos" pitchFamily="34" charset="-122"/>
                 <a:cs typeface="Aptos" pitchFamily="34" charset="-120"/>
               </a:rPr>
-              <a:t>Use linked tools when your department needs a structured worksheet, template, checklist, review process, or documentation artifact.</a:t>
-            </a:r>
-            <a:endParaRPr lang="en-US" sz="1320" dirty="0"/>
+              <a:t>Use linked tools when your department needs a structured worksheet, template,.</a:t>
+            </a:r>
+            <a:endParaRPr lang="en-US" sz="1220" dirty="0"/>
           </a:p>
         </p:txBody>
       </p:sp>
@@ -14087,8 +14089,8 @@
         </p:nvSpPr>
         <p:spPr>
           <a:xfrm>
-            <a:off x="8211312" y="3941064"/>
-            <a:ext cx="2734056" cy="256032"/>
+            <a:off x="8211312" y="3922776"/>
+            <a:ext cx="2734056" cy="228600"/>
           </a:xfrm>
           <a:prstGeom prst="rect">
             <a:avLst/>
@@ -14104,7 +14106,7 @@
               <a:buNone/>
             </a:pPr>
             <a:r>
-              <a:rPr lang="en-US" sz="1300" b="1" dirty="0">
+              <a:rPr lang="en-US" sz="1220" b="1" dirty="0">
                 <a:solidFill>
                   <a:srgbClr val="0068B7"/>
                 </a:solidFill>
@@ -14114,7 +14116,7 @@
               </a:rPr>
               <a:t>Tool selection cues</a:t>
             </a:r>
-            <a:endParaRPr lang="en-US" sz="1300" dirty="0"/>
+            <a:endParaRPr lang="en-US" sz="1220" dirty="0"/>
           </a:p>
         </p:txBody>
       </p:sp>
@@ -14126,8 +14128,8 @@
         </p:nvSpPr>
         <p:spPr>
           <a:xfrm>
-            <a:off x="8229600" y="4306824"/>
-            <a:ext cx="2679192" cy="941832"/>
+            <a:off x="8229600" y="4251960"/>
+            <a:ext cx="2679192" cy="1033272"/>
           </a:xfrm>
           <a:prstGeom prst="rect">
             <a:avLst/>
@@ -14145,7 +14147,7 @@
               <a:buNone/>
             </a:pPr>
             <a:r>
-              <a:rPr lang="en-US" sz="1220" dirty="0">
+              <a:rPr lang="en-US" sz="1140" dirty="0">
                 <a:solidFill>
                   <a:srgbClr val="17364A"/>
                 </a:solidFill>
@@ -14155,14 +14157,14 @@
               </a:rPr>
               <a:t>Use a tool when no comparable local process exists.</a:t>
             </a:r>
-            <a:endParaRPr lang="en-US" sz="1220" dirty="0"/>
-          </a:p>
-          <a:p>
-            <a:pPr indent="0" marL="0">
-              <a:buNone/>
-            </a:pPr>
-            <a:r>
-              <a:rPr lang="en-US" sz="1220" dirty="0">
+            <a:endParaRPr lang="en-US" sz="1140" dirty="0"/>
+          </a:p>
+          <a:p>
+            <a:pPr indent="0" marL="0">
+              <a:buNone/>
+            </a:pPr>
+            <a:r>
+              <a:rPr lang="en-US" sz="1140" dirty="0">
                 <a:solidFill>
                   <a:srgbClr val="17364A"/>
                 </a:solidFill>
@@ -14170,16 +14172,16 @@
                 <a:ea typeface="Aptos" pitchFamily="34" charset="-122"/>
                 <a:cs typeface="Aptos" pitchFamily="34" charset="-120"/>
               </a:rPr>
-              <a:t>Adapt existing department templates when they already fit the.</a:t>
-            </a:r>
-            <a:endParaRPr lang="en-US" sz="1220" dirty="0"/>
-          </a:p>
-          <a:p>
-            <a:pPr indent="0" marL="0">
-              <a:buNone/>
-            </a:pPr>
-            <a:r>
-              <a:rPr lang="en-US" sz="1220" dirty="0">
+              <a:t>Adapt existing department templates when they.</a:t>
+            </a:r>
+            <a:endParaRPr lang="en-US" sz="1140" dirty="0"/>
+          </a:p>
+          <a:p>
+            <a:pPr indent="0" marL="0">
+              <a:buNone/>
+            </a:pPr>
+            <a:r>
+              <a:rPr lang="en-US" sz="1140" dirty="0">
                 <a:solidFill>
                   <a:srgbClr val="17364A"/>
                 </a:solidFill>
@@ -14187,9 +14189,9 @@
                 <a:ea typeface="Aptos" pitchFamily="34" charset="-122"/>
                 <a:cs typeface="Aptos" pitchFamily="34" charset="-120"/>
               </a:rPr>
-              <a:t>Save the completed artifact as evidence of the decision.</a:t>
-            </a:r>
-            <a:endParaRPr lang="en-US" sz="1220" dirty="0"/>
+              <a:t>Save the completed artifact as evidence of the.</a:t>
+            </a:r>
+            <a:endParaRPr lang="en-US" sz="1140" dirty="0"/>
           </a:p>
         </p:txBody>
       </p:sp>
@@ -14480,8 +14482,8 @@
         </p:nvSpPr>
         <p:spPr>
           <a:xfrm>
-            <a:off x="868680" y="1508760"/>
-            <a:ext cx="6309360" cy="4160520"/>
+            <a:off x="822960" y="1463040"/>
+            <a:ext cx="6565392" cy="4343400"/>
           </a:xfrm>
           <a:prstGeom prst="rect">
             <a:avLst/>
@@ -14499,7 +14501,7 @@
               <a:buNone/>
             </a:pPr>
             <a:r>
-              <a:rPr lang="en-US" sz="2100" dirty="0">
+              <a:rPr lang="en-US" sz="1920" dirty="0">
                 <a:solidFill>
                   <a:srgbClr val="003A63"/>
                 </a:solidFill>
@@ -14509,14 +14511,14 @@
               </a:rPr>
               <a:t>• Define retrieval-augmented generation in plain language.</a:t>
             </a:r>
-            <a:endParaRPr lang="en-US" sz="2100" dirty="0"/>
-          </a:p>
-          <a:p>
-            <a:pPr indent="0" marL="0">
-              <a:buNone/>
-            </a:pPr>
-            <a:r>
-              <a:rPr lang="en-US" sz="2100" dirty="0">
+            <a:endParaRPr lang="en-US" sz="1920" dirty="0"/>
+          </a:p>
+          <a:p>
+            <a:pPr indent="0" marL="0">
+              <a:buNone/>
+            </a:pPr>
+            <a:r>
+              <a:rPr lang="en-US" sz="1920" dirty="0">
                 <a:solidFill>
                   <a:srgbClr val="003A63"/>
                 </a:solidFill>
@@ -14524,16 +14526,16 @@
                 <a:ea typeface="Aptos" pitchFamily="34" charset="-122"/>
                 <a:cs typeface="Aptos" pitchFamily="34" charset="-120"/>
               </a:rPr>
-              <a:t>• Describe the major components of a RAG system, including document ingestion, chunking,.</a:t>
-            </a:r>
-            <a:endParaRPr lang="en-US" sz="2100" dirty="0"/>
-          </a:p>
-          <a:p>
-            <a:pPr indent="0" marL="0">
-              <a:buNone/>
-            </a:pPr>
-            <a:r>
-              <a:rPr lang="en-US" sz="2100" dirty="0">
+              <a:t>• Describe the major components of a RAG system, including document ingestion,.</a:t>
+            </a:r>
+            <a:endParaRPr lang="en-US" sz="1920" dirty="0"/>
+          </a:p>
+          <a:p>
+            <a:pPr indent="0" marL="0">
+              <a:buNone/>
+            </a:pPr>
+            <a:r>
+              <a:rPr lang="en-US" sz="1920" dirty="0">
                 <a:solidFill>
                   <a:srgbClr val="003A63"/>
                 </a:solidFill>
@@ -14543,7 +14545,7 @@
               </a:rPr>
               <a:t>• Identify public health use cases where RAG may improve knowledge work.</a:t>
             </a:r>
-            <a:endParaRPr lang="en-US" sz="2100" dirty="0"/>
+            <a:endParaRPr lang="en-US" sz="1920" dirty="0"/>
           </a:p>
         </p:txBody>
       </p:sp>
@@ -14555,12 +14557,12 @@
         </p:nvSpPr>
         <p:spPr>
           <a:xfrm>
-            <a:off x="7635240" y="1325880"/>
-            <a:ext cx="3474720" cy="1207008"/>
+            <a:off x="7543800" y="1325880"/>
+            <a:ext cx="3611880" cy="1261872"/>
           </a:xfrm>
           <a:prstGeom prst="roundRect">
             <a:avLst>
-              <a:gd name="adj" fmla="val 9091"/>
+              <a:gd name="adj" fmla="val 8696"/>
             </a:avLst>
           </a:prstGeom>
           <a:solidFill>
@@ -14582,8 +14584,8 @@
         </p:nvSpPr>
         <p:spPr>
           <a:xfrm>
-            <a:off x="7799832" y="1472184"/>
-            <a:ext cx="3145536" cy="256032"/>
+            <a:off x="7708392" y="1453896"/>
+            <a:ext cx="3282696" cy="228600"/>
           </a:xfrm>
           <a:prstGeom prst="rect">
             <a:avLst/>
@@ -14599,7 +14601,7 @@
               <a:buNone/>
             </a:pPr>
             <a:r>
-              <a:rPr lang="en-US" sz="1300" b="1" dirty="0">
+              <a:rPr lang="en-US" sz="1220" b="1" dirty="0">
                 <a:solidFill>
                   <a:srgbClr val="0068B7"/>
                 </a:solidFill>
@@ -14609,7 +14611,7 @@
               </a:rPr>
               <a:t>Practice focus</a:t>
             </a:r>
-            <a:endParaRPr lang="en-US" sz="1300" dirty="0"/>
+            <a:endParaRPr lang="en-US" sz="1220" dirty="0"/>
           </a:p>
         </p:txBody>
       </p:sp>
@@ -14621,8 +14623,8 @@
         </p:nvSpPr>
         <p:spPr>
           <a:xfrm>
-            <a:off x="7799832" y="1801368"/>
-            <a:ext cx="3145536" cy="640080"/>
+            <a:off x="7708392" y="1764792"/>
+            <a:ext cx="3282696" cy="749808"/>
           </a:xfrm>
           <a:prstGeom prst="rect">
             <a:avLst/>
@@ -14640,7 +14642,7 @@
               <a:buNone/>
             </a:pPr>
             <a:r>
-              <a:rPr lang="en-US" sz="1320" dirty="0">
+              <a:rPr lang="en-US" sz="1220" dirty="0">
                 <a:solidFill>
                   <a:srgbClr val="17364A"/>
                 </a:solidFill>
@@ -14650,7 +14652,7 @@
               </a:rPr>
               <a:t>Define retrieval-augmented generation in plain language.</a:t>
             </a:r>
-            <a:endParaRPr lang="en-US" sz="1320" dirty="0"/>
+            <a:endParaRPr lang="en-US" sz="1220" dirty="0"/>
           </a:p>
         </p:txBody>
       </p:sp>
@@ -14662,12 +14664,12 @@
         </p:nvSpPr>
         <p:spPr>
           <a:xfrm>
-            <a:off x="7635240" y="2670048"/>
-            <a:ext cx="3474720" cy="1377086"/>
+            <a:off x="7543800" y="2724912"/>
+            <a:ext cx="3611880" cy="1527048"/>
           </a:xfrm>
           <a:prstGeom prst="roundRect">
             <a:avLst>
-              <a:gd name="adj" fmla="val 7968"/>
+              <a:gd name="adj" fmla="val 7186"/>
             </a:avLst>
           </a:prstGeom>
           <a:solidFill>
@@ -14689,8 +14691,8 @@
         </p:nvSpPr>
         <p:spPr>
           <a:xfrm>
-            <a:off x="7799832" y="2816352"/>
-            <a:ext cx="3145536" cy="256032"/>
+            <a:off x="7708392" y="2852928"/>
+            <a:ext cx="3282696" cy="228600"/>
           </a:xfrm>
           <a:prstGeom prst="rect">
             <a:avLst/>
@@ -14706,7 +14708,7 @@
               <a:buNone/>
             </a:pPr>
             <a:r>
-              <a:rPr lang="en-US" sz="1300" b="1" dirty="0">
+              <a:rPr lang="en-US" sz="1220" b="1" dirty="0">
                 <a:solidFill>
                   <a:srgbClr val="0068B7"/>
                 </a:solidFill>
@@ -14716,7 +14718,7 @@
               </a:rPr>
               <a:t>Concept checkpoints</a:t>
             </a:r>
-            <a:endParaRPr lang="en-US" sz="1300" dirty="0"/>
+            <a:endParaRPr lang="en-US" sz="1220" dirty="0"/>
           </a:p>
         </p:txBody>
       </p:sp>
@@ -14728,8 +14730,8 @@
         </p:nvSpPr>
         <p:spPr>
           <a:xfrm>
-            <a:off x="7818120" y="3182112"/>
-            <a:ext cx="3090672" cy="718718"/>
+            <a:off x="7726680" y="3182112"/>
+            <a:ext cx="3227832" cy="960120"/>
           </a:xfrm>
           <a:prstGeom prst="rect">
             <a:avLst/>
@@ -14747,7 +14749,7 @@
               <a:buNone/>
             </a:pPr>
             <a:r>
-              <a:rPr lang="en-US" sz="1220" dirty="0">
+              <a:rPr lang="en-US" sz="1140" dirty="0">
                 <a:solidFill>
                   <a:srgbClr val="17364A"/>
                 </a:solidFill>
@@ -14755,16 +14757,16 @@
                 <a:ea typeface="Aptos" pitchFamily="34" charset="-122"/>
                 <a:cs typeface="Aptos" pitchFamily="34" charset="-120"/>
               </a:rPr>
-              <a:t>Describe the major components of a RAG system, including document.</a:t>
-            </a:r>
-            <a:endParaRPr lang="en-US" sz="1220" dirty="0"/>
-          </a:p>
-          <a:p>
-            <a:pPr indent="0" marL="0">
-              <a:buNone/>
-            </a:pPr>
-            <a:r>
-              <a:rPr lang="en-US" sz="1220" dirty="0">
+              <a:t>Describe the major components of a RAG system,.</a:t>
+            </a:r>
+            <a:endParaRPr lang="en-US" sz="1140" dirty="0"/>
+          </a:p>
+          <a:p>
+            <a:pPr indent="0" marL="0">
+              <a:buNone/>
+            </a:pPr>
+            <a:r>
+              <a:rPr lang="en-US" sz="1140" dirty="0">
                 <a:solidFill>
                   <a:srgbClr val="17364A"/>
                 </a:solidFill>
@@ -14772,16 +14774,16 @@
                 <a:ea typeface="Aptos" pitchFamily="34" charset="-122"/>
                 <a:cs typeface="Aptos" pitchFamily="34" charset="-120"/>
               </a:rPr>
-              <a:t>Assess risks related to stale content, access control, retrieval.</a:t>
-            </a:r>
-            <a:endParaRPr lang="en-US" sz="1220" dirty="0"/>
-          </a:p>
-          <a:p>
-            <a:pPr indent="0" marL="0">
-              <a:buNone/>
-            </a:pPr>
-            <a:r>
-              <a:rPr lang="en-US" sz="1220" dirty="0">
+              <a:t>Assess risks related to stale content, access.</a:t>
+            </a:r>
+            <a:endParaRPr lang="en-US" sz="1140" dirty="0"/>
+          </a:p>
+          <a:p>
+            <a:pPr indent="0" marL="0">
+              <a:buNone/>
+            </a:pPr>
+            <a:r>
+              <a:rPr lang="en-US" sz="1140" dirty="0">
                 <a:solidFill>
                   <a:srgbClr val="17364A"/>
                 </a:solidFill>
@@ -14789,9 +14791,9 @@
                 <a:ea typeface="Aptos" pitchFamily="34" charset="-122"/>
                 <a:cs typeface="Aptos" pitchFamily="34" charset="-120"/>
               </a:rPr>
-              <a:t>Design governance and monitoring requirements for agency RAG.</a:t>
-            </a:r>
-            <a:endParaRPr lang="en-US" sz="1220" dirty="0"/>
+              <a:t>Design governance and monitoring requirements for.</a:t>
+            </a:r>
+            <a:endParaRPr lang="en-US" sz="1140" dirty="0"/>
           </a:p>
         </p:txBody>
       </p:sp>
@@ -14803,12 +14805,12 @@
         </p:nvSpPr>
         <p:spPr>
           <a:xfrm>
-            <a:off x="7635240" y="4184294"/>
-            <a:ext cx="3474720" cy="1466698"/>
+            <a:off x="7543800" y="4389120"/>
+            <a:ext cx="3611880" cy="1261872"/>
           </a:xfrm>
           <a:prstGeom prst="roundRect">
             <a:avLst>
-              <a:gd name="adj" fmla="val 7481"/>
+              <a:gd name="adj" fmla="val 8696"/>
             </a:avLst>
           </a:prstGeom>
           <a:solidFill>
@@ -14830,8 +14832,8 @@
         </p:nvSpPr>
         <p:spPr>
           <a:xfrm>
-            <a:off x="7799832" y="4330598"/>
-            <a:ext cx="3145536" cy="256032"/>
+            <a:off x="7708392" y="4517136"/>
+            <a:ext cx="3282696" cy="228600"/>
           </a:xfrm>
           <a:prstGeom prst="rect">
             <a:avLst/>
@@ -14847,7 +14849,7 @@
               <a:buNone/>
             </a:pPr>
             <a:r>
-              <a:rPr lang="en-US" sz="1300" b="1" dirty="0">
+              <a:rPr lang="en-US" sz="1220" b="1" dirty="0">
                 <a:solidFill>
                   <a:srgbClr val="0068B7"/>
                 </a:solidFill>
@@ -14857,7 +14859,7 @@
               </a:rPr>
               <a:t>What to produce</a:t>
             </a:r>
-            <a:endParaRPr lang="en-US" sz="1300" dirty="0"/>
+            <a:endParaRPr lang="en-US" sz="1220" dirty="0"/>
           </a:p>
         </p:txBody>
       </p:sp>
@@ -14869,8 +14871,8 @@
         </p:nvSpPr>
         <p:spPr>
           <a:xfrm>
-            <a:off x="7799832" y="4659782"/>
-            <a:ext cx="3145536" cy="899770"/>
+            <a:off x="7708392" y="4828032"/>
+            <a:ext cx="3282696" cy="749808"/>
           </a:xfrm>
           <a:prstGeom prst="rect">
             <a:avLst/>
@@ -14888,7 +14890,7 @@
               <a:buNone/>
             </a:pPr>
             <a:r>
-              <a:rPr lang="en-US" sz="1320" dirty="0">
+              <a:rPr lang="en-US" sz="1220" dirty="0">
                 <a:solidFill>
                   <a:srgbClr val="17364A"/>
                 </a:solidFill>
@@ -14896,9 +14898,9 @@
                 <a:ea typeface="Aptos" pitchFamily="34" charset="-122"/>
                 <a:cs typeface="Aptos" pitchFamily="34" charset="-120"/>
               </a:rPr>
-              <a:t>Use the assignment to test whether you can explain the concept, apply it to a realistic public health situation, and identify what would need review before the work moves forward.</a:t>
-            </a:r>
-            <a:endParaRPr lang="en-US" sz="1320" dirty="0"/>
+              <a:t>Use the assignment to test whether you can explain the concept, apply it to a.</a:t>
+            </a:r>
+            <a:endParaRPr lang="en-US" sz="1220" dirty="0"/>
           </a:p>
         </p:txBody>
       </p:sp>
@@ -15189,8 +15191,8 @@
         </p:nvSpPr>
         <p:spPr>
           <a:xfrm>
-            <a:off x="868680" y="1508760"/>
-            <a:ext cx="6309360" cy="4160520"/>
+            <a:off x="822960" y="1463040"/>
+            <a:ext cx="6565392" cy="4343400"/>
           </a:xfrm>
           <a:prstGeom prst="rect">
             <a:avLst/>
@@ -15208,7 +15210,7 @@
               <a:buNone/>
             </a:pPr>
             <a:r>
-              <a:rPr lang="en-US" sz="2100" dirty="0">
+              <a:rPr lang="en-US" sz="1920" dirty="0">
                 <a:solidFill>
                   <a:srgbClr val="003A63"/>
                 </a:solidFill>
@@ -15218,7 +15220,7 @@
               </a:rPr>
               <a:t>• Produce a RAG readiness checklist for a public health knowledge workflow.</a:t>
             </a:r>
-            <a:endParaRPr lang="en-US" sz="2100" dirty="0"/>
+            <a:endParaRPr lang="en-US" sz="1920" dirty="0"/>
           </a:p>
         </p:txBody>
       </p:sp>
@@ -15230,12 +15232,12 @@
         </p:nvSpPr>
         <p:spPr>
           <a:xfrm>
-            <a:off x="7635240" y="1325880"/>
-            <a:ext cx="3474720" cy="1207008"/>
+            <a:off x="7543800" y="1325880"/>
+            <a:ext cx="3611880" cy="1261872"/>
           </a:xfrm>
           <a:prstGeom prst="roundRect">
             <a:avLst>
-              <a:gd name="adj" fmla="val 9091"/>
+              <a:gd name="adj" fmla="val 8696"/>
             </a:avLst>
           </a:prstGeom>
           <a:solidFill>
@@ -15257,8 +15259,8 @@
         </p:nvSpPr>
         <p:spPr>
           <a:xfrm>
-            <a:off x="7799832" y="1472184"/>
-            <a:ext cx="3145536" cy="256032"/>
+            <a:off x="7708392" y="1453896"/>
+            <a:ext cx="3282696" cy="228600"/>
           </a:xfrm>
           <a:prstGeom prst="rect">
             <a:avLst/>
@@ -15274,7 +15276,7 @@
               <a:buNone/>
             </a:pPr>
             <a:r>
-              <a:rPr lang="en-US" sz="1300" b="1" dirty="0">
+              <a:rPr lang="en-US" sz="1220" b="1" dirty="0">
                 <a:solidFill>
                   <a:srgbClr val="0068B7"/>
                 </a:solidFill>
@@ -15284,7 +15286,7 @@
               </a:rPr>
               <a:t>Practice focus</a:t>
             </a:r>
-            <a:endParaRPr lang="en-US" sz="1300" dirty="0"/>
+            <a:endParaRPr lang="en-US" sz="1220" dirty="0"/>
           </a:p>
         </p:txBody>
       </p:sp>
@@ -15296,8 +15298,8 @@
         </p:nvSpPr>
         <p:spPr>
           <a:xfrm>
-            <a:off x="7799832" y="1801368"/>
-            <a:ext cx="3145536" cy="640080"/>
+            <a:off x="7708392" y="1764792"/>
+            <a:ext cx="3282696" cy="749808"/>
           </a:xfrm>
           <a:prstGeom prst="rect">
             <a:avLst/>
@@ -15315,7 +15317,7 @@
               <a:buNone/>
             </a:pPr>
             <a:r>
-              <a:rPr lang="en-US" sz="1320" dirty="0">
+              <a:rPr lang="en-US" sz="1220" dirty="0">
                 <a:solidFill>
                   <a:srgbClr val="17364A"/>
                 </a:solidFill>
@@ -15325,7 +15327,7 @@
               </a:rPr>
               <a:t>Produce a RAG readiness checklist for a public health knowledge workflow.</a:t>
             </a:r>
-            <a:endParaRPr lang="en-US" sz="1320" dirty="0"/>
+            <a:endParaRPr lang="en-US" sz="1220" dirty="0"/>
           </a:p>
         </p:txBody>
       </p:sp>
@@ -15337,12 +15339,12 @@
         </p:nvSpPr>
         <p:spPr>
           <a:xfrm>
-            <a:off x="7635240" y="2670048"/>
-            <a:ext cx="3474720" cy="1377086"/>
+            <a:off x="7543800" y="2724912"/>
+            <a:ext cx="3611880" cy="1527048"/>
           </a:xfrm>
           <a:prstGeom prst="roundRect">
             <a:avLst>
-              <a:gd name="adj" fmla="val 7968"/>
+              <a:gd name="adj" fmla="val 7186"/>
             </a:avLst>
           </a:prstGeom>
           <a:solidFill>
@@ -15364,8 +15366,8 @@
         </p:nvSpPr>
         <p:spPr>
           <a:xfrm>
-            <a:off x="7799832" y="2816352"/>
-            <a:ext cx="3145536" cy="256032"/>
+            <a:off x="7708392" y="2852928"/>
+            <a:ext cx="3282696" cy="228600"/>
           </a:xfrm>
           <a:prstGeom prst="rect">
             <a:avLst/>
@@ -15381,7 +15383,7 @@
               <a:buNone/>
             </a:pPr>
             <a:r>
-              <a:rPr lang="en-US" sz="1300" b="1" dirty="0">
+              <a:rPr lang="en-US" sz="1220" b="1" dirty="0">
                 <a:solidFill>
                   <a:srgbClr val="0068B7"/>
                 </a:solidFill>
@@ -15391,7 +15393,7 @@
               </a:rPr>
               <a:t>Concept checkpoints</a:t>
             </a:r>
-            <a:endParaRPr lang="en-US" sz="1300" dirty="0"/>
+            <a:endParaRPr lang="en-US" sz="1220" dirty="0"/>
           </a:p>
         </p:txBody>
       </p:sp>
@@ -15403,8 +15405,8 @@
         </p:nvSpPr>
         <p:spPr>
           <a:xfrm>
-            <a:off x="7818120" y="3182112"/>
-            <a:ext cx="3090672" cy="718718"/>
+            <a:off x="7726680" y="3182112"/>
+            <a:ext cx="3227832" cy="960120"/>
           </a:xfrm>
           <a:prstGeom prst="rect">
             <a:avLst/>
@@ -15422,7 +15424,7 @@
               <a:buNone/>
             </a:pPr>
             <a:r>
-              <a:rPr lang="en-US" sz="1220" dirty="0">
+              <a:rPr lang="en-US" sz="1140" dirty="0">
                 <a:solidFill>
                   <a:srgbClr val="17364A"/>
                 </a:solidFill>
@@ -15430,9 +15432,9 @@
                 <a:ea typeface="Aptos" pitchFamily="34" charset="-122"/>
                 <a:cs typeface="Aptos" pitchFamily="34" charset="-120"/>
               </a:rPr>
-              <a:t>Produce a RAG readiness checklist for a public health knowledge.</a:t>
-            </a:r>
-            <a:endParaRPr lang="en-US" sz="1220" dirty="0"/>
+              <a:t>Produce a RAG readiness checklist for a public.</a:t>
+            </a:r>
+            <a:endParaRPr lang="en-US" sz="1140" dirty="0"/>
           </a:p>
         </p:txBody>
       </p:sp>
@@ -15444,12 +15446,12 @@
         </p:nvSpPr>
         <p:spPr>
           <a:xfrm>
-            <a:off x="7635240" y="4184294"/>
-            <a:ext cx="3474720" cy="1466698"/>
+            <a:off x="7543800" y="4389120"/>
+            <a:ext cx="3611880" cy="1261872"/>
           </a:xfrm>
           <a:prstGeom prst="roundRect">
             <a:avLst>
-              <a:gd name="adj" fmla="val 7481"/>
+              <a:gd name="adj" fmla="val 8696"/>
             </a:avLst>
           </a:prstGeom>
           <a:solidFill>
@@ -15471,8 +15473,8 @@
         </p:nvSpPr>
         <p:spPr>
           <a:xfrm>
-            <a:off x="7799832" y="4330598"/>
-            <a:ext cx="3145536" cy="256032"/>
+            <a:off x="7708392" y="4517136"/>
+            <a:ext cx="3282696" cy="228600"/>
           </a:xfrm>
           <a:prstGeom prst="rect">
             <a:avLst/>
@@ -15488,7 +15490,7 @@
               <a:buNone/>
             </a:pPr>
             <a:r>
-              <a:rPr lang="en-US" sz="1300" b="1" dirty="0">
+              <a:rPr lang="en-US" sz="1220" b="1" dirty="0">
                 <a:solidFill>
                   <a:srgbClr val="0068B7"/>
                 </a:solidFill>
@@ -15498,7 +15500,7 @@
               </a:rPr>
               <a:t>What to produce</a:t>
             </a:r>
-            <a:endParaRPr lang="en-US" sz="1300" dirty="0"/>
+            <a:endParaRPr lang="en-US" sz="1220" dirty="0"/>
           </a:p>
         </p:txBody>
       </p:sp>
@@ -15510,8 +15512,8 @@
         </p:nvSpPr>
         <p:spPr>
           <a:xfrm>
-            <a:off x="7799832" y="4659782"/>
-            <a:ext cx="3145536" cy="899770"/>
+            <a:off x="7708392" y="4828032"/>
+            <a:ext cx="3282696" cy="749808"/>
           </a:xfrm>
           <a:prstGeom prst="rect">
             <a:avLst/>
@@ -15529,7 +15531,7 @@
               <a:buNone/>
             </a:pPr>
             <a:r>
-              <a:rPr lang="en-US" sz="1320" dirty="0">
+              <a:rPr lang="en-US" sz="1220" dirty="0">
                 <a:solidFill>
                   <a:srgbClr val="17364A"/>
                 </a:solidFill>
@@ -15537,9 +15539,9 @@
                 <a:ea typeface="Aptos" pitchFamily="34" charset="-122"/>
                 <a:cs typeface="Aptos" pitchFamily="34" charset="-120"/>
               </a:rPr>
-              <a:t>Use the assignment to test whether you can explain the concept, apply it to a realistic public health situation, and identify what would need review before the work moves forward.</a:t>
-            </a:r>
-            <a:endParaRPr lang="en-US" sz="1320" dirty="0"/>
+              <a:t>Use the assignment to test whether you can explain the concept, apply it to a.</a:t>
+            </a:r>
+            <a:endParaRPr lang="en-US" sz="1220" dirty="0"/>
           </a:p>
         </p:txBody>
       </p:sp>
@@ -15830,8 +15832,8 @@
         </p:nvSpPr>
         <p:spPr>
           <a:xfrm>
-            <a:off x="868680" y="1508760"/>
-            <a:ext cx="6309360" cy="4160520"/>
+            <a:off x="822960" y="1463040"/>
+            <a:ext cx="6565392" cy="4343400"/>
           </a:xfrm>
           <a:prstGeom prst="rect">
             <a:avLst/>
@@ -15849,7 +15851,7 @@
               <a:buNone/>
             </a:pPr>
             <a:r>
-              <a:rPr lang="en-US" sz="2100" dirty="0">
+              <a:rPr lang="en-US" sz="1920" dirty="0">
                 <a:solidFill>
                   <a:srgbClr val="003A63"/>
                 </a:solidFill>
@@ -15857,16 +15859,16 @@
                 <a:ea typeface="Aptos" pitchFamily="34" charset="-122"/>
                 <a:cs typeface="Aptos" pitchFamily="34" charset="-120"/>
               </a:rPr>
-              <a:t>• Retrieval-augmented generation, often called RAG, combines generative AI with retrieval from a.</a:t>
-            </a:r>
-            <a:endParaRPr lang="en-US" sz="2100" dirty="0"/>
-          </a:p>
-          <a:p>
-            <a:pPr indent="0" marL="0">
-              <a:buNone/>
-            </a:pPr>
-            <a:r>
-              <a:rPr lang="en-US" sz="2100" dirty="0">
+              <a:t>• Retrieval-augmented generation, often called RAG, combines generative AI.</a:t>
+            </a:r>
+            <a:endParaRPr lang="en-US" sz="1920" dirty="0"/>
+          </a:p>
+          <a:p>
+            <a:pPr indent="0" marL="0">
+              <a:buNone/>
+            </a:pPr>
+            <a:r>
+              <a:rPr lang="en-US" sz="1920" dirty="0">
                 <a:solidFill>
                   <a:srgbClr val="003A63"/>
                 </a:solidFill>
@@ -15874,16 +15876,16 @@
                 <a:ea typeface="Aptos" pitchFamily="34" charset="-122"/>
                 <a:cs typeface="Aptos" pitchFamily="34" charset="-120"/>
               </a:rPr>
-              <a:t>• Instead of relying only on a model’s general training, a RAG system searches approved content.</a:t>
-            </a:r>
-            <a:endParaRPr lang="en-US" sz="2100" dirty="0"/>
-          </a:p>
-          <a:p>
-            <a:pPr indent="0" marL="0">
-              <a:buNone/>
-            </a:pPr>
-            <a:r>
-              <a:rPr lang="en-US" sz="2100" dirty="0">
+              <a:t>• Instead of relying only on a model’s general training, a RAG system searches.</a:t>
+            </a:r>
+            <a:endParaRPr lang="en-US" sz="1920" dirty="0"/>
+          </a:p>
+          <a:p>
+            <a:pPr indent="0" marL="0">
+              <a:buNone/>
+            </a:pPr>
+            <a:r>
+              <a:rPr lang="en-US" sz="1920" dirty="0">
                 <a:solidFill>
                   <a:srgbClr val="003A63"/>
                 </a:solidFill>
@@ -15891,9 +15893,9 @@
                 <a:ea typeface="Aptos" pitchFamily="34" charset="-122"/>
                 <a:cs typeface="Aptos" pitchFamily="34" charset="-120"/>
               </a:rPr>
-              <a:t>• In public health, RAG may support policy lookup, protocol interpretation, internal help desks,.</a:t>
-            </a:r>
-            <a:endParaRPr lang="en-US" sz="2100" dirty="0"/>
+              <a:t>• In public health, RAG may support policy lookup, protocol interpretation,.</a:t>
+            </a:r>
+            <a:endParaRPr lang="en-US" sz="1920" dirty="0"/>
           </a:p>
         </p:txBody>
       </p:sp>
@@ -15905,12 +15907,12 @@
         </p:nvSpPr>
         <p:spPr>
           <a:xfrm>
-            <a:off x="7635240" y="1325880"/>
-            <a:ext cx="3474720" cy="1255471"/>
+            <a:off x="7543800" y="1325880"/>
+            <a:ext cx="3611880" cy="1261872"/>
           </a:xfrm>
           <a:prstGeom prst="roundRect">
             <a:avLst>
-              <a:gd name="adj" fmla="val 8740"/>
+              <a:gd name="adj" fmla="val 8696"/>
             </a:avLst>
           </a:prstGeom>
           <a:solidFill>
@@ -15932,8 +15934,8 @@
         </p:nvSpPr>
         <p:spPr>
           <a:xfrm>
-            <a:off x="7799832" y="1472184"/>
-            <a:ext cx="3145536" cy="256032"/>
+            <a:off x="7708392" y="1453896"/>
+            <a:ext cx="3282696" cy="228600"/>
           </a:xfrm>
           <a:prstGeom prst="rect">
             <a:avLst/>
@@ -15949,7 +15951,7 @@
               <a:buNone/>
             </a:pPr>
             <a:r>
-              <a:rPr lang="en-US" sz="1300" b="1" dirty="0">
+              <a:rPr lang="en-US" sz="1220" b="1" dirty="0">
                 <a:solidFill>
                   <a:srgbClr val="0068B7"/>
                 </a:solidFill>
@@ -15959,7 +15961,7 @@
               </a:rPr>
               <a:t>Practice focus</a:t>
             </a:r>
-            <a:endParaRPr lang="en-US" sz="1300" dirty="0"/>
+            <a:endParaRPr lang="en-US" sz="1220" dirty="0"/>
           </a:p>
         </p:txBody>
       </p:sp>
@@ -15971,8 +15973,8 @@
         </p:nvSpPr>
         <p:spPr>
           <a:xfrm>
-            <a:off x="7799832" y="1801368"/>
-            <a:ext cx="3145536" cy="688543"/>
+            <a:off x="7708392" y="1764792"/>
+            <a:ext cx="3282696" cy="749808"/>
           </a:xfrm>
           <a:prstGeom prst="rect">
             <a:avLst/>
@@ -15990,7 +15992,7 @@
               <a:buNone/>
             </a:pPr>
             <a:r>
-              <a:rPr lang="en-US" sz="1320" dirty="0">
+              <a:rPr lang="en-US" sz="1220" dirty="0">
                 <a:solidFill>
                   <a:srgbClr val="17364A"/>
                 </a:solidFill>
@@ -15998,9 +16000,9 @@
                 <a:ea typeface="Aptos" pitchFamily="34" charset="-122"/>
                 <a:cs typeface="Aptos" pitchFamily="34" charset="-120"/>
               </a:rPr>
-              <a:t>Retrieval-augmented generation, often called RAG, combines generative AI with retrieval from a defined.</a:t>
-            </a:r>
-            <a:endParaRPr lang="en-US" sz="1320" dirty="0"/>
+              <a:t>Retrieval-augmented generation, often called RAG, combines generative AI with.</a:t>
+            </a:r>
+            <a:endParaRPr lang="en-US" sz="1220" dirty="0"/>
           </a:p>
         </p:txBody>
       </p:sp>
@@ -16012,12 +16014,12 @@
         </p:nvSpPr>
         <p:spPr>
           <a:xfrm>
-            <a:off x="7635240" y="2718511"/>
-            <a:ext cx="3474720" cy="1328623"/>
+            <a:off x="7543800" y="2724912"/>
+            <a:ext cx="3611880" cy="1527048"/>
           </a:xfrm>
           <a:prstGeom prst="roundRect">
             <a:avLst>
-              <a:gd name="adj" fmla="val 8259"/>
+              <a:gd name="adj" fmla="val 7186"/>
             </a:avLst>
           </a:prstGeom>
           <a:solidFill>
@@ -16039,24 +16041,26 @@
         </p:nvSpPr>
         <p:spPr>
           <a:xfrm>
-            <a:off x="7799832" y="2846527"/>
-            <a:ext cx="3145536" cy="237744"/>
-          </a:xfrm>
-          <a:prstGeom prst="rect">
-            <a:avLst/>
-          </a:prstGeom>
-          <a:noFill/>
-          <a:ln/>
-        </p:spPr>
-        <p:txBody>
-          <a:bodyPr wrap="square" lIns="0" tIns="0" rIns="0" bIns="0" rtlCol="0" anchor="ctr"/>
-          <a:lstStyle/>
-          <a:p>
-            <a:pPr indent="0" marL="0">
-              <a:buNone/>
-            </a:pPr>
-            <a:r>
-              <a:rPr lang="en-US" sz="1250" b="1" dirty="0">
+            <a:off x="7708392" y="2852928"/>
+            <a:ext cx="3282696" cy="219456"/>
+          </a:xfrm>
+          <a:prstGeom prst="rect">
+            <a:avLst/>
+          </a:prstGeom>
+          <a:noFill/>
+          <a:ln/>
+        </p:spPr>
+        <p:txBody>
+          <a:bodyPr wrap="square" lIns="0" tIns="0" rIns="0" bIns="0" rtlCol="0" anchor="ctr">
+            <a:normAutofit/>
+          </a:bodyPr>
+          <a:lstStyle/>
+          <a:p>
+            <a:pPr indent="0" marL="0">
+              <a:buNone/>
+            </a:pPr>
+            <a:r>
+              <a:rPr lang="en-US" sz="1160" b="1" dirty="0">
                 <a:solidFill>
                   <a:srgbClr val="0068B7"/>
                 </a:solidFill>
@@ -16066,7 +16070,7 @@
               </a:rPr>
               <a:t>Human-in-the-loop use</a:t>
             </a:r>
-            <a:endParaRPr lang="en-US" sz="1250" dirty="0"/>
+            <a:endParaRPr lang="en-US" sz="1160" dirty="0"/>
           </a:p>
         </p:txBody>
       </p:sp>
@@ -16078,7 +16082,7 @@
         </p:nvSpPr>
         <p:spPr>
           <a:xfrm>
-            <a:off x="8763000" y="3399739"/>
+            <a:off x="8717280" y="3406140"/>
             <a:ext cx="164592" cy="0"/>
           </a:xfrm>
           <a:prstGeom prst="line">
@@ -16101,8 +16105,8 @@
         </p:nvSpPr>
         <p:spPr>
           <a:xfrm>
-            <a:off x="7872984" y="3248863"/>
-            <a:ext cx="890016" cy="301752"/>
+            <a:off x="7781544" y="3255264"/>
+            <a:ext cx="935736" cy="301752"/>
           </a:xfrm>
           <a:prstGeom prst="roundRect">
             <a:avLst>
@@ -16128,8 +16132,8 @@
         </p:nvSpPr>
         <p:spPr>
           <a:xfrm>
-            <a:off x="7909560" y="3322015"/>
-            <a:ext cx="816864" cy="146304"/>
+            <a:off x="7818120" y="3328416"/>
+            <a:ext cx="862584" cy="146304"/>
           </a:xfrm>
           <a:prstGeom prst="rect">
             <a:avLst/>
@@ -16169,7 +16173,7 @@
         </p:nvSpPr>
         <p:spPr>
           <a:xfrm>
-            <a:off x="9817608" y="3399739"/>
+            <a:off x="9817608" y="3406140"/>
             <a:ext cx="164592" cy="0"/>
           </a:xfrm>
           <a:prstGeom prst="line">
@@ -16192,8 +16196,8 @@
         </p:nvSpPr>
         <p:spPr>
           <a:xfrm>
-            <a:off x="8927592" y="3248863"/>
-            <a:ext cx="890016" cy="301752"/>
+            <a:off x="8881872" y="3255264"/>
+            <a:ext cx="935736" cy="301752"/>
           </a:xfrm>
           <a:prstGeom prst="roundRect">
             <a:avLst>
@@ -16219,8 +16223,8 @@
         </p:nvSpPr>
         <p:spPr>
           <a:xfrm>
-            <a:off x="8964168" y="3322015"/>
-            <a:ext cx="816864" cy="146304"/>
+            <a:off x="8918448" y="3328416"/>
+            <a:ext cx="862584" cy="146304"/>
           </a:xfrm>
           <a:prstGeom prst="rect">
             <a:avLst/>
@@ -16260,8 +16264,8 @@
         </p:nvSpPr>
         <p:spPr>
           <a:xfrm>
-            <a:off x="9982200" y="3248863"/>
-            <a:ext cx="890016" cy="301752"/>
+            <a:off x="9982200" y="3255264"/>
+            <a:ext cx="935736" cy="301752"/>
           </a:xfrm>
           <a:prstGeom prst="roundRect">
             <a:avLst>
@@ -16287,8 +16291,8 @@
         </p:nvSpPr>
         <p:spPr>
           <a:xfrm>
-            <a:off x="10018776" y="3322015"/>
-            <a:ext cx="816864" cy="146304"/>
+            <a:off x="10018776" y="3328416"/>
+            <a:ext cx="862584" cy="146304"/>
           </a:xfrm>
           <a:prstGeom prst="rect">
             <a:avLst/>
@@ -16328,8 +16332,8 @@
         </p:nvSpPr>
         <p:spPr>
           <a:xfrm>
-            <a:off x="7854696" y="3742639"/>
-            <a:ext cx="3035808" cy="158191"/>
+            <a:off x="7763256" y="3749040"/>
+            <a:ext cx="3172968" cy="356616"/>
           </a:xfrm>
           <a:prstGeom prst="rect">
             <a:avLst/>
@@ -16347,7 +16351,7 @@
               <a:buNone/>
             </a:pPr>
             <a:r>
-              <a:rPr lang="en-US" sz="1120" dirty="0">
+              <a:rPr lang="en-US" sz="1040" dirty="0">
                 <a:solidFill>
                   <a:srgbClr val="17364A"/>
                 </a:solidFill>
@@ -16355,9 +16359,9 @@
                 <a:ea typeface="Aptos" pitchFamily="34" charset="-122"/>
                 <a:cs typeface="Aptos" pitchFamily="34" charset="-120"/>
               </a:rPr>
-              <a:t>AI can support work, but public health judgment remains responsible for interpretation and final use.</a:t>
-            </a:r>
-            <a:endParaRPr lang="en-US" sz="1120" dirty="0"/>
+              <a:t>AI can support work, but public health judgment remains responsible.</a:t>
+            </a:r>
+            <a:endParaRPr lang="en-US" sz="1040" dirty="0"/>
           </a:p>
         </p:txBody>
       </p:sp>
@@ -16369,12 +16373,12 @@
         </p:nvSpPr>
         <p:spPr>
           <a:xfrm>
-            <a:off x="7635240" y="4184294"/>
-            <a:ext cx="3474720" cy="1466698"/>
+            <a:off x="7543800" y="4389120"/>
+            <a:ext cx="3611880" cy="1261872"/>
           </a:xfrm>
           <a:prstGeom prst="roundRect">
             <a:avLst>
-              <a:gd name="adj" fmla="val 7481"/>
+              <a:gd name="adj" fmla="val 8696"/>
             </a:avLst>
           </a:prstGeom>
           <a:solidFill>
@@ -16396,8 +16400,8 @@
         </p:nvSpPr>
         <p:spPr>
           <a:xfrm>
-            <a:off x="7799832" y="4330598"/>
-            <a:ext cx="3145536" cy="256032"/>
+            <a:off x="7708392" y="4517136"/>
+            <a:ext cx="3282696" cy="228600"/>
           </a:xfrm>
           <a:prstGeom prst="rect">
             <a:avLst/>
@@ -16413,7 +16417,7 @@
               <a:buNone/>
             </a:pPr>
             <a:r>
-              <a:rPr lang="en-US" sz="1300" b="1" dirty="0">
+              <a:rPr lang="en-US" sz="1220" b="1" dirty="0">
                 <a:solidFill>
                   <a:srgbClr val="0068B7"/>
                 </a:solidFill>
@@ -16423,7 +16427,7 @@
               </a:rPr>
               <a:t>What to produce</a:t>
             </a:r>
-            <a:endParaRPr lang="en-US" sz="1300" dirty="0"/>
+            <a:endParaRPr lang="en-US" sz="1220" dirty="0"/>
           </a:p>
         </p:txBody>
       </p:sp>
@@ -16435,8 +16439,8 @@
         </p:nvSpPr>
         <p:spPr>
           <a:xfrm>
-            <a:off x="7799832" y="4659782"/>
-            <a:ext cx="3145536" cy="899770"/>
+            <a:off x="7708392" y="4828032"/>
+            <a:ext cx="3282696" cy="749808"/>
           </a:xfrm>
           <a:prstGeom prst="rect">
             <a:avLst/>
@@ -16454,7 +16458,7 @@
               <a:buNone/>
             </a:pPr>
             <a:r>
-              <a:rPr lang="en-US" sz="1320" dirty="0">
+              <a:rPr lang="en-US" sz="1220" dirty="0">
                 <a:solidFill>
                   <a:srgbClr val="17364A"/>
                 </a:solidFill>
@@ -16462,9 +16466,9 @@
                 <a:ea typeface="Aptos" pitchFamily="34" charset="-122"/>
                 <a:cs typeface="Aptos" pitchFamily="34" charset="-120"/>
               </a:rPr>
-              <a:t>Use the assignment to test whether you can explain the concept, apply it to a realistic public health situation, and identify what would need review before the work moves forward.</a:t>
-            </a:r>
-            <a:endParaRPr lang="en-US" sz="1320" dirty="0"/>
+              <a:t>Use the assignment to test whether you can explain the concept, apply it to a.</a:t>
+            </a:r>
+            <a:endParaRPr lang="en-US" sz="1220" dirty="0"/>
           </a:p>
         </p:txBody>
       </p:sp>
@@ -16755,8 +16759,8 @@
         </p:nvSpPr>
         <p:spPr>
           <a:xfrm>
-            <a:off x="868680" y="1508760"/>
-            <a:ext cx="6309360" cy="4160520"/>
+            <a:off x="822960" y="1463040"/>
+            <a:ext cx="6565392" cy="4343400"/>
           </a:xfrm>
           <a:prstGeom prst="rect">
             <a:avLst/>
@@ -16774,7 +16778,7 @@
               <a:buNone/>
             </a:pPr>
             <a:r>
-              <a:rPr lang="en-US" sz="2100" dirty="0">
+              <a:rPr lang="en-US" sz="1920" dirty="0">
                 <a:solidFill>
                   <a:srgbClr val="003A63"/>
                 </a:solidFill>
@@ -16782,16 +16786,16 @@
                 <a:ea typeface="Aptos" pitchFamily="34" charset="-122"/>
                 <a:cs typeface="Aptos" pitchFamily="34" charset="-120"/>
               </a:rPr>
-              <a:t>• RAG matters because public health agencies manage large collections of guidance, protocols,.</a:t>
-            </a:r>
-            <a:endParaRPr lang="en-US" sz="2100" dirty="0"/>
-          </a:p>
-          <a:p>
-            <a:pPr indent="0" marL="0">
-              <a:buNone/>
-            </a:pPr>
-            <a:r>
-              <a:rPr lang="en-US" sz="2100" dirty="0">
+              <a:t>• RAG matters because public health agencies manage large collections of.</a:t>
+            </a:r>
+            <a:endParaRPr lang="en-US" sz="1920" dirty="0"/>
+          </a:p>
+          <a:p>
+            <a:pPr indent="0" marL="0">
+              <a:buNone/>
+            </a:pPr>
+            <a:r>
+              <a:rPr lang="en-US" sz="1920" dirty="0">
                 <a:solidFill>
                   <a:srgbClr val="003A63"/>
                 </a:solidFill>
@@ -16799,16 +16803,16 @@
                 <a:ea typeface="Aptos" pitchFamily="34" charset="-122"/>
                 <a:cs typeface="Aptos" pitchFamily="34" charset="-120"/>
               </a:rPr>
-              <a:t>• Staff may spend substantial time searching for answers across shared drives, websites,.</a:t>
-            </a:r>
-            <a:endParaRPr lang="en-US" sz="2100" dirty="0"/>
-          </a:p>
-          <a:p>
-            <a:pPr indent="0" marL="0">
-              <a:buNone/>
-            </a:pPr>
-            <a:r>
-              <a:rPr lang="en-US" sz="2100" dirty="0">
+              <a:t>• Staff may spend substantial time searching for answers across shared drives,.</a:t>
+            </a:r>
+            <a:endParaRPr lang="en-US" sz="1920" dirty="0"/>
+          </a:p>
+          <a:p>
+            <a:pPr indent="0" marL="0">
+              <a:buNone/>
+            </a:pPr>
+            <a:r>
+              <a:rPr lang="en-US" sz="1920" dirty="0">
                 <a:solidFill>
                   <a:srgbClr val="003A63"/>
                 </a:solidFill>
@@ -16816,9 +16820,9 @@
                 <a:ea typeface="Aptos" pitchFamily="34" charset="-122"/>
                 <a:cs typeface="Aptos" pitchFamily="34" charset="-120"/>
               </a:rPr>
-              <a:t>• A well-designed RAG system can help users find relevant guidance and produce concise,.</a:t>
-            </a:r>
-            <a:endParaRPr lang="en-US" sz="2100" dirty="0"/>
+              <a:t>• A well-designed RAG system can help users find relevant guidance and produce.</a:t>
+            </a:r>
+            <a:endParaRPr lang="en-US" sz="1920" dirty="0"/>
           </a:p>
         </p:txBody>
       </p:sp>
@@ -16830,12 +16834,12 @@
         </p:nvSpPr>
         <p:spPr>
           <a:xfrm>
-            <a:off x="7635240" y="1325880"/>
-            <a:ext cx="3474720" cy="1255471"/>
+            <a:off x="7543800" y="1325880"/>
+            <a:ext cx="3611880" cy="1261872"/>
           </a:xfrm>
           <a:prstGeom prst="roundRect">
             <a:avLst>
-              <a:gd name="adj" fmla="val 8740"/>
+              <a:gd name="adj" fmla="val 8696"/>
             </a:avLst>
           </a:prstGeom>
           <a:solidFill>
@@ -16857,8 +16861,8 @@
         </p:nvSpPr>
         <p:spPr>
           <a:xfrm>
-            <a:off x="7799832" y="1472184"/>
-            <a:ext cx="3145536" cy="256032"/>
+            <a:off x="7708392" y="1453896"/>
+            <a:ext cx="3282696" cy="228600"/>
           </a:xfrm>
           <a:prstGeom prst="rect">
             <a:avLst/>
@@ -16874,7 +16878,7 @@
               <a:buNone/>
             </a:pPr>
             <a:r>
-              <a:rPr lang="en-US" sz="1300" b="1" dirty="0">
+              <a:rPr lang="en-US" sz="1220" b="1" dirty="0">
                 <a:solidFill>
                   <a:srgbClr val="0068B7"/>
                 </a:solidFill>
@@ -16884,7 +16888,7 @@
               </a:rPr>
               <a:t>Practice focus</a:t>
             </a:r>
-            <a:endParaRPr lang="en-US" sz="1300" dirty="0"/>
+            <a:endParaRPr lang="en-US" sz="1220" dirty="0"/>
           </a:p>
         </p:txBody>
       </p:sp>
@@ -16896,8 +16900,8 @@
         </p:nvSpPr>
         <p:spPr>
           <a:xfrm>
-            <a:off x="7799832" y="1801368"/>
-            <a:ext cx="3145536" cy="688543"/>
+            <a:off x="7708392" y="1764792"/>
+            <a:ext cx="3282696" cy="749808"/>
           </a:xfrm>
           <a:prstGeom prst="rect">
             <a:avLst/>
@@ -16915,7 +16919,7 @@
               <a:buNone/>
             </a:pPr>
             <a:r>
-              <a:rPr lang="en-US" sz="1320" dirty="0">
+              <a:rPr lang="en-US" sz="1220" dirty="0">
                 <a:solidFill>
                   <a:srgbClr val="17364A"/>
                 </a:solidFill>
@@ -16923,9 +16927,9 @@
                 <a:ea typeface="Aptos" pitchFamily="34" charset="-122"/>
                 <a:cs typeface="Aptos" pitchFamily="34" charset="-120"/>
               </a:rPr>
-              <a:t>RAG matters because public health agencies manage large collections of guidance, protocols, policies,.</a:t>
-            </a:r>
-            <a:endParaRPr lang="en-US" sz="1320" dirty="0"/>
+              <a:t>RAG matters because public health agencies manage large collections of guidance,.</a:t>
+            </a:r>
+            <a:endParaRPr lang="en-US" sz="1220" dirty="0"/>
           </a:p>
         </p:txBody>
       </p:sp>
@@ -16937,12 +16941,12 @@
         </p:nvSpPr>
         <p:spPr>
           <a:xfrm>
-            <a:off x="7635240" y="2718511"/>
-            <a:ext cx="3474720" cy="1328623"/>
+            <a:off x="7543800" y="2724912"/>
+            <a:ext cx="3611880" cy="1527048"/>
           </a:xfrm>
           <a:prstGeom prst="roundRect">
             <a:avLst>
-              <a:gd name="adj" fmla="val 8259"/>
+              <a:gd name="adj" fmla="val 7186"/>
             </a:avLst>
           </a:prstGeom>
           <a:solidFill>
@@ -16964,24 +16968,26 @@
         </p:nvSpPr>
         <p:spPr>
           <a:xfrm>
-            <a:off x="7799832" y="2846527"/>
-            <a:ext cx="3145536" cy="237744"/>
-          </a:xfrm>
-          <a:prstGeom prst="rect">
-            <a:avLst/>
-          </a:prstGeom>
-          <a:noFill/>
-          <a:ln/>
-        </p:spPr>
-        <p:txBody>
-          <a:bodyPr wrap="square" lIns="0" tIns="0" rIns="0" bIns="0" rtlCol="0" anchor="ctr"/>
-          <a:lstStyle/>
-          <a:p>
-            <a:pPr indent="0" marL="0">
-              <a:buNone/>
-            </a:pPr>
-            <a:r>
-              <a:rPr lang="en-US" sz="1250" b="1" dirty="0">
+            <a:off x="7708392" y="2852928"/>
+            <a:ext cx="3282696" cy="219456"/>
+          </a:xfrm>
+          <a:prstGeom prst="rect">
+            <a:avLst/>
+          </a:prstGeom>
+          <a:noFill/>
+          <a:ln/>
+        </p:spPr>
+        <p:txBody>
+          <a:bodyPr wrap="square" lIns="0" tIns="0" rIns="0" bIns="0" rtlCol="0" anchor="ctr">
+            <a:normAutofit/>
+          </a:bodyPr>
+          <a:lstStyle/>
+          <a:p>
+            <a:pPr indent="0" marL="0">
+              <a:buNone/>
+            </a:pPr>
+            <a:r>
+              <a:rPr lang="en-US" sz="1160" b="1" dirty="0">
                 <a:solidFill>
                   <a:srgbClr val="0068B7"/>
                 </a:solidFill>
@@ -16991,7 +16997,7 @@
               </a:rPr>
               <a:t>Human-in-the-loop use</a:t>
             </a:r>
-            <a:endParaRPr lang="en-US" sz="1250" dirty="0"/>
+            <a:endParaRPr lang="en-US" sz="1160" dirty="0"/>
           </a:p>
         </p:txBody>
       </p:sp>
@@ -17003,7 +17009,7 @@
         </p:nvSpPr>
         <p:spPr>
           <a:xfrm>
-            <a:off x="8763000" y="3399739"/>
+            <a:off x="8717280" y="3406140"/>
             <a:ext cx="164592" cy="0"/>
           </a:xfrm>
           <a:prstGeom prst="line">
@@ -17026,8 +17032,8 @@
         </p:nvSpPr>
         <p:spPr>
           <a:xfrm>
-            <a:off x="7872984" y="3248863"/>
-            <a:ext cx="890016" cy="301752"/>
+            <a:off x="7781544" y="3255264"/>
+            <a:ext cx="935736" cy="301752"/>
           </a:xfrm>
           <a:prstGeom prst="roundRect">
             <a:avLst>
@@ -17053,8 +17059,8 @@
         </p:nvSpPr>
         <p:spPr>
           <a:xfrm>
-            <a:off x="7909560" y="3322015"/>
-            <a:ext cx="816864" cy="146304"/>
+            <a:off x="7818120" y="3328416"/>
+            <a:ext cx="862584" cy="146304"/>
           </a:xfrm>
           <a:prstGeom prst="rect">
             <a:avLst/>
@@ -17094,7 +17100,7 @@
         </p:nvSpPr>
         <p:spPr>
           <a:xfrm>
-            <a:off x="9817608" y="3399739"/>
+            <a:off x="9817608" y="3406140"/>
             <a:ext cx="164592" cy="0"/>
           </a:xfrm>
           <a:prstGeom prst="line">
@@ -17117,8 +17123,8 @@
         </p:nvSpPr>
         <p:spPr>
           <a:xfrm>
-            <a:off x="8927592" y="3248863"/>
-            <a:ext cx="890016" cy="301752"/>
+            <a:off x="8881872" y="3255264"/>
+            <a:ext cx="935736" cy="301752"/>
           </a:xfrm>
           <a:prstGeom prst="roundRect">
             <a:avLst>
@@ -17144,8 +17150,8 @@
         </p:nvSpPr>
         <p:spPr>
           <a:xfrm>
-            <a:off x="8964168" y="3322015"/>
-            <a:ext cx="816864" cy="146304"/>
+            <a:off x="8918448" y="3328416"/>
+            <a:ext cx="862584" cy="146304"/>
           </a:xfrm>
           <a:prstGeom prst="rect">
             <a:avLst/>
@@ -17185,8 +17191,8 @@
         </p:nvSpPr>
         <p:spPr>
           <a:xfrm>
-            <a:off x="9982200" y="3248863"/>
-            <a:ext cx="890016" cy="301752"/>
+            <a:off x="9982200" y="3255264"/>
+            <a:ext cx="935736" cy="301752"/>
           </a:xfrm>
           <a:prstGeom prst="roundRect">
             <a:avLst>
@@ -17212,8 +17218,8 @@
         </p:nvSpPr>
         <p:spPr>
           <a:xfrm>
-            <a:off x="10018776" y="3322015"/>
-            <a:ext cx="816864" cy="146304"/>
+            <a:off x="10018776" y="3328416"/>
+            <a:ext cx="862584" cy="146304"/>
           </a:xfrm>
           <a:prstGeom prst="rect">
             <a:avLst/>
@@ -17253,8 +17259,8 @@
         </p:nvSpPr>
         <p:spPr>
           <a:xfrm>
-            <a:off x="7854696" y="3742639"/>
-            <a:ext cx="3035808" cy="158191"/>
+            <a:off x="7763256" y="3749040"/>
+            <a:ext cx="3172968" cy="356616"/>
           </a:xfrm>
           <a:prstGeom prst="rect">
             <a:avLst/>
@@ -17272,7 +17278,7 @@
               <a:buNone/>
             </a:pPr>
             <a:r>
-              <a:rPr lang="en-US" sz="1120" dirty="0">
+              <a:rPr lang="en-US" sz="1040" dirty="0">
                 <a:solidFill>
                   <a:srgbClr val="17364A"/>
                 </a:solidFill>
@@ -17280,9 +17286,9 @@
                 <a:ea typeface="Aptos" pitchFamily="34" charset="-122"/>
                 <a:cs typeface="Aptos" pitchFamily="34" charset="-120"/>
               </a:rPr>
-              <a:t>AI can support work, but public health judgment remains responsible for interpretation and final use.</a:t>
-            </a:r>
-            <a:endParaRPr lang="en-US" sz="1120" dirty="0"/>
+              <a:t>AI can support work, but public health judgment remains responsible.</a:t>
+            </a:r>
+            <a:endParaRPr lang="en-US" sz="1040" dirty="0"/>
           </a:p>
         </p:txBody>
       </p:sp>
@@ -17294,12 +17300,12 @@
         </p:nvSpPr>
         <p:spPr>
           <a:xfrm>
-            <a:off x="7635240" y="4184294"/>
-            <a:ext cx="3474720" cy="1466698"/>
+            <a:off x="7543800" y="4389120"/>
+            <a:ext cx="3611880" cy="1261872"/>
           </a:xfrm>
           <a:prstGeom prst="roundRect">
             <a:avLst>
-              <a:gd name="adj" fmla="val 7481"/>
+              <a:gd name="adj" fmla="val 8696"/>
             </a:avLst>
           </a:prstGeom>
           <a:solidFill>
@@ -17321,8 +17327,8 @@
         </p:nvSpPr>
         <p:spPr>
           <a:xfrm>
-            <a:off x="7799832" y="4330598"/>
-            <a:ext cx="3145536" cy="256032"/>
+            <a:off x="7708392" y="4517136"/>
+            <a:ext cx="3282696" cy="228600"/>
           </a:xfrm>
           <a:prstGeom prst="rect">
             <a:avLst/>
@@ -17338,7 +17344,7 @@
               <a:buNone/>
             </a:pPr>
             <a:r>
-              <a:rPr lang="en-US" sz="1300" b="1" dirty="0">
+              <a:rPr lang="en-US" sz="1220" b="1" dirty="0">
                 <a:solidFill>
                   <a:srgbClr val="0068B7"/>
                 </a:solidFill>
@@ -17348,7 +17354,7 @@
               </a:rPr>
               <a:t>What to produce</a:t>
             </a:r>
-            <a:endParaRPr lang="en-US" sz="1300" dirty="0"/>
+            <a:endParaRPr lang="en-US" sz="1220" dirty="0"/>
           </a:p>
         </p:txBody>
       </p:sp>
@@ -17360,8 +17366,8 @@
         </p:nvSpPr>
         <p:spPr>
           <a:xfrm>
-            <a:off x="7799832" y="4659782"/>
-            <a:ext cx="3145536" cy="899770"/>
+            <a:off x="7708392" y="4828032"/>
+            <a:ext cx="3282696" cy="749808"/>
           </a:xfrm>
           <a:prstGeom prst="rect">
             <a:avLst/>
@@ -17379,7 +17385,7 @@
               <a:buNone/>
             </a:pPr>
             <a:r>
-              <a:rPr lang="en-US" sz="1320" dirty="0">
+              <a:rPr lang="en-US" sz="1220" dirty="0">
                 <a:solidFill>
                   <a:srgbClr val="17364A"/>
                 </a:solidFill>
@@ -17387,9 +17393,9 @@
                 <a:ea typeface="Aptos" pitchFamily="34" charset="-122"/>
                 <a:cs typeface="Aptos" pitchFamily="34" charset="-120"/>
               </a:rPr>
-              <a:t>Use the assignment to test whether you can explain the concept, apply it to a realistic public health situation, and identify what would need review before the work moves forward.</a:t>
-            </a:r>
-            <a:endParaRPr lang="en-US" sz="1320" dirty="0"/>
+              <a:t>Use the assignment to test whether you can explain the concept, apply it to a.</a:t>
+            </a:r>
+            <a:endParaRPr lang="en-US" sz="1220" dirty="0"/>
           </a:p>
         </p:txBody>
       </p:sp>
@@ -17680,8 +17686,8 @@
         </p:nvSpPr>
         <p:spPr>
           <a:xfrm>
-            <a:off x="868680" y="1508760"/>
-            <a:ext cx="6309360" cy="4160520"/>
+            <a:off x="822960" y="1463040"/>
+            <a:ext cx="6565392" cy="4343400"/>
           </a:xfrm>
           <a:prstGeom prst="rect">
             <a:avLst/>
@@ -17699,7 +17705,7 @@
               <a:buNone/>
             </a:pPr>
             <a:r>
-              <a:rPr lang="en-US" sz="2100" dirty="0">
+              <a:rPr lang="en-US" sz="1920" dirty="0">
                 <a:solidFill>
                   <a:srgbClr val="003A63"/>
                 </a:solidFill>
@@ -17707,16 +17713,16 @@
                 <a:ea typeface="Aptos" pitchFamily="34" charset="-122"/>
                 <a:cs typeface="Aptos" pitchFamily="34" charset="-120"/>
               </a:rPr>
-              <a:t>• A state health department may create an internal RAG assistant to help staff find current.</a:t>
-            </a:r>
-            <a:endParaRPr lang="en-US" sz="2100" dirty="0"/>
-          </a:p>
-          <a:p>
-            <a:pPr indent="0" marL="0">
-              <a:buNone/>
-            </a:pPr>
-            <a:r>
-              <a:rPr lang="en-US" sz="2100" dirty="0">
+              <a:t>• A state health department may create an internal RAG assistant to help staff.</a:t>
+            </a:r>
+            <a:endParaRPr lang="en-US" sz="1920" dirty="0"/>
+          </a:p>
+          <a:p>
+            <a:pPr indent="0" marL="0">
+              <a:buNone/>
+            </a:pPr>
+            <a:r>
+              <a:rPr lang="en-US" sz="1920" dirty="0">
                 <a:solidFill>
                   <a:srgbClr val="003A63"/>
                 </a:solidFill>
@@ -17724,16 +17730,16 @@
                 <a:ea typeface="Aptos" pitchFamily="34" charset="-122"/>
                 <a:cs typeface="Aptos" pitchFamily="34" charset="-120"/>
               </a:rPr>
-              <a:t>• The assistant could search approved protocols, case definitions, reporting rules, and.</a:t>
-            </a:r>
-            <a:endParaRPr lang="en-US" sz="2100" dirty="0"/>
-          </a:p>
-          <a:p>
-            <a:pPr indent="0" marL="0">
-              <a:buNone/>
-            </a:pPr>
-            <a:r>
-              <a:rPr lang="en-US" sz="2100" dirty="0">
+              <a:t>• The assistant could search approved protocols, case definitions, reporting.</a:t>
+            </a:r>
+            <a:endParaRPr lang="en-US" sz="1920" dirty="0"/>
+          </a:p>
+          <a:p>
+            <a:pPr indent="0" marL="0">
+              <a:buNone/>
+            </a:pPr>
+            <a:r>
+              <a:rPr lang="en-US" sz="1920" dirty="0">
                 <a:solidFill>
                   <a:srgbClr val="003A63"/>
                 </a:solidFill>
@@ -17741,9 +17747,9 @@
                 <a:ea typeface="Aptos" pitchFamily="34" charset="-122"/>
                 <a:cs typeface="Aptos" pitchFamily="34" charset="-120"/>
               </a:rPr>
-              <a:t>• When a user asks what steps to take for a suspected condition, the system could summarize.</a:t>
-            </a:r>
-            <a:endParaRPr lang="en-US" sz="2100" dirty="0"/>
+              <a:t>• When a user asks what steps to take for a suspected condition, the system.</a:t>
+            </a:r>
+            <a:endParaRPr lang="en-US" sz="1920" dirty="0"/>
           </a:p>
         </p:txBody>
       </p:sp>
@@ -17755,12 +17761,12 @@
         </p:nvSpPr>
         <p:spPr>
           <a:xfrm>
-            <a:off x="7635240" y="1325880"/>
-            <a:ext cx="3474720" cy="1255471"/>
+            <a:off x="7543800" y="1325880"/>
+            <a:ext cx="3611880" cy="1261872"/>
           </a:xfrm>
           <a:prstGeom prst="roundRect">
             <a:avLst>
-              <a:gd name="adj" fmla="val 8740"/>
+              <a:gd name="adj" fmla="val 8696"/>
             </a:avLst>
           </a:prstGeom>
           <a:solidFill>
@@ -17782,8 +17788,8 @@
         </p:nvSpPr>
         <p:spPr>
           <a:xfrm>
-            <a:off x="7799832" y="1472184"/>
-            <a:ext cx="3145536" cy="256032"/>
+            <a:off x="7708392" y="1453896"/>
+            <a:ext cx="3282696" cy="228600"/>
           </a:xfrm>
           <a:prstGeom prst="rect">
             <a:avLst/>
@@ -17799,7 +17805,7 @@
               <a:buNone/>
             </a:pPr>
             <a:r>
-              <a:rPr lang="en-US" sz="1300" b="1" dirty="0">
+              <a:rPr lang="en-US" sz="1220" b="1" dirty="0">
                 <a:solidFill>
                   <a:srgbClr val="0068B7"/>
                 </a:solidFill>
@@ -17809,7 +17815,7 @@
               </a:rPr>
               <a:t>Practice focus</a:t>
             </a:r>
-            <a:endParaRPr lang="en-US" sz="1300" dirty="0"/>
+            <a:endParaRPr lang="en-US" sz="1220" dirty="0"/>
           </a:p>
         </p:txBody>
       </p:sp>
@@ -17821,8 +17827,8 @@
         </p:nvSpPr>
         <p:spPr>
           <a:xfrm>
-            <a:off x="7799832" y="1801368"/>
-            <a:ext cx="3145536" cy="688543"/>
+            <a:off x="7708392" y="1764792"/>
+            <a:ext cx="3282696" cy="749808"/>
           </a:xfrm>
           <a:prstGeom prst="rect">
             <a:avLst/>
@@ -17840,7 +17846,7 @@
               <a:buNone/>
             </a:pPr>
             <a:r>
-              <a:rPr lang="en-US" sz="1320" dirty="0">
+              <a:rPr lang="en-US" sz="1220" dirty="0">
                 <a:solidFill>
                   <a:srgbClr val="17364A"/>
                 </a:solidFill>
@@ -17848,9 +17854,9 @@
                 <a:ea typeface="Aptos" pitchFamily="34" charset="-122"/>
                 <a:cs typeface="Aptos" pitchFamily="34" charset="-120"/>
               </a:rPr>
-              <a:t>A state health department may create an internal RAG assistant to help staff find current infectious.</a:t>
-            </a:r>
-            <a:endParaRPr lang="en-US" sz="1320" dirty="0"/>
+              <a:t>A state health department may create an internal RAG assistant to help staff.</a:t>
+            </a:r>
+            <a:endParaRPr lang="en-US" sz="1220" dirty="0"/>
           </a:p>
         </p:txBody>
       </p:sp>
@@ -17862,12 +17868,12 @@
         </p:nvSpPr>
         <p:spPr>
           <a:xfrm>
-            <a:off x="7635240" y="2718511"/>
-            <a:ext cx="3474720" cy="1328623"/>
+            <a:off x="7543800" y="2724912"/>
+            <a:ext cx="3611880" cy="1527048"/>
           </a:xfrm>
           <a:prstGeom prst="roundRect">
             <a:avLst>
-              <a:gd name="adj" fmla="val 8259"/>
+              <a:gd name="adj" fmla="val 7186"/>
             </a:avLst>
           </a:prstGeom>
           <a:solidFill>
@@ -17889,8 +17895,8 @@
         </p:nvSpPr>
         <p:spPr>
           <a:xfrm>
-            <a:off x="7799832" y="2864815"/>
-            <a:ext cx="3145536" cy="256032"/>
+            <a:off x="7708392" y="2852928"/>
+            <a:ext cx="3282696" cy="228600"/>
           </a:xfrm>
           <a:prstGeom prst="rect">
             <a:avLst/>
@@ -17906,7 +17912,7 @@
               <a:buNone/>
             </a:pPr>
             <a:r>
-              <a:rPr lang="en-US" sz="1300" b="1" dirty="0">
+              <a:rPr lang="en-US" sz="1220" b="1" dirty="0">
                 <a:solidFill>
                   <a:srgbClr val="0068B7"/>
                 </a:solidFill>
@@ -17916,7 +17922,7 @@
               </a:rPr>
               <a:t>Concept checkpoints</a:t>
             </a:r>
-            <a:endParaRPr lang="en-US" sz="1300" dirty="0"/>
+            <a:endParaRPr lang="en-US" sz="1220" dirty="0"/>
           </a:p>
         </p:txBody>
       </p:sp>
@@ -17928,8 +17934,8 @@
         </p:nvSpPr>
         <p:spPr>
           <a:xfrm>
-            <a:off x="7818120" y="3230575"/>
-            <a:ext cx="3090672" cy="670255"/>
+            <a:off x="7726680" y="3182112"/>
+            <a:ext cx="3227832" cy="960120"/>
           </a:xfrm>
           <a:prstGeom prst="rect">
             <a:avLst/>
@@ -17947,7 +17953,7 @@
               <a:buNone/>
             </a:pPr>
             <a:r>
-              <a:rPr lang="en-US" sz="1220" dirty="0">
+              <a:rPr lang="en-US" sz="1140" dirty="0">
                 <a:solidFill>
                   <a:srgbClr val="17364A"/>
                 </a:solidFill>
@@ -17955,16 +17961,16 @@
                 <a:ea typeface="Aptos" pitchFamily="34" charset="-122"/>
                 <a:cs typeface="Aptos" pitchFamily="34" charset="-120"/>
               </a:rPr>
-              <a:t>A state health department may create an internal RAG assistant to.</a:t>
-            </a:r>
-            <a:endParaRPr lang="en-US" sz="1220" dirty="0"/>
-          </a:p>
-          <a:p>
-            <a:pPr indent="0" marL="0">
-              <a:buNone/>
-            </a:pPr>
-            <a:r>
-              <a:rPr lang="en-US" sz="1220" dirty="0">
+              <a:t>A state health department may create an internal.</a:t>
+            </a:r>
+            <a:endParaRPr lang="en-US" sz="1140" dirty="0"/>
+          </a:p>
+          <a:p>
+            <a:pPr indent="0" marL="0">
+              <a:buNone/>
+            </a:pPr>
+            <a:r>
+              <a:rPr lang="en-US" sz="1140" dirty="0">
                 <a:solidFill>
                   <a:srgbClr val="17364A"/>
                 </a:solidFill>
@@ -17972,16 +17978,16 @@
                 <a:ea typeface="Aptos" pitchFamily="34" charset="-122"/>
                 <a:cs typeface="Aptos" pitchFamily="34" charset="-120"/>
               </a:rPr>
-              <a:t>The assistant could search approved protocols, case definitions,.</a:t>
-            </a:r>
-            <a:endParaRPr lang="en-US" sz="1220" dirty="0"/>
-          </a:p>
-          <a:p>
-            <a:pPr indent="0" marL="0">
-              <a:buNone/>
-            </a:pPr>
-            <a:r>
-              <a:rPr lang="en-US" sz="1220" dirty="0">
+              <a:t>The assistant could search approved protocols,.</a:t>
+            </a:r>
+            <a:endParaRPr lang="en-US" sz="1140" dirty="0"/>
+          </a:p>
+          <a:p>
+            <a:pPr indent="0" marL="0">
+              <a:buNone/>
+            </a:pPr>
+            <a:r>
+              <a:rPr lang="en-US" sz="1140" dirty="0">
                 <a:solidFill>
                   <a:srgbClr val="17364A"/>
                 </a:solidFill>
@@ -17989,9 +17995,9 @@
                 <a:ea typeface="Aptos" pitchFamily="34" charset="-122"/>
                 <a:cs typeface="Aptos" pitchFamily="34" charset="-120"/>
               </a:rPr>
-              <a:t>When a user asks what steps to take for a suspected condition, the.</a:t>
-            </a:r>
-            <a:endParaRPr lang="en-US" sz="1220" dirty="0"/>
+              <a:t>When a user asks what steps to take for a.</a:t>
+            </a:r>
+            <a:endParaRPr lang="en-US" sz="1140" dirty="0"/>
           </a:p>
         </p:txBody>
       </p:sp>
@@ -18003,12 +18009,12 @@
         </p:nvSpPr>
         <p:spPr>
           <a:xfrm>
-            <a:off x="7635240" y="4184294"/>
-            <a:ext cx="3474720" cy="1466698"/>
+            <a:off x="7543800" y="4389120"/>
+            <a:ext cx="3611880" cy="1261872"/>
           </a:xfrm>
           <a:prstGeom prst="roundRect">
             <a:avLst>
-              <a:gd name="adj" fmla="val 7481"/>
+              <a:gd name="adj" fmla="val 8696"/>
             </a:avLst>
           </a:prstGeom>
           <a:solidFill>
@@ -18030,8 +18036,8 @@
         </p:nvSpPr>
         <p:spPr>
           <a:xfrm>
-            <a:off x="7799832" y="4330598"/>
-            <a:ext cx="3145536" cy="256032"/>
+            <a:off x="7708392" y="4517136"/>
+            <a:ext cx="3282696" cy="228600"/>
           </a:xfrm>
           <a:prstGeom prst="rect">
             <a:avLst/>
@@ -18047,7 +18053,7 @@
               <a:buNone/>
             </a:pPr>
             <a:r>
-              <a:rPr lang="en-US" sz="1300" b="1" dirty="0">
+              <a:rPr lang="en-US" sz="1220" b="1" dirty="0">
                 <a:solidFill>
                   <a:srgbClr val="0068B7"/>
                 </a:solidFill>
@@ -18057,7 +18063,7 @@
               </a:rPr>
               <a:t>What to produce</a:t>
             </a:r>
-            <a:endParaRPr lang="en-US" sz="1300" dirty="0"/>
+            <a:endParaRPr lang="en-US" sz="1220" dirty="0"/>
           </a:p>
         </p:txBody>
       </p:sp>
@@ -18069,8 +18075,8 @@
         </p:nvSpPr>
         <p:spPr>
           <a:xfrm>
-            <a:off x="7799832" y="4659782"/>
-            <a:ext cx="3145536" cy="899770"/>
+            <a:off x="7708392" y="4828032"/>
+            <a:ext cx="3282696" cy="749808"/>
           </a:xfrm>
           <a:prstGeom prst="rect">
             <a:avLst/>
@@ -18088,7 +18094,7 @@
               <a:buNone/>
             </a:pPr>
             <a:r>
-              <a:rPr lang="en-US" sz="1320" dirty="0">
+              <a:rPr lang="en-US" sz="1220" dirty="0">
                 <a:solidFill>
                   <a:srgbClr val="17364A"/>
                 </a:solidFill>
@@ -18096,9 +18102,9 @@
                 <a:ea typeface="Aptos" pitchFamily="34" charset="-122"/>
                 <a:cs typeface="Aptos" pitchFamily="34" charset="-120"/>
               </a:rPr>
-              <a:t>Use the assignment to test whether you can explain the concept, apply it to a realistic public health situation, and identify what would need review before the work moves forward.</a:t>
-            </a:r>
-            <a:endParaRPr lang="en-US" sz="1320" dirty="0"/>
+              <a:t>Use the assignment to test whether you can explain the concept, apply it to a.</a:t>
+            </a:r>
+            <a:endParaRPr lang="en-US" sz="1220" dirty="0"/>
           </a:p>
         </p:txBody>
       </p:sp>

--- a/downloads/presentations/modules/arc-300.pptx
+++ b/downloads/presentations/modules/arc-300.pptx
@@ -11870,7 +11870,7 @@
                 <a:ea typeface="Aptos" pitchFamily="34" charset="-122"/>
                 <a:cs typeface="Aptos" pitchFamily="34" charset="-120"/>
               </a:rPr>
-              <a:t>• 1. What is RAG?</a:t>
+              <a:t>1. What is RAG?</a:t>
             </a:r>
             <a:endParaRPr lang="en-US" sz="1920" dirty="0"/>
           </a:p>
@@ -11887,7 +11887,7 @@
                 <a:ea typeface="Aptos" pitchFamily="34" charset="-122"/>
                 <a:cs typeface="Aptos" pitchFamily="34" charset="-120"/>
               </a:rPr>
-              <a:t>• 2. Why does chunking matter?</a:t>
+              <a:t>2. Why does chunking matter?</a:t>
             </a:r>
             <a:endParaRPr lang="en-US" sz="1920" dirty="0"/>
           </a:p>
@@ -11904,7 +11904,7 @@
                 <a:ea typeface="Aptos" pitchFamily="34" charset="-122"/>
                 <a:cs typeface="Aptos" pitchFamily="34" charset="-120"/>
               </a:rPr>
-              <a:t>• 3. What is a major RAG governance risk?</a:t>
+              <a:t>3. What is a major RAG governance risk?</a:t>
             </a:r>
             <a:endParaRPr lang="en-US" sz="1920" dirty="0"/>
           </a:p>
@@ -12011,7 +12011,7 @@
                 <a:ea typeface="Aptos" pitchFamily="34" charset="-122"/>
                 <a:cs typeface="Aptos" pitchFamily="34" charset="-120"/>
               </a:rPr>
-              <a:t>1. What is RAG?</a:t>
+              <a:t>What is RAG?</a:t>
             </a:r>
             <a:endParaRPr lang="en-US" sz="1220" dirty="0"/>
           </a:p>
@@ -12118,41 +12118,7 @@
                 <a:ea typeface="Aptos" pitchFamily="34" charset="-122"/>
                 <a:cs typeface="Aptos" pitchFamily="34" charset="-120"/>
               </a:rPr>
-              <a:t>1.</a:t>
-            </a:r>
-            <a:endParaRPr lang="en-US" sz="1140" dirty="0"/>
-          </a:p>
-          <a:p>
-            <a:pPr indent="0" marL="0">
-              <a:buNone/>
-            </a:pPr>
-            <a:r>
-              <a:rPr lang="en-US" sz="1140" dirty="0">
-                <a:solidFill>
-                  <a:srgbClr val="17364A"/>
-                </a:solidFill>
-                <a:latin typeface="Aptos" pitchFamily="34" charset="0"/>
-                <a:ea typeface="Aptos" pitchFamily="34" charset="-122"/>
-                <a:cs typeface="Aptos" pitchFamily="34" charset="-120"/>
-              </a:rPr>
               <a:t>What is RAG?</a:t>
-            </a:r>
-            <a:endParaRPr lang="en-US" sz="1140" dirty="0"/>
-          </a:p>
-          <a:p>
-            <a:pPr indent="0" marL="0">
-              <a:buNone/>
-            </a:pPr>
-            <a:r>
-              <a:rPr lang="en-US" sz="1140" dirty="0">
-                <a:solidFill>
-                  <a:srgbClr val="17364A"/>
-                </a:solidFill>
-                <a:latin typeface="Aptos" pitchFamily="34" charset="0"/>
-                <a:ea typeface="Aptos" pitchFamily="34" charset="-122"/>
-                <a:cs typeface="Aptos" pitchFamily="34" charset="-120"/>
-              </a:rPr>
-              <a:t>2.</a:t>
             </a:r>
             <a:endParaRPr lang="en-US" sz="1140" dirty="0"/>
           </a:p>
